--- a/presentation/SLSTP_2026_Generative_Transcriptomics.pptx
+++ b/presentation/SLSTP_2026_Generative_Transcriptomics.pptx
@@ -22149,7 +22149,7 @@
                 </a:solidFill>
                 <a:latin typeface="Arial"/>
               </a:rPr>
-              <a:t>Can generated RNA-seq improve tissue-specific FLT vs GC analysis?</a:t>
+              <a:t>Can generated RNA-seq improve FLT vs GC analysis within each tissue?</a:t>
             </a:r>
           </a:p>
           <a:p>
@@ -23148,7 +23148,7 @@
                 </a:solidFill>
                 <a:latin typeface="Arial"/>
               </a:rPr>
-              <a:t>Kidney adds a focused signal; other tissues remain exploratory</a:t>
+              <a:t>Kidney adds a focused signal; other tissues are exploratory</a:t>
             </a:r>
           </a:p>
         </p:txBody>
@@ -28844,7 +28844,7 @@
                 </a:solidFill>
                 <a:latin typeface="Arial"/>
               </a:rPr>
-              <a:t>DDIM matched expression and was harder to distinguish from real data</a:t>
+              <a:t>DDIM matched expression and reduced separability</a:t>
             </a:r>
           </a:p>
         </p:txBody>
@@ -33160,102 +33160,25 @@
       </p:sp>
       <p:sp>
         <p:nvSpPr>
-          <p:cNvPr id="14" name="TextBox 13"/>
-          <p:cNvSpPr txBox="1"/>
-          <p:nvPr/>
-        </p:nvSpPr>
-        <p:spPr>
-          <a:xfrm>
-            <a:off x="3401568" y="4005072"/>
-            <a:ext cx="1335024" cy="274320"/>
-          </a:xfrm>
-          <a:prstGeom prst="rect">
-            <a:avLst/>
-          </a:prstGeom>
-          <a:noFill/>
-        </p:spPr>
-        <p:txBody>
-          <a:bodyPr wrap="square" lIns="18288" rIns="18288" tIns="18288" bIns="18288" anchor="t">
-            <a:spAutoFit/>
-          </a:bodyPr>
-          <a:lstStyle/>
-          <a:p>
-            <a:pPr algn="ctr">
-              <a:spcAft>
-                <a:spcPts val="0"/>
-              </a:spcAft>
-            </a:pPr>
-            <a:r>
-              <a:rPr sz="1500" b="1" i="0">
-                <a:solidFill>
-                  <a:srgbClr val="178681"/>
-                </a:solidFill>
-                <a:latin typeface="Arial"/>
-              </a:rPr>
-              <a:t>26 promoted</a:t>
-            </a:r>
-          </a:p>
-        </p:txBody>
-      </p:sp>
-      <p:sp>
-        <p:nvSpPr>
-          <p:cNvPr id="15" name="TextBox 14"/>
-          <p:cNvSpPr txBox="1"/>
-          <p:nvPr/>
-        </p:nvSpPr>
-        <p:spPr>
-          <a:xfrm>
-            <a:off x="3310128" y="4334256"/>
-            <a:ext cx="1517904" cy="457200"/>
-          </a:xfrm>
-          <a:prstGeom prst="rect">
-            <a:avLst/>
-          </a:prstGeom>
-          <a:noFill/>
-        </p:spPr>
-        <p:txBody>
-          <a:bodyPr wrap="square" lIns="18288" rIns="18288" tIns="18288" bIns="18288" anchor="t">
-            <a:spAutoFit/>
-          </a:bodyPr>
-          <a:lstStyle/>
-          <a:p>
-            <a:pPr algn="ctr">
-              <a:spcAft>
-                <a:spcPts val="0"/>
-              </a:spcAft>
-            </a:pPr>
-            <a:r>
-              <a:rPr sz="1150" b="0" i="0">
-                <a:solidFill>
-                  <a:srgbClr val="59697A"/>
-                </a:solidFill>
-                <a:latin typeface="Arial"/>
-              </a:rPr>
-              <a:t>selected only with
-synthetic guidance</a:t>
-            </a:r>
-          </a:p>
-        </p:txBody>
-      </p:sp>
-      <p:sp>
-        <p:nvSpPr>
-          <p:cNvPr id="16" name="Right Arrow 15"/>
+          <p:cNvPr id="14" name="Rounded Rectangle 13"/>
           <p:cNvSpPr/>
           <p:nvPr/>
         </p:nvSpPr>
         <p:spPr>
           <a:xfrm>
-            <a:off x="5285232" y="3017520"/>
-            <a:ext cx="594360" cy="438912"/>
-          </a:xfrm>
-          <a:prstGeom prst="rightArrow">
+            <a:off x="3218688" y="4535424"/>
+            <a:ext cx="1700784" cy="713232"/>
+          </a:xfrm>
+          <a:prstGeom prst="roundRect">
             <a:avLst/>
           </a:prstGeom>
           <a:solidFill>
-            <a:srgbClr val="178681"/>
+            <a:srgbClr val="E8F3F1"/>
           </a:solidFill>
-          <a:ln>
-            <a:noFill/>
+          <a:ln w="10160">
+            <a:solidFill>
+              <a:srgbClr val="178681"/>
+            </a:solidFill>
           </a:ln>
         </p:spPr>
         <p:style>
@@ -33282,25 +33205,102 @@
       </p:sp>
       <p:sp>
         <p:nvSpPr>
-          <p:cNvPr id="17" name="Rounded Rectangle 16"/>
+          <p:cNvPr id="15" name="TextBox 14"/>
+          <p:cNvSpPr txBox="1"/>
+          <p:nvPr/>
+        </p:nvSpPr>
+        <p:spPr>
+          <a:xfrm>
+            <a:off x="3346704" y="4626864"/>
+            <a:ext cx="1444752" cy="219456"/>
+          </a:xfrm>
+          <a:prstGeom prst="rect">
+            <a:avLst/>
+          </a:prstGeom>
+          <a:noFill/>
+        </p:spPr>
+        <p:txBody>
+          <a:bodyPr wrap="square" lIns="18288" rIns="18288" tIns="18288" bIns="18288" anchor="t">
+            <a:spAutoFit/>
+          </a:bodyPr>
+          <a:lstStyle/>
+          <a:p>
+            <a:pPr algn="ctr">
+              <a:spcAft>
+                <a:spcPts val="0"/>
+              </a:spcAft>
+            </a:pPr>
+            <a:r>
+              <a:rPr sz="1350" b="1" i="0">
+                <a:solidFill>
+                  <a:srgbClr val="178681"/>
+                </a:solidFill>
+                <a:latin typeface="Arial"/>
+              </a:rPr>
+              <a:t>26 promoted</a:t>
+            </a:r>
+          </a:p>
+        </p:txBody>
+      </p:sp>
+      <p:sp>
+        <p:nvSpPr>
+          <p:cNvPr id="16" name="TextBox 15"/>
+          <p:cNvSpPr txBox="1"/>
+          <p:nvPr/>
+        </p:nvSpPr>
+        <p:spPr>
+          <a:xfrm>
+            <a:off x="3364992" y="4882896"/>
+            <a:ext cx="1408176" cy="292608"/>
+          </a:xfrm>
+          <a:prstGeom prst="rect">
+            <a:avLst/>
+          </a:prstGeom>
+          <a:noFill/>
+        </p:spPr>
+        <p:txBody>
+          <a:bodyPr wrap="square" lIns="18288" rIns="18288" tIns="18288" bIns="18288" anchor="t">
+            <a:spAutoFit/>
+          </a:bodyPr>
+          <a:lstStyle/>
+          <a:p>
+            <a:pPr algn="ctr">
+              <a:spcAft>
+                <a:spcPts val="0"/>
+              </a:spcAft>
+            </a:pPr>
+            <a:r>
+              <a:rPr sz="950" b="0" i="0">
+                <a:solidFill>
+                  <a:srgbClr val="59697A"/>
+                </a:solidFill>
+                <a:latin typeface="Arial"/>
+              </a:rPr>
+              <a:t>selected only with
+synthetic guidance</a:t>
+            </a:r>
+          </a:p>
+        </p:txBody>
+      </p:sp>
+      <p:sp>
+        <p:nvSpPr>
+          <p:cNvPr id="17" name="Right Arrow 16"/>
           <p:cNvSpPr/>
           <p:nvPr/>
         </p:nvSpPr>
         <p:spPr>
           <a:xfrm>
-            <a:off x="6108192" y="2039112"/>
-            <a:ext cx="5468112" cy="3355848"/>
-          </a:xfrm>
-          <a:prstGeom prst="roundRect">
+            <a:off x="5285232" y="3017520"/>
+            <a:ext cx="594360" cy="438912"/>
+          </a:xfrm>
+          <a:prstGeom prst="rightArrow">
             <a:avLst/>
           </a:prstGeom>
           <a:solidFill>
-            <a:srgbClr val="E9F1F7"/>
+            <a:srgbClr val="178681"/>
           </a:solidFill>
-          <a:ln w="10160">
-            <a:solidFill>
-              <a:srgbClr val="2D6496"/>
-            </a:solidFill>
+          <a:ln>
+            <a:noFill/>
           </a:ln>
         </p:spPr>
         <p:style>
@@ -33327,62 +33327,25 @@
       </p:sp>
       <p:sp>
         <p:nvSpPr>
-          <p:cNvPr id="18" name="TextBox 17"/>
-          <p:cNvSpPr txBox="1"/>
-          <p:nvPr/>
-        </p:nvSpPr>
-        <p:spPr>
-          <a:xfrm>
-            <a:off x="6419088" y="2304288"/>
-            <a:ext cx="4846320" cy="365760"/>
-          </a:xfrm>
-          <a:prstGeom prst="rect">
-            <a:avLst/>
-          </a:prstGeom>
-          <a:noFill/>
-        </p:spPr>
-        <p:txBody>
-          <a:bodyPr wrap="square" lIns="18288" rIns="18288" tIns="18288" bIns="18288" anchor="t">
-            <a:spAutoFit/>
-          </a:bodyPr>
-          <a:lstStyle/>
-          <a:p>
-            <a:pPr algn="ctr">
-              <a:spcAft>
-                <a:spcPts val="0"/>
-              </a:spcAft>
-            </a:pPr>
-            <a:r>
-              <a:rPr sz="2000" b="1" i="0">
-                <a:solidFill>
-                  <a:srgbClr val="2D6496"/>
-                </a:solidFill>
-                <a:latin typeface="Arial"/>
-              </a:rPr>
-              <a:t>Real OSDR association test</a:t>
-            </a:r>
-          </a:p>
-        </p:txBody>
-      </p:sp>
-      <p:sp>
-        <p:nvSpPr>
-          <p:cNvPr id="19" name="Oval 18"/>
+          <p:cNvPr id="18" name="Rounded Rectangle 17"/>
           <p:cNvSpPr/>
           <p:nvPr/>
         </p:nvSpPr>
         <p:spPr>
           <a:xfrm>
-            <a:off x="6601968" y="3017520"/>
-            <a:ext cx="91440" cy="91440"/>
-          </a:xfrm>
-          <a:prstGeom prst="ellipse">
+            <a:off x="6108192" y="2039112"/>
+            <a:ext cx="5468112" cy="3355848"/>
+          </a:xfrm>
+          <a:prstGeom prst="roundRect">
             <a:avLst/>
           </a:prstGeom>
           <a:solidFill>
-            <a:srgbClr val="2D6496"/>
+            <a:srgbClr val="E9F1F7"/>
           </a:solidFill>
-          <a:ln>
-            <a:noFill/>
+          <a:ln w="10160">
+            <a:solidFill>
+              <a:srgbClr val="2D6496"/>
+            </a:solidFill>
           </a:ln>
         </p:spPr>
         <p:style>
@@ -33409,14 +33372,14 @@
       </p:sp>
       <p:sp>
         <p:nvSpPr>
-          <p:cNvPr id="20" name="TextBox 19"/>
+          <p:cNvPr id="19" name="TextBox 18"/>
           <p:cNvSpPr txBox="1"/>
           <p:nvPr/>
         </p:nvSpPr>
         <p:spPr>
           <a:xfrm>
-            <a:off x="6766559" y="2907792"/>
-            <a:ext cx="4361688" cy="530352"/>
+            <a:off x="6419088" y="2304288"/>
+            <a:ext cx="4846320" cy="365760"/>
           </a:xfrm>
           <a:prstGeom prst="rect">
             <a:avLst/>
@@ -33424,37 +33387,37 @@
           <a:noFill/>
         </p:spPr>
         <p:txBody>
-          <a:bodyPr wrap="square" lIns="18288" rIns="18288" tIns="18288" bIns="18288" anchor="ctr">
+          <a:bodyPr wrap="square" lIns="18288" rIns="18288" tIns="18288" bIns="18288" anchor="t">
             <a:spAutoFit/>
           </a:bodyPr>
           <a:lstStyle/>
           <a:p>
-            <a:pPr algn="l">
+            <a:pPr algn="ctr">
               <a:spcAft>
                 <a:spcPts val="0"/>
               </a:spcAft>
             </a:pPr>
             <a:r>
-              <a:rPr sz="1500" b="0" i="0">
-                <a:solidFill>
-                  <a:srgbClr val="263746"/>
+              <a:rPr sz="2000" b="1" i="0">
+                <a:solidFill>
+                  <a:srgbClr val="2D6496"/>
                 </a:solidFill>
                 <a:latin typeface="Arial"/>
               </a:rPr>
-              <a:t>Estimate FLT vs GC inside each accession</a:t>
-            </a:r>
-          </a:p>
-        </p:txBody>
-      </p:sp>
-      <p:sp>
-        <p:nvSpPr>
-          <p:cNvPr id="21" name="Oval 20"/>
+              <a:t>Real OSDR association test</a:t>
+            </a:r>
+          </a:p>
+        </p:txBody>
+      </p:sp>
+      <p:sp>
+        <p:nvSpPr>
+          <p:cNvPr id="20" name="Oval 19"/>
           <p:cNvSpPr/>
           <p:nvPr/>
         </p:nvSpPr>
         <p:spPr>
           <a:xfrm>
-            <a:off x="6601968" y="3547872"/>
+            <a:off x="6601968" y="3017520"/>
             <a:ext cx="91440" cy="91440"/>
           </a:xfrm>
           <a:prstGeom prst="ellipse">
@@ -33491,13 +33454,13 @@
       </p:sp>
       <p:sp>
         <p:nvSpPr>
-          <p:cNvPr id="22" name="TextBox 21"/>
+          <p:cNvPr id="21" name="TextBox 20"/>
           <p:cNvSpPr txBox="1"/>
           <p:nvPr/>
         </p:nvSpPr>
         <p:spPr>
           <a:xfrm>
-            <a:off x="6766559" y="3438144"/>
+            <a:off x="6766559" y="2907792"/>
             <a:ext cx="4361688" cy="530352"/>
           </a:xfrm>
           <a:prstGeom prst="rect">
@@ -33523,20 +33486,20 @@
                 </a:solidFill>
                 <a:latin typeface="Arial"/>
               </a:rPr>
-              <a:t>Combine accession effects with a random-effects model</a:t>
-            </a:r>
-          </a:p>
-        </p:txBody>
-      </p:sp>
-      <p:sp>
-        <p:nvSpPr>
-          <p:cNvPr id="23" name="Oval 22"/>
+              <a:t>Estimate FLT vs GC inside each accession</a:t>
+            </a:r>
+          </a:p>
+        </p:txBody>
+      </p:sp>
+      <p:sp>
+        <p:nvSpPr>
+          <p:cNvPr id="22" name="Oval 21"/>
           <p:cNvSpPr/>
           <p:nvPr/>
         </p:nvSpPr>
         <p:spPr>
           <a:xfrm>
-            <a:off x="6601968" y="4078224"/>
+            <a:off x="6601968" y="3547872"/>
             <a:ext cx="91440" cy="91440"/>
           </a:xfrm>
           <a:prstGeom prst="ellipse">
@@ -33573,13 +33536,13 @@
       </p:sp>
       <p:sp>
         <p:nvSpPr>
-          <p:cNvPr id="24" name="TextBox 23"/>
+          <p:cNvPr id="23" name="TextBox 22"/>
           <p:cNvSpPr txBox="1"/>
           <p:nvPr/>
         </p:nvSpPr>
         <p:spPr>
           <a:xfrm>
-            <a:off x="6766559" y="3968496"/>
+            <a:off x="6766559" y="3438144"/>
             <a:ext cx="4361688" cy="530352"/>
           </a:xfrm>
           <a:prstGeom prst="rect">
@@ -33605,32 +33568,30 @@
                 </a:solidFill>
                 <a:latin typeface="Arial"/>
               </a:rPr>
-              <a:t>Apply BH FDR within each tissue</a:t>
-            </a:r>
-          </a:p>
-        </p:txBody>
-      </p:sp>
-      <p:sp>
-        <p:nvSpPr>
-          <p:cNvPr id="25" name="Rounded Rectangle 24"/>
+              <a:t>Combine accession effects with a random-effects model</a:t>
+            </a:r>
+          </a:p>
+        </p:txBody>
+      </p:sp>
+      <p:sp>
+        <p:nvSpPr>
+          <p:cNvPr id="24" name="Oval 23"/>
           <p:cNvSpPr/>
           <p:nvPr/>
         </p:nvSpPr>
         <p:spPr>
           <a:xfrm>
-            <a:off x="6547104" y="4681728"/>
-            <a:ext cx="4572000" cy="475488"/>
-          </a:xfrm>
-          <a:prstGeom prst="roundRect">
+            <a:off x="6601968" y="4078224"/>
+            <a:ext cx="91440" cy="91440"/>
+          </a:xfrm>
+          <a:prstGeom prst="ellipse">
             <a:avLst/>
           </a:prstGeom>
           <a:solidFill>
-            <a:srgbClr val="082B55"/>
+            <a:srgbClr val="2D6496"/>
           </a:solidFill>
-          <a:ln w="10160">
-            <a:solidFill>
-              <a:srgbClr val="082B55"/>
-            </a:solidFill>
+          <a:ln>
+            <a:noFill/>
           </a:ln>
         </p:spPr>
         <p:style>
@@ -33657,14 +33618,14 @@
       </p:sp>
       <p:sp>
         <p:nvSpPr>
-          <p:cNvPr id="26" name="TextBox 25"/>
+          <p:cNvPr id="25" name="TextBox 24"/>
           <p:cNvSpPr txBox="1"/>
           <p:nvPr/>
         </p:nvSpPr>
         <p:spPr>
           <a:xfrm>
-            <a:off x="6711696" y="4764024"/>
-            <a:ext cx="4251960" cy="265176"/>
+            <a:off x="6766559" y="3968496"/>
+            <a:ext cx="4361688" cy="530352"/>
           </a:xfrm>
           <a:prstGeom prst="rect">
             <a:avLst/>
@@ -33672,48 +33633,48 @@
           <a:noFill/>
         </p:spPr>
         <p:txBody>
-          <a:bodyPr wrap="square" lIns="18288" rIns="18288" tIns="18288" bIns="18288" anchor="t">
+          <a:bodyPr wrap="square" lIns="18288" rIns="18288" tIns="18288" bIns="18288" anchor="ctr">
             <a:spAutoFit/>
           </a:bodyPr>
           <a:lstStyle/>
           <a:p>
-            <a:pPr algn="ctr">
+            <a:pPr algn="l">
               <a:spcAft>
                 <a:spcPts val="0"/>
               </a:spcAft>
             </a:pPr>
             <a:r>
-              <a:rPr sz="1600" b="1" i="0">
-                <a:solidFill>
-                  <a:srgbClr val="FFFFFF"/>
+              <a:rPr sz="1500" b="0" i="0">
+                <a:solidFill>
+                  <a:srgbClr val="263746"/>
                 </a:solidFill>
                 <a:latin typeface="Arial"/>
               </a:rPr>
-              <a:t>49 synthetic-informed associations</a:t>
-            </a:r>
-          </a:p>
-        </p:txBody>
-      </p:sp>
-      <p:sp>
-        <p:nvSpPr>
-          <p:cNvPr id="27" name="Rounded Rectangle 26"/>
+              <a:t>Apply BH FDR within each tissue</a:t>
+            </a:r>
+          </a:p>
+        </p:txBody>
+      </p:sp>
+      <p:sp>
+        <p:nvSpPr>
+          <p:cNvPr id="26" name="Rounded Rectangle 25"/>
           <p:cNvSpPr/>
           <p:nvPr/>
         </p:nvSpPr>
         <p:spPr>
           <a:xfrm>
-            <a:off x="475488" y="5650992"/>
-            <a:ext cx="11109960" cy="530352"/>
+            <a:off x="6547104" y="4681728"/>
+            <a:ext cx="4572000" cy="475488"/>
           </a:xfrm>
           <a:prstGeom prst="roundRect">
             <a:avLst/>
           </a:prstGeom>
           <a:solidFill>
-            <a:srgbClr val="F7F9FA"/>
+            <a:srgbClr val="082B55"/>
           </a:solidFill>
           <a:ln w="10160">
             <a:solidFill>
-              <a:srgbClr val="DDE4E8"/>
+              <a:srgbClr val="082B55"/>
             </a:solidFill>
           </a:ln>
         </p:spPr>
@@ -33741,7 +33702,91 @@
       </p:sp>
       <p:sp>
         <p:nvSpPr>
-          <p:cNvPr id="28" name="TextBox 27"/>
+          <p:cNvPr id="27" name="TextBox 26"/>
+          <p:cNvSpPr txBox="1"/>
+          <p:nvPr/>
+        </p:nvSpPr>
+        <p:spPr>
+          <a:xfrm>
+            <a:off x="6711696" y="4764024"/>
+            <a:ext cx="4251960" cy="265176"/>
+          </a:xfrm>
+          <a:prstGeom prst="rect">
+            <a:avLst/>
+          </a:prstGeom>
+          <a:noFill/>
+        </p:spPr>
+        <p:txBody>
+          <a:bodyPr wrap="square" lIns="18288" rIns="18288" tIns="18288" bIns="18288" anchor="t">
+            <a:spAutoFit/>
+          </a:bodyPr>
+          <a:lstStyle/>
+          <a:p>
+            <a:pPr algn="ctr">
+              <a:spcAft>
+                <a:spcPts val="0"/>
+              </a:spcAft>
+            </a:pPr>
+            <a:r>
+              <a:rPr sz="1600" b="1" i="0">
+                <a:solidFill>
+                  <a:srgbClr val="FFFFFF"/>
+                </a:solidFill>
+                <a:latin typeface="Arial"/>
+              </a:rPr>
+              <a:t>49 synthetic-informed associations</a:t>
+            </a:r>
+          </a:p>
+        </p:txBody>
+      </p:sp>
+      <p:sp>
+        <p:nvSpPr>
+          <p:cNvPr id="28" name="Rounded Rectangle 27"/>
+          <p:cNvSpPr/>
+          <p:nvPr/>
+        </p:nvSpPr>
+        <p:spPr>
+          <a:xfrm>
+            <a:off x="475488" y="5650992"/>
+            <a:ext cx="11109960" cy="530352"/>
+          </a:xfrm>
+          <a:prstGeom prst="roundRect">
+            <a:avLst/>
+          </a:prstGeom>
+          <a:solidFill>
+            <a:srgbClr val="F7F9FA"/>
+          </a:solidFill>
+          <a:ln w="10160">
+            <a:solidFill>
+              <a:srgbClr val="DDE4E8"/>
+            </a:solidFill>
+          </a:ln>
+        </p:spPr>
+        <p:style>
+          <a:lnRef idx="1">
+            <a:schemeClr val="accent1"/>
+          </a:lnRef>
+          <a:fillRef idx="3">
+            <a:schemeClr val="accent1"/>
+          </a:fillRef>
+          <a:effectRef idx="2">
+            <a:schemeClr val="accent1"/>
+          </a:effectRef>
+          <a:fontRef idx="minor">
+            <a:schemeClr val="lt1"/>
+          </a:fontRef>
+        </p:style>
+        <p:txBody>
+          <a:bodyPr rtlCol="0" anchor="ctr"/>
+          <a:lstStyle/>
+          <a:p>
+            <a:pPr algn="ctr"/>
+          </a:p>
+        </p:txBody>
+      </p:sp>
+      <p:sp>
+        <p:nvSpPr>
+          <p:cNvPr id="29" name="TextBox 28"/>
           <p:cNvSpPr txBox="1"/>
           <p:nvPr/>
         </p:nvSpPr>

--- a/presentation/SLSTP_2026_Generative_Transcriptomics.pptx
+++ b/presentation/SLSTP_2026_Generative_Transcriptomics.pptx
@@ -22111,6 +22111,49 @@
       </p:grpSpPr>
       <p:sp>
         <p:nvSpPr>
+          <p:cNvPr id="4" name="Title background artifact mask"/>
+          <p:cNvSpPr/>
+          <p:nvPr/>
+        </p:nvSpPr>
+        <p:spPr>
+          <a:xfrm>
+            <a:off x="0" y="4956048"/>
+            <a:ext cx="3931920" cy="1901952"/>
+          </a:xfrm>
+          <a:prstGeom prst="rect">
+            <a:avLst/>
+          </a:prstGeom>
+          <a:solidFill>
+            <a:srgbClr val="000000"/>
+          </a:solidFill>
+          <a:ln>
+            <a:noFill/>
+          </a:ln>
+        </p:spPr>
+        <p:style>
+          <a:lnRef idx="1">
+            <a:schemeClr val="accent1"/>
+          </a:lnRef>
+          <a:fillRef idx="3">
+            <a:schemeClr val="accent1"/>
+          </a:fillRef>
+          <a:effectRef idx="2">
+            <a:schemeClr val="accent1"/>
+          </a:effectRef>
+          <a:fontRef idx="minor">
+            <a:schemeClr val="lt1"/>
+          </a:fontRef>
+        </p:style>
+        <p:txBody>
+          <a:bodyPr rtlCol="0" anchor="ctr"/>
+          <a:lstStyle/>
+          <a:p>
+            <a:pPr algn="ctr"/>
+          </a:p>
+        </p:txBody>
+      </p:sp>
+      <p:sp>
+        <p:nvSpPr>
           <p:cNvPr id="2" name="Subtitle 1">
             <a:extLst>
               <a:ext uri="{FF2B5EF4-FFF2-40B4-BE49-F238E27FC236}">
@@ -22259,7 +22302,7 @@
       </p:sp>
       <p:sp>
         <p:nvSpPr>
-          <p:cNvPr id="4" name="TextBox 3"/>
+          <p:cNvPr id="5" name="TextBox 4"/>
           <p:cNvSpPr txBox="1"/>
           <p:nvPr/>
         </p:nvSpPr>
@@ -22292,6 +22335,45 @@
                 <a:latin typeface="Arial"/>
               </a:rPr>
               <a:t>SLSTP FINAL PRESENTATION</a:t>
+            </a:r>
+          </a:p>
+        </p:txBody>
+      </p:sp>
+      <p:sp>
+        <p:nvSpPr>
+          <p:cNvPr id="6" name="TextBox 5"/>
+          <p:cNvSpPr txBox="1"/>
+          <p:nvPr/>
+        </p:nvSpPr>
+        <p:spPr>
+          <a:xfrm>
+            <a:off x="566928" y="6510528"/>
+            <a:ext cx="3017520" cy="201168"/>
+          </a:xfrm>
+          <a:prstGeom prst="rect">
+            <a:avLst/>
+          </a:prstGeom>
+          <a:noFill/>
+        </p:spPr>
+        <p:txBody>
+          <a:bodyPr wrap="square" lIns="18288" rIns="18288" tIns="18288" bIns="18288" anchor="t">
+            <a:spAutoFit/>
+          </a:bodyPr>
+          <a:lstStyle/>
+          <a:p>
+            <a:pPr algn="l">
+              <a:spcAft>
+                <a:spcPts val="0"/>
+              </a:spcAft>
+            </a:pPr>
+            <a:r>
+              <a:rPr sz="1050" b="0" i="0">
+                <a:solidFill>
+                  <a:srgbClr val="B9C7D5"/>
+                </a:solidFill>
+                <a:latin typeface="Arial"/>
+              </a:rPr>
+              <a:t>Biological &amp; Physical Sciences</a:t>
             </a:r>
           </a:p>
         </p:txBody>

--- a/presentation/SLSTP_2026_Generative_Transcriptomics.pptx
+++ b/presentation/SLSTP_2026_Generative_Transcriptomics.pptx
@@ -33157,24 +33157,64 @@
       </p:sp>
       <p:sp>
         <p:nvSpPr>
-          <p:cNvPr id="12" name="Rounded Rectangle 11"/>
+          <p:cNvPr id="12" name="TextBox 11"/>
+          <p:cNvSpPr txBox="1"/>
+          <p:nvPr/>
+        </p:nvSpPr>
+        <p:spPr>
+          <a:xfrm>
+            <a:off x="2304288" y="3044952"/>
+            <a:ext cx="969264" cy="585216"/>
+          </a:xfrm>
+          <a:prstGeom prst="rect">
+            <a:avLst/>
+          </a:prstGeom>
+          <a:noFill/>
+        </p:spPr>
+        <p:txBody>
+          <a:bodyPr wrap="square" lIns="18288" rIns="18288" tIns="18288" bIns="18288" anchor="t">
+            <a:spAutoFit/>
+          </a:bodyPr>
+          <a:lstStyle/>
+          <a:p>
+            <a:pPr algn="ctr">
+              <a:spcAft>
+                <a:spcPts val="0"/>
+              </a:spcAft>
+            </a:pPr>
+            <a:r>
+              <a:rPr sz="1200" b="1" i="0">
+                <a:solidFill>
+                  <a:srgbClr val="D37B00"/>
+                </a:solidFill>
+                <a:latin typeface="Arial"/>
+              </a:rPr>
+              <a:t>23
+reinforced</a:t>
+            </a:r>
+          </a:p>
+        </p:txBody>
+      </p:sp>
+      <p:sp>
+        <p:nvSpPr>
+          <p:cNvPr id="13" name="Rounded Rectangle 12"/>
           <p:cNvSpPr/>
           <p:nvPr/>
         </p:nvSpPr>
         <p:spPr>
           <a:xfrm>
-            <a:off x="1993392" y="2880360"/>
-            <a:ext cx="1572768" cy="841248"/>
+            <a:off x="3218688" y="4535424"/>
+            <a:ext cx="1700784" cy="713232"/>
           </a:xfrm>
           <a:prstGeom prst="roundRect">
             <a:avLst/>
           </a:prstGeom>
           <a:solidFill>
-            <a:srgbClr val="F8F1E2"/>
+            <a:srgbClr val="E8F3F1"/>
           </a:solidFill>
           <a:ln w="10160">
             <a:solidFill>
-              <a:srgbClr val="D37B00"/>
+              <a:srgbClr val="178681"/>
             </a:solidFill>
           </a:ln>
         </p:spPr>
@@ -33202,14 +33242,14 @@
       </p:sp>
       <p:sp>
         <p:nvSpPr>
-          <p:cNvPr id="13" name="TextBox 12"/>
+          <p:cNvPr id="14" name="TextBox 13"/>
           <p:cNvSpPr txBox="1"/>
           <p:nvPr/>
         </p:nvSpPr>
         <p:spPr>
           <a:xfrm>
-            <a:off x="2176272" y="2999232"/>
-            <a:ext cx="1207008" cy="548640"/>
+            <a:off x="3346704" y="4626864"/>
+            <a:ext cx="1444752" cy="219456"/>
           </a:xfrm>
           <a:prstGeom prst="rect">
             <a:avLst/>
@@ -33228,39 +33268,76 @@
               </a:spcAft>
             </a:pPr>
             <a:r>
-              <a:rPr sz="1700" b="1" i="0">
-                <a:solidFill>
-                  <a:srgbClr val="D37B00"/>
+              <a:rPr sz="1350" b="1" i="0">
+                <a:solidFill>
+                  <a:srgbClr val="178681"/>
                 </a:solidFill>
                 <a:latin typeface="Arial"/>
               </a:rPr>
-              <a:t>23
-reinforced</a:t>
-            </a:r>
-          </a:p>
-        </p:txBody>
-      </p:sp>
-      <p:sp>
-        <p:nvSpPr>
-          <p:cNvPr id="14" name="Rounded Rectangle 13"/>
+              <a:t>26 promoted</a:t>
+            </a:r>
+          </a:p>
+        </p:txBody>
+      </p:sp>
+      <p:sp>
+        <p:nvSpPr>
+          <p:cNvPr id="15" name="TextBox 14"/>
+          <p:cNvSpPr txBox="1"/>
+          <p:nvPr/>
+        </p:nvSpPr>
+        <p:spPr>
+          <a:xfrm>
+            <a:off x="3364992" y="4882896"/>
+            <a:ext cx="1408176" cy="292608"/>
+          </a:xfrm>
+          <a:prstGeom prst="rect">
+            <a:avLst/>
+          </a:prstGeom>
+          <a:noFill/>
+        </p:spPr>
+        <p:txBody>
+          <a:bodyPr wrap="square" lIns="18288" rIns="18288" tIns="18288" bIns="18288" anchor="t">
+            <a:spAutoFit/>
+          </a:bodyPr>
+          <a:lstStyle/>
+          <a:p>
+            <a:pPr algn="ctr">
+              <a:spcAft>
+                <a:spcPts val="0"/>
+              </a:spcAft>
+            </a:pPr>
+            <a:r>
+              <a:rPr sz="950" b="0" i="0">
+                <a:solidFill>
+                  <a:srgbClr val="59697A"/>
+                </a:solidFill>
+                <a:latin typeface="Arial"/>
+              </a:rPr>
+              <a:t>selected only with
+synthetic guidance</a:t>
+            </a:r>
+          </a:p>
+        </p:txBody>
+      </p:sp>
+      <p:sp>
+        <p:nvSpPr>
+          <p:cNvPr id="16" name="Right Arrow 15"/>
           <p:cNvSpPr/>
           <p:nvPr/>
         </p:nvSpPr>
         <p:spPr>
           <a:xfrm>
-            <a:off x="3218688" y="4535424"/>
-            <a:ext cx="1700784" cy="713232"/>
-          </a:xfrm>
-          <a:prstGeom prst="roundRect">
+            <a:off x="5285232" y="3017520"/>
+            <a:ext cx="594360" cy="438912"/>
+          </a:xfrm>
+          <a:prstGeom prst="rightArrow">
             <a:avLst/>
           </a:prstGeom>
           <a:solidFill>
-            <a:srgbClr val="E8F3F1"/>
+            <a:srgbClr val="178681"/>
           </a:solidFill>
-          <a:ln w="10160">
-            <a:solidFill>
-              <a:srgbClr val="178681"/>
-            </a:solidFill>
+          <a:ln>
+            <a:noFill/>
           </a:ln>
         </p:spPr>
         <p:style>
@@ -33287,102 +33364,25 @@
       </p:sp>
       <p:sp>
         <p:nvSpPr>
-          <p:cNvPr id="15" name="TextBox 14"/>
-          <p:cNvSpPr txBox="1"/>
-          <p:nvPr/>
-        </p:nvSpPr>
-        <p:spPr>
-          <a:xfrm>
-            <a:off x="3346704" y="4626864"/>
-            <a:ext cx="1444752" cy="219456"/>
-          </a:xfrm>
-          <a:prstGeom prst="rect">
-            <a:avLst/>
-          </a:prstGeom>
-          <a:noFill/>
-        </p:spPr>
-        <p:txBody>
-          <a:bodyPr wrap="square" lIns="18288" rIns="18288" tIns="18288" bIns="18288" anchor="t">
-            <a:spAutoFit/>
-          </a:bodyPr>
-          <a:lstStyle/>
-          <a:p>
-            <a:pPr algn="ctr">
-              <a:spcAft>
-                <a:spcPts val="0"/>
-              </a:spcAft>
-            </a:pPr>
-            <a:r>
-              <a:rPr sz="1350" b="1" i="0">
-                <a:solidFill>
-                  <a:srgbClr val="178681"/>
-                </a:solidFill>
-                <a:latin typeface="Arial"/>
-              </a:rPr>
-              <a:t>26 promoted</a:t>
-            </a:r>
-          </a:p>
-        </p:txBody>
-      </p:sp>
-      <p:sp>
-        <p:nvSpPr>
-          <p:cNvPr id="16" name="TextBox 15"/>
-          <p:cNvSpPr txBox="1"/>
-          <p:nvPr/>
-        </p:nvSpPr>
-        <p:spPr>
-          <a:xfrm>
-            <a:off x="3364992" y="4882896"/>
-            <a:ext cx="1408176" cy="292608"/>
-          </a:xfrm>
-          <a:prstGeom prst="rect">
-            <a:avLst/>
-          </a:prstGeom>
-          <a:noFill/>
-        </p:spPr>
-        <p:txBody>
-          <a:bodyPr wrap="square" lIns="18288" rIns="18288" tIns="18288" bIns="18288" anchor="t">
-            <a:spAutoFit/>
-          </a:bodyPr>
-          <a:lstStyle/>
-          <a:p>
-            <a:pPr algn="ctr">
-              <a:spcAft>
-                <a:spcPts val="0"/>
-              </a:spcAft>
-            </a:pPr>
-            <a:r>
-              <a:rPr sz="950" b="0" i="0">
-                <a:solidFill>
-                  <a:srgbClr val="59697A"/>
-                </a:solidFill>
-                <a:latin typeface="Arial"/>
-              </a:rPr>
-              <a:t>selected only with
-synthetic guidance</a:t>
-            </a:r>
-          </a:p>
-        </p:txBody>
-      </p:sp>
-      <p:sp>
-        <p:nvSpPr>
-          <p:cNvPr id="17" name="Right Arrow 16"/>
+          <p:cNvPr id="17" name="Rounded Rectangle 16"/>
           <p:cNvSpPr/>
           <p:nvPr/>
         </p:nvSpPr>
         <p:spPr>
           <a:xfrm>
-            <a:off x="5285232" y="3017520"/>
-            <a:ext cx="594360" cy="438912"/>
-          </a:xfrm>
-          <a:prstGeom prst="rightArrow">
+            <a:off x="6108192" y="2039112"/>
+            <a:ext cx="5468112" cy="3355848"/>
+          </a:xfrm>
+          <a:prstGeom prst="roundRect">
             <a:avLst/>
           </a:prstGeom>
           <a:solidFill>
-            <a:srgbClr val="178681"/>
+            <a:srgbClr val="E9F1F7"/>
           </a:solidFill>
-          <a:ln>
-            <a:noFill/>
+          <a:ln w="10160">
+            <a:solidFill>
+              <a:srgbClr val="2D6496"/>
+            </a:solidFill>
           </a:ln>
         </p:spPr>
         <p:style>
@@ -33409,25 +33409,62 @@
       </p:sp>
       <p:sp>
         <p:nvSpPr>
-          <p:cNvPr id="18" name="Rounded Rectangle 17"/>
+          <p:cNvPr id="18" name="TextBox 17"/>
+          <p:cNvSpPr txBox="1"/>
+          <p:nvPr/>
+        </p:nvSpPr>
+        <p:spPr>
+          <a:xfrm>
+            <a:off x="6419088" y="2304288"/>
+            <a:ext cx="4846320" cy="365760"/>
+          </a:xfrm>
+          <a:prstGeom prst="rect">
+            <a:avLst/>
+          </a:prstGeom>
+          <a:noFill/>
+        </p:spPr>
+        <p:txBody>
+          <a:bodyPr wrap="square" lIns="18288" rIns="18288" tIns="18288" bIns="18288" anchor="t">
+            <a:spAutoFit/>
+          </a:bodyPr>
+          <a:lstStyle/>
+          <a:p>
+            <a:pPr algn="ctr">
+              <a:spcAft>
+                <a:spcPts val="0"/>
+              </a:spcAft>
+            </a:pPr>
+            <a:r>
+              <a:rPr sz="2000" b="1" i="0">
+                <a:solidFill>
+                  <a:srgbClr val="2D6496"/>
+                </a:solidFill>
+                <a:latin typeface="Arial"/>
+              </a:rPr>
+              <a:t>Real OSDR association test</a:t>
+            </a:r>
+          </a:p>
+        </p:txBody>
+      </p:sp>
+      <p:sp>
+        <p:nvSpPr>
+          <p:cNvPr id="19" name="Oval 18"/>
           <p:cNvSpPr/>
           <p:nvPr/>
         </p:nvSpPr>
         <p:spPr>
           <a:xfrm>
-            <a:off x="6108192" y="2039112"/>
-            <a:ext cx="5468112" cy="3355848"/>
-          </a:xfrm>
-          <a:prstGeom prst="roundRect">
+            <a:off x="6601968" y="3017520"/>
+            <a:ext cx="91440" cy="91440"/>
+          </a:xfrm>
+          <a:prstGeom prst="ellipse">
             <a:avLst/>
           </a:prstGeom>
           <a:solidFill>
-            <a:srgbClr val="E9F1F7"/>
+            <a:srgbClr val="2D6496"/>
           </a:solidFill>
-          <a:ln w="10160">
-            <a:solidFill>
-              <a:srgbClr val="2D6496"/>
-            </a:solidFill>
+          <a:ln>
+            <a:noFill/>
           </a:ln>
         </p:spPr>
         <p:style>
@@ -33454,14 +33491,14 @@
       </p:sp>
       <p:sp>
         <p:nvSpPr>
-          <p:cNvPr id="19" name="TextBox 18"/>
+          <p:cNvPr id="20" name="TextBox 19"/>
           <p:cNvSpPr txBox="1"/>
           <p:nvPr/>
         </p:nvSpPr>
         <p:spPr>
           <a:xfrm>
-            <a:off x="6419088" y="2304288"/>
-            <a:ext cx="4846320" cy="365760"/>
+            <a:off x="6766559" y="2907792"/>
+            <a:ext cx="4361688" cy="530352"/>
           </a:xfrm>
           <a:prstGeom prst="rect">
             <a:avLst/>
@@ -33469,37 +33506,37 @@
           <a:noFill/>
         </p:spPr>
         <p:txBody>
-          <a:bodyPr wrap="square" lIns="18288" rIns="18288" tIns="18288" bIns="18288" anchor="t">
+          <a:bodyPr wrap="square" lIns="18288" rIns="18288" tIns="18288" bIns="18288" anchor="ctr">
             <a:spAutoFit/>
           </a:bodyPr>
           <a:lstStyle/>
           <a:p>
-            <a:pPr algn="ctr">
+            <a:pPr algn="l">
               <a:spcAft>
                 <a:spcPts val="0"/>
               </a:spcAft>
             </a:pPr>
             <a:r>
-              <a:rPr sz="2000" b="1" i="0">
-                <a:solidFill>
-                  <a:srgbClr val="2D6496"/>
+              <a:rPr sz="1500" b="0" i="0">
+                <a:solidFill>
+                  <a:srgbClr val="263746"/>
                 </a:solidFill>
                 <a:latin typeface="Arial"/>
               </a:rPr>
-              <a:t>Real OSDR association test</a:t>
-            </a:r>
-          </a:p>
-        </p:txBody>
-      </p:sp>
-      <p:sp>
-        <p:nvSpPr>
-          <p:cNvPr id="20" name="Oval 19"/>
+              <a:t>Estimate FLT vs GC inside each accession</a:t>
+            </a:r>
+          </a:p>
+        </p:txBody>
+      </p:sp>
+      <p:sp>
+        <p:nvSpPr>
+          <p:cNvPr id="21" name="Oval 20"/>
           <p:cNvSpPr/>
           <p:nvPr/>
         </p:nvSpPr>
         <p:spPr>
           <a:xfrm>
-            <a:off x="6601968" y="3017520"/>
+            <a:off x="6601968" y="3547872"/>
             <a:ext cx="91440" cy="91440"/>
           </a:xfrm>
           <a:prstGeom prst="ellipse">
@@ -33536,13 +33573,13 @@
       </p:sp>
       <p:sp>
         <p:nvSpPr>
-          <p:cNvPr id="21" name="TextBox 20"/>
+          <p:cNvPr id="22" name="TextBox 21"/>
           <p:cNvSpPr txBox="1"/>
           <p:nvPr/>
         </p:nvSpPr>
         <p:spPr>
           <a:xfrm>
-            <a:off x="6766559" y="2907792"/>
+            <a:off x="6766559" y="3438144"/>
             <a:ext cx="4361688" cy="530352"/>
           </a:xfrm>
           <a:prstGeom prst="rect">
@@ -33568,20 +33605,20 @@
                 </a:solidFill>
                 <a:latin typeface="Arial"/>
               </a:rPr>
-              <a:t>Estimate FLT vs GC inside each accession</a:t>
-            </a:r>
-          </a:p>
-        </p:txBody>
-      </p:sp>
-      <p:sp>
-        <p:nvSpPr>
-          <p:cNvPr id="22" name="Oval 21"/>
+              <a:t>Combine accession effects with a random-effects model</a:t>
+            </a:r>
+          </a:p>
+        </p:txBody>
+      </p:sp>
+      <p:sp>
+        <p:nvSpPr>
+          <p:cNvPr id="23" name="Oval 22"/>
           <p:cNvSpPr/>
           <p:nvPr/>
         </p:nvSpPr>
         <p:spPr>
           <a:xfrm>
-            <a:off x="6601968" y="3547872"/>
+            <a:off x="6601968" y="4078224"/>
             <a:ext cx="91440" cy="91440"/>
           </a:xfrm>
           <a:prstGeom prst="ellipse">
@@ -33618,13 +33655,13 @@
       </p:sp>
       <p:sp>
         <p:nvSpPr>
-          <p:cNvPr id="23" name="TextBox 22"/>
+          <p:cNvPr id="24" name="TextBox 23"/>
           <p:cNvSpPr txBox="1"/>
           <p:nvPr/>
         </p:nvSpPr>
         <p:spPr>
           <a:xfrm>
-            <a:off x="6766559" y="3438144"/>
+            <a:off x="6766559" y="3968496"/>
             <a:ext cx="4361688" cy="530352"/>
           </a:xfrm>
           <a:prstGeom prst="rect">
@@ -33650,30 +33687,32 @@
                 </a:solidFill>
                 <a:latin typeface="Arial"/>
               </a:rPr>
-              <a:t>Combine accession effects with a random-effects model</a:t>
-            </a:r>
-          </a:p>
-        </p:txBody>
-      </p:sp>
-      <p:sp>
-        <p:nvSpPr>
-          <p:cNvPr id="24" name="Oval 23"/>
+              <a:t>Apply BH FDR within each tissue</a:t>
+            </a:r>
+          </a:p>
+        </p:txBody>
+      </p:sp>
+      <p:sp>
+        <p:nvSpPr>
+          <p:cNvPr id="25" name="Rounded Rectangle 24"/>
           <p:cNvSpPr/>
           <p:nvPr/>
         </p:nvSpPr>
         <p:spPr>
           <a:xfrm>
-            <a:off x="6601968" y="4078224"/>
-            <a:ext cx="91440" cy="91440"/>
-          </a:xfrm>
-          <a:prstGeom prst="ellipse">
+            <a:off x="6547104" y="4681728"/>
+            <a:ext cx="4572000" cy="475488"/>
+          </a:xfrm>
+          <a:prstGeom prst="roundRect">
             <a:avLst/>
           </a:prstGeom>
           <a:solidFill>
-            <a:srgbClr val="2D6496"/>
+            <a:srgbClr val="082B55"/>
           </a:solidFill>
-          <a:ln>
-            <a:noFill/>
+          <a:ln w="10160">
+            <a:solidFill>
+              <a:srgbClr val="082B55"/>
+            </a:solidFill>
           </a:ln>
         </p:spPr>
         <p:style>
@@ -33700,14 +33739,14 @@
       </p:sp>
       <p:sp>
         <p:nvSpPr>
-          <p:cNvPr id="25" name="TextBox 24"/>
+          <p:cNvPr id="26" name="TextBox 25"/>
           <p:cNvSpPr txBox="1"/>
           <p:nvPr/>
         </p:nvSpPr>
         <p:spPr>
           <a:xfrm>
-            <a:off x="6766559" y="3968496"/>
-            <a:ext cx="4361688" cy="530352"/>
+            <a:off x="6711696" y="4764024"/>
+            <a:ext cx="4251960" cy="265176"/>
           </a:xfrm>
           <a:prstGeom prst="rect">
             <a:avLst/>
@@ -33715,48 +33754,48 @@
           <a:noFill/>
         </p:spPr>
         <p:txBody>
-          <a:bodyPr wrap="square" lIns="18288" rIns="18288" tIns="18288" bIns="18288" anchor="ctr">
+          <a:bodyPr wrap="square" lIns="18288" rIns="18288" tIns="18288" bIns="18288" anchor="t">
             <a:spAutoFit/>
           </a:bodyPr>
           <a:lstStyle/>
           <a:p>
-            <a:pPr algn="l">
+            <a:pPr algn="ctr">
               <a:spcAft>
                 <a:spcPts val="0"/>
               </a:spcAft>
             </a:pPr>
             <a:r>
-              <a:rPr sz="1500" b="0" i="0">
-                <a:solidFill>
-                  <a:srgbClr val="263746"/>
+              <a:rPr sz="1600" b="1" i="0">
+                <a:solidFill>
+                  <a:srgbClr val="FFFFFF"/>
                 </a:solidFill>
                 <a:latin typeface="Arial"/>
               </a:rPr>
-              <a:t>Apply BH FDR within each tissue</a:t>
-            </a:r>
-          </a:p>
-        </p:txBody>
-      </p:sp>
-      <p:sp>
-        <p:nvSpPr>
-          <p:cNvPr id="26" name="Rounded Rectangle 25"/>
+              <a:t>49 synthetic-informed associations</a:t>
+            </a:r>
+          </a:p>
+        </p:txBody>
+      </p:sp>
+      <p:sp>
+        <p:nvSpPr>
+          <p:cNvPr id="27" name="Rounded Rectangle 26"/>
           <p:cNvSpPr/>
           <p:nvPr/>
         </p:nvSpPr>
         <p:spPr>
           <a:xfrm>
-            <a:off x="6547104" y="4681728"/>
-            <a:ext cx="4572000" cy="475488"/>
+            <a:off x="475488" y="5650992"/>
+            <a:ext cx="11109960" cy="530352"/>
           </a:xfrm>
           <a:prstGeom prst="roundRect">
             <a:avLst/>
           </a:prstGeom>
           <a:solidFill>
-            <a:srgbClr val="082B55"/>
+            <a:srgbClr val="F7F9FA"/>
           </a:solidFill>
           <a:ln w="10160">
             <a:solidFill>
-              <a:srgbClr val="082B55"/>
+              <a:srgbClr val="DDE4E8"/>
             </a:solidFill>
           </a:ln>
         </p:spPr>
@@ -33784,91 +33823,7 @@
       </p:sp>
       <p:sp>
         <p:nvSpPr>
-          <p:cNvPr id="27" name="TextBox 26"/>
-          <p:cNvSpPr txBox="1"/>
-          <p:nvPr/>
-        </p:nvSpPr>
-        <p:spPr>
-          <a:xfrm>
-            <a:off x="6711696" y="4764024"/>
-            <a:ext cx="4251960" cy="265176"/>
-          </a:xfrm>
-          <a:prstGeom prst="rect">
-            <a:avLst/>
-          </a:prstGeom>
-          <a:noFill/>
-        </p:spPr>
-        <p:txBody>
-          <a:bodyPr wrap="square" lIns="18288" rIns="18288" tIns="18288" bIns="18288" anchor="t">
-            <a:spAutoFit/>
-          </a:bodyPr>
-          <a:lstStyle/>
-          <a:p>
-            <a:pPr algn="ctr">
-              <a:spcAft>
-                <a:spcPts val="0"/>
-              </a:spcAft>
-            </a:pPr>
-            <a:r>
-              <a:rPr sz="1600" b="1" i="0">
-                <a:solidFill>
-                  <a:srgbClr val="FFFFFF"/>
-                </a:solidFill>
-                <a:latin typeface="Arial"/>
-              </a:rPr>
-              <a:t>49 synthetic-informed associations</a:t>
-            </a:r>
-          </a:p>
-        </p:txBody>
-      </p:sp>
-      <p:sp>
-        <p:nvSpPr>
-          <p:cNvPr id="28" name="Rounded Rectangle 27"/>
-          <p:cNvSpPr/>
-          <p:nvPr/>
-        </p:nvSpPr>
-        <p:spPr>
-          <a:xfrm>
-            <a:off x="475488" y="5650992"/>
-            <a:ext cx="11109960" cy="530352"/>
-          </a:xfrm>
-          <a:prstGeom prst="roundRect">
-            <a:avLst/>
-          </a:prstGeom>
-          <a:solidFill>
-            <a:srgbClr val="F7F9FA"/>
-          </a:solidFill>
-          <a:ln w="10160">
-            <a:solidFill>
-              <a:srgbClr val="DDE4E8"/>
-            </a:solidFill>
-          </a:ln>
-        </p:spPr>
-        <p:style>
-          <a:lnRef idx="1">
-            <a:schemeClr val="accent1"/>
-          </a:lnRef>
-          <a:fillRef idx="3">
-            <a:schemeClr val="accent1"/>
-          </a:fillRef>
-          <a:effectRef idx="2">
-            <a:schemeClr val="accent1"/>
-          </a:effectRef>
-          <a:fontRef idx="minor">
-            <a:schemeClr val="lt1"/>
-          </a:fontRef>
-        </p:style>
-        <p:txBody>
-          <a:bodyPr rtlCol="0" anchor="ctr"/>
-          <a:lstStyle/>
-          <a:p>
-            <a:pPr algn="ctr"/>
-          </a:p>
-        </p:txBody>
-      </p:sp>
-      <p:sp>
-        <p:nvSpPr>
-          <p:cNvPr id="29" name="TextBox 28"/>
+          <p:cNvPr id="28" name="TextBox 27"/>
           <p:cNvSpPr txBox="1"/>
           <p:nvPr/>
         </p:nvSpPr>

--- a/presentation/SLSTP_2026_Generative_Transcriptomics.pptx
+++ b/presentation/SLSTP_2026_Generative_Transcriptomics.pptx
@@ -22277,12 +22277,23 @@
             <p:ph type="body" sz="quarter" idx="14"/>
           </p:nvPr>
         </p:nvSpPr>
-        <p:spPr/>
-        <p:txBody>
-          <a:bodyPr/>
+        <p:spPr>
+          <a:xfrm>
+            <a:off x="566928" y="2157984"/>
+            <a:ext cx="4297680" cy="1417320"/>
+          </a:xfrm>
+        </p:spPr>
+        <p:txBody>
+          <a:bodyPr wrap="square" lIns="0" rIns="0" tIns="0" bIns="0" anchor="t"/>
           <a:lstStyle/>
           <a:p>
             <a:pPr>
+              <a:lnSpc>
+                <a:spcPct val="100000"/>
+              </a:lnSpc>
+              <a:spcBef>
+                <a:spcPts val="0"/>
+              </a:spcBef>
               <a:spcAft>
                 <a:spcPts val="0"/>
               </a:spcAft>
@@ -22294,8 +22305,7 @@
                 </a:solidFill>
                 <a:latin typeface="Arial"/>
               </a:rPr>
-              <a:t>Synthetic transcriptomics
-for mouse spaceflight</a:t>
+              <a:t>Synthetic transcriptomics for mouse spaceflight</a:t>
             </a:r>
           </a:p>
         </p:txBody>
@@ -22303,45 +22313,6 @@
       <p:sp>
         <p:nvSpPr>
           <p:cNvPr id="5" name="TextBox 4"/>
-          <p:cNvSpPr txBox="1"/>
-          <p:nvPr/>
-        </p:nvSpPr>
-        <p:spPr>
-          <a:xfrm>
-            <a:off x="493776" y="987552"/>
-            <a:ext cx="3474720" cy="228600"/>
-          </a:xfrm>
-          <a:prstGeom prst="rect">
-            <a:avLst/>
-          </a:prstGeom>
-          <a:noFill/>
-        </p:spPr>
-        <p:txBody>
-          <a:bodyPr wrap="square" lIns="18288" rIns="18288" tIns="18288" bIns="18288" anchor="t">
-            <a:spAutoFit/>
-          </a:bodyPr>
-          <a:lstStyle/>
-          <a:p>
-            <a:pPr algn="l">
-              <a:spcAft>
-                <a:spcPts val="0"/>
-              </a:spcAft>
-            </a:pPr>
-            <a:r>
-              <a:rPr sz="1050" b="1" i="0">
-                <a:solidFill>
-                  <a:srgbClr val="D5A64A"/>
-                </a:solidFill>
-                <a:latin typeface="Arial"/>
-              </a:rPr>
-              <a:t>SLSTP FINAL PRESENTATION</a:t>
-            </a:r>
-          </a:p>
-        </p:txBody>
-      </p:sp>
-      <p:sp>
-        <p:nvSpPr>
-          <p:cNvPr id="6" name="TextBox 5"/>
           <p:cNvSpPr txBox="1"/>
           <p:nvPr/>
         </p:nvSpPr>

--- a/presentation/SLSTP_2026_Generative_Transcriptomics.pptx
+++ b/presentation/SLSTP_2026_Generative_Transcriptomics.pptx
@@ -24,6 +24,7 @@
     <p:sldId id="298" r:id="rId22"/>
     <p:sldId id="299" r:id="rId23"/>
     <p:sldId id="300" r:id="rId24"/>
+    <p:sldId id="301" r:id="rId25"/>
   </p:sldIdLst>
   <p:sldSz cx="12192000" cy="6858000"/>
   <p:notesSz cx="6858000" cy="9144000"/>
@@ -806,7 +807,7 @@
           <a:p/>
           <a:p>
             <a:r>
-              <a:t>Soleus improved with real plus generated training. The selected genes were already stable in real-only analysis, so synthetic data reinforced rather than introduced the panel. Lower Bdh1, Ech1, Bnip3 and Decr1, with higher Tpm1, support altered oxidative metabolism and contractile remodeling.</a:t>
+              <a:t>Thymus produced the clearest promoted panel. The lower mitotic and DNA-replication genes agree with prior reports of thymic involution and altered cell-cycle expression after flight. Higher Hsd17b11 and Etv1 add lipid-handling and T-cell-state hypotheses, but neither is a direct prior flight replication or an established driver. Because this is bulk RNA-seq, the pattern may reflect transcription, cell composition or both.</a:t>
             </a:r>
           </a:p>
         </p:txBody>
@@ -876,13 +877,13 @@
           <a:lstStyle/>
           <a:p>
             <a:r>
-              <a:t>Target time: 1:00</a:t>
+              <a:t>Target time: 1:05</a:t>
             </a:r>
           </a:p>
           <a:p/>
           <a:p>
             <a:r>
-              <a:t>Kidney supplied the strongest secondary pair: promoted Inpp4b and reinforced Slc37a4. Spleen, skin and adrenal results are narrower. Lung and retina improved predictively without a synthetic-informed BH-FDR gene, while liver, EDL and quadriceps retained real-only models.</a:t>
+              <a:t>Soleus improved with real plus generated training. The selected genes were already stable in real-only analysis, so synthetic data reinforced rather than introduced the panel. Lower Bdh1, Ech1, Bnip3 and Decr1, with higher Tpm1, support altered oxidative metabolism and contractile remodeling.</a:t>
             </a:r>
           </a:p>
         </p:txBody>
@@ -958,7 +959,7 @@
           <a:p/>
           <a:p>
             <a:r>
-              <a:t>The main result is not that synthetic samples increase biological n. The useful role was tissue-specific feature ranking or limited regularization. The next decisive test is complete-accession holdout followed by validation of the thymus, soleus and kidney hypotheses in independent data.</a:t>
+              <a:t>Kidney supplied the strongest secondary pair: promoted Inpp4b and reinforced Slc37a4. Spleen and skin results are narrower. Adrenal Psmb8 has plausible immunoproteasome biology but no prior adrenal flight match. Lung and retina improved predictively without a synthetic-informed BH-FDR gene, while liver, EDL and quadriceps retained real-only models.</a:t>
             </a:r>
           </a:p>
         </p:txBody>
@@ -1028,6 +1029,82 @@
           <a:lstStyle/>
           <a:p>
             <a:r>
+              <a:t>Target time: 0:45</a:t>
+            </a:r>
+          </a:p>
+          <a:p/>
+          <a:p>
+            <a:r>
+              <a:t>The useful role was tissue-specific feature ranking or limited regularization, not increasing biological sample size. Literature annotation then separated exact recovery, process-level agreement and complementary hypotheses. Independent samples and cell-resolved experiments are the next tests.</a:t>
+            </a:r>
+          </a:p>
+        </p:txBody>
+      </p:sp>
+      <p:sp>
+        <p:nvSpPr>
+          <p:cNvPr id="4" name="Slide Number Placeholder 3"/>
+          <p:cNvSpPr>
+            <a:spLocks noGrp="1"/>
+          </p:cNvSpPr>
+          <p:nvPr>
+            <p:ph type="sldNum" idx="5" sz="quarter"/>
+          </p:nvPr>
+        </p:nvSpPr>
+        <p:spPr/>
+      </p:sp>
+    </p:spTree>
+  </p:cSld>
+  <p:clrMapOvr>
+    <a:masterClrMapping/>
+  </p:clrMapOvr>
+</p:notes>
+</file>
+
+<file path=ppt/notesSlides/notesSlide14.xml><?xml version="1.0" encoding="utf-8"?>
+<p:notes xmlns:a="http://schemas.openxmlformats.org/drawingml/2006/main" xmlns:p="http://schemas.openxmlformats.org/presentationml/2006/main" xmlns:r="http://schemas.openxmlformats.org/officeDocument/2006/relationships">
+  <p:cSld>
+    <p:spTree>
+      <p:nvGrpSpPr>
+        <p:cNvPr id="1" name=""/>
+        <p:cNvGrpSpPr/>
+        <p:nvPr/>
+      </p:nvGrpSpPr>
+      <p:grpSpPr>
+        <a:xfrm>
+          <a:off x="0" y="0"/>
+          <a:ext cx="0" cy="0"/>
+          <a:chOff x="0" y="0"/>
+          <a:chExt cx="0" cy="0"/>
+        </a:xfrm>
+      </p:grpSpPr>
+      <p:sp>
+        <p:nvSpPr>
+          <p:cNvPr id="2" name="Slide Image Placeholder 1"/>
+          <p:cNvSpPr>
+            <a:spLocks noGrp="1"/>
+          </p:cNvSpPr>
+          <p:nvPr>
+            <p:ph type="sldImg" idx="2"/>
+          </p:nvPr>
+        </p:nvSpPr>
+        <p:spPr/>
+      </p:sp>
+      <p:sp>
+        <p:nvSpPr>
+          <p:cNvPr id="3" name="Notes Placeholder 2"/>
+          <p:cNvSpPr>
+            <a:spLocks noGrp="1"/>
+          </p:cNvSpPr>
+          <p:nvPr>
+            <p:ph type="body" idx="3" sz="quarter"/>
+          </p:nvPr>
+        </p:nvSpPr>
+        <p:spPr/>
+        <p:txBody>
+          <a:bodyPr/>
+          <a:lstStyle/>
+          <a:p>
+            <a:r>
               <a:t>Target time: 0:10</a:t>
             </a:r>
           </a:p>
@@ -1104,7 +1181,7 @@
           <a:lstStyle/>
           <a:p>
             <a:r>
-              <a:t>Target time: 1:00</a:t>
+              <a:t>Target time: 0:55</a:t>
             </a:r>
           </a:p>
           <a:p/>
@@ -1180,7 +1257,7 @@
           <a:lstStyle/>
           <a:p>
             <a:r>
-              <a:t>Target time: 1:10</a:t>
+              <a:t>Target time: 1:00</a:t>
             </a:r>
           </a:p>
           <a:p/>
@@ -1332,7 +1409,7 @@
           <a:lstStyle/>
           <a:p>
             <a:r>
-              <a:t>Target time: 1:15</a:t>
+              <a:t>Target time: 1:05</a:t>
             </a:r>
           </a:p>
           <a:p/>
@@ -1408,7 +1485,7 @@
           <a:lstStyle/>
           <a:p>
             <a:r>
-              <a:t>Target time: 1:15</a:t>
+              <a:t>Target time: 1:00</a:t>
             </a:r>
           </a:p>
           <a:p/>
@@ -1484,7 +1561,7 @@
           <a:lstStyle/>
           <a:p>
             <a:r>
-              <a:t>Target time: 1:10</a:t>
+              <a:t>Target time: 1:00</a:t>
             </a:r>
           </a:p>
           <a:p/>
@@ -1560,7 +1637,7 @@
           <a:lstStyle/>
           <a:p>
             <a:r>
-              <a:t>Target time: 1:05</a:t>
+              <a:t>Target time: 0:55</a:t>
             </a:r>
           </a:p>
           <a:p/>
@@ -1636,13 +1713,13 @@
           <a:lstStyle/>
           <a:p>
             <a:r>
-              <a:t>Target time: 1:25</a:t>
+              <a:t>Target time: 1:05</a:t>
             </a:r>
           </a:p>
           <a:p/>
           <a:p>
             <a:r>
-              <a:t>Thymus produced the clearest promoted panel. The lower mitotic and DNA-replication genes agree with prior reports of thymic involution and altered cell-cycle expression after flight. Because this is bulk RNA-seq, the signal could reflect fewer cycling thymocytes, lower transcription within those cells or both.</a:t>
+              <a:t>This slide separates four questions. Promoted tells us that synthetic guidance changed stable feature ranking. BH FDR tells us the association is present in real OSDR profiles. The literature label describes whether prior work is exact, related, mixed or unmatched. The biological interpretation remains a hypothesis. Eleven associations aligned, 13 were complementary, one was ambiguous and one was literature unmatched. Only Ccnb2, Ccne2 and Nfkbia were exact gene-tissue-direction matches. Psmb8 was unmatched in adrenal spaceflight literature but remains mechanistically plausible.</a:t>
             </a:r>
           </a:p>
         </p:txBody>
@@ -22440,7 +22517,7 @@
                 </a:solidFill>
                 <a:latin typeface="Arial"/>
               </a:rPr>
-              <a:t>SOLEUS</a:t>
+              <a:t>THYMUS</a:t>
             </a:r>
           </a:p>
         </p:txBody>
@@ -22479,7 +22556,7 @@
                 </a:solidFill>
                 <a:latin typeface="Arial"/>
               </a:rPr>
-              <a:t>Soleus reinforces a mitochondrial and lipid program</a:t>
+              <a:t>Thymus points to lower proliferative renewal</a:t>
             </a:r>
           </a:p>
         </p:txBody>
@@ -22518,14 +22595,14 @@
                 </a:solidFill>
                 <a:latin typeface="Arial"/>
               </a:rPr>
-              <a:t>This result strengthens an existing real-data pattern rather than promoting a new soleus gene.</a:t>
+              <a:t>The core panel recovers cell-cycle biology; two flight-higher genes extend the hypothesis.</a:t>
             </a:r>
           </a:p>
         </p:txBody>
       </p:sp>
       <p:pic>
         <p:nvPicPr>
-          <p:cNvPr id="7" name="Soleus gene effects and Reactome processes" descr="Soleus gene effects and Reactome processes"/>
+          <p:cNvPr id="7" name="Thymus gene effects and Reactome processes" descr="Thymus gene effects and Reactome processes"/>
           <p:cNvPicPr>
             <a:picLocks noChangeAspect="1"/>
           </p:cNvPicPr>
@@ -22539,8 +22616,8 @@
         </p:blipFill>
         <p:spPr>
           <a:xfrm>
-            <a:off x="310896" y="1984025"/>
-            <a:ext cx="8366760" cy="3914076"/>
+            <a:off x="320040" y="1895403"/>
+            <a:ext cx="7818120" cy="4109608"/>
           </a:xfrm>
           <a:prstGeom prst="rect">
             <a:avLst/>
@@ -22555,18 +22632,18 @@
         </p:nvSpPr>
         <p:spPr>
           <a:xfrm>
-            <a:off x="8805672" y="1865376"/>
-            <a:ext cx="2971800" cy="4133087"/>
+            <a:off x="8321040" y="1847088"/>
+            <a:ext cx="3493008" cy="4178808"/>
           </a:xfrm>
           <a:prstGeom prst="roundRect">
             <a:avLst/>
           </a:prstGeom>
           <a:solidFill>
-            <a:srgbClr val="E8F3F1"/>
+            <a:srgbClr val="F8ECE9"/>
           </a:solidFill>
           <a:ln w="10160">
             <a:solidFill>
-              <a:srgbClr val="C7DDD8"/>
+              <a:srgbClr val="E8C9C2"/>
             </a:solidFill>
           </a:ln>
         </p:spPr>
@@ -22600,8 +22677,8 @@
         </p:nvSpPr>
         <p:spPr>
           <a:xfrm>
-            <a:off x="9043416" y="2139696"/>
-            <a:ext cx="2487168" cy="384048"/>
+            <a:off x="8622792" y="2139696"/>
+            <a:ext cx="1005840" cy="594360"/>
           </a:xfrm>
           <a:prstGeom prst="rect">
             <a:avLst/>
@@ -22614,19 +22691,19 @@
           </a:bodyPr>
           <a:lstStyle/>
           <a:p>
-            <a:pPr algn="ctr">
+            <a:pPr algn="l">
               <a:spcAft>
                 <a:spcPts val="0"/>
               </a:spcAft>
             </a:pPr>
             <a:r>
-              <a:rPr sz="2000" b="1" i="0">
-                <a:solidFill>
-                  <a:srgbClr val="178681"/>
+              <a:rPr sz="3500" b="1" i="0">
+                <a:solidFill>
+                  <a:srgbClr val="D96552"/>
                 </a:solidFill>
                 <a:latin typeface="Arial"/>
               </a:rPr>
-              <a:t>0.925 -&gt; 0.963</a:t>
+              <a:t>16</a:t>
             </a:r>
           </a:p>
         </p:txBody>
@@ -22639,8 +22716,8 @@
         </p:nvSpPr>
         <p:spPr>
           <a:xfrm>
-            <a:off x="9125712" y="2542032"/>
-            <a:ext cx="2331720" cy="256032"/>
+            <a:off x="9491472" y="2176272"/>
+            <a:ext cx="1938528" cy="566928"/>
           </a:xfrm>
           <a:prstGeom prst="rect">
             <a:avLst/>
@@ -22653,19 +22730,20 @@
           </a:bodyPr>
           <a:lstStyle/>
           <a:p>
-            <a:pPr algn="ctr">
+            <a:pPr algn="l">
               <a:spcAft>
                 <a:spcPts val="0"/>
               </a:spcAft>
             </a:pPr>
             <a:r>
-              <a:rPr sz="1250" b="0" i="0">
-                <a:solidFill>
-                  <a:srgbClr val="59697A"/>
+              <a:rPr sz="1400" b="1" i="0">
+                <a:solidFill>
+                  <a:srgbClr val="263746"/>
                 </a:solidFill>
                 <a:latin typeface="Arial"/>
               </a:rPr>
-              <a:t>balanced accuracy</a:t>
+              <a:t>synthetic-informed
+BH-FDR associations</a:t>
             </a:r>
           </a:p>
         </p:txBody>
@@ -22678,8 +22756,8 @@
         </p:nvSpPr>
         <p:spPr>
           <a:xfrm>
-            <a:off x="9025128" y="2990088"/>
-            <a:ext cx="2532888" cy="310896"/>
+            <a:off x="8631936" y="2862072"/>
+            <a:ext cx="2788920" cy="274320"/>
           </a:xfrm>
           <a:prstGeom prst="rect">
             <a:avLst/>
@@ -22692,19 +22770,19 @@
           </a:bodyPr>
           <a:lstStyle/>
           <a:p>
-            <a:pPr algn="ctr">
+            <a:pPr algn="l">
               <a:spcAft>
                 <a:spcPts val="0"/>
               </a:spcAft>
             </a:pPr>
             <a:r>
-              <a:rPr sz="1500" b="1" i="0">
-                <a:solidFill>
-                  <a:srgbClr val="082B55"/>
+              <a:rPr sz="1400" b="1" i="0">
+                <a:solidFill>
+                  <a:srgbClr val="178681"/>
                 </a:solidFill>
                 <a:latin typeface="Arial"/>
               </a:rPr>
-              <a:t>5 reinforced | 0 promoted</a:t>
+              <a:t>13 promoted | 3 reinforced</a:t>
             </a:r>
           </a:p>
         </p:txBody>
@@ -22717,14 +22795,14 @@
         </p:nvSpPr>
         <p:spPr>
           <a:xfrm>
-            <a:off x="9089136" y="3566160"/>
+            <a:off x="8631936" y="3337560"/>
             <a:ext cx="91440" cy="91440"/>
           </a:xfrm>
           <a:prstGeom prst="ellipse">
             <a:avLst/>
           </a:prstGeom>
           <a:solidFill>
-            <a:srgbClr val="178681"/>
+            <a:srgbClr val="D96552"/>
           </a:solidFill>
           <a:ln>
             <a:noFill/>
@@ -22760,8 +22838,8 @@
         </p:nvSpPr>
         <p:spPr>
           <a:xfrm>
-            <a:off x="9253728" y="3456432"/>
-            <a:ext cx="2157984" cy="530352"/>
+            <a:off x="8796528" y="3227832"/>
+            <a:ext cx="2606039" cy="585216"/>
           </a:xfrm>
           <a:prstGeom prst="rect">
             <a:avLst/>
@@ -22780,13 +22858,13 @@
               </a:spcAft>
             </a:pPr>
             <a:r>
-              <a:rPr sz="1280" b="0" i="0">
+              <a:rPr sz="1220" b="0" i="0">
                 <a:solidFill>
                   <a:srgbClr val="263746"/>
                 </a:solidFill>
                 <a:latin typeface="Arial"/>
               </a:rPr>
-              <a:t>Lower Bdh1, Ech1, Bnip3 and Decr1</a:t>
+              <a:t>Lower Nusap1, Stmn1, Birc5, Cdk1, Top2a and related genes</a:t>
             </a:r>
           </a:p>
         </p:txBody>
@@ -22799,14 +22877,14 @@
         </p:nvSpPr>
         <p:spPr>
           <a:xfrm>
-            <a:off x="9089136" y="4096511"/>
+            <a:off x="8631936" y="3922776"/>
             <a:ext cx="91440" cy="91440"/>
           </a:xfrm>
           <a:prstGeom prst="ellipse">
             <a:avLst/>
           </a:prstGeom>
           <a:solidFill>
-            <a:srgbClr val="178681"/>
+            <a:srgbClr val="D96552"/>
           </a:solidFill>
           <a:ln>
             <a:noFill/>
@@ -22842,8 +22920,8 @@
         </p:nvSpPr>
         <p:spPr>
           <a:xfrm>
-            <a:off x="9253728" y="3986783"/>
-            <a:ext cx="2157984" cy="530352"/>
+            <a:off x="8796528" y="3813048"/>
+            <a:ext cx="2606039" cy="585216"/>
           </a:xfrm>
           <a:prstGeom prst="rect">
             <a:avLst/>
@@ -22862,13 +22940,13 @@
               </a:spcAft>
             </a:pPr>
             <a:r>
-              <a:rPr sz="1280" b="0" i="0">
+              <a:rPr sz="1220" b="0" i="0">
                 <a:solidFill>
                   <a:srgbClr val="263746"/>
                 </a:solidFill>
                 <a:latin typeface="Arial"/>
               </a:rPr>
-              <a:t>Higher Tpm1</a:t>
+              <a:t>Cell cycle, DNA replication, APC/C and G2/M processes</a:t>
             </a:r>
           </a:p>
         </p:txBody>
@@ -22881,14 +22959,14 @@
         </p:nvSpPr>
         <p:spPr>
           <a:xfrm>
-            <a:off x="9089136" y="4626864"/>
+            <a:off x="8631936" y="4507992"/>
             <a:ext cx="91440" cy="91440"/>
           </a:xfrm>
           <a:prstGeom prst="ellipse">
             <a:avLst/>
           </a:prstGeom>
           <a:solidFill>
-            <a:srgbClr val="178681"/>
+            <a:srgbClr val="D96552"/>
           </a:solidFill>
           <a:ln>
             <a:noFill/>
@@ -22924,8 +23002,8 @@
         </p:nvSpPr>
         <p:spPr>
           <a:xfrm>
-            <a:off x="9253728" y="4517136"/>
-            <a:ext cx="2157984" cy="530352"/>
+            <a:off x="8796528" y="4398264"/>
+            <a:ext cx="2606039" cy="585216"/>
           </a:xfrm>
           <a:prstGeom prst="rect">
             <a:avLst/>
@@ -22944,13 +23022,13 @@
               </a:spcAft>
             </a:pPr>
             <a:r>
-              <a:rPr sz="1280" b="0" i="0">
+              <a:rPr sz="1220" b="0" i="0">
                 <a:solidFill>
                   <a:srgbClr val="263746"/>
                 </a:solidFill>
                 <a:latin typeface="Arial"/>
               </a:rPr>
-              <a:t>Mitochondrial turnover and fatty-acid metabolism</a:t>
+              <a:t>Higher Hsd17b11 and Etv1 suggest lipid or T-cell-state shifts</a:t>
             </a:r>
           </a:p>
         </p:txBody>
@@ -22963,14 +23041,14 @@
         </p:nvSpPr>
         <p:spPr>
           <a:xfrm>
-            <a:off x="9089136" y="5157216"/>
+            <a:off x="8631936" y="5093207"/>
             <a:ext cx="91440" cy="91440"/>
           </a:xfrm>
           <a:prstGeom prst="ellipse">
             <a:avLst/>
           </a:prstGeom>
           <a:solidFill>
-            <a:srgbClr val="178681"/>
+            <a:srgbClr val="D96552"/>
           </a:solidFill>
           <a:ln>
             <a:noFill/>
@@ -23006,8 +23084,8 @@
         </p:nvSpPr>
         <p:spPr>
           <a:xfrm>
-            <a:off x="9253728" y="5047488"/>
-            <a:ext cx="2157984" cy="530352"/>
+            <a:off x="8796528" y="4983479"/>
+            <a:ext cx="2606039" cy="585216"/>
           </a:xfrm>
           <a:prstGeom prst="rect">
             <a:avLst/>
@@ -23026,13 +23104,13 @@
               </a:spcAft>
             </a:pPr>
             <a:r>
-              <a:rPr sz="1280" b="0" i="0">
+              <a:rPr sz="1220" b="0" i="0">
                 <a:solidFill>
                   <a:srgbClr val="263746"/>
                 </a:solidFill>
                 <a:latin typeface="Arial"/>
               </a:rPr>
-              <a:t>Compatible with unloading and contractile remodeling</a:t>
+              <a:t>Bulk RNA-seq cannot separate cell loss from lower transcription</a:t>
             </a:r>
           </a:p>
         </p:txBody>
@@ -23071,7 +23149,7 @@
                 </a:solidFill>
                 <a:latin typeface="Arial"/>
               </a:rPr>
-              <a:t>Literature context: Gambara et al. (2017) and Stein et al. (2002).</a:t>
+              <a:t>Context: Gridley et al. (2013), Horie et al. (2019), Keenan et al. (2025), and Shi et al. (2026).</a:t>
             </a:r>
           </a:p>
         </p:txBody>
@@ -23162,7 +23240,7 @@
                 </a:solidFill>
                 <a:latin typeface="Arial"/>
               </a:rPr>
-              <a:t>OTHER TISSUES</a:t>
+              <a:t>SOLEUS</a:t>
             </a:r>
           </a:p>
         </p:txBody>
@@ -23201,7 +23279,7 @@
                 </a:solidFill>
                 <a:latin typeface="Arial"/>
               </a:rPr>
-              <a:t>Kidney adds a focused signal; other tissues are exploratory</a:t>
+              <a:t>Soleus reinforces a mitochondrial and lipid program</a:t>
             </a:r>
           </a:p>
         </p:txBody>
@@ -23240,31 +23318,55 @@
                 </a:solidFill>
                 <a:latin typeface="Arial"/>
               </a:rPr>
-              <a:t>The strongest process-level stories were thymus and soleus, but several tissues produced narrower candidates.</a:t>
-            </a:r>
-          </a:p>
-        </p:txBody>
-      </p:sp>
-      <p:sp>
-        <p:nvSpPr>
-          <p:cNvPr id="7" name="Rectangle 6"/>
+              <a:t>This result strengthens an existing real-data pattern rather than promoting a new soleus gene.</a:t>
+            </a:r>
+          </a:p>
+        </p:txBody>
+      </p:sp>
+      <p:pic>
+        <p:nvPicPr>
+          <p:cNvPr id="7" name="Soleus gene effects and Reactome processes" descr="Soleus gene effects and Reactome processes"/>
+          <p:cNvPicPr>
+            <a:picLocks noChangeAspect="1"/>
+          </p:cNvPicPr>
+          <p:nvPr/>
+        </p:nvPicPr>
+        <p:blipFill>
+          <a:blip r:embed="rId2"/>
+          <a:stretch>
+            <a:fillRect/>
+          </a:stretch>
+        </p:blipFill>
+        <p:spPr>
+          <a:xfrm>
+            <a:off x="310896" y="1984025"/>
+            <a:ext cx="8366760" cy="3914076"/>
+          </a:xfrm>
+          <a:prstGeom prst="rect">
+            <a:avLst/>
+          </a:prstGeom>
+        </p:spPr>
+      </p:pic>
+      <p:sp>
+        <p:nvSpPr>
+          <p:cNvPr id="8" name="Rounded Rectangle 7"/>
           <p:cNvSpPr/>
           <p:nvPr/>
         </p:nvSpPr>
         <p:spPr>
           <a:xfrm>
-            <a:off x="393192" y="1847088"/>
-            <a:ext cx="11375136" cy="667512"/>
-          </a:xfrm>
-          <a:prstGeom prst="rect">
+            <a:off x="8805672" y="1865376"/>
+            <a:ext cx="2971800" cy="4133087"/>
+          </a:xfrm>
+          <a:prstGeom prst="roundRect">
             <a:avLst/>
           </a:prstGeom>
           <a:solidFill>
-            <a:srgbClr val="E9F1F7"/>
+            <a:srgbClr val="E8F3F1"/>
           </a:solidFill>
           <a:ln w="10160">
             <a:solidFill>
-              <a:srgbClr val="DDE4E8"/>
+              <a:srgbClr val="C7DDD8"/>
             </a:solidFill>
           </a:ln>
         </p:spPr>
@@ -23292,57 +23394,14 @@
       </p:sp>
       <p:sp>
         <p:nvSpPr>
-          <p:cNvPr id="8" name="Rectangle 7"/>
-          <p:cNvSpPr/>
-          <p:nvPr/>
-        </p:nvSpPr>
-        <p:spPr>
-          <a:xfrm>
-            <a:off x="393192" y="1847088"/>
-            <a:ext cx="73152" cy="667512"/>
-          </a:xfrm>
-          <a:prstGeom prst="rect">
-            <a:avLst/>
-          </a:prstGeom>
-          <a:solidFill>
-            <a:srgbClr val="2D6496"/>
-          </a:solidFill>
-          <a:ln>
-            <a:noFill/>
-          </a:ln>
-        </p:spPr>
-        <p:style>
-          <a:lnRef idx="1">
-            <a:schemeClr val="accent1"/>
-          </a:lnRef>
-          <a:fillRef idx="3">
-            <a:schemeClr val="accent1"/>
-          </a:fillRef>
-          <a:effectRef idx="2">
-            <a:schemeClr val="accent1"/>
-          </a:effectRef>
-          <a:fontRef idx="minor">
-            <a:schemeClr val="lt1"/>
-          </a:fontRef>
-        </p:style>
-        <p:txBody>
-          <a:bodyPr rtlCol="0" anchor="ctr"/>
-          <a:lstStyle/>
-          <a:p>
-            <a:pPr algn="ctr"/>
-          </a:p>
-        </p:txBody>
-      </p:sp>
-      <p:sp>
-        <p:nvSpPr>
           <p:cNvPr id="9" name="TextBox 8"/>
           <p:cNvSpPr txBox="1"/>
           <p:nvPr/>
         </p:nvSpPr>
         <p:spPr>
           <a:xfrm>
-            <a:off x="640080" y="2002536"/>
-            <a:ext cx="1938528" cy="310896"/>
+            <a:off x="9043416" y="2139696"/>
+            <a:ext cx="2487168" cy="384048"/>
           </a:xfrm>
           <a:prstGeom prst="rect">
             <a:avLst/>
@@ -23351,84 +23410,6 @@
         </p:spPr>
         <p:txBody>
           <a:bodyPr wrap="square" lIns="18288" rIns="18288" tIns="18288" bIns="18288" anchor="t">
-            <a:spAutoFit/>
-          </a:bodyPr>
-          <a:lstStyle/>
-          <a:p>
-            <a:pPr algn="l">
-              <a:spcAft>
-                <a:spcPts val="0"/>
-              </a:spcAft>
-            </a:pPr>
-            <a:r>
-              <a:rPr sz="1600" b="1" i="0">
-                <a:solidFill>
-                  <a:srgbClr val="2D6496"/>
-                </a:solidFill>
-                <a:latin typeface="Arial"/>
-              </a:rPr>
-              <a:t>Kidney</a:t>
-            </a:r>
-          </a:p>
-        </p:txBody>
-      </p:sp>
-      <p:sp>
-        <p:nvSpPr>
-          <p:cNvPr id="10" name="TextBox 9"/>
-          <p:cNvSpPr txBox="1"/>
-          <p:nvPr/>
-        </p:nvSpPr>
-        <p:spPr>
-          <a:xfrm>
-            <a:off x="2551176" y="1975104"/>
-            <a:ext cx="7040880" cy="365760"/>
-          </a:xfrm>
-          <a:prstGeom prst="rect">
-            <a:avLst/>
-          </a:prstGeom>
-          <a:noFill/>
-        </p:spPr>
-        <p:txBody>
-          <a:bodyPr wrap="square" lIns="18288" rIns="18288" tIns="18288" bIns="18288" anchor="ctr">
-            <a:spAutoFit/>
-          </a:bodyPr>
-          <a:lstStyle/>
-          <a:p>
-            <a:pPr algn="l">
-              <a:spcAft>
-                <a:spcPts val="0"/>
-              </a:spcAft>
-            </a:pPr>
-            <a:r>
-              <a:rPr sz="1400" b="0" i="0">
-                <a:solidFill>
-                  <a:srgbClr val="263746"/>
-                </a:solidFill>
-                <a:latin typeface="Arial"/>
-              </a:rPr>
-              <a:t>Inpp4b promoted, Slc37a4 reinforced; both higher in flight</a:t>
-            </a:r>
-          </a:p>
-        </p:txBody>
-      </p:sp>
-      <p:sp>
-        <p:nvSpPr>
-          <p:cNvPr id="11" name="TextBox 10"/>
-          <p:cNvSpPr txBox="1"/>
-          <p:nvPr/>
-        </p:nvSpPr>
-        <p:spPr>
-          <a:xfrm>
-            <a:off x="9756648" y="1993392"/>
-            <a:ext cx="1682496" cy="310896"/>
-          </a:xfrm>
-          <a:prstGeom prst="rect">
-            <a:avLst/>
-          </a:prstGeom>
-          <a:noFill/>
-        </p:spPr>
-        <p:txBody>
-          <a:bodyPr wrap="square" lIns="18288" rIns="18288" tIns="18288" bIns="18288" anchor="ctr">
             <a:spAutoFit/>
           </a:bodyPr>
           <a:lstStyle/>
@@ -23439,115 +23420,27 @@
               </a:spcAft>
             </a:pPr>
             <a:r>
-              <a:rPr sz="1250" b="1" i="0">
-                <a:solidFill>
-                  <a:srgbClr val="2D6496"/>
+              <a:rPr sz="2000" b="1" i="0">
+                <a:solidFill>
+                  <a:srgbClr val="178681"/>
                 </a:solidFill>
                 <a:latin typeface="Arial"/>
               </a:rPr>
-              <a:t>Focused secondary</a:t>
-            </a:r>
-          </a:p>
-        </p:txBody>
-      </p:sp>
-      <p:sp>
-        <p:nvSpPr>
-          <p:cNvPr id="12" name="Rectangle 11"/>
-          <p:cNvSpPr/>
-          <p:nvPr/>
-        </p:nvSpPr>
-        <p:spPr>
-          <a:xfrm>
-            <a:off x="393192" y="2660904"/>
-            <a:ext cx="11375136" cy="667512"/>
-          </a:xfrm>
-          <a:prstGeom prst="rect">
-            <a:avLst/>
-          </a:prstGeom>
-          <a:solidFill>
-            <a:srgbClr val="F0ECF6"/>
-          </a:solidFill>
-          <a:ln w="10160">
-            <a:solidFill>
-              <a:srgbClr val="DDE4E8"/>
-            </a:solidFill>
-          </a:ln>
-        </p:spPr>
-        <p:style>
-          <a:lnRef idx="1">
-            <a:schemeClr val="accent1"/>
-          </a:lnRef>
-          <a:fillRef idx="3">
-            <a:schemeClr val="accent1"/>
-          </a:fillRef>
-          <a:effectRef idx="2">
-            <a:schemeClr val="accent1"/>
-          </a:effectRef>
-          <a:fontRef idx="minor">
-            <a:schemeClr val="lt1"/>
-          </a:fontRef>
-        </p:style>
-        <p:txBody>
-          <a:bodyPr rtlCol="0" anchor="ctr"/>
-          <a:lstStyle/>
-          <a:p>
-            <a:pPr algn="ctr"/>
-          </a:p>
-        </p:txBody>
-      </p:sp>
-      <p:sp>
-        <p:nvSpPr>
-          <p:cNvPr id="13" name="Rectangle 12"/>
-          <p:cNvSpPr/>
-          <p:nvPr/>
-        </p:nvSpPr>
-        <p:spPr>
-          <a:xfrm>
-            <a:off x="393192" y="2660904"/>
-            <a:ext cx="73152" cy="667512"/>
-          </a:xfrm>
-          <a:prstGeom prst="rect">
-            <a:avLst/>
-          </a:prstGeom>
-          <a:solidFill>
-            <a:srgbClr val="8063A6"/>
-          </a:solidFill>
-          <a:ln>
-            <a:noFill/>
-          </a:ln>
-        </p:spPr>
-        <p:style>
-          <a:lnRef idx="1">
-            <a:schemeClr val="accent1"/>
-          </a:lnRef>
-          <a:fillRef idx="3">
-            <a:schemeClr val="accent1"/>
-          </a:fillRef>
-          <a:effectRef idx="2">
-            <a:schemeClr val="accent1"/>
-          </a:effectRef>
-          <a:fontRef idx="minor">
-            <a:schemeClr val="lt1"/>
-          </a:fontRef>
-        </p:style>
-        <p:txBody>
-          <a:bodyPr rtlCol="0" anchor="ctr"/>
-          <a:lstStyle/>
-          <a:p>
-            <a:pPr algn="ctr"/>
-          </a:p>
-        </p:txBody>
-      </p:sp>
-      <p:sp>
-        <p:nvSpPr>
-          <p:cNvPr id="14" name="TextBox 13"/>
+              <a:t>0.925 -&gt; 0.963</a:t>
+            </a:r>
+          </a:p>
+        </p:txBody>
+      </p:sp>
+      <p:sp>
+        <p:nvSpPr>
+          <p:cNvPr id="10" name="TextBox 9"/>
           <p:cNvSpPr txBox="1"/>
           <p:nvPr/>
         </p:nvSpPr>
         <p:spPr>
           <a:xfrm>
-            <a:off x="640080" y="2816352"/>
-            <a:ext cx="1938528" cy="310896"/>
+            <a:off x="9125712" y="2542032"/>
+            <a:ext cx="2331720" cy="256032"/>
           </a:xfrm>
           <a:prstGeom prst="rect">
             <a:avLst/>
@@ -23556,84 +23449,6 @@
         </p:spPr>
         <p:txBody>
           <a:bodyPr wrap="square" lIns="18288" rIns="18288" tIns="18288" bIns="18288" anchor="t">
-            <a:spAutoFit/>
-          </a:bodyPr>
-          <a:lstStyle/>
-          <a:p>
-            <a:pPr algn="l">
-              <a:spcAft>
-                <a:spcPts val="0"/>
-              </a:spcAft>
-            </a:pPr>
-            <a:r>
-              <a:rPr sz="1600" b="1" i="0">
-                <a:solidFill>
-                  <a:srgbClr val="8063A6"/>
-                </a:solidFill>
-                <a:latin typeface="Arial"/>
-              </a:rPr>
-              <a:t>Spleen</a:t>
-            </a:r>
-          </a:p>
-        </p:txBody>
-      </p:sp>
-      <p:sp>
-        <p:nvSpPr>
-          <p:cNvPr id="15" name="TextBox 14"/>
-          <p:cNvSpPr txBox="1"/>
-          <p:nvPr/>
-        </p:nvSpPr>
-        <p:spPr>
-          <a:xfrm>
-            <a:off x="2551176" y="2788920"/>
-            <a:ext cx="7040880" cy="365760"/>
-          </a:xfrm>
-          <a:prstGeom prst="rect">
-            <a:avLst/>
-          </a:prstGeom>
-          <a:noFill/>
-        </p:spPr>
-        <p:txBody>
-          <a:bodyPr wrap="square" lIns="18288" rIns="18288" tIns="18288" bIns="18288" anchor="ctr">
-            <a:spAutoFit/>
-          </a:bodyPr>
-          <a:lstStyle/>
-          <a:p>
-            <a:pPr algn="l">
-              <a:spcAft>
-                <a:spcPts val="0"/>
-              </a:spcAft>
-            </a:pPr>
-            <a:r>
-              <a:rPr sz="1400" b="0" i="0">
-                <a:solidFill>
-                  <a:srgbClr val="263746"/>
-                </a:solidFill>
-                <a:latin typeface="Arial"/>
-              </a:rPr>
-              <a:t>Rai14, Ptprk and Myl9 promoted; Loxl1 reinforced; no Reactome enrichment</a:t>
-            </a:r>
-          </a:p>
-        </p:txBody>
-      </p:sp>
-      <p:sp>
-        <p:nvSpPr>
-          <p:cNvPr id="16" name="TextBox 15"/>
-          <p:cNvSpPr txBox="1"/>
-          <p:nvPr/>
-        </p:nvSpPr>
-        <p:spPr>
-          <a:xfrm>
-            <a:off x="9756648" y="2807208"/>
-            <a:ext cx="1682496" cy="310896"/>
-          </a:xfrm>
-          <a:prstGeom prst="rect">
-            <a:avLst/>
-          </a:prstGeom>
-          <a:noFill/>
-        </p:spPr>
-        <p:txBody>
-          <a:bodyPr wrap="square" lIns="18288" rIns="18288" tIns="18288" bIns="18288" anchor="ctr">
             <a:spAutoFit/>
           </a:bodyPr>
           <a:lstStyle/>
@@ -23644,115 +23459,27 @@
               </a:spcAft>
             </a:pPr>
             <a:r>
-              <a:rPr sz="1250" b="1" i="0">
-                <a:solidFill>
-                  <a:srgbClr val="8063A6"/>
+              <a:rPr sz="1250" b="0" i="0">
+                <a:solidFill>
+                  <a:srgbClr val="59697A"/>
                 </a:solidFill>
                 <a:latin typeface="Arial"/>
               </a:rPr>
-              <a:t>Exploratory</a:t>
-            </a:r>
-          </a:p>
-        </p:txBody>
-      </p:sp>
-      <p:sp>
-        <p:nvSpPr>
-          <p:cNvPr id="17" name="Rectangle 16"/>
-          <p:cNvSpPr/>
-          <p:nvPr/>
-        </p:nvSpPr>
-        <p:spPr>
-          <a:xfrm>
-            <a:off x="393192" y="3474720"/>
-            <a:ext cx="11375136" cy="667512"/>
-          </a:xfrm>
-          <a:prstGeom prst="rect">
-            <a:avLst/>
-          </a:prstGeom>
-          <a:solidFill>
-            <a:srgbClr val="F8F1E2"/>
-          </a:solidFill>
-          <a:ln w="10160">
-            <a:solidFill>
-              <a:srgbClr val="DDE4E8"/>
-            </a:solidFill>
-          </a:ln>
-        </p:spPr>
-        <p:style>
-          <a:lnRef idx="1">
-            <a:schemeClr val="accent1"/>
-          </a:lnRef>
-          <a:fillRef idx="3">
-            <a:schemeClr val="accent1"/>
-          </a:fillRef>
-          <a:effectRef idx="2">
-            <a:schemeClr val="accent1"/>
-          </a:effectRef>
-          <a:fontRef idx="minor">
-            <a:schemeClr val="lt1"/>
-          </a:fontRef>
-        </p:style>
-        <p:txBody>
-          <a:bodyPr rtlCol="0" anchor="ctr"/>
-          <a:lstStyle/>
-          <a:p>
-            <a:pPr algn="ctr"/>
-          </a:p>
-        </p:txBody>
-      </p:sp>
-      <p:sp>
-        <p:nvSpPr>
-          <p:cNvPr id="18" name="Rectangle 17"/>
-          <p:cNvSpPr/>
-          <p:nvPr/>
-        </p:nvSpPr>
-        <p:spPr>
-          <a:xfrm>
-            <a:off x="393192" y="3474720"/>
-            <a:ext cx="73152" cy="667512"/>
-          </a:xfrm>
-          <a:prstGeom prst="rect">
-            <a:avLst/>
-          </a:prstGeom>
-          <a:solidFill>
-            <a:srgbClr val="D37B00"/>
-          </a:solidFill>
-          <a:ln>
-            <a:noFill/>
-          </a:ln>
-        </p:spPr>
-        <p:style>
-          <a:lnRef idx="1">
-            <a:schemeClr val="accent1"/>
-          </a:lnRef>
-          <a:fillRef idx="3">
-            <a:schemeClr val="accent1"/>
-          </a:fillRef>
-          <a:effectRef idx="2">
-            <a:schemeClr val="accent1"/>
-          </a:effectRef>
-          <a:fontRef idx="minor">
-            <a:schemeClr val="lt1"/>
-          </a:fontRef>
-        </p:style>
-        <p:txBody>
-          <a:bodyPr rtlCol="0" anchor="ctr"/>
-          <a:lstStyle/>
-          <a:p>
-            <a:pPr algn="ctr"/>
-          </a:p>
-        </p:txBody>
-      </p:sp>
-      <p:sp>
-        <p:nvSpPr>
-          <p:cNvPr id="19" name="TextBox 18"/>
+              <a:t>balanced accuracy</a:t>
+            </a:r>
+          </a:p>
+        </p:txBody>
+      </p:sp>
+      <p:sp>
+        <p:nvSpPr>
+          <p:cNvPr id="11" name="TextBox 10"/>
           <p:cNvSpPr txBox="1"/>
           <p:nvPr/>
         </p:nvSpPr>
         <p:spPr>
           <a:xfrm>
-            <a:off x="640080" y="3630168"/>
-            <a:ext cx="1938528" cy="310896"/>
+            <a:off x="9025128" y="2990088"/>
+            <a:ext cx="2532888" cy="310896"/>
           </a:xfrm>
           <a:prstGeom prst="rect">
             <a:avLst/>
@@ -23761,84 +23488,6 @@
         </p:spPr>
         <p:txBody>
           <a:bodyPr wrap="square" lIns="18288" rIns="18288" tIns="18288" bIns="18288" anchor="t">
-            <a:spAutoFit/>
-          </a:bodyPr>
-          <a:lstStyle/>
-          <a:p>
-            <a:pPr algn="l">
-              <a:spcAft>
-                <a:spcPts val="0"/>
-              </a:spcAft>
-            </a:pPr>
-            <a:r>
-              <a:rPr sz="1600" b="1" i="0">
-                <a:solidFill>
-                  <a:srgbClr val="D37B00"/>
-                </a:solidFill>
-                <a:latin typeface="Arial"/>
-              </a:rPr>
-              <a:t>Skin + adrenal</a:t>
-            </a:r>
-          </a:p>
-        </p:txBody>
-      </p:sp>
-      <p:sp>
-        <p:nvSpPr>
-          <p:cNvPr id="20" name="TextBox 19"/>
-          <p:cNvSpPr txBox="1"/>
-          <p:nvPr/>
-        </p:nvSpPr>
-        <p:spPr>
-          <a:xfrm>
-            <a:off x="2551176" y="3602736"/>
-            <a:ext cx="7040880" cy="365760"/>
-          </a:xfrm>
-          <a:prstGeom prst="rect">
-            <a:avLst/>
-          </a:prstGeom>
-          <a:noFill/>
-        </p:spPr>
-        <p:txBody>
-          <a:bodyPr wrap="square" lIns="18288" rIns="18288" tIns="18288" bIns="18288" anchor="ctr">
-            <a:spAutoFit/>
-          </a:bodyPr>
-          <a:lstStyle/>
-          <a:p>
-            <a:pPr algn="l">
-              <a:spcAft>
-                <a:spcPts val="0"/>
-              </a:spcAft>
-            </a:pPr>
-            <a:r>
-              <a:rPr sz="1400" b="0" i="0">
-                <a:solidFill>
-                  <a:srgbClr val="263746"/>
-                </a:solidFill>
-                <a:latin typeface="Arial"/>
-              </a:rPr>
-              <a:t>Plscr1 higher in skin; Psmb8 and Tspan4 lower in adrenal</a:t>
-            </a:r>
-          </a:p>
-        </p:txBody>
-      </p:sp>
-      <p:sp>
-        <p:nvSpPr>
-          <p:cNvPr id="21" name="TextBox 20"/>
-          <p:cNvSpPr txBox="1"/>
-          <p:nvPr/>
-        </p:nvSpPr>
-        <p:spPr>
-          <a:xfrm>
-            <a:off x="9756648" y="3621024"/>
-            <a:ext cx="1682496" cy="310896"/>
-          </a:xfrm>
-          <a:prstGeom prst="rect">
-            <a:avLst/>
-          </a:prstGeom>
-          <a:noFill/>
-        </p:spPr>
-        <p:txBody>
-          <a:bodyPr wrap="square" lIns="18288" rIns="18288" tIns="18288" bIns="18288" anchor="ctr">
             <a:spAutoFit/>
           </a:bodyPr>
           <a:lstStyle/>
@@ -23849,74 +23498,29 @@
               </a:spcAft>
             </a:pPr>
             <a:r>
-              <a:rPr sz="1250" b="1" i="0">
-                <a:solidFill>
-                  <a:srgbClr val="D37B00"/>
+              <a:rPr sz="1500" b="1" i="0">
+                <a:solidFill>
+                  <a:srgbClr val="082B55"/>
                 </a:solidFill>
                 <a:latin typeface="Arial"/>
               </a:rPr>
-              <a:t>Exploratory</a:t>
-            </a:r>
-          </a:p>
-        </p:txBody>
-      </p:sp>
-      <p:sp>
-        <p:nvSpPr>
-          <p:cNvPr id="22" name="Rectangle 21"/>
+              <a:t>5 reinforced | 0 promoted</a:t>
+            </a:r>
+          </a:p>
+        </p:txBody>
+      </p:sp>
+      <p:sp>
+        <p:nvSpPr>
+          <p:cNvPr id="12" name="Oval 11"/>
           <p:cNvSpPr/>
           <p:nvPr/>
         </p:nvSpPr>
         <p:spPr>
           <a:xfrm>
-            <a:off x="393192" y="4288536"/>
-            <a:ext cx="11375136" cy="667512"/>
-          </a:xfrm>
-          <a:prstGeom prst="rect">
-            <a:avLst/>
-          </a:prstGeom>
-          <a:solidFill>
-            <a:srgbClr val="E8F3F1"/>
-          </a:solidFill>
-          <a:ln w="10160">
-            <a:solidFill>
-              <a:srgbClr val="DDE4E8"/>
-            </a:solidFill>
-          </a:ln>
-        </p:spPr>
-        <p:style>
-          <a:lnRef idx="1">
-            <a:schemeClr val="accent1"/>
-          </a:lnRef>
-          <a:fillRef idx="3">
-            <a:schemeClr val="accent1"/>
-          </a:fillRef>
-          <a:effectRef idx="2">
-            <a:schemeClr val="accent1"/>
-          </a:effectRef>
-          <a:fontRef idx="minor">
-            <a:schemeClr val="lt1"/>
-          </a:fontRef>
-        </p:style>
-        <p:txBody>
-          <a:bodyPr rtlCol="0" anchor="ctr"/>
-          <a:lstStyle/>
-          <a:p>
-            <a:pPr algn="ctr"/>
-          </a:p>
-        </p:txBody>
-      </p:sp>
-      <p:sp>
-        <p:nvSpPr>
-          <p:cNvPr id="23" name="Rectangle 22"/>
-          <p:cNvSpPr/>
-          <p:nvPr/>
-        </p:nvSpPr>
-        <p:spPr>
-          <a:xfrm>
-            <a:off x="393192" y="4288536"/>
-            <a:ext cx="73152" cy="667512"/>
-          </a:xfrm>
-          <a:prstGeom prst="rect">
+            <a:off x="9089136" y="3566160"/>
+            <a:ext cx="91440" cy="91440"/>
+          </a:xfrm>
+          <a:prstGeom prst="ellipse">
             <a:avLst/>
           </a:prstGeom>
           <a:solidFill>
@@ -23950,14 +23554,14 @@
       </p:sp>
       <p:sp>
         <p:nvSpPr>
-          <p:cNvPr id="24" name="TextBox 23"/>
+          <p:cNvPr id="13" name="TextBox 12"/>
           <p:cNvSpPr txBox="1"/>
           <p:nvPr/>
         </p:nvSpPr>
         <p:spPr>
           <a:xfrm>
-            <a:off x="640080" y="4443983"/>
-            <a:ext cx="1938528" cy="310896"/>
+            <a:off x="9253728" y="3456432"/>
+            <a:ext cx="2157984" cy="530352"/>
           </a:xfrm>
           <a:prstGeom prst="rect">
             <a:avLst/>
@@ -23965,7 +23569,7 @@
           <a:noFill/>
         </p:spPr>
         <p:txBody>
-          <a:bodyPr wrap="square" lIns="18288" rIns="18288" tIns="18288" bIns="18288" anchor="t">
+          <a:bodyPr wrap="square" lIns="18288" rIns="18288" tIns="18288" bIns="18288" anchor="ctr">
             <a:spAutoFit/>
           </a:bodyPr>
           <a:lstStyle/>
@@ -23976,27 +23580,70 @@
               </a:spcAft>
             </a:pPr>
             <a:r>
-              <a:rPr sz="1600" b="1" i="0">
-                <a:solidFill>
-                  <a:srgbClr val="178681"/>
+              <a:rPr sz="1280" b="0" i="0">
+                <a:solidFill>
+                  <a:srgbClr val="263746"/>
                 </a:solidFill>
                 <a:latin typeface="Arial"/>
               </a:rPr>
-              <a:t>Lung + retina</a:t>
-            </a:r>
-          </a:p>
-        </p:txBody>
-      </p:sp>
-      <p:sp>
-        <p:nvSpPr>
-          <p:cNvPr id="25" name="TextBox 24"/>
+              <a:t>Lower Bdh1, Ech1, Bnip3 and Decr1</a:t>
+            </a:r>
+          </a:p>
+        </p:txBody>
+      </p:sp>
+      <p:sp>
+        <p:nvSpPr>
+          <p:cNvPr id="14" name="Oval 13"/>
+          <p:cNvSpPr/>
+          <p:nvPr/>
+        </p:nvSpPr>
+        <p:spPr>
+          <a:xfrm>
+            <a:off x="9089136" y="4096511"/>
+            <a:ext cx="91440" cy="91440"/>
+          </a:xfrm>
+          <a:prstGeom prst="ellipse">
+            <a:avLst/>
+          </a:prstGeom>
+          <a:solidFill>
+            <a:srgbClr val="178681"/>
+          </a:solidFill>
+          <a:ln>
+            <a:noFill/>
+          </a:ln>
+        </p:spPr>
+        <p:style>
+          <a:lnRef idx="1">
+            <a:schemeClr val="accent1"/>
+          </a:lnRef>
+          <a:fillRef idx="3">
+            <a:schemeClr val="accent1"/>
+          </a:fillRef>
+          <a:effectRef idx="2">
+            <a:schemeClr val="accent1"/>
+          </a:effectRef>
+          <a:fontRef idx="minor">
+            <a:schemeClr val="lt1"/>
+          </a:fontRef>
+        </p:style>
+        <p:txBody>
+          <a:bodyPr rtlCol="0" anchor="ctr"/>
+          <a:lstStyle/>
+          <a:p>
+            <a:pPr algn="ctr"/>
+          </a:p>
+        </p:txBody>
+      </p:sp>
+      <p:sp>
+        <p:nvSpPr>
+          <p:cNvPr id="15" name="TextBox 14"/>
           <p:cNvSpPr txBox="1"/>
           <p:nvPr/>
         </p:nvSpPr>
         <p:spPr>
           <a:xfrm>
-            <a:off x="2551176" y="4416551"/>
-            <a:ext cx="7040880" cy="365760"/>
+            <a:off x="9253728" y="3986783"/>
+            <a:ext cx="2157984" cy="530352"/>
           </a:xfrm>
           <a:prstGeom prst="rect">
             <a:avLst/>
@@ -24015,77 +23662,36 @@
               </a:spcAft>
             </a:pPr>
             <a:r>
-              <a:rPr sz="1400" b="0" i="0">
+              <a:rPr sz="1280" b="0" i="0">
                 <a:solidFill>
                   <a:srgbClr val="263746"/>
                 </a:solidFill>
                 <a:latin typeface="Arial"/>
               </a:rPr>
-              <a:t>Predictive gains without a synthetic-informed BH-FDR gene</a:t>
-            </a:r>
-          </a:p>
-        </p:txBody>
-      </p:sp>
-      <p:sp>
-        <p:nvSpPr>
-          <p:cNvPr id="26" name="TextBox 25"/>
-          <p:cNvSpPr txBox="1"/>
-          <p:nvPr/>
-        </p:nvSpPr>
-        <p:spPr>
-          <a:xfrm>
-            <a:off x="9756648" y="4434840"/>
-            <a:ext cx="1682496" cy="310896"/>
-          </a:xfrm>
-          <a:prstGeom prst="rect">
-            <a:avLst/>
-          </a:prstGeom>
-          <a:noFill/>
-        </p:spPr>
-        <p:txBody>
-          <a:bodyPr wrap="square" lIns="18288" rIns="18288" tIns="18288" bIns="18288" anchor="ctr">
-            <a:spAutoFit/>
-          </a:bodyPr>
-          <a:lstStyle/>
-          <a:p>
-            <a:pPr algn="ctr">
-              <a:spcAft>
-                <a:spcPts val="0"/>
-              </a:spcAft>
-            </a:pPr>
-            <a:r>
-              <a:rPr sz="1250" b="1" i="0">
-                <a:solidFill>
-                  <a:srgbClr val="178681"/>
-                </a:solidFill>
-                <a:latin typeface="Arial"/>
-              </a:rPr>
-              <a:t>Prediction only</a:t>
-            </a:r>
-          </a:p>
-        </p:txBody>
-      </p:sp>
-      <p:sp>
-        <p:nvSpPr>
-          <p:cNvPr id="27" name="Rectangle 26"/>
+              <a:t>Higher Tpm1</a:t>
+            </a:r>
+          </a:p>
+        </p:txBody>
+      </p:sp>
+      <p:sp>
+        <p:nvSpPr>
+          <p:cNvPr id="16" name="Oval 15"/>
           <p:cNvSpPr/>
           <p:nvPr/>
         </p:nvSpPr>
         <p:spPr>
           <a:xfrm>
-            <a:off x="393192" y="5102352"/>
-            <a:ext cx="11375136" cy="667512"/>
-          </a:xfrm>
-          <a:prstGeom prst="rect">
+            <a:off x="9089136" y="4626864"/>
+            <a:ext cx="91440" cy="91440"/>
+          </a:xfrm>
+          <a:prstGeom prst="ellipse">
             <a:avLst/>
           </a:prstGeom>
           <a:solidFill>
-            <a:srgbClr val="F2F4F5"/>
+            <a:srgbClr val="178681"/>
           </a:solidFill>
-          <a:ln w="10160">
-            <a:solidFill>
-              <a:srgbClr val="DDE4E8"/>
-            </a:solidFill>
+          <a:ln>
+            <a:noFill/>
           </a:ln>
         </p:spPr>
         <p:style>
@@ -24112,20 +23718,59 @@
       </p:sp>
       <p:sp>
         <p:nvSpPr>
-          <p:cNvPr id="28" name="Rectangle 27"/>
+          <p:cNvPr id="17" name="TextBox 16"/>
+          <p:cNvSpPr txBox="1"/>
+          <p:nvPr/>
+        </p:nvSpPr>
+        <p:spPr>
+          <a:xfrm>
+            <a:off x="9253728" y="4517136"/>
+            <a:ext cx="2157984" cy="530352"/>
+          </a:xfrm>
+          <a:prstGeom prst="rect">
+            <a:avLst/>
+          </a:prstGeom>
+          <a:noFill/>
+        </p:spPr>
+        <p:txBody>
+          <a:bodyPr wrap="square" lIns="18288" rIns="18288" tIns="18288" bIns="18288" anchor="ctr">
+            <a:spAutoFit/>
+          </a:bodyPr>
+          <a:lstStyle/>
+          <a:p>
+            <a:pPr algn="l">
+              <a:spcAft>
+                <a:spcPts val="0"/>
+              </a:spcAft>
+            </a:pPr>
+            <a:r>
+              <a:rPr sz="1280" b="0" i="0">
+                <a:solidFill>
+                  <a:srgbClr val="263746"/>
+                </a:solidFill>
+                <a:latin typeface="Arial"/>
+              </a:rPr>
+              <a:t>Mitochondrial turnover and fatty-acid metabolism</a:t>
+            </a:r>
+          </a:p>
+        </p:txBody>
+      </p:sp>
+      <p:sp>
+        <p:nvSpPr>
+          <p:cNvPr id="18" name="Oval 17"/>
           <p:cNvSpPr/>
           <p:nvPr/>
         </p:nvSpPr>
         <p:spPr>
           <a:xfrm>
-            <a:off x="393192" y="5102352"/>
-            <a:ext cx="73152" cy="667512"/>
-          </a:xfrm>
-          <a:prstGeom prst="rect">
+            <a:off x="9089136" y="5157216"/>
+            <a:ext cx="91440" cy="91440"/>
+          </a:xfrm>
+          <a:prstGeom prst="ellipse">
             <a:avLst/>
           </a:prstGeom>
           <a:solidFill>
-            <a:srgbClr val="8A969E"/>
+            <a:srgbClr val="178681"/>
           </a:solidFill>
           <a:ln>
             <a:noFill/>
@@ -24155,14 +23800,14 @@
       </p:sp>
       <p:sp>
         <p:nvSpPr>
-          <p:cNvPr id="29" name="TextBox 28"/>
+          <p:cNvPr id="19" name="TextBox 18"/>
           <p:cNvSpPr txBox="1"/>
           <p:nvPr/>
         </p:nvSpPr>
         <p:spPr>
           <a:xfrm>
-            <a:off x="640080" y="5257800"/>
-            <a:ext cx="1938528" cy="310896"/>
+            <a:off x="9253728" y="5047488"/>
+            <a:ext cx="2157984" cy="530352"/>
           </a:xfrm>
           <a:prstGeom prst="rect">
             <a:avLst/>
@@ -24170,7 +23815,7 @@
           <a:noFill/>
         </p:spPr>
         <p:txBody>
-          <a:bodyPr wrap="square" lIns="18288" rIns="18288" tIns="18288" bIns="18288" anchor="t">
+          <a:bodyPr wrap="square" lIns="18288" rIns="18288" tIns="18288" bIns="18288" anchor="ctr">
             <a:spAutoFit/>
           </a:bodyPr>
           <a:lstStyle/>
@@ -24181,27 +23826,27 @@
               </a:spcAft>
             </a:pPr>
             <a:r>
-              <a:rPr sz="1600" b="1" i="0">
-                <a:solidFill>
-                  <a:srgbClr val="8A969E"/>
+              <a:rPr sz="1280" b="0" i="0">
+                <a:solidFill>
+                  <a:srgbClr val="263746"/>
                 </a:solidFill>
                 <a:latin typeface="Arial"/>
               </a:rPr>
-              <a:t>Liver + EDL + quadriceps</a:t>
-            </a:r>
-          </a:p>
-        </p:txBody>
-      </p:sp>
-      <p:sp>
-        <p:nvSpPr>
-          <p:cNvPr id="30" name="TextBox 29"/>
+              <a:t>Compatible with unloading and contractile remodeling</a:t>
+            </a:r>
+          </a:p>
+        </p:txBody>
+      </p:sp>
+      <p:sp>
+        <p:nvSpPr>
+          <p:cNvPr id="20" name="TextBox 19"/>
           <p:cNvSpPr txBox="1"/>
           <p:nvPr/>
         </p:nvSpPr>
         <p:spPr>
           <a:xfrm>
-            <a:off x="2551176" y="5230368"/>
-            <a:ext cx="7040880" cy="365760"/>
+            <a:off x="329184" y="6510528"/>
+            <a:ext cx="10972800" cy="173736"/>
           </a:xfrm>
           <a:prstGeom prst="rect">
             <a:avLst/>
@@ -24220,91 +23865,13 @@
               </a:spcAft>
             </a:pPr>
             <a:r>
-              <a:rPr sz="1400" b="0" i="0">
-                <a:solidFill>
-                  <a:srgbClr val="263746"/>
+              <a:rPr sz="720" b="0" i="0">
+                <a:solidFill>
+                  <a:srgbClr val="8A969E"/>
                 </a:solidFill>
                 <a:latin typeface="Arial"/>
               </a:rPr>
-              <a:t>Real-only arm retained</a:t>
-            </a:r>
-          </a:p>
-        </p:txBody>
-      </p:sp>
-      <p:sp>
-        <p:nvSpPr>
-          <p:cNvPr id="31" name="TextBox 30"/>
-          <p:cNvSpPr txBox="1"/>
-          <p:nvPr/>
-        </p:nvSpPr>
-        <p:spPr>
-          <a:xfrm>
-            <a:off x="9756648" y="5248656"/>
-            <a:ext cx="1682496" cy="310896"/>
-          </a:xfrm>
-          <a:prstGeom prst="rect">
-            <a:avLst/>
-          </a:prstGeom>
-          <a:noFill/>
-        </p:spPr>
-        <p:txBody>
-          <a:bodyPr wrap="square" lIns="18288" rIns="18288" tIns="18288" bIns="18288" anchor="ctr">
-            <a:spAutoFit/>
-          </a:bodyPr>
-          <a:lstStyle/>
-          <a:p>
-            <a:pPr algn="ctr">
-              <a:spcAft>
-                <a:spcPts val="0"/>
-              </a:spcAft>
-            </a:pPr>
-            <a:r>
-              <a:rPr sz="1250" b="1" i="0">
-                <a:solidFill>
-                  <a:srgbClr val="8A969E"/>
-                </a:solidFill>
-                <a:latin typeface="Arial"/>
-              </a:rPr>
-              <a:t>No synthetic claim</a:t>
-            </a:r>
-          </a:p>
-        </p:txBody>
-      </p:sp>
-      <p:sp>
-        <p:nvSpPr>
-          <p:cNvPr id="32" name="TextBox 31"/>
-          <p:cNvSpPr txBox="1"/>
-          <p:nvPr/>
-        </p:nvSpPr>
-        <p:spPr>
-          <a:xfrm>
-            <a:off x="685800" y="6035040"/>
-            <a:ext cx="10789920" cy="301752"/>
-          </a:xfrm>
-          <a:prstGeom prst="rect">
-            <a:avLst/>
-          </a:prstGeom>
-          <a:noFill/>
-        </p:spPr>
-        <p:txBody>
-          <a:bodyPr wrap="square" lIns="18288" rIns="18288" tIns="18288" bIns="18288" anchor="t">
-            <a:spAutoFit/>
-          </a:bodyPr>
-          <a:lstStyle/>
-          <a:p>
-            <a:pPr algn="ctr">
-              <a:spcAft>
-                <a:spcPts val="0"/>
-              </a:spcAft>
-            </a:pPr>
-            <a:r>
-              <a:rPr sz="1400" b="0" i="1">
-                <a:solidFill>
-                  <a:srgbClr val="59697A"/>
-                </a:solidFill>
-                <a:latin typeface="Arial"/>
-              </a:rPr>
-              <a:t>Independent missions are still needed before any candidate becomes a transferable spaceflight biomarker.</a:t>
+              <a:t>Literature context: Gambara et al. (2017) and Stein et al. (2002).</a:t>
             </a:r>
           </a:p>
         </p:txBody>
@@ -24395,7 +23962,7 @@
                 </a:solidFill>
                 <a:latin typeface="Arial"/>
               </a:rPr>
-              <a:t>TAKEAWAYS</a:t>
+              <a:t>OTHER TISSUES</a:t>
             </a:r>
           </a:p>
         </p:txBody>
@@ -24434,7 +24001,7 @@
                 </a:solidFill>
                 <a:latin typeface="Arial"/>
               </a:rPr>
-              <a:t>Synthetic data helped most as a tissue-specific prior</a:t>
+              <a:t>Kidney adds a focused signal; other tissues are exploratory</a:t>
             </a:r>
           </a:p>
         </p:txBody>
@@ -24473,23 +24040,23 @@
                 </a:solidFill>
                 <a:latin typeface="Arial"/>
               </a:rPr>
-              <a:t>The generator created useful structure, not new biological replication.</a:t>
-            </a:r>
-          </a:p>
-        </p:txBody>
-      </p:sp>
-      <p:sp>
-        <p:nvSpPr>
-          <p:cNvPr id="7" name="Rounded Rectangle 6"/>
+              <a:t>The strongest process-level stories were thymus and soleus, but several tissues produced narrower candidates.</a:t>
+            </a:r>
+          </a:p>
+        </p:txBody>
+      </p:sp>
+      <p:sp>
+        <p:nvSpPr>
+          <p:cNvPr id="7" name="Rectangle 6"/>
           <p:cNvSpPr/>
           <p:nvPr/>
         </p:nvSpPr>
         <p:spPr>
           <a:xfrm>
-            <a:off x="384048" y="1920240"/>
-            <a:ext cx="3419856" cy="2487168"/>
-          </a:xfrm>
-          <a:prstGeom prst="roundRect">
+            <a:off x="393192" y="1847088"/>
+            <a:ext cx="11375136" cy="667512"/>
+          </a:xfrm>
+          <a:prstGeom prst="rect">
             <a:avLst/>
           </a:prstGeom>
           <a:solidFill>
@@ -24497,7 +24064,7 @@
           </a:solidFill>
           <a:ln w="10160">
             <a:solidFill>
-              <a:srgbClr val="2D6496"/>
+              <a:srgbClr val="DDE4E8"/>
             </a:solidFill>
           </a:ln>
         </p:spPr>
@@ -24525,16 +24092,16 @@
       </p:sp>
       <p:sp>
         <p:nvSpPr>
-          <p:cNvPr id="8" name="Oval 7"/>
+          <p:cNvPr id="8" name="Rectangle 7"/>
           <p:cNvSpPr/>
           <p:nvPr/>
         </p:nvSpPr>
         <p:spPr>
           <a:xfrm>
-            <a:off x="621792" y="2167128"/>
-            <a:ext cx="475488" cy="475488"/>
-          </a:xfrm>
-          <a:prstGeom prst="ellipse">
+            <a:off x="393192" y="1847088"/>
+            <a:ext cx="73152" cy="667512"/>
+          </a:xfrm>
+          <a:prstGeom prst="rect">
             <a:avLst/>
           </a:prstGeom>
           <a:solidFill>
@@ -24574,8 +24141,8 @@
         </p:nvSpPr>
         <p:spPr>
           <a:xfrm>
-            <a:off x="621792" y="2221992"/>
-            <a:ext cx="475488" cy="274320"/>
+            <a:off x="640080" y="2002536"/>
+            <a:ext cx="1938528" cy="310896"/>
           </a:xfrm>
           <a:prstGeom prst="rect">
             <a:avLst/>
@@ -24584,6 +24151,84 @@
         </p:spPr>
         <p:txBody>
           <a:bodyPr wrap="square" lIns="18288" rIns="18288" tIns="18288" bIns="18288" anchor="t">
+            <a:spAutoFit/>
+          </a:bodyPr>
+          <a:lstStyle/>
+          <a:p>
+            <a:pPr algn="l">
+              <a:spcAft>
+                <a:spcPts val="0"/>
+              </a:spcAft>
+            </a:pPr>
+            <a:r>
+              <a:rPr sz="1600" b="1" i="0">
+                <a:solidFill>
+                  <a:srgbClr val="2D6496"/>
+                </a:solidFill>
+                <a:latin typeface="Arial"/>
+              </a:rPr>
+              <a:t>Kidney</a:t>
+            </a:r>
+          </a:p>
+        </p:txBody>
+      </p:sp>
+      <p:sp>
+        <p:nvSpPr>
+          <p:cNvPr id="10" name="TextBox 9"/>
+          <p:cNvSpPr txBox="1"/>
+          <p:nvPr/>
+        </p:nvSpPr>
+        <p:spPr>
+          <a:xfrm>
+            <a:off x="2551176" y="1975104"/>
+            <a:ext cx="7040880" cy="365760"/>
+          </a:xfrm>
+          <a:prstGeom prst="rect">
+            <a:avLst/>
+          </a:prstGeom>
+          <a:noFill/>
+        </p:spPr>
+        <p:txBody>
+          <a:bodyPr wrap="square" lIns="18288" rIns="18288" tIns="18288" bIns="18288" anchor="ctr">
+            <a:spAutoFit/>
+          </a:bodyPr>
+          <a:lstStyle/>
+          <a:p>
+            <a:pPr algn="l">
+              <a:spcAft>
+                <a:spcPts val="0"/>
+              </a:spcAft>
+            </a:pPr>
+            <a:r>
+              <a:rPr sz="1400" b="0" i="0">
+                <a:solidFill>
+                  <a:srgbClr val="263746"/>
+                </a:solidFill>
+                <a:latin typeface="Arial"/>
+              </a:rPr>
+              <a:t>Inpp4b promoted, Slc37a4 reinforced; both higher in flight</a:t>
+            </a:r>
+          </a:p>
+        </p:txBody>
+      </p:sp>
+      <p:sp>
+        <p:nvSpPr>
+          <p:cNvPr id="11" name="TextBox 10"/>
+          <p:cNvSpPr txBox="1"/>
+          <p:nvPr/>
+        </p:nvSpPr>
+        <p:spPr>
+          <a:xfrm>
+            <a:off x="9756648" y="1993392"/>
+            <a:ext cx="1682496" cy="310896"/>
+          </a:xfrm>
+          <a:prstGeom prst="rect">
+            <a:avLst/>
+          </a:prstGeom>
+          <a:noFill/>
+        </p:spPr>
+        <p:txBody>
+          <a:bodyPr wrap="square" lIns="18288" rIns="18288" tIns="18288" bIns="18288" anchor="ctr">
             <a:spAutoFit/>
           </a:bodyPr>
           <a:lstStyle/>
@@ -24594,27 +24239,115 @@
               </a:spcAft>
             </a:pPr>
             <a:r>
-              <a:rPr sz="1600" b="1" i="0">
-                <a:solidFill>
-                  <a:srgbClr val="FFFFFF"/>
+              <a:rPr sz="1250" b="1" i="0">
+                <a:solidFill>
+                  <a:srgbClr val="2D6496"/>
                 </a:solidFill>
                 <a:latin typeface="Arial"/>
               </a:rPr>
-              <a:t>1</a:t>
-            </a:r>
-          </a:p>
-        </p:txBody>
-      </p:sp>
-      <p:sp>
-        <p:nvSpPr>
-          <p:cNvPr id="10" name="TextBox 9"/>
+              <a:t>Focused secondary</a:t>
+            </a:r>
+          </a:p>
+        </p:txBody>
+      </p:sp>
+      <p:sp>
+        <p:nvSpPr>
+          <p:cNvPr id="12" name="Rectangle 11"/>
+          <p:cNvSpPr/>
+          <p:nvPr/>
+        </p:nvSpPr>
+        <p:spPr>
+          <a:xfrm>
+            <a:off x="393192" y="2660904"/>
+            <a:ext cx="11375136" cy="667512"/>
+          </a:xfrm>
+          <a:prstGeom prst="rect">
+            <a:avLst/>
+          </a:prstGeom>
+          <a:solidFill>
+            <a:srgbClr val="F0ECF6"/>
+          </a:solidFill>
+          <a:ln w="10160">
+            <a:solidFill>
+              <a:srgbClr val="DDE4E8"/>
+            </a:solidFill>
+          </a:ln>
+        </p:spPr>
+        <p:style>
+          <a:lnRef idx="1">
+            <a:schemeClr val="accent1"/>
+          </a:lnRef>
+          <a:fillRef idx="3">
+            <a:schemeClr val="accent1"/>
+          </a:fillRef>
+          <a:effectRef idx="2">
+            <a:schemeClr val="accent1"/>
+          </a:effectRef>
+          <a:fontRef idx="minor">
+            <a:schemeClr val="lt1"/>
+          </a:fontRef>
+        </p:style>
+        <p:txBody>
+          <a:bodyPr rtlCol="0" anchor="ctr"/>
+          <a:lstStyle/>
+          <a:p>
+            <a:pPr algn="ctr"/>
+          </a:p>
+        </p:txBody>
+      </p:sp>
+      <p:sp>
+        <p:nvSpPr>
+          <p:cNvPr id="13" name="Rectangle 12"/>
+          <p:cNvSpPr/>
+          <p:nvPr/>
+        </p:nvSpPr>
+        <p:spPr>
+          <a:xfrm>
+            <a:off x="393192" y="2660904"/>
+            <a:ext cx="73152" cy="667512"/>
+          </a:xfrm>
+          <a:prstGeom prst="rect">
+            <a:avLst/>
+          </a:prstGeom>
+          <a:solidFill>
+            <a:srgbClr val="8063A6"/>
+          </a:solidFill>
+          <a:ln>
+            <a:noFill/>
+          </a:ln>
+        </p:spPr>
+        <p:style>
+          <a:lnRef idx="1">
+            <a:schemeClr val="accent1"/>
+          </a:lnRef>
+          <a:fillRef idx="3">
+            <a:schemeClr val="accent1"/>
+          </a:fillRef>
+          <a:effectRef idx="2">
+            <a:schemeClr val="accent1"/>
+          </a:effectRef>
+          <a:fontRef idx="minor">
+            <a:schemeClr val="lt1"/>
+          </a:fontRef>
+        </p:style>
+        <p:txBody>
+          <a:bodyPr rtlCol="0" anchor="ctr"/>
+          <a:lstStyle/>
+          <a:p>
+            <a:pPr algn="ctr"/>
+          </a:p>
+        </p:txBody>
+      </p:sp>
+      <p:sp>
+        <p:nvSpPr>
+          <p:cNvPr id="14" name="TextBox 13"/>
           <p:cNvSpPr txBox="1"/>
           <p:nvPr/>
         </p:nvSpPr>
         <p:spPr>
           <a:xfrm>
-            <a:off x="1216152" y="2176272"/>
-            <a:ext cx="2240280" cy="329184"/>
+            <a:off x="640080" y="2816352"/>
+            <a:ext cx="1938528" cy="310896"/>
           </a:xfrm>
           <a:prstGeom prst="rect">
             <a:avLst/>
@@ -24633,27 +24366,27 @@
               </a:spcAft>
             </a:pPr>
             <a:r>
-              <a:rPr sz="1900" b="1" i="0">
-                <a:solidFill>
-                  <a:srgbClr val="2D6496"/>
+              <a:rPr sz="1600" b="1" i="0">
+                <a:solidFill>
+                  <a:srgbClr val="8063A6"/>
                 </a:solidFill>
                 <a:latin typeface="Arial"/>
               </a:rPr>
-              <a:t>Generate</a:t>
-            </a:r>
-          </a:p>
-        </p:txBody>
-      </p:sp>
-      <p:sp>
-        <p:nvSpPr>
-          <p:cNvPr id="11" name="TextBox 10"/>
+              <a:t>Spleen</a:t>
+            </a:r>
+          </a:p>
+        </p:txBody>
+      </p:sp>
+      <p:sp>
+        <p:nvSpPr>
+          <p:cNvPr id="15" name="TextBox 14"/>
           <p:cNvSpPr txBox="1"/>
           <p:nvPr/>
         </p:nvSpPr>
         <p:spPr>
           <a:xfrm>
-            <a:off x="640080" y="2816352"/>
-            <a:ext cx="2880360" cy="1216152"/>
+            <a:off x="2551176" y="2788920"/>
+            <a:ext cx="7040880" cy="365760"/>
           </a:xfrm>
           <a:prstGeom prst="rect">
             <a:avLst/>
@@ -24661,7 +24394,7 @@
           <a:noFill/>
         </p:spPr>
         <p:txBody>
-          <a:bodyPr wrap="square" lIns="18288" rIns="18288" tIns="18288" bIns="18288" anchor="t">
+          <a:bodyPr wrap="square" lIns="18288" rIns="18288" tIns="18288" bIns="18288" anchor="ctr">
             <a:spAutoFit/>
           </a:bodyPr>
           <a:lstStyle/>
@@ -24672,29 +24405,273 @@
               </a:spcAft>
             </a:pPr>
             <a:r>
-              <a:rPr sz="1500" b="0" i="0">
+              <a:rPr sz="1400" b="0" i="0">
                 <a:solidFill>
                   <a:srgbClr val="263746"/>
                 </a:solidFill>
                 <a:latin typeface="Arial"/>
               </a:rPr>
-              <a:t>Conditional DDIM produced high-fidelity profiles with near-chance real-versus-synthetic separation.</a:t>
-            </a:r>
-          </a:p>
-        </p:txBody>
-      </p:sp>
-      <p:sp>
-        <p:nvSpPr>
-          <p:cNvPr id="12" name="Rounded Rectangle 11"/>
+              <a:t>Rai14, Ptprk and Myl9 promoted; Loxl1 reinforced; no Reactome enrichment</a:t>
+            </a:r>
+          </a:p>
+        </p:txBody>
+      </p:sp>
+      <p:sp>
+        <p:nvSpPr>
+          <p:cNvPr id="16" name="TextBox 15"/>
+          <p:cNvSpPr txBox="1"/>
+          <p:nvPr/>
+        </p:nvSpPr>
+        <p:spPr>
+          <a:xfrm>
+            <a:off x="9756648" y="2807208"/>
+            <a:ext cx="1682496" cy="310896"/>
+          </a:xfrm>
+          <a:prstGeom prst="rect">
+            <a:avLst/>
+          </a:prstGeom>
+          <a:noFill/>
+        </p:spPr>
+        <p:txBody>
+          <a:bodyPr wrap="square" lIns="18288" rIns="18288" tIns="18288" bIns="18288" anchor="ctr">
+            <a:spAutoFit/>
+          </a:bodyPr>
+          <a:lstStyle/>
+          <a:p>
+            <a:pPr algn="ctr">
+              <a:spcAft>
+                <a:spcPts val="0"/>
+              </a:spcAft>
+            </a:pPr>
+            <a:r>
+              <a:rPr sz="1250" b="1" i="0">
+                <a:solidFill>
+                  <a:srgbClr val="8063A6"/>
+                </a:solidFill>
+                <a:latin typeface="Arial"/>
+              </a:rPr>
+              <a:t>Exploratory</a:t>
+            </a:r>
+          </a:p>
+        </p:txBody>
+      </p:sp>
+      <p:sp>
+        <p:nvSpPr>
+          <p:cNvPr id="17" name="Rectangle 16"/>
           <p:cNvSpPr/>
           <p:nvPr/>
         </p:nvSpPr>
         <p:spPr>
           <a:xfrm>
-            <a:off x="4059936" y="1920240"/>
-            <a:ext cx="3419856" cy="2487168"/>
-          </a:xfrm>
-          <a:prstGeom prst="roundRect">
+            <a:off x="393192" y="3474720"/>
+            <a:ext cx="11375136" cy="667512"/>
+          </a:xfrm>
+          <a:prstGeom prst="rect">
+            <a:avLst/>
+          </a:prstGeom>
+          <a:solidFill>
+            <a:srgbClr val="F8F1E2"/>
+          </a:solidFill>
+          <a:ln w="10160">
+            <a:solidFill>
+              <a:srgbClr val="DDE4E8"/>
+            </a:solidFill>
+          </a:ln>
+        </p:spPr>
+        <p:style>
+          <a:lnRef idx="1">
+            <a:schemeClr val="accent1"/>
+          </a:lnRef>
+          <a:fillRef idx="3">
+            <a:schemeClr val="accent1"/>
+          </a:fillRef>
+          <a:effectRef idx="2">
+            <a:schemeClr val="accent1"/>
+          </a:effectRef>
+          <a:fontRef idx="minor">
+            <a:schemeClr val="lt1"/>
+          </a:fontRef>
+        </p:style>
+        <p:txBody>
+          <a:bodyPr rtlCol="0" anchor="ctr"/>
+          <a:lstStyle/>
+          <a:p>
+            <a:pPr algn="ctr"/>
+          </a:p>
+        </p:txBody>
+      </p:sp>
+      <p:sp>
+        <p:nvSpPr>
+          <p:cNvPr id="18" name="Rectangle 17"/>
+          <p:cNvSpPr/>
+          <p:nvPr/>
+        </p:nvSpPr>
+        <p:spPr>
+          <a:xfrm>
+            <a:off x="393192" y="3474720"/>
+            <a:ext cx="73152" cy="667512"/>
+          </a:xfrm>
+          <a:prstGeom prst="rect">
+            <a:avLst/>
+          </a:prstGeom>
+          <a:solidFill>
+            <a:srgbClr val="D37B00"/>
+          </a:solidFill>
+          <a:ln>
+            <a:noFill/>
+          </a:ln>
+        </p:spPr>
+        <p:style>
+          <a:lnRef idx="1">
+            <a:schemeClr val="accent1"/>
+          </a:lnRef>
+          <a:fillRef idx="3">
+            <a:schemeClr val="accent1"/>
+          </a:fillRef>
+          <a:effectRef idx="2">
+            <a:schemeClr val="accent1"/>
+          </a:effectRef>
+          <a:fontRef idx="minor">
+            <a:schemeClr val="lt1"/>
+          </a:fontRef>
+        </p:style>
+        <p:txBody>
+          <a:bodyPr rtlCol="0" anchor="ctr"/>
+          <a:lstStyle/>
+          <a:p>
+            <a:pPr algn="ctr"/>
+          </a:p>
+        </p:txBody>
+      </p:sp>
+      <p:sp>
+        <p:nvSpPr>
+          <p:cNvPr id="19" name="TextBox 18"/>
+          <p:cNvSpPr txBox="1"/>
+          <p:nvPr/>
+        </p:nvSpPr>
+        <p:spPr>
+          <a:xfrm>
+            <a:off x="640080" y="3630168"/>
+            <a:ext cx="1938528" cy="310896"/>
+          </a:xfrm>
+          <a:prstGeom prst="rect">
+            <a:avLst/>
+          </a:prstGeom>
+          <a:noFill/>
+        </p:spPr>
+        <p:txBody>
+          <a:bodyPr wrap="square" lIns="18288" rIns="18288" tIns="18288" bIns="18288" anchor="t">
+            <a:spAutoFit/>
+          </a:bodyPr>
+          <a:lstStyle/>
+          <a:p>
+            <a:pPr algn="l">
+              <a:spcAft>
+                <a:spcPts val="0"/>
+              </a:spcAft>
+            </a:pPr>
+            <a:r>
+              <a:rPr sz="1600" b="1" i="0">
+                <a:solidFill>
+                  <a:srgbClr val="D37B00"/>
+                </a:solidFill>
+                <a:latin typeface="Arial"/>
+              </a:rPr>
+              <a:t>Skin + adrenal</a:t>
+            </a:r>
+          </a:p>
+        </p:txBody>
+      </p:sp>
+      <p:sp>
+        <p:nvSpPr>
+          <p:cNvPr id="20" name="TextBox 19"/>
+          <p:cNvSpPr txBox="1"/>
+          <p:nvPr/>
+        </p:nvSpPr>
+        <p:spPr>
+          <a:xfrm>
+            <a:off x="2551176" y="3602736"/>
+            <a:ext cx="7040880" cy="365760"/>
+          </a:xfrm>
+          <a:prstGeom prst="rect">
+            <a:avLst/>
+          </a:prstGeom>
+          <a:noFill/>
+        </p:spPr>
+        <p:txBody>
+          <a:bodyPr wrap="square" lIns="18288" rIns="18288" tIns="18288" bIns="18288" anchor="ctr">
+            <a:spAutoFit/>
+          </a:bodyPr>
+          <a:lstStyle/>
+          <a:p>
+            <a:pPr algn="l">
+              <a:spcAft>
+                <a:spcPts val="0"/>
+              </a:spcAft>
+            </a:pPr>
+            <a:r>
+              <a:rPr sz="1400" b="0" i="0">
+                <a:solidFill>
+                  <a:srgbClr val="263746"/>
+                </a:solidFill>
+                <a:latin typeface="Arial"/>
+              </a:rPr>
+              <a:t>Plscr1 higher in skin; adrenal Psmb8 is plausible but literature-unmatched</a:t>
+            </a:r>
+          </a:p>
+        </p:txBody>
+      </p:sp>
+      <p:sp>
+        <p:nvSpPr>
+          <p:cNvPr id="21" name="TextBox 20"/>
+          <p:cNvSpPr txBox="1"/>
+          <p:nvPr/>
+        </p:nvSpPr>
+        <p:spPr>
+          <a:xfrm>
+            <a:off x="9756648" y="3621024"/>
+            <a:ext cx="1682496" cy="310896"/>
+          </a:xfrm>
+          <a:prstGeom prst="rect">
+            <a:avLst/>
+          </a:prstGeom>
+          <a:noFill/>
+        </p:spPr>
+        <p:txBody>
+          <a:bodyPr wrap="square" lIns="18288" rIns="18288" tIns="18288" bIns="18288" anchor="ctr">
+            <a:spAutoFit/>
+          </a:bodyPr>
+          <a:lstStyle/>
+          <a:p>
+            <a:pPr algn="ctr">
+              <a:spcAft>
+                <a:spcPts val="0"/>
+              </a:spcAft>
+            </a:pPr>
+            <a:r>
+              <a:rPr sz="1250" b="1" i="0">
+                <a:solidFill>
+                  <a:srgbClr val="D37B00"/>
+                </a:solidFill>
+                <a:latin typeface="Arial"/>
+              </a:rPr>
+              <a:t>Exploratory</a:t>
+            </a:r>
+          </a:p>
+        </p:txBody>
+      </p:sp>
+      <p:sp>
+        <p:nvSpPr>
+          <p:cNvPr id="22" name="Rectangle 21"/>
+          <p:cNvSpPr/>
+          <p:nvPr/>
+        </p:nvSpPr>
+        <p:spPr>
+          <a:xfrm>
+            <a:off x="393192" y="4288536"/>
+            <a:ext cx="11375136" cy="667512"/>
+          </a:xfrm>
+          <a:prstGeom prst="rect">
             <a:avLst/>
           </a:prstGeom>
           <a:solidFill>
@@ -24702,7 +24679,7 @@
           </a:solidFill>
           <a:ln w="10160">
             <a:solidFill>
-              <a:srgbClr val="178681"/>
+              <a:srgbClr val="DDE4E8"/>
             </a:solidFill>
           </a:ln>
         </p:spPr>
@@ -24730,16 +24707,16 @@
       </p:sp>
       <p:sp>
         <p:nvSpPr>
-          <p:cNvPr id="13" name="Oval 12"/>
+          <p:cNvPr id="23" name="Rectangle 22"/>
           <p:cNvSpPr/>
           <p:nvPr/>
         </p:nvSpPr>
         <p:spPr>
           <a:xfrm>
-            <a:off x="4297680" y="2167128"/>
-            <a:ext cx="475488" cy="475488"/>
-          </a:xfrm>
-          <a:prstGeom prst="ellipse">
+            <a:off x="393192" y="4288536"/>
+            <a:ext cx="73152" cy="667512"/>
+          </a:xfrm>
+          <a:prstGeom prst="rect">
             <a:avLst/>
           </a:prstGeom>
           <a:solidFill>
@@ -24773,14 +24750,14 @@
       </p:sp>
       <p:sp>
         <p:nvSpPr>
-          <p:cNvPr id="14" name="TextBox 13"/>
+          <p:cNvPr id="24" name="TextBox 23"/>
           <p:cNvSpPr txBox="1"/>
           <p:nvPr/>
         </p:nvSpPr>
         <p:spPr>
           <a:xfrm>
-            <a:off x="4297680" y="2221992"/>
-            <a:ext cx="475488" cy="274320"/>
+            <a:off x="640080" y="4443983"/>
+            <a:ext cx="1938528" cy="310896"/>
           </a:xfrm>
           <a:prstGeom prst="rect">
             <a:avLst/>
@@ -24789,6 +24766,84 @@
         </p:spPr>
         <p:txBody>
           <a:bodyPr wrap="square" lIns="18288" rIns="18288" tIns="18288" bIns="18288" anchor="t">
+            <a:spAutoFit/>
+          </a:bodyPr>
+          <a:lstStyle/>
+          <a:p>
+            <a:pPr algn="l">
+              <a:spcAft>
+                <a:spcPts val="0"/>
+              </a:spcAft>
+            </a:pPr>
+            <a:r>
+              <a:rPr sz="1600" b="1" i="0">
+                <a:solidFill>
+                  <a:srgbClr val="178681"/>
+                </a:solidFill>
+                <a:latin typeface="Arial"/>
+              </a:rPr>
+              <a:t>Lung + retina</a:t>
+            </a:r>
+          </a:p>
+        </p:txBody>
+      </p:sp>
+      <p:sp>
+        <p:nvSpPr>
+          <p:cNvPr id="25" name="TextBox 24"/>
+          <p:cNvSpPr txBox="1"/>
+          <p:nvPr/>
+        </p:nvSpPr>
+        <p:spPr>
+          <a:xfrm>
+            <a:off x="2551176" y="4416551"/>
+            <a:ext cx="7040880" cy="365760"/>
+          </a:xfrm>
+          <a:prstGeom prst="rect">
+            <a:avLst/>
+          </a:prstGeom>
+          <a:noFill/>
+        </p:spPr>
+        <p:txBody>
+          <a:bodyPr wrap="square" lIns="18288" rIns="18288" tIns="18288" bIns="18288" anchor="ctr">
+            <a:spAutoFit/>
+          </a:bodyPr>
+          <a:lstStyle/>
+          <a:p>
+            <a:pPr algn="l">
+              <a:spcAft>
+                <a:spcPts val="0"/>
+              </a:spcAft>
+            </a:pPr>
+            <a:r>
+              <a:rPr sz="1400" b="0" i="0">
+                <a:solidFill>
+                  <a:srgbClr val="263746"/>
+                </a:solidFill>
+                <a:latin typeface="Arial"/>
+              </a:rPr>
+              <a:t>Predictive gains without a synthetic-informed BH-FDR gene</a:t>
+            </a:r>
+          </a:p>
+        </p:txBody>
+      </p:sp>
+      <p:sp>
+        <p:nvSpPr>
+          <p:cNvPr id="26" name="TextBox 25"/>
+          <p:cNvSpPr txBox="1"/>
+          <p:nvPr/>
+        </p:nvSpPr>
+        <p:spPr>
+          <a:xfrm>
+            <a:off x="9756648" y="4434840"/>
+            <a:ext cx="1682496" cy="310896"/>
+          </a:xfrm>
+          <a:prstGeom prst="rect">
+            <a:avLst/>
+          </a:prstGeom>
+          <a:noFill/>
+        </p:spPr>
+        <p:txBody>
+          <a:bodyPr wrap="square" lIns="18288" rIns="18288" tIns="18288" bIns="18288" anchor="ctr">
             <a:spAutoFit/>
           </a:bodyPr>
           <a:lstStyle/>
@@ -24799,27 +24854,115 @@
               </a:spcAft>
             </a:pPr>
             <a:r>
-              <a:rPr sz="1600" b="1" i="0">
-                <a:solidFill>
-                  <a:srgbClr val="FFFFFF"/>
+              <a:rPr sz="1250" b="1" i="0">
+                <a:solidFill>
+                  <a:srgbClr val="178681"/>
                 </a:solidFill>
                 <a:latin typeface="Arial"/>
               </a:rPr>
-              <a:t>2</a:t>
-            </a:r>
-          </a:p>
-        </p:txBody>
-      </p:sp>
-      <p:sp>
-        <p:nvSpPr>
-          <p:cNvPr id="15" name="TextBox 14"/>
+              <a:t>Prediction only</a:t>
+            </a:r>
+          </a:p>
+        </p:txBody>
+      </p:sp>
+      <p:sp>
+        <p:nvSpPr>
+          <p:cNvPr id="27" name="Rectangle 26"/>
+          <p:cNvSpPr/>
+          <p:nvPr/>
+        </p:nvSpPr>
+        <p:spPr>
+          <a:xfrm>
+            <a:off x="393192" y="5102352"/>
+            <a:ext cx="11375136" cy="667512"/>
+          </a:xfrm>
+          <a:prstGeom prst="rect">
+            <a:avLst/>
+          </a:prstGeom>
+          <a:solidFill>
+            <a:srgbClr val="F2F4F5"/>
+          </a:solidFill>
+          <a:ln w="10160">
+            <a:solidFill>
+              <a:srgbClr val="DDE4E8"/>
+            </a:solidFill>
+          </a:ln>
+        </p:spPr>
+        <p:style>
+          <a:lnRef idx="1">
+            <a:schemeClr val="accent1"/>
+          </a:lnRef>
+          <a:fillRef idx="3">
+            <a:schemeClr val="accent1"/>
+          </a:fillRef>
+          <a:effectRef idx="2">
+            <a:schemeClr val="accent1"/>
+          </a:effectRef>
+          <a:fontRef idx="minor">
+            <a:schemeClr val="lt1"/>
+          </a:fontRef>
+        </p:style>
+        <p:txBody>
+          <a:bodyPr rtlCol="0" anchor="ctr"/>
+          <a:lstStyle/>
+          <a:p>
+            <a:pPr algn="ctr"/>
+          </a:p>
+        </p:txBody>
+      </p:sp>
+      <p:sp>
+        <p:nvSpPr>
+          <p:cNvPr id="28" name="Rectangle 27"/>
+          <p:cNvSpPr/>
+          <p:nvPr/>
+        </p:nvSpPr>
+        <p:spPr>
+          <a:xfrm>
+            <a:off x="393192" y="5102352"/>
+            <a:ext cx="73152" cy="667512"/>
+          </a:xfrm>
+          <a:prstGeom prst="rect">
+            <a:avLst/>
+          </a:prstGeom>
+          <a:solidFill>
+            <a:srgbClr val="8A969E"/>
+          </a:solidFill>
+          <a:ln>
+            <a:noFill/>
+          </a:ln>
+        </p:spPr>
+        <p:style>
+          <a:lnRef idx="1">
+            <a:schemeClr val="accent1"/>
+          </a:lnRef>
+          <a:fillRef idx="3">
+            <a:schemeClr val="accent1"/>
+          </a:fillRef>
+          <a:effectRef idx="2">
+            <a:schemeClr val="accent1"/>
+          </a:effectRef>
+          <a:fontRef idx="minor">
+            <a:schemeClr val="lt1"/>
+          </a:fontRef>
+        </p:style>
+        <p:txBody>
+          <a:bodyPr rtlCol="0" anchor="ctr"/>
+          <a:lstStyle/>
+          <a:p>
+            <a:pPr algn="ctr"/>
+          </a:p>
+        </p:txBody>
+      </p:sp>
+      <p:sp>
+        <p:nvSpPr>
+          <p:cNvPr id="29" name="TextBox 28"/>
           <p:cNvSpPr txBox="1"/>
           <p:nvPr/>
         </p:nvSpPr>
         <p:spPr>
           <a:xfrm>
-            <a:off x="4892040" y="2176272"/>
-            <a:ext cx="2240280" cy="329184"/>
+            <a:off x="640080" y="5257800"/>
+            <a:ext cx="1938528" cy="310896"/>
           </a:xfrm>
           <a:prstGeom prst="rect">
             <a:avLst/>
@@ -24838,27 +24981,27 @@
               </a:spcAft>
             </a:pPr>
             <a:r>
-              <a:rPr sz="1900" b="1" i="0">
-                <a:solidFill>
-                  <a:srgbClr val="178681"/>
+              <a:rPr sz="1600" b="1" i="0">
+                <a:solidFill>
+                  <a:srgbClr val="8A969E"/>
                 </a:solidFill>
                 <a:latin typeface="Arial"/>
               </a:rPr>
-              <a:t>Use</a:t>
-            </a:r>
-          </a:p>
-        </p:txBody>
-      </p:sp>
-      <p:sp>
-        <p:nvSpPr>
-          <p:cNvPr id="16" name="TextBox 15"/>
+              <a:t>Liver + EDL + quadriceps</a:t>
+            </a:r>
+          </a:p>
+        </p:txBody>
+      </p:sp>
+      <p:sp>
+        <p:nvSpPr>
+          <p:cNvPr id="30" name="TextBox 29"/>
           <p:cNvSpPr txBox="1"/>
           <p:nvPr/>
         </p:nvSpPr>
         <p:spPr>
           <a:xfrm>
-            <a:off x="4315968" y="2816352"/>
-            <a:ext cx="2880360" cy="1216152"/>
+            <a:off x="2551176" y="5230368"/>
+            <a:ext cx="7040880" cy="365760"/>
           </a:xfrm>
           <a:prstGeom prst="rect">
             <a:avLst/>
@@ -24866,7 +25009,7 @@
           <a:noFill/>
         </p:spPr>
         <p:txBody>
-          <a:bodyPr wrap="square" lIns="18288" rIns="18288" tIns="18288" bIns="18288" anchor="t">
+          <a:bodyPr wrap="square" lIns="18288" rIns="18288" tIns="18288" bIns="18288" anchor="ctr">
             <a:spAutoFit/>
           </a:bodyPr>
           <a:lstStyle/>
@@ -24877,115 +25020,27 @@
               </a:spcAft>
             </a:pPr>
             <a:r>
-              <a:rPr sz="1500" b="0" i="0">
+              <a:rPr sz="1400" b="0" i="0">
                 <a:solidFill>
                   <a:srgbClr val="263746"/>
                 </a:solidFill>
                 <a:latin typeface="Arial"/>
               </a:rPr>
-              <a:t>Pooled augmentation failed. Tissue-specific ranking and low-weight training were more useful.</a:t>
-            </a:r>
-          </a:p>
-        </p:txBody>
-      </p:sp>
-      <p:sp>
-        <p:nvSpPr>
-          <p:cNvPr id="17" name="Rounded Rectangle 16"/>
-          <p:cNvSpPr/>
-          <p:nvPr/>
-        </p:nvSpPr>
-        <p:spPr>
-          <a:xfrm>
-            <a:off x="7735824" y="1920240"/>
-            <a:ext cx="3419856" cy="2487168"/>
-          </a:xfrm>
-          <a:prstGeom prst="roundRect">
-            <a:avLst/>
-          </a:prstGeom>
-          <a:solidFill>
-            <a:srgbClr val="F8F1E2"/>
-          </a:solidFill>
-          <a:ln w="10160">
-            <a:solidFill>
-              <a:srgbClr val="D37B00"/>
-            </a:solidFill>
-          </a:ln>
-        </p:spPr>
-        <p:style>
-          <a:lnRef idx="1">
-            <a:schemeClr val="accent1"/>
-          </a:lnRef>
-          <a:fillRef idx="3">
-            <a:schemeClr val="accent1"/>
-          </a:fillRef>
-          <a:effectRef idx="2">
-            <a:schemeClr val="accent1"/>
-          </a:effectRef>
-          <a:fontRef idx="minor">
-            <a:schemeClr val="lt1"/>
-          </a:fontRef>
-        </p:style>
-        <p:txBody>
-          <a:bodyPr rtlCol="0" anchor="ctr"/>
-          <a:lstStyle/>
-          <a:p>
-            <a:pPr algn="ctr"/>
-          </a:p>
-        </p:txBody>
-      </p:sp>
-      <p:sp>
-        <p:nvSpPr>
-          <p:cNvPr id="18" name="Oval 17"/>
-          <p:cNvSpPr/>
-          <p:nvPr/>
-        </p:nvSpPr>
-        <p:spPr>
-          <a:xfrm>
-            <a:off x="7973568" y="2167128"/>
-            <a:ext cx="475488" cy="475488"/>
-          </a:xfrm>
-          <a:prstGeom prst="ellipse">
-            <a:avLst/>
-          </a:prstGeom>
-          <a:solidFill>
-            <a:srgbClr val="D37B00"/>
-          </a:solidFill>
-          <a:ln>
-            <a:noFill/>
-          </a:ln>
-        </p:spPr>
-        <p:style>
-          <a:lnRef idx="1">
-            <a:schemeClr val="accent1"/>
-          </a:lnRef>
-          <a:fillRef idx="3">
-            <a:schemeClr val="accent1"/>
-          </a:fillRef>
-          <a:effectRef idx="2">
-            <a:schemeClr val="accent1"/>
-          </a:effectRef>
-          <a:fontRef idx="minor">
-            <a:schemeClr val="lt1"/>
-          </a:fontRef>
-        </p:style>
-        <p:txBody>
-          <a:bodyPr rtlCol="0" anchor="ctr"/>
-          <a:lstStyle/>
-          <a:p>
-            <a:pPr algn="ctr"/>
-          </a:p>
-        </p:txBody>
-      </p:sp>
-      <p:sp>
-        <p:nvSpPr>
-          <p:cNvPr id="19" name="TextBox 18"/>
+              <a:t>Real-only arm retained</a:t>
+            </a:r>
+          </a:p>
+        </p:txBody>
+      </p:sp>
+      <p:sp>
+        <p:nvSpPr>
+          <p:cNvPr id="31" name="TextBox 30"/>
           <p:cNvSpPr txBox="1"/>
           <p:nvPr/>
         </p:nvSpPr>
         <p:spPr>
           <a:xfrm>
-            <a:off x="7973568" y="2221992"/>
-            <a:ext cx="475488" cy="274320"/>
+            <a:off x="9756648" y="5248656"/>
+            <a:ext cx="1682496" cy="310896"/>
           </a:xfrm>
           <a:prstGeom prst="rect">
             <a:avLst/>
@@ -24993,7 +25048,7 @@
           <a:noFill/>
         </p:spPr>
         <p:txBody>
-          <a:bodyPr wrap="square" lIns="18288" rIns="18288" tIns="18288" bIns="18288" anchor="t">
+          <a:bodyPr wrap="square" lIns="18288" rIns="18288" tIns="18288" bIns="18288" anchor="ctr">
             <a:spAutoFit/>
           </a:bodyPr>
           <a:lstStyle/>
@@ -25004,27 +25059,27 @@
               </a:spcAft>
             </a:pPr>
             <a:r>
-              <a:rPr sz="1600" b="1" i="0">
-                <a:solidFill>
-                  <a:srgbClr val="FFFFFF"/>
+              <a:rPr sz="1250" b="1" i="0">
+                <a:solidFill>
+                  <a:srgbClr val="8A969E"/>
                 </a:solidFill>
                 <a:latin typeface="Arial"/>
               </a:rPr>
-              <a:t>3</a:t>
-            </a:r>
-          </a:p>
-        </p:txBody>
-      </p:sp>
-      <p:sp>
-        <p:nvSpPr>
-          <p:cNvPr id="20" name="TextBox 19"/>
+              <a:t>No synthetic claim</a:t>
+            </a:r>
+          </a:p>
+        </p:txBody>
+      </p:sp>
+      <p:sp>
+        <p:nvSpPr>
+          <p:cNvPr id="32" name="TextBox 31"/>
           <p:cNvSpPr txBox="1"/>
           <p:nvPr/>
         </p:nvSpPr>
         <p:spPr>
           <a:xfrm>
-            <a:off x="8567928" y="2176272"/>
-            <a:ext cx="2240280" cy="329184"/>
+            <a:off x="685800" y="6035040"/>
+            <a:ext cx="10789920" cy="301752"/>
           </a:xfrm>
           <a:prstGeom prst="rect">
             <a:avLst/>
@@ -25037,220 +25092,19 @@
           </a:bodyPr>
           <a:lstStyle/>
           <a:p>
-            <a:pPr algn="l">
+            <a:pPr algn="ctr">
               <a:spcAft>
                 <a:spcPts val="0"/>
               </a:spcAft>
             </a:pPr>
             <a:r>
-              <a:rPr sz="1900" b="1" i="0">
-                <a:solidFill>
-                  <a:srgbClr val="D37B00"/>
+              <a:rPr sz="1400" b="0" i="1">
+                <a:solidFill>
+                  <a:srgbClr val="59697A"/>
                 </a:solidFill>
                 <a:latin typeface="Arial"/>
               </a:rPr>
-              <a:t>Interpret</a:t>
-            </a:r>
-          </a:p>
-        </p:txBody>
-      </p:sp>
-      <p:sp>
-        <p:nvSpPr>
-          <p:cNvPr id="21" name="TextBox 20"/>
-          <p:cNvSpPr txBox="1"/>
-          <p:nvPr/>
-        </p:nvSpPr>
-        <p:spPr>
-          <a:xfrm>
-            <a:off x="7991856" y="2816352"/>
-            <a:ext cx="2880360" cy="1216152"/>
-          </a:xfrm>
-          <a:prstGeom prst="rect">
-            <a:avLst/>
-          </a:prstGeom>
-          <a:noFill/>
-        </p:spPr>
-        <p:txBody>
-          <a:bodyPr wrap="square" lIns="18288" rIns="18288" tIns="18288" bIns="18288" anchor="t">
-            <a:spAutoFit/>
-          </a:bodyPr>
-          <a:lstStyle/>
-          <a:p>
-            <a:pPr algn="l">
-              <a:spcAft>
-                <a:spcPts val="0"/>
-              </a:spcAft>
-            </a:pPr>
-            <a:r>
-              <a:rPr sz="1500" b="0" i="0">
-                <a:solidFill>
-                  <a:srgbClr val="263746"/>
-                </a:solidFill>
-                <a:latin typeface="Arial"/>
-              </a:rPr>
-              <a:t>Thymus and soleus formed the clearest programs; kidney supplied a focused secondary pair.</a:t>
-            </a:r>
-          </a:p>
-        </p:txBody>
-      </p:sp>
-      <p:sp>
-        <p:nvSpPr>
-          <p:cNvPr id="22" name="Rounded Rectangle 21"/>
-          <p:cNvSpPr/>
-          <p:nvPr/>
-        </p:nvSpPr>
-        <p:spPr>
-          <a:xfrm>
-            <a:off x="384048" y="4709160"/>
-            <a:ext cx="10972800" cy="1188720"/>
-          </a:xfrm>
-          <a:prstGeom prst="roundRect">
-            <a:avLst/>
-          </a:prstGeom>
-          <a:solidFill>
-            <a:srgbClr val="082B55"/>
-          </a:solidFill>
-          <a:ln w="10160">
-            <a:solidFill>
-              <a:srgbClr val="082B55"/>
-            </a:solidFill>
-          </a:ln>
-        </p:spPr>
-        <p:style>
-          <a:lnRef idx="1">
-            <a:schemeClr val="accent1"/>
-          </a:lnRef>
-          <a:fillRef idx="3">
-            <a:schemeClr val="accent1"/>
-          </a:fillRef>
-          <a:effectRef idx="2">
-            <a:schemeClr val="accent1"/>
-          </a:effectRef>
-          <a:fontRef idx="minor">
-            <a:schemeClr val="lt1"/>
-          </a:fontRef>
-        </p:style>
-        <p:txBody>
-          <a:bodyPr rtlCol="0" anchor="ctr"/>
-          <a:lstStyle/>
-          <a:p>
-            <a:pPr algn="ctr"/>
-          </a:p>
-        </p:txBody>
-      </p:sp>
-      <p:sp>
-        <p:nvSpPr>
-          <p:cNvPr id="23" name="TextBox 22"/>
-          <p:cNvSpPr txBox="1"/>
-          <p:nvPr/>
-        </p:nvSpPr>
-        <p:spPr>
-          <a:xfrm>
-            <a:off x="685800" y="5010912"/>
-            <a:ext cx="1261872" cy="310896"/>
-          </a:xfrm>
-          <a:prstGeom prst="rect">
-            <a:avLst/>
-          </a:prstGeom>
-          <a:noFill/>
-        </p:spPr>
-        <p:txBody>
-          <a:bodyPr wrap="square" lIns="18288" rIns="18288" tIns="18288" bIns="18288" anchor="t">
-            <a:spAutoFit/>
-          </a:bodyPr>
-          <a:lstStyle/>
-          <a:p>
-            <a:pPr algn="l">
-              <a:spcAft>
-                <a:spcPts val="0"/>
-              </a:spcAft>
-            </a:pPr>
-            <a:r>
-              <a:rPr sz="1700" b="1" i="0">
-                <a:solidFill>
-                  <a:srgbClr val="FFD69A"/>
-                </a:solidFill>
-                <a:latin typeface="Arial"/>
-              </a:rPr>
-              <a:t>Next test</a:t>
-            </a:r>
-          </a:p>
-        </p:txBody>
-      </p:sp>
-      <p:sp>
-        <p:nvSpPr>
-          <p:cNvPr id="24" name="TextBox 23"/>
-          <p:cNvSpPr txBox="1"/>
-          <p:nvPr/>
-        </p:nvSpPr>
-        <p:spPr>
-          <a:xfrm>
-            <a:off x="1874519" y="4937760"/>
-            <a:ext cx="9070848" cy="530352"/>
-          </a:xfrm>
-          <a:prstGeom prst="rect">
-            <a:avLst/>
-          </a:prstGeom>
-          <a:noFill/>
-        </p:spPr>
-        <p:txBody>
-          <a:bodyPr wrap="square" lIns="18288" rIns="18288" tIns="18288" bIns="18288" anchor="ctr">
-            <a:spAutoFit/>
-          </a:bodyPr>
-          <a:lstStyle/>
-          <a:p>
-            <a:pPr algn="l">
-              <a:spcAft>
-                <a:spcPts val="0"/>
-              </a:spcAft>
-            </a:pPr>
-            <a:r>
-              <a:rPr sz="1600" b="0" i="0">
-                <a:solidFill>
-                  <a:srgbClr val="FFFFFF"/>
-                </a:solidFill>
-                <a:latin typeface="Arial"/>
-              </a:rPr>
-              <a:t>Hold out complete accessions, then validate the thymus panel, soleus metabolism and kidney Inpp4b / Slc37a4 in independent data.</a:t>
-            </a:r>
-          </a:p>
-        </p:txBody>
-      </p:sp>
-      <p:sp>
-        <p:nvSpPr>
-          <p:cNvPr id="25" name="TextBox 24"/>
-          <p:cNvSpPr txBox="1"/>
-          <p:nvPr/>
-        </p:nvSpPr>
-        <p:spPr>
-          <a:xfrm>
-            <a:off x="1874519" y="5532120"/>
-            <a:ext cx="9070848" cy="256032"/>
-          </a:xfrm>
-          <a:prstGeom prst="rect">
-            <a:avLst/>
-          </a:prstGeom>
-          <a:noFill/>
-        </p:spPr>
-        <p:txBody>
-          <a:bodyPr wrap="square" lIns="18288" rIns="18288" tIns="18288" bIns="18288" anchor="t">
-            <a:spAutoFit/>
-          </a:bodyPr>
-          <a:lstStyle/>
-          <a:p>
-            <a:pPr algn="l">
-              <a:spcAft>
-                <a:spcPts val="0"/>
-              </a:spcAft>
-            </a:pPr>
-            <a:r>
-              <a:rPr sz="1250" b="0" i="0">
-                <a:solidFill>
-                  <a:srgbClr val="BFD0E1"/>
-                </a:solidFill>
-                <a:latin typeface="Arial"/>
-              </a:rPr>
-              <a:t>Generated profiles never enter the biological sample count or the BH-FDR test.</a:t>
+              <a:t>A plausible mechanism is not independent validation; these candidates still require targeted experiments.</a:t>
             </a:r>
           </a:p>
         </p:txBody>
@@ -25264,6 +25118,952 @@
 </file>
 
 <file path=ppt/slides/slide13.xml><?xml version="1.0" encoding="utf-8"?>
+<p:sld xmlns:a="http://schemas.openxmlformats.org/drawingml/2006/main" xmlns:p="http://schemas.openxmlformats.org/presentationml/2006/main" xmlns:r="http://schemas.openxmlformats.org/officeDocument/2006/relationships">
+  <p:cSld>
+    <p:spTree>
+      <p:nvGrpSpPr>
+        <p:cNvPr id="1" name=""/>
+        <p:cNvGrpSpPr/>
+        <p:nvPr/>
+      </p:nvGrpSpPr>
+      <p:grpSpPr/>
+      <p:sp>
+        <p:nvSpPr>
+          <p:cNvPr id="2" name="Title 1"/>
+          <p:cNvSpPr>
+            <a:spLocks noGrp="1"/>
+          </p:cNvSpPr>
+          <p:nvPr>
+            <p:ph type="title"/>
+          </p:nvPr>
+        </p:nvSpPr>
+        <p:spPr/>
+        <p:txBody>
+          <a:bodyPr/>
+          <a:lstStyle/>
+          <a:p/>
+        </p:txBody>
+      </p:sp>
+      <p:sp>
+        <p:nvSpPr>
+          <p:cNvPr id="3" name="Content Placeholder 2"/>
+          <p:cNvSpPr>
+            <a:spLocks noGrp="1"/>
+          </p:cNvSpPr>
+          <p:nvPr>
+            <p:ph idx="1"/>
+          </p:nvPr>
+        </p:nvSpPr>
+        <p:spPr/>
+        <p:txBody>
+          <a:bodyPr/>
+          <a:lstStyle/>
+          <a:p/>
+        </p:txBody>
+      </p:sp>
+      <p:sp>
+        <p:nvSpPr>
+          <p:cNvPr id="4" name="TextBox 3"/>
+          <p:cNvSpPr txBox="1"/>
+          <p:nvPr/>
+        </p:nvSpPr>
+        <p:spPr>
+          <a:xfrm>
+            <a:off x="292608" y="530352"/>
+            <a:ext cx="5029200" cy="228600"/>
+          </a:xfrm>
+          <a:prstGeom prst="rect">
+            <a:avLst/>
+          </a:prstGeom>
+          <a:noFill/>
+        </p:spPr>
+        <p:txBody>
+          <a:bodyPr wrap="square" lIns="18288" rIns="18288" tIns="18288" bIns="18288" anchor="t">
+            <a:spAutoFit/>
+          </a:bodyPr>
+          <a:lstStyle/>
+          <a:p>
+            <a:pPr algn="l">
+              <a:spcAft>
+                <a:spcPts val="0"/>
+              </a:spcAft>
+            </a:pPr>
+            <a:r>
+              <a:rPr sz="1050" b="1" i="0">
+                <a:solidFill>
+                  <a:srgbClr val="9A6B20"/>
+                </a:solidFill>
+                <a:latin typeface="Arial"/>
+              </a:rPr>
+              <a:t>TAKEAWAYS</a:t>
+            </a:r>
+          </a:p>
+        </p:txBody>
+      </p:sp>
+      <p:sp>
+        <p:nvSpPr>
+          <p:cNvPr id="5" name="TextBox 4"/>
+          <p:cNvSpPr txBox="1"/>
+          <p:nvPr/>
+        </p:nvSpPr>
+        <p:spPr>
+          <a:xfrm>
+            <a:off x="292608" y="786384"/>
+            <a:ext cx="11430000" cy="585216"/>
+          </a:xfrm>
+          <a:prstGeom prst="rect">
+            <a:avLst/>
+          </a:prstGeom>
+          <a:noFill/>
+        </p:spPr>
+        <p:txBody>
+          <a:bodyPr wrap="square" lIns="18288" rIns="18288" tIns="18288" bIns="18288" anchor="ctr">
+            <a:spAutoFit/>
+          </a:bodyPr>
+          <a:lstStyle/>
+          <a:p>
+            <a:pPr algn="l">
+              <a:spcAft>
+                <a:spcPts val="0"/>
+              </a:spcAft>
+            </a:pPr>
+            <a:r>
+              <a:rPr sz="2700" b="1" i="0">
+                <a:solidFill>
+                  <a:srgbClr val="082B55"/>
+                </a:solidFill>
+                <a:latin typeface="Arial"/>
+              </a:rPr>
+              <a:t>Synthetic data helped most as a tissue-specific prior</a:t>
+            </a:r>
+          </a:p>
+        </p:txBody>
+      </p:sp>
+      <p:sp>
+        <p:nvSpPr>
+          <p:cNvPr id="6" name="TextBox 5"/>
+          <p:cNvSpPr txBox="1"/>
+          <p:nvPr/>
+        </p:nvSpPr>
+        <p:spPr>
+          <a:xfrm>
+            <a:off x="310896" y="1353312"/>
+            <a:ext cx="11247120" cy="310896"/>
+          </a:xfrm>
+          <a:prstGeom prst="rect">
+            <a:avLst/>
+          </a:prstGeom>
+          <a:noFill/>
+        </p:spPr>
+        <p:txBody>
+          <a:bodyPr wrap="square" lIns="18288" rIns="18288" tIns="18288" bIns="18288" anchor="ctr">
+            <a:spAutoFit/>
+          </a:bodyPr>
+          <a:lstStyle/>
+          <a:p>
+            <a:pPr algn="l">
+              <a:spcAft>
+                <a:spcPts val="0"/>
+              </a:spcAft>
+            </a:pPr>
+            <a:r>
+              <a:rPr sz="1450" b="0" i="0">
+                <a:solidFill>
+                  <a:srgbClr val="59697A"/>
+                </a:solidFill>
+                <a:latin typeface="Arial"/>
+              </a:rPr>
+              <a:t>The generator created useful structure, not new biological replication.</a:t>
+            </a:r>
+          </a:p>
+        </p:txBody>
+      </p:sp>
+      <p:sp>
+        <p:nvSpPr>
+          <p:cNvPr id="7" name="Rounded Rectangle 6"/>
+          <p:cNvSpPr/>
+          <p:nvPr/>
+        </p:nvSpPr>
+        <p:spPr>
+          <a:xfrm>
+            <a:off x="384048" y="1920240"/>
+            <a:ext cx="3419856" cy="2487168"/>
+          </a:xfrm>
+          <a:prstGeom prst="roundRect">
+            <a:avLst/>
+          </a:prstGeom>
+          <a:solidFill>
+            <a:srgbClr val="E9F1F7"/>
+          </a:solidFill>
+          <a:ln w="10160">
+            <a:solidFill>
+              <a:srgbClr val="2D6496"/>
+            </a:solidFill>
+          </a:ln>
+        </p:spPr>
+        <p:style>
+          <a:lnRef idx="1">
+            <a:schemeClr val="accent1"/>
+          </a:lnRef>
+          <a:fillRef idx="3">
+            <a:schemeClr val="accent1"/>
+          </a:fillRef>
+          <a:effectRef idx="2">
+            <a:schemeClr val="accent1"/>
+          </a:effectRef>
+          <a:fontRef idx="minor">
+            <a:schemeClr val="lt1"/>
+          </a:fontRef>
+        </p:style>
+        <p:txBody>
+          <a:bodyPr rtlCol="0" anchor="ctr"/>
+          <a:lstStyle/>
+          <a:p>
+            <a:pPr algn="ctr"/>
+          </a:p>
+        </p:txBody>
+      </p:sp>
+      <p:sp>
+        <p:nvSpPr>
+          <p:cNvPr id="8" name="Oval 7"/>
+          <p:cNvSpPr/>
+          <p:nvPr/>
+        </p:nvSpPr>
+        <p:spPr>
+          <a:xfrm>
+            <a:off x="621792" y="2167128"/>
+            <a:ext cx="475488" cy="475488"/>
+          </a:xfrm>
+          <a:prstGeom prst="ellipse">
+            <a:avLst/>
+          </a:prstGeom>
+          <a:solidFill>
+            <a:srgbClr val="2D6496"/>
+          </a:solidFill>
+          <a:ln>
+            <a:noFill/>
+          </a:ln>
+        </p:spPr>
+        <p:style>
+          <a:lnRef idx="1">
+            <a:schemeClr val="accent1"/>
+          </a:lnRef>
+          <a:fillRef idx="3">
+            <a:schemeClr val="accent1"/>
+          </a:fillRef>
+          <a:effectRef idx="2">
+            <a:schemeClr val="accent1"/>
+          </a:effectRef>
+          <a:fontRef idx="minor">
+            <a:schemeClr val="lt1"/>
+          </a:fontRef>
+        </p:style>
+        <p:txBody>
+          <a:bodyPr rtlCol="0" anchor="ctr"/>
+          <a:lstStyle/>
+          <a:p>
+            <a:pPr algn="ctr"/>
+          </a:p>
+        </p:txBody>
+      </p:sp>
+      <p:sp>
+        <p:nvSpPr>
+          <p:cNvPr id="9" name="TextBox 8"/>
+          <p:cNvSpPr txBox="1"/>
+          <p:nvPr/>
+        </p:nvSpPr>
+        <p:spPr>
+          <a:xfrm>
+            <a:off x="621792" y="2221992"/>
+            <a:ext cx="475488" cy="274320"/>
+          </a:xfrm>
+          <a:prstGeom prst="rect">
+            <a:avLst/>
+          </a:prstGeom>
+          <a:noFill/>
+        </p:spPr>
+        <p:txBody>
+          <a:bodyPr wrap="square" lIns="18288" rIns="18288" tIns="18288" bIns="18288" anchor="t">
+            <a:spAutoFit/>
+          </a:bodyPr>
+          <a:lstStyle/>
+          <a:p>
+            <a:pPr algn="ctr">
+              <a:spcAft>
+                <a:spcPts val="0"/>
+              </a:spcAft>
+            </a:pPr>
+            <a:r>
+              <a:rPr sz="1600" b="1" i="0">
+                <a:solidFill>
+                  <a:srgbClr val="FFFFFF"/>
+                </a:solidFill>
+                <a:latin typeface="Arial"/>
+              </a:rPr>
+              <a:t>1</a:t>
+            </a:r>
+          </a:p>
+        </p:txBody>
+      </p:sp>
+      <p:sp>
+        <p:nvSpPr>
+          <p:cNvPr id="10" name="TextBox 9"/>
+          <p:cNvSpPr txBox="1"/>
+          <p:nvPr/>
+        </p:nvSpPr>
+        <p:spPr>
+          <a:xfrm>
+            <a:off x="1216152" y="2176272"/>
+            <a:ext cx="2240280" cy="329184"/>
+          </a:xfrm>
+          <a:prstGeom prst="rect">
+            <a:avLst/>
+          </a:prstGeom>
+          <a:noFill/>
+        </p:spPr>
+        <p:txBody>
+          <a:bodyPr wrap="square" lIns="18288" rIns="18288" tIns="18288" bIns="18288" anchor="t">
+            <a:spAutoFit/>
+          </a:bodyPr>
+          <a:lstStyle/>
+          <a:p>
+            <a:pPr algn="l">
+              <a:spcAft>
+                <a:spcPts val="0"/>
+              </a:spcAft>
+            </a:pPr>
+            <a:r>
+              <a:rPr sz="1900" b="1" i="0">
+                <a:solidFill>
+                  <a:srgbClr val="2D6496"/>
+                </a:solidFill>
+                <a:latin typeface="Arial"/>
+              </a:rPr>
+              <a:t>Generate</a:t>
+            </a:r>
+          </a:p>
+        </p:txBody>
+      </p:sp>
+      <p:sp>
+        <p:nvSpPr>
+          <p:cNvPr id="11" name="TextBox 10"/>
+          <p:cNvSpPr txBox="1"/>
+          <p:nvPr/>
+        </p:nvSpPr>
+        <p:spPr>
+          <a:xfrm>
+            <a:off x="640080" y="2816352"/>
+            <a:ext cx="2880360" cy="1216152"/>
+          </a:xfrm>
+          <a:prstGeom prst="rect">
+            <a:avLst/>
+          </a:prstGeom>
+          <a:noFill/>
+        </p:spPr>
+        <p:txBody>
+          <a:bodyPr wrap="square" lIns="18288" rIns="18288" tIns="18288" bIns="18288" anchor="t">
+            <a:spAutoFit/>
+          </a:bodyPr>
+          <a:lstStyle/>
+          <a:p>
+            <a:pPr algn="l">
+              <a:spcAft>
+                <a:spcPts val="0"/>
+              </a:spcAft>
+            </a:pPr>
+            <a:r>
+              <a:rPr sz="1500" b="0" i="0">
+                <a:solidFill>
+                  <a:srgbClr val="263746"/>
+                </a:solidFill>
+                <a:latin typeface="Arial"/>
+              </a:rPr>
+              <a:t>Conditional DDIM produced high-fidelity profiles with near-chance real-versus-synthetic separation.</a:t>
+            </a:r>
+          </a:p>
+        </p:txBody>
+      </p:sp>
+      <p:sp>
+        <p:nvSpPr>
+          <p:cNvPr id="12" name="Rounded Rectangle 11"/>
+          <p:cNvSpPr/>
+          <p:nvPr/>
+        </p:nvSpPr>
+        <p:spPr>
+          <a:xfrm>
+            <a:off x="4059936" y="1920240"/>
+            <a:ext cx="3419856" cy="2487168"/>
+          </a:xfrm>
+          <a:prstGeom prst="roundRect">
+            <a:avLst/>
+          </a:prstGeom>
+          <a:solidFill>
+            <a:srgbClr val="E8F3F1"/>
+          </a:solidFill>
+          <a:ln w="10160">
+            <a:solidFill>
+              <a:srgbClr val="178681"/>
+            </a:solidFill>
+          </a:ln>
+        </p:spPr>
+        <p:style>
+          <a:lnRef idx="1">
+            <a:schemeClr val="accent1"/>
+          </a:lnRef>
+          <a:fillRef idx="3">
+            <a:schemeClr val="accent1"/>
+          </a:fillRef>
+          <a:effectRef idx="2">
+            <a:schemeClr val="accent1"/>
+          </a:effectRef>
+          <a:fontRef idx="minor">
+            <a:schemeClr val="lt1"/>
+          </a:fontRef>
+        </p:style>
+        <p:txBody>
+          <a:bodyPr rtlCol="0" anchor="ctr"/>
+          <a:lstStyle/>
+          <a:p>
+            <a:pPr algn="ctr"/>
+          </a:p>
+        </p:txBody>
+      </p:sp>
+      <p:sp>
+        <p:nvSpPr>
+          <p:cNvPr id="13" name="Oval 12"/>
+          <p:cNvSpPr/>
+          <p:nvPr/>
+        </p:nvSpPr>
+        <p:spPr>
+          <a:xfrm>
+            <a:off x="4297680" y="2167128"/>
+            <a:ext cx="475488" cy="475488"/>
+          </a:xfrm>
+          <a:prstGeom prst="ellipse">
+            <a:avLst/>
+          </a:prstGeom>
+          <a:solidFill>
+            <a:srgbClr val="178681"/>
+          </a:solidFill>
+          <a:ln>
+            <a:noFill/>
+          </a:ln>
+        </p:spPr>
+        <p:style>
+          <a:lnRef idx="1">
+            <a:schemeClr val="accent1"/>
+          </a:lnRef>
+          <a:fillRef idx="3">
+            <a:schemeClr val="accent1"/>
+          </a:fillRef>
+          <a:effectRef idx="2">
+            <a:schemeClr val="accent1"/>
+          </a:effectRef>
+          <a:fontRef idx="minor">
+            <a:schemeClr val="lt1"/>
+          </a:fontRef>
+        </p:style>
+        <p:txBody>
+          <a:bodyPr rtlCol="0" anchor="ctr"/>
+          <a:lstStyle/>
+          <a:p>
+            <a:pPr algn="ctr"/>
+          </a:p>
+        </p:txBody>
+      </p:sp>
+      <p:sp>
+        <p:nvSpPr>
+          <p:cNvPr id="14" name="TextBox 13"/>
+          <p:cNvSpPr txBox="1"/>
+          <p:nvPr/>
+        </p:nvSpPr>
+        <p:spPr>
+          <a:xfrm>
+            <a:off x="4297680" y="2221992"/>
+            <a:ext cx="475488" cy="274320"/>
+          </a:xfrm>
+          <a:prstGeom prst="rect">
+            <a:avLst/>
+          </a:prstGeom>
+          <a:noFill/>
+        </p:spPr>
+        <p:txBody>
+          <a:bodyPr wrap="square" lIns="18288" rIns="18288" tIns="18288" bIns="18288" anchor="t">
+            <a:spAutoFit/>
+          </a:bodyPr>
+          <a:lstStyle/>
+          <a:p>
+            <a:pPr algn="ctr">
+              <a:spcAft>
+                <a:spcPts val="0"/>
+              </a:spcAft>
+            </a:pPr>
+            <a:r>
+              <a:rPr sz="1600" b="1" i="0">
+                <a:solidFill>
+                  <a:srgbClr val="FFFFFF"/>
+                </a:solidFill>
+                <a:latin typeface="Arial"/>
+              </a:rPr>
+              <a:t>2</a:t>
+            </a:r>
+          </a:p>
+        </p:txBody>
+      </p:sp>
+      <p:sp>
+        <p:nvSpPr>
+          <p:cNvPr id="15" name="TextBox 14"/>
+          <p:cNvSpPr txBox="1"/>
+          <p:nvPr/>
+        </p:nvSpPr>
+        <p:spPr>
+          <a:xfrm>
+            <a:off x="4892040" y="2176272"/>
+            <a:ext cx="2240280" cy="329184"/>
+          </a:xfrm>
+          <a:prstGeom prst="rect">
+            <a:avLst/>
+          </a:prstGeom>
+          <a:noFill/>
+        </p:spPr>
+        <p:txBody>
+          <a:bodyPr wrap="square" lIns="18288" rIns="18288" tIns="18288" bIns="18288" anchor="t">
+            <a:spAutoFit/>
+          </a:bodyPr>
+          <a:lstStyle/>
+          <a:p>
+            <a:pPr algn="l">
+              <a:spcAft>
+                <a:spcPts val="0"/>
+              </a:spcAft>
+            </a:pPr>
+            <a:r>
+              <a:rPr sz="1900" b="1" i="0">
+                <a:solidFill>
+                  <a:srgbClr val="178681"/>
+                </a:solidFill>
+                <a:latin typeface="Arial"/>
+              </a:rPr>
+              <a:t>Use</a:t>
+            </a:r>
+          </a:p>
+        </p:txBody>
+      </p:sp>
+      <p:sp>
+        <p:nvSpPr>
+          <p:cNvPr id="16" name="TextBox 15"/>
+          <p:cNvSpPr txBox="1"/>
+          <p:nvPr/>
+        </p:nvSpPr>
+        <p:spPr>
+          <a:xfrm>
+            <a:off x="4315968" y="2816352"/>
+            <a:ext cx="2880360" cy="1216152"/>
+          </a:xfrm>
+          <a:prstGeom prst="rect">
+            <a:avLst/>
+          </a:prstGeom>
+          <a:noFill/>
+        </p:spPr>
+        <p:txBody>
+          <a:bodyPr wrap="square" lIns="18288" rIns="18288" tIns="18288" bIns="18288" anchor="t">
+            <a:spAutoFit/>
+          </a:bodyPr>
+          <a:lstStyle/>
+          <a:p>
+            <a:pPr algn="l">
+              <a:spcAft>
+                <a:spcPts val="0"/>
+              </a:spcAft>
+            </a:pPr>
+            <a:r>
+              <a:rPr sz="1500" b="0" i="0">
+                <a:solidFill>
+                  <a:srgbClr val="263746"/>
+                </a:solidFill>
+                <a:latin typeface="Arial"/>
+              </a:rPr>
+              <a:t>Pooled augmentation failed. Tissue-specific ranking and low-weight training were more useful.</a:t>
+            </a:r>
+          </a:p>
+        </p:txBody>
+      </p:sp>
+      <p:sp>
+        <p:nvSpPr>
+          <p:cNvPr id="17" name="Rounded Rectangle 16"/>
+          <p:cNvSpPr/>
+          <p:nvPr/>
+        </p:nvSpPr>
+        <p:spPr>
+          <a:xfrm>
+            <a:off x="7735824" y="1920240"/>
+            <a:ext cx="3419856" cy="2487168"/>
+          </a:xfrm>
+          <a:prstGeom prst="roundRect">
+            <a:avLst/>
+          </a:prstGeom>
+          <a:solidFill>
+            <a:srgbClr val="F8F1E2"/>
+          </a:solidFill>
+          <a:ln w="10160">
+            <a:solidFill>
+              <a:srgbClr val="D37B00"/>
+            </a:solidFill>
+          </a:ln>
+        </p:spPr>
+        <p:style>
+          <a:lnRef idx="1">
+            <a:schemeClr val="accent1"/>
+          </a:lnRef>
+          <a:fillRef idx="3">
+            <a:schemeClr val="accent1"/>
+          </a:fillRef>
+          <a:effectRef idx="2">
+            <a:schemeClr val="accent1"/>
+          </a:effectRef>
+          <a:fontRef idx="minor">
+            <a:schemeClr val="lt1"/>
+          </a:fontRef>
+        </p:style>
+        <p:txBody>
+          <a:bodyPr rtlCol="0" anchor="ctr"/>
+          <a:lstStyle/>
+          <a:p>
+            <a:pPr algn="ctr"/>
+          </a:p>
+        </p:txBody>
+      </p:sp>
+      <p:sp>
+        <p:nvSpPr>
+          <p:cNvPr id="18" name="Oval 17"/>
+          <p:cNvSpPr/>
+          <p:nvPr/>
+        </p:nvSpPr>
+        <p:spPr>
+          <a:xfrm>
+            <a:off x="7973568" y="2167128"/>
+            <a:ext cx="475488" cy="475488"/>
+          </a:xfrm>
+          <a:prstGeom prst="ellipse">
+            <a:avLst/>
+          </a:prstGeom>
+          <a:solidFill>
+            <a:srgbClr val="D37B00"/>
+          </a:solidFill>
+          <a:ln>
+            <a:noFill/>
+          </a:ln>
+        </p:spPr>
+        <p:style>
+          <a:lnRef idx="1">
+            <a:schemeClr val="accent1"/>
+          </a:lnRef>
+          <a:fillRef idx="3">
+            <a:schemeClr val="accent1"/>
+          </a:fillRef>
+          <a:effectRef idx="2">
+            <a:schemeClr val="accent1"/>
+          </a:effectRef>
+          <a:fontRef idx="minor">
+            <a:schemeClr val="lt1"/>
+          </a:fontRef>
+        </p:style>
+        <p:txBody>
+          <a:bodyPr rtlCol="0" anchor="ctr"/>
+          <a:lstStyle/>
+          <a:p>
+            <a:pPr algn="ctr"/>
+          </a:p>
+        </p:txBody>
+      </p:sp>
+      <p:sp>
+        <p:nvSpPr>
+          <p:cNvPr id="19" name="TextBox 18"/>
+          <p:cNvSpPr txBox="1"/>
+          <p:nvPr/>
+        </p:nvSpPr>
+        <p:spPr>
+          <a:xfrm>
+            <a:off x="7973568" y="2221992"/>
+            <a:ext cx="475488" cy="274320"/>
+          </a:xfrm>
+          <a:prstGeom prst="rect">
+            <a:avLst/>
+          </a:prstGeom>
+          <a:noFill/>
+        </p:spPr>
+        <p:txBody>
+          <a:bodyPr wrap="square" lIns="18288" rIns="18288" tIns="18288" bIns="18288" anchor="t">
+            <a:spAutoFit/>
+          </a:bodyPr>
+          <a:lstStyle/>
+          <a:p>
+            <a:pPr algn="ctr">
+              <a:spcAft>
+                <a:spcPts val="0"/>
+              </a:spcAft>
+            </a:pPr>
+            <a:r>
+              <a:rPr sz="1600" b="1" i="0">
+                <a:solidFill>
+                  <a:srgbClr val="FFFFFF"/>
+                </a:solidFill>
+                <a:latin typeface="Arial"/>
+              </a:rPr>
+              <a:t>3</a:t>
+            </a:r>
+          </a:p>
+        </p:txBody>
+      </p:sp>
+      <p:sp>
+        <p:nvSpPr>
+          <p:cNvPr id="20" name="TextBox 19"/>
+          <p:cNvSpPr txBox="1"/>
+          <p:nvPr/>
+        </p:nvSpPr>
+        <p:spPr>
+          <a:xfrm>
+            <a:off x="8567928" y="2176272"/>
+            <a:ext cx="2240280" cy="329184"/>
+          </a:xfrm>
+          <a:prstGeom prst="rect">
+            <a:avLst/>
+          </a:prstGeom>
+          <a:noFill/>
+        </p:spPr>
+        <p:txBody>
+          <a:bodyPr wrap="square" lIns="18288" rIns="18288" tIns="18288" bIns="18288" anchor="t">
+            <a:spAutoFit/>
+          </a:bodyPr>
+          <a:lstStyle/>
+          <a:p>
+            <a:pPr algn="l">
+              <a:spcAft>
+                <a:spcPts val="0"/>
+              </a:spcAft>
+            </a:pPr>
+            <a:r>
+              <a:rPr sz="1900" b="1" i="0">
+                <a:solidFill>
+                  <a:srgbClr val="D37B00"/>
+                </a:solidFill>
+                <a:latin typeface="Arial"/>
+              </a:rPr>
+              <a:t>Interpret</a:t>
+            </a:r>
+          </a:p>
+        </p:txBody>
+      </p:sp>
+      <p:sp>
+        <p:nvSpPr>
+          <p:cNvPr id="21" name="TextBox 20"/>
+          <p:cNvSpPr txBox="1"/>
+          <p:nvPr/>
+        </p:nvSpPr>
+        <p:spPr>
+          <a:xfrm>
+            <a:off x="7991856" y="2816352"/>
+            <a:ext cx="2880360" cy="1216152"/>
+          </a:xfrm>
+          <a:prstGeom prst="rect">
+            <a:avLst/>
+          </a:prstGeom>
+          <a:noFill/>
+        </p:spPr>
+        <p:txBody>
+          <a:bodyPr wrap="square" lIns="18288" rIns="18288" tIns="18288" bIns="18288" anchor="t">
+            <a:spAutoFit/>
+          </a:bodyPr>
+          <a:lstStyle/>
+          <a:p>
+            <a:pPr algn="l">
+              <a:spcAft>
+                <a:spcPts val="0"/>
+              </a:spcAft>
+            </a:pPr>
+            <a:r>
+              <a:rPr sz="1500" b="0" i="0">
+                <a:solidFill>
+                  <a:srgbClr val="263746"/>
+                </a:solidFill>
+                <a:latin typeface="Arial"/>
+              </a:rPr>
+              <a:t>Thymus and soleus were clearest. Literature review separated recovery from complementary hypotheses.</a:t>
+            </a:r>
+          </a:p>
+        </p:txBody>
+      </p:sp>
+      <p:sp>
+        <p:nvSpPr>
+          <p:cNvPr id="22" name="Rounded Rectangle 21"/>
+          <p:cNvSpPr/>
+          <p:nvPr/>
+        </p:nvSpPr>
+        <p:spPr>
+          <a:xfrm>
+            <a:off x="384048" y="4709160"/>
+            <a:ext cx="10972800" cy="1188720"/>
+          </a:xfrm>
+          <a:prstGeom prst="roundRect">
+            <a:avLst/>
+          </a:prstGeom>
+          <a:solidFill>
+            <a:srgbClr val="082B55"/>
+          </a:solidFill>
+          <a:ln w="10160">
+            <a:solidFill>
+              <a:srgbClr val="082B55"/>
+            </a:solidFill>
+          </a:ln>
+        </p:spPr>
+        <p:style>
+          <a:lnRef idx="1">
+            <a:schemeClr val="accent1"/>
+          </a:lnRef>
+          <a:fillRef idx="3">
+            <a:schemeClr val="accent1"/>
+          </a:fillRef>
+          <a:effectRef idx="2">
+            <a:schemeClr val="accent1"/>
+          </a:effectRef>
+          <a:fontRef idx="minor">
+            <a:schemeClr val="lt1"/>
+          </a:fontRef>
+        </p:style>
+        <p:txBody>
+          <a:bodyPr rtlCol="0" anchor="ctr"/>
+          <a:lstStyle/>
+          <a:p>
+            <a:pPr algn="ctr"/>
+          </a:p>
+        </p:txBody>
+      </p:sp>
+      <p:sp>
+        <p:nvSpPr>
+          <p:cNvPr id="23" name="TextBox 22"/>
+          <p:cNvSpPr txBox="1"/>
+          <p:nvPr/>
+        </p:nvSpPr>
+        <p:spPr>
+          <a:xfrm>
+            <a:off x="685800" y="5010912"/>
+            <a:ext cx="1261872" cy="310896"/>
+          </a:xfrm>
+          <a:prstGeom prst="rect">
+            <a:avLst/>
+          </a:prstGeom>
+          <a:noFill/>
+        </p:spPr>
+        <p:txBody>
+          <a:bodyPr wrap="square" lIns="18288" rIns="18288" tIns="18288" bIns="18288" anchor="t">
+            <a:spAutoFit/>
+          </a:bodyPr>
+          <a:lstStyle/>
+          <a:p>
+            <a:pPr algn="l">
+              <a:spcAft>
+                <a:spcPts val="0"/>
+              </a:spcAft>
+            </a:pPr>
+            <a:r>
+              <a:rPr sz="1700" b="1" i="0">
+                <a:solidFill>
+                  <a:srgbClr val="FFD69A"/>
+                </a:solidFill>
+                <a:latin typeface="Arial"/>
+              </a:rPr>
+              <a:t>Next test</a:t>
+            </a:r>
+          </a:p>
+        </p:txBody>
+      </p:sp>
+      <p:sp>
+        <p:nvSpPr>
+          <p:cNvPr id="24" name="TextBox 23"/>
+          <p:cNvSpPr txBox="1"/>
+          <p:nvPr/>
+        </p:nvSpPr>
+        <p:spPr>
+          <a:xfrm>
+            <a:off x="1874519" y="4937760"/>
+            <a:ext cx="9070848" cy="530352"/>
+          </a:xfrm>
+          <a:prstGeom prst="rect">
+            <a:avLst/>
+          </a:prstGeom>
+          <a:noFill/>
+        </p:spPr>
+        <p:txBody>
+          <a:bodyPr wrap="square" lIns="18288" rIns="18288" tIns="18288" bIns="18288" anchor="ctr">
+            <a:spAutoFit/>
+          </a:bodyPr>
+          <a:lstStyle/>
+          <a:p>
+            <a:pPr algn="l">
+              <a:spcAft>
+                <a:spcPts val="0"/>
+              </a:spcAft>
+            </a:pPr>
+            <a:r>
+              <a:rPr sz="1600" b="0" i="0">
+                <a:solidFill>
+                  <a:srgbClr val="FFFFFF"/>
+                </a:solidFill>
+                <a:latin typeface="Arial"/>
+              </a:rPr>
+              <a:t>Use independent samples and cell-resolved assays to test thymus proliferation, soleus metabolism, kidney signaling and adrenal Psmb8.</a:t>
+            </a:r>
+          </a:p>
+        </p:txBody>
+      </p:sp>
+      <p:sp>
+        <p:nvSpPr>
+          <p:cNvPr id="25" name="TextBox 24"/>
+          <p:cNvSpPr txBox="1"/>
+          <p:nvPr/>
+        </p:nvSpPr>
+        <p:spPr>
+          <a:xfrm>
+            <a:off x="1874519" y="5532120"/>
+            <a:ext cx="9070848" cy="256032"/>
+          </a:xfrm>
+          <a:prstGeom prst="rect">
+            <a:avLst/>
+          </a:prstGeom>
+          <a:noFill/>
+        </p:spPr>
+        <p:txBody>
+          <a:bodyPr wrap="square" lIns="18288" rIns="18288" tIns="18288" bIns="18288" anchor="t">
+            <a:spAutoFit/>
+          </a:bodyPr>
+          <a:lstStyle/>
+          <a:p>
+            <a:pPr algn="l">
+              <a:spcAft>
+                <a:spcPts val="0"/>
+              </a:spcAft>
+            </a:pPr>
+            <a:r>
+              <a:rPr sz="1250" b="0" i="0">
+                <a:solidFill>
+                  <a:srgbClr val="BFD0E1"/>
+                </a:solidFill>
+                <a:latin typeface="Arial"/>
+              </a:rPr>
+              <a:t>Generated profiles never enter the biological sample count or the BH-FDR test.</a:t>
+            </a:r>
+          </a:p>
+        </p:txBody>
+      </p:sp>
+    </p:spTree>
+  </p:cSld>
+  <p:clrMapOvr>
+    <a:masterClrMapping/>
+  </p:clrMapOvr>
+</p:sld>
+</file>
+
+<file path=ppt/slides/slide14.xml><?xml version="1.0" encoding="utf-8"?>
 <p:sld xmlns:a="http://schemas.openxmlformats.org/drawingml/2006/main" xmlns:p="http://schemas.openxmlformats.org/presentationml/2006/main" xmlns:r="http://schemas.openxmlformats.org/officeDocument/2006/relationships">
   <p:cSld>
     <p:spTree>
@@ -33917,7 +34717,7 @@
                 </a:solidFill>
                 <a:latin typeface="Arial"/>
               </a:rPr>
-              <a:t>THYMUS</a:t>
+              <a:t>LITERATURE INTERPRETATION</a:t>
             </a:r>
           </a:p>
         </p:txBody>
@@ -33956,7 +34756,7 @@
                 </a:solidFill>
                 <a:latin typeface="Arial"/>
               </a:rPr>
-              <a:t>Thymus points to lower proliferative renewal</a:t>
+              <a:t>Annotation separates recovery from hypothesis extension</a:t>
             </a:r>
           </a:p>
         </p:txBody>
@@ -33995,55 +34795,31 @@
                 </a:solidFill>
                 <a:latin typeface="Arial"/>
               </a:rPr>
-              <a:t>Synthetic guidance organized real-data associations into a coherent mitotic and DNA-replication panel.</a:t>
-            </a:r>
-          </a:p>
-        </p:txBody>
-      </p:sp>
-      <p:pic>
-        <p:nvPicPr>
-          <p:cNvPr id="7" name="Thymus gene effects and Reactome processes" descr="Thymus gene effects and Reactome processes"/>
-          <p:cNvPicPr>
-            <a:picLocks noChangeAspect="1"/>
-          </p:cNvPicPr>
-          <p:nvPr/>
-        </p:nvPicPr>
-        <p:blipFill>
-          <a:blip r:embed="rId2"/>
-          <a:stretch>
-            <a:fillRect/>
-          </a:stretch>
-        </p:blipFill>
-        <p:spPr>
-          <a:xfrm>
-            <a:off x="320040" y="1895403"/>
-            <a:ext cx="7818120" cy="4109608"/>
-          </a:xfrm>
-          <a:prstGeom prst="rect">
-            <a:avLst/>
-          </a:prstGeom>
-        </p:spPr>
-      </p:pic>
-      <p:sp>
-        <p:nvSpPr>
-          <p:cNvPr id="8" name="Rounded Rectangle 7"/>
+              <a:t>The label describes the relationship to prior evidence, not whether a gene is biologically plausible.</a:t>
+            </a:r>
+          </a:p>
+        </p:txBody>
+      </p:sp>
+      <p:sp>
+        <p:nvSpPr>
+          <p:cNvPr id="7" name="Rounded Rectangle 6"/>
           <p:cNvSpPr/>
           <p:nvPr/>
         </p:nvSpPr>
         <p:spPr>
           <a:xfrm>
-            <a:off x="8321040" y="1847088"/>
-            <a:ext cx="3493008" cy="4178808"/>
+            <a:off x="411480" y="1828800"/>
+            <a:ext cx="2331720" cy="832104"/>
           </a:xfrm>
           <a:prstGeom prst="roundRect">
             <a:avLst/>
           </a:prstGeom>
           <a:solidFill>
-            <a:srgbClr val="F8ECE9"/>
+            <a:srgbClr val="E9F1F7"/>
           </a:solidFill>
           <a:ln w="10160">
             <a:solidFill>
-              <a:srgbClr val="E8C9C2"/>
+              <a:srgbClr val="2D6496"/>
             </a:solidFill>
           </a:ln>
         </p:spPr>
@@ -34071,14 +34847,14 @@
       </p:sp>
       <p:sp>
         <p:nvSpPr>
-          <p:cNvPr id="9" name="TextBox 8"/>
+          <p:cNvPr id="8" name="TextBox 7"/>
           <p:cNvSpPr txBox="1"/>
           <p:nvPr/>
         </p:nvSpPr>
         <p:spPr>
           <a:xfrm>
-            <a:off x="8622792" y="2139696"/>
-            <a:ext cx="1005840" cy="594360"/>
+            <a:off x="557784" y="1947672"/>
+            <a:ext cx="2029968" cy="228600"/>
           </a:xfrm>
           <a:prstGeom prst="rect">
             <a:avLst/>
@@ -34097,27 +34873,27 @@
               </a:spcAft>
             </a:pPr>
             <a:r>
-              <a:rPr sz="3500" b="1" i="0">
-                <a:solidFill>
-                  <a:srgbClr val="D96552"/>
+              <a:rPr sz="1350" b="1" i="0">
+                <a:solidFill>
+                  <a:srgbClr val="2D6496"/>
                 </a:solidFill>
                 <a:latin typeface="Arial"/>
               </a:rPr>
-              <a:t>16</a:t>
-            </a:r>
-          </a:p>
-        </p:txBody>
-      </p:sp>
-      <p:sp>
-        <p:nvSpPr>
-          <p:cNvPr id="10" name="TextBox 9"/>
+              <a:t>1  Candidate</a:t>
+            </a:r>
+          </a:p>
+        </p:txBody>
+      </p:sp>
+      <p:sp>
+        <p:nvSpPr>
+          <p:cNvPr id="9" name="TextBox 8"/>
           <p:cNvSpPr txBox="1"/>
           <p:nvPr/>
         </p:nvSpPr>
         <p:spPr>
           <a:xfrm>
-            <a:off x="9491472" y="2176272"/>
-            <a:ext cx="1938528" cy="566928"/>
+            <a:off x="557784" y="2185416"/>
+            <a:ext cx="2029968" cy="365760"/>
           </a:xfrm>
           <a:prstGeom prst="rect">
             <a:avLst/>
@@ -34136,28 +34912,116 @@
               </a:spcAft>
             </a:pPr>
             <a:r>
-              <a:rPr sz="1400" b="1" i="0">
+              <a:rPr sz="1210" b="0" i="0">
                 <a:solidFill>
                   <a:srgbClr val="263746"/>
                 </a:solidFill>
                 <a:latin typeface="Arial"/>
               </a:rPr>
-              <a:t>synthetic-informed
-BH-FDR associations</a:t>
-            </a:r>
-          </a:p>
-        </p:txBody>
-      </p:sp>
-      <p:sp>
-        <p:nvSpPr>
-          <p:cNvPr id="11" name="TextBox 10"/>
+              <a:t>Gene + tissue +
+FLT direction</a:t>
+            </a:r>
+          </a:p>
+        </p:txBody>
+      </p:sp>
+      <p:sp>
+        <p:nvSpPr>
+          <p:cNvPr id="10" name="Right Arrow 9"/>
+          <p:cNvSpPr/>
+          <p:nvPr/>
+        </p:nvSpPr>
+        <p:spPr>
+          <a:xfrm>
+            <a:off x="2852928" y="2112264"/>
+            <a:ext cx="283464" cy="256032"/>
+          </a:xfrm>
+          <a:prstGeom prst="rightArrow">
+            <a:avLst/>
+          </a:prstGeom>
+          <a:solidFill>
+            <a:srgbClr val="8A969E"/>
+          </a:solidFill>
+          <a:ln>
+            <a:noFill/>
+          </a:ln>
+        </p:spPr>
+        <p:style>
+          <a:lnRef idx="1">
+            <a:schemeClr val="accent1"/>
+          </a:lnRef>
+          <a:fillRef idx="3">
+            <a:schemeClr val="accent1"/>
+          </a:fillRef>
+          <a:effectRef idx="2">
+            <a:schemeClr val="accent1"/>
+          </a:effectRef>
+          <a:fontRef idx="minor">
+            <a:schemeClr val="lt1"/>
+          </a:fontRef>
+        </p:style>
+        <p:txBody>
+          <a:bodyPr rtlCol="0" anchor="ctr"/>
+          <a:lstStyle/>
+          <a:p>
+            <a:pPr algn="ctr"/>
+          </a:p>
+        </p:txBody>
+      </p:sp>
+      <p:sp>
+        <p:nvSpPr>
+          <p:cNvPr id="11" name="Rounded Rectangle 10"/>
+          <p:cNvSpPr/>
+          <p:nvPr/>
+        </p:nvSpPr>
+        <p:spPr>
+          <a:xfrm>
+            <a:off x="3264408" y="1828800"/>
+            <a:ext cx="2331720" cy="832104"/>
+          </a:xfrm>
+          <a:prstGeom prst="roundRect">
+            <a:avLst/>
+          </a:prstGeom>
+          <a:solidFill>
+            <a:srgbClr val="E8F3F1"/>
+          </a:solidFill>
+          <a:ln w="10160">
+            <a:solidFill>
+              <a:srgbClr val="178681"/>
+            </a:solidFill>
+          </a:ln>
+        </p:spPr>
+        <p:style>
+          <a:lnRef idx="1">
+            <a:schemeClr val="accent1"/>
+          </a:lnRef>
+          <a:fillRef idx="3">
+            <a:schemeClr val="accent1"/>
+          </a:fillRef>
+          <a:effectRef idx="2">
+            <a:schemeClr val="accent1"/>
+          </a:effectRef>
+          <a:fontRef idx="minor">
+            <a:schemeClr val="lt1"/>
+          </a:fontRef>
+        </p:style>
+        <p:txBody>
+          <a:bodyPr rtlCol="0" anchor="ctr"/>
+          <a:lstStyle/>
+          <a:p>
+            <a:pPr algn="ctr"/>
+          </a:p>
+        </p:txBody>
+      </p:sp>
+      <p:sp>
+        <p:nvSpPr>
+          <p:cNvPr id="12" name="TextBox 11"/>
           <p:cNvSpPr txBox="1"/>
           <p:nvPr/>
         </p:nvSpPr>
         <p:spPr>
           <a:xfrm>
-            <a:off x="8631936" y="2862072"/>
-            <a:ext cx="2788920" cy="274320"/>
+            <a:off x="3410712" y="1947672"/>
+            <a:ext cx="2029968" cy="228600"/>
           </a:xfrm>
           <a:prstGeom prst="rect">
             <a:avLst/>
@@ -34176,33 +35040,73 @@
               </a:spcAft>
             </a:pPr>
             <a:r>
-              <a:rPr sz="1400" b="1" i="0">
+              <a:rPr sz="1350" b="1" i="0">
                 <a:solidFill>
                   <a:srgbClr val="178681"/>
                 </a:solidFill>
                 <a:latin typeface="Arial"/>
               </a:rPr>
-              <a:t>13 promoted | 3 reinforced</a:t>
-            </a:r>
-          </a:p>
-        </p:txBody>
-      </p:sp>
-      <p:sp>
-        <p:nvSpPr>
-          <p:cNvPr id="12" name="Oval 11"/>
+              <a:t>2  Search</a:t>
+            </a:r>
+          </a:p>
+        </p:txBody>
+      </p:sp>
+      <p:sp>
+        <p:nvSpPr>
+          <p:cNvPr id="13" name="TextBox 12"/>
+          <p:cNvSpPr txBox="1"/>
+          <p:nvPr/>
+        </p:nvSpPr>
+        <p:spPr>
+          <a:xfrm>
+            <a:off x="3410712" y="2185416"/>
+            <a:ext cx="2029968" cy="365760"/>
+          </a:xfrm>
+          <a:prstGeom prst="rect">
+            <a:avLst/>
+          </a:prstGeom>
+          <a:noFill/>
+        </p:spPr>
+        <p:txBody>
+          <a:bodyPr wrap="square" lIns="18288" rIns="18288" tIns="18288" bIns="18288" anchor="t">
+            <a:spAutoFit/>
+          </a:bodyPr>
+          <a:lstStyle/>
+          <a:p>
+            <a:pPr algn="l">
+              <a:spcAft>
+                <a:spcPts val="0"/>
+              </a:spcAft>
+            </a:pPr>
+            <a:r>
+              <a:rPr sz="1210" b="0" i="0">
+                <a:solidFill>
+                  <a:srgbClr val="263746"/>
+                </a:solidFill>
+                <a:latin typeface="Arial"/>
+              </a:rPr>
+              <a:t>Spaceflight +
+mechanism literature</a:t>
+            </a:r>
+          </a:p>
+        </p:txBody>
+      </p:sp>
+      <p:sp>
+        <p:nvSpPr>
+          <p:cNvPr id="14" name="Right Arrow 13"/>
           <p:cNvSpPr/>
           <p:nvPr/>
         </p:nvSpPr>
         <p:spPr>
           <a:xfrm>
-            <a:off x="8631936" y="3419856"/>
-            <a:ext cx="91440" cy="91440"/>
-          </a:xfrm>
-          <a:prstGeom prst="ellipse">
+            <a:off x="5705856" y="2112264"/>
+            <a:ext cx="283464" cy="256032"/>
+          </a:xfrm>
+          <a:prstGeom prst="rightArrow">
             <a:avLst/>
           </a:prstGeom>
           <a:solidFill>
-            <a:srgbClr val="D96552"/>
+            <a:srgbClr val="8A969E"/>
           </a:solidFill>
           <a:ln>
             <a:noFill/>
@@ -34232,14 +35136,59 @@
       </p:sp>
       <p:sp>
         <p:nvSpPr>
-          <p:cNvPr id="13" name="TextBox 12"/>
+          <p:cNvPr id="15" name="Rounded Rectangle 14"/>
+          <p:cNvSpPr/>
+          <p:nvPr/>
+        </p:nvSpPr>
+        <p:spPr>
+          <a:xfrm>
+            <a:off x="6117336" y="1828800"/>
+            <a:ext cx="2331720" cy="832104"/>
+          </a:xfrm>
+          <a:prstGeom prst="roundRect">
+            <a:avLst/>
+          </a:prstGeom>
+          <a:solidFill>
+            <a:srgbClr val="F8F1E2"/>
+          </a:solidFill>
+          <a:ln w="10160">
+            <a:solidFill>
+              <a:srgbClr val="D37B00"/>
+            </a:solidFill>
+          </a:ln>
+        </p:spPr>
+        <p:style>
+          <a:lnRef idx="1">
+            <a:schemeClr val="accent1"/>
+          </a:lnRef>
+          <a:fillRef idx="3">
+            <a:schemeClr val="accent1"/>
+          </a:fillRef>
+          <a:effectRef idx="2">
+            <a:schemeClr val="accent1"/>
+          </a:effectRef>
+          <a:fontRef idx="minor">
+            <a:schemeClr val="lt1"/>
+          </a:fontRef>
+        </p:style>
+        <p:txBody>
+          <a:bodyPr rtlCol="0" anchor="ctr"/>
+          <a:lstStyle/>
+          <a:p>
+            <a:pPr algn="ctr"/>
+          </a:p>
+        </p:txBody>
+      </p:sp>
+      <p:sp>
+        <p:nvSpPr>
+          <p:cNvPr id="16" name="TextBox 15"/>
           <p:cNvSpPr txBox="1"/>
           <p:nvPr/>
         </p:nvSpPr>
         <p:spPr>
           <a:xfrm>
-            <a:off x="8796528" y="3310128"/>
-            <a:ext cx="2606039" cy="704088"/>
+            <a:off x="6263640" y="1947672"/>
+            <a:ext cx="2029968" cy="228600"/>
           </a:xfrm>
           <a:prstGeom prst="rect">
             <a:avLst/>
@@ -34247,7 +35196,7 @@
           <a:noFill/>
         </p:spPr>
         <p:txBody>
-          <a:bodyPr wrap="square" lIns="18288" rIns="18288" tIns="18288" bIns="18288" anchor="ctr">
+          <a:bodyPr wrap="square" lIns="18288" rIns="18288" tIns="18288" bIns="18288" anchor="t">
             <a:spAutoFit/>
           </a:bodyPr>
           <a:lstStyle/>
@@ -34258,33 +35207,73 @@
               </a:spcAft>
             </a:pPr>
             <a:r>
-              <a:rPr sz="1320" b="0" i="0">
-                <a:solidFill>
-                  <a:srgbClr val="263746"/>
+              <a:rPr sz="1350" b="1" i="0">
+                <a:solidFill>
+                  <a:srgbClr val="D37B00"/>
                 </a:solidFill>
                 <a:latin typeface="Arial"/>
               </a:rPr>
-              <a:t>Lower Nusap1, Stmn1, Birc5, Cdk1, Top2a and related genes</a:t>
-            </a:r>
-          </a:p>
-        </p:txBody>
-      </p:sp>
-      <p:sp>
-        <p:nvSpPr>
-          <p:cNvPr id="14" name="Oval 13"/>
+              <a:t>3  Classify</a:t>
+            </a:r>
+          </a:p>
+        </p:txBody>
+      </p:sp>
+      <p:sp>
+        <p:nvSpPr>
+          <p:cNvPr id="17" name="TextBox 16"/>
+          <p:cNvSpPr txBox="1"/>
+          <p:nvPr/>
+        </p:nvSpPr>
+        <p:spPr>
+          <a:xfrm>
+            <a:off x="6263640" y="2185416"/>
+            <a:ext cx="2029968" cy="365760"/>
+          </a:xfrm>
+          <a:prstGeom prst="rect">
+            <a:avLst/>
+          </a:prstGeom>
+          <a:noFill/>
+        </p:spPr>
+        <p:txBody>
+          <a:bodyPr wrap="square" lIns="18288" rIns="18288" tIns="18288" bIns="18288" anchor="t">
+            <a:spAutoFit/>
+          </a:bodyPr>
+          <a:lstStyle/>
+          <a:p>
+            <a:pPr algn="l">
+              <a:spcAft>
+                <a:spcPts val="0"/>
+              </a:spcAft>
+            </a:pPr>
+            <a:r>
+              <a:rPr sz="1210" b="0" i="0">
+                <a:solidFill>
+                  <a:srgbClr val="263746"/>
+                </a:solidFill>
+                <a:latin typeface="Arial"/>
+              </a:rPr>
+              <a:t>Relation to
+published evidence</a:t>
+            </a:r>
+          </a:p>
+        </p:txBody>
+      </p:sp>
+      <p:sp>
+        <p:nvSpPr>
+          <p:cNvPr id="18" name="Right Arrow 17"/>
           <p:cNvSpPr/>
           <p:nvPr/>
         </p:nvSpPr>
         <p:spPr>
           <a:xfrm>
-            <a:off x="8631936" y="4123944"/>
-            <a:ext cx="91440" cy="91440"/>
-          </a:xfrm>
-          <a:prstGeom prst="ellipse">
+            <a:off x="8558784" y="2112264"/>
+            <a:ext cx="283464" cy="256032"/>
+          </a:xfrm>
+          <a:prstGeom prst="rightArrow">
             <a:avLst/>
           </a:prstGeom>
           <a:solidFill>
-            <a:srgbClr val="D96552"/>
+            <a:srgbClr val="8A969E"/>
           </a:solidFill>
           <a:ln>
             <a:noFill/>
@@ -34314,14 +35303,59 @@
       </p:sp>
       <p:sp>
         <p:nvSpPr>
-          <p:cNvPr id="15" name="TextBox 14"/>
+          <p:cNvPr id="19" name="Rounded Rectangle 18"/>
+          <p:cNvSpPr/>
+          <p:nvPr/>
+        </p:nvSpPr>
+        <p:spPr>
+          <a:xfrm>
+            <a:off x="8970263" y="1828800"/>
+            <a:ext cx="2331720" cy="832104"/>
+          </a:xfrm>
+          <a:prstGeom prst="roundRect">
+            <a:avLst/>
+          </a:prstGeom>
+          <a:solidFill>
+            <a:srgbClr val="F0ECF6"/>
+          </a:solidFill>
+          <a:ln w="10160">
+            <a:solidFill>
+              <a:srgbClr val="8063A6"/>
+            </a:solidFill>
+          </a:ln>
+        </p:spPr>
+        <p:style>
+          <a:lnRef idx="1">
+            <a:schemeClr val="accent1"/>
+          </a:lnRef>
+          <a:fillRef idx="3">
+            <a:schemeClr val="accent1"/>
+          </a:fillRef>
+          <a:effectRef idx="2">
+            <a:schemeClr val="accent1"/>
+          </a:effectRef>
+          <a:fontRef idx="minor">
+            <a:schemeClr val="lt1"/>
+          </a:fontRef>
+        </p:style>
+        <p:txBody>
+          <a:bodyPr rtlCol="0" anchor="ctr"/>
+          <a:lstStyle/>
+          <a:p>
+            <a:pPr algn="ctr"/>
+          </a:p>
+        </p:txBody>
+      </p:sp>
+      <p:sp>
+        <p:nvSpPr>
+          <p:cNvPr id="20" name="TextBox 19"/>
           <p:cNvSpPr txBox="1"/>
           <p:nvPr/>
         </p:nvSpPr>
         <p:spPr>
           <a:xfrm>
-            <a:off x="8796528" y="4014216"/>
-            <a:ext cx="2606039" cy="704088"/>
+            <a:off x="9116567" y="1947672"/>
+            <a:ext cx="2029968" cy="228600"/>
           </a:xfrm>
           <a:prstGeom prst="rect">
             <a:avLst/>
@@ -34329,7 +35363,7 @@
           <a:noFill/>
         </p:spPr>
         <p:txBody>
-          <a:bodyPr wrap="square" lIns="18288" rIns="18288" tIns="18288" bIns="18288" anchor="ctr">
+          <a:bodyPr wrap="square" lIns="18288" rIns="18288" tIns="18288" bIns="18288" anchor="t">
             <a:spAutoFit/>
           </a:bodyPr>
           <a:lstStyle/>
@@ -34340,36 +35374,78 @@
               </a:spcAft>
             </a:pPr>
             <a:r>
-              <a:rPr sz="1320" b="0" i="0">
-                <a:solidFill>
-                  <a:srgbClr val="263746"/>
+              <a:rPr sz="1350" b="1" i="0">
+                <a:solidFill>
+                  <a:srgbClr val="8063A6"/>
                 </a:solidFill>
                 <a:latin typeface="Arial"/>
               </a:rPr>
-              <a:t>Cell cycle, DNA replication, APC/C and G2/M processes</a:t>
-            </a:r>
-          </a:p>
-        </p:txBody>
-      </p:sp>
-      <p:sp>
-        <p:nvSpPr>
-          <p:cNvPr id="16" name="Oval 15"/>
+              <a:t>4  Interpret</a:t>
+            </a:r>
+          </a:p>
+        </p:txBody>
+      </p:sp>
+      <p:sp>
+        <p:nvSpPr>
+          <p:cNvPr id="21" name="TextBox 20"/>
+          <p:cNvSpPr txBox="1"/>
+          <p:nvPr/>
+        </p:nvSpPr>
+        <p:spPr>
+          <a:xfrm>
+            <a:off x="9116567" y="2185416"/>
+            <a:ext cx="2029968" cy="365760"/>
+          </a:xfrm>
+          <a:prstGeom prst="rect">
+            <a:avLst/>
+          </a:prstGeom>
+          <a:noFill/>
+        </p:spPr>
+        <p:txBody>
+          <a:bodyPr wrap="square" lIns="18288" rIns="18288" tIns="18288" bIns="18288" anchor="t">
+            <a:spAutoFit/>
+          </a:bodyPr>
+          <a:lstStyle/>
+          <a:p>
+            <a:pPr algn="l">
+              <a:spcAft>
+                <a:spcPts val="0"/>
+              </a:spcAft>
+            </a:pPr>
+            <a:r>
+              <a:rPr sz="1210" b="0" i="0">
+                <a:solidFill>
+                  <a:srgbClr val="263746"/>
+                </a:solidFill>
+                <a:latin typeface="Arial"/>
+              </a:rPr>
+              <a:t>Recovery, extension,
+or unmatched</a:t>
+            </a:r>
+          </a:p>
+        </p:txBody>
+      </p:sp>
+      <p:sp>
+        <p:nvSpPr>
+          <p:cNvPr id="22" name="Rounded Rectangle 21"/>
           <p:cNvSpPr/>
           <p:nvPr/>
         </p:nvSpPr>
         <p:spPr>
           <a:xfrm>
-            <a:off x="8631936" y="4828032"/>
-            <a:ext cx="91440" cy="91440"/>
-          </a:xfrm>
-          <a:prstGeom prst="ellipse">
+            <a:off x="411480" y="2916936"/>
+            <a:ext cx="6976872" cy="2980944"/>
+          </a:xfrm>
+          <a:prstGeom prst="roundRect">
             <a:avLst/>
           </a:prstGeom>
           <a:solidFill>
-            <a:srgbClr val="D96552"/>
+            <a:srgbClr val="FFFFFF"/>
           </a:solidFill>
-          <a:ln>
-            <a:noFill/>
+          <a:ln w="10160">
+            <a:solidFill>
+              <a:srgbClr val="DDE4E8"/>
+            </a:solidFill>
           </a:ln>
         </p:spPr>
         <p:style>
@@ -34396,14 +35472,14 @@
       </p:sp>
       <p:sp>
         <p:nvSpPr>
-          <p:cNvPr id="17" name="TextBox 16"/>
+          <p:cNvPr id="23" name="TextBox 22"/>
           <p:cNvSpPr txBox="1"/>
           <p:nvPr/>
         </p:nvSpPr>
         <p:spPr>
           <a:xfrm>
-            <a:off x="8796528" y="4718304"/>
-            <a:ext cx="2606039" cy="704088"/>
+            <a:off x="658368" y="3136392"/>
+            <a:ext cx="6382512" cy="310896"/>
           </a:xfrm>
           <a:prstGeom prst="rect">
             <a:avLst/>
@@ -34411,7 +35487,7 @@
           <a:noFill/>
         </p:spPr>
         <p:txBody>
-          <a:bodyPr wrap="square" lIns="18288" rIns="18288" tIns="18288" bIns="18288" anchor="ctr">
+          <a:bodyPr wrap="square" lIns="18288" rIns="18288" tIns="18288" bIns="18288" anchor="t">
             <a:spAutoFit/>
           </a:bodyPr>
           <a:lstStyle/>
@@ -34422,27 +35498,109 @@
               </a:spcAft>
             </a:pPr>
             <a:r>
-              <a:rPr sz="1320" b="0" i="0">
-                <a:solidFill>
-                  <a:srgbClr val="263746"/>
+              <a:rPr sz="1700" b="1" i="0">
+                <a:solidFill>
+                  <a:srgbClr val="082B55"/>
                 </a:solidFill>
                 <a:latin typeface="Arial"/>
               </a:rPr>
-              <a:t>Bulk RNA-seq cannot separate cell loss from lower transcription</a:t>
-            </a:r>
-          </a:p>
-        </p:txBody>
-      </p:sp>
-      <p:sp>
-        <p:nvSpPr>
-          <p:cNvPr id="18" name="TextBox 17"/>
+              <a:t>What the 26 promoted associations showed</a:t>
+            </a:r>
+          </a:p>
+        </p:txBody>
+      </p:sp>
+      <p:sp>
+        <p:nvSpPr>
+          <p:cNvPr id="24" name="Oval 23"/>
+          <p:cNvSpPr/>
+          <p:nvPr/>
+        </p:nvSpPr>
+        <p:spPr>
+          <a:xfrm>
+            <a:off x="685800" y="3593592"/>
+            <a:ext cx="338328" cy="338328"/>
+          </a:xfrm>
+          <a:prstGeom prst="ellipse">
+            <a:avLst/>
+          </a:prstGeom>
+          <a:solidFill>
+            <a:srgbClr val="478A64"/>
+          </a:solidFill>
+          <a:ln>
+            <a:noFill/>
+          </a:ln>
+        </p:spPr>
+        <p:style>
+          <a:lnRef idx="1">
+            <a:schemeClr val="accent1"/>
+          </a:lnRef>
+          <a:fillRef idx="3">
+            <a:schemeClr val="accent1"/>
+          </a:fillRef>
+          <a:effectRef idx="2">
+            <a:schemeClr val="accent1"/>
+          </a:effectRef>
+          <a:fontRef idx="minor">
+            <a:schemeClr val="lt1"/>
+          </a:fontRef>
+        </p:style>
+        <p:txBody>
+          <a:bodyPr rtlCol="0" anchor="ctr"/>
+          <a:lstStyle/>
+          <a:p>
+            <a:pPr algn="ctr"/>
+          </a:p>
+        </p:txBody>
+      </p:sp>
+      <p:sp>
+        <p:nvSpPr>
+          <p:cNvPr id="25" name="TextBox 24"/>
           <p:cNvSpPr txBox="1"/>
           <p:nvPr/>
         </p:nvSpPr>
         <p:spPr>
           <a:xfrm>
-            <a:off x="329184" y="6510528"/>
-            <a:ext cx="10972800" cy="173736"/>
+            <a:off x="685800" y="3639312"/>
+            <a:ext cx="338328" cy="201168"/>
+          </a:xfrm>
+          <a:prstGeom prst="rect">
+            <a:avLst/>
+          </a:prstGeom>
+          <a:noFill/>
+        </p:spPr>
+        <p:txBody>
+          <a:bodyPr wrap="square" lIns="18288" rIns="18288" tIns="18288" bIns="18288" anchor="t">
+            <a:spAutoFit/>
+          </a:bodyPr>
+          <a:lstStyle/>
+          <a:p>
+            <a:pPr algn="ctr">
+              <a:spcAft>
+                <a:spcPts val="0"/>
+              </a:spcAft>
+            </a:pPr>
+            <a:r>
+              <a:rPr sz="1200" b="1" i="0">
+                <a:solidFill>
+                  <a:srgbClr val="FFFFFF"/>
+                </a:solidFill>
+                <a:latin typeface="Arial"/>
+              </a:rPr>
+              <a:t>11</a:t>
+            </a:r>
+          </a:p>
+        </p:txBody>
+      </p:sp>
+      <p:sp>
+        <p:nvSpPr>
+          <p:cNvPr id="26" name="TextBox 25"/>
+          <p:cNvSpPr txBox="1"/>
+          <p:nvPr/>
+        </p:nvSpPr>
+        <p:spPr>
+          <a:xfrm>
+            <a:off x="1188720" y="3575304"/>
+            <a:ext cx="1755648" cy="310896"/>
           </a:xfrm>
           <a:prstGeom prst="rect">
             <a:avLst/>
@@ -34461,13 +35619,1067 @@
               </a:spcAft>
             </a:pPr>
             <a:r>
-              <a:rPr sz="720" b="0" i="0">
-                <a:solidFill>
-                  <a:srgbClr val="8A969E"/>
+              <a:rPr sz="1420" b="1" i="0">
+                <a:solidFill>
+                  <a:srgbClr val="478A64"/>
                 </a:solidFill>
                 <a:latin typeface="Arial"/>
               </a:rPr>
-              <a:t>Prior thymus studies report involution and altered cell-cycle expression after spaceflight (Gridley et al. 2013; Horie et al. 2019).</a:t>
+              <a:t>Aligning</a:t>
+            </a:r>
+          </a:p>
+        </p:txBody>
+      </p:sp>
+      <p:sp>
+        <p:nvSpPr>
+          <p:cNvPr id="27" name="TextBox 26"/>
+          <p:cNvSpPr txBox="1"/>
+          <p:nvPr/>
+        </p:nvSpPr>
+        <p:spPr>
+          <a:xfrm>
+            <a:off x="2907792" y="3575304"/>
+            <a:ext cx="4160520" cy="310896"/>
+          </a:xfrm>
+          <a:prstGeom prst="rect">
+            <a:avLst/>
+          </a:prstGeom>
+          <a:noFill/>
+        </p:spPr>
+        <p:txBody>
+          <a:bodyPr wrap="square" lIns="18288" rIns="18288" tIns="18288" bIns="18288" anchor="ctr">
+            <a:spAutoFit/>
+          </a:bodyPr>
+          <a:lstStyle/>
+          <a:p>
+            <a:pPr algn="l">
+              <a:spcAft>
+                <a:spcPts val="0"/>
+              </a:spcAft>
+            </a:pPr>
+            <a:r>
+              <a:rPr sz="1320" b="0" i="0">
+                <a:solidFill>
+                  <a:srgbClr val="263746"/>
+                </a:solidFill>
+                <a:latin typeface="Arial"/>
+              </a:rPr>
+              <a:t>3 exact matches + 8 same-tissue process matches</a:t>
+            </a:r>
+          </a:p>
+        </p:txBody>
+      </p:sp>
+      <p:sp>
+        <p:nvSpPr>
+          <p:cNvPr id="28" name="Oval 27"/>
+          <p:cNvSpPr/>
+          <p:nvPr/>
+        </p:nvSpPr>
+        <p:spPr>
+          <a:xfrm>
+            <a:off x="685800" y="4114800"/>
+            <a:ext cx="338328" cy="338328"/>
+          </a:xfrm>
+          <a:prstGeom prst="ellipse">
+            <a:avLst/>
+          </a:prstGeom>
+          <a:solidFill>
+            <a:srgbClr val="2D6496"/>
+          </a:solidFill>
+          <a:ln>
+            <a:noFill/>
+          </a:ln>
+        </p:spPr>
+        <p:style>
+          <a:lnRef idx="1">
+            <a:schemeClr val="accent1"/>
+          </a:lnRef>
+          <a:fillRef idx="3">
+            <a:schemeClr val="accent1"/>
+          </a:fillRef>
+          <a:effectRef idx="2">
+            <a:schemeClr val="accent1"/>
+          </a:effectRef>
+          <a:fontRef idx="minor">
+            <a:schemeClr val="lt1"/>
+          </a:fontRef>
+        </p:style>
+        <p:txBody>
+          <a:bodyPr rtlCol="0" anchor="ctr"/>
+          <a:lstStyle/>
+          <a:p>
+            <a:pPr algn="ctr"/>
+          </a:p>
+        </p:txBody>
+      </p:sp>
+      <p:sp>
+        <p:nvSpPr>
+          <p:cNvPr id="29" name="TextBox 28"/>
+          <p:cNvSpPr txBox="1"/>
+          <p:nvPr/>
+        </p:nvSpPr>
+        <p:spPr>
+          <a:xfrm>
+            <a:off x="685800" y="4160520"/>
+            <a:ext cx="338328" cy="201168"/>
+          </a:xfrm>
+          <a:prstGeom prst="rect">
+            <a:avLst/>
+          </a:prstGeom>
+          <a:noFill/>
+        </p:spPr>
+        <p:txBody>
+          <a:bodyPr wrap="square" lIns="18288" rIns="18288" tIns="18288" bIns="18288" anchor="t">
+            <a:spAutoFit/>
+          </a:bodyPr>
+          <a:lstStyle/>
+          <a:p>
+            <a:pPr algn="ctr">
+              <a:spcAft>
+                <a:spcPts val="0"/>
+              </a:spcAft>
+            </a:pPr>
+            <a:r>
+              <a:rPr sz="1200" b="1" i="0">
+                <a:solidFill>
+                  <a:srgbClr val="FFFFFF"/>
+                </a:solidFill>
+                <a:latin typeface="Arial"/>
+              </a:rPr>
+              <a:t>13</a:t>
+            </a:r>
+          </a:p>
+        </p:txBody>
+      </p:sp>
+      <p:sp>
+        <p:nvSpPr>
+          <p:cNvPr id="30" name="TextBox 29"/>
+          <p:cNvSpPr txBox="1"/>
+          <p:nvPr/>
+        </p:nvSpPr>
+        <p:spPr>
+          <a:xfrm>
+            <a:off x="1188720" y="4096512"/>
+            <a:ext cx="1755648" cy="310896"/>
+          </a:xfrm>
+          <a:prstGeom prst="rect">
+            <a:avLst/>
+          </a:prstGeom>
+          <a:noFill/>
+        </p:spPr>
+        <p:txBody>
+          <a:bodyPr wrap="square" lIns="18288" rIns="18288" tIns="18288" bIns="18288" anchor="ctr">
+            <a:spAutoFit/>
+          </a:bodyPr>
+          <a:lstStyle/>
+          <a:p>
+            <a:pPr algn="l">
+              <a:spcAft>
+                <a:spcPts val="0"/>
+              </a:spcAft>
+            </a:pPr>
+            <a:r>
+              <a:rPr sz="1420" b="1" i="0">
+                <a:solidFill>
+                  <a:srgbClr val="2D6496"/>
+                </a:solidFill>
+                <a:latin typeface="Arial"/>
+              </a:rPr>
+              <a:t>Complementary</a:t>
+            </a:r>
+          </a:p>
+        </p:txBody>
+      </p:sp>
+      <p:sp>
+        <p:nvSpPr>
+          <p:cNvPr id="31" name="TextBox 30"/>
+          <p:cNvSpPr txBox="1"/>
+          <p:nvPr/>
+        </p:nvSpPr>
+        <p:spPr>
+          <a:xfrm>
+            <a:off x="2907792" y="4096512"/>
+            <a:ext cx="4160520" cy="310896"/>
+          </a:xfrm>
+          <a:prstGeom prst="rect">
+            <a:avLst/>
+          </a:prstGeom>
+          <a:noFill/>
+        </p:spPr>
+        <p:txBody>
+          <a:bodyPr wrap="square" lIns="18288" rIns="18288" tIns="18288" bIns="18288" anchor="ctr">
+            <a:spAutoFit/>
+          </a:bodyPr>
+          <a:lstStyle/>
+          <a:p>
+            <a:pPr algn="l">
+              <a:spcAft>
+                <a:spcPts val="0"/>
+              </a:spcAft>
+            </a:pPr>
+            <a:r>
+              <a:rPr sz="1320" b="0" i="0">
+                <a:solidFill>
+                  <a:srgbClr val="263746"/>
+                </a:solidFill>
+                <a:latin typeface="Arial"/>
+              </a:rPr>
+              <a:t>Related process or mechanism; not direct replication</a:t>
+            </a:r>
+          </a:p>
+        </p:txBody>
+      </p:sp>
+      <p:sp>
+        <p:nvSpPr>
+          <p:cNvPr id="32" name="Oval 31"/>
+          <p:cNvSpPr/>
+          <p:nvPr/>
+        </p:nvSpPr>
+        <p:spPr>
+          <a:xfrm>
+            <a:off x="685800" y="4636007"/>
+            <a:ext cx="338328" cy="338328"/>
+          </a:xfrm>
+          <a:prstGeom prst="ellipse">
+            <a:avLst/>
+          </a:prstGeom>
+          <a:solidFill>
+            <a:srgbClr val="D37B00"/>
+          </a:solidFill>
+          <a:ln>
+            <a:noFill/>
+          </a:ln>
+        </p:spPr>
+        <p:style>
+          <a:lnRef idx="1">
+            <a:schemeClr val="accent1"/>
+          </a:lnRef>
+          <a:fillRef idx="3">
+            <a:schemeClr val="accent1"/>
+          </a:fillRef>
+          <a:effectRef idx="2">
+            <a:schemeClr val="accent1"/>
+          </a:effectRef>
+          <a:fontRef idx="minor">
+            <a:schemeClr val="lt1"/>
+          </a:fontRef>
+        </p:style>
+        <p:txBody>
+          <a:bodyPr rtlCol="0" anchor="ctr"/>
+          <a:lstStyle/>
+          <a:p>
+            <a:pPr algn="ctr"/>
+          </a:p>
+        </p:txBody>
+      </p:sp>
+      <p:sp>
+        <p:nvSpPr>
+          <p:cNvPr id="33" name="TextBox 32"/>
+          <p:cNvSpPr txBox="1"/>
+          <p:nvPr/>
+        </p:nvSpPr>
+        <p:spPr>
+          <a:xfrm>
+            <a:off x="685800" y="4681728"/>
+            <a:ext cx="338328" cy="201168"/>
+          </a:xfrm>
+          <a:prstGeom prst="rect">
+            <a:avLst/>
+          </a:prstGeom>
+          <a:noFill/>
+        </p:spPr>
+        <p:txBody>
+          <a:bodyPr wrap="square" lIns="18288" rIns="18288" tIns="18288" bIns="18288" anchor="t">
+            <a:spAutoFit/>
+          </a:bodyPr>
+          <a:lstStyle/>
+          <a:p>
+            <a:pPr algn="ctr">
+              <a:spcAft>
+                <a:spcPts val="0"/>
+              </a:spcAft>
+            </a:pPr>
+            <a:r>
+              <a:rPr sz="1200" b="1" i="0">
+                <a:solidFill>
+                  <a:srgbClr val="FFFFFF"/>
+                </a:solidFill>
+                <a:latin typeface="Arial"/>
+              </a:rPr>
+              <a:t>1</a:t>
+            </a:r>
+          </a:p>
+        </p:txBody>
+      </p:sp>
+      <p:sp>
+        <p:nvSpPr>
+          <p:cNvPr id="34" name="TextBox 33"/>
+          <p:cNvSpPr txBox="1"/>
+          <p:nvPr/>
+        </p:nvSpPr>
+        <p:spPr>
+          <a:xfrm>
+            <a:off x="1188720" y="4617720"/>
+            <a:ext cx="1755648" cy="310896"/>
+          </a:xfrm>
+          <a:prstGeom prst="rect">
+            <a:avLst/>
+          </a:prstGeom>
+          <a:noFill/>
+        </p:spPr>
+        <p:txBody>
+          <a:bodyPr wrap="square" lIns="18288" rIns="18288" tIns="18288" bIns="18288" anchor="ctr">
+            <a:spAutoFit/>
+          </a:bodyPr>
+          <a:lstStyle/>
+          <a:p>
+            <a:pPr algn="l">
+              <a:spcAft>
+                <a:spcPts val="0"/>
+              </a:spcAft>
+            </a:pPr>
+            <a:r>
+              <a:rPr sz="1420" b="1" i="0">
+                <a:solidFill>
+                  <a:srgbClr val="D37B00"/>
+                </a:solidFill>
+                <a:latin typeface="Arial"/>
+              </a:rPr>
+              <a:t>Ambiguous</a:t>
+            </a:r>
+          </a:p>
+        </p:txBody>
+      </p:sp>
+      <p:sp>
+        <p:nvSpPr>
+          <p:cNvPr id="35" name="TextBox 34"/>
+          <p:cNvSpPr txBox="1"/>
+          <p:nvPr/>
+        </p:nvSpPr>
+        <p:spPr>
+          <a:xfrm>
+            <a:off x="2907792" y="4617720"/>
+            <a:ext cx="4160520" cy="310896"/>
+          </a:xfrm>
+          <a:prstGeom prst="rect">
+            <a:avLst/>
+          </a:prstGeom>
+          <a:noFill/>
+        </p:spPr>
+        <p:txBody>
+          <a:bodyPr wrap="square" lIns="18288" rIns="18288" tIns="18288" bIns="18288" anchor="ctr">
+            <a:spAutoFit/>
+          </a:bodyPr>
+          <a:lstStyle/>
+          <a:p>
+            <a:pPr algn="l">
+              <a:spcAft>
+                <a:spcPts val="0"/>
+              </a:spcAft>
+            </a:pPr>
+            <a:r>
+              <a:rPr sz="1320" b="0" i="0">
+                <a:solidFill>
+                  <a:srgbClr val="263746"/>
+                </a:solidFill>
+                <a:latin typeface="Arial"/>
+              </a:rPr>
+              <a:t>Birc5 differed across mission contexts</a:t>
+            </a:r>
+          </a:p>
+        </p:txBody>
+      </p:sp>
+      <p:sp>
+        <p:nvSpPr>
+          <p:cNvPr id="36" name="Oval 35"/>
+          <p:cNvSpPr/>
+          <p:nvPr/>
+        </p:nvSpPr>
+        <p:spPr>
+          <a:xfrm>
+            <a:off x="685800" y="5157216"/>
+            <a:ext cx="338328" cy="338328"/>
+          </a:xfrm>
+          <a:prstGeom prst="ellipse">
+            <a:avLst/>
+          </a:prstGeom>
+          <a:solidFill>
+            <a:srgbClr val="8063A6"/>
+          </a:solidFill>
+          <a:ln>
+            <a:noFill/>
+          </a:ln>
+        </p:spPr>
+        <p:style>
+          <a:lnRef idx="1">
+            <a:schemeClr val="accent1"/>
+          </a:lnRef>
+          <a:fillRef idx="3">
+            <a:schemeClr val="accent1"/>
+          </a:fillRef>
+          <a:effectRef idx="2">
+            <a:schemeClr val="accent1"/>
+          </a:effectRef>
+          <a:fontRef idx="minor">
+            <a:schemeClr val="lt1"/>
+          </a:fontRef>
+        </p:style>
+        <p:txBody>
+          <a:bodyPr rtlCol="0" anchor="ctr"/>
+          <a:lstStyle/>
+          <a:p>
+            <a:pPr algn="ctr"/>
+          </a:p>
+        </p:txBody>
+      </p:sp>
+      <p:sp>
+        <p:nvSpPr>
+          <p:cNvPr id="37" name="TextBox 36"/>
+          <p:cNvSpPr txBox="1"/>
+          <p:nvPr/>
+        </p:nvSpPr>
+        <p:spPr>
+          <a:xfrm>
+            <a:off x="685800" y="5202936"/>
+            <a:ext cx="338328" cy="201168"/>
+          </a:xfrm>
+          <a:prstGeom prst="rect">
+            <a:avLst/>
+          </a:prstGeom>
+          <a:noFill/>
+        </p:spPr>
+        <p:txBody>
+          <a:bodyPr wrap="square" lIns="18288" rIns="18288" tIns="18288" bIns="18288" anchor="t">
+            <a:spAutoFit/>
+          </a:bodyPr>
+          <a:lstStyle/>
+          <a:p>
+            <a:pPr algn="ctr">
+              <a:spcAft>
+                <a:spcPts val="0"/>
+              </a:spcAft>
+            </a:pPr>
+            <a:r>
+              <a:rPr sz="1200" b="1" i="0">
+                <a:solidFill>
+                  <a:srgbClr val="FFFFFF"/>
+                </a:solidFill>
+                <a:latin typeface="Arial"/>
+              </a:rPr>
+              <a:t>1</a:t>
+            </a:r>
+          </a:p>
+        </p:txBody>
+      </p:sp>
+      <p:sp>
+        <p:nvSpPr>
+          <p:cNvPr id="38" name="TextBox 37"/>
+          <p:cNvSpPr txBox="1"/>
+          <p:nvPr/>
+        </p:nvSpPr>
+        <p:spPr>
+          <a:xfrm>
+            <a:off x="1188720" y="5138928"/>
+            <a:ext cx="1755648" cy="310896"/>
+          </a:xfrm>
+          <a:prstGeom prst="rect">
+            <a:avLst/>
+          </a:prstGeom>
+          <a:noFill/>
+        </p:spPr>
+        <p:txBody>
+          <a:bodyPr wrap="square" lIns="18288" rIns="18288" tIns="18288" bIns="18288" anchor="ctr">
+            <a:spAutoFit/>
+          </a:bodyPr>
+          <a:lstStyle/>
+          <a:p>
+            <a:pPr algn="l">
+              <a:spcAft>
+                <a:spcPts val="0"/>
+              </a:spcAft>
+            </a:pPr>
+            <a:r>
+              <a:rPr sz="1420" b="1" i="0">
+                <a:solidFill>
+                  <a:srgbClr val="8063A6"/>
+                </a:solidFill>
+                <a:latin typeface="Arial"/>
+              </a:rPr>
+              <a:t>Literature-unmatched</a:t>
+            </a:r>
+          </a:p>
+        </p:txBody>
+      </p:sp>
+      <p:sp>
+        <p:nvSpPr>
+          <p:cNvPr id="39" name="TextBox 38"/>
+          <p:cNvSpPr txBox="1"/>
+          <p:nvPr/>
+        </p:nvSpPr>
+        <p:spPr>
+          <a:xfrm>
+            <a:off x="2907792" y="5138928"/>
+            <a:ext cx="4160520" cy="310896"/>
+          </a:xfrm>
+          <a:prstGeom prst="rect">
+            <a:avLst/>
+          </a:prstGeom>
+          <a:noFill/>
+        </p:spPr>
+        <p:txBody>
+          <a:bodyPr wrap="square" lIns="18288" rIns="18288" tIns="18288" bIns="18288" anchor="ctr">
+            <a:spAutoFit/>
+          </a:bodyPr>
+          <a:lstStyle/>
+          <a:p>
+            <a:pPr algn="l">
+              <a:spcAft>
+                <a:spcPts val="0"/>
+              </a:spcAft>
+            </a:pPr>
+            <a:r>
+              <a:rPr sz="1320" b="0" i="0">
+                <a:solidFill>
+                  <a:srgbClr val="263746"/>
+                </a:solidFill>
+                <a:latin typeface="Arial"/>
+              </a:rPr>
+              <a:t>Psmb8 remains mechanistically plausible</a:t>
+            </a:r>
+          </a:p>
+        </p:txBody>
+      </p:sp>
+      <p:sp>
+        <p:nvSpPr>
+          <p:cNvPr id="40" name="Rounded Rectangle 39"/>
+          <p:cNvSpPr/>
+          <p:nvPr/>
+        </p:nvSpPr>
+        <p:spPr>
+          <a:xfrm>
+            <a:off x="7616952" y="2916936"/>
+            <a:ext cx="4151376" cy="2980944"/>
+          </a:xfrm>
+          <a:prstGeom prst="roundRect">
+            <a:avLst/>
+          </a:prstGeom>
+          <a:solidFill>
+            <a:srgbClr val="F8F1E2"/>
+          </a:solidFill>
+          <a:ln w="10160">
+            <a:solidFill>
+              <a:srgbClr val="E3CEAA"/>
+            </a:solidFill>
+          </a:ln>
+        </p:spPr>
+        <p:style>
+          <a:lnRef idx="1">
+            <a:schemeClr val="accent1"/>
+          </a:lnRef>
+          <a:fillRef idx="3">
+            <a:schemeClr val="accent1"/>
+          </a:fillRef>
+          <a:effectRef idx="2">
+            <a:schemeClr val="accent1"/>
+          </a:effectRef>
+          <a:fontRef idx="minor">
+            <a:schemeClr val="lt1"/>
+          </a:fontRef>
+        </p:style>
+        <p:txBody>
+          <a:bodyPr rtlCol="0" anchor="ctr"/>
+          <a:lstStyle/>
+          <a:p>
+            <a:pPr algn="ctr"/>
+          </a:p>
+        </p:txBody>
+      </p:sp>
+      <p:sp>
+        <p:nvSpPr>
+          <p:cNvPr id="41" name="TextBox 40"/>
+          <p:cNvSpPr txBox="1"/>
+          <p:nvPr/>
+        </p:nvSpPr>
+        <p:spPr>
+          <a:xfrm>
+            <a:off x="7900416" y="3136392"/>
+            <a:ext cx="3602736" cy="310896"/>
+          </a:xfrm>
+          <a:prstGeom prst="rect">
+            <a:avLst/>
+          </a:prstGeom>
+          <a:noFill/>
+        </p:spPr>
+        <p:txBody>
+          <a:bodyPr wrap="square" lIns="18288" rIns="18288" tIns="18288" bIns="18288" anchor="t">
+            <a:spAutoFit/>
+          </a:bodyPr>
+          <a:lstStyle/>
+          <a:p>
+            <a:pPr algn="l">
+              <a:spcAft>
+                <a:spcPts val="0"/>
+              </a:spcAft>
+            </a:pPr>
+            <a:r>
+              <a:rPr sz="1700" b="1" i="0">
+                <a:solidFill>
+                  <a:srgbClr val="9A6B20"/>
+                </a:solidFill>
+                <a:latin typeface="Arial"/>
+              </a:rPr>
+              <a:t>How to read a result</a:t>
+            </a:r>
+          </a:p>
+        </p:txBody>
+      </p:sp>
+      <p:sp>
+        <p:nvSpPr>
+          <p:cNvPr id="42" name="Oval 41"/>
+          <p:cNvSpPr/>
+          <p:nvPr/>
+        </p:nvSpPr>
+        <p:spPr>
+          <a:xfrm>
+            <a:off x="7909560" y="3685032"/>
+            <a:ext cx="91440" cy="91440"/>
+          </a:xfrm>
+          <a:prstGeom prst="ellipse">
+            <a:avLst/>
+          </a:prstGeom>
+          <a:solidFill>
+            <a:srgbClr val="9A6B20"/>
+          </a:solidFill>
+          <a:ln>
+            <a:noFill/>
+          </a:ln>
+        </p:spPr>
+        <p:style>
+          <a:lnRef idx="1">
+            <a:schemeClr val="accent1"/>
+          </a:lnRef>
+          <a:fillRef idx="3">
+            <a:schemeClr val="accent1"/>
+          </a:fillRef>
+          <a:effectRef idx="2">
+            <a:schemeClr val="accent1"/>
+          </a:effectRef>
+          <a:fontRef idx="minor">
+            <a:schemeClr val="lt1"/>
+          </a:fontRef>
+        </p:style>
+        <p:txBody>
+          <a:bodyPr rtlCol="0" anchor="ctr"/>
+          <a:lstStyle/>
+          <a:p>
+            <a:pPr algn="ctr"/>
+          </a:p>
+        </p:txBody>
+      </p:sp>
+      <p:sp>
+        <p:nvSpPr>
+          <p:cNvPr id="43" name="TextBox 42"/>
+          <p:cNvSpPr txBox="1"/>
+          <p:nvPr/>
+        </p:nvSpPr>
+        <p:spPr>
+          <a:xfrm>
+            <a:off x="8074152" y="3575304"/>
+            <a:ext cx="3383279" cy="521207"/>
+          </a:xfrm>
+          <a:prstGeom prst="rect">
+            <a:avLst/>
+          </a:prstGeom>
+          <a:noFill/>
+        </p:spPr>
+        <p:txBody>
+          <a:bodyPr wrap="square" lIns="18288" rIns="18288" tIns="18288" bIns="18288" anchor="ctr">
+            <a:spAutoFit/>
+          </a:bodyPr>
+          <a:lstStyle/>
+          <a:p>
+            <a:pPr algn="l">
+              <a:spcAft>
+                <a:spcPts val="0"/>
+              </a:spcAft>
+            </a:pPr>
+            <a:r>
+              <a:rPr sz="1250" b="0" i="0">
+                <a:solidFill>
+                  <a:srgbClr val="263746"/>
+                </a:solidFill>
+                <a:latin typeface="Arial"/>
+              </a:rPr>
+              <a:t>Promoted: synthetic guidance changed stable ranking</a:t>
+            </a:r>
+          </a:p>
+        </p:txBody>
+      </p:sp>
+      <p:sp>
+        <p:nvSpPr>
+          <p:cNvPr id="44" name="Oval 43"/>
+          <p:cNvSpPr/>
+          <p:nvPr/>
+        </p:nvSpPr>
+        <p:spPr>
+          <a:xfrm>
+            <a:off x="7909560" y="4206240"/>
+            <a:ext cx="91440" cy="91440"/>
+          </a:xfrm>
+          <a:prstGeom prst="ellipse">
+            <a:avLst/>
+          </a:prstGeom>
+          <a:solidFill>
+            <a:srgbClr val="9A6B20"/>
+          </a:solidFill>
+          <a:ln>
+            <a:noFill/>
+          </a:ln>
+        </p:spPr>
+        <p:style>
+          <a:lnRef idx="1">
+            <a:schemeClr val="accent1"/>
+          </a:lnRef>
+          <a:fillRef idx="3">
+            <a:schemeClr val="accent1"/>
+          </a:fillRef>
+          <a:effectRef idx="2">
+            <a:schemeClr val="accent1"/>
+          </a:effectRef>
+          <a:fontRef idx="minor">
+            <a:schemeClr val="lt1"/>
+          </a:fontRef>
+        </p:style>
+        <p:txBody>
+          <a:bodyPr rtlCol="0" anchor="ctr"/>
+          <a:lstStyle/>
+          <a:p>
+            <a:pPr algn="ctr"/>
+          </a:p>
+        </p:txBody>
+      </p:sp>
+      <p:sp>
+        <p:nvSpPr>
+          <p:cNvPr id="45" name="TextBox 44"/>
+          <p:cNvSpPr txBox="1"/>
+          <p:nvPr/>
+        </p:nvSpPr>
+        <p:spPr>
+          <a:xfrm>
+            <a:off x="8074152" y="4096512"/>
+            <a:ext cx="3383279" cy="521207"/>
+          </a:xfrm>
+          <a:prstGeom prst="rect">
+            <a:avLst/>
+          </a:prstGeom>
+          <a:noFill/>
+        </p:spPr>
+        <p:txBody>
+          <a:bodyPr wrap="square" lIns="18288" rIns="18288" tIns="18288" bIns="18288" anchor="ctr">
+            <a:spAutoFit/>
+          </a:bodyPr>
+          <a:lstStyle/>
+          <a:p>
+            <a:pPr algn="l">
+              <a:spcAft>
+                <a:spcPts val="0"/>
+              </a:spcAft>
+            </a:pPr>
+            <a:r>
+              <a:rPr sz="1250" b="0" i="0">
+                <a:solidFill>
+                  <a:srgbClr val="263746"/>
+                </a:solidFill>
+                <a:latin typeface="Arial"/>
+              </a:rPr>
+              <a:t>BH FDR: the association is present in real OSDR data</a:t>
+            </a:r>
+          </a:p>
+        </p:txBody>
+      </p:sp>
+      <p:sp>
+        <p:nvSpPr>
+          <p:cNvPr id="46" name="Oval 45"/>
+          <p:cNvSpPr/>
+          <p:nvPr/>
+        </p:nvSpPr>
+        <p:spPr>
+          <a:xfrm>
+            <a:off x="7909560" y="4727448"/>
+            <a:ext cx="91440" cy="91440"/>
+          </a:xfrm>
+          <a:prstGeom prst="ellipse">
+            <a:avLst/>
+          </a:prstGeom>
+          <a:solidFill>
+            <a:srgbClr val="9A6B20"/>
+          </a:solidFill>
+          <a:ln>
+            <a:noFill/>
+          </a:ln>
+        </p:spPr>
+        <p:style>
+          <a:lnRef idx="1">
+            <a:schemeClr val="accent1"/>
+          </a:lnRef>
+          <a:fillRef idx="3">
+            <a:schemeClr val="accent1"/>
+          </a:fillRef>
+          <a:effectRef idx="2">
+            <a:schemeClr val="accent1"/>
+          </a:effectRef>
+          <a:fontRef idx="minor">
+            <a:schemeClr val="lt1"/>
+          </a:fontRef>
+        </p:style>
+        <p:txBody>
+          <a:bodyPr rtlCol="0" anchor="ctr"/>
+          <a:lstStyle/>
+          <a:p>
+            <a:pPr algn="ctr"/>
+          </a:p>
+        </p:txBody>
+      </p:sp>
+      <p:sp>
+        <p:nvSpPr>
+          <p:cNvPr id="47" name="TextBox 46"/>
+          <p:cNvSpPr txBox="1"/>
+          <p:nvPr/>
+        </p:nvSpPr>
+        <p:spPr>
+          <a:xfrm>
+            <a:off x="8074152" y="4617720"/>
+            <a:ext cx="3383279" cy="521207"/>
+          </a:xfrm>
+          <a:prstGeom prst="rect">
+            <a:avLst/>
+          </a:prstGeom>
+          <a:noFill/>
+        </p:spPr>
+        <p:txBody>
+          <a:bodyPr wrap="square" lIns="18288" rIns="18288" tIns="18288" bIns="18288" anchor="ctr">
+            <a:spAutoFit/>
+          </a:bodyPr>
+          <a:lstStyle/>
+          <a:p>
+            <a:pPr algn="l">
+              <a:spcAft>
+                <a:spcPts val="0"/>
+              </a:spcAft>
+            </a:pPr>
+            <a:r>
+              <a:rPr sz="1250" b="0" i="0">
+                <a:solidFill>
+                  <a:srgbClr val="263746"/>
+                </a:solidFill>
+                <a:latin typeface="Arial"/>
+              </a:rPr>
+              <a:t>Literature class: direct, related, mixed, or unmatched</a:t>
+            </a:r>
+          </a:p>
+        </p:txBody>
+      </p:sp>
+      <p:sp>
+        <p:nvSpPr>
+          <p:cNvPr id="48" name="Oval 47"/>
+          <p:cNvSpPr/>
+          <p:nvPr/>
+        </p:nvSpPr>
+        <p:spPr>
+          <a:xfrm>
+            <a:off x="7909560" y="5248656"/>
+            <a:ext cx="91440" cy="91440"/>
+          </a:xfrm>
+          <a:prstGeom prst="ellipse">
+            <a:avLst/>
+          </a:prstGeom>
+          <a:solidFill>
+            <a:srgbClr val="9A6B20"/>
+          </a:solidFill>
+          <a:ln>
+            <a:noFill/>
+          </a:ln>
+        </p:spPr>
+        <p:style>
+          <a:lnRef idx="1">
+            <a:schemeClr val="accent1"/>
+          </a:lnRef>
+          <a:fillRef idx="3">
+            <a:schemeClr val="accent1"/>
+          </a:fillRef>
+          <a:effectRef idx="2">
+            <a:schemeClr val="accent1"/>
+          </a:effectRef>
+          <a:fontRef idx="minor">
+            <a:schemeClr val="lt1"/>
+          </a:fontRef>
+        </p:style>
+        <p:txBody>
+          <a:bodyPr rtlCol="0" anchor="ctr"/>
+          <a:lstStyle/>
+          <a:p>
+            <a:pPr algn="ctr"/>
+          </a:p>
+        </p:txBody>
+      </p:sp>
+      <p:sp>
+        <p:nvSpPr>
+          <p:cNvPr id="49" name="TextBox 48"/>
+          <p:cNvSpPr txBox="1"/>
+          <p:nvPr/>
+        </p:nvSpPr>
+        <p:spPr>
+          <a:xfrm>
+            <a:off x="8074152" y="5138928"/>
+            <a:ext cx="3383279" cy="521207"/>
+          </a:xfrm>
+          <a:prstGeom prst="rect">
+            <a:avLst/>
+          </a:prstGeom>
+          <a:noFill/>
+        </p:spPr>
+        <p:txBody>
+          <a:bodyPr wrap="square" lIns="18288" rIns="18288" tIns="18288" bIns="18288" anchor="ctr">
+            <a:spAutoFit/>
+          </a:bodyPr>
+          <a:lstStyle/>
+          <a:p>
+            <a:pPr algn="l">
+              <a:spcAft>
+                <a:spcPts val="0"/>
+              </a:spcAft>
+            </a:pPr>
+            <a:r>
+              <a:rPr sz="1250" b="0" i="0">
+                <a:solidFill>
+                  <a:srgbClr val="263746"/>
+                </a:solidFill>
+                <a:latin typeface="Arial"/>
+              </a:rPr>
+              <a:t>Interpretation: a testable hypothesis, not independent proof</a:t>
+            </a:r>
+          </a:p>
+        </p:txBody>
+      </p:sp>
+      <p:sp>
+        <p:nvSpPr>
+          <p:cNvPr id="50" name="Rounded Rectangle 49"/>
+          <p:cNvSpPr/>
+          <p:nvPr/>
+        </p:nvSpPr>
+        <p:spPr>
+          <a:xfrm>
+            <a:off x="411480" y="6007608"/>
+            <a:ext cx="11356848" cy="393192"/>
+          </a:xfrm>
+          <a:prstGeom prst="roundRect">
+            <a:avLst/>
+          </a:prstGeom>
+          <a:solidFill>
+            <a:srgbClr val="082B55"/>
+          </a:solidFill>
+          <a:ln w="10160">
+            <a:solidFill>
+              <a:srgbClr val="082B55"/>
+            </a:solidFill>
+          </a:ln>
+        </p:spPr>
+        <p:style>
+          <a:lnRef idx="1">
+            <a:schemeClr val="accent1"/>
+          </a:lnRef>
+          <a:fillRef idx="3">
+            <a:schemeClr val="accent1"/>
+          </a:fillRef>
+          <a:effectRef idx="2">
+            <a:schemeClr val="accent1"/>
+          </a:effectRef>
+          <a:fontRef idx="minor">
+            <a:schemeClr val="lt1"/>
+          </a:fontRef>
+        </p:style>
+        <p:txBody>
+          <a:bodyPr rtlCol="0" anchor="ctr"/>
+          <a:lstStyle/>
+          <a:p>
+            <a:pPr algn="ctr"/>
+          </a:p>
+        </p:txBody>
+      </p:sp>
+      <p:sp>
+        <p:nvSpPr>
+          <p:cNvPr id="51" name="TextBox 50"/>
+          <p:cNvSpPr txBox="1"/>
+          <p:nvPr/>
+        </p:nvSpPr>
+        <p:spPr>
+          <a:xfrm>
+            <a:off x="649224" y="6071616"/>
+            <a:ext cx="10881360" cy="228600"/>
+          </a:xfrm>
+          <a:prstGeom prst="rect">
+            <a:avLst/>
+          </a:prstGeom>
+          <a:noFill/>
+        </p:spPr>
+        <p:txBody>
+          <a:bodyPr wrap="square" lIns="18288" rIns="18288" tIns="18288" bIns="18288" anchor="t">
+            <a:spAutoFit/>
+          </a:bodyPr>
+          <a:lstStyle/>
+          <a:p>
+            <a:pPr algn="ctr">
+              <a:spcAft>
+                <a:spcPts val="0"/>
+              </a:spcAft>
+            </a:pPr>
+            <a:r>
+              <a:rPr sz="1400" b="1" i="0">
+                <a:solidFill>
+                  <a:srgbClr val="FFFFFF"/>
+                </a:solidFill>
+                <a:latin typeface="Arial"/>
+              </a:rPr>
+              <a:t>11 align and 13 extend prior biology; only 3 are exact gene-tissue-direction matches.</a:t>
+            </a:r>
+          </a:p>
+        </p:txBody>
+      </p:sp>
+      <p:sp>
+        <p:nvSpPr>
+          <p:cNvPr id="52" name="TextBox 51"/>
+          <p:cNvSpPr txBox="1"/>
+          <p:nvPr/>
+        </p:nvSpPr>
+        <p:spPr>
+          <a:xfrm>
+            <a:off x="329184" y="6510528"/>
+            <a:ext cx="10972800" cy="173736"/>
+          </a:xfrm>
+          <a:prstGeom prst="rect">
+            <a:avLst/>
+          </a:prstGeom>
+          <a:noFill/>
+        </p:spPr>
+        <p:txBody>
+          <a:bodyPr wrap="square" lIns="18288" rIns="18288" tIns="18288" bIns="18288" anchor="ctr">
+            <a:spAutoFit/>
+          </a:bodyPr>
+          <a:lstStyle/>
+          <a:p>
+            <a:pPr algn="l">
+              <a:spcAft>
+                <a:spcPts val="0"/>
+              </a:spcAft>
+            </a:pPr>
+            <a:r>
+              <a:rPr sz="720" b="0" i="0">
+                <a:solidFill>
+                  <a:srgbClr val="8A969E"/>
+                </a:solidFill>
+                <a:latin typeface="Arial"/>
+              </a:rPr>
+              <a:t>Targeted review completed 2026-08-03; full decisions and 19-source inventory are in Supplementary Tables S16-S17.</a:t>
             </a:r>
           </a:p>
         </p:txBody>

--- a/presentation/SLSTP_2026_Generative_Transcriptomics.pptx
+++ b/presentation/SLSTP_2026_Generative_Transcriptomics.pptx
@@ -36214,8 +36214,8 @@
         </p:nvSpPr>
         <p:spPr>
           <a:xfrm>
-            <a:off x="502920" y="1847088"/>
-            <a:ext cx="3657600" cy="310896"/>
+            <a:off x="566928" y="1847088"/>
+            <a:ext cx="4443984" cy="310896"/>
           </a:xfrm>
           <a:prstGeom prst="rect">
             <a:avLst/>
@@ -36339,8 +36339,8 @@
         </p:nvSpPr>
         <p:spPr>
           <a:xfrm>
-            <a:off x="749808" y="2770632"/>
-            <a:ext cx="1234440" cy="658368"/>
+            <a:off x="649224" y="2816352"/>
+            <a:ext cx="1609344" cy="265176"/>
           </a:xfrm>
           <a:prstGeom prst="rect">
             <a:avLst/>
@@ -36348,7 +36348,7 @@
           <a:noFill/>
         </p:spPr>
         <p:txBody>
-          <a:bodyPr wrap="square" lIns="18288" rIns="18288" tIns="18288" bIns="18288" anchor="t">
+          <a:bodyPr wrap="square" lIns="0" rIns="0" tIns="0" bIns="0" anchor="t">
             <a:spAutoFit/>
           </a:bodyPr>
           <a:lstStyle/>
@@ -36359,14 +36359,13 @@
               </a:spcAft>
             </a:pPr>
             <a:r>
-              <a:rPr sz="1700" b="1" i="0">
+              <a:rPr sz="1600" b="1" i="0">
                 <a:solidFill>
                   <a:srgbClr val="2D6496"/>
                 </a:solidFill>
                 <a:latin typeface="Arial"/>
               </a:rPr>
-              <a:t>Real-only
-ranking</a:t>
+              <a:t>Real-only</a:t>
             </a:r>
           </a:p>
         </p:txBody>
@@ -36379,8 +36378,8 @@
         </p:nvSpPr>
         <p:spPr>
           <a:xfrm>
-            <a:off x="3566160" y="2770632"/>
-            <a:ext cx="1234440" cy="658368"/>
+            <a:off x="649224" y="3108960"/>
+            <a:ext cx="1609344" cy="265176"/>
           </a:xfrm>
           <a:prstGeom prst="rect">
             <a:avLst/>
@@ -36388,7 +36387,7 @@
           <a:noFill/>
         </p:spPr>
         <p:txBody>
-          <a:bodyPr wrap="square" lIns="18288" rIns="18288" tIns="18288" bIns="18288" anchor="t">
+          <a:bodyPr wrap="square" lIns="0" rIns="0" tIns="0" bIns="0" anchor="t">
             <a:spAutoFit/>
           </a:bodyPr>
           <a:lstStyle/>
@@ -36401,12 +36400,11 @@
             <a:r>
               <a:rPr sz="1600" b="1" i="0">
                 <a:solidFill>
-                  <a:srgbClr val="178681"/>
+                  <a:srgbClr val="2D6496"/>
                 </a:solidFill>
                 <a:latin typeface="Arial"/>
               </a:rPr>
-              <a:t>Synthetic-informed
-ranking</a:t>
+              <a:t>ranking</a:t>
             </a:r>
           </a:p>
         </p:txBody>
@@ -36419,8 +36417,8 @@
         </p:nvSpPr>
         <p:spPr>
           <a:xfrm>
-            <a:off x="2304288" y="3044952"/>
-            <a:ext cx="969264" cy="585216"/>
+            <a:off x="3300984" y="2816352"/>
+            <a:ext cx="1719072" cy="265176"/>
           </a:xfrm>
           <a:prstGeom prst="rect">
             <a:avLst/>
@@ -36428,7 +36426,7 @@
           <a:noFill/>
         </p:spPr>
         <p:txBody>
-          <a:bodyPr wrap="square" lIns="18288" rIns="18288" tIns="18288" bIns="18288" anchor="t">
+          <a:bodyPr wrap="square" lIns="0" rIns="0" tIns="0" bIns="0" anchor="t">
             <a:spAutoFit/>
           </a:bodyPr>
           <a:lstStyle/>
@@ -36439,21 +36437,137 @@
               </a:spcAft>
             </a:pPr>
             <a:r>
-              <a:rPr sz="1200" b="1" i="0">
-                <a:solidFill>
-                  <a:srgbClr val="D37B00"/>
+              <a:rPr sz="1350" b="1" i="0">
+                <a:solidFill>
+                  <a:srgbClr val="178681"/>
                 </a:solidFill>
                 <a:latin typeface="Arial"/>
               </a:rPr>
-              <a:t>23
-reinforced</a:t>
-            </a:r>
-          </a:p>
-        </p:txBody>
-      </p:sp>
-      <p:sp>
-        <p:nvSpPr>
-          <p:cNvPr id="13" name="Rounded Rectangle 12"/>
+              <a:t>Synthetic-guided</a:t>
+            </a:r>
+          </a:p>
+        </p:txBody>
+      </p:sp>
+      <p:sp>
+        <p:nvSpPr>
+          <p:cNvPr id="13" name="TextBox 12"/>
+          <p:cNvSpPr txBox="1"/>
+          <p:nvPr/>
+        </p:nvSpPr>
+        <p:spPr>
+          <a:xfrm>
+            <a:off x="3300984" y="3108960"/>
+            <a:ext cx="1719072" cy="265176"/>
+          </a:xfrm>
+          <a:prstGeom prst="rect">
+            <a:avLst/>
+          </a:prstGeom>
+          <a:noFill/>
+        </p:spPr>
+        <p:txBody>
+          <a:bodyPr wrap="square" lIns="0" rIns="0" tIns="0" bIns="0" anchor="t">
+            <a:spAutoFit/>
+          </a:bodyPr>
+          <a:lstStyle/>
+          <a:p>
+            <a:pPr algn="ctr">
+              <a:spcAft>
+                <a:spcPts val="0"/>
+              </a:spcAft>
+            </a:pPr>
+            <a:r>
+              <a:rPr sz="1600" b="1" i="0">
+                <a:solidFill>
+                  <a:srgbClr val="178681"/>
+                </a:solidFill>
+                <a:latin typeface="Arial"/>
+              </a:rPr>
+              <a:t>ranking</a:t>
+            </a:r>
+          </a:p>
+        </p:txBody>
+      </p:sp>
+      <p:sp>
+        <p:nvSpPr>
+          <p:cNvPr id="14" name="TextBox 13"/>
+          <p:cNvSpPr txBox="1"/>
+          <p:nvPr/>
+        </p:nvSpPr>
+        <p:spPr>
+          <a:xfrm>
+            <a:off x="2304288" y="2999232"/>
+            <a:ext cx="969264" cy="219456"/>
+          </a:xfrm>
+          <a:prstGeom prst="rect">
+            <a:avLst/>
+          </a:prstGeom>
+          <a:noFill/>
+        </p:spPr>
+        <p:txBody>
+          <a:bodyPr wrap="square" lIns="0" rIns="0" tIns="0" bIns="0" anchor="t">
+            <a:spAutoFit/>
+          </a:bodyPr>
+          <a:lstStyle/>
+          <a:p>
+            <a:pPr algn="ctr">
+              <a:spcAft>
+                <a:spcPts val="0"/>
+              </a:spcAft>
+            </a:pPr>
+            <a:r>
+              <a:rPr sz="1200" b="1" i="0">
+                <a:solidFill>
+                  <a:srgbClr val="D37B00"/>
+                </a:solidFill>
+                <a:latin typeface="Arial"/>
+              </a:rPr>
+              <a:t>23</a:t>
+            </a:r>
+          </a:p>
+        </p:txBody>
+      </p:sp>
+      <p:sp>
+        <p:nvSpPr>
+          <p:cNvPr id="15" name="TextBox 14"/>
+          <p:cNvSpPr txBox="1"/>
+          <p:nvPr/>
+        </p:nvSpPr>
+        <p:spPr>
+          <a:xfrm>
+            <a:off x="2304288" y="3236976"/>
+            <a:ext cx="969264" cy="219456"/>
+          </a:xfrm>
+          <a:prstGeom prst="rect">
+            <a:avLst/>
+          </a:prstGeom>
+          <a:noFill/>
+        </p:spPr>
+        <p:txBody>
+          <a:bodyPr wrap="square" lIns="0" rIns="0" tIns="0" bIns="0" anchor="t">
+            <a:spAutoFit/>
+          </a:bodyPr>
+          <a:lstStyle/>
+          <a:p>
+            <a:pPr algn="ctr">
+              <a:spcAft>
+                <a:spcPts val="0"/>
+              </a:spcAft>
+            </a:pPr>
+            <a:r>
+              <a:rPr sz="1200" b="1" i="0">
+                <a:solidFill>
+                  <a:srgbClr val="D37B00"/>
+                </a:solidFill>
+                <a:latin typeface="Arial"/>
+              </a:rPr>
+              <a:t>reinforced</a:t>
+            </a:r>
+          </a:p>
+        </p:txBody>
+      </p:sp>
+      <p:sp>
+        <p:nvSpPr>
+          <p:cNvPr id="16" name="Rounded Rectangle 15"/>
           <p:cNvSpPr/>
           <p:nvPr/>
         </p:nvSpPr>
@@ -36498,7 +36612,7 @@
       </p:sp>
       <p:sp>
         <p:nvSpPr>
-          <p:cNvPr id="14" name="TextBox 13"/>
+          <p:cNvPr id="17" name="TextBox 16"/>
           <p:cNvSpPr txBox="1"/>
           <p:nvPr/>
         </p:nvSpPr>
@@ -36537,7 +36651,7 @@
       </p:sp>
       <p:sp>
         <p:nvSpPr>
-          <p:cNvPr id="15" name="TextBox 14"/>
+          <p:cNvPr id="18" name="TextBox 17"/>
           <p:cNvSpPr txBox="1"/>
           <p:nvPr/>
         </p:nvSpPr>
@@ -36577,7 +36691,7 @@
       </p:sp>
       <p:sp>
         <p:nvSpPr>
-          <p:cNvPr id="16" name="Right Arrow 15"/>
+          <p:cNvPr id="19" name="Right Arrow 18"/>
           <p:cNvSpPr/>
           <p:nvPr/>
         </p:nvSpPr>
@@ -36620,7 +36734,7 @@
       </p:sp>
       <p:sp>
         <p:nvSpPr>
-          <p:cNvPr id="17" name="Rounded Rectangle 16"/>
+          <p:cNvPr id="20" name="Rounded Rectangle 19"/>
           <p:cNvSpPr/>
           <p:nvPr/>
         </p:nvSpPr>
@@ -36665,7 +36779,7 @@
       </p:sp>
       <p:sp>
         <p:nvSpPr>
-          <p:cNvPr id="18" name="TextBox 17"/>
+          <p:cNvPr id="21" name="TextBox 20"/>
           <p:cNvSpPr txBox="1"/>
           <p:nvPr/>
         </p:nvSpPr>
@@ -36704,7 +36818,7 @@
       </p:sp>
       <p:sp>
         <p:nvSpPr>
-          <p:cNvPr id="19" name="Oval 18"/>
+          <p:cNvPr id="22" name="Oval 21"/>
           <p:cNvSpPr/>
           <p:nvPr/>
         </p:nvSpPr>
@@ -36747,7 +36861,7 @@
       </p:sp>
       <p:sp>
         <p:nvSpPr>
-          <p:cNvPr id="20" name="TextBox 19"/>
+          <p:cNvPr id="23" name="TextBox 22"/>
           <p:cNvSpPr txBox="1"/>
           <p:nvPr/>
         </p:nvSpPr>
@@ -36786,7 +36900,7 @@
       </p:sp>
       <p:sp>
         <p:nvSpPr>
-          <p:cNvPr id="21" name="Oval 20"/>
+          <p:cNvPr id="24" name="Oval 23"/>
           <p:cNvSpPr/>
           <p:nvPr/>
         </p:nvSpPr>
@@ -36829,7 +36943,7 @@
       </p:sp>
       <p:sp>
         <p:nvSpPr>
-          <p:cNvPr id="22" name="TextBox 21"/>
+          <p:cNvPr id="25" name="TextBox 24"/>
           <p:cNvSpPr txBox="1"/>
           <p:nvPr/>
         </p:nvSpPr>
@@ -36868,7 +36982,7 @@
       </p:sp>
       <p:sp>
         <p:nvSpPr>
-          <p:cNvPr id="23" name="Oval 22"/>
+          <p:cNvPr id="26" name="Oval 25"/>
           <p:cNvSpPr/>
           <p:nvPr/>
         </p:nvSpPr>
@@ -36911,7 +37025,7 @@
       </p:sp>
       <p:sp>
         <p:nvSpPr>
-          <p:cNvPr id="24" name="TextBox 23"/>
+          <p:cNvPr id="27" name="TextBox 26"/>
           <p:cNvSpPr txBox="1"/>
           <p:nvPr/>
         </p:nvSpPr>
@@ -36950,7 +37064,7 @@
       </p:sp>
       <p:sp>
         <p:nvSpPr>
-          <p:cNvPr id="25" name="Rounded Rectangle 24"/>
+          <p:cNvPr id="28" name="Rounded Rectangle 27"/>
           <p:cNvSpPr/>
           <p:nvPr/>
         </p:nvSpPr>
@@ -36995,7 +37109,7 @@
       </p:sp>
       <p:sp>
         <p:nvSpPr>
-          <p:cNvPr id="26" name="TextBox 25"/>
+          <p:cNvPr id="29" name="TextBox 28"/>
           <p:cNvSpPr txBox="1"/>
           <p:nvPr/>
         </p:nvSpPr>
@@ -37034,7 +37148,7 @@
       </p:sp>
       <p:sp>
         <p:nvSpPr>
-          <p:cNvPr id="27" name="Rounded Rectangle 26"/>
+          <p:cNvPr id="30" name="Rounded Rectangle 29"/>
           <p:cNvSpPr/>
           <p:nvPr/>
         </p:nvSpPr>
@@ -37079,7 +37193,7 @@
       </p:sp>
       <p:sp>
         <p:nvSpPr>
-          <p:cNvPr id="28" name="TextBox 27"/>
+          <p:cNvPr id="31" name="TextBox 30"/>
           <p:cNvSpPr txBox="1"/>
           <p:nvPr/>
         </p:nvSpPr>

--- a/presentation/SLSTP_2026_Generative_Transcriptomics.pptx
+++ b/presentation/SLSTP_2026_Generative_Transcriptomics.pptx
@@ -1410,13 +1410,13 @@
           <a:lstStyle/>
           <a:p>
             <a:r>
-              <a:t>Target time: 0:55</a:t>
+              <a:t>Target time: 1:00</a:t>
             </a:r>
           </a:p>
           <a:p/>
           <a:p>
             <a:r>
-              <a:t>Read the panels from left to right. The same generated profiles begin as noise, develop structure by timestep 200 and approach tissue-conditioned regions at timestep zero. The axes are shared, so the visual change is not caused by rescaling each panel.</a:t>
+              <a:t>Both WGAN-GP and DDIM had high correlation and F1. DDIM had adversarial accuracy near 0.5 and a lower Frechet-distance ratio, so it was harder to separate from real profiles and closer in distribution. The metrics use each model's stated evaluation split, so this is a model-choice summary rather than a paired significance test. These results are why the remaining analyses use DDIM.</a:t>
             </a:r>
           </a:p>
         </p:txBody>
@@ -1492,7 +1492,7 @@
           <a:p/>
           <a:p>
             <a:r>
-              <a:t>This is PCA, not UMAP. Circles are locked real OSDR profiles and crosses are matched DDIM profiles in the same PCA space. On the left, generated samples track the tissue-defined branches. On the right, FLT and GC remain interspersed because condition effects are smaller than tissue effects. Visual overlap is useful but descriptive; the next slide provides the quantitative validation.</a:t>
+              <a:t>Having selected DDIM, read the panels from left to right. The same generated profiles begin as noise, develop structure by timestep 200 and approach tissue-conditioned regions at timestep zero. The axes are shared, so the visual change is not caused by rescaling each panel.</a:t>
             </a:r>
           </a:p>
         </p:txBody>
@@ -1562,13 +1562,13 @@
           <a:lstStyle/>
           <a:p>
             <a:r>
-              <a:t>Target time: 1:00</a:t>
+              <a:t>Target time: 0:55</a:t>
             </a:r>
           </a:p>
           <a:p/>
           <a:p>
             <a:r>
-              <a:t>Both WGAN-GP and DDIM had high correlation and F1. DDIM had adversarial accuracy near 0.5 and a lower Frechet-distance ratio, so it was harder to separate from real profiles and closer in distribution. The metrics use each model's stated evaluation split, so this is a model-choice summary rather than a paired significance test.</a:t>
+              <a:t>This is PCA, not UMAP. Circles are locked real OSDR profiles and crosses are matched DDIM profiles in the same PCA space. On the left, generated samples track the tissue-defined branches. On the right, FLT and GC remain interspersed because condition effects are smaller than tissue effects. Visual overlap is descriptive and complements the quantitative validation shown earlier.</a:t>
             </a:r>
           </a:p>
         </p:txBody>
@@ -31478,7 +31478,7 @@
                 </a:solidFill>
                 <a:latin typeface="Arial"/>
               </a:rPr>
-              <a:t>DIFFUSION</a:t>
+              <a:t>VALIDATION</a:t>
             </a:r>
           </a:p>
         </p:txBody>
@@ -31517,7 +31517,7 @@
                 </a:solidFill>
                 <a:latin typeface="Arial"/>
               </a:rPr>
-              <a:t>Diffusion learns tissue structure from noise</a:t>
+              <a:t>DDIM matched expression and reduced separability</a:t>
             </a:r>
           </a:p>
         </p:txBody>
@@ -31556,35 +31556,56 @@
                 </a:solidFill>
                 <a:latin typeface="Arial"/>
               </a:rPr>
-              <a:t>The same PCA axes follow 1,024 generated profiles through reverse diffusion.</a:t>
-            </a:r>
-          </a:p>
-        </p:txBody>
-      </p:sp>
-      <p:pic>
-        <p:nvPicPr>
-          <p:cNvPr id="7" name="DDIM reverse trajectory at timesteps 1000, 200 and 0" descr="DDIM reverse trajectory at timesteps 1000, 200 and 0"/>
-          <p:cNvPicPr>
-            <a:picLocks noChangeAspect="1"/>
-          </p:cNvPicPr>
+              <a:t>AA closer to 0.5 means a classifier has less success separating real and generated profiles; lower FD is better.</a:t>
+            </a:r>
+          </a:p>
+        </p:txBody>
+      </p:sp>
+      <p:sp>
+        <p:nvSpPr>
+          <p:cNvPr id="7" name="Rounded Rectangle 6"/>
+          <p:cNvSpPr/>
           <p:nvPr/>
-        </p:nvPicPr>
-        <p:blipFill>
-          <a:blip r:embed="rId2"/>
-          <a:stretch>
-            <a:fillRect/>
-          </a:stretch>
-        </p:blipFill>
-        <p:spPr>
-          <a:xfrm>
-            <a:off x="310896" y="1735579"/>
-            <a:ext cx="11558016" cy="4100072"/>
-          </a:xfrm>
-          <a:prstGeom prst="rect">
-            <a:avLst/>
-          </a:prstGeom>
-        </p:spPr>
-      </p:pic>
+        </p:nvSpPr>
+        <p:spPr>
+          <a:xfrm>
+            <a:off x="347472" y="1847088"/>
+            <a:ext cx="3703320" cy="3401568"/>
+          </a:xfrm>
+          <a:prstGeom prst="roundRect">
+            <a:avLst/>
+          </a:prstGeom>
+          <a:solidFill>
+            <a:srgbClr val="E9F1F7"/>
+          </a:solidFill>
+          <a:ln w="10160">
+            <a:solidFill>
+              <a:srgbClr val="C9DCE9"/>
+            </a:solidFill>
+          </a:ln>
+        </p:spPr>
+        <p:style>
+          <a:lnRef idx="1">
+            <a:schemeClr val="accent1"/>
+          </a:lnRef>
+          <a:fillRef idx="3">
+            <a:schemeClr val="accent1"/>
+          </a:fillRef>
+          <a:effectRef idx="2">
+            <a:schemeClr val="accent1"/>
+          </a:effectRef>
+          <a:fontRef idx="minor">
+            <a:schemeClr val="lt1"/>
+          </a:fontRef>
+        </p:style>
+        <p:txBody>
+          <a:bodyPr rtlCol="0" anchor="ctr"/>
+          <a:lstStyle/>
+          <a:p>
+            <a:pPr algn="ctr"/>
+          </a:p>
+        </p:txBody>
+      </p:sp>
       <p:sp>
         <p:nvSpPr>
           <p:cNvPr id="8" name="TextBox 7"/>
@@ -31593,8 +31614,129 @@
         </p:nvSpPr>
         <p:spPr>
           <a:xfrm>
-            <a:off x="713232" y="5943600"/>
-            <a:ext cx="2286000" cy="256032"/>
+            <a:off x="612648" y="2103120"/>
+            <a:ext cx="3154680" cy="320040"/>
+          </a:xfrm>
+          <a:prstGeom prst="rect">
+            <a:avLst/>
+          </a:prstGeom>
+          <a:noFill/>
+        </p:spPr>
+        <p:txBody>
+          <a:bodyPr wrap="square" lIns="18288" rIns="18288" tIns="18288" bIns="18288" anchor="t">
+            <a:spAutoFit/>
+          </a:bodyPr>
+          <a:lstStyle/>
+          <a:p>
+            <a:pPr algn="l">
+              <a:spcAft>
+                <a:spcPts val="0"/>
+              </a:spcAft>
+            </a:pPr>
+            <a:r>
+              <a:rPr sz="1700" b="1" i="0">
+                <a:solidFill>
+                  <a:srgbClr val="2D6496"/>
+                </a:solidFill>
+                <a:latin typeface="Arial"/>
+              </a:rPr>
+              <a:t>ARCHS4 tissue probe</a:t>
+            </a:r>
+          </a:p>
+        </p:txBody>
+      </p:sp>
+      <p:sp>
+        <p:nvSpPr>
+          <p:cNvPr id="9" name="TextBox 8"/>
+          <p:cNvSpPr txBox="1"/>
+          <p:nvPr/>
+        </p:nvSpPr>
+        <p:spPr>
+          <a:xfrm>
+            <a:off x="621792" y="2487168"/>
+            <a:ext cx="3063240" cy="274320"/>
+          </a:xfrm>
+          <a:prstGeom prst="rect">
+            <a:avLst/>
+          </a:prstGeom>
+          <a:noFill/>
+        </p:spPr>
+        <p:txBody>
+          <a:bodyPr wrap="square" lIns="18288" rIns="18288" tIns="18288" bIns="18288" anchor="t">
+            <a:spAutoFit/>
+          </a:bodyPr>
+          <a:lstStyle/>
+          <a:p>
+            <a:pPr algn="l">
+              <a:spcAft>
+                <a:spcPts val="0"/>
+              </a:spcAft>
+            </a:pPr>
+            <a:r>
+              <a:rPr sz="1250" b="0" i="0">
+                <a:solidFill>
+                  <a:srgbClr val="59697A"/>
+                </a:solidFill>
+                <a:latin typeface="Arial"/>
+              </a:rPr>
+              <a:t>Balanced accuracy on held-out real profiles</a:t>
+            </a:r>
+          </a:p>
+        </p:txBody>
+      </p:sp>
+      <p:sp>
+        <p:nvSpPr>
+          <p:cNvPr id="10" name="Rectangle 9"/>
+          <p:cNvSpPr/>
+          <p:nvPr/>
+        </p:nvSpPr>
+        <p:spPr>
+          <a:xfrm>
+            <a:off x="950976" y="3436845"/>
+            <a:ext cx="786384" cy="1299746"/>
+          </a:xfrm>
+          <a:prstGeom prst="rect">
+            <a:avLst/>
+          </a:prstGeom>
+          <a:solidFill>
+            <a:srgbClr val="8A969E"/>
+          </a:solidFill>
+          <a:ln>
+            <a:noFill/>
+          </a:ln>
+        </p:spPr>
+        <p:style>
+          <a:lnRef idx="1">
+            <a:schemeClr val="accent1"/>
+          </a:lnRef>
+          <a:fillRef idx="3">
+            <a:schemeClr val="accent1"/>
+          </a:fillRef>
+          <a:effectRef idx="2">
+            <a:schemeClr val="accent1"/>
+          </a:effectRef>
+          <a:fontRef idx="minor">
+            <a:schemeClr val="lt1"/>
+          </a:fontRef>
+        </p:style>
+        <p:txBody>
+          <a:bodyPr rtlCol="0" anchor="ctr"/>
+          <a:lstStyle/>
+          <a:p>
+            <a:pPr algn="ctr"/>
+          </a:p>
+        </p:txBody>
+      </p:sp>
+      <p:sp>
+        <p:nvSpPr>
+          <p:cNvPr id="11" name="TextBox 10"/>
+          <p:cNvSpPr txBox="1"/>
+          <p:nvPr/>
+        </p:nvSpPr>
+        <p:spPr>
+          <a:xfrm>
+            <a:off x="923544" y="3107661"/>
+            <a:ext cx="868680" cy="274320"/>
           </a:xfrm>
           <a:prstGeom prst="rect">
             <a:avLst/>
@@ -31613,27 +31755,27 @@
               </a:spcAft>
             </a:pPr>
             <a:r>
-              <a:rPr sz="1300" b="1" i="0">
-                <a:solidFill>
-                  <a:srgbClr val="59697A"/>
+              <a:rPr sz="1600" b="1" i="0">
+                <a:solidFill>
+                  <a:srgbClr val="082B55"/>
                 </a:solidFill>
                 <a:latin typeface="Arial"/>
               </a:rPr>
-              <a:t>t = 1000: noise</a:t>
-            </a:r>
-          </a:p>
-        </p:txBody>
-      </p:sp>
-      <p:sp>
-        <p:nvSpPr>
-          <p:cNvPr id="9" name="TextBox 8"/>
+              <a:t>0.781</a:t>
+            </a:r>
+          </a:p>
+        </p:txBody>
+      </p:sp>
+      <p:sp>
+        <p:nvSpPr>
+          <p:cNvPr id="12" name="TextBox 11"/>
           <p:cNvSpPr txBox="1"/>
           <p:nvPr/>
         </p:nvSpPr>
         <p:spPr>
           <a:xfrm>
-            <a:off x="4782312" y="5943600"/>
-            <a:ext cx="2651760" cy="256032"/>
+            <a:off x="676656" y="4809744"/>
+            <a:ext cx="1325880" cy="365760"/>
           </a:xfrm>
           <a:prstGeom prst="rect">
             <a:avLst/>
@@ -31652,27 +31794,70 @@
               </a:spcAft>
             </a:pPr>
             <a:r>
-              <a:rPr sz="1300" b="1" i="0">
-                <a:solidFill>
-                  <a:srgbClr val="59697A"/>
+              <a:rPr sz="1250" b="0" i="0">
+                <a:solidFill>
+                  <a:srgbClr val="263746"/>
                 </a:solidFill>
                 <a:latin typeface="Arial"/>
               </a:rPr>
-              <a:t>t = 200: partial structure</a:t>
-            </a:r>
-          </a:p>
-        </p:txBody>
-      </p:sp>
-      <p:sp>
-        <p:nvSpPr>
-          <p:cNvPr id="10" name="TextBox 9"/>
+              <a:t>Real-trained</a:t>
+            </a:r>
+          </a:p>
+        </p:txBody>
+      </p:sp>
+      <p:sp>
+        <p:nvSpPr>
+          <p:cNvPr id="13" name="Rectangle 12"/>
+          <p:cNvSpPr/>
+          <p:nvPr/>
+        </p:nvSpPr>
+        <p:spPr>
+          <a:xfrm>
+            <a:off x="2523744" y="3436845"/>
+            <a:ext cx="786384" cy="1299746"/>
+          </a:xfrm>
+          <a:prstGeom prst="rect">
+            <a:avLst/>
+          </a:prstGeom>
+          <a:solidFill>
+            <a:srgbClr val="178681"/>
+          </a:solidFill>
+          <a:ln>
+            <a:noFill/>
+          </a:ln>
+        </p:spPr>
+        <p:style>
+          <a:lnRef idx="1">
+            <a:schemeClr val="accent1"/>
+          </a:lnRef>
+          <a:fillRef idx="3">
+            <a:schemeClr val="accent1"/>
+          </a:fillRef>
+          <a:effectRef idx="2">
+            <a:schemeClr val="accent1"/>
+          </a:effectRef>
+          <a:fontRef idx="minor">
+            <a:schemeClr val="lt1"/>
+          </a:fontRef>
+        </p:style>
+        <p:txBody>
+          <a:bodyPr rtlCol="0" anchor="ctr"/>
+          <a:lstStyle/>
+          <a:p>
+            <a:pPr algn="ctr"/>
+          </a:p>
+        </p:txBody>
+      </p:sp>
+      <p:sp>
+        <p:nvSpPr>
+          <p:cNvPr id="14" name="TextBox 13"/>
           <p:cNvSpPr txBox="1"/>
           <p:nvPr/>
         </p:nvSpPr>
         <p:spPr>
           <a:xfrm>
-            <a:off x="8366760" y="5943600"/>
-            <a:ext cx="3108960" cy="256032"/>
+            <a:off x="2496312" y="3107661"/>
+            <a:ext cx="868680" cy="274320"/>
           </a:xfrm>
           <a:prstGeom prst="rect">
             <a:avLst/>
@@ -31691,27 +31876,27 @@
               </a:spcAft>
             </a:pPr>
             <a:r>
-              <a:rPr sz="1300" b="1" i="0">
-                <a:solidFill>
-                  <a:srgbClr val="178681"/>
+              <a:rPr sz="1600" b="1" i="0">
+                <a:solidFill>
+                  <a:srgbClr val="082B55"/>
                 </a:solidFill>
                 <a:latin typeface="Arial"/>
               </a:rPr>
-              <a:t>t = 0: tissue-conditioned profiles</a:t>
-            </a:r>
-          </a:p>
-        </p:txBody>
-      </p:sp>
-      <p:sp>
-        <p:nvSpPr>
-          <p:cNvPr id="11" name="TextBox 10"/>
+              <a:t>0.781</a:t>
+            </a:r>
+          </a:p>
+        </p:txBody>
+      </p:sp>
+      <p:sp>
+        <p:nvSpPr>
+          <p:cNvPr id="15" name="TextBox 14"/>
           <p:cNvSpPr txBox="1"/>
           <p:nvPr/>
         </p:nvSpPr>
         <p:spPr>
           <a:xfrm>
-            <a:off x="329184" y="6510528"/>
-            <a:ext cx="10972800" cy="173736"/>
+            <a:off x="2249424" y="4809744"/>
+            <a:ext cx="1325880" cy="365760"/>
           </a:xfrm>
           <a:prstGeom prst="rect">
             <a:avLst/>
@@ -31719,7 +31904,134 @@
           <a:noFill/>
         </p:spPr>
         <p:txBody>
-          <a:bodyPr wrap="square" lIns="18288" rIns="18288" tIns="18288" bIns="18288" anchor="ctr">
+          <a:bodyPr wrap="square" lIns="18288" rIns="18288" tIns="18288" bIns="18288" anchor="t">
+            <a:spAutoFit/>
+          </a:bodyPr>
+          <a:lstStyle/>
+          <a:p>
+            <a:pPr algn="ctr">
+              <a:spcAft>
+                <a:spcPts val="0"/>
+              </a:spcAft>
+            </a:pPr>
+            <a:r>
+              <a:rPr sz="1250" b="0" i="0">
+                <a:solidFill>
+                  <a:srgbClr val="263746"/>
+                </a:solidFill>
+                <a:latin typeface="Arial"/>
+              </a:rPr>
+              <a:t>Synthetic-trained</a:t>
+            </a:r>
+          </a:p>
+        </p:txBody>
+      </p:sp>
+      <p:sp>
+        <p:nvSpPr>
+          <p:cNvPr id="16" name="Rectangle 15"/>
+          <p:cNvSpPr/>
+          <p:nvPr/>
+        </p:nvSpPr>
+        <p:spPr>
+          <a:xfrm>
+            <a:off x="749808" y="4736592"/>
+            <a:ext cx="2880360" cy="13716"/>
+          </a:xfrm>
+          <a:prstGeom prst="rect">
+            <a:avLst/>
+          </a:prstGeom>
+          <a:solidFill>
+            <a:srgbClr val="A9B5BC"/>
+          </a:solidFill>
+          <a:ln>
+            <a:noFill/>
+          </a:ln>
+        </p:spPr>
+        <p:style>
+          <a:lnRef idx="1">
+            <a:schemeClr val="accent1"/>
+          </a:lnRef>
+          <a:fillRef idx="3">
+            <a:schemeClr val="accent1"/>
+          </a:fillRef>
+          <a:effectRef idx="2">
+            <a:schemeClr val="accent1"/>
+          </a:effectRef>
+          <a:fontRef idx="minor">
+            <a:schemeClr val="lt1"/>
+          </a:fontRef>
+        </p:style>
+        <p:txBody>
+          <a:bodyPr rtlCol="0" anchor="ctr"/>
+          <a:lstStyle/>
+          <a:p>
+            <a:pPr algn="ctr"/>
+          </a:p>
+        </p:txBody>
+      </p:sp>
+      <p:sp>
+        <p:nvSpPr>
+          <p:cNvPr id="17" name="Rounded Rectangle 16"/>
+          <p:cNvSpPr/>
+          <p:nvPr/>
+        </p:nvSpPr>
+        <p:spPr>
+          <a:xfrm>
+            <a:off x="4315968" y="1847088"/>
+            <a:ext cx="7525512" cy="3401568"/>
+          </a:xfrm>
+          <a:prstGeom prst="roundRect">
+            <a:avLst/>
+          </a:prstGeom>
+          <a:solidFill>
+            <a:srgbClr val="FFFFFF"/>
+          </a:solidFill>
+          <a:ln w="10160">
+            <a:solidFill>
+              <a:srgbClr val="DDE4E8"/>
+            </a:solidFill>
+          </a:ln>
+        </p:spPr>
+        <p:style>
+          <a:lnRef idx="1">
+            <a:schemeClr val="accent1"/>
+          </a:lnRef>
+          <a:fillRef idx="3">
+            <a:schemeClr val="accent1"/>
+          </a:fillRef>
+          <a:effectRef idx="2">
+            <a:schemeClr val="accent1"/>
+          </a:effectRef>
+          <a:fontRef idx="minor">
+            <a:schemeClr val="lt1"/>
+          </a:fontRef>
+        </p:style>
+        <p:txBody>
+          <a:bodyPr rtlCol="0" anchor="ctr"/>
+          <a:lstStyle/>
+          <a:p>
+            <a:pPr algn="ctr"/>
+          </a:p>
+        </p:txBody>
+      </p:sp>
+      <p:sp>
+        <p:nvSpPr>
+          <p:cNvPr id="18" name="TextBox 17"/>
+          <p:cNvSpPr txBox="1"/>
+          <p:nvPr/>
+        </p:nvSpPr>
+        <p:spPr>
+          <a:xfrm>
+            <a:off x="4599432" y="2075688"/>
+            <a:ext cx="1417320" cy="256032"/>
+          </a:xfrm>
+          <a:prstGeom prst="rect">
+            <a:avLst/>
+          </a:prstGeom>
+          <a:noFill/>
+        </p:spPr>
+        <p:txBody>
+          <a:bodyPr wrap="square" lIns="18288" rIns="18288" tIns="18288" bIns="18288" anchor="t">
             <a:spAutoFit/>
           </a:bodyPr>
           <a:lstStyle/>
@@ -31730,13 +32042,1002 @@
               </a:spcAft>
             </a:pPr>
             <a:r>
-              <a:rPr sz="720" b="0" i="0">
-                <a:solidFill>
-                  <a:srgbClr val="8A969E"/>
+              <a:rPr sz="1250" b="1" i="0">
+                <a:solidFill>
+                  <a:srgbClr val="59697A"/>
                 </a:solidFill>
                 <a:latin typeface="Arial"/>
               </a:rPr>
-              <a:t>Gray points are real ARCHS4 profiles; colors identify generated tissue conditions. PC1 and PC2 limits are shared across panels.</a:t>
+              <a:t>Metric</a:t>
+            </a:r>
+          </a:p>
+        </p:txBody>
+      </p:sp>
+      <p:sp>
+        <p:nvSpPr>
+          <p:cNvPr id="19" name="TextBox 18"/>
+          <p:cNvSpPr txBox="1"/>
+          <p:nvPr/>
+        </p:nvSpPr>
+        <p:spPr>
+          <a:xfrm>
+            <a:off x="6537960" y="2075688"/>
+            <a:ext cx="1234440" cy="256032"/>
+          </a:xfrm>
+          <a:prstGeom prst="rect">
+            <a:avLst/>
+          </a:prstGeom>
+          <a:noFill/>
+        </p:spPr>
+        <p:txBody>
+          <a:bodyPr wrap="square" lIns="18288" rIns="18288" tIns="18288" bIns="18288" anchor="t">
+            <a:spAutoFit/>
+          </a:bodyPr>
+          <a:lstStyle/>
+          <a:p>
+            <a:pPr algn="ctr">
+              <a:spcAft>
+                <a:spcPts val="0"/>
+              </a:spcAft>
+            </a:pPr>
+            <a:r>
+              <a:rPr sz="1250" b="1" i="0">
+                <a:solidFill>
+                  <a:srgbClr val="D96552"/>
+                </a:solidFill>
+                <a:latin typeface="Arial"/>
+              </a:rPr>
+              <a:t>WGAN-GP</a:t>
+            </a:r>
+          </a:p>
+        </p:txBody>
+      </p:sp>
+      <p:sp>
+        <p:nvSpPr>
+          <p:cNvPr id="20" name="TextBox 19"/>
+          <p:cNvSpPr txBox="1"/>
+          <p:nvPr/>
+        </p:nvSpPr>
+        <p:spPr>
+          <a:xfrm>
+            <a:off x="8257031" y="2075688"/>
+            <a:ext cx="1234440" cy="256032"/>
+          </a:xfrm>
+          <a:prstGeom prst="rect">
+            <a:avLst/>
+          </a:prstGeom>
+          <a:noFill/>
+        </p:spPr>
+        <p:txBody>
+          <a:bodyPr wrap="square" lIns="18288" rIns="18288" tIns="18288" bIns="18288" anchor="t">
+            <a:spAutoFit/>
+          </a:bodyPr>
+          <a:lstStyle/>
+          <a:p>
+            <a:pPr algn="ctr">
+              <a:spcAft>
+                <a:spcPts val="0"/>
+              </a:spcAft>
+            </a:pPr>
+            <a:r>
+              <a:rPr sz="1250" b="1" i="0">
+                <a:solidFill>
+                  <a:srgbClr val="178681"/>
+                </a:solidFill>
+                <a:latin typeface="Arial"/>
+              </a:rPr>
+              <a:t>DDIM</a:t>
+            </a:r>
+          </a:p>
+        </p:txBody>
+      </p:sp>
+      <p:sp>
+        <p:nvSpPr>
+          <p:cNvPr id="21" name="TextBox 20"/>
+          <p:cNvSpPr txBox="1"/>
+          <p:nvPr/>
+        </p:nvSpPr>
+        <p:spPr>
+          <a:xfrm>
+            <a:off x="9802368" y="2075688"/>
+            <a:ext cx="1627632" cy="256032"/>
+          </a:xfrm>
+          <a:prstGeom prst="rect">
+            <a:avLst/>
+          </a:prstGeom>
+          <a:noFill/>
+        </p:spPr>
+        <p:txBody>
+          <a:bodyPr wrap="square" lIns="18288" rIns="18288" tIns="18288" bIns="18288" anchor="t">
+            <a:spAutoFit/>
+          </a:bodyPr>
+          <a:lstStyle/>
+          <a:p>
+            <a:pPr algn="l">
+              <a:spcAft>
+                <a:spcPts val="0"/>
+              </a:spcAft>
+            </a:pPr>
+            <a:r>
+              <a:rPr sz="1250" b="1" i="0">
+                <a:solidFill>
+                  <a:srgbClr val="59697A"/>
+                </a:solidFill>
+                <a:latin typeface="Arial"/>
+              </a:rPr>
+              <a:t>Reading</a:t>
+            </a:r>
+          </a:p>
+        </p:txBody>
+      </p:sp>
+      <p:sp>
+        <p:nvSpPr>
+          <p:cNvPr id="22" name="Rectangle 21"/>
+          <p:cNvSpPr/>
+          <p:nvPr/>
+        </p:nvSpPr>
+        <p:spPr>
+          <a:xfrm>
+            <a:off x="4517136" y="2478024"/>
+            <a:ext cx="7059168" cy="484632"/>
+          </a:xfrm>
+          <a:prstGeom prst="rect">
+            <a:avLst/>
+          </a:prstGeom>
+          <a:solidFill>
+            <a:srgbClr val="F5F7F8"/>
+          </a:solidFill>
+          <a:ln>
+            <a:noFill/>
+          </a:ln>
+        </p:spPr>
+        <p:style>
+          <a:lnRef idx="1">
+            <a:schemeClr val="accent1"/>
+          </a:lnRef>
+          <a:fillRef idx="3">
+            <a:schemeClr val="accent1"/>
+          </a:fillRef>
+          <a:effectRef idx="2">
+            <a:schemeClr val="accent1"/>
+          </a:effectRef>
+          <a:fontRef idx="minor">
+            <a:schemeClr val="lt1"/>
+          </a:fontRef>
+        </p:style>
+        <p:txBody>
+          <a:bodyPr rtlCol="0" anchor="ctr"/>
+          <a:lstStyle/>
+          <a:p>
+            <a:pPr algn="ctr"/>
+          </a:p>
+        </p:txBody>
+      </p:sp>
+      <p:sp>
+        <p:nvSpPr>
+          <p:cNvPr id="23" name="TextBox 22"/>
+          <p:cNvSpPr txBox="1"/>
+          <p:nvPr/>
+        </p:nvSpPr>
+        <p:spPr>
+          <a:xfrm>
+            <a:off x="4599432" y="2542032"/>
+            <a:ext cx="1783080" cy="310896"/>
+          </a:xfrm>
+          <a:prstGeom prst="rect">
+            <a:avLst/>
+          </a:prstGeom>
+          <a:noFill/>
+        </p:spPr>
+        <p:txBody>
+          <a:bodyPr wrap="square" lIns="18288" rIns="18288" tIns="18288" bIns="18288" anchor="t">
+            <a:spAutoFit/>
+          </a:bodyPr>
+          <a:lstStyle/>
+          <a:p>
+            <a:pPr algn="l">
+              <a:spcAft>
+                <a:spcPts val="0"/>
+              </a:spcAft>
+            </a:pPr>
+            <a:r>
+              <a:rPr sz="1400" b="0" i="0">
+                <a:solidFill>
+                  <a:srgbClr val="263746"/>
+                </a:solidFill>
+                <a:latin typeface="Arial"/>
+              </a:rPr>
+              <a:t>Correlation</a:t>
+            </a:r>
+          </a:p>
+        </p:txBody>
+      </p:sp>
+      <p:sp>
+        <p:nvSpPr>
+          <p:cNvPr id="24" name="TextBox 23"/>
+          <p:cNvSpPr txBox="1"/>
+          <p:nvPr/>
+        </p:nvSpPr>
+        <p:spPr>
+          <a:xfrm>
+            <a:off x="6519672" y="2542032"/>
+            <a:ext cx="1261872" cy="310896"/>
+          </a:xfrm>
+          <a:prstGeom prst="rect">
+            <a:avLst/>
+          </a:prstGeom>
+          <a:noFill/>
+        </p:spPr>
+        <p:txBody>
+          <a:bodyPr wrap="square" lIns="18288" rIns="18288" tIns="18288" bIns="18288" anchor="t">
+            <a:spAutoFit/>
+          </a:bodyPr>
+          <a:lstStyle/>
+          <a:p>
+            <a:pPr algn="ctr">
+              <a:spcAft>
+                <a:spcPts val="0"/>
+              </a:spcAft>
+            </a:pPr>
+            <a:r>
+              <a:rPr sz="1600" b="1" i="0">
+                <a:solidFill>
+                  <a:srgbClr val="D96552"/>
+                </a:solidFill>
+                <a:latin typeface="Arial"/>
+              </a:rPr>
+              <a:t>0.976</a:t>
+            </a:r>
+          </a:p>
+        </p:txBody>
+      </p:sp>
+      <p:sp>
+        <p:nvSpPr>
+          <p:cNvPr id="25" name="TextBox 24"/>
+          <p:cNvSpPr txBox="1"/>
+          <p:nvPr/>
+        </p:nvSpPr>
+        <p:spPr>
+          <a:xfrm>
+            <a:off x="8238744" y="2542032"/>
+            <a:ext cx="1261872" cy="310896"/>
+          </a:xfrm>
+          <a:prstGeom prst="rect">
+            <a:avLst/>
+          </a:prstGeom>
+          <a:noFill/>
+        </p:spPr>
+        <p:txBody>
+          <a:bodyPr wrap="square" lIns="18288" rIns="18288" tIns="18288" bIns="18288" anchor="t">
+            <a:spAutoFit/>
+          </a:bodyPr>
+          <a:lstStyle/>
+          <a:p>
+            <a:pPr algn="ctr">
+              <a:spcAft>
+                <a:spcPts val="0"/>
+              </a:spcAft>
+            </a:pPr>
+            <a:r>
+              <a:rPr sz="1600" b="1" i="0">
+                <a:solidFill>
+                  <a:srgbClr val="178681"/>
+                </a:solidFill>
+                <a:latin typeface="Arial"/>
+              </a:rPr>
+              <a:t>0.974</a:t>
+            </a:r>
+          </a:p>
+        </p:txBody>
+      </p:sp>
+      <p:sp>
+        <p:nvSpPr>
+          <p:cNvPr id="26" name="TextBox 25"/>
+          <p:cNvSpPr txBox="1"/>
+          <p:nvPr/>
+        </p:nvSpPr>
+        <p:spPr>
+          <a:xfrm>
+            <a:off x="9820656" y="2542032"/>
+            <a:ext cx="1481328" cy="310896"/>
+          </a:xfrm>
+          <a:prstGeom prst="rect">
+            <a:avLst/>
+          </a:prstGeom>
+          <a:noFill/>
+        </p:spPr>
+        <p:txBody>
+          <a:bodyPr wrap="square" lIns="18288" rIns="18288" tIns="18288" bIns="18288" anchor="t">
+            <a:spAutoFit/>
+          </a:bodyPr>
+          <a:lstStyle/>
+          <a:p>
+            <a:pPr algn="l">
+              <a:spcAft>
+                <a:spcPts val="0"/>
+              </a:spcAft>
+            </a:pPr>
+            <a:r>
+              <a:rPr sz="1350" b="0" i="0">
+                <a:solidFill>
+                  <a:srgbClr val="59697A"/>
+                </a:solidFill>
+                <a:latin typeface="Arial"/>
+              </a:rPr>
+              <a:t>similar</a:t>
+            </a:r>
+          </a:p>
+        </p:txBody>
+      </p:sp>
+      <p:sp>
+        <p:nvSpPr>
+          <p:cNvPr id="27" name="TextBox 26"/>
+          <p:cNvSpPr txBox="1"/>
+          <p:nvPr/>
+        </p:nvSpPr>
+        <p:spPr>
+          <a:xfrm>
+            <a:off x="4599432" y="3118103"/>
+            <a:ext cx="1783080" cy="310896"/>
+          </a:xfrm>
+          <a:prstGeom prst="rect">
+            <a:avLst/>
+          </a:prstGeom>
+          <a:noFill/>
+        </p:spPr>
+        <p:txBody>
+          <a:bodyPr wrap="square" lIns="18288" rIns="18288" tIns="18288" bIns="18288" anchor="t">
+            <a:spAutoFit/>
+          </a:bodyPr>
+          <a:lstStyle/>
+          <a:p>
+            <a:pPr algn="l">
+              <a:spcAft>
+                <a:spcPts val="0"/>
+              </a:spcAft>
+            </a:pPr>
+            <a:r>
+              <a:rPr sz="1400" b="0" i="0">
+                <a:solidFill>
+                  <a:srgbClr val="263746"/>
+                </a:solidFill>
+                <a:latin typeface="Arial"/>
+              </a:rPr>
+              <a:t>F1</a:t>
+            </a:r>
+          </a:p>
+        </p:txBody>
+      </p:sp>
+      <p:sp>
+        <p:nvSpPr>
+          <p:cNvPr id="28" name="TextBox 27"/>
+          <p:cNvSpPr txBox="1"/>
+          <p:nvPr/>
+        </p:nvSpPr>
+        <p:spPr>
+          <a:xfrm>
+            <a:off x="6519672" y="3118103"/>
+            <a:ext cx="1261872" cy="310896"/>
+          </a:xfrm>
+          <a:prstGeom prst="rect">
+            <a:avLst/>
+          </a:prstGeom>
+          <a:noFill/>
+        </p:spPr>
+        <p:txBody>
+          <a:bodyPr wrap="square" lIns="18288" rIns="18288" tIns="18288" bIns="18288" anchor="t">
+            <a:spAutoFit/>
+          </a:bodyPr>
+          <a:lstStyle/>
+          <a:p>
+            <a:pPr algn="ctr">
+              <a:spcAft>
+                <a:spcPts val="0"/>
+              </a:spcAft>
+            </a:pPr>
+            <a:r>
+              <a:rPr sz="1600" b="1" i="0">
+                <a:solidFill>
+                  <a:srgbClr val="D96552"/>
+                </a:solidFill>
+                <a:latin typeface="Arial"/>
+              </a:rPr>
+              <a:t>0.985</a:t>
+            </a:r>
+          </a:p>
+        </p:txBody>
+      </p:sp>
+      <p:sp>
+        <p:nvSpPr>
+          <p:cNvPr id="29" name="TextBox 28"/>
+          <p:cNvSpPr txBox="1"/>
+          <p:nvPr/>
+        </p:nvSpPr>
+        <p:spPr>
+          <a:xfrm>
+            <a:off x="8238744" y="3118103"/>
+            <a:ext cx="1261872" cy="310896"/>
+          </a:xfrm>
+          <a:prstGeom prst="rect">
+            <a:avLst/>
+          </a:prstGeom>
+          <a:noFill/>
+        </p:spPr>
+        <p:txBody>
+          <a:bodyPr wrap="square" lIns="18288" rIns="18288" tIns="18288" bIns="18288" anchor="t">
+            <a:spAutoFit/>
+          </a:bodyPr>
+          <a:lstStyle/>
+          <a:p>
+            <a:pPr algn="ctr">
+              <a:spcAft>
+                <a:spcPts val="0"/>
+              </a:spcAft>
+            </a:pPr>
+            <a:r>
+              <a:rPr sz="1600" b="1" i="0">
+                <a:solidFill>
+                  <a:srgbClr val="178681"/>
+                </a:solidFill>
+                <a:latin typeface="Arial"/>
+              </a:rPr>
+              <a:t>0.997</a:t>
+            </a:r>
+          </a:p>
+        </p:txBody>
+      </p:sp>
+      <p:sp>
+        <p:nvSpPr>
+          <p:cNvPr id="30" name="TextBox 29"/>
+          <p:cNvSpPr txBox="1"/>
+          <p:nvPr/>
+        </p:nvSpPr>
+        <p:spPr>
+          <a:xfrm>
+            <a:off x="9820656" y="3118103"/>
+            <a:ext cx="1481328" cy="310896"/>
+          </a:xfrm>
+          <a:prstGeom prst="rect">
+            <a:avLst/>
+          </a:prstGeom>
+          <a:noFill/>
+        </p:spPr>
+        <p:txBody>
+          <a:bodyPr wrap="square" lIns="18288" rIns="18288" tIns="18288" bIns="18288" anchor="t">
+            <a:spAutoFit/>
+          </a:bodyPr>
+          <a:lstStyle/>
+          <a:p>
+            <a:pPr algn="l">
+              <a:spcAft>
+                <a:spcPts val="0"/>
+              </a:spcAft>
+            </a:pPr>
+            <a:r>
+              <a:rPr sz="1350" b="0" i="0">
+                <a:solidFill>
+                  <a:srgbClr val="59697A"/>
+                </a:solidFill>
+                <a:latin typeface="Arial"/>
+              </a:rPr>
+              <a:t>higher</a:t>
+            </a:r>
+          </a:p>
+        </p:txBody>
+      </p:sp>
+      <p:sp>
+        <p:nvSpPr>
+          <p:cNvPr id="31" name="Rectangle 30"/>
+          <p:cNvSpPr/>
+          <p:nvPr/>
+        </p:nvSpPr>
+        <p:spPr>
+          <a:xfrm>
+            <a:off x="4517136" y="3630168"/>
+            <a:ext cx="7059168" cy="484632"/>
+          </a:xfrm>
+          <a:prstGeom prst="rect">
+            <a:avLst/>
+          </a:prstGeom>
+          <a:solidFill>
+            <a:srgbClr val="F5F7F8"/>
+          </a:solidFill>
+          <a:ln>
+            <a:noFill/>
+          </a:ln>
+        </p:spPr>
+        <p:style>
+          <a:lnRef idx="1">
+            <a:schemeClr val="accent1"/>
+          </a:lnRef>
+          <a:fillRef idx="3">
+            <a:schemeClr val="accent1"/>
+          </a:fillRef>
+          <a:effectRef idx="2">
+            <a:schemeClr val="accent1"/>
+          </a:effectRef>
+          <a:fontRef idx="minor">
+            <a:schemeClr val="lt1"/>
+          </a:fontRef>
+        </p:style>
+        <p:txBody>
+          <a:bodyPr rtlCol="0" anchor="ctr"/>
+          <a:lstStyle/>
+          <a:p>
+            <a:pPr algn="ctr"/>
+          </a:p>
+        </p:txBody>
+      </p:sp>
+      <p:sp>
+        <p:nvSpPr>
+          <p:cNvPr id="32" name="TextBox 31"/>
+          <p:cNvSpPr txBox="1"/>
+          <p:nvPr/>
+        </p:nvSpPr>
+        <p:spPr>
+          <a:xfrm>
+            <a:off x="4599432" y="3694176"/>
+            <a:ext cx="1783080" cy="310896"/>
+          </a:xfrm>
+          <a:prstGeom prst="rect">
+            <a:avLst/>
+          </a:prstGeom>
+          <a:noFill/>
+        </p:spPr>
+        <p:txBody>
+          <a:bodyPr wrap="square" lIns="18288" rIns="18288" tIns="18288" bIns="18288" anchor="t">
+            <a:spAutoFit/>
+          </a:bodyPr>
+          <a:lstStyle/>
+          <a:p>
+            <a:pPr algn="l">
+              <a:spcAft>
+                <a:spcPts val="0"/>
+              </a:spcAft>
+            </a:pPr>
+            <a:r>
+              <a:rPr sz="1400" b="1" i="0">
+                <a:solidFill>
+                  <a:srgbClr val="263746"/>
+                </a:solidFill>
+                <a:latin typeface="Arial"/>
+              </a:rPr>
+              <a:t>Adversarial accuracy</a:t>
+            </a:r>
+          </a:p>
+        </p:txBody>
+      </p:sp>
+      <p:sp>
+        <p:nvSpPr>
+          <p:cNvPr id="33" name="TextBox 32"/>
+          <p:cNvSpPr txBox="1"/>
+          <p:nvPr/>
+        </p:nvSpPr>
+        <p:spPr>
+          <a:xfrm>
+            <a:off x="6519672" y="3694176"/>
+            <a:ext cx="1261872" cy="310896"/>
+          </a:xfrm>
+          <a:prstGeom prst="rect">
+            <a:avLst/>
+          </a:prstGeom>
+          <a:noFill/>
+        </p:spPr>
+        <p:txBody>
+          <a:bodyPr wrap="square" lIns="18288" rIns="18288" tIns="18288" bIns="18288" anchor="t">
+            <a:spAutoFit/>
+          </a:bodyPr>
+          <a:lstStyle/>
+          <a:p>
+            <a:pPr algn="ctr">
+              <a:spcAft>
+                <a:spcPts val="0"/>
+              </a:spcAft>
+            </a:pPr>
+            <a:r>
+              <a:rPr sz="1600" b="1" i="0">
+                <a:solidFill>
+                  <a:srgbClr val="D96552"/>
+                </a:solidFill>
+                <a:latin typeface="Arial"/>
+              </a:rPr>
+              <a:t>0.636</a:t>
+            </a:r>
+          </a:p>
+        </p:txBody>
+      </p:sp>
+      <p:sp>
+        <p:nvSpPr>
+          <p:cNvPr id="34" name="TextBox 33"/>
+          <p:cNvSpPr txBox="1"/>
+          <p:nvPr/>
+        </p:nvSpPr>
+        <p:spPr>
+          <a:xfrm>
+            <a:off x="8238744" y="3694176"/>
+            <a:ext cx="1261872" cy="310896"/>
+          </a:xfrm>
+          <a:prstGeom prst="rect">
+            <a:avLst/>
+          </a:prstGeom>
+          <a:noFill/>
+        </p:spPr>
+        <p:txBody>
+          <a:bodyPr wrap="square" lIns="18288" rIns="18288" tIns="18288" bIns="18288" anchor="t">
+            <a:spAutoFit/>
+          </a:bodyPr>
+          <a:lstStyle/>
+          <a:p>
+            <a:pPr algn="ctr">
+              <a:spcAft>
+                <a:spcPts val="0"/>
+              </a:spcAft>
+            </a:pPr>
+            <a:r>
+              <a:rPr sz="1600" b="1" i="0">
+                <a:solidFill>
+                  <a:srgbClr val="178681"/>
+                </a:solidFill>
+                <a:latin typeface="Arial"/>
+              </a:rPr>
+              <a:t>0.475</a:t>
+            </a:r>
+          </a:p>
+        </p:txBody>
+      </p:sp>
+      <p:sp>
+        <p:nvSpPr>
+          <p:cNvPr id="35" name="TextBox 34"/>
+          <p:cNvSpPr txBox="1"/>
+          <p:nvPr/>
+        </p:nvSpPr>
+        <p:spPr>
+          <a:xfrm>
+            <a:off x="9820656" y="3694176"/>
+            <a:ext cx="1481328" cy="310896"/>
+          </a:xfrm>
+          <a:prstGeom prst="rect">
+            <a:avLst/>
+          </a:prstGeom>
+          <a:noFill/>
+        </p:spPr>
+        <p:txBody>
+          <a:bodyPr wrap="square" lIns="18288" rIns="18288" tIns="18288" bIns="18288" anchor="t">
+            <a:spAutoFit/>
+          </a:bodyPr>
+          <a:lstStyle/>
+          <a:p>
+            <a:pPr algn="l">
+              <a:spcAft>
+                <a:spcPts val="0"/>
+              </a:spcAft>
+            </a:pPr>
+            <a:r>
+              <a:rPr sz="1350" b="0" i="0">
+                <a:solidFill>
+                  <a:srgbClr val="59697A"/>
+                </a:solidFill>
+                <a:latin typeface="Arial"/>
+              </a:rPr>
+              <a:t>closer to 0.5</a:t>
+            </a:r>
+          </a:p>
+        </p:txBody>
+      </p:sp>
+      <p:sp>
+        <p:nvSpPr>
+          <p:cNvPr id="36" name="TextBox 35"/>
+          <p:cNvSpPr txBox="1"/>
+          <p:nvPr/>
+        </p:nvSpPr>
+        <p:spPr>
+          <a:xfrm>
+            <a:off x="4599432" y="4270248"/>
+            <a:ext cx="1783080" cy="310896"/>
+          </a:xfrm>
+          <a:prstGeom prst="rect">
+            <a:avLst/>
+          </a:prstGeom>
+          <a:noFill/>
+        </p:spPr>
+        <p:txBody>
+          <a:bodyPr wrap="square" lIns="18288" rIns="18288" tIns="18288" bIns="18288" anchor="t">
+            <a:spAutoFit/>
+          </a:bodyPr>
+          <a:lstStyle/>
+          <a:p>
+            <a:pPr algn="l">
+              <a:spcAft>
+                <a:spcPts val="0"/>
+              </a:spcAft>
+            </a:pPr>
+            <a:r>
+              <a:rPr sz="1400" b="1" i="0">
+                <a:solidFill>
+                  <a:srgbClr val="263746"/>
+                </a:solidFill>
+                <a:latin typeface="Arial"/>
+              </a:rPr>
+              <a:t>FD / real P95</a:t>
+            </a:r>
+          </a:p>
+        </p:txBody>
+      </p:sp>
+      <p:sp>
+        <p:nvSpPr>
+          <p:cNvPr id="37" name="TextBox 36"/>
+          <p:cNvSpPr txBox="1"/>
+          <p:nvPr/>
+        </p:nvSpPr>
+        <p:spPr>
+          <a:xfrm>
+            <a:off x="6519672" y="4270248"/>
+            <a:ext cx="1261872" cy="310896"/>
+          </a:xfrm>
+          <a:prstGeom prst="rect">
+            <a:avLst/>
+          </a:prstGeom>
+          <a:noFill/>
+        </p:spPr>
+        <p:txBody>
+          <a:bodyPr wrap="square" lIns="18288" rIns="18288" tIns="18288" bIns="18288" anchor="t">
+            <a:spAutoFit/>
+          </a:bodyPr>
+          <a:lstStyle/>
+          <a:p>
+            <a:pPr algn="ctr">
+              <a:spcAft>
+                <a:spcPts val="0"/>
+              </a:spcAft>
+            </a:pPr>
+            <a:r>
+              <a:rPr sz="1600" b="1" i="0">
+                <a:solidFill>
+                  <a:srgbClr val="D96552"/>
+                </a:solidFill>
+                <a:latin typeface="Arial"/>
+              </a:rPr>
+              <a:t>0.144</a:t>
+            </a:r>
+          </a:p>
+        </p:txBody>
+      </p:sp>
+      <p:sp>
+        <p:nvSpPr>
+          <p:cNvPr id="38" name="TextBox 37"/>
+          <p:cNvSpPr txBox="1"/>
+          <p:nvPr/>
+        </p:nvSpPr>
+        <p:spPr>
+          <a:xfrm>
+            <a:off x="8238744" y="4270248"/>
+            <a:ext cx="1261872" cy="310896"/>
+          </a:xfrm>
+          <a:prstGeom prst="rect">
+            <a:avLst/>
+          </a:prstGeom>
+          <a:noFill/>
+        </p:spPr>
+        <p:txBody>
+          <a:bodyPr wrap="square" lIns="18288" rIns="18288" tIns="18288" bIns="18288" anchor="t">
+            <a:spAutoFit/>
+          </a:bodyPr>
+          <a:lstStyle/>
+          <a:p>
+            <a:pPr algn="ctr">
+              <a:spcAft>
+                <a:spcPts val="0"/>
+              </a:spcAft>
+            </a:pPr>
+            <a:r>
+              <a:rPr sz="1600" b="1" i="0">
+                <a:solidFill>
+                  <a:srgbClr val="178681"/>
+                </a:solidFill>
+                <a:latin typeface="Arial"/>
+              </a:rPr>
+              <a:t>0.074</a:t>
+            </a:r>
+          </a:p>
+        </p:txBody>
+      </p:sp>
+      <p:sp>
+        <p:nvSpPr>
+          <p:cNvPr id="39" name="TextBox 38"/>
+          <p:cNvSpPr txBox="1"/>
+          <p:nvPr/>
+        </p:nvSpPr>
+        <p:spPr>
+          <a:xfrm>
+            <a:off x="9820656" y="4270248"/>
+            <a:ext cx="1481328" cy="310896"/>
+          </a:xfrm>
+          <a:prstGeom prst="rect">
+            <a:avLst/>
+          </a:prstGeom>
+          <a:noFill/>
+        </p:spPr>
+        <p:txBody>
+          <a:bodyPr wrap="square" lIns="18288" rIns="18288" tIns="18288" bIns="18288" anchor="t">
+            <a:spAutoFit/>
+          </a:bodyPr>
+          <a:lstStyle/>
+          <a:p>
+            <a:pPr algn="l">
+              <a:spcAft>
+                <a:spcPts val="0"/>
+              </a:spcAft>
+            </a:pPr>
+            <a:r>
+              <a:rPr sz="1350" b="0" i="0">
+                <a:solidFill>
+                  <a:srgbClr val="59697A"/>
+                </a:solidFill>
+                <a:latin typeface="Arial"/>
+              </a:rPr>
+              <a:t>lower</a:t>
+            </a:r>
+          </a:p>
+        </p:txBody>
+      </p:sp>
+      <p:sp>
+        <p:nvSpPr>
+          <p:cNvPr id="40" name="Rounded Rectangle 39"/>
+          <p:cNvSpPr/>
+          <p:nvPr/>
+        </p:nvSpPr>
+        <p:spPr>
+          <a:xfrm>
+            <a:off x="347472" y="5522976"/>
+            <a:ext cx="11494008" cy="667512"/>
+          </a:xfrm>
+          <a:prstGeom prst="roundRect">
+            <a:avLst/>
+          </a:prstGeom>
+          <a:solidFill>
+            <a:srgbClr val="082B55"/>
+          </a:solidFill>
+          <a:ln w="10160">
+            <a:solidFill>
+              <a:srgbClr val="082B55"/>
+            </a:solidFill>
+          </a:ln>
+        </p:spPr>
+        <p:style>
+          <a:lnRef idx="1">
+            <a:schemeClr val="accent1"/>
+          </a:lnRef>
+          <a:fillRef idx="3">
+            <a:schemeClr val="accent1"/>
+          </a:fillRef>
+          <a:effectRef idx="2">
+            <a:schemeClr val="accent1"/>
+          </a:effectRef>
+          <a:fontRef idx="minor">
+            <a:schemeClr val="lt1"/>
+          </a:fontRef>
+        </p:style>
+        <p:txBody>
+          <a:bodyPr rtlCol="0" anchor="ctr"/>
+          <a:lstStyle/>
+          <a:p>
+            <a:pPr algn="ctr"/>
+          </a:p>
+        </p:txBody>
+      </p:sp>
+      <p:sp>
+        <p:nvSpPr>
+          <p:cNvPr id="41" name="TextBox 40"/>
+          <p:cNvSpPr txBox="1"/>
+          <p:nvPr/>
+        </p:nvSpPr>
+        <p:spPr>
+          <a:xfrm>
+            <a:off x="658368" y="5660136"/>
+            <a:ext cx="2331720" cy="310896"/>
+          </a:xfrm>
+          <a:prstGeom prst="rect">
+            <a:avLst/>
+          </a:prstGeom>
+          <a:noFill/>
+        </p:spPr>
+        <p:txBody>
+          <a:bodyPr wrap="square" lIns="18288" rIns="18288" tIns="18288" bIns="18288" anchor="ctr">
+            <a:spAutoFit/>
+          </a:bodyPr>
+          <a:lstStyle/>
+          <a:p>
+            <a:pPr algn="l">
+              <a:spcAft>
+                <a:spcPts val="0"/>
+              </a:spcAft>
+            </a:pPr>
+            <a:r>
+              <a:rPr sz="1800" b="1" i="0">
+                <a:solidFill>
+                  <a:srgbClr val="FFFFFF"/>
+                </a:solidFill>
+                <a:latin typeface="Arial"/>
+              </a:rPr>
+              <a:t>Use DDIM downstream</a:t>
+            </a:r>
+          </a:p>
+        </p:txBody>
+      </p:sp>
+      <p:sp>
+        <p:nvSpPr>
+          <p:cNvPr id="42" name="TextBox 41"/>
+          <p:cNvSpPr txBox="1"/>
+          <p:nvPr/>
+        </p:nvSpPr>
+        <p:spPr>
+          <a:xfrm>
+            <a:off x="2852928" y="5669280"/>
+            <a:ext cx="8394192" cy="292608"/>
+          </a:xfrm>
+          <a:prstGeom prst="rect">
+            <a:avLst/>
+          </a:prstGeom>
+          <a:noFill/>
+        </p:spPr>
+        <p:txBody>
+          <a:bodyPr wrap="square" lIns="18288" rIns="18288" tIns="18288" bIns="18288" anchor="ctr">
+            <a:spAutoFit/>
+          </a:bodyPr>
+          <a:lstStyle/>
+          <a:p>
+            <a:pPr algn="l">
+              <a:spcAft>
+                <a:spcPts val="0"/>
+              </a:spcAft>
+            </a:pPr>
+            <a:r>
+              <a:rPr sz="1500" b="0" i="0">
+                <a:solidFill>
+                  <a:srgbClr val="DCE7F2"/>
+                </a:solidFill>
+                <a:latin typeface="Arial"/>
+              </a:rPr>
+              <a:t>Lower separability and distributional distance, with comparable correlation and higher F1.</a:t>
+            </a:r>
+          </a:p>
+        </p:txBody>
+      </p:sp>
+      <p:sp>
+        <p:nvSpPr>
+          <p:cNvPr id="43" name="TextBox 42"/>
+          <p:cNvSpPr txBox="1"/>
+          <p:nvPr/>
+        </p:nvSpPr>
+        <p:spPr>
+          <a:xfrm>
+            <a:off x="329184" y="6510528"/>
+            <a:ext cx="10972800" cy="173736"/>
+          </a:xfrm>
+          <a:prstGeom prst="rect">
+            <a:avLst/>
+          </a:prstGeom>
+          <a:noFill/>
+        </p:spPr>
+        <p:txBody>
+          <a:bodyPr wrap="square" lIns="18288" rIns="18288" tIns="18288" bIns="18288" anchor="ctr">
+            <a:spAutoFit/>
+          </a:bodyPr>
+          <a:lstStyle/>
+          <a:p>
+            <a:pPr algn="l">
+              <a:spcAft>
+                <a:spcPts val="0"/>
+              </a:spcAft>
+            </a:pPr>
+            <a:r>
+              <a:rPr sz="720" b="0" i="0">
+                <a:solidFill>
+                  <a:srgbClr val="8A969E"/>
+                </a:solidFill>
+                <a:latin typeface="Arial"/>
+              </a:rPr>
+              <a:t>WGAN values use validation data and DDIM values use the stated OSDR test; they are not paired on one common split.</a:t>
             </a:r>
           </a:p>
         </p:txBody>
@@ -31827,7 +33128,7 @@
                 </a:solidFill>
                 <a:latin typeface="Arial"/>
               </a:rPr>
-              <a:t>DIFFUSION OUTPUT</a:t>
+              <a:t>DIFFUSION</a:t>
             </a:r>
           </a:p>
         </p:txBody>
@@ -31866,7 +33167,7 @@
                 </a:solidFill>
                 <a:latin typeface="Arial"/>
               </a:rPr>
-              <a:t>Generated profiles track the real OSDR PCA manifold</a:t>
+              <a:t>Diffusion learns tissue structure from noise</a:t>
             </a:r>
           </a:p>
         </p:txBody>
@@ -31905,14 +33206,14 @@
                 </a:solidFill>
                 <a:latin typeface="Arial"/>
               </a:rPr>
-              <a:t>Circles are locked real OSDR profiles; crosses are matched DDIM profiles from generation seed 5020.</a:t>
+              <a:t>The same PCA axes follow 1,024 generated profiles through reverse diffusion.</a:t>
             </a:r>
           </a:p>
         </p:txBody>
       </p:sp>
       <p:pic>
         <p:nvPicPr>
-          <p:cNvPr id="7" name="PCA of locked real and matched DDIM OSDR profiles by tissue and condition" descr="PCA of locked real and matched DDIM OSDR profiles by tissue and condition"/>
+          <p:cNvPr id="7" name="DDIM reverse trajectory at timesteps 1000, 200 and 0" descr="DDIM reverse trajectory at timesteps 1000, 200 and 0"/>
           <p:cNvPicPr>
             <a:picLocks noChangeAspect="1"/>
           </p:cNvPicPr>
@@ -31926,8 +33227,8 @@
         </p:blipFill>
         <p:spPr>
           <a:xfrm>
-            <a:off x="1009356" y="1700784"/>
-            <a:ext cx="10161095" cy="4169663"/>
+            <a:off x="310896" y="1735579"/>
+            <a:ext cx="11558016" cy="4100072"/>
           </a:xfrm>
           <a:prstGeom prst="rect">
             <a:avLst/>
@@ -31936,59 +33237,14 @@
       </p:pic>
       <p:sp>
         <p:nvSpPr>
-          <p:cNvPr id="8" name="Rounded Rectangle 7"/>
-          <p:cNvSpPr/>
-          <p:nvPr/>
-        </p:nvSpPr>
-        <p:spPr>
-          <a:xfrm>
-            <a:off x="438912" y="5907024"/>
-            <a:ext cx="11311128" cy="438912"/>
-          </a:xfrm>
-          <a:prstGeom prst="roundRect">
-            <a:avLst/>
-          </a:prstGeom>
-          <a:solidFill>
-            <a:srgbClr val="E9F1F7"/>
-          </a:solidFill>
-          <a:ln w="10160">
-            <a:solidFill>
-              <a:srgbClr val="C9DCE9"/>
-            </a:solidFill>
-          </a:ln>
-        </p:spPr>
-        <p:style>
-          <a:lnRef idx="1">
-            <a:schemeClr val="accent1"/>
-          </a:lnRef>
-          <a:fillRef idx="3">
-            <a:schemeClr val="accent1"/>
-          </a:fillRef>
-          <a:effectRef idx="2">
-            <a:schemeClr val="accent1"/>
-          </a:effectRef>
-          <a:fontRef idx="minor">
-            <a:schemeClr val="lt1"/>
-          </a:fontRef>
-        </p:style>
-        <p:txBody>
-          <a:bodyPr rtlCol="0" anchor="ctr"/>
-          <a:lstStyle/>
-          <a:p>
-            <a:pPr algn="ctr"/>
-          </a:p>
-        </p:txBody>
-      </p:sp>
-      <p:sp>
-        <p:nvSpPr>
-          <p:cNvPr id="9" name="TextBox 8"/>
+          <p:cNvPr id="8" name="TextBox 7"/>
           <p:cNvSpPr txBox="1"/>
           <p:nvPr/>
         </p:nvSpPr>
         <p:spPr>
           <a:xfrm>
-            <a:off x="667512" y="5989320"/>
-            <a:ext cx="10844784" cy="246888"/>
+            <a:off x="713232" y="5943600"/>
+            <a:ext cx="2286000" cy="256032"/>
           </a:xfrm>
           <a:prstGeom prst="rect">
             <a:avLst/>
@@ -32007,13 +33263,52 @@
               </a:spcAft>
             </a:pPr>
             <a:r>
-              <a:rPr sz="1330" b="1" i="0">
-                <a:solidFill>
-                  <a:srgbClr val="082B55"/>
+              <a:rPr sz="1300" b="1" i="0">
+                <a:solidFill>
+                  <a:srgbClr val="59697A"/>
                 </a:solidFill>
                 <a:latin typeface="Arial"/>
               </a:rPr>
-              <a:t>Interpretation: tissue structure dominates; FLT and GC are subtler. PCA is descriptive, so quantitative metrics determine validation.</a:t>
+              <a:t>t = 1000: noise</a:t>
+            </a:r>
+          </a:p>
+        </p:txBody>
+      </p:sp>
+      <p:sp>
+        <p:nvSpPr>
+          <p:cNvPr id="9" name="TextBox 8"/>
+          <p:cNvSpPr txBox="1"/>
+          <p:nvPr/>
+        </p:nvSpPr>
+        <p:spPr>
+          <a:xfrm>
+            <a:off x="4782312" y="5943600"/>
+            <a:ext cx="2651760" cy="256032"/>
+          </a:xfrm>
+          <a:prstGeom prst="rect">
+            <a:avLst/>
+          </a:prstGeom>
+          <a:noFill/>
+        </p:spPr>
+        <p:txBody>
+          <a:bodyPr wrap="square" lIns="18288" rIns="18288" tIns="18288" bIns="18288" anchor="t">
+            <a:spAutoFit/>
+          </a:bodyPr>
+          <a:lstStyle/>
+          <a:p>
+            <a:pPr algn="ctr">
+              <a:spcAft>
+                <a:spcPts val="0"/>
+              </a:spcAft>
+            </a:pPr>
+            <a:r>
+              <a:rPr sz="1300" b="1" i="0">
+                <a:solidFill>
+                  <a:srgbClr val="59697A"/>
+                </a:solidFill>
+                <a:latin typeface="Arial"/>
+              </a:rPr>
+              <a:t>t = 200: partial structure</a:t>
             </a:r>
           </a:p>
         </p:txBody>
@@ -32021,6 +33316,45 @@
       <p:sp>
         <p:nvSpPr>
           <p:cNvPr id="10" name="TextBox 9"/>
+          <p:cNvSpPr txBox="1"/>
+          <p:nvPr/>
+        </p:nvSpPr>
+        <p:spPr>
+          <a:xfrm>
+            <a:off x="8366760" y="5943600"/>
+            <a:ext cx="3108960" cy="256032"/>
+          </a:xfrm>
+          <a:prstGeom prst="rect">
+            <a:avLst/>
+          </a:prstGeom>
+          <a:noFill/>
+        </p:spPr>
+        <p:txBody>
+          <a:bodyPr wrap="square" lIns="18288" rIns="18288" tIns="18288" bIns="18288" anchor="t">
+            <a:spAutoFit/>
+          </a:bodyPr>
+          <a:lstStyle/>
+          <a:p>
+            <a:pPr algn="ctr">
+              <a:spcAft>
+                <a:spcPts val="0"/>
+              </a:spcAft>
+            </a:pPr>
+            <a:r>
+              <a:rPr sz="1300" b="1" i="0">
+                <a:solidFill>
+                  <a:srgbClr val="178681"/>
+                </a:solidFill>
+                <a:latin typeface="Arial"/>
+              </a:rPr>
+              <a:t>t = 0: tissue-conditioned profiles</a:t>
+            </a:r>
+          </a:p>
+        </p:txBody>
+      </p:sp>
+      <p:sp>
+        <p:nvSpPr>
+          <p:cNvPr id="11" name="TextBox 10"/>
           <p:cNvSpPr txBox="1"/>
           <p:nvPr/>
         </p:nvSpPr>
@@ -32052,7 +33386,7 @@
                 </a:solidFill>
                 <a:latin typeface="Arial"/>
               </a:rPr>
-              <a:t>PCA was fitted in the common locked OSDR expression space. This is PCA, not UMAP.</a:t>
+              <a:t>Gray points are real ARCHS4 profiles; colors identify generated tissue conditions. PC1 and PC2 limits are shared across panels.</a:t>
             </a:r>
           </a:p>
         </p:txBody>
@@ -32143,7 +33477,7 @@
                 </a:solidFill>
                 <a:latin typeface="Arial"/>
               </a:rPr>
-              <a:t>VALIDATION</a:t>
+              <a:t>DIFFUSION OUTPUT</a:t>
             </a:r>
           </a:p>
         </p:txBody>
@@ -32182,7 +33516,7 @@
                 </a:solidFill>
                 <a:latin typeface="Arial"/>
               </a:rPr>
-              <a:t>DDIM matched expression and reduced separability</a:t>
+              <a:t>Generated profiles track the real OSDR PCA manifold</a:t>
             </a:r>
           </a:p>
         </p:txBody>
@@ -32221,21 +33555,45 @@
                 </a:solidFill>
                 <a:latin typeface="Arial"/>
               </a:rPr>
-              <a:t>AA closer to 0.5 means a classifier has less success separating real and generated profiles; lower FD is better.</a:t>
-            </a:r>
-          </a:p>
-        </p:txBody>
-      </p:sp>
-      <p:sp>
-        <p:nvSpPr>
-          <p:cNvPr id="7" name="Rounded Rectangle 6"/>
+              <a:t>Circles are locked real OSDR profiles; crosses are matched DDIM profiles from generation seed 5020.</a:t>
+            </a:r>
+          </a:p>
+        </p:txBody>
+      </p:sp>
+      <p:pic>
+        <p:nvPicPr>
+          <p:cNvPr id="7" name="PCA of locked real and matched DDIM OSDR profiles by tissue and condition" descr="PCA of locked real and matched DDIM OSDR profiles by tissue and condition"/>
+          <p:cNvPicPr>
+            <a:picLocks noChangeAspect="1"/>
+          </p:cNvPicPr>
+          <p:nvPr/>
+        </p:nvPicPr>
+        <p:blipFill>
+          <a:blip r:embed="rId2"/>
+          <a:stretch>
+            <a:fillRect/>
+          </a:stretch>
+        </p:blipFill>
+        <p:spPr>
+          <a:xfrm>
+            <a:off x="1009356" y="1700784"/>
+            <a:ext cx="10161095" cy="4169663"/>
+          </a:xfrm>
+          <a:prstGeom prst="rect">
+            <a:avLst/>
+          </a:prstGeom>
+        </p:spPr>
+      </p:pic>
+      <p:sp>
+        <p:nvSpPr>
+          <p:cNvPr id="8" name="Rounded Rectangle 7"/>
           <p:cNvSpPr/>
           <p:nvPr/>
         </p:nvSpPr>
         <p:spPr>
           <a:xfrm>
-            <a:off x="347472" y="1847088"/>
-            <a:ext cx="3703320" cy="3401568"/>
+            <a:off x="438912" y="5907024"/>
+            <a:ext cx="11311128" cy="438912"/>
           </a:xfrm>
           <a:prstGeom prst="roundRect">
             <a:avLst/>
@@ -32273,14 +33631,14 @@
       </p:sp>
       <p:sp>
         <p:nvSpPr>
-          <p:cNvPr id="8" name="TextBox 7"/>
+          <p:cNvPr id="9" name="TextBox 8"/>
           <p:cNvSpPr txBox="1"/>
           <p:nvPr/>
         </p:nvSpPr>
         <p:spPr>
           <a:xfrm>
-            <a:off x="612648" y="2103120"/>
-            <a:ext cx="3154680" cy="320040"/>
+            <a:off x="667512" y="5989320"/>
+            <a:ext cx="10844784" cy="246888"/>
           </a:xfrm>
           <a:prstGeom prst="rect">
             <a:avLst/>
@@ -32289,6 +33647,45 @@
         </p:spPr>
         <p:txBody>
           <a:bodyPr wrap="square" lIns="18288" rIns="18288" tIns="18288" bIns="18288" anchor="t">
+            <a:spAutoFit/>
+          </a:bodyPr>
+          <a:lstStyle/>
+          <a:p>
+            <a:pPr algn="ctr">
+              <a:spcAft>
+                <a:spcPts val="0"/>
+              </a:spcAft>
+            </a:pPr>
+            <a:r>
+              <a:rPr sz="1330" b="1" i="0">
+                <a:solidFill>
+                  <a:srgbClr val="082B55"/>
+                </a:solidFill>
+                <a:latin typeface="Arial"/>
+              </a:rPr>
+              <a:t>Interpretation: tissue structure dominates; FLT and GC are subtler. PCA is descriptive, so quantitative metrics determine validation.</a:t>
+            </a:r>
+          </a:p>
+        </p:txBody>
+      </p:sp>
+      <p:sp>
+        <p:nvSpPr>
+          <p:cNvPr id="10" name="TextBox 9"/>
+          <p:cNvSpPr txBox="1"/>
+          <p:nvPr/>
+        </p:nvSpPr>
+        <p:spPr>
+          <a:xfrm>
+            <a:off x="329184" y="6510528"/>
+            <a:ext cx="10972800" cy="173736"/>
+          </a:xfrm>
+          <a:prstGeom prst="rect">
+            <a:avLst/>
+          </a:prstGeom>
+          <a:noFill/>
+        </p:spPr>
+        <p:txBody>
+          <a:bodyPr wrap="square" lIns="18288" rIns="18288" tIns="18288" bIns="18288" anchor="ctr">
             <a:spAutoFit/>
           </a:bodyPr>
           <a:lstStyle/>
@@ -32299,1410 +33696,13 @@
               </a:spcAft>
             </a:pPr>
             <a:r>
-              <a:rPr sz="1700" b="1" i="0">
-                <a:solidFill>
-                  <a:srgbClr val="2D6496"/>
+              <a:rPr sz="720" b="0" i="0">
+                <a:solidFill>
+                  <a:srgbClr val="8A969E"/>
                 </a:solidFill>
                 <a:latin typeface="Arial"/>
               </a:rPr>
-              <a:t>ARCHS4 tissue probe</a:t>
-            </a:r>
-          </a:p>
-        </p:txBody>
-      </p:sp>
-      <p:sp>
-        <p:nvSpPr>
-          <p:cNvPr id="9" name="TextBox 8"/>
-          <p:cNvSpPr txBox="1"/>
-          <p:nvPr/>
-        </p:nvSpPr>
-        <p:spPr>
-          <a:xfrm>
-            <a:off x="621792" y="2487168"/>
-            <a:ext cx="3063240" cy="274320"/>
-          </a:xfrm>
-          <a:prstGeom prst="rect">
-            <a:avLst/>
-          </a:prstGeom>
-          <a:noFill/>
-        </p:spPr>
-        <p:txBody>
-          <a:bodyPr wrap="square" lIns="18288" rIns="18288" tIns="18288" bIns="18288" anchor="t">
-            <a:spAutoFit/>
-          </a:bodyPr>
-          <a:lstStyle/>
-          <a:p>
-            <a:pPr algn="l">
-              <a:spcAft>
-                <a:spcPts val="0"/>
-              </a:spcAft>
-            </a:pPr>
-            <a:r>
-              <a:rPr sz="1250" b="0" i="0">
-                <a:solidFill>
-                  <a:srgbClr val="59697A"/>
-                </a:solidFill>
-                <a:latin typeface="Arial"/>
-              </a:rPr>
-              <a:t>Balanced accuracy on held-out real profiles</a:t>
-            </a:r>
-          </a:p>
-        </p:txBody>
-      </p:sp>
-      <p:sp>
-        <p:nvSpPr>
-          <p:cNvPr id="10" name="Rectangle 9"/>
-          <p:cNvSpPr/>
-          <p:nvPr/>
-        </p:nvSpPr>
-        <p:spPr>
-          <a:xfrm>
-            <a:off x="950976" y="3436845"/>
-            <a:ext cx="786384" cy="1299746"/>
-          </a:xfrm>
-          <a:prstGeom prst="rect">
-            <a:avLst/>
-          </a:prstGeom>
-          <a:solidFill>
-            <a:srgbClr val="8A969E"/>
-          </a:solidFill>
-          <a:ln>
-            <a:noFill/>
-          </a:ln>
-        </p:spPr>
-        <p:style>
-          <a:lnRef idx="1">
-            <a:schemeClr val="accent1"/>
-          </a:lnRef>
-          <a:fillRef idx="3">
-            <a:schemeClr val="accent1"/>
-          </a:fillRef>
-          <a:effectRef idx="2">
-            <a:schemeClr val="accent1"/>
-          </a:effectRef>
-          <a:fontRef idx="minor">
-            <a:schemeClr val="lt1"/>
-          </a:fontRef>
-        </p:style>
-        <p:txBody>
-          <a:bodyPr rtlCol="0" anchor="ctr"/>
-          <a:lstStyle/>
-          <a:p>
-            <a:pPr algn="ctr"/>
-          </a:p>
-        </p:txBody>
-      </p:sp>
-      <p:sp>
-        <p:nvSpPr>
-          <p:cNvPr id="11" name="TextBox 10"/>
-          <p:cNvSpPr txBox="1"/>
-          <p:nvPr/>
-        </p:nvSpPr>
-        <p:spPr>
-          <a:xfrm>
-            <a:off x="923544" y="3107661"/>
-            <a:ext cx="868680" cy="274320"/>
-          </a:xfrm>
-          <a:prstGeom prst="rect">
-            <a:avLst/>
-          </a:prstGeom>
-          <a:noFill/>
-        </p:spPr>
-        <p:txBody>
-          <a:bodyPr wrap="square" lIns="18288" rIns="18288" tIns="18288" bIns="18288" anchor="t">
-            <a:spAutoFit/>
-          </a:bodyPr>
-          <a:lstStyle/>
-          <a:p>
-            <a:pPr algn="ctr">
-              <a:spcAft>
-                <a:spcPts val="0"/>
-              </a:spcAft>
-            </a:pPr>
-            <a:r>
-              <a:rPr sz="1600" b="1" i="0">
-                <a:solidFill>
-                  <a:srgbClr val="082B55"/>
-                </a:solidFill>
-                <a:latin typeface="Arial"/>
-              </a:rPr>
-              <a:t>0.781</a:t>
-            </a:r>
-          </a:p>
-        </p:txBody>
-      </p:sp>
-      <p:sp>
-        <p:nvSpPr>
-          <p:cNvPr id="12" name="TextBox 11"/>
-          <p:cNvSpPr txBox="1"/>
-          <p:nvPr/>
-        </p:nvSpPr>
-        <p:spPr>
-          <a:xfrm>
-            <a:off x="676656" y="4809744"/>
-            <a:ext cx="1325880" cy="365760"/>
-          </a:xfrm>
-          <a:prstGeom prst="rect">
-            <a:avLst/>
-          </a:prstGeom>
-          <a:noFill/>
-        </p:spPr>
-        <p:txBody>
-          <a:bodyPr wrap="square" lIns="18288" rIns="18288" tIns="18288" bIns="18288" anchor="t">
-            <a:spAutoFit/>
-          </a:bodyPr>
-          <a:lstStyle/>
-          <a:p>
-            <a:pPr algn="ctr">
-              <a:spcAft>
-                <a:spcPts val="0"/>
-              </a:spcAft>
-            </a:pPr>
-            <a:r>
-              <a:rPr sz="1250" b="0" i="0">
-                <a:solidFill>
-                  <a:srgbClr val="263746"/>
-                </a:solidFill>
-                <a:latin typeface="Arial"/>
-              </a:rPr>
-              <a:t>Real-trained</a:t>
-            </a:r>
-          </a:p>
-        </p:txBody>
-      </p:sp>
-      <p:sp>
-        <p:nvSpPr>
-          <p:cNvPr id="13" name="Rectangle 12"/>
-          <p:cNvSpPr/>
-          <p:nvPr/>
-        </p:nvSpPr>
-        <p:spPr>
-          <a:xfrm>
-            <a:off x="2523744" y="3436845"/>
-            <a:ext cx="786384" cy="1299746"/>
-          </a:xfrm>
-          <a:prstGeom prst="rect">
-            <a:avLst/>
-          </a:prstGeom>
-          <a:solidFill>
-            <a:srgbClr val="178681"/>
-          </a:solidFill>
-          <a:ln>
-            <a:noFill/>
-          </a:ln>
-        </p:spPr>
-        <p:style>
-          <a:lnRef idx="1">
-            <a:schemeClr val="accent1"/>
-          </a:lnRef>
-          <a:fillRef idx="3">
-            <a:schemeClr val="accent1"/>
-          </a:fillRef>
-          <a:effectRef idx="2">
-            <a:schemeClr val="accent1"/>
-          </a:effectRef>
-          <a:fontRef idx="minor">
-            <a:schemeClr val="lt1"/>
-          </a:fontRef>
-        </p:style>
-        <p:txBody>
-          <a:bodyPr rtlCol="0" anchor="ctr"/>
-          <a:lstStyle/>
-          <a:p>
-            <a:pPr algn="ctr"/>
-          </a:p>
-        </p:txBody>
-      </p:sp>
-      <p:sp>
-        <p:nvSpPr>
-          <p:cNvPr id="14" name="TextBox 13"/>
-          <p:cNvSpPr txBox="1"/>
-          <p:nvPr/>
-        </p:nvSpPr>
-        <p:spPr>
-          <a:xfrm>
-            <a:off x="2496312" y="3107661"/>
-            <a:ext cx="868680" cy="274320"/>
-          </a:xfrm>
-          <a:prstGeom prst="rect">
-            <a:avLst/>
-          </a:prstGeom>
-          <a:noFill/>
-        </p:spPr>
-        <p:txBody>
-          <a:bodyPr wrap="square" lIns="18288" rIns="18288" tIns="18288" bIns="18288" anchor="t">
-            <a:spAutoFit/>
-          </a:bodyPr>
-          <a:lstStyle/>
-          <a:p>
-            <a:pPr algn="ctr">
-              <a:spcAft>
-                <a:spcPts val="0"/>
-              </a:spcAft>
-            </a:pPr>
-            <a:r>
-              <a:rPr sz="1600" b="1" i="0">
-                <a:solidFill>
-                  <a:srgbClr val="082B55"/>
-                </a:solidFill>
-                <a:latin typeface="Arial"/>
-              </a:rPr>
-              <a:t>0.781</a:t>
-            </a:r>
-          </a:p>
-        </p:txBody>
-      </p:sp>
-      <p:sp>
-        <p:nvSpPr>
-          <p:cNvPr id="15" name="TextBox 14"/>
-          <p:cNvSpPr txBox="1"/>
-          <p:nvPr/>
-        </p:nvSpPr>
-        <p:spPr>
-          <a:xfrm>
-            <a:off x="2249424" y="4809744"/>
-            <a:ext cx="1325880" cy="365760"/>
-          </a:xfrm>
-          <a:prstGeom prst="rect">
-            <a:avLst/>
-          </a:prstGeom>
-          <a:noFill/>
-        </p:spPr>
-        <p:txBody>
-          <a:bodyPr wrap="square" lIns="18288" rIns="18288" tIns="18288" bIns="18288" anchor="t">
-            <a:spAutoFit/>
-          </a:bodyPr>
-          <a:lstStyle/>
-          <a:p>
-            <a:pPr algn="ctr">
-              <a:spcAft>
-                <a:spcPts val="0"/>
-              </a:spcAft>
-            </a:pPr>
-            <a:r>
-              <a:rPr sz="1250" b="0" i="0">
-                <a:solidFill>
-                  <a:srgbClr val="263746"/>
-                </a:solidFill>
-                <a:latin typeface="Arial"/>
-              </a:rPr>
-              <a:t>Synthetic-trained</a:t>
-            </a:r>
-          </a:p>
-        </p:txBody>
-      </p:sp>
-      <p:sp>
-        <p:nvSpPr>
-          <p:cNvPr id="16" name="Rectangle 15"/>
-          <p:cNvSpPr/>
-          <p:nvPr/>
-        </p:nvSpPr>
-        <p:spPr>
-          <a:xfrm>
-            <a:off x="749808" y="4736592"/>
-            <a:ext cx="2880360" cy="13716"/>
-          </a:xfrm>
-          <a:prstGeom prst="rect">
-            <a:avLst/>
-          </a:prstGeom>
-          <a:solidFill>
-            <a:srgbClr val="A9B5BC"/>
-          </a:solidFill>
-          <a:ln>
-            <a:noFill/>
-          </a:ln>
-        </p:spPr>
-        <p:style>
-          <a:lnRef idx="1">
-            <a:schemeClr val="accent1"/>
-          </a:lnRef>
-          <a:fillRef idx="3">
-            <a:schemeClr val="accent1"/>
-          </a:fillRef>
-          <a:effectRef idx="2">
-            <a:schemeClr val="accent1"/>
-          </a:effectRef>
-          <a:fontRef idx="minor">
-            <a:schemeClr val="lt1"/>
-          </a:fontRef>
-        </p:style>
-        <p:txBody>
-          <a:bodyPr rtlCol="0" anchor="ctr"/>
-          <a:lstStyle/>
-          <a:p>
-            <a:pPr algn="ctr"/>
-          </a:p>
-        </p:txBody>
-      </p:sp>
-      <p:sp>
-        <p:nvSpPr>
-          <p:cNvPr id="17" name="Rounded Rectangle 16"/>
-          <p:cNvSpPr/>
-          <p:nvPr/>
-        </p:nvSpPr>
-        <p:spPr>
-          <a:xfrm>
-            <a:off x="4315968" y="1847088"/>
-            <a:ext cx="7525512" cy="3401568"/>
-          </a:xfrm>
-          <a:prstGeom prst="roundRect">
-            <a:avLst/>
-          </a:prstGeom>
-          <a:solidFill>
-            <a:srgbClr val="FFFFFF"/>
-          </a:solidFill>
-          <a:ln w="10160">
-            <a:solidFill>
-              <a:srgbClr val="DDE4E8"/>
-            </a:solidFill>
-          </a:ln>
-        </p:spPr>
-        <p:style>
-          <a:lnRef idx="1">
-            <a:schemeClr val="accent1"/>
-          </a:lnRef>
-          <a:fillRef idx="3">
-            <a:schemeClr val="accent1"/>
-          </a:fillRef>
-          <a:effectRef idx="2">
-            <a:schemeClr val="accent1"/>
-          </a:effectRef>
-          <a:fontRef idx="minor">
-            <a:schemeClr val="lt1"/>
-          </a:fontRef>
-        </p:style>
-        <p:txBody>
-          <a:bodyPr rtlCol="0" anchor="ctr"/>
-          <a:lstStyle/>
-          <a:p>
-            <a:pPr algn="ctr"/>
-          </a:p>
-        </p:txBody>
-      </p:sp>
-      <p:sp>
-        <p:nvSpPr>
-          <p:cNvPr id="18" name="TextBox 17"/>
-          <p:cNvSpPr txBox="1"/>
-          <p:nvPr/>
-        </p:nvSpPr>
-        <p:spPr>
-          <a:xfrm>
-            <a:off x="4599432" y="2075688"/>
-            <a:ext cx="1417320" cy="256032"/>
-          </a:xfrm>
-          <a:prstGeom prst="rect">
-            <a:avLst/>
-          </a:prstGeom>
-          <a:noFill/>
-        </p:spPr>
-        <p:txBody>
-          <a:bodyPr wrap="square" lIns="18288" rIns="18288" tIns="18288" bIns="18288" anchor="t">
-            <a:spAutoFit/>
-          </a:bodyPr>
-          <a:lstStyle/>
-          <a:p>
-            <a:pPr algn="l">
-              <a:spcAft>
-                <a:spcPts val="0"/>
-              </a:spcAft>
-            </a:pPr>
-            <a:r>
-              <a:rPr sz="1250" b="1" i="0">
-                <a:solidFill>
-                  <a:srgbClr val="59697A"/>
-                </a:solidFill>
-                <a:latin typeface="Arial"/>
-              </a:rPr>
-              <a:t>Metric</a:t>
-            </a:r>
-          </a:p>
-        </p:txBody>
-      </p:sp>
-      <p:sp>
-        <p:nvSpPr>
-          <p:cNvPr id="19" name="TextBox 18"/>
-          <p:cNvSpPr txBox="1"/>
-          <p:nvPr/>
-        </p:nvSpPr>
-        <p:spPr>
-          <a:xfrm>
-            <a:off x="6537960" y="2075688"/>
-            <a:ext cx="1234440" cy="256032"/>
-          </a:xfrm>
-          <a:prstGeom prst="rect">
-            <a:avLst/>
-          </a:prstGeom>
-          <a:noFill/>
-        </p:spPr>
-        <p:txBody>
-          <a:bodyPr wrap="square" lIns="18288" rIns="18288" tIns="18288" bIns="18288" anchor="t">
-            <a:spAutoFit/>
-          </a:bodyPr>
-          <a:lstStyle/>
-          <a:p>
-            <a:pPr algn="ctr">
-              <a:spcAft>
-                <a:spcPts val="0"/>
-              </a:spcAft>
-            </a:pPr>
-            <a:r>
-              <a:rPr sz="1250" b="1" i="0">
-                <a:solidFill>
-                  <a:srgbClr val="D96552"/>
-                </a:solidFill>
-                <a:latin typeface="Arial"/>
-              </a:rPr>
-              <a:t>WGAN-GP</a:t>
-            </a:r>
-          </a:p>
-        </p:txBody>
-      </p:sp>
-      <p:sp>
-        <p:nvSpPr>
-          <p:cNvPr id="20" name="TextBox 19"/>
-          <p:cNvSpPr txBox="1"/>
-          <p:nvPr/>
-        </p:nvSpPr>
-        <p:spPr>
-          <a:xfrm>
-            <a:off x="8257031" y="2075688"/>
-            <a:ext cx="1234440" cy="256032"/>
-          </a:xfrm>
-          <a:prstGeom prst="rect">
-            <a:avLst/>
-          </a:prstGeom>
-          <a:noFill/>
-        </p:spPr>
-        <p:txBody>
-          <a:bodyPr wrap="square" lIns="18288" rIns="18288" tIns="18288" bIns="18288" anchor="t">
-            <a:spAutoFit/>
-          </a:bodyPr>
-          <a:lstStyle/>
-          <a:p>
-            <a:pPr algn="ctr">
-              <a:spcAft>
-                <a:spcPts val="0"/>
-              </a:spcAft>
-            </a:pPr>
-            <a:r>
-              <a:rPr sz="1250" b="1" i="0">
-                <a:solidFill>
-                  <a:srgbClr val="178681"/>
-                </a:solidFill>
-                <a:latin typeface="Arial"/>
-              </a:rPr>
-              <a:t>DDIM</a:t>
-            </a:r>
-          </a:p>
-        </p:txBody>
-      </p:sp>
-      <p:sp>
-        <p:nvSpPr>
-          <p:cNvPr id="21" name="TextBox 20"/>
-          <p:cNvSpPr txBox="1"/>
-          <p:nvPr/>
-        </p:nvSpPr>
-        <p:spPr>
-          <a:xfrm>
-            <a:off x="9802368" y="2075688"/>
-            <a:ext cx="1627632" cy="256032"/>
-          </a:xfrm>
-          <a:prstGeom prst="rect">
-            <a:avLst/>
-          </a:prstGeom>
-          <a:noFill/>
-        </p:spPr>
-        <p:txBody>
-          <a:bodyPr wrap="square" lIns="18288" rIns="18288" tIns="18288" bIns="18288" anchor="t">
-            <a:spAutoFit/>
-          </a:bodyPr>
-          <a:lstStyle/>
-          <a:p>
-            <a:pPr algn="l">
-              <a:spcAft>
-                <a:spcPts val="0"/>
-              </a:spcAft>
-            </a:pPr>
-            <a:r>
-              <a:rPr sz="1250" b="1" i="0">
-                <a:solidFill>
-                  <a:srgbClr val="59697A"/>
-                </a:solidFill>
-                <a:latin typeface="Arial"/>
-              </a:rPr>
-              <a:t>Reading</a:t>
-            </a:r>
-          </a:p>
-        </p:txBody>
-      </p:sp>
-      <p:sp>
-        <p:nvSpPr>
-          <p:cNvPr id="22" name="Rectangle 21"/>
-          <p:cNvSpPr/>
-          <p:nvPr/>
-        </p:nvSpPr>
-        <p:spPr>
-          <a:xfrm>
-            <a:off x="4517136" y="2478024"/>
-            <a:ext cx="7059168" cy="484632"/>
-          </a:xfrm>
-          <a:prstGeom prst="rect">
-            <a:avLst/>
-          </a:prstGeom>
-          <a:solidFill>
-            <a:srgbClr val="F5F7F8"/>
-          </a:solidFill>
-          <a:ln>
-            <a:noFill/>
-          </a:ln>
-        </p:spPr>
-        <p:style>
-          <a:lnRef idx="1">
-            <a:schemeClr val="accent1"/>
-          </a:lnRef>
-          <a:fillRef idx="3">
-            <a:schemeClr val="accent1"/>
-          </a:fillRef>
-          <a:effectRef idx="2">
-            <a:schemeClr val="accent1"/>
-          </a:effectRef>
-          <a:fontRef idx="minor">
-            <a:schemeClr val="lt1"/>
-          </a:fontRef>
-        </p:style>
-        <p:txBody>
-          <a:bodyPr rtlCol="0" anchor="ctr"/>
-          <a:lstStyle/>
-          <a:p>
-            <a:pPr algn="ctr"/>
-          </a:p>
-        </p:txBody>
-      </p:sp>
-      <p:sp>
-        <p:nvSpPr>
-          <p:cNvPr id="23" name="TextBox 22"/>
-          <p:cNvSpPr txBox="1"/>
-          <p:nvPr/>
-        </p:nvSpPr>
-        <p:spPr>
-          <a:xfrm>
-            <a:off x="4599432" y="2542032"/>
-            <a:ext cx="1783080" cy="310896"/>
-          </a:xfrm>
-          <a:prstGeom prst="rect">
-            <a:avLst/>
-          </a:prstGeom>
-          <a:noFill/>
-        </p:spPr>
-        <p:txBody>
-          <a:bodyPr wrap="square" lIns="18288" rIns="18288" tIns="18288" bIns="18288" anchor="t">
-            <a:spAutoFit/>
-          </a:bodyPr>
-          <a:lstStyle/>
-          <a:p>
-            <a:pPr algn="l">
-              <a:spcAft>
-                <a:spcPts val="0"/>
-              </a:spcAft>
-            </a:pPr>
-            <a:r>
-              <a:rPr sz="1400" b="0" i="0">
-                <a:solidFill>
-                  <a:srgbClr val="263746"/>
-                </a:solidFill>
-                <a:latin typeface="Arial"/>
-              </a:rPr>
-              <a:t>Correlation</a:t>
-            </a:r>
-          </a:p>
-        </p:txBody>
-      </p:sp>
-      <p:sp>
-        <p:nvSpPr>
-          <p:cNvPr id="24" name="TextBox 23"/>
-          <p:cNvSpPr txBox="1"/>
-          <p:nvPr/>
-        </p:nvSpPr>
-        <p:spPr>
-          <a:xfrm>
-            <a:off x="6519672" y="2542032"/>
-            <a:ext cx="1261872" cy="310896"/>
-          </a:xfrm>
-          <a:prstGeom prst="rect">
-            <a:avLst/>
-          </a:prstGeom>
-          <a:noFill/>
-        </p:spPr>
-        <p:txBody>
-          <a:bodyPr wrap="square" lIns="18288" rIns="18288" tIns="18288" bIns="18288" anchor="t">
-            <a:spAutoFit/>
-          </a:bodyPr>
-          <a:lstStyle/>
-          <a:p>
-            <a:pPr algn="ctr">
-              <a:spcAft>
-                <a:spcPts val="0"/>
-              </a:spcAft>
-            </a:pPr>
-            <a:r>
-              <a:rPr sz="1600" b="1" i="0">
-                <a:solidFill>
-                  <a:srgbClr val="D96552"/>
-                </a:solidFill>
-                <a:latin typeface="Arial"/>
-              </a:rPr>
-              <a:t>0.976</a:t>
-            </a:r>
-          </a:p>
-        </p:txBody>
-      </p:sp>
-      <p:sp>
-        <p:nvSpPr>
-          <p:cNvPr id="25" name="TextBox 24"/>
-          <p:cNvSpPr txBox="1"/>
-          <p:nvPr/>
-        </p:nvSpPr>
-        <p:spPr>
-          <a:xfrm>
-            <a:off x="8238744" y="2542032"/>
-            <a:ext cx="1261872" cy="310896"/>
-          </a:xfrm>
-          <a:prstGeom prst="rect">
-            <a:avLst/>
-          </a:prstGeom>
-          <a:noFill/>
-        </p:spPr>
-        <p:txBody>
-          <a:bodyPr wrap="square" lIns="18288" rIns="18288" tIns="18288" bIns="18288" anchor="t">
-            <a:spAutoFit/>
-          </a:bodyPr>
-          <a:lstStyle/>
-          <a:p>
-            <a:pPr algn="ctr">
-              <a:spcAft>
-                <a:spcPts val="0"/>
-              </a:spcAft>
-            </a:pPr>
-            <a:r>
-              <a:rPr sz="1600" b="1" i="0">
-                <a:solidFill>
-                  <a:srgbClr val="178681"/>
-                </a:solidFill>
-                <a:latin typeface="Arial"/>
-              </a:rPr>
-              <a:t>0.974</a:t>
-            </a:r>
-          </a:p>
-        </p:txBody>
-      </p:sp>
-      <p:sp>
-        <p:nvSpPr>
-          <p:cNvPr id="26" name="TextBox 25"/>
-          <p:cNvSpPr txBox="1"/>
-          <p:nvPr/>
-        </p:nvSpPr>
-        <p:spPr>
-          <a:xfrm>
-            <a:off x="9820656" y="2542032"/>
-            <a:ext cx="1481328" cy="310896"/>
-          </a:xfrm>
-          <a:prstGeom prst="rect">
-            <a:avLst/>
-          </a:prstGeom>
-          <a:noFill/>
-        </p:spPr>
-        <p:txBody>
-          <a:bodyPr wrap="square" lIns="18288" rIns="18288" tIns="18288" bIns="18288" anchor="t">
-            <a:spAutoFit/>
-          </a:bodyPr>
-          <a:lstStyle/>
-          <a:p>
-            <a:pPr algn="l">
-              <a:spcAft>
-                <a:spcPts val="0"/>
-              </a:spcAft>
-            </a:pPr>
-            <a:r>
-              <a:rPr sz="1350" b="0" i="0">
-                <a:solidFill>
-                  <a:srgbClr val="59697A"/>
-                </a:solidFill>
-                <a:latin typeface="Arial"/>
-              </a:rPr>
-              <a:t>similar</a:t>
-            </a:r>
-          </a:p>
-        </p:txBody>
-      </p:sp>
-      <p:sp>
-        <p:nvSpPr>
-          <p:cNvPr id="27" name="TextBox 26"/>
-          <p:cNvSpPr txBox="1"/>
-          <p:nvPr/>
-        </p:nvSpPr>
-        <p:spPr>
-          <a:xfrm>
-            <a:off x="4599432" y="3118103"/>
-            <a:ext cx="1783080" cy="310896"/>
-          </a:xfrm>
-          <a:prstGeom prst="rect">
-            <a:avLst/>
-          </a:prstGeom>
-          <a:noFill/>
-        </p:spPr>
-        <p:txBody>
-          <a:bodyPr wrap="square" lIns="18288" rIns="18288" tIns="18288" bIns="18288" anchor="t">
-            <a:spAutoFit/>
-          </a:bodyPr>
-          <a:lstStyle/>
-          <a:p>
-            <a:pPr algn="l">
-              <a:spcAft>
-                <a:spcPts val="0"/>
-              </a:spcAft>
-            </a:pPr>
-            <a:r>
-              <a:rPr sz="1400" b="0" i="0">
-                <a:solidFill>
-                  <a:srgbClr val="263746"/>
-                </a:solidFill>
-                <a:latin typeface="Arial"/>
-              </a:rPr>
-              <a:t>F1</a:t>
-            </a:r>
-          </a:p>
-        </p:txBody>
-      </p:sp>
-      <p:sp>
-        <p:nvSpPr>
-          <p:cNvPr id="28" name="TextBox 27"/>
-          <p:cNvSpPr txBox="1"/>
-          <p:nvPr/>
-        </p:nvSpPr>
-        <p:spPr>
-          <a:xfrm>
-            <a:off x="6519672" y="3118103"/>
-            <a:ext cx="1261872" cy="310896"/>
-          </a:xfrm>
-          <a:prstGeom prst="rect">
-            <a:avLst/>
-          </a:prstGeom>
-          <a:noFill/>
-        </p:spPr>
-        <p:txBody>
-          <a:bodyPr wrap="square" lIns="18288" rIns="18288" tIns="18288" bIns="18288" anchor="t">
-            <a:spAutoFit/>
-          </a:bodyPr>
-          <a:lstStyle/>
-          <a:p>
-            <a:pPr algn="ctr">
-              <a:spcAft>
-                <a:spcPts val="0"/>
-              </a:spcAft>
-            </a:pPr>
-            <a:r>
-              <a:rPr sz="1600" b="1" i="0">
-                <a:solidFill>
-                  <a:srgbClr val="D96552"/>
-                </a:solidFill>
-                <a:latin typeface="Arial"/>
-              </a:rPr>
-              <a:t>0.985</a:t>
-            </a:r>
-          </a:p>
-        </p:txBody>
-      </p:sp>
-      <p:sp>
-        <p:nvSpPr>
-          <p:cNvPr id="29" name="TextBox 28"/>
-          <p:cNvSpPr txBox="1"/>
-          <p:nvPr/>
-        </p:nvSpPr>
-        <p:spPr>
-          <a:xfrm>
-            <a:off x="8238744" y="3118103"/>
-            <a:ext cx="1261872" cy="310896"/>
-          </a:xfrm>
-          <a:prstGeom prst="rect">
-            <a:avLst/>
-          </a:prstGeom>
-          <a:noFill/>
-        </p:spPr>
-        <p:txBody>
-          <a:bodyPr wrap="square" lIns="18288" rIns="18288" tIns="18288" bIns="18288" anchor="t">
-            <a:spAutoFit/>
-          </a:bodyPr>
-          <a:lstStyle/>
-          <a:p>
-            <a:pPr algn="ctr">
-              <a:spcAft>
-                <a:spcPts val="0"/>
-              </a:spcAft>
-            </a:pPr>
-            <a:r>
-              <a:rPr sz="1600" b="1" i="0">
-                <a:solidFill>
-                  <a:srgbClr val="178681"/>
-                </a:solidFill>
-                <a:latin typeface="Arial"/>
-              </a:rPr>
-              <a:t>0.997</a:t>
-            </a:r>
-          </a:p>
-        </p:txBody>
-      </p:sp>
-      <p:sp>
-        <p:nvSpPr>
-          <p:cNvPr id="30" name="TextBox 29"/>
-          <p:cNvSpPr txBox="1"/>
-          <p:nvPr/>
-        </p:nvSpPr>
-        <p:spPr>
-          <a:xfrm>
-            <a:off x="9820656" y="3118103"/>
-            <a:ext cx="1481328" cy="310896"/>
-          </a:xfrm>
-          <a:prstGeom prst="rect">
-            <a:avLst/>
-          </a:prstGeom>
-          <a:noFill/>
-        </p:spPr>
-        <p:txBody>
-          <a:bodyPr wrap="square" lIns="18288" rIns="18288" tIns="18288" bIns="18288" anchor="t">
-            <a:spAutoFit/>
-          </a:bodyPr>
-          <a:lstStyle/>
-          <a:p>
-            <a:pPr algn="l">
-              <a:spcAft>
-                <a:spcPts val="0"/>
-              </a:spcAft>
-            </a:pPr>
-            <a:r>
-              <a:rPr sz="1350" b="0" i="0">
-                <a:solidFill>
-                  <a:srgbClr val="59697A"/>
-                </a:solidFill>
-                <a:latin typeface="Arial"/>
-              </a:rPr>
-              <a:t>higher</a:t>
-            </a:r>
-          </a:p>
-        </p:txBody>
-      </p:sp>
-      <p:sp>
-        <p:nvSpPr>
-          <p:cNvPr id="31" name="Rectangle 30"/>
-          <p:cNvSpPr/>
-          <p:nvPr/>
-        </p:nvSpPr>
-        <p:spPr>
-          <a:xfrm>
-            <a:off x="4517136" y="3630168"/>
-            <a:ext cx="7059168" cy="484632"/>
-          </a:xfrm>
-          <a:prstGeom prst="rect">
-            <a:avLst/>
-          </a:prstGeom>
-          <a:solidFill>
-            <a:srgbClr val="F5F7F8"/>
-          </a:solidFill>
-          <a:ln>
-            <a:noFill/>
-          </a:ln>
-        </p:spPr>
-        <p:style>
-          <a:lnRef idx="1">
-            <a:schemeClr val="accent1"/>
-          </a:lnRef>
-          <a:fillRef idx="3">
-            <a:schemeClr val="accent1"/>
-          </a:fillRef>
-          <a:effectRef idx="2">
-            <a:schemeClr val="accent1"/>
-          </a:effectRef>
-          <a:fontRef idx="minor">
-            <a:schemeClr val="lt1"/>
-          </a:fontRef>
-        </p:style>
-        <p:txBody>
-          <a:bodyPr rtlCol="0" anchor="ctr"/>
-          <a:lstStyle/>
-          <a:p>
-            <a:pPr algn="ctr"/>
-          </a:p>
-        </p:txBody>
-      </p:sp>
-      <p:sp>
-        <p:nvSpPr>
-          <p:cNvPr id="32" name="TextBox 31"/>
-          <p:cNvSpPr txBox="1"/>
-          <p:nvPr/>
-        </p:nvSpPr>
-        <p:spPr>
-          <a:xfrm>
-            <a:off x="4599432" y="3694176"/>
-            <a:ext cx="1783080" cy="310896"/>
-          </a:xfrm>
-          <a:prstGeom prst="rect">
-            <a:avLst/>
-          </a:prstGeom>
-          <a:noFill/>
-        </p:spPr>
-        <p:txBody>
-          <a:bodyPr wrap="square" lIns="18288" rIns="18288" tIns="18288" bIns="18288" anchor="t">
-            <a:spAutoFit/>
-          </a:bodyPr>
-          <a:lstStyle/>
-          <a:p>
-            <a:pPr algn="l">
-              <a:spcAft>
-                <a:spcPts val="0"/>
-              </a:spcAft>
-            </a:pPr>
-            <a:r>
-              <a:rPr sz="1400" b="1" i="0">
-                <a:solidFill>
-                  <a:srgbClr val="263746"/>
-                </a:solidFill>
-                <a:latin typeface="Arial"/>
-              </a:rPr>
-              <a:t>Adversarial accuracy</a:t>
-            </a:r>
-          </a:p>
-        </p:txBody>
-      </p:sp>
-      <p:sp>
-        <p:nvSpPr>
-          <p:cNvPr id="33" name="TextBox 32"/>
-          <p:cNvSpPr txBox="1"/>
-          <p:nvPr/>
-        </p:nvSpPr>
-        <p:spPr>
-          <a:xfrm>
-            <a:off x="6519672" y="3694176"/>
-            <a:ext cx="1261872" cy="310896"/>
-          </a:xfrm>
-          <a:prstGeom prst="rect">
-            <a:avLst/>
-          </a:prstGeom>
-          <a:noFill/>
-        </p:spPr>
-        <p:txBody>
-          <a:bodyPr wrap="square" lIns="18288" rIns="18288" tIns="18288" bIns="18288" anchor="t">
-            <a:spAutoFit/>
-          </a:bodyPr>
-          <a:lstStyle/>
-          <a:p>
-            <a:pPr algn="ctr">
-              <a:spcAft>
-                <a:spcPts val="0"/>
-              </a:spcAft>
-            </a:pPr>
-            <a:r>
-              <a:rPr sz="1600" b="1" i="0">
-                <a:solidFill>
-                  <a:srgbClr val="D96552"/>
-                </a:solidFill>
-                <a:latin typeface="Arial"/>
-              </a:rPr>
-              <a:t>0.636</a:t>
-            </a:r>
-          </a:p>
-        </p:txBody>
-      </p:sp>
-      <p:sp>
-        <p:nvSpPr>
-          <p:cNvPr id="34" name="TextBox 33"/>
-          <p:cNvSpPr txBox="1"/>
-          <p:nvPr/>
-        </p:nvSpPr>
-        <p:spPr>
-          <a:xfrm>
-            <a:off x="8238744" y="3694176"/>
-            <a:ext cx="1261872" cy="310896"/>
-          </a:xfrm>
-          <a:prstGeom prst="rect">
-            <a:avLst/>
-          </a:prstGeom>
-          <a:noFill/>
-        </p:spPr>
-        <p:txBody>
-          <a:bodyPr wrap="square" lIns="18288" rIns="18288" tIns="18288" bIns="18288" anchor="t">
-            <a:spAutoFit/>
-          </a:bodyPr>
-          <a:lstStyle/>
-          <a:p>
-            <a:pPr algn="ctr">
-              <a:spcAft>
-                <a:spcPts val="0"/>
-              </a:spcAft>
-            </a:pPr>
-            <a:r>
-              <a:rPr sz="1600" b="1" i="0">
-                <a:solidFill>
-                  <a:srgbClr val="178681"/>
-                </a:solidFill>
-                <a:latin typeface="Arial"/>
-              </a:rPr>
-              <a:t>0.475</a:t>
-            </a:r>
-          </a:p>
-        </p:txBody>
-      </p:sp>
-      <p:sp>
-        <p:nvSpPr>
-          <p:cNvPr id="35" name="TextBox 34"/>
-          <p:cNvSpPr txBox="1"/>
-          <p:nvPr/>
-        </p:nvSpPr>
-        <p:spPr>
-          <a:xfrm>
-            <a:off x="9820656" y="3694176"/>
-            <a:ext cx="1481328" cy="310896"/>
-          </a:xfrm>
-          <a:prstGeom prst="rect">
-            <a:avLst/>
-          </a:prstGeom>
-          <a:noFill/>
-        </p:spPr>
-        <p:txBody>
-          <a:bodyPr wrap="square" lIns="18288" rIns="18288" tIns="18288" bIns="18288" anchor="t">
-            <a:spAutoFit/>
-          </a:bodyPr>
-          <a:lstStyle/>
-          <a:p>
-            <a:pPr algn="l">
-              <a:spcAft>
-                <a:spcPts val="0"/>
-              </a:spcAft>
-            </a:pPr>
-            <a:r>
-              <a:rPr sz="1350" b="0" i="0">
-                <a:solidFill>
-                  <a:srgbClr val="59697A"/>
-                </a:solidFill>
-                <a:latin typeface="Arial"/>
-              </a:rPr>
-              <a:t>closer to 0.5</a:t>
-            </a:r>
-          </a:p>
-        </p:txBody>
-      </p:sp>
-      <p:sp>
-        <p:nvSpPr>
-          <p:cNvPr id="36" name="TextBox 35"/>
-          <p:cNvSpPr txBox="1"/>
-          <p:nvPr/>
-        </p:nvSpPr>
-        <p:spPr>
-          <a:xfrm>
-            <a:off x="4599432" y="4270248"/>
-            <a:ext cx="1783080" cy="310896"/>
-          </a:xfrm>
-          <a:prstGeom prst="rect">
-            <a:avLst/>
-          </a:prstGeom>
-          <a:noFill/>
-        </p:spPr>
-        <p:txBody>
-          <a:bodyPr wrap="square" lIns="18288" rIns="18288" tIns="18288" bIns="18288" anchor="t">
-            <a:spAutoFit/>
-          </a:bodyPr>
-          <a:lstStyle/>
-          <a:p>
-            <a:pPr algn="l">
-              <a:spcAft>
-                <a:spcPts val="0"/>
-              </a:spcAft>
-            </a:pPr>
-            <a:r>
-              <a:rPr sz="1400" b="1" i="0">
-                <a:solidFill>
-                  <a:srgbClr val="263746"/>
-                </a:solidFill>
-                <a:latin typeface="Arial"/>
-              </a:rPr>
-              <a:t>FD / real P95</a:t>
-            </a:r>
-          </a:p>
-        </p:txBody>
-      </p:sp>
-      <p:sp>
-        <p:nvSpPr>
-          <p:cNvPr id="37" name="TextBox 36"/>
-          <p:cNvSpPr txBox="1"/>
-          <p:nvPr/>
-        </p:nvSpPr>
-        <p:spPr>
-          <a:xfrm>
-            <a:off x="6519672" y="4270248"/>
-            <a:ext cx="1261872" cy="310896"/>
-          </a:xfrm>
-          <a:prstGeom prst="rect">
-            <a:avLst/>
-          </a:prstGeom>
-          <a:noFill/>
-        </p:spPr>
-        <p:txBody>
-          <a:bodyPr wrap="square" lIns="18288" rIns="18288" tIns="18288" bIns="18288" anchor="t">
-            <a:spAutoFit/>
-          </a:bodyPr>
-          <a:lstStyle/>
-          <a:p>
-            <a:pPr algn="ctr">
-              <a:spcAft>
-                <a:spcPts val="0"/>
-              </a:spcAft>
-            </a:pPr>
-            <a:r>
-              <a:rPr sz="1600" b="1" i="0">
-                <a:solidFill>
-                  <a:srgbClr val="D96552"/>
-                </a:solidFill>
-                <a:latin typeface="Arial"/>
-              </a:rPr>
-              <a:t>0.144</a:t>
-            </a:r>
-          </a:p>
-        </p:txBody>
-      </p:sp>
-      <p:sp>
-        <p:nvSpPr>
-          <p:cNvPr id="38" name="TextBox 37"/>
-          <p:cNvSpPr txBox="1"/>
-          <p:nvPr/>
-        </p:nvSpPr>
-        <p:spPr>
-          <a:xfrm>
-            <a:off x="8238744" y="4270248"/>
-            <a:ext cx="1261872" cy="310896"/>
-          </a:xfrm>
-          <a:prstGeom prst="rect">
-            <a:avLst/>
-          </a:prstGeom>
-          <a:noFill/>
-        </p:spPr>
-        <p:txBody>
-          <a:bodyPr wrap="square" lIns="18288" rIns="18288" tIns="18288" bIns="18288" anchor="t">
-            <a:spAutoFit/>
-          </a:bodyPr>
-          <a:lstStyle/>
-          <a:p>
-            <a:pPr algn="ctr">
-              <a:spcAft>
-                <a:spcPts val="0"/>
-              </a:spcAft>
-            </a:pPr>
-            <a:r>
-              <a:rPr sz="1600" b="1" i="0">
-                <a:solidFill>
-                  <a:srgbClr val="178681"/>
-                </a:solidFill>
-                <a:latin typeface="Arial"/>
-              </a:rPr>
-              <a:t>0.074</a:t>
-            </a:r>
-          </a:p>
-        </p:txBody>
-      </p:sp>
-      <p:sp>
-        <p:nvSpPr>
-          <p:cNvPr id="39" name="TextBox 38"/>
-          <p:cNvSpPr txBox="1"/>
-          <p:nvPr/>
-        </p:nvSpPr>
-        <p:spPr>
-          <a:xfrm>
-            <a:off x="9820656" y="4270248"/>
-            <a:ext cx="1481328" cy="310896"/>
-          </a:xfrm>
-          <a:prstGeom prst="rect">
-            <a:avLst/>
-          </a:prstGeom>
-          <a:noFill/>
-        </p:spPr>
-        <p:txBody>
-          <a:bodyPr wrap="square" lIns="18288" rIns="18288" tIns="18288" bIns="18288" anchor="t">
-            <a:spAutoFit/>
-          </a:bodyPr>
-          <a:lstStyle/>
-          <a:p>
-            <a:pPr algn="l">
-              <a:spcAft>
-                <a:spcPts val="0"/>
-              </a:spcAft>
-            </a:pPr>
-            <a:r>
-              <a:rPr sz="1350" b="0" i="0">
-                <a:solidFill>
-                  <a:srgbClr val="59697A"/>
-                </a:solidFill>
-                <a:latin typeface="Arial"/>
-              </a:rPr>
-              <a:t>lower</a:t>
-            </a:r>
-          </a:p>
-        </p:txBody>
-      </p:sp>
-      <p:sp>
-        <p:nvSpPr>
-          <p:cNvPr id="40" name="Rounded Rectangle 39"/>
-          <p:cNvSpPr/>
-          <p:nvPr/>
-        </p:nvSpPr>
-        <p:spPr>
-          <a:xfrm>
-            <a:off x="347472" y="5522976"/>
-            <a:ext cx="11494008" cy="667512"/>
-          </a:xfrm>
-          <a:prstGeom prst="roundRect">
-            <a:avLst/>
-          </a:prstGeom>
-          <a:solidFill>
-            <a:srgbClr val="082B55"/>
-          </a:solidFill>
-          <a:ln w="10160">
-            <a:solidFill>
-              <a:srgbClr val="082B55"/>
-            </a:solidFill>
-          </a:ln>
-        </p:spPr>
-        <p:style>
-          <a:lnRef idx="1">
-            <a:schemeClr val="accent1"/>
-          </a:lnRef>
-          <a:fillRef idx="3">
-            <a:schemeClr val="accent1"/>
-          </a:fillRef>
-          <a:effectRef idx="2">
-            <a:schemeClr val="accent1"/>
-          </a:effectRef>
-          <a:fontRef idx="minor">
-            <a:schemeClr val="lt1"/>
-          </a:fontRef>
-        </p:style>
-        <p:txBody>
-          <a:bodyPr rtlCol="0" anchor="ctr"/>
-          <a:lstStyle/>
-          <a:p>
-            <a:pPr algn="ctr"/>
-          </a:p>
-        </p:txBody>
-      </p:sp>
-      <p:sp>
-        <p:nvSpPr>
-          <p:cNvPr id="41" name="TextBox 40"/>
-          <p:cNvSpPr txBox="1"/>
-          <p:nvPr/>
-        </p:nvSpPr>
-        <p:spPr>
-          <a:xfrm>
-            <a:off x="658368" y="5660136"/>
-            <a:ext cx="2331720" cy="310896"/>
-          </a:xfrm>
-          <a:prstGeom prst="rect">
-            <a:avLst/>
-          </a:prstGeom>
-          <a:noFill/>
-        </p:spPr>
-        <p:txBody>
-          <a:bodyPr wrap="square" lIns="18288" rIns="18288" tIns="18288" bIns="18288" anchor="ctr">
-            <a:spAutoFit/>
-          </a:bodyPr>
-          <a:lstStyle/>
-          <a:p>
-            <a:pPr algn="l">
-              <a:spcAft>
-                <a:spcPts val="0"/>
-              </a:spcAft>
-            </a:pPr>
-            <a:r>
-              <a:rPr sz="1800" b="1" i="0">
-                <a:solidFill>
-                  <a:srgbClr val="FFFFFF"/>
-                </a:solidFill>
-                <a:latin typeface="Arial"/>
-              </a:rPr>
-              <a:t>Use DDIM downstream</a:t>
-            </a:r>
-          </a:p>
-        </p:txBody>
-      </p:sp>
-      <p:sp>
-        <p:nvSpPr>
-          <p:cNvPr id="42" name="TextBox 41"/>
-          <p:cNvSpPr txBox="1"/>
-          <p:nvPr/>
-        </p:nvSpPr>
-        <p:spPr>
-          <a:xfrm>
-            <a:off x="2852928" y="5669280"/>
-            <a:ext cx="8394192" cy="292608"/>
-          </a:xfrm>
-          <a:prstGeom prst="rect">
-            <a:avLst/>
-          </a:prstGeom>
-          <a:noFill/>
-        </p:spPr>
-        <p:txBody>
-          <a:bodyPr wrap="square" lIns="18288" rIns="18288" tIns="18288" bIns="18288" anchor="ctr">
-            <a:spAutoFit/>
-          </a:bodyPr>
-          <a:lstStyle/>
-          <a:p>
-            <a:pPr algn="l">
-              <a:spcAft>
-                <a:spcPts val="0"/>
-              </a:spcAft>
-            </a:pPr>
-            <a:r>
-              <a:rPr sz="1500" b="0" i="0">
-                <a:solidFill>
-                  <a:srgbClr val="DCE7F2"/>
-                </a:solidFill>
-                <a:latin typeface="Arial"/>
-              </a:rPr>
-              <a:t>Lower separability and distributional distance, with comparable correlation and higher F1.</a:t>
-            </a:r>
-          </a:p>
-        </p:txBody>
-      </p:sp>
-      <p:sp>
-        <p:nvSpPr>
-          <p:cNvPr id="43" name="TextBox 42"/>
-          <p:cNvSpPr txBox="1"/>
-          <p:nvPr/>
-        </p:nvSpPr>
-        <p:spPr>
-          <a:xfrm>
-            <a:off x="329184" y="6510528"/>
-            <a:ext cx="10972800" cy="173736"/>
-          </a:xfrm>
-          <a:prstGeom prst="rect">
-            <a:avLst/>
-          </a:prstGeom>
-          <a:noFill/>
-        </p:spPr>
-        <p:txBody>
-          <a:bodyPr wrap="square" lIns="18288" rIns="18288" tIns="18288" bIns="18288" anchor="ctr">
-            <a:spAutoFit/>
-          </a:bodyPr>
-          <a:lstStyle/>
-          <a:p>
-            <a:pPr algn="l">
-              <a:spcAft>
-                <a:spcPts val="0"/>
-              </a:spcAft>
-            </a:pPr>
-            <a:r>
-              <a:rPr sz="720" b="0" i="0">
-                <a:solidFill>
-                  <a:srgbClr val="8A969E"/>
-                </a:solidFill>
-                <a:latin typeface="Arial"/>
-              </a:rPr>
-              <a:t>WGAN values use validation data and DDIM values use the stated OSDR test; they are not paired on one common split.</a:t>
+              <a:t>PCA was fitted in the common locked OSDR expression space. This is PCA, not UMAP.</a:t>
             </a:r>
           </a:p>
         </p:txBody>

--- a/presentation/SLSTP_2026_Generative_Transcriptomics.pptx
+++ b/presentation/SLSTP_2026_Generative_Transcriptomics.pptx
@@ -26,6 +26,7 @@
     <p:sldId id="300" r:id="rId24"/>
     <p:sldId id="301" r:id="rId25"/>
     <p:sldId id="302" r:id="rId26"/>
+    <p:sldId id="303" r:id="rId27"/>
   </p:sldIdLst>
   <p:sldSz cx="12192000" cy="6858000"/>
   <p:notesSz cx="6858000" cy="9144000"/>
@@ -878,13 +879,13 @@
           <a:lstStyle/>
           <a:p>
             <a:r>
-              <a:t>Target time: 1:15</a:t>
+              <a:t>Target time: 1:00</a:t>
             </a:r>
           </a:p>
           <a:p/>
           <a:p>
             <a:r>
-              <a:t>Thymus produced the clearest promoted panel. The lower mitotic and DNA-replication genes agree with prior reports of thymic involution and altered cell-cycle expression after flight. Higher Hsd17b11 and Etv1 add lipid-handling and T-cell-state hypotheses, but neither is a direct prior flight replication or an established driver. Because this is bulk RNA-seq, the pattern may reflect transcription, cell composition or both.</a:t>
+              <a:t>This is the complete 49-association inventory. FLT-higher and FLT-lower directions come from the real-data meta-analysis. P marks genes promoted only with synthetic guidance; R marks genes reinforced by both ranking arms. Colors apply the literature interpretation from the prior slide to promoted genes. The largest panels occur in thymus and pooled skeletal muscle, while soleus, spleen and kidney provide smaller focused sets.</a:t>
             </a:r>
           </a:p>
         </p:txBody>
@@ -954,13 +955,13 @@
           <a:lstStyle/>
           <a:p>
             <a:r>
-              <a:t>Target time: 1:05</a:t>
+              <a:t>Target time: 1:15</a:t>
             </a:r>
           </a:p>
           <a:p/>
           <a:p>
             <a:r>
-              <a:t>Soleus improved with real plus generated training. The selected genes were already stable in real-only analysis, so synthetic data reinforced rather than introduced the panel. Lower Bdh1, Ech1, Bnip3 and Decr1, with higher Tpm1, support altered oxidative metabolism and contractile remodeling.</a:t>
+              <a:t>Thymus produced the clearest promoted panel. The lower mitotic and DNA-replication genes agree with prior reports of thymic involution and altered cell-cycle expression after flight. Higher Hsd17b11 and Etv1 add lipid-handling and T-cell-state hypotheses, but neither is a direct prior flight replication or an established driver. Because this is bulk RNA-seq, the pattern may reflect transcription, cell composition or both.</a:t>
             </a:r>
           </a:p>
         </p:txBody>
@@ -1030,13 +1031,13 @@
           <a:lstStyle/>
           <a:p>
             <a:r>
-              <a:t>Target time: 0:55</a:t>
+              <a:t>Target time: 1:05</a:t>
             </a:r>
           </a:p>
           <a:p/>
           <a:p>
             <a:r>
-              <a:t>Kidney supplied the strongest secondary pair: promoted Inpp4b and reinforced Slc37a4. Spleen and skin results are narrower. Adrenal Psmb8 has plausible immunoproteasome biology but no prior adrenal flight match. Lung and retina improved predictively without a synthetic-informed BH-FDR gene, while liver, EDL and quadriceps retained real-only models.</a:t>
+              <a:t>Soleus improved with real plus generated training. The selected genes were already stable in real-only analysis, so synthetic data reinforced rather than introduced the panel. Lower Bdh1, Ech1, Bnip3 and Decr1, with higher Tpm1, support altered oxidative metabolism and contractile remodeling.</a:t>
             </a:r>
           </a:p>
         </p:txBody>
@@ -1106,13 +1107,13 @@
           <a:lstStyle/>
           <a:p>
             <a:r>
-              <a:t>Target time: 0:45</a:t>
+              <a:t>Target time: 0:55</a:t>
             </a:r>
           </a:p>
           <a:p/>
           <a:p>
             <a:r>
-              <a:t>The useful role was tissue-specific feature ranking or limited regularization, not increasing biological sample size. Literature annotation then separated exact recovery, process-level agreement and complementary hypotheses. Independent samples and cell-resolved experiments are the next tests.</a:t>
+              <a:t>Kidney supplied the strongest secondary pair: promoted Inpp4b and reinforced Slc37a4. Spleen and skin results are narrower. Adrenal Psmb8 has plausible immunoproteasome biology but no prior adrenal flight match. Lung and retina improved predictively without a synthetic-informed BH-FDR gene, while liver, EDL and quadriceps retained real-only models.</a:t>
             </a:r>
           </a:p>
         </p:txBody>
@@ -1138,6 +1139,82 @@
 </file>
 
 <file path=ppt/notesSlides/notesSlide15.xml><?xml version="1.0" encoding="utf-8"?>
+<p:notes xmlns:a="http://schemas.openxmlformats.org/drawingml/2006/main" xmlns:p="http://schemas.openxmlformats.org/presentationml/2006/main" xmlns:r="http://schemas.openxmlformats.org/officeDocument/2006/relationships">
+  <p:cSld>
+    <p:spTree>
+      <p:nvGrpSpPr>
+        <p:cNvPr id="1" name=""/>
+        <p:cNvGrpSpPr/>
+        <p:nvPr/>
+      </p:nvGrpSpPr>
+      <p:grpSpPr>
+        <a:xfrm>
+          <a:off x="0" y="0"/>
+          <a:ext cx="0" cy="0"/>
+          <a:chOff x="0" y="0"/>
+          <a:chExt cx="0" cy="0"/>
+        </a:xfrm>
+      </p:grpSpPr>
+      <p:sp>
+        <p:nvSpPr>
+          <p:cNvPr id="2" name="Slide Image Placeholder 1"/>
+          <p:cNvSpPr>
+            <a:spLocks noGrp="1"/>
+          </p:cNvSpPr>
+          <p:nvPr>
+            <p:ph type="sldImg" idx="2"/>
+          </p:nvPr>
+        </p:nvSpPr>
+        <p:spPr/>
+      </p:sp>
+      <p:sp>
+        <p:nvSpPr>
+          <p:cNvPr id="3" name="Notes Placeholder 2"/>
+          <p:cNvSpPr>
+            <a:spLocks noGrp="1"/>
+          </p:cNvSpPr>
+          <p:nvPr>
+            <p:ph type="body" idx="3" sz="quarter"/>
+          </p:nvPr>
+        </p:nvSpPr>
+        <p:spPr/>
+        <p:txBody>
+          <a:bodyPr/>
+          <a:lstStyle/>
+          <a:p>
+            <a:r>
+              <a:t>Target time: 0:45</a:t>
+            </a:r>
+          </a:p>
+          <a:p/>
+          <a:p>
+            <a:r>
+              <a:t>The useful role was tissue-specific feature ranking or limited regularization, not increasing biological sample size. Literature annotation then separated exact recovery, process-level agreement and complementary hypotheses. Independent samples and cell-resolved experiments are the next tests.</a:t>
+            </a:r>
+          </a:p>
+        </p:txBody>
+      </p:sp>
+      <p:sp>
+        <p:nvSpPr>
+          <p:cNvPr id="4" name="Slide Number Placeholder 3"/>
+          <p:cNvSpPr>
+            <a:spLocks noGrp="1"/>
+          </p:cNvSpPr>
+          <p:nvPr>
+            <p:ph type="sldNum" idx="5" sz="quarter"/>
+          </p:nvPr>
+        </p:nvSpPr>
+        <p:spPr/>
+      </p:sp>
+    </p:spTree>
+  </p:cSld>
+  <p:clrMapOvr>
+    <a:masterClrMapping/>
+  </p:clrMapOvr>
+</p:notes>
+</file>
+
+<file path=ppt/notesSlides/notesSlide16.xml><?xml version="1.0" encoding="utf-8"?>
 <p:notes xmlns:a="http://schemas.openxmlformats.org/drawingml/2006/main" xmlns:p="http://schemas.openxmlformats.org/presentationml/2006/main" xmlns:r="http://schemas.openxmlformats.org/officeDocument/2006/relationships">
   <p:cSld>
     <p:spTree>
@@ -24647,7 +24724,7 @@
                 </a:solidFill>
                 <a:latin typeface="Arial"/>
               </a:rPr>
-              <a:t>THYMUS</a:t>
+              <a:t>GENE INVENTORY</a:t>
             </a:r>
           </a:p>
         </p:txBody>
@@ -24686,7 +24763,7 @@
                 </a:solidFill>
                 <a:latin typeface="Arial"/>
               </a:rPr>
-              <a:t>Thymus points to lower proliferative renewal</a:t>
+              <a:t>Synthetic-informed genes spanned 10 tissue analyses</a:t>
             </a:r>
           </a:p>
         </p:txBody>
@@ -24725,56 +24802,69 @@
                 </a:solidFill>
                 <a:latin typeface="Arial"/>
               </a:rPr>
-              <a:t>The core panel recovers cell-cycle biology; two flight-higher genes extend the hypothesis.</a:t>
-            </a:r>
-          </a:p>
-        </p:txBody>
-      </p:sp>
-      <p:pic>
-        <p:nvPicPr>
-          <p:cNvPr id="7" name="Thymus gene effects and Reactome processes" descr="Thymus gene effects and Reactome processes"/>
-          <p:cNvPicPr>
-            <a:picLocks noChangeAspect="1"/>
-          </p:cNvPicPr>
+              <a:t>All 49 associations passed BH FDR in real OSDR data; synthetic profiles affected prioritization, not the statistical test.</a:t>
+            </a:r>
+          </a:p>
+        </p:txBody>
+      </p:sp>
+      <p:sp>
+        <p:nvSpPr>
+          <p:cNvPr id="7" name="TextBox 6"/>
+          <p:cNvSpPr txBox="1"/>
           <p:nvPr/>
-        </p:nvPicPr>
-        <p:blipFill>
-          <a:blip r:embed="rId2"/>
-          <a:stretch>
-            <a:fillRect/>
-          </a:stretch>
-        </p:blipFill>
-        <p:spPr>
-          <a:xfrm>
-            <a:off x="320040" y="1895403"/>
-            <a:ext cx="7818120" cy="4109608"/>
+        </p:nvSpPr>
+        <p:spPr>
+          <a:xfrm>
+            <a:off x="411480" y="1709928"/>
+            <a:ext cx="1005840" cy="228600"/>
           </a:xfrm>
           <a:prstGeom prst="rect">
             <a:avLst/>
           </a:prstGeom>
-        </p:spPr>
-      </p:pic>
-      <p:sp>
-        <p:nvSpPr>
-          <p:cNvPr id="8" name="Rounded Rectangle 7"/>
+          <a:noFill/>
+        </p:spPr>
+        <p:txBody>
+          <a:bodyPr wrap="square" lIns="18288" rIns="18288" tIns="18288" bIns="18288" anchor="t">
+            <a:spAutoFit/>
+          </a:bodyPr>
+          <a:lstStyle/>
+          <a:p>
+            <a:pPr algn="l">
+              <a:spcAft>
+                <a:spcPts val="0"/>
+              </a:spcAft>
+            </a:pPr>
+            <a:r>
+              <a:rPr sz="1019" b="1" i="0">
+                <a:solidFill>
+                  <a:srgbClr val="082B55"/>
+                </a:solidFill>
+                <a:latin typeface="Arial"/>
+              </a:rPr>
+              <a:t>P: promoted</a:t>
+            </a:r>
+          </a:p>
+        </p:txBody>
+      </p:sp>
+      <p:sp>
+        <p:nvSpPr>
+          <p:cNvPr id="8" name="Rectangle 7"/>
           <p:cNvSpPr/>
           <p:nvPr/>
         </p:nvSpPr>
         <p:spPr>
           <a:xfrm>
-            <a:off x="8321040" y="1847088"/>
-            <a:ext cx="3493008" cy="4178808"/>
-          </a:xfrm>
-          <a:prstGeom prst="roundRect">
+            <a:off x="1417320" y="1746504"/>
+            <a:ext cx="128016" cy="45720"/>
+          </a:xfrm>
+          <a:prstGeom prst="rect">
             <a:avLst/>
           </a:prstGeom>
           <a:solidFill>
-            <a:srgbClr val="F8ECE9"/>
+            <a:srgbClr val="478A64"/>
           </a:solidFill>
-          <a:ln w="10160">
-            <a:solidFill>
-              <a:srgbClr val="E8C9C2"/>
-            </a:solidFill>
+          <a:ln>
+            <a:noFill/>
           </a:ln>
         </p:spPr>
         <p:style>
@@ -24807,8 +24897,8 @@
         </p:nvSpPr>
         <p:spPr>
           <a:xfrm>
-            <a:off x="8622792" y="2139696"/>
-            <a:ext cx="1005840" cy="594360"/>
+            <a:off x="1591056" y="1691640"/>
+            <a:ext cx="841248" cy="228600"/>
           </a:xfrm>
           <a:prstGeom prst="rect">
             <a:avLst/>
@@ -24827,27 +24917,70 @@
               </a:spcAft>
             </a:pPr>
             <a:r>
-              <a:rPr sz="3500" b="1" i="0">
-                <a:solidFill>
-                  <a:srgbClr val="D96552"/>
+              <a:rPr sz="980" b="1" i="0">
+                <a:solidFill>
+                  <a:srgbClr val="478A64"/>
                 </a:solidFill>
                 <a:latin typeface="Arial"/>
               </a:rPr>
-              <a:t>16</a:t>
-            </a:r>
-          </a:p>
-        </p:txBody>
-      </p:sp>
-      <p:sp>
-        <p:nvSpPr>
-          <p:cNvPr id="10" name="TextBox 9"/>
+              <a:t>aligning</a:t>
+            </a:r>
+          </a:p>
+        </p:txBody>
+      </p:sp>
+      <p:sp>
+        <p:nvSpPr>
+          <p:cNvPr id="10" name="Rectangle 9"/>
+          <p:cNvSpPr/>
+          <p:nvPr/>
+        </p:nvSpPr>
+        <p:spPr>
+          <a:xfrm>
+            <a:off x="2331720" y="1746504"/>
+            <a:ext cx="128016" cy="45720"/>
+          </a:xfrm>
+          <a:prstGeom prst="rect">
+            <a:avLst/>
+          </a:prstGeom>
+          <a:solidFill>
+            <a:srgbClr val="2D6496"/>
+          </a:solidFill>
+          <a:ln>
+            <a:noFill/>
+          </a:ln>
+        </p:spPr>
+        <p:style>
+          <a:lnRef idx="1">
+            <a:schemeClr val="accent1"/>
+          </a:lnRef>
+          <a:fillRef idx="3">
+            <a:schemeClr val="accent1"/>
+          </a:fillRef>
+          <a:effectRef idx="2">
+            <a:schemeClr val="accent1"/>
+          </a:effectRef>
+          <a:fontRef idx="minor">
+            <a:schemeClr val="lt1"/>
+          </a:fontRef>
+        </p:style>
+        <p:txBody>
+          <a:bodyPr rtlCol="0" anchor="ctr"/>
+          <a:lstStyle/>
+          <a:p>
+            <a:pPr algn="ctr"/>
+          </a:p>
+        </p:txBody>
+      </p:sp>
+      <p:sp>
+        <p:nvSpPr>
+          <p:cNvPr id="11" name="TextBox 10"/>
           <p:cNvSpPr txBox="1"/>
           <p:nvPr/>
         </p:nvSpPr>
         <p:spPr>
           <a:xfrm>
-            <a:off x="9491472" y="2176272"/>
-            <a:ext cx="1938528" cy="566928"/>
+            <a:off x="2505456" y="1691640"/>
+            <a:ext cx="1115568" cy="228600"/>
           </a:xfrm>
           <a:prstGeom prst="rect">
             <a:avLst/>
@@ -24866,28 +24999,70 @@
               </a:spcAft>
             </a:pPr>
             <a:r>
-              <a:rPr sz="1400" b="1" i="0">
-                <a:solidFill>
-                  <a:srgbClr val="263746"/>
+              <a:rPr sz="980" b="1" i="0">
+                <a:solidFill>
+                  <a:srgbClr val="2D6496"/>
                 </a:solidFill>
                 <a:latin typeface="Arial"/>
               </a:rPr>
-              <a:t>synthetic-informed
-BH-FDR associations</a:t>
-            </a:r>
-          </a:p>
-        </p:txBody>
-      </p:sp>
-      <p:sp>
-        <p:nvSpPr>
-          <p:cNvPr id="11" name="TextBox 10"/>
+              <a:t>complementary</a:t>
+            </a:r>
+          </a:p>
+        </p:txBody>
+      </p:sp>
+      <p:sp>
+        <p:nvSpPr>
+          <p:cNvPr id="12" name="Rectangle 11"/>
+          <p:cNvSpPr/>
+          <p:nvPr/>
+        </p:nvSpPr>
+        <p:spPr>
+          <a:xfrm>
+            <a:off x="3547872" y="1746504"/>
+            <a:ext cx="128016" cy="45720"/>
+          </a:xfrm>
+          <a:prstGeom prst="rect">
+            <a:avLst/>
+          </a:prstGeom>
+          <a:solidFill>
+            <a:srgbClr val="D37B00"/>
+          </a:solidFill>
+          <a:ln>
+            <a:noFill/>
+          </a:ln>
+        </p:spPr>
+        <p:style>
+          <a:lnRef idx="1">
+            <a:schemeClr val="accent1"/>
+          </a:lnRef>
+          <a:fillRef idx="3">
+            <a:schemeClr val="accent1"/>
+          </a:fillRef>
+          <a:effectRef idx="2">
+            <a:schemeClr val="accent1"/>
+          </a:effectRef>
+          <a:fontRef idx="minor">
+            <a:schemeClr val="lt1"/>
+          </a:fontRef>
+        </p:style>
+        <p:txBody>
+          <a:bodyPr rtlCol="0" anchor="ctr"/>
+          <a:lstStyle/>
+          <a:p>
+            <a:pPr algn="ctr"/>
+          </a:p>
+        </p:txBody>
+      </p:sp>
+      <p:sp>
+        <p:nvSpPr>
+          <p:cNvPr id="13" name="TextBox 12"/>
           <p:cNvSpPr txBox="1"/>
           <p:nvPr/>
         </p:nvSpPr>
         <p:spPr>
           <a:xfrm>
-            <a:off x="8631936" y="2862072"/>
-            <a:ext cx="2788920" cy="274320"/>
+            <a:off x="3721608" y="1691640"/>
+            <a:ext cx="932688" cy="228600"/>
           </a:xfrm>
           <a:prstGeom prst="rect">
             <a:avLst/>
@@ -24906,33 +25081,33 @@
               </a:spcAft>
             </a:pPr>
             <a:r>
-              <a:rPr sz="1400" b="1" i="0">
-                <a:solidFill>
-                  <a:srgbClr val="178681"/>
+              <a:rPr sz="980" b="1" i="0">
+                <a:solidFill>
+                  <a:srgbClr val="D37B00"/>
                 </a:solidFill>
                 <a:latin typeface="Arial"/>
               </a:rPr>
-              <a:t>13 promoted | 3 reinforced</a:t>
-            </a:r>
-          </a:p>
-        </p:txBody>
-      </p:sp>
-      <p:sp>
-        <p:nvSpPr>
-          <p:cNvPr id="12" name="Oval 11"/>
+              <a:t>ambiguous</a:t>
+            </a:r>
+          </a:p>
+        </p:txBody>
+      </p:sp>
+      <p:sp>
+        <p:nvSpPr>
+          <p:cNvPr id="14" name="Rectangle 13"/>
           <p:cNvSpPr/>
           <p:nvPr/>
         </p:nvSpPr>
         <p:spPr>
           <a:xfrm>
-            <a:off x="8631936" y="3337560"/>
-            <a:ext cx="91440" cy="91440"/>
-          </a:xfrm>
-          <a:prstGeom prst="ellipse">
+            <a:off x="4590288" y="1746504"/>
+            <a:ext cx="128016" cy="45720"/>
+          </a:xfrm>
+          <a:prstGeom prst="rect">
             <a:avLst/>
           </a:prstGeom>
           <a:solidFill>
-            <a:srgbClr val="D96552"/>
+            <a:srgbClr val="8063A6"/>
           </a:solidFill>
           <a:ln>
             <a:noFill/>
@@ -24962,14 +25137,14 @@
       </p:sp>
       <p:sp>
         <p:nvSpPr>
-          <p:cNvPr id="13" name="TextBox 12"/>
+          <p:cNvPr id="15" name="TextBox 14"/>
           <p:cNvSpPr txBox="1"/>
           <p:nvPr/>
         </p:nvSpPr>
         <p:spPr>
           <a:xfrm>
-            <a:off x="8796528" y="3227832"/>
-            <a:ext cx="2606039" cy="585216"/>
+            <a:off x="4764024" y="1691640"/>
+            <a:ext cx="1463040" cy="228600"/>
           </a:xfrm>
           <a:prstGeom prst="rect">
             <a:avLst/>
@@ -24977,7 +25152,7 @@
           <a:noFill/>
         </p:spPr>
         <p:txBody>
-          <a:bodyPr wrap="square" lIns="18288" rIns="18288" tIns="18288" bIns="18288" anchor="ctr">
+          <a:bodyPr wrap="square" lIns="18288" rIns="18288" tIns="18288" bIns="18288" anchor="t">
             <a:spAutoFit/>
           </a:bodyPr>
           <a:lstStyle/>
@@ -24988,33 +25163,33 @@
               </a:spcAft>
             </a:pPr>
             <a:r>
-              <a:rPr sz="1220" b="0" i="0">
-                <a:solidFill>
-                  <a:srgbClr val="263746"/>
+              <a:rPr sz="980" b="1" i="0">
+                <a:solidFill>
+                  <a:srgbClr val="8063A6"/>
                 </a:solidFill>
                 <a:latin typeface="Arial"/>
               </a:rPr>
-              <a:t>Lower Nusap1, Stmn1, Birc5, Cdk1, Top2a and related genes</a:t>
-            </a:r>
-          </a:p>
-        </p:txBody>
-      </p:sp>
-      <p:sp>
-        <p:nvSpPr>
-          <p:cNvPr id="14" name="Oval 13"/>
+              <a:t>literature-unmatched</a:t>
+            </a:r>
+          </a:p>
+        </p:txBody>
+      </p:sp>
+      <p:sp>
+        <p:nvSpPr>
+          <p:cNvPr id="16" name="Rectangle 15"/>
           <p:cNvSpPr/>
           <p:nvPr/>
         </p:nvSpPr>
         <p:spPr>
           <a:xfrm>
-            <a:off x="8631936" y="3922776"/>
-            <a:ext cx="91440" cy="91440"/>
-          </a:xfrm>
-          <a:prstGeom prst="ellipse">
+            <a:off x="6245352" y="1746504"/>
+            <a:ext cx="128016" cy="45720"/>
+          </a:xfrm>
+          <a:prstGeom prst="rect">
             <a:avLst/>
           </a:prstGeom>
           <a:solidFill>
-            <a:srgbClr val="D96552"/>
+            <a:srgbClr val="59697A"/>
           </a:solidFill>
           <a:ln>
             <a:noFill/>
@@ -25044,14 +25219,14 @@
       </p:sp>
       <p:sp>
         <p:nvSpPr>
-          <p:cNvPr id="15" name="TextBox 14"/>
+          <p:cNvPr id="17" name="TextBox 16"/>
           <p:cNvSpPr txBox="1"/>
           <p:nvPr/>
         </p:nvSpPr>
         <p:spPr>
           <a:xfrm>
-            <a:off x="8796528" y="3813048"/>
-            <a:ext cx="2606039" cy="585216"/>
+            <a:off x="6419088" y="1691640"/>
+            <a:ext cx="1143000" cy="228600"/>
           </a:xfrm>
           <a:prstGeom prst="rect">
             <a:avLst/>
@@ -25059,7 +25234,7 @@
           <a:noFill/>
         </p:spPr>
         <p:txBody>
-          <a:bodyPr wrap="square" lIns="18288" rIns="18288" tIns="18288" bIns="18288" anchor="ctr">
+          <a:bodyPr wrap="square" lIns="18288" rIns="18288" tIns="18288" bIns="18288" anchor="t">
             <a:spAutoFit/>
           </a:bodyPr>
           <a:lstStyle/>
@@ -25070,33 +25245,72 @@
               </a:spcAft>
             </a:pPr>
             <a:r>
-              <a:rPr sz="1220" b="0" i="0">
-                <a:solidFill>
-                  <a:srgbClr val="263746"/>
+              <a:rPr sz="980" b="1" i="0">
+                <a:solidFill>
+                  <a:srgbClr val="59697A"/>
                 </a:solidFill>
                 <a:latin typeface="Arial"/>
               </a:rPr>
-              <a:t>Cell cycle, DNA replication, APC/C and G2/M processes</a:t>
-            </a:r>
-          </a:p>
-        </p:txBody>
-      </p:sp>
-      <p:sp>
-        <p:nvSpPr>
-          <p:cNvPr id="16" name="Oval 15"/>
+              <a:t>R: reinforced</a:t>
+            </a:r>
+          </a:p>
+        </p:txBody>
+      </p:sp>
+      <p:sp>
+        <p:nvSpPr>
+          <p:cNvPr id="18" name="TextBox 17"/>
+          <p:cNvSpPr txBox="1"/>
+          <p:nvPr/>
+        </p:nvSpPr>
+        <p:spPr>
+          <a:xfrm>
+            <a:off x="9308592" y="1691640"/>
+            <a:ext cx="2432304" cy="228600"/>
+          </a:xfrm>
+          <a:prstGeom prst="rect">
+            <a:avLst/>
+          </a:prstGeom>
+          <a:noFill/>
+        </p:spPr>
+        <p:txBody>
+          <a:bodyPr wrap="square" lIns="18288" rIns="18288" tIns="18288" bIns="18288" anchor="t">
+            <a:spAutoFit/>
+          </a:bodyPr>
+          <a:lstStyle/>
+          <a:p>
+            <a:pPr algn="r">
+              <a:spcAft>
+                <a:spcPts val="0"/>
+              </a:spcAft>
+            </a:pPr>
+            <a:r>
+              <a:rPr sz="980" b="0" i="1">
+                <a:solidFill>
+                  <a:srgbClr val="8A969E"/>
+                </a:solidFill>
+                <a:latin typeface="Arial"/>
+              </a:rPr>
+              <a:t>Direction is shown within each tissue.</a:t>
+            </a:r>
+          </a:p>
+        </p:txBody>
+      </p:sp>
+      <p:sp>
+        <p:nvSpPr>
+          <p:cNvPr id="19" name="Rectangle 18"/>
           <p:cNvSpPr/>
           <p:nvPr/>
         </p:nvSpPr>
         <p:spPr>
           <a:xfrm>
-            <a:off x="8631936" y="4507992"/>
-            <a:ext cx="91440" cy="91440"/>
-          </a:xfrm>
-          <a:prstGeom prst="ellipse">
+            <a:off x="393192" y="2048256"/>
+            <a:ext cx="5623560" cy="16459"/>
+          </a:xfrm>
+          <a:prstGeom prst="rect">
             <a:avLst/>
           </a:prstGeom>
           <a:solidFill>
-            <a:srgbClr val="D96552"/>
+            <a:srgbClr val="DDE4E8"/>
           </a:solidFill>
           <a:ln>
             <a:noFill/>
@@ -25126,14 +25340,14 @@
       </p:sp>
       <p:sp>
         <p:nvSpPr>
-          <p:cNvPr id="17" name="TextBox 16"/>
+          <p:cNvPr id="20" name="TextBox 19"/>
           <p:cNvSpPr txBox="1"/>
           <p:nvPr/>
         </p:nvSpPr>
         <p:spPr>
           <a:xfrm>
-            <a:off x="8796528" y="4398264"/>
-            <a:ext cx="2606039" cy="585216"/>
+            <a:off x="448056" y="2112264"/>
+            <a:ext cx="1170432" cy="1234439"/>
           </a:xfrm>
           <a:prstGeom prst="rect">
             <a:avLst/>
@@ -25141,7 +25355,56 @@
           <a:noFill/>
         </p:spPr>
         <p:txBody>
-          <a:bodyPr wrap="square" lIns="18288" rIns="18288" tIns="18288" bIns="18288" anchor="ctr">
+          <a:bodyPr wrap="square" lIns="0" rIns="0" tIns="0" bIns="0" anchor="t">
+            <a:spAutoFit/>
+          </a:bodyPr>
+          <a:lstStyle/>
+          <a:p>
+            <a:pPr>
+              <a:spcAft>
+                <a:spcPts val="0"/>
+              </a:spcAft>
+            </a:pPr>
+            <a:r>
+              <a:rPr sz="1180" b="1" i="0">
+                <a:solidFill>
+                  <a:srgbClr val="082B55"/>
+                </a:solidFill>
+                <a:latin typeface="Arial"/>
+              </a:rPr>
+              <a:t>Thymus
+</a:t>
+            </a:r>
+            <a:r>
+              <a:rPr sz="900" b="0" i="0">
+                <a:solidFill>
+                  <a:srgbClr val="8A969E"/>
+                </a:solidFill>
+                <a:latin typeface="Arial"/>
+              </a:rPr>
+              <a:t>16 genes</a:t>
+            </a:r>
+          </a:p>
+        </p:txBody>
+      </p:sp>
+      <p:sp>
+        <p:nvSpPr>
+          <p:cNvPr id="21" name="TextBox 20"/>
+          <p:cNvSpPr txBox="1"/>
+          <p:nvPr/>
+        </p:nvSpPr>
+        <p:spPr>
+          <a:xfrm>
+            <a:off x="1645920" y="2103120"/>
+            <a:ext cx="621792" cy="219456"/>
+          </a:xfrm>
+          <a:prstGeom prst="rect">
+            <a:avLst/>
+          </a:prstGeom>
+          <a:noFill/>
+        </p:spPr>
+        <p:txBody>
+          <a:bodyPr wrap="square" lIns="0" rIns="0" tIns="0" bIns="0" anchor="t">
             <a:spAutoFit/>
           </a:bodyPr>
           <a:lstStyle/>
@@ -25152,33 +25415,402 @@
               </a:spcAft>
             </a:pPr>
             <a:r>
-              <a:rPr sz="1220" b="0" i="0">
-                <a:solidFill>
-                  <a:srgbClr val="263746"/>
+              <a:rPr sz="900" b="1" i="0">
+                <a:solidFill>
+                  <a:srgbClr val="D96552"/>
                 </a:solidFill>
                 <a:latin typeface="Arial"/>
               </a:rPr>
-              <a:t>Higher Hsd17b11 and Etv1 suggest lipid or T-cell-state shifts</a:t>
-            </a:r>
-          </a:p>
-        </p:txBody>
-      </p:sp>
-      <p:sp>
-        <p:nvSpPr>
-          <p:cNvPr id="18" name="Oval 17"/>
+              <a:t>FLT higher</a:t>
+            </a:r>
+          </a:p>
+        </p:txBody>
+      </p:sp>
+      <p:sp>
+        <p:nvSpPr>
+          <p:cNvPr id="22" name="TextBox 21"/>
+          <p:cNvSpPr txBox="1"/>
+          <p:nvPr/>
+        </p:nvSpPr>
+        <p:spPr>
+          <a:xfrm>
+            <a:off x="2331720" y="2103120"/>
+            <a:ext cx="3611880" cy="310896"/>
+          </a:xfrm>
+          <a:prstGeom prst="rect">
+            <a:avLst/>
+          </a:prstGeom>
+          <a:noFill/>
+        </p:spPr>
+        <p:txBody>
+          <a:bodyPr wrap="square" lIns="0" rIns="0" tIns="0" bIns="0" anchor="t">
+            <a:spAutoFit/>
+          </a:bodyPr>
+          <a:lstStyle/>
+          <a:p>
+            <a:pPr>
+              <a:spcAft>
+                <a:spcPts val="0"/>
+              </a:spcAft>
+            </a:pPr>
+            <a:r>
+              <a:rPr sz="980" b="1" i="1">
+                <a:solidFill>
+                  <a:srgbClr val="2D6496"/>
+                </a:solidFill>
+                <a:latin typeface="Arial"/>
+              </a:rPr>
+              <a:t>P:Hsd17b11</a:t>
+            </a:r>
+            <a:r>
+              <a:rPr sz="980" b="0" i="0">
+                <a:solidFill>
+                  <a:srgbClr val="8A969E"/>
+                </a:solidFill>
+                <a:latin typeface="Arial"/>
+              </a:rPr>
+              <a:t>, </a:t>
+            </a:r>
+            <a:r>
+              <a:rPr sz="980" b="1" i="1">
+                <a:solidFill>
+                  <a:srgbClr val="2D6496"/>
+                </a:solidFill>
+                <a:latin typeface="Arial"/>
+              </a:rPr>
+              <a:t>P:Etv1</a:t>
+            </a:r>
+            <a:r>
+              <a:rPr sz="980" b="0" i="0">
+                <a:solidFill>
+                  <a:srgbClr val="8A969E"/>
+                </a:solidFill>
+                <a:latin typeface="Arial"/>
+              </a:rPr>
+              <a:t>, </a:t>
+            </a:r>
+            <a:r>
+              <a:rPr sz="980" b="0" i="1">
+                <a:solidFill>
+                  <a:srgbClr val="59697A"/>
+                </a:solidFill>
+                <a:latin typeface="Arial"/>
+              </a:rPr>
+              <a:t>R:Snx7</a:t>
+            </a:r>
+          </a:p>
+        </p:txBody>
+      </p:sp>
+      <p:sp>
+        <p:nvSpPr>
+          <p:cNvPr id="23" name="TextBox 22"/>
+          <p:cNvSpPr txBox="1"/>
+          <p:nvPr/>
+        </p:nvSpPr>
+        <p:spPr>
+          <a:xfrm>
+            <a:off x="1645920" y="2414016"/>
+            <a:ext cx="621792" cy="219456"/>
+          </a:xfrm>
+          <a:prstGeom prst="rect">
+            <a:avLst/>
+          </a:prstGeom>
+          <a:noFill/>
+        </p:spPr>
+        <p:txBody>
+          <a:bodyPr wrap="square" lIns="0" rIns="0" tIns="0" bIns="0" anchor="t">
+            <a:spAutoFit/>
+          </a:bodyPr>
+          <a:lstStyle/>
+          <a:p>
+            <a:pPr algn="l">
+              <a:spcAft>
+                <a:spcPts val="0"/>
+              </a:spcAft>
+            </a:pPr>
+            <a:r>
+              <a:rPr sz="900" b="1" i="0">
+                <a:solidFill>
+                  <a:srgbClr val="178681"/>
+                </a:solidFill>
+                <a:latin typeface="Arial"/>
+              </a:rPr>
+              <a:t>FLT lower</a:t>
+            </a:r>
+          </a:p>
+        </p:txBody>
+      </p:sp>
+      <p:sp>
+        <p:nvSpPr>
+          <p:cNvPr id="24" name="TextBox 23"/>
+          <p:cNvSpPr txBox="1"/>
+          <p:nvPr/>
+        </p:nvSpPr>
+        <p:spPr>
+          <a:xfrm>
+            <a:off x="2331720" y="2414016"/>
+            <a:ext cx="3611880" cy="914399"/>
+          </a:xfrm>
+          <a:prstGeom prst="rect">
+            <a:avLst/>
+          </a:prstGeom>
+          <a:noFill/>
+        </p:spPr>
+        <p:txBody>
+          <a:bodyPr wrap="square" lIns="0" rIns="0" tIns="0" bIns="0" anchor="t">
+            <a:spAutoFit/>
+          </a:bodyPr>
+          <a:lstStyle/>
+          <a:p>
+            <a:pPr>
+              <a:spcAft>
+                <a:spcPts val="0"/>
+              </a:spcAft>
+            </a:pPr>
+            <a:r>
+              <a:rPr sz="980" b="1" i="1">
+                <a:solidFill>
+                  <a:srgbClr val="478A64"/>
+                </a:solidFill>
+                <a:latin typeface="Arial"/>
+              </a:rPr>
+              <a:t>P:Nusap1</a:t>
+            </a:r>
+            <a:r>
+              <a:rPr sz="980" b="0" i="0">
+                <a:solidFill>
+                  <a:srgbClr val="8A969E"/>
+                </a:solidFill>
+                <a:latin typeface="Arial"/>
+              </a:rPr>
+              <a:t>, </a:t>
+            </a:r>
+            <a:r>
+              <a:rPr sz="980" b="1" i="1">
+                <a:solidFill>
+                  <a:srgbClr val="478A64"/>
+                </a:solidFill>
+                <a:latin typeface="Arial"/>
+              </a:rPr>
+              <a:t>P:Stmn1</a:t>
+            </a:r>
+            <a:r>
+              <a:rPr sz="980" b="0" i="0">
+                <a:solidFill>
+                  <a:srgbClr val="8A969E"/>
+                </a:solidFill>
+                <a:latin typeface="Arial"/>
+              </a:rPr>
+              <a:t>, </a:t>
+            </a:r>
+            <a:r>
+              <a:rPr sz="980" b="1" i="1">
+                <a:solidFill>
+                  <a:srgbClr val="D37B00"/>
+                </a:solidFill>
+                <a:latin typeface="Arial"/>
+              </a:rPr>
+              <a:t>P:Birc5</a:t>
+            </a:r>
+            <a:r>
+              <a:rPr sz="980" b="0" i="0">
+                <a:solidFill>
+                  <a:srgbClr val="8A969E"/>
+                </a:solidFill>
+                <a:latin typeface="Arial"/>
+              </a:rPr>
+              <a:t>, </a:t>
+            </a:r>
+            <a:r>
+              <a:rPr sz="980" b="1" i="1">
+                <a:solidFill>
+                  <a:srgbClr val="478A64"/>
+                </a:solidFill>
+                <a:latin typeface="Arial"/>
+              </a:rPr>
+              <a:t>P:Cdk1</a:t>
+            </a:r>
+            <a:r>
+              <a:rPr sz="980" b="0" i="0">
+                <a:solidFill>
+                  <a:srgbClr val="8A969E"/>
+                </a:solidFill>
+                <a:latin typeface="Arial"/>
+              </a:rPr>
+              <a:t>, </a:t>
+            </a:r>
+            <a:r>
+              <a:rPr sz="980" b="1" i="1">
+                <a:solidFill>
+                  <a:srgbClr val="478A64"/>
+                </a:solidFill>
+                <a:latin typeface="Arial"/>
+              </a:rPr>
+              <a:t>P:Top2a</a:t>
+            </a:r>
+            <a:r>
+              <a:rPr sz="980" b="0" i="0">
+                <a:solidFill>
+                  <a:srgbClr val="8A969E"/>
+                </a:solidFill>
+                <a:latin typeface="Arial"/>
+              </a:rPr>
+              <a:t>, </a:t>
+            </a:r>
+            <a:r>
+              <a:rPr sz="980" b="1" i="1">
+                <a:solidFill>
+                  <a:srgbClr val="478A64"/>
+                </a:solidFill>
+                <a:latin typeface="Arial"/>
+              </a:rPr>
+              <a:t>P:Ccnb2</a:t>
+            </a:r>
+            <a:r>
+              <a:rPr sz="980" b="0" i="0">
+                <a:solidFill>
+                  <a:srgbClr val="8A969E"/>
+                </a:solidFill>
+                <a:latin typeface="Arial"/>
+              </a:rPr>
+              <a:t>, </a:t>
+            </a:r>
+            <a:r>
+              <a:rPr sz="980" b="1" i="1">
+                <a:solidFill>
+                  <a:srgbClr val="478A64"/>
+                </a:solidFill>
+                <a:latin typeface="Arial"/>
+              </a:rPr>
+              <a:t>P:Aurka</a:t>
+            </a:r>
+            <a:r>
+              <a:rPr sz="980" b="0" i="0">
+                <a:solidFill>
+                  <a:srgbClr val="8A969E"/>
+                </a:solidFill>
+                <a:latin typeface="Arial"/>
+              </a:rPr>
+              <a:t>, </a:t>
+            </a:r>
+            <a:r>
+              <a:rPr sz="980" b="1" i="1">
+                <a:solidFill>
+                  <a:srgbClr val="478A64"/>
+                </a:solidFill>
+                <a:latin typeface="Arial"/>
+              </a:rPr>
+              <a:t>P:Ccne2</a:t>
+            </a:r>
+            <a:r>
+              <a:rPr sz="980" b="0" i="0">
+                <a:solidFill>
+                  <a:srgbClr val="8A969E"/>
+                </a:solidFill>
+                <a:latin typeface="Arial"/>
+              </a:rPr>
+              <a:t>, </a:t>
+            </a:r>
+            <a:r>
+              <a:rPr sz="980" b="1" i="1">
+                <a:solidFill>
+                  <a:srgbClr val="478A64"/>
+                </a:solidFill>
+                <a:latin typeface="Arial"/>
+              </a:rPr>
+              <a:t>P:Kif20a</a:t>
+            </a:r>
+            <a:r>
+              <a:rPr sz="980" b="0" i="0">
+                <a:solidFill>
+                  <a:srgbClr val="8A969E"/>
+                </a:solidFill>
+                <a:latin typeface="Arial"/>
+              </a:rPr>
+              <a:t>, </a:t>
+            </a:r>
+            <a:r>
+              <a:rPr sz="980" b="1" i="1">
+                <a:solidFill>
+                  <a:srgbClr val="478A64"/>
+                </a:solidFill>
+                <a:latin typeface="Arial"/>
+              </a:rPr>
+              <a:t>P:Pcna</a:t>
+            </a:r>
+            <a:r>
+              <a:rPr sz="980" b="0" i="0">
+                <a:solidFill>
+                  <a:srgbClr val="8A969E"/>
+                </a:solidFill>
+                <a:latin typeface="Arial"/>
+              </a:rPr>
+              <a:t>, </a:t>
+            </a:r>
+            <a:r>
+              <a:rPr sz="980" b="1" i="1">
+                <a:solidFill>
+                  <a:srgbClr val="478A64"/>
+                </a:solidFill>
+                <a:latin typeface="Arial"/>
+              </a:rPr>
+              <a:t>P:Ccnf</a:t>
+            </a:r>
+            <a:r>
+              <a:rPr sz="980" b="0" i="0">
+                <a:solidFill>
+                  <a:srgbClr val="8A969E"/>
+                </a:solidFill>
+                <a:latin typeface="Arial"/>
+              </a:rPr>
+              <a:t>, </a:t>
+            </a:r>
+            <a:r>
+              <a:rPr sz="980" b="0" i="1">
+                <a:solidFill>
+                  <a:srgbClr val="59697A"/>
+                </a:solidFill>
+                <a:latin typeface="Arial"/>
+              </a:rPr>
+              <a:t>R:Ube2c</a:t>
+            </a:r>
+            <a:r>
+              <a:rPr sz="980" b="0" i="0">
+                <a:solidFill>
+                  <a:srgbClr val="8A969E"/>
+                </a:solidFill>
+                <a:latin typeface="Arial"/>
+              </a:rPr>
+              <a:t>, </a:t>
+            </a:r>
+            <a:r>
+              <a:rPr sz="980" b="0" i="1">
+                <a:solidFill>
+                  <a:srgbClr val="59697A"/>
+                </a:solidFill>
+                <a:latin typeface="Arial"/>
+              </a:rPr>
+              <a:t>R:Gmnn</a:t>
+            </a:r>
+          </a:p>
+        </p:txBody>
+      </p:sp>
+      <p:sp>
+        <p:nvSpPr>
+          <p:cNvPr id="25" name="Rectangle 24"/>
           <p:cNvSpPr/>
           <p:nvPr/>
         </p:nvSpPr>
         <p:spPr>
           <a:xfrm>
-            <a:off x="8631936" y="5093207"/>
-            <a:ext cx="91440" cy="91440"/>
-          </a:xfrm>
-          <a:prstGeom prst="ellipse">
+            <a:off x="393192" y="3456432"/>
+            <a:ext cx="5623560" cy="16459"/>
+          </a:xfrm>
+          <a:prstGeom prst="rect">
             <a:avLst/>
           </a:prstGeom>
           <a:solidFill>
-            <a:srgbClr val="D96552"/>
+            <a:srgbClr val="DDE4E8"/>
           </a:solidFill>
           <a:ln>
             <a:noFill/>
@@ -25208,14 +25840,14 @@
       </p:sp>
       <p:sp>
         <p:nvSpPr>
-          <p:cNvPr id="19" name="TextBox 18"/>
+          <p:cNvPr id="26" name="TextBox 25"/>
           <p:cNvSpPr txBox="1"/>
           <p:nvPr/>
         </p:nvSpPr>
         <p:spPr>
           <a:xfrm>
-            <a:off x="8796528" y="4983479"/>
-            <a:ext cx="2606039" cy="585216"/>
+            <a:off x="448056" y="3520439"/>
+            <a:ext cx="1170432" cy="521208"/>
           </a:xfrm>
           <a:prstGeom prst="rect">
             <a:avLst/>
@@ -25223,7 +25855,56 @@
           <a:noFill/>
         </p:spPr>
         <p:txBody>
-          <a:bodyPr wrap="square" lIns="18288" rIns="18288" tIns="18288" bIns="18288" anchor="ctr">
+          <a:bodyPr wrap="square" lIns="0" rIns="0" tIns="0" bIns="0" anchor="t">
+            <a:spAutoFit/>
+          </a:bodyPr>
+          <a:lstStyle/>
+          <a:p>
+            <a:pPr>
+              <a:spcAft>
+                <a:spcPts val="0"/>
+              </a:spcAft>
+            </a:pPr>
+            <a:r>
+              <a:rPr sz="1180" b="1" i="0">
+                <a:solidFill>
+                  <a:srgbClr val="082B55"/>
+                </a:solidFill>
+                <a:latin typeface="Arial"/>
+              </a:rPr>
+              <a:t>Spleen
+</a:t>
+            </a:r>
+            <a:r>
+              <a:rPr sz="900" b="0" i="0">
+                <a:solidFill>
+                  <a:srgbClr val="8A969E"/>
+                </a:solidFill>
+                <a:latin typeface="Arial"/>
+              </a:rPr>
+              <a:t>4 genes</a:t>
+            </a:r>
+          </a:p>
+        </p:txBody>
+      </p:sp>
+      <p:sp>
+        <p:nvSpPr>
+          <p:cNvPr id="27" name="TextBox 26"/>
+          <p:cNvSpPr txBox="1"/>
+          <p:nvPr/>
+        </p:nvSpPr>
+        <p:spPr>
+          <a:xfrm>
+            <a:off x="1645920" y="3511296"/>
+            <a:ext cx="621792" cy="219456"/>
+          </a:xfrm>
+          <a:prstGeom prst="rect">
+            <a:avLst/>
+          </a:prstGeom>
+          <a:noFill/>
+        </p:spPr>
+        <p:txBody>
+          <a:bodyPr wrap="square" lIns="0" rIns="0" tIns="0" bIns="0" anchor="t">
             <a:spAutoFit/>
           </a:bodyPr>
           <a:lstStyle/>
@@ -25234,27 +25915,27 @@
               </a:spcAft>
             </a:pPr>
             <a:r>
-              <a:rPr sz="1220" b="0" i="0">
-                <a:solidFill>
-                  <a:srgbClr val="263746"/>
+              <a:rPr sz="900" b="1" i="0">
+                <a:solidFill>
+                  <a:srgbClr val="D96552"/>
                 </a:solidFill>
                 <a:latin typeface="Arial"/>
               </a:rPr>
-              <a:t>Bulk RNA-seq cannot separate cell loss from lower transcription</a:t>
-            </a:r>
-          </a:p>
-        </p:txBody>
-      </p:sp>
-      <p:sp>
-        <p:nvSpPr>
-          <p:cNvPr id="20" name="TextBox 19"/>
+              <a:t>FLT higher</a:t>
+            </a:r>
+          </a:p>
+        </p:txBody>
+      </p:sp>
+      <p:sp>
+        <p:nvSpPr>
+          <p:cNvPr id="28" name="TextBox 27"/>
           <p:cNvSpPr txBox="1"/>
           <p:nvPr/>
         </p:nvSpPr>
         <p:spPr>
           <a:xfrm>
-            <a:off x="329184" y="6510528"/>
-            <a:ext cx="10972800" cy="173736"/>
+            <a:off x="2331720" y="3511296"/>
+            <a:ext cx="3611880" cy="274320"/>
           </a:xfrm>
           <a:prstGeom prst="rect">
             <a:avLst/>
@@ -25262,7 +25943,100 @@
           <a:noFill/>
         </p:spPr>
         <p:txBody>
-          <a:bodyPr wrap="square" lIns="18288" rIns="18288" tIns="18288" bIns="18288" anchor="ctr">
+          <a:bodyPr wrap="square" lIns="0" rIns="0" tIns="0" bIns="0" anchor="t">
+            <a:spAutoFit/>
+          </a:bodyPr>
+          <a:lstStyle/>
+          <a:p>
+            <a:pPr>
+              <a:spcAft>
+                <a:spcPts val="0"/>
+              </a:spcAft>
+            </a:pPr>
+            <a:r>
+              <a:rPr sz="980" b="1" i="1">
+                <a:solidFill>
+                  <a:srgbClr val="2D6496"/>
+                </a:solidFill>
+                <a:latin typeface="Arial"/>
+              </a:rPr>
+              <a:t>P:Rai14</a:t>
+            </a:r>
+            <a:r>
+              <a:rPr sz="980" b="0" i="0">
+                <a:solidFill>
+                  <a:srgbClr val="8A969E"/>
+                </a:solidFill>
+                <a:latin typeface="Arial"/>
+              </a:rPr>
+              <a:t>, </a:t>
+            </a:r>
+            <a:r>
+              <a:rPr sz="980" b="1" i="1">
+                <a:solidFill>
+                  <a:srgbClr val="2D6496"/>
+                </a:solidFill>
+                <a:latin typeface="Arial"/>
+              </a:rPr>
+              <a:t>P:Myl9</a:t>
+            </a:r>
+            <a:r>
+              <a:rPr sz="980" b="0" i="0">
+                <a:solidFill>
+                  <a:srgbClr val="8A969E"/>
+                </a:solidFill>
+                <a:latin typeface="Arial"/>
+              </a:rPr>
+              <a:t>, </a:t>
+            </a:r>
+            <a:r>
+              <a:rPr sz="980" b="1" i="1">
+                <a:solidFill>
+                  <a:srgbClr val="2D6496"/>
+                </a:solidFill>
+                <a:latin typeface="Arial"/>
+              </a:rPr>
+              <a:t>P:Ptprk</a:t>
+            </a:r>
+            <a:r>
+              <a:rPr sz="980" b="0" i="0">
+                <a:solidFill>
+                  <a:srgbClr val="8A969E"/>
+                </a:solidFill>
+                <a:latin typeface="Arial"/>
+              </a:rPr>
+              <a:t>, </a:t>
+            </a:r>
+            <a:r>
+              <a:rPr sz="980" b="0" i="1">
+                <a:solidFill>
+                  <a:srgbClr val="59697A"/>
+                </a:solidFill>
+                <a:latin typeface="Arial"/>
+              </a:rPr>
+              <a:t>R:Loxl1</a:t>
+            </a:r>
+          </a:p>
+        </p:txBody>
+      </p:sp>
+      <p:sp>
+        <p:nvSpPr>
+          <p:cNvPr id="29" name="TextBox 28"/>
+          <p:cNvSpPr txBox="1"/>
+          <p:nvPr/>
+        </p:nvSpPr>
+        <p:spPr>
+          <a:xfrm>
+            <a:off x="1645920" y="3785615"/>
+            <a:ext cx="621792" cy="219456"/>
+          </a:xfrm>
+          <a:prstGeom prst="rect">
+            <a:avLst/>
+          </a:prstGeom>
+          <a:noFill/>
+        </p:spPr>
+        <p:txBody>
+          <a:bodyPr wrap="square" lIns="0" rIns="0" tIns="0" bIns="0" anchor="t">
             <a:spAutoFit/>
           </a:bodyPr>
           <a:lstStyle/>
@@ -25273,13 +26047,2400 @@
               </a:spcAft>
             </a:pPr>
             <a:r>
-              <a:rPr sz="720" b="0" i="0">
-                <a:solidFill>
-                  <a:srgbClr val="8A969E"/>
+              <a:rPr sz="900" b="1" i="0">
+                <a:solidFill>
+                  <a:srgbClr val="178681"/>
                 </a:solidFill>
                 <a:latin typeface="Arial"/>
               </a:rPr>
-              <a:t>Context: Gridley et al. (2013), Horie et al. (2019), Keenan et al. (2025), and Shi et al. (2026).</a:t>
+              <a:t>FLT lower</a:t>
+            </a:r>
+          </a:p>
+        </p:txBody>
+      </p:sp>
+      <p:sp>
+        <p:nvSpPr>
+          <p:cNvPr id="30" name="TextBox 29"/>
+          <p:cNvSpPr txBox="1"/>
+          <p:nvPr/>
+        </p:nvSpPr>
+        <p:spPr>
+          <a:xfrm>
+            <a:off x="2331720" y="3785615"/>
+            <a:ext cx="3611880" cy="237744"/>
+          </a:xfrm>
+          <a:prstGeom prst="rect">
+            <a:avLst/>
+          </a:prstGeom>
+          <a:noFill/>
+        </p:spPr>
+        <p:txBody>
+          <a:bodyPr wrap="square" lIns="0" rIns="0" tIns="0" bIns="0" anchor="t">
+            <a:spAutoFit/>
+          </a:bodyPr>
+          <a:lstStyle/>
+          <a:p>
+            <a:pPr>
+              <a:spcAft>
+                <a:spcPts val="0"/>
+              </a:spcAft>
+            </a:pPr>
+            <a:r>
+              <a:rPr sz="980" b="0" i="1">
+                <a:solidFill>
+                  <a:srgbClr val="8A969E"/>
+                </a:solidFill>
+                <a:latin typeface="Arial"/>
+              </a:rPr>
+              <a:t>none</a:t>
+            </a:r>
+          </a:p>
+        </p:txBody>
+      </p:sp>
+      <p:sp>
+        <p:nvSpPr>
+          <p:cNvPr id="31" name="Rectangle 30"/>
+          <p:cNvSpPr/>
+          <p:nvPr/>
+        </p:nvSpPr>
+        <p:spPr>
+          <a:xfrm>
+            <a:off x="393192" y="4151376"/>
+            <a:ext cx="5623560" cy="16459"/>
+          </a:xfrm>
+          <a:prstGeom prst="rect">
+            <a:avLst/>
+          </a:prstGeom>
+          <a:solidFill>
+            <a:srgbClr val="DDE4E8"/>
+          </a:solidFill>
+          <a:ln>
+            <a:noFill/>
+          </a:ln>
+        </p:spPr>
+        <p:style>
+          <a:lnRef idx="1">
+            <a:schemeClr val="accent1"/>
+          </a:lnRef>
+          <a:fillRef idx="3">
+            <a:schemeClr val="accent1"/>
+          </a:fillRef>
+          <a:effectRef idx="2">
+            <a:schemeClr val="accent1"/>
+          </a:effectRef>
+          <a:fontRef idx="minor">
+            <a:schemeClr val="lt1"/>
+          </a:fontRef>
+        </p:style>
+        <p:txBody>
+          <a:bodyPr rtlCol="0" anchor="ctr"/>
+          <a:lstStyle/>
+          <a:p>
+            <a:pPr algn="ctr"/>
+          </a:p>
+        </p:txBody>
+      </p:sp>
+      <p:sp>
+        <p:nvSpPr>
+          <p:cNvPr id="32" name="TextBox 31"/>
+          <p:cNvSpPr txBox="1"/>
+          <p:nvPr/>
+        </p:nvSpPr>
+        <p:spPr>
+          <a:xfrm>
+            <a:off x="448056" y="4215384"/>
+            <a:ext cx="1170432" cy="466344"/>
+          </a:xfrm>
+          <a:prstGeom prst="rect">
+            <a:avLst/>
+          </a:prstGeom>
+          <a:noFill/>
+        </p:spPr>
+        <p:txBody>
+          <a:bodyPr wrap="square" lIns="0" rIns="0" tIns="0" bIns="0" anchor="t">
+            <a:spAutoFit/>
+          </a:bodyPr>
+          <a:lstStyle/>
+          <a:p>
+            <a:pPr>
+              <a:spcAft>
+                <a:spcPts val="0"/>
+              </a:spcAft>
+            </a:pPr>
+            <a:r>
+              <a:rPr sz="1180" b="1" i="0">
+                <a:solidFill>
+                  <a:srgbClr val="082B55"/>
+                </a:solidFill>
+                <a:latin typeface="Arial"/>
+              </a:rPr>
+              <a:t>Kidney
+</a:t>
+            </a:r>
+            <a:r>
+              <a:rPr sz="900" b="0" i="0">
+                <a:solidFill>
+                  <a:srgbClr val="8A969E"/>
+                </a:solidFill>
+                <a:latin typeface="Arial"/>
+              </a:rPr>
+              <a:t>2 genes</a:t>
+            </a:r>
+          </a:p>
+        </p:txBody>
+      </p:sp>
+      <p:sp>
+        <p:nvSpPr>
+          <p:cNvPr id="33" name="TextBox 32"/>
+          <p:cNvSpPr txBox="1"/>
+          <p:nvPr/>
+        </p:nvSpPr>
+        <p:spPr>
+          <a:xfrm>
+            <a:off x="1645920" y="4206240"/>
+            <a:ext cx="621792" cy="219456"/>
+          </a:xfrm>
+          <a:prstGeom prst="rect">
+            <a:avLst/>
+          </a:prstGeom>
+          <a:noFill/>
+        </p:spPr>
+        <p:txBody>
+          <a:bodyPr wrap="square" lIns="0" rIns="0" tIns="0" bIns="0" anchor="t">
+            <a:spAutoFit/>
+          </a:bodyPr>
+          <a:lstStyle/>
+          <a:p>
+            <a:pPr algn="l">
+              <a:spcAft>
+                <a:spcPts val="0"/>
+              </a:spcAft>
+            </a:pPr>
+            <a:r>
+              <a:rPr sz="900" b="1" i="0">
+                <a:solidFill>
+                  <a:srgbClr val="D96552"/>
+                </a:solidFill>
+                <a:latin typeface="Arial"/>
+              </a:rPr>
+              <a:t>FLT higher</a:t>
+            </a:r>
+          </a:p>
+        </p:txBody>
+      </p:sp>
+      <p:sp>
+        <p:nvSpPr>
+          <p:cNvPr id="34" name="TextBox 33"/>
+          <p:cNvSpPr txBox="1"/>
+          <p:nvPr/>
+        </p:nvSpPr>
+        <p:spPr>
+          <a:xfrm>
+            <a:off x="2331720" y="4206240"/>
+            <a:ext cx="3611880" cy="274320"/>
+          </a:xfrm>
+          <a:prstGeom prst="rect">
+            <a:avLst/>
+          </a:prstGeom>
+          <a:noFill/>
+        </p:spPr>
+        <p:txBody>
+          <a:bodyPr wrap="square" lIns="0" rIns="0" tIns="0" bIns="0" anchor="t">
+            <a:spAutoFit/>
+          </a:bodyPr>
+          <a:lstStyle/>
+          <a:p>
+            <a:pPr>
+              <a:spcAft>
+                <a:spcPts val="0"/>
+              </a:spcAft>
+            </a:pPr>
+            <a:r>
+              <a:rPr sz="980" b="1" i="1">
+                <a:solidFill>
+                  <a:srgbClr val="2D6496"/>
+                </a:solidFill>
+                <a:latin typeface="Arial"/>
+              </a:rPr>
+              <a:t>P:Inpp4b</a:t>
+            </a:r>
+            <a:r>
+              <a:rPr sz="980" b="0" i="0">
+                <a:solidFill>
+                  <a:srgbClr val="8A969E"/>
+                </a:solidFill>
+                <a:latin typeface="Arial"/>
+              </a:rPr>
+              <a:t>, </a:t>
+            </a:r>
+            <a:r>
+              <a:rPr sz="980" b="0" i="1">
+                <a:solidFill>
+                  <a:srgbClr val="59697A"/>
+                </a:solidFill>
+                <a:latin typeface="Arial"/>
+              </a:rPr>
+              <a:t>R:Slc37a4</a:t>
+            </a:r>
+          </a:p>
+        </p:txBody>
+      </p:sp>
+      <p:sp>
+        <p:nvSpPr>
+          <p:cNvPr id="35" name="TextBox 34"/>
+          <p:cNvSpPr txBox="1"/>
+          <p:nvPr/>
+        </p:nvSpPr>
+        <p:spPr>
+          <a:xfrm>
+            <a:off x="1645920" y="4480559"/>
+            <a:ext cx="621792" cy="182880"/>
+          </a:xfrm>
+          <a:prstGeom prst="rect">
+            <a:avLst/>
+          </a:prstGeom>
+          <a:noFill/>
+        </p:spPr>
+        <p:txBody>
+          <a:bodyPr wrap="square" lIns="0" rIns="0" tIns="0" bIns="0" anchor="t">
+            <a:spAutoFit/>
+          </a:bodyPr>
+          <a:lstStyle/>
+          <a:p>
+            <a:pPr algn="l">
+              <a:spcAft>
+                <a:spcPts val="0"/>
+              </a:spcAft>
+            </a:pPr>
+            <a:r>
+              <a:rPr sz="900" b="1" i="0">
+                <a:solidFill>
+                  <a:srgbClr val="178681"/>
+                </a:solidFill>
+                <a:latin typeface="Arial"/>
+              </a:rPr>
+              <a:t>FLT lower</a:t>
+            </a:r>
+          </a:p>
+        </p:txBody>
+      </p:sp>
+      <p:sp>
+        <p:nvSpPr>
+          <p:cNvPr id="36" name="TextBox 35"/>
+          <p:cNvSpPr txBox="1"/>
+          <p:nvPr/>
+        </p:nvSpPr>
+        <p:spPr>
+          <a:xfrm>
+            <a:off x="2331720" y="4480559"/>
+            <a:ext cx="3611880" cy="182880"/>
+          </a:xfrm>
+          <a:prstGeom prst="rect">
+            <a:avLst/>
+          </a:prstGeom>
+          <a:noFill/>
+        </p:spPr>
+        <p:txBody>
+          <a:bodyPr wrap="square" lIns="0" rIns="0" tIns="0" bIns="0" anchor="t">
+            <a:spAutoFit/>
+          </a:bodyPr>
+          <a:lstStyle/>
+          <a:p>
+            <a:pPr>
+              <a:spcAft>
+                <a:spcPts val="0"/>
+              </a:spcAft>
+            </a:pPr>
+            <a:r>
+              <a:rPr sz="980" b="0" i="1">
+                <a:solidFill>
+                  <a:srgbClr val="8A969E"/>
+                </a:solidFill>
+                <a:latin typeface="Arial"/>
+              </a:rPr>
+              <a:t>none</a:t>
+            </a:r>
+          </a:p>
+        </p:txBody>
+      </p:sp>
+      <p:sp>
+        <p:nvSpPr>
+          <p:cNvPr id="37" name="Rectangle 36"/>
+          <p:cNvSpPr/>
+          <p:nvPr/>
+        </p:nvSpPr>
+        <p:spPr>
+          <a:xfrm>
+            <a:off x="393192" y="4791456"/>
+            <a:ext cx="5623560" cy="16459"/>
+          </a:xfrm>
+          <a:prstGeom prst="rect">
+            <a:avLst/>
+          </a:prstGeom>
+          <a:solidFill>
+            <a:srgbClr val="DDE4E8"/>
+          </a:solidFill>
+          <a:ln>
+            <a:noFill/>
+          </a:ln>
+        </p:spPr>
+        <p:style>
+          <a:lnRef idx="1">
+            <a:schemeClr val="accent1"/>
+          </a:lnRef>
+          <a:fillRef idx="3">
+            <a:schemeClr val="accent1"/>
+          </a:fillRef>
+          <a:effectRef idx="2">
+            <a:schemeClr val="accent1"/>
+          </a:effectRef>
+          <a:fontRef idx="minor">
+            <a:schemeClr val="lt1"/>
+          </a:fontRef>
+        </p:style>
+        <p:txBody>
+          <a:bodyPr rtlCol="0" anchor="ctr"/>
+          <a:lstStyle/>
+          <a:p>
+            <a:pPr algn="ctr"/>
+          </a:p>
+        </p:txBody>
+      </p:sp>
+      <p:sp>
+        <p:nvSpPr>
+          <p:cNvPr id="38" name="TextBox 37"/>
+          <p:cNvSpPr txBox="1"/>
+          <p:nvPr/>
+        </p:nvSpPr>
+        <p:spPr>
+          <a:xfrm>
+            <a:off x="448056" y="4855464"/>
+            <a:ext cx="1170432" cy="466344"/>
+          </a:xfrm>
+          <a:prstGeom prst="rect">
+            <a:avLst/>
+          </a:prstGeom>
+          <a:noFill/>
+        </p:spPr>
+        <p:txBody>
+          <a:bodyPr wrap="square" lIns="0" rIns="0" tIns="0" bIns="0" anchor="t">
+            <a:spAutoFit/>
+          </a:bodyPr>
+          <a:lstStyle/>
+          <a:p>
+            <a:pPr>
+              <a:spcAft>
+                <a:spcPts val="0"/>
+              </a:spcAft>
+            </a:pPr>
+            <a:r>
+              <a:rPr sz="1180" b="1" i="0">
+                <a:solidFill>
+                  <a:srgbClr val="082B55"/>
+                </a:solidFill>
+                <a:latin typeface="Arial"/>
+              </a:rPr>
+              <a:t>Gastrocnemius
+</a:t>
+            </a:r>
+            <a:r>
+              <a:rPr sz="900" b="0" i="0">
+                <a:solidFill>
+                  <a:srgbClr val="8A969E"/>
+                </a:solidFill>
+                <a:latin typeface="Arial"/>
+              </a:rPr>
+              <a:t>2 genes</a:t>
+            </a:r>
+          </a:p>
+        </p:txBody>
+      </p:sp>
+      <p:sp>
+        <p:nvSpPr>
+          <p:cNvPr id="39" name="TextBox 38"/>
+          <p:cNvSpPr txBox="1"/>
+          <p:nvPr/>
+        </p:nvSpPr>
+        <p:spPr>
+          <a:xfrm>
+            <a:off x="1645920" y="4846320"/>
+            <a:ext cx="621792" cy="219456"/>
+          </a:xfrm>
+          <a:prstGeom prst="rect">
+            <a:avLst/>
+          </a:prstGeom>
+          <a:noFill/>
+        </p:spPr>
+        <p:txBody>
+          <a:bodyPr wrap="square" lIns="0" rIns="0" tIns="0" bIns="0" anchor="t">
+            <a:spAutoFit/>
+          </a:bodyPr>
+          <a:lstStyle/>
+          <a:p>
+            <a:pPr algn="l">
+              <a:spcAft>
+                <a:spcPts val="0"/>
+              </a:spcAft>
+            </a:pPr>
+            <a:r>
+              <a:rPr sz="900" b="1" i="0">
+                <a:solidFill>
+                  <a:srgbClr val="D96552"/>
+                </a:solidFill>
+                <a:latin typeface="Arial"/>
+              </a:rPr>
+              <a:t>FLT higher</a:t>
+            </a:r>
+          </a:p>
+        </p:txBody>
+      </p:sp>
+      <p:sp>
+        <p:nvSpPr>
+          <p:cNvPr id="40" name="TextBox 39"/>
+          <p:cNvSpPr txBox="1"/>
+          <p:nvPr/>
+        </p:nvSpPr>
+        <p:spPr>
+          <a:xfrm>
+            <a:off x="2331720" y="4846320"/>
+            <a:ext cx="3611880" cy="246888"/>
+          </a:xfrm>
+          <a:prstGeom prst="rect">
+            <a:avLst/>
+          </a:prstGeom>
+          <a:noFill/>
+        </p:spPr>
+        <p:txBody>
+          <a:bodyPr wrap="square" lIns="0" rIns="0" tIns="0" bIns="0" anchor="t">
+            <a:spAutoFit/>
+          </a:bodyPr>
+          <a:lstStyle/>
+          <a:p>
+            <a:pPr>
+              <a:spcAft>
+                <a:spcPts val="0"/>
+              </a:spcAft>
+            </a:pPr>
+            <a:r>
+              <a:rPr sz="980" b="1" i="1">
+                <a:solidFill>
+                  <a:srgbClr val="478A64"/>
+                </a:solidFill>
+                <a:latin typeface="Arial"/>
+              </a:rPr>
+              <a:t>P:Nfkbia</a:t>
+            </a:r>
+          </a:p>
+        </p:txBody>
+      </p:sp>
+      <p:sp>
+        <p:nvSpPr>
+          <p:cNvPr id="41" name="TextBox 40"/>
+          <p:cNvSpPr txBox="1"/>
+          <p:nvPr/>
+        </p:nvSpPr>
+        <p:spPr>
+          <a:xfrm>
+            <a:off x="1645920" y="5093208"/>
+            <a:ext cx="621792" cy="210311"/>
+          </a:xfrm>
+          <a:prstGeom prst="rect">
+            <a:avLst/>
+          </a:prstGeom>
+          <a:noFill/>
+        </p:spPr>
+        <p:txBody>
+          <a:bodyPr wrap="square" lIns="0" rIns="0" tIns="0" bIns="0" anchor="t">
+            <a:spAutoFit/>
+          </a:bodyPr>
+          <a:lstStyle/>
+          <a:p>
+            <a:pPr algn="l">
+              <a:spcAft>
+                <a:spcPts val="0"/>
+              </a:spcAft>
+            </a:pPr>
+            <a:r>
+              <a:rPr sz="900" b="1" i="0">
+                <a:solidFill>
+                  <a:srgbClr val="178681"/>
+                </a:solidFill>
+                <a:latin typeface="Arial"/>
+              </a:rPr>
+              <a:t>FLT lower</a:t>
+            </a:r>
+          </a:p>
+        </p:txBody>
+      </p:sp>
+      <p:sp>
+        <p:nvSpPr>
+          <p:cNvPr id="42" name="TextBox 41"/>
+          <p:cNvSpPr txBox="1"/>
+          <p:nvPr/>
+        </p:nvSpPr>
+        <p:spPr>
+          <a:xfrm>
+            <a:off x="2331720" y="5093208"/>
+            <a:ext cx="3611880" cy="210311"/>
+          </a:xfrm>
+          <a:prstGeom prst="rect">
+            <a:avLst/>
+          </a:prstGeom>
+          <a:noFill/>
+        </p:spPr>
+        <p:txBody>
+          <a:bodyPr wrap="square" lIns="0" rIns="0" tIns="0" bIns="0" anchor="t">
+            <a:spAutoFit/>
+          </a:bodyPr>
+          <a:lstStyle/>
+          <a:p>
+            <a:pPr>
+              <a:spcAft>
+                <a:spcPts val="0"/>
+              </a:spcAft>
+            </a:pPr>
+            <a:r>
+              <a:rPr sz="980" b="1" i="1">
+                <a:solidFill>
+                  <a:srgbClr val="2D6496"/>
+                </a:solidFill>
+                <a:latin typeface="Arial"/>
+              </a:rPr>
+              <a:t>P:Fhl2</a:t>
+            </a:r>
+          </a:p>
+        </p:txBody>
+      </p:sp>
+      <p:sp>
+        <p:nvSpPr>
+          <p:cNvPr id="43" name="Rectangle 42"/>
+          <p:cNvSpPr/>
+          <p:nvPr/>
+        </p:nvSpPr>
+        <p:spPr>
+          <a:xfrm>
+            <a:off x="393192" y="5431536"/>
+            <a:ext cx="5623560" cy="16459"/>
+          </a:xfrm>
+          <a:prstGeom prst="rect">
+            <a:avLst/>
+          </a:prstGeom>
+          <a:solidFill>
+            <a:srgbClr val="DDE4E8"/>
+          </a:solidFill>
+          <a:ln>
+            <a:noFill/>
+          </a:ln>
+        </p:spPr>
+        <p:style>
+          <a:lnRef idx="1">
+            <a:schemeClr val="accent1"/>
+          </a:lnRef>
+          <a:fillRef idx="3">
+            <a:schemeClr val="accent1"/>
+          </a:fillRef>
+          <a:effectRef idx="2">
+            <a:schemeClr val="accent1"/>
+          </a:effectRef>
+          <a:fontRef idx="minor">
+            <a:schemeClr val="lt1"/>
+          </a:fontRef>
+        </p:style>
+        <p:txBody>
+          <a:bodyPr rtlCol="0" anchor="ctr"/>
+          <a:lstStyle/>
+          <a:p>
+            <a:pPr algn="ctr"/>
+          </a:p>
+        </p:txBody>
+      </p:sp>
+      <p:sp>
+        <p:nvSpPr>
+          <p:cNvPr id="44" name="TextBox 43"/>
+          <p:cNvSpPr txBox="1"/>
+          <p:nvPr/>
+        </p:nvSpPr>
+        <p:spPr>
+          <a:xfrm>
+            <a:off x="448056" y="5495544"/>
+            <a:ext cx="1170432" cy="374904"/>
+          </a:xfrm>
+          <a:prstGeom prst="rect">
+            <a:avLst/>
+          </a:prstGeom>
+          <a:noFill/>
+        </p:spPr>
+        <p:txBody>
+          <a:bodyPr wrap="square" lIns="0" rIns="0" tIns="0" bIns="0" anchor="t">
+            <a:spAutoFit/>
+          </a:bodyPr>
+          <a:lstStyle/>
+          <a:p>
+            <a:pPr>
+              <a:spcAft>
+                <a:spcPts val="0"/>
+              </a:spcAft>
+            </a:pPr>
+            <a:r>
+              <a:rPr sz="1180" b="1" i="0">
+                <a:solidFill>
+                  <a:srgbClr val="082B55"/>
+                </a:solidFill>
+                <a:latin typeface="Arial"/>
+              </a:rPr>
+              <a:t>Eye
+</a:t>
+            </a:r>
+            <a:r>
+              <a:rPr sz="900" b="0" i="0">
+                <a:solidFill>
+                  <a:srgbClr val="8A969E"/>
+                </a:solidFill>
+                <a:latin typeface="Arial"/>
+              </a:rPr>
+              <a:t>1 gene</a:t>
+            </a:r>
+          </a:p>
+        </p:txBody>
+      </p:sp>
+      <p:sp>
+        <p:nvSpPr>
+          <p:cNvPr id="45" name="TextBox 44"/>
+          <p:cNvSpPr txBox="1"/>
+          <p:nvPr/>
+        </p:nvSpPr>
+        <p:spPr>
+          <a:xfrm>
+            <a:off x="1645920" y="5486400"/>
+            <a:ext cx="621792" cy="173736"/>
+          </a:xfrm>
+          <a:prstGeom prst="rect">
+            <a:avLst/>
+          </a:prstGeom>
+          <a:noFill/>
+        </p:spPr>
+        <p:txBody>
+          <a:bodyPr wrap="square" lIns="0" rIns="0" tIns="0" bIns="0" anchor="t">
+            <a:spAutoFit/>
+          </a:bodyPr>
+          <a:lstStyle/>
+          <a:p>
+            <a:pPr algn="l">
+              <a:spcAft>
+                <a:spcPts val="0"/>
+              </a:spcAft>
+            </a:pPr>
+            <a:r>
+              <a:rPr sz="900" b="1" i="0">
+                <a:solidFill>
+                  <a:srgbClr val="D96552"/>
+                </a:solidFill>
+                <a:latin typeface="Arial"/>
+              </a:rPr>
+              <a:t>FLT higher</a:t>
+            </a:r>
+          </a:p>
+        </p:txBody>
+      </p:sp>
+      <p:sp>
+        <p:nvSpPr>
+          <p:cNvPr id="46" name="TextBox 45"/>
+          <p:cNvSpPr txBox="1"/>
+          <p:nvPr/>
+        </p:nvSpPr>
+        <p:spPr>
+          <a:xfrm>
+            <a:off x="2331720" y="5486400"/>
+            <a:ext cx="3611880" cy="173736"/>
+          </a:xfrm>
+          <a:prstGeom prst="rect">
+            <a:avLst/>
+          </a:prstGeom>
+          <a:noFill/>
+        </p:spPr>
+        <p:txBody>
+          <a:bodyPr wrap="square" lIns="0" rIns="0" tIns="0" bIns="0" anchor="t">
+            <a:spAutoFit/>
+          </a:bodyPr>
+          <a:lstStyle/>
+          <a:p>
+            <a:pPr>
+              <a:spcAft>
+                <a:spcPts val="0"/>
+              </a:spcAft>
+            </a:pPr>
+            <a:r>
+              <a:rPr sz="980" b="0" i="1">
+                <a:solidFill>
+                  <a:srgbClr val="8A969E"/>
+                </a:solidFill>
+                <a:latin typeface="Arial"/>
+              </a:rPr>
+              <a:t>none</a:t>
+            </a:r>
+          </a:p>
+        </p:txBody>
+      </p:sp>
+      <p:sp>
+        <p:nvSpPr>
+          <p:cNvPr id="47" name="TextBox 46"/>
+          <p:cNvSpPr txBox="1"/>
+          <p:nvPr/>
+        </p:nvSpPr>
+        <p:spPr>
+          <a:xfrm>
+            <a:off x="1645920" y="5660136"/>
+            <a:ext cx="621792" cy="192024"/>
+          </a:xfrm>
+          <a:prstGeom prst="rect">
+            <a:avLst/>
+          </a:prstGeom>
+          <a:noFill/>
+        </p:spPr>
+        <p:txBody>
+          <a:bodyPr wrap="square" lIns="0" rIns="0" tIns="0" bIns="0" anchor="t">
+            <a:spAutoFit/>
+          </a:bodyPr>
+          <a:lstStyle/>
+          <a:p>
+            <a:pPr algn="l">
+              <a:spcAft>
+                <a:spcPts val="0"/>
+              </a:spcAft>
+            </a:pPr>
+            <a:r>
+              <a:rPr sz="900" b="1" i="0">
+                <a:solidFill>
+                  <a:srgbClr val="178681"/>
+                </a:solidFill>
+                <a:latin typeface="Arial"/>
+              </a:rPr>
+              <a:t>FLT lower</a:t>
+            </a:r>
+          </a:p>
+        </p:txBody>
+      </p:sp>
+      <p:sp>
+        <p:nvSpPr>
+          <p:cNvPr id="48" name="TextBox 47"/>
+          <p:cNvSpPr txBox="1"/>
+          <p:nvPr/>
+        </p:nvSpPr>
+        <p:spPr>
+          <a:xfrm>
+            <a:off x="2331720" y="5660136"/>
+            <a:ext cx="3611880" cy="192024"/>
+          </a:xfrm>
+          <a:prstGeom prst="rect">
+            <a:avLst/>
+          </a:prstGeom>
+          <a:noFill/>
+        </p:spPr>
+        <p:txBody>
+          <a:bodyPr wrap="square" lIns="0" rIns="0" tIns="0" bIns="0" anchor="t">
+            <a:spAutoFit/>
+          </a:bodyPr>
+          <a:lstStyle/>
+          <a:p>
+            <a:pPr>
+              <a:spcAft>
+                <a:spcPts val="0"/>
+              </a:spcAft>
+            </a:pPr>
+            <a:r>
+              <a:rPr sz="980" b="0" i="1">
+                <a:solidFill>
+                  <a:srgbClr val="59697A"/>
+                </a:solidFill>
+                <a:latin typeface="Arial"/>
+              </a:rPr>
+              <a:t>R:Klhl21</a:t>
+            </a:r>
+          </a:p>
+        </p:txBody>
+      </p:sp>
+      <p:sp>
+        <p:nvSpPr>
+          <p:cNvPr id="49" name="Rectangle 48"/>
+          <p:cNvSpPr/>
+          <p:nvPr/>
+        </p:nvSpPr>
+        <p:spPr>
+          <a:xfrm>
+            <a:off x="6181344" y="2048256"/>
+            <a:ext cx="5623560" cy="16459"/>
+          </a:xfrm>
+          <a:prstGeom prst="rect">
+            <a:avLst/>
+          </a:prstGeom>
+          <a:solidFill>
+            <a:srgbClr val="DDE4E8"/>
+          </a:solidFill>
+          <a:ln>
+            <a:noFill/>
+          </a:ln>
+        </p:spPr>
+        <p:style>
+          <a:lnRef idx="1">
+            <a:schemeClr val="accent1"/>
+          </a:lnRef>
+          <a:fillRef idx="3">
+            <a:schemeClr val="accent1"/>
+          </a:fillRef>
+          <a:effectRef idx="2">
+            <a:schemeClr val="accent1"/>
+          </a:effectRef>
+          <a:fontRef idx="minor">
+            <a:schemeClr val="lt1"/>
+          </a:fontRef>
+        </p:style>
+        <p:txBody>
+          <a:bodyPr rtlCol="0" anchor="ctr"/>
+          <a:lstStyle/>
+          <a:p>
+            <a:pPr algn="ctr"/>
+          </a:p>
+        </p:txBody>
+      </p:sp>
+      <p:sp>
+        <p:nvSpPr>
+          <p:cNvPr id="50" name="TextBox 49"/>
+          <p:cNvSpPr txBox="1"/>
+          <p:nvPr/>
+        </p:nvSpPr>
+        <p:spPr>
+          <a:xfrm>
+            <a:off x="6236207" y="2112264"/>
+            <a:ext cx="1170432" cy="1051560"/>
+          </a:xfrm>
+          <a:prstGeom prst="rect">
+            <a:avLst/>
+          </a:prstGeom>
+          <a:noFill/>
+        </p:spPr>
+        <p:txBody>
+          <a:bodyPr wrap="square" lIns="0" rIns="0" tIns="0" bIns="0" anchor="t">
+            <a:spAutoFit/>
+          </a:bodyPr>
+          <a:lstStyle/>
+          <a:p>
+            <a:pPr>
+              <a:spcAft>
+                <a:spcPts val="0"/>
+              </a:spcAft>
+            </a:pPr>
+            <a:r>
+              <a:rPr sz="1180" b="1" i="0">
+                <a:solidFill>
+                  <a:srgbClr val="082B55"/>
+                </a:solidFill>
+                <a:latin typeface="Arial"/>
+              </a:rPr>
+              <a:t>Skeletal muscle
+(pooled)
+</a:t>
+            </a:r>
+            <a:r>
+              <a:rPr sz="900" b="0" i="0">
+                <a:solidFill>
+                  <a:srgbClr val="8A969E"/>
+                </a:solidFill>
+                <a:latin typeface="Arial"/>
+              </a:rPr>
+              <a:t>12 genes</a:t>
+            </a:r>
+          </a:p>
+        </p:txBody>
+      </p:sp>
+      <p:sp>
+        <p:nvSpPr>
+          <p:cNvPr id="51" name="TextBox 50"/>
+          <p:cNvSpPr txBox="1"/>
+          <p:nvPr/>
+        </p:nvSpPr>
+        <p:spPr>
+          <a:xfrm>
+            <a:off x="7434071" y="2103120"/>
+            <a:ext cx="621792" cy="219456"/>
+          </a:xfrm>
+          <a:prstGeom prst="rect">
+            <a:avLst/>
+          </a:prstGeom>
+          <a:noFill/>
+        </p:spPr>
+        <p:txBody>
+          <a:bodyPr wrap="square" lIns="0" rIns="0" tIns="0" bIns="0" anchor="t">
+            <a:spAutoFit/>
+          </a:bodyPr>
+          <a:lstStyle/>
+          <a:p>
+            <a:pPr algn="l">
+              <a:spcAft>
+                <a:spcPts val="0"/>
+              </a:spcAft>
+            </a:pPr>
+            <a:r>
+              <a:rPr sz="900" b="1" i="0">
+                <a:solidFill>
+                  <a:srgbClr val="D96552"/>
+                </a:solidFill>
+                <a:latin typeface="Arial"/>
+              </a:rPr>
+              <a:t>FLT higher</a:t>
+            </a:r>
+          </a:p>
+        </p:txBody>
+      </p:sp>
+      <p:sp>
+        <p:nvSpPr>
+          <p:cNvPr id="52" name="TextBox 51"/>
+          <p:cNvSpPr txBox="1"/>
+          <p:nvPr/>
+        </p:nvSpPr>
+        <p:spPr>
+          <a:xfrm>
+            <a:off x="8119871" y="2103120"/>
+            <a:ext cx="3611880" cy="512064"/>
+          </a:xfrm>
+          <a:prstGeom prst="rect">
+            <a:avLst/>
+          </a:prstGeom>
+          <a:noFill/>
+        </p:spPr>
+        <p:txBody>
+          <a:bodyPr wrap="square" lIns="0" rIns="0" tIns="0" bIns="0" anchor="t">
+            <a:spAutoFit/>
+          </a:bodyPr>
+          <a:lstStyle/>
+          <a:p>
+            <a:pPr>
+              <a:spcAft>
+                <a:spcPts val="0"/>
+              </a:spcAft>
+            </a:pPr>
+            <a:r>
+              <a:rPr sz="980" b="0" i="1">
+                <a:solidFill>
+                  <a:srgbClr val="59697A"/>
+                </a:solidFill>
+                <a:latin typeface="Arial"/>
+              </a:rPr>
+              <a:t>R:Sox4</a:t>
+            </a:r>
+            <a:r>
+              <a:rPr sz="980" b="0" i="0">
+                <a:solidFill>
+                  <a:srgbClr val="8A969E"/>
+                </a:solidFill>
+                <a:latin typeface="Arial"/>
+              </a:rPr>
+              <a:t>, </a:t>
+            </a:r>
+            <a:r>
+              <a:rPr sz="980" b="0" i="1">
+                <a:solidFill>
+                  <a:srgbClr val="59697A"/>
+                </a:solidFill>
+                <a:latin typeface="Arial"/>
+              </a:rPr>
+              <a:t>R:Cebpd</a:t>
+            </a:r>
+            <a:r>
+              <a:rPr sz="980" b="0" i="0">
+                <a:solidFill>
+                  <a:srgbClr val="8A969E"/>
+                </a:solidFill>
+                <a:latin typeface="Arial"/>
+              </a:rPr>
+              <a:t>, </a:t>
+            </a:r>
+            <a:r>
+              <a:rPr sz="980" b="0" i="1">
+                <a:solidFill>
+                  <a:srgbClr val="59697A"/>
+                </a:solidFill>
+                <a:latin typeface="Arial"/>
+              </a:rPr>
+              <a:t>R:Sh3bp5</a:t>
+            </a:r>
+            <a:r>
+              <a:rPr sz="980" b="0" i="0">
+                <a:solidFill>
+                  <a:srgbClr val="8A969E"/>
+                </a:solidFill>
+                <a:latin typeface="Arial"/>
+              </a:rPr>
+              <a:t>, </a:t>
+            </a:r>
+            <a:r>
+              <a:rPr sz="980" b="0" i="1">
+                <a:solidFill>
+                  <a:srgbClr val="59697A"/>
+                </a:solidFill>
+                <a:latin typeface="Arial"/>
+              </a:rPr>
+              <a:t>R:Prkcd</a:t>
+            </a:r>
+            <a:r>
+              <a:rPr sz="980" b="0" i="0">
+                <a:solidFill>
+                  <a:srgbClr val="8A969E"/>
+                </a:solidFill>
+                <a:latin typeface="Arial"/>
+              </a:rPr>
+              <a:t>, </a:t>
+            </a:r>
+            <a:r>
+              <a:rPr sz="980" b="0" i="1">
+                <a:solidFill>
+                  <a:srgbClr val="59697A"/>
+                </a:solidFill>
+                <a:latin typeface="Arial"/>
+              </a:rPr>
+              <a:t>R:Arid5b</a:t>
+            </a:r>
+            <a:r>
+              <a:rPr sz="980" b="0" i="0">
+                <a:solidFill>
+                  <a:srgbClr val="8A969E"/>
+                </a:solidFill>
+                <a:latin typeface="Arial"/>
+              </a:rPr>
+              <a:t>, </a:t>
+            </a:r>
+            <a:r>
+              <a:rPr sz="980" b="0" i="1">
+                <a:solidFill>
+                  <a:srgbClr val="59697A"/>
+                </a:solidFill>
+                <a:latin typeface="Arial"/>
+              </a:rPr>
+              <a:t>R:Sesn1</a:t>
+            </a:r>
+            <a:r>
+              <a:rPr sz="980" b="0" i="0">
+                <a:solidFill>
+                  <a:srgbClr val="8A969E"/>
+                </a:solidFill>
+                <a:latin typeface="Arial"/>
+              </a:rPr>
+              <a:t>, </a:t>
+            </a:r>
+            <a:r>
+              <a:rPr sz="980" b="0" i="1">
+                <a:solidFill>
+                  <a:srgbClr val="59697A"/>
+                </a:solidFill>
+                <a:latin typeface="Arial"/>
+              </a:rPr>
+              <a:t>R:Tle1</a:t>
+            </a:r>
+          </a:p>
+        </p:txBody>
+      </p:sp>
+      <p:sp>
+        <p:nvSpPr>
+          <p:cNvPr id="53" name="TextBox 52"/>
+          <p:cNvSpPr txBox="1"/>
+          <p:nvPr/>
+        </p:nvSpPr>
+        <p:spPr>
+          <a:xfrm>
+            <a:off x="7434071" y="2615184"/>
+            <a:ext cx="621792" cy="219456"/>
+          </a:xfrm>
+          <a:prstGeom prst="rect">
+            <a:avLst/>
+          </a:prstGeom>
+          <a:noFill/>
+        </p:spPr>
+        <p:txBody>
+          <a:bodyPr wrap="square" lIns="0" rIns="0" tIns="0" bIns="0" anchor="t">
+            <a:spAutoFit/>
+          </a:bodyPr>
+          <a:lstStyle/>
+          <a:p>
+            <a:pPr algn="l">
+              <a:spcAft>
+                <a:spcPts val="0"/>
+              </a:spcAft>
+            </a:pPr>
+            <a:r>
+              <a:rPr sz="900" b="1" i="0">
+                <a:solidFill>
+                  <a:srgbClr val="178681"/>
+                </a:solidFill>
+                <a:latin typeface="Arial"/>
+              </a:rPr>
+              <a:t>FLT lower</a:t>
+            </a:r>
+          </a:p>
+        </p:txBody>
+      </p:sp>
+      <p:sp>
+        <p:nvSpPr>
+          <p:cNvPr id="54" name="TextBox 53"/>
+          <p:cNvSpPr txBox="1"/>
+          <p:nvPr/>
+        </p:nvSpPr>
+        <p:spPr>
+          <a:xfrm>
+            <a:off x="8119871" y="2615184"/>
+            <a:ext cx="3611880" cy="530352"/>
+          </a:xfrm>
+          <a:prstGeom prst="rect">
+            <a:avLst/>
+          </a:prstGeom>
+          <a:noFill/>
+        </p:spPr>
+        <p:txBody>
+          <a:bodyPr wrap="square" lIns="0" rIns="0" tIns="0" bIns="0" anchor="t">
+            <a:spAutoFit/>
+          </a:bodyPr>
+          <a:lstStyle/>
+          <a:p>
+            <a:pPr>
+              <a:spcAft>
+                <a:spcPts val="0"/>
+              </a:spcAft>
+            </a:pPr>
+            <a:r>
+              <a:rPr sz="980" b="1" i="1">
+                <a:solidFill>
+                  <a:srgbClr val="2D6496"/>
+                </a:solidFill>
+                <a:latin typeface="Arial"/>
+              </a:rPr>
+              <a:t>P:Klhl21</a:t>
+            </a:r>
+            <a:r>
+              <a:rPr sz="980" b="0" i="0">
+                <a:solidFill>
+                  <a:srgbClr val="8A969E"/>
+                </a:solidFill>
+                <a:latin typeface="Arial"/>
+              </a:rPr>
+              <a:t>, </a:t>
+            </a:r>
+            <a:r>
+              <a:rPr sz="980" b="1" i="1">
+                <a:solidFill>
+                  <a:srgbClr val="2D6496"/>
+                </a:solidFill>
+                <a:latin typeface="Arial"/>
+              </a:rPr>
+              <a:t>P:Mapkapk5</a:t>
+            </a:r>
+            <a:r>
+              <a:rPr sz="980" b="0" i="0">
+                <a:solidFill>
+                  <a:srgbClr val="8A969E"/>
+                </a:solidFill>
+                <a:latin typeface="Arial"/>
+              </a:rPr>
+              <a:t>, </a:t>
+            </a:r>
+            <a:r>
+              <a:rPr sz="980" b="1" i="1">
+                <a:solidFill>
+                  <a:srgbClr val="2D6496"/>
+                </a:solidFill>
+                <a:latin typeface="Arial"/>
+              </a:rPr>
+              <a:t>P:Reep5</a:t>
+            </a:r>
+            <a:r>
+              <a:rPr sz="980" b="0" i="0">
+                <a:solidFill>
+                  <a:srgbClr val="8A969E"/>
+                </a:solidFill>
+                <a:latin typeface="Arial"/>
+              </a:rPr>
+              <a:t>, </a:t>
+            </a:r>
+            <a:r>
+              <a:rPr sz="980" b="1" i="1">
+                <a:solidFill>
+                  <a:srgbClr val="2D6496"/>
+                </a:solidFill>
+                <a:latin typeface="Arial"/>
+              </a:rPr>
+              <a:t>P:Itgb5</a:t>
+            </a:r>
+            <a:r>
+              <a:rPr sz="980" b="0" i="0">
+                <a:solidFill>
+                  <a:srgbClr val="8A969E"/>
+                </a:solidFill>
+                <a:latin typeface="Arial"/>
+              </a:rPr>
+              <a:t>, </a:t>
+            </a:r>
+            <a:r>
+              <a:rPr sz="980" b="0" i="1">
+                <a:solidFill>
+                  <a:srgbClr val="59697A"/>
+                </a:solidFill>
+                <a:latin typeface="Arial"/>
+              </a:rPr>
+              <a:t>R:Bphl</a:t>
+            </a:r>
+          </a:p>
+        </p:txBody>
+      </p:sp>
+      <p:sp>
+        <p:nvSpPr>
+          <p:cNvPr id="55" name="Rectangle 54"/>
+          <p:cNvSpPr/>
+          <p:nvPr/>
+        </p:nvSpPr>
+        <p:spPr>
+          <a:xfrm>
+            <a:off x="6181344" y="3273552"/>
+            <a:ext cx="5623560" cy="16459"/>
+          </a:xfrm>
+          <a:prstGeom prst="rect">
+            <a:avLst/>
+          </a:prstGeom>
+          <a:solidFill>
+            <a:srgbClr val="DDE4E8"/>
+          </a:solidFill>
+          <a:ln>
+            <a:noFill/>
+          </a:ln>
+        </p:spPr>
+        <p:style>
+          <a:lnRef idx="1">
+            <a:schemeClr val="accent1"/>
+          </a:lnRef>
+          <a:fillRef idx="3">
+            <a:schemeClr val="accent1"/>
+          </a:fillRef>
+          <a:effectRef idx="2">
+            <a:schemeClr val="accent1"/>
+          </a:effectRef>
+          <a:fontRef idx="minor">
+            <a:schemeClr val="lt1"/>
+          </a:fontRef>
+        </p:style>
+        <p:txBody>
+          <a:bodyPr rtlCol="0" anchor="ctr"/>
+          <a:lstStyle/>
+          <a:p>
+            <a:pPr algn="ctr"/>
+          </a:p>
+        </p:txBody>
+      </p:sp>
+      <p:sp>
+        <p:nvSpPr>
+          <p:cNvPr id="56" name="TextBox 55"/>
+          <p:cNvSpPr txBox="1"/>
+          <p:nvPr/>
+        </p:nvSpPr>
+        <p:spPr>
+          <a:xfrm>
+            <a:off x="6236207" y="3337560"/>
+            <a:ext cx="1170432" cy="530352"/>
+          </a:xfrm>
+          <a:prstGeom prst="rect">
+            <a:avLst/>
+          </a:prstGeom>
+          <a:noFill/>
+        </p:spPr>
+        <p:txBody>
+          <a:bodyPr wrap="square" lIns="0" rIns="0" tIns="0" bIns="0" anchor="t">
+            <a:spAutoFit/>
+          </a:bodyPr>
+          <a:lstStyle/>
+          <a:p>
+            <a:pPr>
+              <a:spcAft>
+                <a:spcPts val="0"/>
+              </a:spcAft>
+            </a:pPr>
+            <a:r>
+              <a:rPr sz="1180" b="1" i="0">
+                <a:solidFill>
+                  <a:srgbClr val="082B55"/>
+                </a:solidFill>
+                <a:latin typeface="Arial"/>
+              </a:rPr>
+              <a:t>Soleus
+</a:t>
+            </a:r>
+            <a:r>
+              <a:rPr sz="900" b="0" i="0">
+                <a:solidFill>
+                  <a:srgbClr val="8A969E"/>
+                </a:solidFill>
+                <a:latin typeface="Arial"/>
+              </a:rPr>
+              <a:t>5 genes</a:t>
+            </a:r>
+          </a:p>
+        </p:txBody>
+      </p:sp>
+      <p:sp>
+        <p:nvSpPr>
+          <p:cNvPr id="57" name="TextBox 56"/>
+          <p:cNvSpPr txBox="1"/>
+          <p:nvPr/>
+        </p:nvSpPr>
+        <p:spPr>
+          <a:xfrm>
+            <a:off x="7434071" y="3328416"/>
+            <a:ext cx="621792" cy="219456"/>
+          </a:xfrm>
+          <a:prstGeom prst="rect">
+            <a:avLst/>
+          </a:prstGeom>
+          <a:noFill/>
+        </p:spPr>
+        <p:txBody>
+          <a:bodyPr wrap="square" lIns="0" rIns="0" tIns="0" bIns="0" anchor="t">
+            <a:spAutoFit/>
+          </a:bodyPr>
+          <a:lstStyle/>
+          <a:p>
+            <a:pPr algn="l">
+              <a:spcAft>
+                <a:spcPts val="0"/>
+              </a:spcAft>
+            </a:pPr>
+            <a:r>
+              <a:rPr sz="900" b="1" i="0">
+                <a:solidFill>
+                  <a:srgbClr val="D96552"/>
+                </a:solidFill>
+                <a:latin typeface="Arial"/>
+              </a:rPr>
+              <a:t>FLT higher</a:t>
+            </a:r>
+          </a:p>
+        </p:txBody>
+      </p:sp>
+      <p:sp>
+        <p:nvSpPr>
+          <p:cNvPr id="58" name="TextBox 57"/>
+          <p:cNvSpPr txBox="1"/>
+          <p:nvPr/>
+        </p:nvSpPr>
+        <p:spPr>
+          <a:xfrm>
+            <a:off x="8119871" y="3328416"/>
+            <a:ext cx="3611880" cy="246888"/>
+          </a:xfrm>
+          <a:prstGeom prst="rect">
+            <a:avLst/>
+          </a:prstGeom>
+          <a:noFill/>
+        </p:spPr>
+        <p:txBody>
+          <a:bodyPr wrap="square" lIns="0" rIns="0" tIns="0" bIns="0" anchor="t">
+            <a:spAutoFit/>
+          </a:bodyPr>
+          <a:lstStyle/>
+          <a:p>
+            <a:pPr>
+              <a:spcAft>
+                <a:spcPts val="0"/>
+              </a:spcAft>
+            </a:pPr>
+            <a:r>
+              <a:rPr sz="980" b="0" i="1">
+                <a:solidFill>
+                  <a:srgbClr val="59697A"/>
+                </a:solidFill>
+                <a:latin typeface="Arial"/>
+              </a:rPr>
+              <a:t>R:Tpm1</a:t>
+            </a:r>
+          </a:p>
+        </p:txBody>
+      </p:sp>
+      <p:sp>
+        <p:nvSpPr>
+          <p:cNvPr id="59" name="TextBox 58"/>
+          <p:cNvSpPr txBox="1"/>
+          <p:nvPr/>
+        </p:nvSpPr>
+        <p:spPr>
+          <a:xfrm>
+            <a:off x="7434071" y="3575304"/>
+            <a:ext cx="621792" cy="219456"/>
+          </a:xfrm>
+          <a:prstGeom prst="rect">
+            <a:avLst/>
+          </a:prstGeom>
+          <a:noFill/>
+        </p:spPr>
+        <p:txBody>
+          <a:bodyPr wrap="square" lIns="0" rIns="0" tIns="0" bIns="0" anchor="t">
+            <a:spAutoFit/>
+          </a:bodyPr>
+          <a:lstStyle/>
+          <a:p>
+            <a:pPr algn="l">
+              <a:spcAft>
+                <a:spcPts val="0"/>
+              </a:spcAft>
+            </a:pPr>
+            <a:r>
+              <a:rPr sz="900" b="1" i="0">
+                <a:solidFill>
+                  <a:srgbClr val="178681"/>
+                </a:solidFill>
+                <a:latin typeface="Arial"/>
+              </a:rPr>
+              <a:t>FLT lower</a:t>
+            </a:r>
+          </a:p>
+        </p:txBody>
+      </p:sp>
+      <p:sp>
+        <p:nvSpPr>
+          <p:cNvPr id="60" name="TextBox 59"/>
+          <p:cNvSpPr txBox="1"/>
+          <p:nvPr/>
+        </p:nvSpPr>
+        <p:spPr>
+          <a:xfrm>
+            <a:off x="8119871" y="3575304"/>
+            <a:ext cx="3611880" cy="274320"/>
+          </a:xfrm>
+          <a:prstGeom prst="rect">
+            <a:avLst/>
+          </a:prstGeom>
+          <a:noFill/>
+        </p:spPr>
+        <p:txBody>
+          <a:bodyPr wrap="square" lIns="0" rIns="0" tIns="0" bIns="0" anchor="t">
+            <a:spAutoFit/>
+          </a:bodyPr>
+          <a:lstStyle/>
+          <a:p>
+            <a:pPr>
+              <a:spcAft>
+                <a:spcPts val="0"/>
+              </a:spcAft>
+            </a:pPr>
+            <a:r>
+              <a:rPr sz="980" b="0" i="1">
+                <a:solidFill>
+                  <a:srgbClr val="59697A"/>
+                </a:solidFill>
+                <a:latin typeface="Arial"/>
+              </a:rPr>
+              <a:t>R:Bdh1</a:t>
+            </a:r>
+            <a:r>
+              <a:rPr sz="980" b="0" i="0">
+                <a:solidFill>
+                  <a:srgbClr val="8A969E"/>
+                </a:solidFill>
+                <a:latin typeface="Arial"/>
+              </a:rPr>
+              <a:t>, </a:t>
+            </a:r>
+            <a:r>
+              <a:rPr sz="980" b="0" i="1">
+                <a:solidFill>
+                  <a:srgbClr val="59697A"/>
+                </a:solidFill>
+                <a:latin typeface="Arial"/>
+              </a:rPr>
+              <a:t>R:Ech1</a:t>
+            </a:r>
+            <a:r>
+              <a:rPr sz="980" b="0" i="0">
+                <a:solidFill>
+                  <a:srgbClr val="8A969E"/>
+                </a:solidFill>
+                <a:latin typeface="Arial"/>
+              </a:rPr>
+              <a:t>, </a:t>
+            </a:r>
+            <a:r>
+              <a:rPr sz="980" b="0" i="1">
+                <a:solidFill>
+                  <a:srgbClr val="59697A"/>
+                </a:solidFill>
+                <a:latin typeface="Arial"/>
+              </a:rPr>
+              <a:t>R:Bnip3</a:t>
+            </a:r>
+            <a:r>
+              <a:rPr sz="980" b="0" i="0">
+                <a:solidFill>
+                  <a:srgbClr val="8A969E"/>
+                </a:solidFill>
+                <a:latin typeface="Arial"/>
+              </a:rPr>
+              <a:t>, </a:t>
+            </a:r>
+            <a:r>
+              <a:rPr sz="980" b="0" i="1">
+                <a:solidFill>
+                  <a:srgbClr val="59697A"/>
+                </a:solidFill>
+                <a:latin typeface="Arial"/>
+              </a:rPr>
+              <a:t>R:Decr1</a:t>
+            </a:r>
+          </a:p>
+        </p:txBody>
+      </p:sp>
+      <p:sp>
+        <p:nvSpPr>
+          <p:cNvPr id="61" name="Rectangle 60"/>
+          <p:cNvSpPr/>
+          <p:nvPr/>
+        </p:nvSpPr>
+        <p:spPr>
+          <a:xfrm>
+            <a:off x="6181344" y="3977639"/>
+            <a:ext cx="5623560" cy="16459"/>
+          </a:xfrm>
+          <a:prstGeom prst="rect">
+            <a:avLst/>
+          </a:prstGeom>
+          <a:solidFill>
+            <a:srgbClr val="DDE4E8"/>
+          </a:solidFill>
+          <a:ln>
+            <a:noFill/>
+          </a:ln>
+        </p:spPr>
+        <p:style>
+          <a:lnRef idx="1">
+            <a:schemeClr val="accent1"/>
+          </a:lnRef>
+          <a:fillRef idx="3">
+            <a:schemeClr val="accent1"/>
+          </a:fillRef>
+          <a:effectRef idx="2">
+            <a:schemeClr val="accent1"/>
+          </a:effectRef>
+          <a:fontRef idx="minor">
+            <a:schemeClr val="lt1"/>
+          </a:fontRef>
+        </p:style>
+        <p:txBody>
+          <a:bodyPr rtlCol="0" anchor="ctr"/>
+          <a:lstStyle/>
+          <a:p>
+            <a:pPr algn="ctr"/>
+          </a:p>
+        </p:txBody>
+      </p:sp>
+      <p:sp>
+        <p:nvSpPr>
+          <p:cNvPr id="62" name="TextBox 61"/>
+          <p:cNvSpPr txBox="1"/>
+          <p:nvPr/>
+        </p:nvSpPr>
+        <p:spPr>
+          <a:xfrm>
+            <a:off x="6236207" y="4041648"/>
+            <a:ext cx="1170432" cy="539496"/>
+          </a:xfrm>
+          <a:prstGeom prst="rect">
+            <a:avLst/>
+          </a:prstGeom>
+          <a:noFill/>
+        </p:spPr>
+        <p:txBody>
+          <a:bodyPr wrap="square" lIns="0" rIns="0" tIns="0" bIns="0" anchor="t">
+            <a:spAutoFit/>
+          </a:bodyPr>
+          <a:lstStyle/>
+          <a:p>
+            <a:pPr>
+              <a:spcAft>
+                <a:spcPts val="0"/>
+              </a:spcAft>
+            </a:pPr>
+            <a:r>
+              <a:rPr sz="1180" b="1" i="0">
+                <a:solidFill>
+                  <a:srgbClr val="082B55"/>
+                </a:solidFill>
+                <a:latin typeface="Arial"/>
+              </a:rPr>
+              <a:t>Tibialis anterior
+</a:t>
+            </a:r>
+            <a:r>
+              <a:rPr sz="900" b="0" i="0">
+                <a:solidFill>
+                  <a:srgbClr val="8A969E"/>
+                </a:solidFill>
+                <a:latin typeface="Arial"/>
+              </a:rPr>
+              <a:t>4 genes</a:t>
+            </a:r>
+          </a:p>
+        </p:txBody>
+      </p:sp>
+      <p:sp>
+        <p:nvSpPr>
+          <p:cNvPr id="63" name="TextBox 62"/>
+          <p:cNvSpPr txBox="1"/>
+          <p:nvPr/>
+        </p:nvSpPr>
+        <p:spPr>
+          <a:xfrm>
+            <a:off x="7434071" y="4032503"/>
+            <a:ext cx="621792" cy="219456"/>
+          </a:xfrm>
+          <a:prstGeom prst="rect">
+            <a:avLst/>
+          </a:prstGeom>
+          <a:noFill/>
+        </p:spPr>
+        <p:txBody>
+          <a:bodyPr wrap="square" lIns="0" rIns="0" tIns="0" bIns="0" anchor="t">
+            <a:spAutoFit/>
+          </a:bodyPr>
+          <a:lstStyle/>
+          <a:p>
+            <a:pPr algn="l">
+              <a:spcAft>
+                <a:spcPts val="0"/>
+              </a:spcAft>
+            </a:pPr>
+            <a:r>
+              <a:rPr sz="900" b="1" i="0">
+                <a:solidFill>
+                  <a:srgbClr val="D96552"/>
+                </a:solidFill>
+                <a:latin typeface="Arial"/>
+              </a:rPr>
+              <a:t>FLT higher</a:t>
+            </a:r>
+          </a:p>
+        </p:txBody>
+      </p:sp>
+      <p:sp>
+        <p:nvSpPr>
+          <p:cNvPr id="64" name="TextBox 63"/>
+          <p:cNvSpPr txBox="1"/>
+          <p:nvPr/>
+        </p:nvSpPr>
+        <p:spPr>
+          <a:xfrm>
+            <a:off x="8119871" y="4032503"/>
+            <a:ext cx="3611880" cy="356616"/>
+          </a:xfrm>
+          <a:prstGeom prst="rect">
+            <a:avLst/>
+          </a:prstGeom>
+          <a:noFill/>
+        </p:spPr>
+        <p:txBody>
+          <a:bodyPr wrap="square" lIns="0" rIns="0" tIns="0" bIns="0" anchor="t">
+            <a:spAutoFit/>
+          </a:bodyPr>
+          <a:lstStyle/>
+          <a:p>
+            <a:pPr>
+              <a:spcAft>
+                <a:spcPts val="0"/>
+              </a:spcAft>
+            </a:pPr>
+            <a:r>
+              <a:rPr sz="980" b="1" i="1">
+                <a:solidFill>
+                  <a:srgbClr val="2D6496"/>
+                </a:solidFill>
+                <a:latin typeface="Arial"/>
+              </a:rPr>
+              <a:t>P:Cebpd</a:t>
+            </a:r>
+            <a:r>
+              <a:rPr sz="980" b="0" i="0">
+                <a:solidFill>
+                  <a:srgbClr val="8A969E"/>
+                </a:solidFill>
+                <a:latin typeface="Arial"/>
+              </a:rPr>
+              <a:t>, </a:t>
+            </a:r>
+            <a:r>
+              <a:rPr sz="980" b="0" i="1">
+                <a:solidFill>
+                  <a:srgbClr val="59697A"/>
+                </a:solidFill>
+                <a:latin typeface="Arial"/>
+              </a:rPr>
+              <a:t>R:Cdkn1a</a:t>
+            </a:r>
+            <a:r>
+              <a:rPr sz="980" b="0" i="0">
+                <a:solidFill>
+                  <a:srgbClr val="8A969E"/>
+                </a:solidFill>
+                <a:latin typeface="Arial"/>
+              </a:rPr>
+              <a:t>, </a:t>
+            </a:r>
+            <a:r>
+              <a:rPr sz="980" b="0" i="1">
+                <a:solidFill>
+                  <a:srgbClr val="59697A"/>
+                </a:solidFill>
+                <a:latin typeface="Arial"/>
+              </a:rPr>
+              <a:t>R:St3gal5</a:t>
+            </a:r>
+            <a:r>
+              <a:rPr sz="980" b="0" i="0">
+                <a:solidFill>
+                  <a:srgbClr val="8A969E"/>
+                </a:solidFill>
+                <a:latin typeface="Arial"/>
+              </a:rPr>
+              <a:t>, </a:t>
+            </a:r>
+            <a:r>
+              <a:rPr sz="980" b="0" i="1">
+                <a:solidFill>
+                  <a:srgbClr val="59697A"/>
+                </a:solidFill>
+                <a:latin typeface="Arial"/>
+              </a:rPr>
+              <a:t>R:Bnip3</a:t>
+            </a:r>
+          </a:p>
+        </p:txBody>
+      </p:sp>
+      <p:sp>
+        <p:nvSpPr>
+          <p:cNvPr id="65" name="TextBox 64"/>
+          <p:cNvSpPr txBox="1"/>
+          <p:nvPr/>
+        </p:nvSpPr>
+        <p:spPr>
+          <a:xfrm>
+            <a:off x="7434071" y="4389119"/>
+            <a:ext cx="621792" cy="173735"/>
+          </a:xfrm>
+          <a:prstGeom prst="rect">
+            <a:avLst/>
+          </a:prstGeom>
+          <a:noFill/>
+        </p:spPr>
+        <p:txBody>
+          <a:bodyPr wrap="square" lIns="0" rIns="0" tIns="0" bIns="0" anchor="t">
+            <a:spAutoFit/>
+          </a:bodyPr>
+          <a:lstStyle/>
+          <a:p>
+            <a:pPr algn="l">
+              <a:spcAft>
+                <a:spcPts val="0"/>
+              </a:spcAft>
+            </a:pPr>
+            <a:r>
+              <a:rPr sz="900" b="1" i="0">
+                <a:solidFill>
+                  <a:srgbClr val="178681"/>
+                </a:solidFill>
+                <a:latin typeface="Arial"/>
+              </a:rPr>
+              <a:t>FLT lower</a:t>
+            </a:r>
+          </a:p>
+        </p:txBody>
+      </p:sp>
+      <p:sp>
+        <p:nvSpPr>
+          <p:cNvPr id="66" name="TextBox 65"/>
+          <p:cNvSpPr txBox="1"/>
+          <p:nvPr/>
+        </p:nvSpPr>
+        <p:spPr>
+          <a:xfrm>
+            <a:off x="8119871" y="4389119"/>
+            <a:ext cx="3611880" cy="173735"/>
+          </a:xfrm>
+          <a:prstGeom prst="rect">
+            <a:avLst/>
+          </a:prstGeom>
+          <a:noFill/>
+        </p:spPr>
+        <p:txBody>
+          <a:bodyPr wrap="square" lIns="0" rIns="0" tIns="0" bIns="0" anchor="t">
+            <a:spAutoFit/>
+          </a:bodyPr>
+          <a:lstStyle/>
+          <a:p>
+            <a:pPr>
+              <a:spcAft>
+                <a:spcPts val="0"/>
+              </a:spcAft>
+            </a:pPr>
+            <a:r>
+              <a:rPr sz="980" b="0" i="1">
+                <a:solidFill>
+                  <a:srgbClr val="8A969E"/>
+                </a:solidFill>
+                <a:latin typeface="Arial"/>
+              </a:rPr>
+              <a:t>none</a:t>
+            </a:r>
+          </a:p>
+        </p:txBody>
+      </p:sp>
+      <p:sp>
+        <p:nvSpPr>
+          <p:cNvPr id="67" name="Rectangle 66"/>
+          <p:cNvSpPr/>
+          <p:nvPr/>
+        </p:nvSpPr>
+        <p:spPr>
+          <a:xfrm>
+            <a:off x="6181344" y="4690872"/>
+            <a:ext cx="5623560" cy="16459"/>
+          </a:xfrm>
+          <a:prstGeom prst="rect">
+            <a:avLst/>
+          </a:prstGeom>
+          <a:solidFill>
+            <a:srgbClr val="DDE4E8"/>
+          </a:solidFill>
+          <a:ln>
+            <a:noFill/>
+          </a:ln>
+        </p:spPr>
+        <p:style>
+          <a:lnRef idx="1">
+            <a:schemeClr val="accent1"/>
+          </a:lnRef>
+          <a:fillRef idx="3">
+            <a:schemeClr val="accent1"/>
+          </a:fillRef>
+          <a:effectRef idx="2">
+            <a:schemeClr val="accent1"/>
+          </a:effectRef>
+          <a:fontRef idx="minor">
+            <a:schemeClr val="lt1"/>
+          </a:fontRef>
+        </p:style>
+        <p:txBody>
+          <a:bodyPr rtlCol="0" anchor="ctr"/>
+          <a:lstStyle/>
+          <a:p>
+            <a:pPr algn="ctr"/>
+          </a:p>
+        </p:txBody>
+      </p:sp>
+      <p:sp>
+        <p:nvSpPr>
+          <p:cNvPr id="68" name="TextBox 67"/>
+          <p:cNvSpPr txBox="1"/>
+          <p:nvPr/>
+        </p:nvSpPr>
+        <p:spPr>
+          <a:xfrm>
+            <a:off x="6236207" y="4754880"/>
+            <a:ext cx="1170432" cy="466344"/>
+          </a:xfrm>
+          <a:prstGeom prst="rect">
+            <a:avLst/>
+          </a:prstGeom>
+          <a:noFill/>
+        </p:spPr>
+        <p:txBody>
+          <a:bodyPr wrap="square" lIns="0" rIns="0" tIns="0" bIns="0" anchor="t">
+            <a:spAutoFit/>
+          </a:bodyPr>
+          <a:lstStyle/>
+          <a:p>
+            <a:pPr>
+              <a:spcAft>
+                <a:spcPts val="0"/>
+              </a:spcAft>
+            </a:pPr>
+            <a:r>
+              <a:rPr sz="1180" b="1" i="0">
+                <a:solidFill>
+                  <a:srgbClr val="082B55"/>
+                </a:solidFill>
+                <a:latin typeface="Arial"/>
+              </a:rPr>
+              <a:t>Adrenal gland
+</a:t>
+            </a:r>
+            <a:r>
+              <a:rPr sz="900" b="0" i="0">
+                <a:solidFill>
+                  <a:srgbClr val="8A969E"/>
+                </a:solidFill>
+                <a:latin typeface="Arial"/>
+              </a:rPr>
+              <a:t>2 genes</a:t>
+            </a:r>
+          </a:p>
+        </p:txBody>
+      </p:sp>
+      <p:sp>
+        <p:nvSpPr>
+          <p:cNvPr id="69" name="TextBox 68"/>
+          <p:cNvSpPr txBox="1"/>
+          <p:nvPr/>
+        </p:nvSpPr>
+        <p:spPr>
+          <a:xfrm>
+            <a:off x="7434071" y="4745736"/>
+            <a:ext cx="621792" cy="164592"/>
+          </a:xfrm>
+          <a:prstGeom prst="rect">
+            <a:avLst/>
+          </a:prstGeom>
+          <a:noFill/>
+        </p:spPr>
+        <p:txBody>
+          <a:bodyPr wrap="square" lIns="0" rIns="0" tIns="0" bIns="0" anchor="t">
+            <a:spAutoFit/>
+          </a:bodyPr>
+          <a:lstStyle/>
+          <a:p>
+            <a:pPr algn="l">
+              <a:spcAft>
+                <a:spcPts val="0"/>
+              </a:spcAft>
+            </a:pPr>
+            <a:r>
+              <a:rPr sz="900" b="1" i="0">
+                <a:solidFill>
+                  <a:srgbClr val="D96552"/>
+                </a:solidFill>
+                <a:latin typeface="Arial"/>
+              </a:rPr>
+              <a:t>FLT higher</a:t>
+            </a:r>
+          </a:p>
+        </p:txBody>
+      </p:sp>
+      <p:sp>
+        <p:nvSpPr>
+          <p:cNvPr id="70" name="TextBox 69"/>
+          <p:cNvSpPr txBox="1"/>
+          <p:nvPr/>
+        </p:nvSpPr>
+        <p:spPr>
+          <a:xfrm>
+            <a:off x="8119871" y="4745736"/>
+            <a:ext cx="3611880" cy="164592"/>
+          </a:xfrm>
+          <a:prstGeom prst="rect">
+            <a:avLst/>
+          </a:prstGeom>
+          <a:noFill/>
+        </p:spPr>
+        <p:txBody>
+          <a:bodyPr wrap="square" lIns="0" rIns="0" tIns="0" bIns="0" anchor="t">
+            <a:spAutoFit/>
+          </a:bodyPr>
+          <a:lstStyle/>
+          <a:p>
+            <a:pPr>
+              <a:spcAft>
+                <a:spcPts val="0"/>
+              </a:spcAft>
+            </a:pPr>
+            <a:r>
+              <a:rPr sz="980" b="0" i="1">
+                <a:solidFill>
+                  <a:srgbClr val="8A969E"/>
+                </a:solidFill>
+                <a:latin typeface="Arial"/>
+              </a:rPr>
+              <a:t>none</a:t>
+            </a:r>
+          </a:p>
+        </p:txBody>
+      </p:sp>
+      <p:sp>
+        <p:nvSpPr>
+          <p:cNvPr id="71" name="TextBox 70"/>
+          <p:cNvSpPr txBox="1"/>
+          <p:nvPr/>
+        </p:nvSpPr>
+        <p:spPr>
+          <a:xfrm>
+            <a:off x="7434071" y="4910327"/>
+            <a:ext cx="621792" cy="219456"/>
+          </a:xfrm>
+          <a:prstGeom prst="rect">
+            <a:avLst/>
+          </a:prstGeom>
+          <a:noFill/>
+        </p:spPr>
+        <p:txBody>
+          <a:bodyPr wrap="square" lIns="0" rIns="0" tIns="0" bIns="0" anchor="t">
+            <a:spAutoFit/>
+          </a:bodyPr>
+          <a:lstStyle/>
+          <a:p>
+            <a:pPr algn="l">
+              <a:spcAft>
+                <a:spcPts val="0"/>
+              </a:spcAft>
+            </a:pPr>
+            <a:r>
+              <a:rPr sz="900" b="1" i="0">
+                <a:solidFill>
+                  <a:srgbClr val="178681"/>
+                </a:solidFill>
+                <a:latin typeface="Arial"/>
+              </a:rPr>
+              <a:t>FLT lower</a:t>
+            </a:r>
+          </a:p>
+        </p:txBody>
+      </p:sp>
+      <p:sp>
+        <p:nvSpPr>
+          <p:cNvPr id="72" name="TextBox 71"/>
+          <p:cNvSpPr txBox="1"/>
+          <p:nvPr/>
+        </p:nvSpPr>
+        <p:spPr>
+          <a:xfrm>
+            <a:off x="8119871" y="4910327"/>
+            <a:ext cx="3611880" cy="292608"/>
+          </a:xfrm>
+          <a:prstGeom prst="rect">
+            <a:avLst/>
+          </a:prstGeom>
+          <a:noFill/>
+        </p:spPr>
+        <p:txBody>
+          <a:bodyPr wrap="square" lIns="0" rIns="0" tIns="0" bIns="0" anchor="t">
+            <a:spAutoFit/>
+          </a:bodyPr>
+          <a:lstStyle/>
+          <a:p>
+            <a:pPr>
+              <a:spcAft>
+                <a:spcPts val="0"/>
+              </a:spcAft>
+            </a:pPr>
+            <a:r>
+              <a:rPr sz="980" b="1" i="1">
+                <a:solidFill>
+                  <a:srgbClr val="8063A6"/>
+                </a:solidFill>
+                <a:latin typeface="Arial"/>
+              </a:rPr>
+              <a:t>P:Psmb8</a:t>
+            </a:r>
+            <a:r>
+              <a:rPr sz="980" b="0" i="0">
+                <a:solidFill>
+                  <a:srgbClr val="8A969E"/>
+                </a:solidFill>
+                <a:latin typeface="Arial"/>
+              </a:rPr>
+              <a:t>, </a:t>
+            </a:r>
+            <a:r>
+              <a:rPr sz="980" b="0" i="1">
+                <a:solidFill>
+                  <a:srgbClr val="59697A"/>
+                </a:solidFill>
+                <a:latin typeface="Arial"/>
+              </a:rPr>
+              <a:t>R:Tspan4</a:t>
+            </a:r>
+          </a:p>
+        </p:txBody>
+      </p:sp>
+      <p:sp>
+        <p:nvSpPr>
+          <p:cNvPr id="73" name="Rectangle 72"/>
+          <p:cNvSpPr/>
+          <p:nvPr/>
+        </p:nvSpPr>
+        <p:spPr>
+          <a:xfrm>
+            <a:off x="6181344" y="5330952"/>
+            <a:ext cx="5623560" cy="16459"/>
+          </a:xfrm>
+          <a:prstGeom prst="rect">
+            <a:avLst/>
+          </a:prstGeom>
+          <a:solidFill>
+            <a:srgbClr val="DDE4E8"/>
+          </a:solidFill>
+          <a:ln>
+            <a:noFill/>
+          </a:ln>
+        </p:spPr>
+        <p:style>
+          <a:lnRef idx="1">
+            <a:schemeClr val="accent1"/>
+          </a:lnRef>
+          <a:fillRef idx="3">
+            <a:schemeClr val="accent1"/>
+          </a:fillRef>
+          <a:effectRef idx="2">
+            <a:schemeClr val="accent1"/>
+          </a:effectRef>
+          <a:fontRef idx="minor">
+            <a:schemeClr val="lt1"/>
+          </a:fontRef>
+        </p:style>
+        <p:txBody>
+          <a:bodyPr rtlCol="0" anchor="ctr"/>
+          <a:lstStyle/>
+          <a:p>
+            <a:pPr algn="ctr"/>
+          </a:p>
+        </p:txBody>
+      </p:sp>
+      <p:sp>
+        <p:nvSpPr>
+          <p:cNvPr id="74" name="TextBox 73"/>
+          <p:cNvSpPr txBox="1"/>
+          <p:nvPr/>
+        </p:nvSpPr>
+        <p:spPr>
+          <a:xfrm>
+            <a:off x="6236207" y="5394960"/>
+            <a:ext cx="1170432" cy="411480"/>
+          </a:xfrm>
+          <a:prstGeom prst="rect">
+            <a:avLst/>
+          </a:prstGeom>
+          <a:noFill/>
+        </p:spPr>
+        <p:txBody>
+          <a:bodyPr wrap="square" lIns="0" rIns="0" tIns="0" bIns="0" anchor="t">
+            <a:spAutoFit/>
+          </a:bodyPr>
+          <a:lstStyle/>
+          <a:p>
+            <a:pPr>
+              <a:spcAft>
+                <a:spcPts val="0"/>
+              </a:spcAft>
+            </a:pPr>
+            <a:r>
+              <a:rPr sz="1180" b="1" i="0">
+                <a:solidFill>
+                  <a:srgbClr val="082B55"/>
+                </a:solidFill>
+                <a:latin typeface="Arial"/>
+              </a:rPr>
+              <a:t>Skin
+</a:t>
+            </a:r>
+            <a:r>
+              <a:rPr sz="900" b="0" i="0">
+                <a:solidFill>
+                  <a:srgbClr val="8A969E"/>
+                </a:solidFill>
+                <a:latin typeface="Arial"/>
+              </a:rPr>
+              <a:t>1 gene</a:t>
+            </a:r>
+          </a:p>
+        </p:txBody>
+      </p:sp>
+      <p:sp>
+        <p:nvSpPr>
+          <p:cNvPr id="75" name="TextBox 74"/>
+          <p:cNvSpPr txBox="1"/>
+          <p:nvPr/>
+        </p:nvSpPr>
+        <p:spPr>
+          <a:xfrm>
+            <a:off x="7434071" y="5385816"/>
+            <a:ext cx="621792" cy="219456"/>
+          </a:xfrm>
+          <a:prstGeom prst="rect">
+            <a:avLst/>
+          </a:prstGeom>
+          <a:noFill/>
+        </p:spPr>
+        <p:txBody>
+          <a:bodyPr wrap="square" lIns="0" rIns="0" tIns="0" bIns="0" anchor="t">
+            <a:spAutoFit/>
+          </a:bodyPr>
+          <a:lstStyle/>
+          <a:p>
+            <a:pPr algn="l">
+              <a:spcAft>
+                <a:spcPts val="0"/>
+              </a:spcAft>
+            </a:pPr>
+            <a:r>
+              <a:rPr sz="900" b="1" i="0">
+                <a:solidFill>
+                  <a:srgbClr val="D96552"/>
+                </a:solidFill>
+                <a:latin typeface="Arial"/>
+              </a:rPr>
+              <a:t>FLT higher</a:t>
+            </a:r>
+          </a:p>
+        </p:txBody>
+      </p:sp>
+      <p:sp>
+        <p:nvSpPr>
+          <p:cNvPr id="76" name="TextBox 75"/>
+          <p:cNvSpPr txBox="1"/>
+          <p:nvPr/>
+        </p:nvSpPr>
+        <p:spPr>
+          <a:xfrm>
+            <a:off x="8119871" y="5385816"/>
+            <a:ext cx="3611880" cy="265176"/>
+          </a:xfrm>
+          <a:prstGeom prst="rect">
+            <a:avLst/>
+          </a:prstGeom>
+          <a:noFill/>
+        </p:spPr>
+        <p:txBody>
+          <a:bodyPr wrap="square" lIns="0" rIns="0" tIns="0" bIns="0" anchor="t">
+            <a:spAutoFit/>
+          </a:bodyPr>
+          <a:lstStyle/>
+          <a:p>
+            <a:pPr>
+              <a:spcAft>
+                <a:spcPts val="0"/>
+              </a:spcAft>
+            </a:pPr>
+            <a:r>
+              <a:rPr sz="980" b="1" i="1">
+                <a:solidFill>
+                  <a:srgbClr val="2D6496"/>
+                </a:solidFill>
+                <a:latin typeface="Arial"/>
+              </a:rPr>
+              <a:t>P:Plscr1</a:t>
+            </a:r>
+          </a:p>
+        </p:txBody>
+      </p:sp>
+      <p:sp>
+        <p:nvSpPr>
+          <p:cNvPr id="77" name="TextBox 76"/>
+          <p:cNvSpPr txBox="1"/>
+          <p:nvPr/>
+        </p:nvSpPr>
+        <p:spPr>
+          <a:xfrm>
+            <a:off x="7434071" y="5650992"/>
+            <a:ext cx="621792" cy="137160"/>
+          </a:xfrm>
+          <a:prstGeom prst="rect">
+            <a:avLst/>
+          </a:prstGeom>
+          <a:noFill/>
+        </p:spPr>
+        <p:txBody>
+          <a:bodyPr wrap="square" lIns="0" rIns="0" tIns="0" bIns="0" anchor="t">
+            <a:spAutoFit/>
+          </a:bodyPr>
+          <a:lstStyle/>
+          <a:p>
+            <a:pPr algn="l">
+              <a:spcAft>
+                <a:spcPts val="0"/>
+              </a:spcAft>
+            </a:pPr>
+            <a:r>
+              <a:rPr sz="900" b="1" i="0">
+                <a:solidFill>
+                  <a:srgbClr val="178681"/>
+                </a:solidFill>
+                <a:latin typeface="Arial"/>
+              </a:rPr>
+              <a:t>FLT lower</a:t>
+            </a:r>
+          </a:p>
+        </p:txBody>
+      </p:sp>
+      <p:sp>
+        <p:nvSpPr>
+          <p:cNvPr id="78" name="TextBox 77"/>
+          <p:cNvSpPr txBox="1"/>
+          <p:nvPr/>
+        </p:nvSpPr>
+        <p:spPr>
+          <a:xfrm>
+            <a:off x="8119871" y="5650992"/>
+            <a:ext cx="3611880" cy="137160"/>
+          </a:xfrm>
+          <a:prstGeom prst="rect">
+            <a:avLst/>
+          </a:prstGeom>
+          <a:noFill/>
+        </p:spPr>
+        <p:txBody>
+          <a:bodyPr wrap="square" lIns="0" rIns="0" tIns="0" bIns="0" anchor="t">
+            <a:spAutoFit/>
+          </a:bodyPr>
+          <a:lstStyle/>
+          <a:p>
+            <a:pPr>
+              <a:spcAft>
+                <a:spcPts val="0"/>
+              </a:spcAft>
+            </a:pPr>
+            <a:r>
+              <a:rPr sz="980" b="0" i="1">
+                <a:solidFill>
+                  <a:srgbClr val="8A969E"/>
+                </a:solidFill>
+                <a:latin typeface="Arial"/>
+              </a:rPr>
+              <a:t>none</a:t>
+            </a:r>
+          </a:p>
+        </p:txBody>
+      </p:sp>
+      <p:sp>
+        <p:nvSpPr>
+          <p:cNvPr id="79" name="TextBox 78"/>
+          <p:cNvSpPr txBox="1"/>
+          <p:nvPr/>
+        </p:nvSpPr>
+        <p:spPr>
+          <a:xfrm>
+            <a:off x="329184" y="6510528"/>
+            <a:ext cx="10972800" cy="173736"/>
+          </a:xfrm>
+          <a:prstGeom prst="rect">
+            <a:avLst/>
+          </a:prstGeom>
+          <a:noFill/>
+        </p:spPr>
+        <p:txBody>
+          <a:bodyPr wrap="square" lIns="18288" rIns="18288" tIns="18288" bIns="18288" anchor="ctr">
+            <a:spAutoFit/>
+          </a:bodyPr>
+          <a:lstStyle/>
+          <a:p>
+            <a:pPr algn="l">
+              <a:spcAft>
+                <a:spcPts val="0"/>
+              </a:spcAft>
+            </a:pPr>
+            <a:r>
+              <a:rPr sz="720" b="0" i="0">
+                <a:solidFill>
+                  <a:srgbClr val="8A969E"/>
+                </a:solidFill>
+                <a:latin typeface="Arial"/>
+              </a:rPr>
+              <a:t>P/R reflects repeated feature selection. Literature colors apply to promoted genes only; full statistics are in Supplementary Table S10.</a:t>
             </a:r>
           </a:p>
         </p:txBody>
@@ -25370,7 +28531,7 @@
                 </a:solidFill>
                 <a:latin typeface="Arial"/>
               </a:rPr>
-              <a:t>SOLEUS</a:t>
+              <a:t>THYMUS</a:t>
             </a:r>
           </a:p>
         </p:txBody>
@@ -25409,7 +28570,7 @@
                 </a:solidFill>
                 <a:latin typeface="Arial"/>
               </a:rPr>
-              <a:t>Soleus reinforces a mitochondrial and lipid program</a:t>
+              <a:t>Thymus points to lower proliferative renewal</a:t>
             </a:r>
           </a:p>
         </p:txBody>
@@ -25448,14 +28609,14 @@
                 </a:solidFill>
                 <a:latin typeface="Arial"/>
               </a:rPr>
-              <a:t>This result strengthens an existing real-data pattern rather than promoting a new soleus gene.</a:t>
+              <a:t>The core panel recovers cell-cycle biology; two flight-higher genes extend the hypothesis.</a:t>
             </a:r>
           </a:p>
         </p:txBody>
       </p:sp>
       <p:pic>
         <p:nvPicPr>
-          <p:cNvPr id="7" name="Soleus gene effects and Reactome processes" descr="Soleus gene effects and Reactome processes"/>
+          <p:cNvPr id="7" name="Thymus gene effects and Reactome processes" descr="Thymus gene effects and Reactome processes"/>
           <p:cNvPicPr>
             <a:picLocks noChangeAspect="1"/>
           </p:cNvPicPr>
@@ -25469,8 +28630,8 @@
         </p:blipFill>
         <p:spPr>
           <a:xfrm>
-            <a:off x="310896" y="1984025"/>
-            <a:ext cx="8366760" cy="3914076"/>
+            <a:off x="320040" y="1895403"/>
+            <a:ext cx="7818120" cy="4109608"/>
           </a:xfrm>
           <a:prstGeom prst="rect">
             <a:avLst/>
@@ -25485,18 +28646,18 @@
         </p:nvSpPr>
         <p:spPr>
           <a:xfrm>
-            <a:off x="8805672" y="1865376"/>
-            <a:ext cx="2971800" cy="4133087"/>
+            <a:off x="8321040" y="1847088"/>
+            <a:ext cx="3493008" cy="4178808"/>
           </a:xfrm>
           <a:prstGeom prst="roundRect">
             <a:avLst/>
           </a:prstGeom>
           <a:solidFill>
-            <a:srgbClr val="E8F3F1"/>
+            <a:srgbClr val="F8ECE9"/>
           </a:solidFill>
           <a:ln w="10160">
             <a:solidFill>
-              <a:srgbClr val="C7DDD8"/>
+              <a:srgbClr val="E8C9C2"/>
             </a:solidFill>
           </a:ln>
         </p:spPr>
@@ -25530,8 +28691,8 @@
         </p:nvSpPr>
         <p:spPr>
           <a:xfrm>
-            <a:off x="9043416" y="2139696"/>
-            <a:ext cx="2487168" cy="384048"/>
+            <a:off x="8622792" y="2139696"/>
+            <a:ext cx="1005840" cy="594360"/>
           </a:xfrm>
           <a:prstGeom prst="rect">
             <a:avLst/>
@@ -25544,19 +28705,19 @@
           </a:bodyPr>
           <a:lstStyle/>
           <a:p>
-            <a:pPr algn="ctr">
+            <a:pPr algn="l">
               <a:spcAft>
                 <a:spcPts val="0"/>
               </a:spcAft>
             </a:pPr>
             <a:r>
-              <a:rPr sz="2000" b="1" i="0">
-                <a:solidFill>
-                  <a:srgbClr val="178681"/>
+              <a:rPr sz="3500" b="1" i="0">
+                <a:solidFill>
+                  <a:srgbClr val="D96552"/>
                 </a:solidFill>
                 <a:latin typeface="Arial"/>
               </a:rPr>
-              <a:t>0.925 -&gt; 0.963</a:t>
+              <a:t>16</a:t>
             </a:r>
           </a:p>
         </p:txBody>
@@ -25569,8 +28730,8 @@
         </p:nvSpPr>
         <p:spPr>
           <a:xfrm>
-            <a:off x="9125712" y="2542032"/>
-            <a:ext cx="2331720" cy="256032"/>
+            <a:off x="9491472" y="2176272"/>
+            <a:ext cx="1938528" cy="566928"/>
           </a:xfrm>
           <a:prstGeom prst="rect">
             <a:avLst/>
@@ -25583,19 +28744,20 @@
           </a:bodyPr>
           <a:lstStyle/>
           <a:p>
-            <a:pPr algn="ctr">
+            <a:pPr algn="l">
               <a:spcAft>
                 <a:spcPts val="0"/>
               </a:spcAft>
             </a:pPr>
             <a:r>
-              <a:rPr sz="1250" b="0" i="0">
-                <a:solidFill>
-                  <a:srgbClr val="59697A"/>
+              <a:rPr sz="1400" b="1" i="0">
+                <a:solidFill>
+                  <a:srgbClr val="263746"/>
                 </a:solidFill>
                 <a:latin typeface="Arial"/>
               </a:rPr>
-              <a:t>balanced accuracy</a:t>
+              <a:t>synthetic-informed
+BH-FDR associations</a:t>
             </a:r>
           </a:p>
         </p:txBody>
@@ -25608,8 +28770,8 @@
         </p:nvSpPr>
         <p:spPr>
           <a:xfrm>
-            <a:off x="9025128" y="2990088"/>
-            <a:ext cx="2532888" cy="310896"/>
+            <a:off x="8631936" y="2862072"/>
+            <a:ext cx="2788920" cy="274320"/>
           </a:xfrm>
           <a:prstGeom prst="rect">
             <a:avLst/>
@@ -25622,19 +28784,19 @@
           </a:bodyPr>
           <a:lstStyle/>
           <a:p>
-            <a:pPr algn="ctr">
+            <a:pPr algn="l">
               <a:spcAft>
                 <a:spcPts val="0"/>
               </a:spcAft>
             </a:pPr>
             <a:r>
-              <a:rPr sz="1500" b="1" i="0">
-                <a:solidFill>
-                  <a:srgbClr val="082B55"/>
+              <a:rPr sz="1400" b="1" i="0">
+                <a:solidFill>
+                  <a:srgbClr val="178681"/>
                 </a:solidFill>
                 <a:latin typeface="Arial"/>
               </a:rPr>
-              <a:t>5 reinforced | 0 promoted</a:t>
+              <a:t>13 promoted | 3 reinforced</a:t>
             </a:r>
           </a:p>
         </p:txBody>
@@ -25647,14 +28809,14 @@
         </p:nvSpPr>
         <p:spPr>
           <a:xfrm>
-            <a:off x="9089136" y="3566160"/>
+            <a:off x="8631936" y="3337560"/>
             <a:ext cx="91440" cy="91440"/>
           </a:xfrm>
           <a:prstGeom prst="ellipse">
             <a:avLst/>
           </a:prstGeom>
           <a:solidFill>
-            <a:srgbClr val="178681"/>
+            <a:srgbClr val="D96552"/>
           </a:solidFill>
           <a:ln>
             <a:noFill/>
@@ -25690,8 +28852,8 @@
         </p:nvSpPr>
         <p:spPr>
           <a:xfrm>
-            <a:off x="9253728" y="3456432"/>
-            <a:ext cx="2157984" cy="530352"/>
+            <a:off x="8796528" y="3227832"/>
+            <a:ext cx="2606039" cy="585216"/>
           </a:xfrm>
           <a:prstGeom prst="rect">
             <a:avLst/>
@@ -25710,13 +28872,13 @@
               </a:spcAft>
             </a:pPr>
             <a:r>
-              <a:rPr sz="1280" b="0" i="0">
+              <a:rPr sz="1220" b="0" i="0">
                 <a:solidFill>
                   <a:srgbClr val="263746"/>
                 </a:solidFill>
                 <a:latin typeface="Arial"/>
               </a:rPr>
-              <a:t>Lower Bdh1, Ech1, Bnip3 and Decr1</a:t>
+              <a:t>Lower Nusap1, Stmn1, Birc5, Cdk1, Top2a and related genes</a:t>
             </a:r>
           </a:p>
         </p:txBody>
@@ -25729,14 +28891,14 @@
         </p:nvSpPr>
         <p:spPr>
           <a:xfrm>
-            <a:off x="9089136" y="4096511"/>
+            <a:off x="8631936" y="3922776"/>
             <a:ext cx="91440" cy="91440"/>
           </a:xfrm>
           <a:prstGeom prst="ellipse">
             <a:avLst/>
           </a:prstGeom>
           <a:solidFill>
-            <a:srgbClr val="178681"/>
+            <a:srgbClr val="D96552"/>
           </a:solidFill>
           <a:ln>
             <a:noFill/>
@@ -25772,8 +28934,8 @@
         </p:nvSpPr>
         <p:spPr>
           <a:xfrm>
-            <a:off x="9253728" y="3986783"/>
-            <a:ext cx="2157984" cy="530352"/>
+            <a:off x="8796528" y="3813048"/>
+            <a:ext cx="2606039" cy="585216"/>
           </a:xfrm>
           <a:prstGeom prst="rect">
             <a:avLst/>
@@ -25792,13 +28954,13 @@
               </a:spcAft>
             </a:pPr>
             <a:r>
-              <a:rPr sz="1280" b="0" i="0">
+              <a:rPr sz="1220" b="0" i="0">
                 <a:solidFill>
                   <a:srgbClr val="263746"/>
                 </a:solidFill>
                 <a:latin typeface="Arial"/>
               </a:rPr>
-              <a:t>Higher Tpm1</a:t>
+              <a:t>Cell cycle, DNA replication, APC/C and G2/M processes</a:t>
             </a:r>
           </a:p>
         </p:txBody>
@@ -25811,14 +28973,14 @@
         </p:nvSpPr>
         <p:spPr>
           <a:xfrm>
-            <a:off x="9089136" y="4626864"/>
+            <a:off x="8631936" y="4507992"/>
             <a:ext cx="91440" cy="91440"/>
           </a:xfrm>
           <a:prstGeom prst="ellipse">
             <a:avLst/>
           </a:prstGeom>
           <a:solidFill>
-            <a:srgbClr val="178681"/>
+            <a:srgbClr val="D96552"/>
           </a:solidFill>
           <a:ln>
             <a:noFill/>
@@ -25854,8 +29016,8 @@
         </p:nvSpPr>
         <p:spPr>
           <a:xfrm>
-            <a:off x="9253728" y="4517136"/>
-            <a:ext cx="2157984" cy="530352"/>
+            <a:off x="8796528" y="4398264"/>
+            <a:ext cx="2606039" cy="585216"/>
           </a:xfrm>
           <a:prstGeom prst="rect">
             <a:avLst/>
@@ -25874,13 +29036,13 @@
               </a:spcAft>
             </a:pPr>
             <a:r>
-              <a:rPr sz="1280" b="0" i="0">
+              <a:rPr sz="1220" b="0" i="0">
                 <a:solidFill>
                   <a:srgbClr val="263746"/>
                 </a:solidFill>
                 <a:latin typeface="Arial"/>
               </a:rPr>
-              <a:t>Mitochondrial turnover and fatty-acid metabolism</a:t>
+              <a:t>Higher Hsd17b11 and Etv1 suggest lipid or T-cell-state shifts</a:t>
             </a:r>
           </a:p>
         </p:txBody>
@@ -25893,14 +29055,14 @@
         </p:nvSpPr>
         <p:spPr>
           <a:xfrm>
-            <a:off x="9089136" y="5157216"/>
+            <a:off x="8631936" y="5093207"/>
             <a:ext cx="91440" cy="91440"/>
           </a:xfrm>
           <a:prstGeom prst="ellipse">
             <a:avLst/>
           </a:prstGeom>
           <a:solidFill>
-            <a:srgbClr val="178681"/>
+            <a:srgbClr val="D96552"/>
           </a:solidFill>
           <a:ln>
             <a:noFill/>
@@ -25936,8 +29098,8 @@
         </p:nvSpPr>
         <p:spPr>
           <a:xfrm>
-            <a:off x="9253728" y="5047488"/>
-            <a:ext cx="2157984" cy="530352"/>
+            <a:off x="8796528" y="4983479"/>
+            <a:ext cx="2606039" cy="585216"/>
           </a:xfrm>
           <a:prstGeom prst="rect">
             <a:avLst/>
@@ -25956,13 +29118,13 @@
               </a:spcAft>
             </a:pPr>
             <a:r>
-              <a:rPr sz="1280" b="0" i="0">
+              <a:rPr sz="1220" b="0" i="0">
                 <a:solidFill>
                   <a:srgbClr val="263746"/>
                 </a:solidFill>
                 <a:latin typeface="Arial"/>
               </a:rPr>
-              <a:t>Compatible with unloading and contractile remodeling</a:t>
+              <a:t>Bulk RNA-seq cannot separate cell loss from lower transcription</a:t>
             </a:r>
           </a:p>
         </p:txBody>
@@ -26001,7 +29163,7 @@
                 </a:solidFill>
                 <a:latin typeface="Arial"/>
               </a:rPr>
-              <a:t>Literature context: Gambara et al. (2017) and Stein et al. (2002).</a:t>
+              <a:t>Context: Gridley et al. (2013), Horie et al. (2019), Keenan et al. (2025), and Shi et al. (2026).</a:t>
             </a:r>
           </a:p>
         </p:txBody>
@@ -26092,7 +29254,7 @@
                 </a:solidFill>
                 <a:latin typeface="Arial"/>
               </a:rPr>
-              <a:t>OTHER TISSUES</a:t>
+              <a:t>SOLEUS</a:t>
             </a:r>
           </a:p>
         </p:txBody>
@@ -26131,7 +29293,7 @@
                 </a:solidFill>
                 <a:latin typeface="Arial"/>
               </a:rPr>
-              <a:t>Kidney adds a focused signal; other tissues are exploratory</a:t>
+              <a:t>Soleus reinforces a mitochondrial and lipid program</a:t>
             </a:r>
           </a:p>
         </p:txBody>
@@ -26170,31 +29332,55 @@
                 </a:solidFill>
                 <a:latin typeface="Arial"/>
               </a:rPr>
-              <a:t>The strongest process-level stories were thymus and soleus, but several tissues produced narrower candidates.</a:t>
-            </a:r>
-          </a:p>
-        </p:txBody>
-      </p:sp>
-      <p:sp>
-        <p:nvSpPr>
-          <p:cNvPr id="7" name="Rectangle 6"/>
+              <a:t>This result strengthens an existing real-data pattern rather than promoting a new soleus gene.</a:t>
+            </a:r>
+          </a:p>
+        </p:txBody>
+      </p:sp>
+      <p:pic>
+        <p:nvPicPr>
+          <p:cNvPr id="7" name="Soleus gene effects and Reactome processes" descr="Soleus gene effects and Reactome processes"/>
+          <p:cNvPicPr>
+            <a:picLocks noChangeAspect="1"/>
+          </p:cNvPicPr>
+          <p:nvPr/>
+        </p:nvPicPr>
+        <p:blipFill>
+          <a:blip r:embed="rId2"/>
+          <a:stretch>
+            <a:fillRect/>
+          </a:stretch>
+        </p:blipFill>
+        <p:spPr>
+          <a:xfrm>
+            <a:off x="310896" y="1984025"/>
+            <a:ext cx="8366760" cy="3914076"/>
+          </a:xfrm>
+          <a:prstGeom prst="rect">
+            <a:avLst/>
+          </a:prstGeom>
+        </p:spPr>
+      </p:pic>
+      <p:sp>
+        <p:nvSpPr>
+          <p:cNvPr id="8" name="Rounded Rectangle 7"/>
           <p:cNvSpPr/>
           <p:nvPr/>
         </p:nvSpPr>
         <p:spPr>
           <a:xfrm>
-            <a:off x="393192" y="1847088"/>
-            <a:ext cx="11375136" cy="667512"/>
-          </a:xfrm>
-          <a:prstGeom prst="rect">
+            <a:off x="8805672" y="1865376"/>
+            <a:ext cx="2971800" cy="4133087"/>
+          </a:xfrm>
+          <a:prstGeom prst="roundRect">
             <a:avLst/>
           </a:prstGeom>
           <a:solidFill>
-            <a:srgbClr val="E9F1F7"/>
+            <a:srgbClr val="E8F3F1"/>
           </a:solidFill>
           <a:ln w="10160">
             <a:solidFill>
-              <a:srgbClr val="DDE4E8"/>
+              <a:srgbClr val="C7DDD8"/>
             </a:solidFill>
           </a:ln>
         </p:spPr>
@@ -26222,57 +29408,14 @@
       </p:sp>
       <p:sp>
         <p:nvSpPr>
-          <p:cNvPr id="8" name="Rectangle 7"/>
-          <p:cNvSpPr/>
-          <p:nvPr/>
-        </p:nvSpPr>
-        <p:spPr>
-          <a:xfrm>
-            <a:off x="393192" y="1847088"/>
-            <a:ext cx="73152" cy="667512"/>
-          </a:xfrm>
-          <a:prstGeom prst="rect">
-            <a:avLst/>
-          </a:prstGeom>
-          <a:solidFill>
-            <a:srgbClr val="2D6496"/>
-          </a:solidFill>
-          <a:ln>
-            <a:noFill/>
-          </a:ln>
-        </p:spPr>
-        <p:style>
-          <a:lnRef idx="1">
-            <a:schemeClr val="accent1"/>
-          </a:lnRef>
-          <a:fillRef idx="3">
-            <a:schemeClr val="accent1"/>
-          </a:fillRef>
-          <a:effectRef idx="2">
-            <a:schemeClr val="accent1"/>
-          </a:effectRef>
-          <a:fontRef idx="minor">
-            <a:schemeClr val="lt1"/>
-          </a:fontRef>
-        </p:style>
-        <p:txBody>
-          <a:bodyPr rtlCol="0" anchor="ctr"/>
-          <a:lstStyle/>
-          <a:p>
-            <a:pPr algn="ctr"/>
-          </a:p>
-        </p:txBody>
-      </p:sp>
-      <p:sp>
-        <p:nvSpPr>
           <p:cNvPr id="9" name="TextBox 8"/>
           <p:cNvSpPr txBox="1"/>
           <p:nvPr/>
         </p:nvSpPr>
         <p:spPr>
           <a:xfrm>
-            <a:off x="640080" y="2002536"/>
-            <a:ext cx="1938528" cy="310896"/>
+            <a:off x="9043416" y="2139696"/>
+            <a:ext cx="2487168" cy="384048"/>
           </a:xfrm>
           <a:prstGeom prst="rect">
             <a:avLst/>
@@ -26281,84 +29424,6 @@
         </p:spPr>
         <p:txBody>
           <a:bodyPr wrap="square" lIns="18288" rIns="18288" tIns="18288" bIns="18288" anchor="t">
-            <a:spAutoFit/>
-          </a:bodyPr>
-          <a:lstStyle/>
-          <a:p>
-            <a:pPr algn="l">
-              <a:spcAft>
-                <a:spcPts val="0"/>
-              </a:spcAft>
-            </a:pPr>
-            <a:r>
-              <a:rPr sz="1600" b="1" i="0">
-                <a:solidFill>
-                  <a:srgbClr val="2D6496"/>
-                </a:solidFill>
-                <a:latin typeface="Arial"/>
-              </a:rPr>
-              <a:t>Kidney</a:t>
-            </a:r>
-          </a:p>
-        </p:txBody>
-      </p:sp>
-      <p:sp>
-        <p:nvSpPr>
-          <p:cNvPr id="10" name="TextBox 9"/>
-          <p:cNvSpPr txBox="1"/>
-          <p:nvPr/>
-        </p:nvSpPr>
-        <p:spPr>
-          <a:xfrm>
-            <a:off x="2551176" y="1975104"/>
-            <a:ext cx="7040880" cy="365760"/>
-          </a:xfrm>
-          <a:prstGeom prst="rect">
-            <a:avLst/>
-          </a:prstGeom>
-          <a:noFill/>
-        </p:spPr>
-        <p:txBody>
-          <a:bodyPr wrap="square" lIns="18288" rIns="18288" tIns="18288" bIns="18288" anchor="ctr">
-            <a:spAutoFit/>
-          </a:bodyPr>
-          <a:lstStyle/>
-          <a:p>
-            <a:pPr algn="l">
-              <a:spcAft>
-                <a:spcPts val="0"/>
-              </a:spcAft>
-            </a:pPr>
-            <a:r>
-              <a:rPr sz="1400" b="0" i="0">
-                <a:solidFill>
-                  <a:srgbClr val="263746"/>
-                </a:solidFill>
-                <a:latin typeface="Arial"/>
-              </a:rPr>
-              <a:t>Inpp4b promoted, Slc37a4 reinforced; both higher in flight</a:t>
-            </a:r>
-          </a:p>
-        </p:txBody>
-      </p:sp>
-      <p:sp>
-        <p:nvSpPr>
-          <p:cNvPr id="11" name="TextBox 10"/>
-          <p:cNvSpPr txBox="1"/>
-          <p:nvPr/>
-        </p:nvSpPr>
-        <p:spPr>
-          <a:xfrm>
-            <a:off x="9756648" y="1993392"/>
-            <a:ext cx="1682496" cy="310896"/>
-          </a:xfrm>
-          <a:prstGeom prst="rect">
-            <a:avLst/>
-          </a:prstGeom>
-          <a:noFill/>
-        </p:spPr>
-        <p:txBody>
-          <a:bodyPr wrap="square" lIns="18288" rIns="18288" tIns="18288" bIns="18288" anchor="ctr">
             <a:spAutoFit/>
           </a:bodyPr>
           <a:lstStyle/>
@@ -26369,115 +29434,27 @@
               </a:spcAft>
             </a:pPr>
             <a:r>
-              <a:rPr sz="1250" b="1" i="0">
-                <a:solidFill>
-                  <a:srgbClr val="2D6496"/>
+              <a:rPr sz="2000" b="1" i="0">
+                <a:solidFill>
+                  <a:srgbClr val="178681"/>
                 </a:solidFill>
                 <a:latin typeface="Arial"/>
               </a:rPr>
-              <a:t>Focused secondary</a:t>
-            </a:r>
-          </a:p>
-        </p:txBody>
-      </p:sp>
-      <p:sp>
-        <p:nvSpPr>
-          <p:cNvPr id="12" name="Rectangle 11"/>
-          <p:cNvSpPr/>
-          <p:nvPr/>
-        </p:nvSpPr>
-        <p:spPr>
-          <a:xfrm>
-            <a:off x="393192" y="2660904"/>
-            <a:ext cx="11375136" cy="667512"/>
-          </a:xfrm>
-          <a:prstGeom prst="rect">
-            <a:avLst/>
-          </a:prstGeom>
-          <a:solidFill>
-            <a:srgbClr val="F0ECF6"/>
-          </a:solidFill>
-          <a:ln w="10160">
-            <a:solidFill>
-              <a:srgbClr val="DDE4E8"/>
-            </a:solidFill>
-          </a:ln>
-        </p:spPr>
-        <p:style>
-          <a:lnRef idx="1">
-            <a:schemeClr val="accent1"/>
-          </a:lnRef>
-          <a:fillRef idx="3">
-            <a:schemeClr val="accent1"/>
-          </a:fillRef>
-          <a:effectRef idx="2">
-            <a:schemeClr val="accent1"/>
-          </a:effectRef>
-          <a:fontRef idx="minor">
-            <a:schemeClr val="lt1"/>
-          </a:fontRef>
-        </p:style>
-        <p:txBody>
-          <a:bodyPr rtlCol="0" anchor="ctr"/>
-          <a:lstStyle/>
-          <a:p>
-            <a:pPr algn="ctr"/>
-          </a:p>
-        </p:txBody>
-      </p:sp>
-      <p:sp>
-        <p:nvSpPr>
-          <p:cNvPr id="13" name="Rectangle 12"/>
-          <p:cNvSpPr/>
-          <p:nvPr/>
-        </p:nvSpPr>
-        <p:spPr>
-          <a:xfrm>
-            <a:off x="393192" y="2660904"/>
-            <a:ext cx="73152" cy="667512"/>
-          </a:xfrm>
-          <a:prstGeom prst="rect">
-            <a:avLst/>
-          </a:prstGeom>
-          <a:solidFill>
-            <a:srgbClr val="8063A6"/>
-          </a:solidFill>
-          <a:ln>
-            <a:noFill/>
-          </a:ln>
-        </p:spPr>
-        <p:style>
-          <a:lnRef idx="1">
-            <a:schemeClr val="accent1"/>
-          </a:lnRef>
-          <a:fillRef idx="3">
-            <a:schemeClr val="accent1"/>
-          </a:fillRef>
-          <a:effectRef idx="2">
-            <a:schemeClr val="accent1"/>
-          </a:effectRef>
-          <a:fontRef idx="minor">
-            <a:schemeClr val="lt1"/>
-          </a:fontRef>
-        </p:style>
-        <p:txBody>
-          <a:bodyPr rtlCol="0" anchor="ctr"/>
-          <a:lstStyle/>
-          <a:p>
-            <a:pPr algn="ctr"/>
-          </a:p>
-        </p:txBody>
-      </p:sp>
-      <p:sp>
-        <p:nvSpPr>
-          <p:cNvPr id="14" name="TextBox 13"/>
+              <a:t>0.925 -&gt; 0.963</a:t>
+            </a:r>
+          </a:p>
+        </p:txBody>
+      </p:sp>
+      <p:sp>
+        <p:nvSpPr>
+          <p:cNvPr id="10" name="TextBox 9"/>
           <p:cNvSpPr txBox="1"/>
           <p:nvPr/>
         </p:nvSpPr>
         <p:spPr>
           <a:xfrm>
-            <a:off x="640080" y="2816352"/>
-            <a:ext cx="1938528" cy="310896"/>
+            <a:off x="9125712" y="2542032"/>
+            <a:ext cx="2331720" cy="256032"/>
           </a:xfrm>
           <a:prstGeom prst="rect">
             <a:avLst/>
@@ -26486,84 +29463,6 @@
         </p:spPr>
         <p:txBody>
           <a:bodyPr wrap="square" lIns="18288" rIns="18288" tIns="18288" bIns="18288" anchor="t">
-            <a:spAutoFit/>
-          </a:bodyPr>
-          <a:lstStyle/>
-          <a:p>
-            <a:pPr algn="l">
-              <a:spcAft>
-                <a:spcPts val="0"/>
-              </a:spcAft>
-            </a:pPr>
-            <a:r>
-              <a:rPr sz="1600" b="1" i="0">
-                <a:solidFill>
-                  <a:srgbClr val="8063A6"/>
-                </a:solidFill>
-                <a:latin typeface="Arial"/>
-              </a:rPr>
-              <a:t>Spleen</a:t>
-            </a:r>
-          </a:p>
-        </p:txBody>
-      </p:sp>
-      <p:sp>
-        <p:nvSpPr>
-          <p:cNvPr id="15" name="TextBox 14"/>
-          <p:cNvSpPr txBox="1"/>
-          <p:nvPr/>
-        </p:nvSpPr>
-        <p:spPr>
-          <a:xfrm>
-            <a:off x="2551176" y="2788920"/>
-            <a:ext cx="7040880" cy="365760"/>
-          </a:xfrm>
-          <a:prstGeom prst="rect">
-            <a:avLst/>
-          </a:prstGeom>
-          <a:noFill/>
-        </p:spPr>
-        <p:txBody>
-          <a:bodyPr wrap="square" lIns="18288" rIns="18288" tIns="18288" bIns="18288" anchor="ctr">
-            <a:spAutoFit/>
-          </a:bodyPr>
-          <a:lstStyle/>
-          <a:p>
-            <a:pPr algn="l">
-              <a:spcAft>
-                <a:spcPts val="0"/>
-              </a:spcAft>
-            </a:pPr>
-            <a:r>
-              <a:rPr sz="1400" b="0" i="0">
-                <a:solidFill>
-                  <a:srgbClr val="263746"/>
-                </a:solidFill>
-                <a:latin typeface="Arial"/>
-              </a:rPr>
-              <a:t>Rai14, Ptprk and Myl9 promoted; Loxl1 reinforced; no Reactome enrichment</a:t>
-            </a:r>
-          </a:p>
-        </p:txBody>
-      </p:sp>
-      <p:sp>
-        <p:nvSpPr>
-          <p:cNvPr id="16" name="TextBox 15"/>
-          <p:cNvSpPr txBox="1"/>
-          <p:nvPr/>
-        </p:nvSpPr>
-        <p:spPr>
-          <a:xfrm>
-            <a:off x="9756648" y="2807208"/>
-            <a:ext cx="1682496" cy="310896"/>
-          </a:xfrm>
-          <a:prstGeom prst="rect">
-            <a:avLst/>
-          </a:prstGeom>
-          <a:noFill/>
-        </p:spPr>
-        <p:txBody>
-          <a:bodyPr wrap="square" lIns="18288" rIns="18288" tIns="18288" bIns="18288" anchor="ctr">
             <a:spAutoFit/>
           </a:bodyPr>
           <a:lstStyle/>
@@ -26574,115 +29473,27 @@
               </a:spcAft>
             </a:pPr>
             <a:r>
-              <a:rPr sz="1250" b="1" i="0">
-                <a:solidFill>
-                  <a:srgbClr val="8063A6"/>
+              <a:rPr sz="1250" b="0" i="0">
+                <a:solidFill>
+                  <a:srgbClr val="59697A"/>
                 </a:solidFill>
                 <a:latin typeface="Arial"/>
               </a:rPr>
-              <a:t>Exploratory</a:t>
-            </a:r>
-          </a:p>
-        </p:txBody>
-      </p:sp>
-      <p:sp>
-        <p:nvSpPr>
-          <p:cNvPr id="17" name="Rectangle 16"/>
-          <p:cNvSpPr/>
-          <p:nvPr/>
-        </p:nvSpPr>
-        <p:spPr>
-          <a:xfrm>
-            <a:off x="393192" y="3474720"/>
-            <a:ext cx="11375136" cy="667512"/>
-          </a:xfrm>
-          <a:prstGeom prst="rect">
-            <a:avLst/>
-          </a:prstGeom>
-          <a:solidFill>
-            <a:srgbClr val="F8F1E2"/>
-          </a:solidFill>
-          <a:ln w="10160">
-            <a:solidFill>
-              <a:srgbClr val="DDE4E8"/>
-            </a:solidFill>
-          </a:ln>
-        </p:spPr>
-        <p:style>
-          <a:lnRef idx="1">
-            <a:schemeClr val="accent1"/>
-          </a:lnRef>
-          <a:fillRef idx="3">
-            <a:schemeClr val="accent1"/>
-          </a:fillRef>
-          <a:effectRef idx="2">
-            <a:schemeClr val="accent1"/>
-          </a:effectRef>
-          <a:fontRef idx="minor">
-            <a:schemeClr val="lt1"/>
-          </a:fontRef>
-        </p:style>
-        <p:txBody>
-          <a:bodyPr rtlCol="0" anchor="ctr"/>
-          <a:lstStyle/>
-          <a:p>
-            <a:pPr algn="ctr"/>
-          </a:p>
-        </p:txBody>
-      </p:sp>
-      <p:sp>
-        <p:nvSpPr>
-          <p:cNvPr id="18" name="Rectangle 17"/>
-          <p:cNvSpPr/>
-          <p:nvPr/>
-        </p:nvSpPr>
-        <p:spPr>
-          <a:xfrm>
-            <a:off x="393192" y="3474720"/>
-            <a:ext cx="73152" cy="667512"/>
-          </a:xfrm>
-          <a:prstGeom prst="rect">
-            <a:avLst/>
-          </a:prstGeom>
-          <a:solidFill>
-            <a:srgbClr val="D37B00"/>
-          </a:solidFill>
-          <a:ln>
-            <a:noFill/>
-          </a:ln>
-        </p:spPr>
-        <p:style>
-          <a:lnRef idx="1">
-            <a:schemeClr val="accent1"/>
-          </a:lnRef>
-          <a:fillRef idx="3">
-            <a:schemeClr val="accent1"/>
-          </a:fillRef>
-          <a:effectRef idx="2">
-            <a:schemeClr val="accent1"/>
-          </a:effectRef>
-          <a:fontRef idx="minor">
-            <a:schemeClr val="lt1"/>
-          </a:fontRef>
-        </p:style>
-        <p:txBody>
-          <a:bodyPr rtlCol="0" anchor="ctr"/>
-          <a:lstStyle/>
-          <a:p>
-            <a:pPr algn="ctr"/>
-          </a:p>
-        </p:txBody>
-      </p:sp>
-      <p:sp>
-        <p:nvSpPr>
-          <p:cNvPr id="19" name="TextBox 18"/>
+              <a:t>balanced accuracy</a:t>
+            </a:r>
+          </a:p>
+        </p:txBody>
+      </p:sp>
+      <p:sp>
+        <p:nvSpPr>
+          <p:cNvPr id="11" name="TextBox 10"/>
           <p:cNvSpPr txBox="1"/>
           <p:nvPr/>
         </p:nvSpPr>
         <p:spPr>
           <a:xfrm>
-            <a:off x="640080" y="3630168"/>
-            <a:ext cx="1938528" cy="310896"/>
+            <a:off x="9025128" y="2990088"/>
+            <a:ext cx="2532888" cy="310896"/>
           </a:xfrm>
           <a:prstGeom prst="rect">
             <a:avLst/>
@@ -26691,84 +29502,6 @@
         </p:spPr>
         <p:txBody>
           <a:bodyPr wrap="square" lIns="18288" rIns="18288" tIns="18288" bIns="18288" anchor="t">
-            <a:spAutoFit/>
-          </a:bodyPr>
-          <a:lstStyle/>
-          <a:p>
-            <a:pPr algn="l">
-              <a:spcAft>
-                <a:spcPts val="0"/>
-              </a:spcAft>
-            </a:pPr>
-            <a:r>
-              <a:rPr sz="1600" b="1" i="0">
-                <a:solidFill>
-                  <a:srgbClr val="D37B00"/>
-                </a:solidFill>
-                <a:latin typeface="Arial"/>
-              </a:rPr>
-              <a:t>Skin + adrenal</a:t>
-            </a:r>
-          </a:p>
-        </p:txBody>
-      </p:sp>
-      <p:sp>
-        <p:nvSpPr>
-          <p:cNvPr id="20" name="TextBox 19"/>
-          <p:cNvSpPr txBox="1"/>
-          <p:nvPr/>
-        </p:nvSpPr>
-        <p:spPr>
-          <a:xfrm>
-            <a:off x="2551176" y="3602736"/>
-            <a:ext cx="7040880" cy="365760"/>
-          </a:xfrm>
-          <a:prstGeom prst="rect">
-            <a:avLst/>
-          </a:prstGeom>
-          <a:noFill/>
-        </p:spPr>
-        <p:txBody>
-          <a:bodyPr wrap="square" lIns="18288" rIns="18288" tIns="18288" bIns="18288" anchor="ctr">
-            <a:spAutoFit/>
-          </a:bodyPr>
-          <a:lstStyle/>
-          <a:p>
-            <a:pPr algn="l">
-              <a:spcAft>
-                <a:spcPts val="0"/>
-              </a:spcAft>
-            </a:pPr>
-            <a:r>
-              <a:rPr sz="1400" b="0" i="0">
-                <a:solidFill>
-                  <a:srgbClr val="263746"/>
-                </a:solidFill>
-                <a:latin typeface="Arial"/>
-              </a:rPr>
-              <a:t>Plscr1 higher in skin; adrenal Psmb8 is plausible but literature-unmatched</a:t>
-            </a:r>
-          </a:p>
-        </p:txBody>
-      </p:sp>
-      <p:sp>
-        <p:nvSpPr>
-          <p:cNvPr id="21" name="TextBox 20"/>
-          <p:cNvSpPr txBox="1"/>
-          <p:nvPr/>
-        </p:nvSpPr>
-        <p:spPr>
-          <a:xfrm>
-            <a:off x="9756648" y="3621024"/>
-            <a:ext cx="1682496" cy="310896"/>
-          </a:xfrm>
-          <a:prstGeom prst="rect">
-            <a:avLst/>
-          </a:prstGeom>
-          <a:noFill/>
-        </p:spPr>
-        <p:txBody>
-          <a:bodyPr wrap="square" lIns="18288" rIns="18288" tIns="18288" bIns="18288" anchor="ctr">
             <a:spAutoFit/>
           </a:bodyPr>
           <a:lstStyle/>
@@ -26779,74 +29512,29 @@
               </a:spcAft>
             </a:pPr>
             <a:r>
-              <a:rPr sz="1250" b="1" i="0">
-                <a:solidFill>
-                  <a:srgbClr val="D37B00"/>
+              <a:rPr sz="1500" b="1" i="0">
+                <a:solidFill>
+                  <a:srgbClr val="082B55"/>
                 </a:solidFill>
                 <a:latin typeface="Arial"/>
               </a:rPr>
-              <a:t>Exploratory</a:t>
-            </a:r>
-          </a:p>
-        </p:txBody>
-      </p:sp>
-      <p:sp>
-        <p:nvSpPr>
-          <p:cNvPr id="22" name="Rectangle 21"/>
+              <a:t>5 reinforced | 0 promoted</a:t>
+            </a:r>
+          </a:p>
+        </p:txBody>
+      </p:sp>
+      <p:sp>
+        <p:nvSpPr>
+          <p:cNvPr id="12" name="Oval 11"/>
           <p:cNvSpPr/>
           <p:nvPr/>
         </p:nvSpPr>
         <p:spPr>
           <a:xfrm>
-            <a:off x="393192" y="4288536"/>
-            <a:ext cx="11375136" cy="667512"/>
-          </a:xfrm>
-          <a:prstGeom prst="rect">
-            <a:avLst/>
-          </a:prstGeom>
-          <a:solidFill>
-            <a:srgbClr val="E8F3F1"/>
-          </a:solidFill>
-          <a:ln w="10160">
-            <a:solidFill>
-              <a:srgbClr val="DDE4E8"/>
-            </a:solidFill>
-          </a:ln>
-        </p:spPr>
-        <p:style>
-          <a:lnRef idx="1">
-            <a:schemeClr val="accent1"/>
-          </a:lnRef>
-          <a:fillRef idx="3">
-            <a:schemeClr val="accent1"/>
-          </a:fillRef>
-          <a:effectRef idx="2">
-            <a:schemeClr val="accent1"/>
-          </a:effectRef>
-          <a:fontRef idx="minor">
-            <a:schemeClr val="lt1"/>
-          </a:fontRef>
-        </p:style>
-        <p:txBody>
-          <a:bodyPr rtlCol="0" anchor="ctr"/>
-          <a:lstStyle/>
-          <a:p>
-            <a:pPr algn="ctr"/>
-          </a:p>
-        </p:txBody>
-      </p:sp>
-      <p:sp>
-        <p:nvSpPr>
-          <p:cNvPr id="23" name="Rectangle 22"/>
-          <p:cNvSpPr/>
-          <p:nvPr/>
-        </p:nvSpPr>
-        <p:spPr>
-          <a:xfrm>
-            <a:off x="393192" y="4288536"/>
-            <a:ext cx="73152" cy="667512"/>
-          </a:xfrm>
-          <a:prstGeom prst="rect">
+            <a:off x="9089136" y="3566160"/>
+            <a:ext cx="91440" cy="91440"/>
+          </a:xfrm>
+          <a:prstGeom prst="ellipse">
             <a:avLst/>
           </a:prstGeom>
           <a:solidFill>
@@ -26880,14 +29568,14 @@
       </p:sp>
       <p:sp>
         <p:nvSpPr>
-          <p:cNvPr id="24" name="TextBox 23"/>
+          <p:cNvPr id="13" name="TextBox 12"/>
           <p:cNvSpPr txBox="1"/>
           <p:nvPr/>
         </p:nvSpPr>
         <p:spPr>
           <a:xfrm>
-            <a:off x="640080" y="4443983"/>
-            <a:ext cx="1938528" cy="310896"/>
+            <a:off x="9253728" y="3456432"/>
+            <a:ext cx="2157984" cy="530352"/>
           </a:xfrm>
           <a:prstGeom prst="rect">
             <a:avLst/>
@@ -26895,7 +29583,7 @@
           <a:noFill/>
         </p:spPr>
         <p:txBody>
-          <a:bodyPr wrap="square" lIns="18288" rIns="18288" tIns="18288" bIns="18288" anchor="t">
+          <a:bodyPr wrap="square" lIns="18288" rIns="18288" tIns="18288" bIns="18288" anchor="ctr">
             <a:spAutoFit/>
           </a:bodyPr>
           <a:lstStyle/>
@@ -26906,27 +29594,70 @@
               </a:spcAft>
             </a:pPr>
             <a:r>
-              <a:rPr sz="1600" b="1" i="0">
-                <a:solidFill>
-                  <a:srgbClr val="178681"/>
+              <a:rPr sz="1280" b="0" i="0">
+                <a:solidFill>
+                  <a:srgbClr val="263746"/>
                 </a:solidFill>
                 <a:latin typeface="Arial"/>
               </a:rPr>
-              <a:t>Lung + retina</a:t>
-            </a:r>
-          </a:p>
-        </p:txBody>
-      </p:sp>
-      <p:sp>
-        <p:nvSpPr>
-          <p:cNvPr id="25" name="TextBox 24"/>
+              <a:t>Lower Bdh1, Ech1, Bnip3 and Decr1</a:t>
+            </a:r>
+          </a:p>
+        </p:txBody>
+      </p:sp>
+      <p:sp>
+        <p:nvSpPr>
+          <p:cNvPr id="14" name="Oval 13"/>
+          <p:cNvSpPr/>
+          <p:nvPr/>
+        </p:nvSpPr>
+        <p:spPr>
+          <a:xfrm>
+            <a:off x="9089136" y="4096511"/>
+            <a:ext cx="91440" cy="91440"/>
+          </a:xfrm>
+          <a:prstGeom prst="ellipse">
+            <a:avLst/>
+          </a:prstGeom>
+          <a:solidFill>
+            <a:srgbClr val="178681"/>
+          </a:solidFill>
+          <a:ln>
+            <a:noFill/>
+          </a:ln>
+        </p:spPr>
+        <p:style>
+          <a:lnRef idx="1">
+            <a:schemeClr val="accent1"/>
+          </a:lnRef>
+          <a:fillRef idx="3">
+            <a:schemeClr val="accent1"/>
+          </a:fillRef>
+          <a:effectRef idx="2">
+            <a:schemeClr val="accent1"/>
+          </a:effectRef>
+          <a:fontRef idx="minor">
+            <a:schemeClr val="lt1"/>
+          </a:fontRef>
+        </p:style>
+        <p:txBody>
+          <a:bodyPr rtlCol="0" anchor="ctr"/>
+          <a:lstStyle/>
+          <a:p>
+            <a:pPr algn="ctr"/>
+          </a:p>
+        </p:txBody>
+      </p:sp>
+      <p:sp>
+        <p:nvSpPr>
+          <p:cNvPr id="15" name="TextBox 14"/>
           <p:cNvSpPr txBox="1"/>
           <p:nvPr/>
         </p:nvSpPr>
         <p:spPr>
           <a:xfrm>
-            <a:off x="2551176" y="4416551"/>
-            <a:ext cx="7040880" cy="365760"/>
+            <a:off x="9253728" y="3986783"/>
+            <a:ext cx="2157984" cy="530352"/>
           </a:xfrm>
           <a:prstGeom prst="rect">
             <a:avLst/>
@@ -26945,77 +29676,36 @@
               </a:spcAft>
             </a:pPr>
             <a:r>
-              <a:rPr sz="1400" b="0" i="0">
+              <a:rPr sz="1280" b="0" i="0">
                 <a:solidFill>
                   <a:srgbClr val="263746"/>
                 </a:solidFill>
                 <a:latin typeface="Arial"/>
               </a:rPr>
-              <a:t>Predictive gains without a synthetic-informed BH-FDR gene</a:t>
-            </a:r>
-          </a:p>
-        </p:txBody>
-      </p:sp>
-      <p:sp>
-        <p:nvSpPr>
-          <p:cNvPr id="26" name="TextBox 25"/>
-          <p:cNvSpPr txBox="1"/>
-          <p:nvPr/>
-        </p:nvSpPr>
-        <p:spPr>
-          <a:xfrm>
-            <a:off x="9756648" y="4434840"/>
-            <a:ext cx="1682496" cy="310896"/>
-          </a:xfrm>
-          <a:prstGeom prst="rect">
-            <a:avLst/>
-          </a:prstGeom>
-          <a:noFill/>
-        </p:spPr>
-        <p:txBody>
-          <a:bodyPr wrap="square" lIns="18288" rIns="18288" tIns="18288" bIns="18288" anchor="ctr">
-            <a:spAutoFit/>
-          </a:bodyPr>
-          <a:lstStyle/>
-          <a:p>
-            <a:pPr algn="ctr">
-              <a:spcAft>
-                <a:spcPts val="0"/>
-              </a:spcAft>
-            </a:pPr>
-            <a:r>
-              <a:rPr sz="1250" b="1" i="0">
-                <a:solidFill>
-                  <a:srgbClr val="178681"/>
-                </a:solidFill>
-                <a:latin typeface="Arial"/>
-              </a:rPr>
-              <a:t>Prediction only</a:t>
-            </a:r>
-          </a:p>
-        </p:txBody>
-      </p:sp>
-      <p:sp>
-        <p:nvSpPr>
-          <p:cNvPr id="27" name="Rectangle 26"/>
+              <a:t>Higher Tpm1</a:t>
+            </a:r>
+          </a:p>
+        </p:txBody>
+      </p:sp>
+      <p:sp>
+        <p:nvSpPr>
+          <p:cNvPr id="16" name="Oval 15"/>
           <p:cNvSpPr/>
           <p:nvPr/>
         </p:nvSpPr>
         <p:spPr>
           <a:xfrm>
-            <a:off x="393192" y="5102352"/>
-            <a:ext cx="11375136" cy="667512"/>
-          </a:xfrm>
-          <a:prstGeom prst="rect">
+            <a:off x="9089136" y="4626864"/>
+            <a:ext cx="91440" cy="91440"/>
+          </a:xfrm>
+          <a:prstGeom prst="ellipse">
             <a:avLst/>
           </a:prstGeom>
           <a:solidFill>
-            <a:srgbClr val="F2F4F5"/>
+            <a:srgbClr val="178681"/>
           </a:solidFill>
-          <a:ln w="10160">
-            <a:solidFill>
-              <a:srgbClr val="DDE4E8"/>
-            </a:solidFill>
+          <a:ln>
+            <a:noFill/>
           </a:ln>
         </p:spPr>
         <p:style>
@@ -27042,20 +29732,59 @@
       </p:sp>
       <p:sp>
         <p:nvSpPr>
-          <p:cNvPr id="28" name="Rectangle 27"/>
+          <p:cNvPr id="17" name="TextBox 16"/>
+          <p:cNvSpPr txBox="1"/>
+          <p:nvPr/>
+        </p:nvSpPr>
+        <p:spPr>
+          <a:xfrm>
+            <a:off x="9253728" y="4517136"/>
+            <a:ext cx="2157984" cy="530352"/>
+          </a:xfrm>
+          <a:prstGeom prst="rect">
+            <a:avLst/>
+          </a:prstGeom>
+          <a:noFill/>
+        </p:spPr>
+        <p:txBody>
+          <a:bodyPr wrap="square" lIns="18288" rIns="18288" tIns="18288" bIns="18288" anchor="ctr">
+            <a:spAutoFit/>
+          </a:bodyPr>
+          <a:lstStyle/>
+          <a:p>
+            <a:pPr algn="l">
+              <a:spcAft>
+                <a:spcPts val="0"/>
+              </a:spcAft>
+            </a:pPr>
+            <a:r>
+              <a:rPr sz="1280" b="0" i="0">
+                <a:solidFill>
+                  <a:srgbClr val="263746"/>
+                </a:solidFill>
+                <a:latin typeface="Arial"/>
+              </a:rPr>
+              <a:t>Mitochondrial turnover and fatty-acid metabolism</a:t>
+            </a:r>
+          </a:p>
+        </p:txBody>
+      </p:sp>
+      <p:sp>
+        <p:nvSpPr>
+          <p:cNvPr id="18" name="Oval 17"/>
           <p:cNvSpPr/>
           <p:nvPr/>
         </p:nvSpPr>
         <p:spPr>
           <a:xfrm>
-            <a:off x="393192" y="5102352"/>
-            <a:ext cx="73152" cy="667512"/>
-          </a:xfrm>
-          <a:prstGeom prst="rect">
+            <a:off x="9089136" y="5157216"/>
+            <a:ext cx="91440" cy="91440"/>
+          </a:xfrm>
+          <a:prstGeom prst="ellipse">
             <a:avLst/>
           </a:prstGeom>
           <a:solidFill>
-            <a:srgbClr val="8A969E"/>
+            <a:srgbClr val="178681"/>
           </a:solidFill>
           <a:ln>
             <a:noFill/>
@@ -27085,14 +29814,14 @@
       </p:sp>
       <p:sp>
         <p:nvSpPr>
-          <p:cNvPr id="29" name="TextBox 28"/>
+          <p:cNvPr id="19" name="TextBox 18"/>
           <p:cNvSpPr txBox="1"/>
           <p:nvPr/>
         </p:nvSpPr>
         <p:spPr>
           <a:xfrm>
-            <a:off x="640080" y="5257800"/>
-            <a:ext cx="1938528" cy="310896"/>
+            <a:off x="9253728" y="5047488"/>
+            <a:ext cx="2157984" cy="530352"/>
           </a:xfrm>
           <a:prstGeom prst="rect">
             <a:avLst/>
@@ -27100,7 +29829,7 @@
           <a:noFill/>
         </p:spPr>
         <p:txBody>
-          <a:bodyPr wrap="square" lIns="18288" rIns="18288" tIns="18288" bIns="18288" anchor="t">
+          <a:bodyPr wrap="square" lIns="18288" rIns="18288" tIns="18288" bIns="18288" anchor="ctr">
             <a:spAutoFit/>
           </a:bodyPr>
           <a:lstStyle/>
@@ -27111,27 +29840,27 @@
               </a:spcAft>
             </a:pPr>
             <a:r>
-              <a:rPr sz="1600" b="1" i="0">
-                <a:solidFill>
-                  <a:srgbClr val="8A969E"/>
+              <a:rPr sz="1280" b="0" i="0">
+                <a:solidFill>
+                  <a:srgbClr val="263746"/>
                 </a:solidFill>
                 <a:latin typeface="Arial"/>
               </a:rPr>
-              <a:t>Liver + EDL + quadriceps</a:t>
-            </a:r>
-          </a:p>
-        </p:txBody>
-      </p:sp>
-      <p:sp>
-        <p:nvSpPr>
-          <p:cNvPr id="30" name="TextBox 29"/>
+              <a:t>Compatible with unloading and contractile remodeling</a:t>
+            </a:r>
+          </a:p>
+        </p:txBody>
+      </p:sp>
+      <p:sp>
+        <p:nvSpPr>
+          <p:cNvPr id="20" name="TextBox 19"/>
           <p:cNvSpPr txBox="1"/>
           <p:nvPr/>
         </p:nvSpPr>
         <p:spPr>
           <a:xfrm>
-            <a:off x="2551176" y="5230368"/>
-            <a:ext cx="7040880" cy="365760"/>
+            <a:off x="329184" y="6510528"/>
+            <a:ext cx="10972800" cy="173736"/>
           </a:xfrm>
           <a:prstGeom prst="rect">
             <a:avLst/>
@@ -27150,91 +29879,13 @@
               </a:spcAft>
             </a:pPr>
             <a:r>
-              <a:rPr sz="1400" b="0" i="0">
-                <a:solidFill>
-                  <a:srgbClr val="263746"/>
+              <a:rPr sz="720" b="0" i="0">
+                <a:solidFill>
+                  <a:srgbClr val="8A969E"/>
                 </a:solidFill>
                 <a:latin typeface="Arial"/>
               </a:rPr>
-              <a:t>Real-only arm retained</a:t>
-            </a:r>
-          </a:p>
-        </p:txBody>
-      </p:sp>
-      <p:sp>
-        <p:nvSpPr>
-          <p:cNvPr id="31" name="TextBox 30"/>
-          <p:cNvSpPr txBox="1"/>
-          <p:nvPr/>
-        </p:nvSpPr>
-        <p:spPr>
-          <a:xfrm>
-            <a:off x="9756648" y="5248656"/>
-            <a:ext cx="1682496" cy="310896"/>
-          </a:xfrm>
-          <a:prstGeom prst="rect">
-            <a:avLst/>
-          </a:prstGeom>
-          <a:noFill/>
-        </p:spPr>
-        <p:txBody>
-          <a:bodyPr wrap="square" lIns="18288" rIns="18288" tIns="18288" bIns="18288" anchor="ctr">
-            <a:spAutoFit/>
-          </a:bodyPr>
-          <a:lstStyle/>
-          <a:p>
-            <a:pPr algn="ctr">
-              <a:spcAft>
-                <a:spcPts val="0"/>
-              </a:spcAft>
-            </a:pPr>
-            <a:r>
-              <a:rPr sz="1250" b="1" i="0">
-                <a:solidFill>
-                  <a:srgbClr val="8A969E"/>
-                </a:solidFill>
-                <a:latin typeface="Arial"/>
-              </a:rPr>
-              <a:t>No synthetic claim</a:t>
-            </a:r>
-          </a:p>
-        </p:txBody>
-      </p:sp>
-      <p:sp>
-        <p:nvSpPr>
-          <p:cNvPr id="32" name="TextBox 31"/>
-          <p:cNvSpPr txBox="1"/>
-          <p:nvPr/>
-        </p:nvSpPr>
-        <p:spPr>
-          <a:xfrm>
-            <a:off x="685800" y="6035040"/>
-            <a:ext cx="10789920" cy="301752"/>
-          </a:xfrm>
-          <a:prstGeom prst="rect">
-            <a:avLst/>
-          </a:prstGeom>
-          <a:noFill/>
-        </p:spPr>
-        <p:txBody>
-          <a:bodyPr wrap="square" lIns="18288" rIns="18288" tIns="18288" bIns="18288" anchor="t">
-            <a:spAutoFit/>
-          </a:bodyPr>
-          <a:lstStyle/>
-          <a:p>
-            <a:pPr algn="ctr">
-              <a:spcAft>
-                <a:spcPts val="0"/>
-              </a:spcAft>
-            </a:pPr>
-            <a:r>
-              <a:rPr sz="1400" b="0" i="1">
-                <a:solidFill>
-                  <a:srgbClr val="59697A"/>
-                </a:solidFill>
-                <a:latin typeface="Arial"/>
-              </a:rPr>
-              <a:t>A plausible mechanism is not independent validation; these candidates still require targeted experiments.</a:t>
+              <a:t>Literature context: Gambara et al. (2017) and Stein et al. (2002).</a:t>
             </a:r>
           </a:p>
         </p:txBody>
@@ -27325,7 +29976,7 @@
                 </a:solidFill>
                 <a:latin typeface="Arial"/>
               </a:rPr>
-              <a:t>TAKEAWAYS</a:t>
+              <a:t>OTHER TISSUES</a:t>
             </a:r>
           </a:p>
         </p:txBody>
@@ -27364,7 +30015,7 @@
                 </a:solidFill>
                 <a:latin typeface="Arial"/>
               </a:rPr>
-              <a:t>Synthetic data helped most as a tissue-specific prior</a:t>
+              <a:t>Kidney adds a focused signal; other tissues are exploratory</a:t>
             </a:r>
           </a:p>
         </p:txBody>
@@ -27403,23 +30054,23 @@
                 </a:solidFill>
                 <a:latin typeface="Arial"/>
               </a:rPr>
-              <a:t>The generator created useful structure, not new biological replication.</a:t>
-            </a:r>
-          </a:p>
-        </p:txBody>
-      </p:sp>
-      <p:sp>
-        <p:nvSpPr>
-          <p:cNvPr id="7" name="Rounded Rectangle 6"/>
+              <a:t>The strongest process-level stories were thymus and soleus, but several tissues produced narrower candidates.</a:t>
+            </a:r>
+          </a:p>
+        </p:txBody>
+      </p:sp>
+      <p:sp>
+        <p:nvSpPr>
+          <p:cNvPr id="7" name="Rectangle 6"/>
           <p:cNvSpPr/>
           <p:nvPr/>
         </p:nvSpPr>
         <p:spPr>
           <a:xfrm>
-            <a:off x="384048" y="1920240"/>
-            <a:ext cx="3419856" cy="2487168"/>
-          </a:xfrm>
-          <a:prstGeom prst="roundRect">
+            <a:off x="393192" y="1847088"/>
+            <a:ext cx="11375136" cy="667512"/>
+          </a:xfrm>
+          <a:prstGeom prst="rect">
             <a:avLst/>
           </a:prstGeom>
           <a:solidFill>
@@ -27427,7 +30078,7 @@
           </a:solidFill>
           <a:ln w="10160">
             <a:solidFill>
-              <a:srgbClr val="2D6496"/>
+              <a:srgbClr val="DDE4E8"/>
             </a:solidFill>
           </a:ln>
         </p:spPr>
@@ -27455,16 +30106,16 @@
       </p:sp>
       <p:sp>
         <p:nvSpPr>
-          <p:cNvPr id="8" name="Oval 7"/>
+          <p:cNvPr id="8" name="Rectangle 7"/>
           <p:cNvSpPr/>
           <p:nvPr/>
         </p:nvSpPr>
         <p:spPr>
           <a:xfrm>
-            <a:off x="621792" y="2167128"/>
-            <a:ext cx="475488" cy="475488"/>
-          </a:xfrm>
-          <a:prstGeom prst="ellipse">
+            <a:off x="393192" y="1847088"/>
+            <a:ext cx="73152" cy="667512"/>
+          </a:xfrm>
+          <a:prstGeom prst="rect">
             <a:avLst/>
           </a:prstGeom>
           <a:solidFill>
@@ -27504,8 +30155,8 @@
         </p:nvSpPr>
         <p:spPr>
           <a:xfrm>
-            <a:off x="621792" y="2221992"/>
-            <a:ext cx="475488" cy="274320"/>
+            <a:off x="640080" y="2002536"/>
+            <a:ext cx="1938528" cy="310896"/>
           </a:xfrm>
           <a:prstGeom prst="rect">
             <a:avLst/>
@@ -27514,6 +30165,84 @@
         </p:spPr>
         <p:txBody>
           <a:bodyPr wrap="square" lIns="18288" rIns="18288" tIns="18288" bIns="18288" anchor="t">
+            <a:spAutoFit/>
+          </a:bodyPr>
+          <a:lstStyle/>
+          <a:p>
+            <a:pPr algn="l">
+              <a:spcAft>
+                <a:spcPts val="0"/>
+              </a:spcAft>
+            </a:pPr>
+            <a:r>
+              <a:rPr sz="1600" b="1" i="0">
+                <a:solidFill>
+                  <a:srgbClr val="2D6496"/>
+                </a:solidFill>
+                <a:latin typeface="Arial"/>
+              </a:rPr>
+              <a:t>Kidney</a:t>
+            </a:r>
+          </a:p>
+        </p:txBody>
+      </p:sp>
+      <p:sp>
+        <p:nvSpPr>
+          <p:cNvPr id="10" name="TextBox 9"/>
+          <p:cNvSpPr txBox="1"/>
+          <p:nvPr/>
+        </p:nvSpPr>
+        <p:spPr>
+          <a:xfrm>
+            <a:off x="2551176" y="1975104"/>
+            <a:ext cx="7040880" cy="365760"/>
+          </a:xfrm>
+          <a:prstGeom prst="rect">
+            <a:avLst/>
+          </a:prstGeom>
+          <a:noFill/>
+        </p:spPr>
+        <p:txBody>
+          <a:bodyPr wrap="square" lIns="18288" rIns="18288" tIns="18288" bIns="18288" anchor="ctr">
+            <a:spAutoFit/>
+          </a:bodyPr>
+          <a:lstStyle/>
+          <a:p>
+            <a:pPr algn="l">
+              <a:spcAft>
+                <a:spcPts val="0"/>
+              </a:spcAft>
+            </a:pPr>
+            <a:r>
+              <a:rPr sz="1400" b="0" i="0">
+                <a:solidFill>
+                  <a:srgbClr val="263746"/>
+                </a:solidFill>
+                <a:latin typeface="Arial"/>
+              </a:rPr>
+              <a:t>Inpp4b promoted, Slc37a4 reinforced; both higher in flight</a:t>
+            </a:r>
+          </a:p>
+        </p:txBody>
+      </p:sp>
+      <p:sp>
+        <p:nvSpPr>
+          <p:cNvPr id="11" name="TextBox 10"/>
+          <p:cNvSpPr txBox="1"/>
+          <p:nvPr/>
+        </p:nvSpPr>
+        <p:spPr>
+          <a:xfrm>
+            <a:off x="9756648" y="1993392"/>
+            <a:ext cx="1682496" cy="310896"/>
+          </a:xfrm>
+          <a:prstGeom prst="rect">
+            <a:avLst/>
+          </a:prstGeom>
+          <a:noFill/>
+        </p:spPr>
+        <p:txBody>
+          <a:bodyPr wrap="square" lIns="18288" rIns="18288" tIns="18288" bIns="18288" anchor="ctr">
             <a:spAutoFit/>
           </a:bodyPr>
           <a:lstStyle/>
@@ -27524,27 +30253,115 @@
               </a:spcAft>
             </a:pPr>
             <a:r>
-              <a:rPr sz="1600" b="1" i="0">
-                <a:solidFill>
-                  <a:srgbClr val="FFFFFF"/>
+              <a:rPr sz="1250" b="1" i="0">
+                <a:solidFill>
+                  <a:srgbClr val="2D6496"/>
                 </a:solidFill>
                 <a:latin typeface="Arial"/>
               </a:rPr>
-              <a:t>1</a:t>
-            </a:r>
-          </a:p>
-        </p:txBody>
-      </p:sp>
-      <p:sp>
-        <p:nvSpPr>
-          <p:cNvPr id="10" name="TextBox 9"/>
+              <a:t>Focused secondary</a:t>
+            </a:r>
+          </a:p>
+        </p:txBody>
+      </p:sp>
+      <p:sp>
+        <p:nvSpPr>
+          <p:cNvPr id="12" name="Rectangle 11"/>
+          <p:cNvSpPr/>
+          <p:nvPr/>
+        </p:nvSpPr>
+        <p:spPr>
+          <a:xfrm>
+            <a:off x="393192" y="2660904"/>
+            <a:ext cx="11375136" cy="667512"/>
+          </a:xfrm>
+          <a:prstGeom prst="rect">
+            <a:avLst/>
+          </a:prstGeom>
+          <a:solidFill>
+            <a:srgbClr val="F0ECF6"/>
+          </a:solidFill>
+          <a:ln w="10160">
+            <a:solidFill>
+              <a:srgbClr val="DDE4E8"/>
+            </a:solidFill>
+          </a:ln>
+        </p:spPr>
+        <p:style>
+          <a:lnRef idx="1">
+            <a:schemeClr val="accent1"/>
+          </a:lnRef>
+          <a:fillRef idx="3">
+            <a:schemeClr val="accent1"/>
+          </a:fillRef>
+          <a:effectRef idx="2">
+            <a:schemeClr val="accent1"/>
+          </a:effectRef>
+          <a:fontRef idx="minor">
+            <a:schemeClr val="lt1"/>
+          </a:fontRef>
+        </p:style>
+        <p:txBody>
+          <a:bodyPr rtlCol="0" anchor="ctr"/>
+          <a:lstStyle/>
+          <a:p>
+            <a:pPr algn="ctr"/>
+          </a:p>
+        </p:txBody>
+      </p:sp>
+      <p:sp>
+        <p:nvSpPr>
+          <p:cNvPr id="13" name="Rectangle 12"/>
+          <p:cNvSpPr/>
+          <p:nvPr/>
+        </p:nvSpPr>
+        <p:spPr>
+          <a:xfrm>
+            <a:off x="393192" y="2660904"/>
+            <a:ext cx="73152" cy="667512"/>
+          </a:xfrm>
+          <a:prstGeom prst="rect">
+            <a:avLst/>
+          </a:prstGeom>
+          <a:solidFill>
+            <a:srgbClr val="8063A6"/>
+          </a:solidFill>
+          <a:ln>
+            <a:noFill/>
+          </a:ln>
+        </p:spPr>
+        <p:style>
+          <a:lnRef idx="1">
+            <a:schemeClr val="accent1"/>
+          </a:lnRef>
+          <a:fillRef idx="3">
+            <a:schemeClr val="accent1"/>
+          </a:fillRef>
+          <a:effectRef idx="2">
+            <a:schemeClr val="accent1"/>
+          </a:effectRef>
+          <a:fontRef idx="minor">
+            <a:schemeClr val="lt1"/>
+          </a:fontRef>
+        </p:style>
+        <p:txBody>
+          <a:bodyPr rtlCol="0" anchor="ctr"/>
+          <a:lstStyle/>
+          <a:p>
+            <a:pPr algn="ctr"/>
+          </a:p>
+        </p:txBody>
+      </p:sp>
+      <p:sp>
+        <p:nvSpPr>
+          <p:cNvPr id="14" name="TextBox 13"/>
           <p:cNvSpPr txBox="1"/>
           <p:nvPr/>
         </p:nvSpPr>
         <p:spPr>
           <a:xfrm>
-            <a:off x="1216152" y="2176272"/>
-            <a:ext cx="2240280" cy="329184"/>
+            <a:off x="640080" y="2816352"/>
+            <a:ext cx="1938528" cy="310896"/>
           </a:xfrm>
           <a:prstGeom prst="rect">
             <a:avLst/>
@@ -27563,27 +30380,27 @@
               </a:spcAft>
             </a:pPr>
             <a:r>
-              <a:rPr sz="1900" b="1" i="0">
-                <a:solidFill>
-                  <a:srgbClr val="2D6496"/>
+              <a:rPr sz="1600" b="1" i="0">
+                <a:solidFill>
+                  <a:srgbClr val="8063A6"/>
                 </a:solidFill>
                 <a:latin typeface="Arial"/>
               </a:rPr>
-              <a:t>Generate</a:t>
-            </a:r>
-          </a:p>
-        </p:txBody>
-      </p:sp>
-      <p:sp>
-        <p:nvSpPr>
-          <p:cNvPr id="11" name="TextBox 10"/>
+              <a:t>Spleen</a:t>
+            </a:r>
+          </a:p>
+        </p:txBody>
+      </p:sp>
+      <p:sp>
+        <p:nvSpPr>
+          <p:cNvPr id="15" name="TextBox 14"/>
           <p:cNvSpPr txBox="1"/>
           <p:nvPr/>
         </p:nvSpPr>
         <p:spPr>
           <a:xfrm>
-            <a:off x="640080" y="2816352"/>
-            <a:ext cx="2880360" cy="1216152"/>
+            <a:off x="2551176" y="2788920"/>
+            <a:ext cx="7040880" cy="365760"/>
           </a:xfrm>
           <a:prstGeom prst="rect">
             <a:avLst/>
@@ -27591,7 +30408,7 @@
           <a:noFill/>
         </p:spPr>
         <p:txBody>
-          <a:bodyPr wrap="square" lIns="18288" rIns="18288" tIns="18288" bIns="18288" anchor="t">
+          <a:bodyPr wrap="square" lIns="18288" rIns="18288" tIns="18288" bIns="18288" anchor="ctr">
             <a:spAutoFit/>
           </a:bodyPr>
           <a:lstStyle/>
@@ -27602,29 +30419,273 @@
               </a:spcAft>
             </a:pPr>
             <a:r>
-              <a:rPr sz="1500" b="0" i="0">
+              <a:rPr sz="1400" b="0" i="0">
                 <a:solidFill>
                   <a:srgbClr val="263746"/>
                 </a:solidFill>
                 <a:latin typeface="Arial"/>
               </a:rPr>
-              <a:t>Conditional DDIM produced high-fidelity profiles with near-chance real-versus-synthetic separation.</a:t>
-            </a:r>
-          </a:p>
-        </p:txBody>
-      </p:sp>
-      <p:sp>
-        <p:nvSpPr>
-          <p:cNvPr id="12" name="Rounded Rectangle 11"/>
+              <a:t>Rai14, Ptprk and Myl9 promoted; Loxl1 reinforced; no Reactome enrichment</a:t>
+            </a:r>
+          </a:p>
+        </p:txBody>
+      </p:sp>
+      <p:sp>
+        <p:nvSpPr>
+          <p:cNvPr id="16" name="TextBox 15"/>
+          <p:cNvSpPr txBox="1"/>
+          <p:nvPr/>
+        </p:nvSpPr>
+        <p:spPr>
+          <a:xfrm>
+            <a:off x="9756648" y="2807208"/>
+            <a:ext cx="1682496" cy="310896"/>
+          </a:xfrm>
+          <a:prstGeom prst="rect">
+            <a:avLst/>
+          </a:prstGeom>
+          <a:noFill/>
+        </p:spPr>
+        <p:txBody>
+          <a:bodyPr wrap="square" lIns="18288" rIns="18288" tIns="18288" bIns="18288" anchor="ctr">
+            <a:spAutoFit/>
+          </a:bodyPr>
+          <a:lstStyle/>
+          <a:p>
+            <a:pPr algn="ctr">
+              <a:spcAft>
+                <a:spcPts val="0"/>
+              </a:spcAft>
+            </a:pPr>
+            <a:r>
+              <a:rPr sz="1250" b="1" i="0">
+                <a:solidFill>
+                  <a:srgbClr val="8063A6"/>
+                </a:solidFill>
+                <a:latin typeface="Arial"/>
+              </a:rPr>
+              <a:t>Exploratory</a:t>
+            </a:r>
+          </a:p>
+        </p:txBody>
+      </p:sp>
+      <p:sp>
+        <p:nvSpPr>
+          <p:cNvPr id="17" name="Rectangle 16"/>
           <p:cNvSpPr/>
           <p:nvPr/>
         </p:nvSpPr>
         <p:spPr>
           <a:xfrm>
-            <a:off x="4059936" y="1920240"/>
-            <a:ext cx="3419856" cy="2487168"/>
-          </a:xfrm>
-          <a:prstGeom prst="roundRect">
+            <a:off x="393192" y="3474720"/>
+            <a:ext cx="11375136" cy="667512"/>
+          </a:xfrm>
+          <a:prstGeom prst="rect">
+            <a:avLst/>
+          </a:prstGeom>
+          <a:solidFill>
+            <a:srgbClr val="F8F1E2"/>
+          </a:solidFill>
+          <a:ln w="10160">
+            <a:solidFill>
+              <a:srgbClr val="DDE4E8"/>
+            </a:solidFill>
+          </a:ln>
+        </p:spPr>
+        <p:style>
+          <a:lnRef idx="1">
+            <a:schemeClr val="accent1"/>
+          </a:lnRef>
+          <a:fillRef idx="3">
+            <a:schemeClr val="accent1"/>
+          </a:fillRef>
+          <a:effectRef idx="2">
+            <a:schemeClr val="accent1"/>
+          </a:effectRef>
+          <a:fontRef idx="minor">
+            <a:schemeClr val="lt1"/>
+          </a:fontRef>
+        </p:style>
+        <p:txBody>
+          <a:bodyPr rtlCol="0" anchor="ctr"/>
+          <a:lstStyle/>
+          <a:p>
+            <a:pPr algn="ctr"/>
+          </a:p>
+        </p:txBody>
+      </p:sp>
+      <p:sp>
+        <p:nvSpPr>
+          <p:cNvPr id="18" name="Rectangle 17"/>
+          <p:cNvSpPr/>
+          <p:nvPr/>
+        </p:nvSpPr>
+        <p:spPr>
+          <a:xfrm>
+            <a:off x="393192" y="3474720"/>
+            <a:ext cx="73152" cy="667512"/>
+          </a:xfrm>
+          <a:prstGeom prst="rect">
+            <a:avLst/>
+          </a:prstGeom>
+          <a:solidFill>
+            <a:srgbClr val="D37B00"/>
+          </a:solidFill>
+          <a:ln>
+            <a:noFill/>
+          </a:ln>
+        </p:spPr>
+        <p:style>
+          <a:lnRef idx="1">
+            <a:schemeClr val="accent1"/>
+          </a:lnRef>
+          <a:fillRef idx="3">
+            <a:schemeClr val="accent1"/>
+          </a:fillRef>
+          <a:effectRef idx="2">
+            <a:schemeClr val="accent1"/>
+          </a:effectRef>
+          <a:fontRef idx="minor">
+            <a:schemeClr val="lt1"/>
+          </a:fontRef>
+        </p:style>
+        <p:txBody>
+          <a:bodyPr rtlCol="0" anchor="ctr"/>
+          <a:lstStyle/>
+          <a:p>
+            <a:pPr algn="ctr"/>
+          </a:p>
+        </p:txBody>
+      </p:sp>
+      <p:sp>
+        <p:nvSpPr>
+          <p:cNvPr id="19" name="TextBox 18"/>
+          <p:cNvSpPr txBox="1"/>
+          <p:nvPr/>
+        </p:nvSpPr>
+        <p:spPr>
+          <a:xfrm>
+            <a:off x="640080" y="3630168"/>
+            <a:ext cx="1938528" cy="310896"/>
+          </a:xfrm>
+          <a:prstGeom prst="rect">
+            <a:avLst/>
+          </a:prstGeom>
+          <a:noFill/>
+        </p:spPr>
+        <p:txBody>
+          <a:bodyPr wrap="square" lIns="18288" rIns="18288" tIns="18288" bIns="18288" anchor="t">
+            <a:spAutoFit/>
+          </a:bodyPr>
+          <a:lstStyle/>
+          <a:p>
+            <a:pPr algn="l">
+              <a:spcAft>
+                <a:spcPts val="0"/>
+              </a:spcAft>
+            </a:pPr>
+            <a:r>
+              <a:rPr sz="1600" b="1" i="0">
+                <a:solidFill>
+                  <a:srgbClr val="D37B00"/>
+                </a:solidFill>
+                <a:latin typeface="Arial"/>
+              </a:rPr>
+              <a:t>Skin + adrenal</a:t>
+            </a:r>
+          </a:p>
+        </p:txBody>
+      </p:sp>
+      <p:sp>
+        <p:nvSpPr>
+          <p:cNvPr id="20" name="TextBox 19"/>
+          <p:cNvSpPr txBox="1"/>
+          <p:nvPr/>
+        </p:nvSpPr>
+        <p:spPr>
+          <a:xfrm>
+            <a:off x="2551176" y="3602736"/>
+            <a:ext cx="7040880" cy="365760"/>
+          </a:xfrm>
+          <a:prstGeom prst="rect">
+            <a:avLst/>
+          </a:prstGeom>
+          <a:noFill/>
+        </p:spPr>
+        <p:txBody>
+          <a:bodyPr wrap="square" lIns="18288" rIns="18288" tIns="18288" bIns="18288" anchor="ctr">
+            <a:spAutoFit/>
+          </a:bodyPr>
+          <a:lstStyle/>
+          <a:p>
+            <a:pPr algn="l">
+              <a:spcAft>
+                <a:spcPts val="0"/>
+              </a:spcAft>
+            </a:pPr>
+            <a:r>
+              <a:rPr sz="1400" b="0" i="0">
+                <a:solidFill>
+                  <a:srgbClr val="263746"/>
+                </a:solidFill>
+                <a:latin typeface="Arial"/>
+              </a:rPr>
+              <a:t>Plscr1 higher in skin; adrenal Psmb8 is plausible but literature-unmatched</a:t>
+            </a:r>
+          </a:p>
+        </p:txBody>
+      </p:sp>
+      <p:sp>
+        <p:nvSpPr>
+          <p:cNvPr id="21" name="TextBox 20"/>
+          <p:cNvSpPr txBox="1"/>
+          <p:nvPr/>
+        </p:nvSpPr>
+        <p:spPr>
+          <a:xfrm>
+            <a:off x="9756648" y="3621024"/>
+            <a:ext cx="1682496" cy="310896"/>
+          </a:xfrm>
+          <a:prstGeom prst="rect">
+            <a:avLst/>
+          </a:prstGeom>
+          <a:noFill/>
+        </p:spPr>
+        <p:txBody>
+          <a:bodyPr wrap="square" lIns="18288" rIns="18288" tIns="18288" bIns="18288" anchor="ctr">
+            <a:spAutoFit/>
+          </a:bodyPr>
+          <a:lstStyle/>
+          <a:p>
+            <a:pPr algn="ctr">
+              <a:spcAft>
+                <a:spcPts val="0"/>
+              </a:spcAft>
+            </a:pPr>
+            <a:r>
+              <a:rPr sz="1250" b="1" i="0">
+                <a:solidFill>
+                  <a:srgbClr val="D37B00"/>
+                </a:solidFill>
+                <a:latin typeface="Arial"/>
+              </a:rPr>
+              <a:t>Exploratory</a:t>
+            </a:r>
+          </a:p>
+        </p:txBody>
+      </p:sp>
+      <p:sp>
+        <p:nvSpPr>
+          <p:cNvPr id="22" name="Rectangle 21"/>
+          <p:cNvSpPr/>
+          <p:nvPr/>
+        </p:nvSpPr>
+        <p:spPr>
+          <a:xfrm>
+            <a:off x="393192" y="4288536"/>
+            <a:ext cx="11375136" cy="667512"/>
+          </a:xfrm>
+          <a:prstGeom prst="rect">
             <a:avLst/>
           </a:prstGeom>
           <a:solidFill>
@@ -27632,7 +30693,7 @@
           </a:solidFill>
           <a:ln w="10160">
             <a:solidFill>
-              <a:srgbClr val="178681"/>
+              <a:srgbClr val="DDE4E8"/>
             </a:solidFill>
           </a:ln>
         </p:spPr>
@@ -27660,16 +30721,16 @@
       </p:sp>
       <p:sp>
         <p:nvSpPr>
-          <p:cNvPr id="13" name="Oval 12"/>
+          <p:cNvPr id="23" name="Rectangle 22"/>
           <p:cNvSpPr/>
           <p:nvPr/>
         </p:nvSpPr>
         <p:spPr>
           <a:xfrm>
-            <a:off x="4297680" y="2167128"/>
-            <a:ext cx="475488" cy="475488"/>
-          </a:xfrm>
-          <a:prstGeom prst="ellipse">
+            <a:off x="393192" y="4288536"/>
+            <a:ext cx="73152" cy="667512"/>
+          </a:xfrm>
+          <a:prstGeom prst="rect">
             <a:avLst/>
           </a:prstGeom>
           <a:solidFill>
@@ -27703,14 +30764,14 @@
       </p:sp>
       <p:sp>
         <p:nvSpPr>
-          <p:cNvPr id="14" name="TextBox 13"/>
+          <p:cNvPr id="24" name="TextBox 23"/>
           <p:cNvSpPr txBox="1"/>
           <p:nvPr/>
         </p:nvSpPr>
         <p:spPr>
           <a:xfrm>
-            <a:off x="4297680" y="2221992"/>
-            <a:ext cx="475488" cy="274320"/>
+            <a:off x="640080" y="4443983"/>
+            <a:ext cx="1938528" cy="310896"/>
           </a:xfrm>
           <a:prstGeom prst="rect">
             <a:avLst/>
@@ -27719,6 +30780,84 @@
         </p:spPr>
         <p:txBody>
           <a:bodyPr wrap="square" lIns="18288" rIns="18288" tIns="18288" bIns="18288" anchor="t">
+            <a:spAutoFit/>
+          </a:bodyPr>
+          <a:lstStyle/>
+          <a:p>
+            <a:pPr algn="l">
+              <a:spcAft>
+                <a:spcPts val="0"/>
+              </a:spcAft>
+            </a:pPr>
+            <a:r>
+              <a:rPr sz="1600" b="1" i="0">
+                <a:solidFill>
+                  <a:srgbClr val="178681"/>
+                </a:solidFill>
+                <a:latin typeface="Arial"/>
+              </a:rPr>
+              <a:t>Lung + retina</a:t>
+            </a:r>
+          </a:p>
+        </p:txBody>
+      </p:sp>
+      <p:sp>
+        <p:nvSpPr>
+          <p:cNvPr id="25" name="TextBox 24"/>
+          <p:cNvSpPr txBox="1"/>
+          <p:nvPr/>
+        </p:nvSpPr>
+        <p:spPr>
+          <a:xfrm>
+            <a:off x="2551176" y="4416551"/>
+            <a:ext cx="7040880" cy="365760"/>
+          </a:xfrm>
+          <a:prstGeom prst="rect">
+            <a:avLst/>
+          </a:prstGeom>
+          <a:noFill/>
+        </p:spPr>
+        <p:txBody>
+          <a:bodyPr wrap="square" lIns="18288" rIns="18288" tIns="18288" bIns="18288" anchor="ctr">
+            <a:spAutoFit/>
+          </a:bodyPr>
+          <a:lstStyle/>
+          <a:p>
+            <a:pPr algn="l">
+              <a:spcAft>
+                <a:spcPts val="0"/>
+              </a:spcAft>
+            </a:pPr>
+            <a:r>
+              <a:rPr sz="1400" b="0" i="0">
+                <a:solidFill>
+                  <a:srgbClr val="263746"/>
+                </a:solidFill>
+                <a:latin typeface="Arial"/>
+              </a:rPr>
+              <a:t>Predictive gains without a synthetic-informed BH-FDR gene</a:t>
+            </a:r>
+          </a:p>
+        </p:txBody>
+      </p:sp>
+      <p:sp>
+        <p:nvSpPr>
+          <p:cNvPr id="26" name="TextBox 25"/>
+          <p:cNvSpPr txBox="1"/>
+          <p:nvPr/>
+        </p:nvSpPr>
+        <p:spPr>
+          <a:xfrm>
+            <a:off x="9756648" y="4434840"/>
+            <a:ext cx="1682496" cy="310896"/>
+          </a:xfrm>
+          <a:prstGeom prst="rect">
+            <a:avLst/>
+          </a:prstGeom>
+          <a:noFill/>
+        </p:spPr>
+        <p:txBody>
+          <a:bodyPr wrap="square" lIns="18288" rIns="18288" tIns="18288" bIns="18288" anchor="ctr">
             <a:spAutoFit/>
           </a:bodyPr>
           <a:lstStyle/>
@@ -27729,27 +30868,115 @@
               </a:spcAft>
             </a:pPr>
             <a:r>
-              <a:rPr sz="1600" b="1" i="0">
-                <a:solidFill>
-                  <a:srgbClr val="FFFFFF"/>
+              <a:rPr sz="1250" b="1" i="0">
+                <a:solidFill>
+                  <a:srgbClr val="178681"/>
                 </a:solidFill>
                 <a:latin typeface="Arial"/>
               </a:rPr>
-              <a:t>2</a:t>
-            </a:r>
-          </a:p>
-        </p:txBody>
-      </p:sp>
-      <p:sp>
-        <p:nvSpPr>
-          <p:cNvPr id="15" name="TextBox 14"/>
+              <a:t>Prediction only</a:t>
+            </a:r>
+          </a:p>
+        </p:txBody>
+      </p:sp>
+      <p:sp>
+        <p:nvSpPr>
+          <p:cNvPr id="27" name="Rectangle 26"/>
+          <p:cNvSpPr/>
+          <p:nvPr/>
+        </p:nvSpPr>
+        <p:spPr>
+          <a:xfrm>
+            <a:off x="393192" y="5102352"/>
+            <a:ext cx="11375136" cy="667512"/>
+          </a:xfrm>
+          <a:prstGeom prst="rect">
+            <a:avLst/>
+          </a:prstGeom>
+          <a:solidFill>
+            <a:srgbClr val="F2F4F5"/>
+          </a:solidFill>
+          <a:ln w="10160">
+            <a:solidFill>
+              <a:srgbClr val="DDE4E8"/>
+            </a:solidFill>
+          </a:ln>
+        </p:spPr>
+        <p:style>
+          <a:lnRef idx="1">
+            <a:schemeClr val="accent1"/>
+          </a:lnRef>
+          <a:fillRef idx="3">
+            <a:schemeClr val="accent1"/>
+          </a:fillRef>
+          <a:effectRef idx="2">
+            <a:schemeClr val="accent1"/>
+          </a:effectRef>
+          <a:fontRef idx="minor">
+            <a:schemeClr val="lt1"/>
+          </a:fontRef>
+        </p:style>
+        <p:txBody>
+          <a:bodyPr rtlCol="0" anchor="ctr"/>
+          <a:lstStyle/>
+          <a:p>
+            <a:pPr algn="ctr"/>
+          </a:p>
+        </p:txBody>
+      </p:sp>
+      <p:sp>
+        <p:nvSpPr>
+          <p:cNvPr id="28" name="Rectangle 27"/>
+          <p:cNvSpPr/>
+          <p:nvPr/>
+        </p:nvSpPr>
+        <p:spPr>
+          <a:xfrm>
+            <a:off x="393192" y="5102352"/>
+            <a:ext cx="73152" cy="667512"/>
+          </a:xfrm>
+          <a:prstGeom prst="rect">
+            <a:avLst/>
+          </a:prstGeom>
+          <a:solidFill>
+            <a:srgbClr val="8A969E"/>
+          </a:solidFill>
+          <a:ln>
+            <a:noFill/>
+          </a:ln>
+        </p:spPr>
+        <p:style>
+          <a:lnRef idx="1">
+            <a:schemeClr val="accent1"/>
+          </a:lnRef>
+          <a:fillRef idx="3">
+            <a:schemeClr val="accent1"/>
+          </a:fillRef>
+          <a:effectRef idx="2">
+            <a:schemeClr val="accent1"/>
+          </a:effectRef>
+          <a:fontRef idx="minor">
+            <a:schemeClr val="lt1"/>
+          </a:fontRef>
+        </p:style>
+        <p:txBody>
+          <a:bodyPr rtlCol="0" anchor="ctr"/>
+          <a:lstStyle/>
+          <a:p>
+            <a:pPr algn="ctr"/>
+          </a:p>
+        </p:txBody>
+      </p:sp>
+      <p:sp>
+        <p:nvSpPr>
+          <p:cNvPr id="29" name="TextBox 28"/>
           <p:cNvSpPr txBox="1"/>
           <p:nvPr/>
         </p:nvSpPr>
         <p:spPr>
           <a:xfrm>
-            <a:off x="4892040" y="2176272"/>
-            <a:ext cx="2240280" cy="329184"/>
+            <a:off x="640080" y="5257800"/>
+            <a:ext cx="1938528" cy="310896"/>
           </a:xfrm>
           <a:prstGeom prst="rect">
             <a:avLst/>
@@ -27768,27 +30995,27 @@
               </a:spcAft>
             </a:pPr>
             <a:r>
-              <a:rPr sz="1900" b="1" i="0">
-                <a:solidFill>
-                  <a:srgbClr val="178681"/>
+              <a:rPr sz="1600" b="1" i="0">
+                <a:solidFill>
+                  <a:srgbClr val="8A969E"/>
                 </a:solidFill>
                 <a:latin typeface="Arial"/>
               </a:rPr>
-              <a:t>Use</a:t>
-            </a:r>
-          </a:p>
-        </p:txBody>
-      </p:sp>
-      <p:sp>
-        <p:nvSpPr>
-          <p:cNvPr id="16" name="TextBox 15"/>
+              <a:t>Liver + EDL + quadriceps</a:t>
+            </a:r>
+          </a:p>
+        </p:txBody>
+      </p:sp>
+      <p:sp>
+        <p:nvSpPr>
+          <p:cNvPr id="30" name="TextBox 29"/>
           <p:cNvSpPr txBox="1"/>
           <p:nvPr/>
         </p:nvSpPr>
         <p:spPr>
           <a:xfrm>
-            <a:off x="4315968" y="2816352"/>
-            <a:ext cx="2880360" cy="1216152"/>
+            <a:off x="2551176" y="5230368"/>
+            <a:ext cx="7040880" cy="365760"/>
           </a:xfrm>
           <a:prstGeom prst="rect">
             <a:avLst/>
@@ -27796,7 +31023,7 @@
           <a:noFill/>
         </p:spPr>
         <p:txBody>
-          <a:bodyPr wrap="square" lIns="18288" rIns="18288" tIns="18288" bIns="18288" anchor="t">
+          <a:bodyPr wrap="square" lIns="18288" rIns="18288" tIns="18288" bIns="18288" anchor="ctr">
             <a:spAutoFit/>
           </a:bodyPr>
           <a:lstStyle/>
@@ -27807,115 +31034,27 @@
               </a:spcAft>
             </a:pPr>
             <a:r>
-              <a:rPr sz="1500" b="0" i="0">
+              <a:rPr sz="1400" b="0" i="0">
                 <a:solidFill>
                   <a:srgbClr val="263746"/>
                 </a:solidFill>
                 <a:latin typeface="Arial"/>
               </a:rPr>
-              <a:t>Pooled augmentation failed. Tissue-specific ranking and low-weight training were more useful.</a:t>
-            </a:r>
-          </a:p>
-        </p:txBody>
-      </p:sp>
-      <p:sp>
-        <p:nvSpPr>
-          <p:cNvPr id="17" name="Rounded Rectangle 16"/>
-          <p:cNvSpPr/>
-          <p:nvPr/>
-        </p:nvSpPr>
-        <p:spPr>
-          <a:xfrm>
-            <a:off x="7735824" y="1920240"/>
-            <a:ext cx="3419856" cy="2487168"/>
-          </a:xfrm>
-          <a:prstGeom prst="roundRect">
-            <a:avLst/>
-          </a:prstGeom>
-          <a:solidFill>
-            <a:srgbClr val="F8F1E2"/>
-          </a:solidFill>
-          <a:ln w="10160">
-            <a:solidFill>
-              <a:srgbClr val="D37B00"/>
-            </a:solidFill>
-          </a:ln>
-        </p:spPr>
-        <p:style>
-          <a:lnRef idx="1">
-            <a:schemeClr val="accent1"/>
-          </a:lnRef>
-          <a:fillRef idx="3">
-            <a:schemeClr val="accent1"/>
-          </a:fillRef>
-          <a:effectRef idx="2">
-            <a:schemeClr val="accent1"/>
-          </a:effectRef>
-          <a:fontRef idx="minor">
-            <a:schemeClr val="lt1"/>
-          </a:fontRef>
-        </p:style>
-        <p:txBody>
-          <a:bodyPr rtlCol="0" anchor="ctr"/>
-          <a:lstStyle/>
-          <a:p>
-            <a:pPr algn="ctr"/>
-          </a:p>
-        </p:txBody>
-      </p:sp>
-      <p:sp>
-        <p:nvSpPr>
-          <p:cNvPr id="18" name="Oval 17"/>
-          <p:cNvSpPr/>
-          <p:nvPr/>
-        </p:nvSpPr>
-        <p:spPr>
-          <a:xfrm>
-            <a:off x="7973568" y="2167128"/>
-            <a:ext cx="475488" cy="475488"/>
-          </a:xfrm>
-          <a:prstGeom prst="ellipse">
-            <a:avLst/>
-          </a:prstGeom>
-          <a:solidFill>
-            <a:srgbClr val="D37B00"/>
-          </a:solidFill>
-          <a:ln>
-            <a:noFill/>
-          </a:ln>
-        </p:spPr>
-        <p:style>
-          <a:lnRef idx="1">
-            <a:schemeClr val="accent1"/>
-          </a:lnRef>
-          <a:fillRef idx="3">
-            <a:schemeClr val="accent1"/>
-          </a:fillRef>
-          <a:effectRef idx="2">
-            <a:schemeClr val="accent1"/>
-          </a:effectRef>
-          <a:fontRef idx="minor">
-            <a:schemeClr val="lt1"/>
-          </a:fontRef>
-        </p:style>
-        <p:txBody>
-          <a:bodyPr rtlCol="0" anchor="ctr"/>
-          <a:lstStyle/>
-          <a:p>
-            <a:pPr algn="ctr"/>
-          </a:p>
-        </p:txBody>
-      </p:sp>
-      <p:sp>
-        <p:nvSpPr>
-          <p:cNvPr id="19" name="TextBox 18"/>
+              <a:t>Real-only arm retained</a:t>
+            </a:r>
+          </a:p>
+        </p:txBody>
+      </p:sp>
+      <p:sp>
+        <p:nvSpPr>
+          <p:cNvPr id="31" name="TextBox 30"/>
           <p:cNvSpPr txBox="1"/>
           <p:nvPr/>
         </p:nvSpPr>
         <p:spPr>
           <a:xfrm>
-            <a:off x="7973568" y="2221992"/>
-            <a:ext cx="475488" cy="274320"/>
+            <a:off x="9756648" y="5248656"/>
+            <a:ext cx="1682496" cy="310896"/>
           </a:xfrm>
           <a:prstGeom prst="rect">
             <a:avLst/>
@@ -27923,7 +31062,7 @@
           <a:noFill/>
         </p:spPr>
         <p:txBody>
-          <a:bodyPr wrap="square" lIns="18288" rIns="18288" tIns="18288" bIns="18288" anchor="t">
+          <a:bodyPr wrap="square" lIns="18288" rIns="18288" tIns="18288" bIns="18288" anchor="ctr">
             <a:spAutoFit/>
           </a:bodyPr>
           <a:lstStyle/>
@@ -27934,27 +31073,27 @@
               </a:spcAft>
             </a:pPr>
             <a:r>
-              <a:rPr sz="1600" b="1" i="0">
-                <a:solidFill>
-                  <a:srgbClr val="FFFFFF"/>
+              <a:rPr sz="1250" b="1" i="0">
+                <a:solidFill>
+                  <a:srgbClr val="8A969E"/>
                 </a:solidFill>
                 <a:latin typeface="Arial"/>
               </a:rPr>
-              <a:t>3</a:t>
-            </a:r>
-          </a:p>
-        </p:txBody>
-      </p:sp>
-      <p:sp>
-        <p:nvSpPr>
-          <p:cNvPr id="20" name="TextBox 19"/>
+              <a:t>No synthetic claim</a:t>
+            </a:r>
+          </a:p>
+        </p:txBody>
+      </p:sp>
+      <p:sp>
+        <p:nvSpPr>
+          <p:cNvPr id="32" name="TextBox 31"/>
           <p:cNvSpPr txBox="1"/>
           <p:nvPr/>
         </p:nvSpPr>
         <p:spPr>
           <a:xfrm>
-            <a:off x="8567928" y="2176272"/>
-            <a:ext cx="2240280" cy="329184"/>
+            <a:off x="685800" y="6035040"/>
+            <a:ext cx="10789920" cy="301752"/>
           </a:xfrm>
           <a:prstGeom prst="rect">
             <a:avLst/>
@@ -27967,220 +31106,19 @@
           </a:bodyPr>
           <a:lstStyle/>
           <a:p>
-            <a:pPr algn="l">
+            <a:pPr algn="ctr">
               <a:spcAft>
                 <a:spcPts val="0"/>
               </a:spcAft>
             </a:pPr>
             <a:r>
-              <a:rPr sz="1900" b="1" i="0">
-                <a:solidFill>
-                  <a:srgbClr val="D37B00"/>
+              <a:rPr sz="1400" b="0" i="1">
+                <a:solidFill>
+                  <a:srgbClr val="59697A"/>
                 </a:solidFill>
                 <a:latin typeface="Arial"/>
               </a:rPr>
-              <a:t>Interpret</a:t>
-            </a:r>
-          </a:p>
-        </p:txBody>
-      </p:sp>
-      <p:sp>
-        <p:nvSpPr>
-          <p:cNvPr id="21" name="TextBox 20"/>
-          <p:cNvSpPr txBox="1"/>
-          <p:nvPr/>
-        </p:nvSpPr>
-        <p:spPr>
-          <a:xfrm>
-            <a:off x="7991856" y="2816352"/>
-            <a:ext cx="2880360" cy="1216152"/>
-          </a:xfrm>
-          <a:prstGeom prst="rect">
-            <a:avLst/>
-          </a:prstGeom>
-          <a:noFill/>
-        </p:spPr>
-        <p:txBody>
-          <a:bodyPr wrap="square" lIns="18288" rIns="18288" tIns="18288" bIns="18288" anchor="t">
-            <a:spAutoFit/>
-          </a:bodyPr>
-          <a:lstStyle/>
-          <a:p>
-            <a:pPr algn="l">
-              <a:spcAft>
-                <a:spcPts val="0"/>
-              </a:spcAft>
-            </a:pPr>
-            <a:r>
-              <a:rPr sz="1500" b="0" i="0">
-                <a:solidFill>
-                  <a:srgbClr val="263746"/>
-                </a:solidFill>
-                <a:latin typeface="Arial"/>
-              </a:rPr>
-              <a:t>Thymus and soleus were clearest. Literature review separated recovery from complementary hypotheses.</a:t>
-            </a:r>
-          </a:p>
-        </p:txBody>
-      </p:sp>
-      <p:sp>
-        <p:nvSpPr>
-          <p:cNvPr id="22" name="Rounded Rectangle 21"/>
-          <p:cNvSpPr/>
-          <p:nvPr/>
-        </p:nvSpPr>
-        <p:spPr>
-          <a:xfrm>
-            <a:off x="384048" y="4709160"/>
-            <a:ext cx="10972800" cy="1188720"/>
-          </a:xfrm>
-          <a:prstGeom prst="roundRect">
-            <a:avLst/>
-          </a:prstGeom>
-          <a:solidFill>
-            <a:srgbClr val="082B55"/>
-          </a:solidFill>
-          <a:ln w="10160">
-            <a:solidFill>
-              <a:srgbClr val="082B55"/>
-            </a:solidFill>
-          </a:ln>
-        </p:spPr>
-        <p:style>
-          <a:lnRef idx="1">
-            <a:schemeClr val="accent1"/>
-          </a:lnRef>
-          <a:fillRef idx="3">
-            <a:schemeClr val="accent1"/>
-          </a:fillRef>
-          <a:effectRef idx="2">
-            <a:schemeClr val="accent1"/>
-          </a:effectRef>
-          <a:fontRef idx="minor">
-            <a:schemeClr val="lt1"/>
-          </a:fontRef>
-        </p:style>
-        <p:txBody>
-          <a:bodyPr rtlCol="0" anchor="ctr"/>
-          <a:lstStyle/>
-          <a:p>
-            <a:pPr algn="ctr"/>
-          </a:p>
-        </p:txBody>
-      </p:sp>
-      <p:sp>
-        <p:nvSpPr>
-          <p:cNvPr id="23" name="TextBox 22"/>
-          <p:cNvSpPr txBox="1"/>
-          <p:nvPr/>
-        </p:nvSpPr>
-        <p:spPr>
-          <a:xfrm>
-            <a:off x="685800" y="5010912"/>
-            <a:ext cx="1261872" cy="310896"/>
-          </a:xfrm>
-          <a:prstGeom prst="rect">
-            <a:avLst/>
-          </a:prstGeom>
-          <a:noFill/>
-        </p:spPr>
-        <p:txBody>
-          <a:bodyPr wrap="square" lIns="18288" rIns="18288" tIns="18288" bIns="18288" anchor="t">
-            <a:spAutoFit/>
-          </a:bodyPr>
-          <a:lstStyle/>
-          <a:p>
-            <a:pPr algn="l">
-              <a:spcAft>
-                <a:spcPts val="0"/>
-              </a:spcAft>
-            </a:pPr>
-            <a:r>
-              <a:rPr sz="1700" b="1" i="0">
-                <a:solidFill>
-                  <a:srgbClr val="FFD69A"/>
-                </a:solidFill>
-                <a:latin typeface="Arial"/>
-              </a:rPr>
-              <a:t>Next test</a:t>
-            </a:r>
-          </a:p>
-        </p:txBody>
-      </p:sp>
-      <p:sp>
-        <p:nvSpPr>
-          <p:cNvPr id="24" name="TextBox 23"/>
-          <p:cNvSpPr txBox="1"/>
-          <p:nvPr/>
-        </p:nvSpPr>
-        <p:spPr>
-          <a:xfrm>
-            <a:off x="1874519" y="4937760"/>
-            <a:ext cx="9070848" cy="530352"/>
-          </a:xfrm>
-          <a:prstGeom prst="rect">
-            <a:avLst/>
-          </a:prstGeom>
-          <a:noFill/>
-        </p:spPr>
-        <p:txBody>
-          <a:bodyPr wrap="square" lIns="18288" rIns="18288" tIns="18288" bIns="18288" anchor="ctr">
-            <a:spAutoFit/>
-          </a:bodyPr>
-          <a:lstStyle/>
-          <a:p>
-            <a:pPr algn="l">
-              <a:spcAft>
-                <a:spcPts val="0"/>
-              </a:spcAft>
-            </a:pPr>
-            <a:r>
-              <a:rPr sz="1600" b="0" i="0">
-                <a:solidFill>
-                  <a:srgbClr val="FFFFFF"/>
-                </a:solidFill>
-                <a:latin typeface="Arial"/>
-              </a:rPr>
-              <a:t>Use independent samples and cell-resolved assays to test thymus proliferation, soleus metabolism, kidney signaling and adrenal Psmb8.</a:t>
-            </a:r>
-          </a:p>
-        </p:txBody>
-      </p:sp>
-      <p:sp>
-        <p:nvSpPr>
-          <p:cNvPr id="25" name="TextBox 24"/>
-          <p:cNvSpPr txBox="1"/>
-          <p:nvPr/>
-        </p:nvSpPr>
-        <p:spPr>
-          <a:xfrm>
-            <a:off x="1874519" y="5532120"/>
-            <a:ext cx="9070848" cy="256032"/>
-          </a:xfrm>
-          <a:prstGeom prst="rect">
-            <a:avLst/>
-          </a:prstGeom>
-          <a:noFill/>
-        </p:spPr>
-        <p:txBody>
-          <a:bodyPr wrap="square" lIns="18288" rIns="18288" tIns="18288" bIns="18288" anchor="t">
-            <a:spAutoFit/>
-          </a:bodyPr>
-          <a:lstStyle/>
-          <a:p>
-            <a:pPr algn="l">
-              <a:spcAft>
-                <a:spcPts val="0"/>
-              </a:spcAft>
-            </a:pPr>
-            <a:r>
-              <a:rPr sz="1250" b="0" i="0">
-                <a:solidFill>
-                  <a:srgbClr val="BFD0E1"/>
-                </a:solidFill>
-                <a:latin typeface="Arial"/>
-              </a:rPr>
-              <a:t>Generated profiles never enter the biological sample count or the BH-FDR test.</a:t>
+              <a:t>A plausible mechanism is not independent validation; these candidates still require targeted experiments.</a:t>
             </a:r>
           </a:p>
         </p:txBody>
@@ -28194,6 +31132,952 @@
 </file>
 
 <file path=ppt/slides/slide15.xml><?xml version="1.0" encoding="utf-8"?>
+<p:sld xmlns:a="http://schemas.openxmlformats.org/drawingml/2006/main" xmlns:p="http://schemas.openxmlformats.org/presentationml/2006/main" xmlns:r="http://schemas.openxmlformats.org/officeDocument/2006/relationships">
+  <p:cSld>
+    <p:spTree>
+      <p:nvGrpSpPr>
+        <p:cNvPr id="1" name=""/>
+        <p:cNvGrpSpPr/>
+        <p:nvPr/>
+      </p:nvGrpSpPr>
+      <p:grpSpPr/>
+      <p:sp>
+        <p:nvSpPr>
+          <p:cNvPr id="2" name="Title 1"/>
+          <p:cNvSpPr>
+            <a:spLocks noGrp="1"/>
+          </p:cNvSpPr>
+          <p:nvPr>
+            <p:ph type="title"/>
+          </p:nvPr>
+        </p:nvSpPr>
+        <p:spPr/>
+        <p:txBody>
+          <a:bodyPr/>
+          <a:lstStyle/>
+          <a:p/>
+        </p:txBody>
+      </p:sp>
+      <p:sp>
+        <p:nvSpPr>
+          <p:cNvPr id="3" name="Content Placeholder 2"/>
+          <p:cNvSpPr>
+            <a:spLocks noGrp="1"/>
+          </p:cNvSpPr>
+          <p:nvPr>
+            <p:ph idx="1"/>
+          </p:nvPr>
+        </p:nvSpPr>
+        <p:spPr/>
+        <p:txBody>
+          <a:bodyPr/>
+          <a:lstStyle/>
+          <a:p/>
+        </p:txBody>
+      </p:sp>
+      <p:sp>
+        <p:nvSpPr>
+          <p:cNvPr id="4" name="TextBox 3"/>
+          <p:cNvSpPr txBox="1"/>
+          <p:nvPr/>
+        </p:nvSpPr>
+        <p:spPr>
+          <a:xfrm>
+            <a:off x="292608" y="530352"/>
+            <a:ext cx="5029200" cy="228600"/>
+          </a:xfrm>
+          <a:prstGeom prst="rect">
+            <a:avLst/>
+          </a:prstGeom>
+          <a:noFill/>
+        </p:spPr>
+        <p:txBody>
+          <a:bodyPr wrap="square" lIns="18288" rIns="18288" tIns="18288" bIns="18288" anchor="t">
+            <a:spAutoFit/>
+          </a:bodyPr>
+          <a:lstStyle/>
+          <a:p>
+            <a:pPr algn="l">
+              <a:spcAft>
+                <a:spcPts val="0"/>
+              </a:spcAft>
+            </a:pPr>
+            <a:r>
+              <a:rPr sz="1050" b="1" i="0">
+                <a:solidFill>
+                  <a:srgbClr val="9A6B20"/>
+                </a:solidFill>
+                <a:latin typeface="Arial"/>
+              </a:rPr>
+              <a:t>TAKEAWAYS</a:t>
+            </a:r>
+          </a:p>
+        </p:txBody>
+      </p:sp>
+      <p:sp>
+        <p:nvSpPr>
+          <p:cNvPr id="5" name="TextBox 4"/>
+          <p:cNvSpPr txBox="1"/>
+          <p:nvPr/>
+        </p:nvSpPr>
+        <p:spPr>
+          <a:xfrm>
+            <a:off x="292608" y="786384"/>
+            <a:ext cx="11430000" cy="585216"/>
+          </a:xfrm>
+          <a:prstGeom prst="rect">
+            <a:avLst/>
+          </a:prstGeom>
+          <a:noFill/>
+        </p:spPr>
+        <p:txBody>
+          <a:bodyPr wrap="square" lIns="18288" rIns="18288" tIns="18288" bIns="18288" anchor="ctr">
+            <a:spAutoFit/>
+          </a:bodyPr>
+          <a:lstStyle/>
+          <a:p>
+            <a:pPr algn="l">
+              <a:spcAft>
+                <a:spcPts val="0"/>
+              </a:spcAft>
+            </a:pPr>
+            <a:r>
+              <a:rPr sz="2700" b="1" i="0">
+                <a:solidFill>
+                  <a:srgbClr val="082B55"/>
+                </a:solidFill>
+                <a:latin typeface="Arial"/>
+              </a:rPr>
+              <a:t>Synthetic data helped most as a tissue-specific prior</a:t>
+            </a:r>
+          </a:p>
+        </p:txBody>
+      </p:sp>
+      <p:sp>
+        <p:nvSpPr>
+          <p:cNvPr id="6" name="TextBox 5"/>
+          <p:cNvSpPr txBox="1"/>
+          <p:nvPr/>
+        </p:nvSpPr>
+        <p:spPr>
+          <a:xfrm>
+            <a:off x="310896" y="1353312"/>
+            <a:ext cx="11247120" cy="310896"/>
+          </a:xfrm>
+          <a:prstGeom prst="rect">
+            <a:avLst/>
+          </a:prstGeom>
+          <a:noFill/>
+        </p:spPr>
+        <p:txBody>
+          <a:bodyPr wrap="square" lIns="18288" rIns="18288" tIns="18288" bIns="18288" anchor="ctr">
+            <a:spAutoFit/>
+          </a:bodyPr>
+          <a:lstStyle/>
+          <a:p>
+            <a:pPr algn="l">
+              <a:spcAft>
+                <a:spcPts val="0"/>
+              </a:spcAft>
+            </a:pPr>
+            <a:r>
+              <a:rPr sz="1450" b="0" i="0">
+                <a:solidFill>
+                  <a:srgbClr val="59697A"/>
+                </a:solidFill>
+                <a:latin typeface="Arial"/>
+              </a:rPr>
+              <a:t>The generator created useful structure, not new biological replication.</a:t>
+            </a:r>
+          </a:p>
+        </p:txBody>
+      </p:sp>
+      <p:sp>
+        <p:nvSpPr>
+          <p:cNvPr id="7" name="Rounded Rectangle 6"/>
+          <p:cNvSpPr/>
+          <p:nvPr/>
+        </p:nvSpPr>
+        <p:spPr>
+          <a:xfrm>
+            <a:off x="384048" y="1920240"/>
+            <a:ext cx="3419856" cy="2487168"/>
+          </a:xfrm>
+          <a:prstGeom prst="roundRect">
+            <a:avLst/>
+          </a:prstGeom>
+          <a:solidFill>
+            <a:srgbClr val="E9F1F7"/>
+          </a:solidFill>
+          <a:ln w="10160">
+            <a:solidFill>
+              <a:srgbClr val="2D6496"/>
+            </a:solidFill>
+          </a:ln>
+        </p:spPr>
+        <p:style>
+          <a:lnRef idx="1">
+            <a:schemeClr val="accent1"/>
+          </a:lnRef>
+          <a:fillRef idx="3">
+            <a:schemeClr val="accent1"/>
+          </a:fillRef>
+          <a:effectRef idx="2">
+            <a:schemeClr val="accent1"/>
+          </a:effectRef>
+          <a:fontRef idx="minor">
+            <a:schemeClr val="lt1"/>
+          </a:fontRef>
+        </p:style>
+        <p:txBody>
+          <a:bodyPr rtlCol="0" anchor="ctr"/>
+          <a:lstStyle/>
+          <a:p>
+            <a:pPr algn="ctr"/>
+          </a:p>
+        </p:txBody>
+      </p:sp>
+      <p:sp>
+        <p:nvSpPr>
+          <p:cNvPr id="8" name="Oval 7"/>
+          <p:cNvSpPr/>
+          <p:nvPr/>
+        </p:nvSpPr>
+        <p:spPr>
+          <a:xfrm>
+            <a:off x="621792" y="2167128"/>
+            <a:ext cx="475488" cy="475488"/>
+          </a:xfrm>
+          <a:prstGeom prst="ellipse">
+            <a:avLst/>
+          </a:prstGeom>
+          <a:solidFill>
+            <a:srgbClr val="2D6496"/>
+          </a:solidFill>
+          <a:ln>
+            <a:noFill/>
+          </a:ln>
+        </p:spPr>
+        <p:style>
+          <a:lnRef idx="1">
+            <a:schemeClr val="accent1"/>
+          </a:lnRef>
+          <a:fillRef idx="3">
+            <a:schemeClr val="accent1"/>
+          </a:fillRef>
+          <a:effectRef idx="2">
+            <a:schemeClr val="accent1"/>
+          </a:effectRef>
+          <a:fontRef idx="minor">
+            <a:schemeClr val="lt1"/>
+          </a:fontRef>
+        </p:style>
+        <p:txBody>
+          <a:bodyPr rtlCol="0" anchor="ctr"/>
+          <a:lstStyle/>
+          <a:p>
+            <a:pPr algn="ctr"/>
+          </a:p>
+        </p:txBody>
+      </p:sp>
+      <p:sp>
+        <p:nvSpPr>
+          <p:cNvPr id="9" name="TextBox 8"/>
+          <p:cNvSpPr txBox="1"/>
+          <p:nvPr/>
+        </p:nvSpPr>
+        <p:spPr>
+          <a:xfrm>
+            <a:off x="621792" y="2221992"/>
+            <a:ext cx="475488" cy="274320"/>
+          </a:xfrm>
+          <a:prstGeom prst="rect">
+            <a:avLst/>
+          </a:prstGeom>
+          <a:noFill/>
+        </p:spPr>
+        <p:txBody>
+          <a:bodyPr wrap="square" lIns="18288" rIns="18288" tIns="18288" bIns="18288" anchor="t">
+            <a:spAutoFit/>
+          </a:bodyPr>
+          <a:lstStyle/>
+          <a:p>
+            <a:pPr algn="ctr">
+              <a:spcAft>
+                <a:spcPts val="0"/>
+              </a:spcAft>
+            </a:pPr>
+            <a:r>
+              <a:rPr sz="1600" b="1" i="0">
+                <a:solidFill>
+                  <a:srgbClr val="FFFFFF"/>
+                </a:solidFill>
+                <a:latin typeface="Arial"/>
+              </a:rPr>
+              <a:t>1</a:t>
+            </a:r>
+          </a:p>
+        </p:txBody>
+      </p:sp>
+      <p:sp>
+        <p:nvSpPr>
+          <p:cNvPr id="10" name="TextBox 9"/>
+          <p:cNvSpPr txBox="1"/>
+          <p:nvPr/>
+        </p:nvSpPr>
+        <p:spPr>
+          <a:xfrm>
+            <a:off x="1216152" y="2176272"/>
+            <a:ext cx="2240280" cy="329184"/>
+          </a:xfrm>
+          <a:prstGeom prst="rect">
+            <a:avLst/>
+          </a:prstGeom>
+          <a:noFill/>
+        </p:spPr>
+        <p:txBody>
+          <a:bodyPr wrap="square" lIns="18288" rIns="18288" tIns="18288" bIns="18288" anchor="t">
+            <a:spAutoFit/>
+          </a:bodyPr>
+          <a:lstStyle/>
+          <a:p>
+            <a:pPr algn="l">
+              <a:spcAft>
+                <a:spcPts val="0"/>
+              </a:spcAft>
+            </a:pPr>
+            <a:r>
+              <a:rPr sz="1900" b="1" i="0">
+                <a:solidFill>
+                  <a:srgbClr val="2D6496"/>
+                </a:solidFill>
+                <a:latin typeface="Arial"/>
+              </a:rPr>
+              <a:t>Generate</a:t>
+            </a:r>
+          </a:p>
+        </p:txBody>
+      </p:sp>
+      <p:sp>
+        <p:nvSpPr>
+          <p:cNvPr id="11" name="TextBox 10"/>
+          <p:cNvSpPr txBox="1"/>
+          <p:nvPr/>
+        </p:nvSpPr>
+        <p:spPr>
+          <a:xfrm>
+            <a:off x="640080" y="2816352"/>
+            <a:ext cx="2880360" cy="1216152"/>
+          </a:xfrm>
+          <a:prstGeom prst="rect">
+            <a:avLst/>
+          </a:prstGeom>
+          <a:noFill/>
+        </p:spPr>
+        <p:txBody>
+          <a:bodyPr wrap="square" lIns="18288" rIns="18288" tIns="18288" bIns="18288" anchor="t">
+            <a:spAutoFit/>
+          </a:bodyPr>
+          <a:lstStyle/>
+          <a:p>
+            <a:pPr algn="l">
+              <a:spcAft>
+                <a:spcPts val="0"/>
+              </a:spcAft>
+            </a:pPr>
+            <a:r>
+              <a:rPr sz="1500" b="0" i="0">
+                <a:solidFill>
+                  <a:srgbClr val="263746"/>
+                </a:solidFill>
+                <a:latin typeface="Arial"/>
+              </a:rPr>
+              <a:t>Conditional DDIM produced high-fidelity profiles with near-chance real-versus-synthetic separation.</a:t>
+            </a:r>
+          </a:p>
+        </p:txBody>
+      </p:sp>
+      <p:sp>
+        <p:nvSpPr>
+          <p:cNvPr id="12" name="Rounded Rectangle 11"/>
+          <p:cNvSpPr/>
+          <p:nvPr/>
+        </p:nvSpPr>
+        <p:spPr>
+          <a:xfrm>
+            <a:off x="4059936" y="1920240"/>
+            <a:ext cx="3419856" cy="2487168"/>
+          </a:xfrm>
+          <a:prstGeom prst="roundRect">
+            <a:avLst/>
+          </a:prstGeom>
+          <a:solidFill>
+            <a:srgbClr val="E8F3F1"/>
+          </a:solidFill>
+          <a:ln w="10160">
+            <a:solidFill>
+              <a:srgbClr val="178681"/>
+            </a:solidFill>
+          </a:ln>
+        </p:spPr>
+        <p:style>
+          <a:lnRef idx="1">
+            <a:schemeClr val="accent1"/>
+          </a:lnRef>
+          <a:fillRef idx="3">
+            <a:schemeClr val="accent1"/>
+          </a:fillRef>
+          <a:effectRef idx="2">
+            <a:schemeClr val="accent1"/>
+          </a:effectRef>
+          <a:fontRef idx="minor">
+            <a:schemeClr val="lt1"/>
+          </a:fontRef>
+        </p:style>
+        <p:txBody>
+          <a:bodyPr rtlCol="0" anchor="ctr"/>
+          <a:lstStyle/>
+          <a:p>
+            <a:pPr algn="ctr"/>
+          </a:p>
+        </p:txBody>
+      </p:sp>
+      <p:sp>
+        <p:nvSpPr>
+          <p:cNvPr id="13" name="Oval 12"/>
+          <p:cNvSpPr/>
+          <p:nvPr/>
+        </p:nvSpPr>
+        <p:spPr>
+          <a:xfrm>
+            <a:off x="4297680" y="2167128"/>
+            <a:ext cx="475488" cy="475488"/>
+          </a:xfrm>
+          <a:prstGeom prst="ellipse">
+            <a:avLst/>
+          </a:prstGeom>
+          <a:solidFill>
+            <a:srgbClr val="178681"/>
+          </a:solidFill>
+          <a:ln>
+            <a:noFill/>
+          </a:ln>
+        </p:spPr>
+        <p:style>
+          <a:lnRef idx="1">
+            <a:schemeClr val="accent1"/>
+          </a:lnRef>
+          <a:fillRef idx="3">
+            <a:schemeClr val="accent1"/>
+          </a:fillRef>
+          <a:effectRef idx="2">
+            <a:schemeClr val="accent1"/>
+          </a:effectRef>
+          <a:fontRef idx="minor">
+            <a:schemeClr val="lt1"/>
+          </a:fontRef>
+        </p:style>
+        <p:txBody>
+          <a:bodyPr rtlCol="0" anchor="ctr"/>
+          <a:lstStyle/>
+          <a:p>
+            <a:pPr algn="ctr"/>
+          </a:p>
+        </p:txBody>
+      </p:sp>
+      <p:sp>
+        <p:nvSpPr>
+          <p:cNvPr id="14" name="TextBox 13"/>
+          <p:cNvSpPr txBox="1"/>
+          <p:nvPr/>
+        </p:nvSpPr>
+        <p:spPr>
+          <a:xfrm>
+            <a:off x="4297680" y="2221992"/>
+            <a:ext cx="475488" cy="274320"/>
+          </a:xfrm>
+          <a:prstGeom prst="rect">
+            <a:avLst/>
+          </a:prstGeom>
+          <a:noFill/>
+        </p:spPr>
+        <p:txBody>
+          <a:bodyPr wrap="square" lIns="18288" rIns="18288" tIns="18288" bIns="18288" anchor="t">
+            <a:spAutoFit/>
+          </a:bodyPr>
+          <a:lstStyle/>
+          <a:p>
+            <a:pPr algn="ctr">
+              <a:spcAft>
+                <a:spcPts val="0"/>
+              </a:spcAft>
+            </a:pPr>
+            <a:r>
+              <a:rPr sz="1600" b="1" i="0">
+                <a:solidFill>
+                  <a:srgbClr val="FFFFFF"/>
+                </a:solidFill>
+                <a:latin typeface="Arial"/>
+              </a:rPr>
+              <a:t>2</a:t>
+            </a:r>
+          </a:p>
+        </p:txBody>
+      </p:sp>
+      <p:sp>
+        <p:nvSpPr>
+          <p:cNvPr id="15" name="TextBox 14"/>
+          <p:cNvSpPr txBox="1"/>
+          <p:nvPr/>
+        </p:nvSpPr>
+        <p:spPr>
+          <a:xfrm>
+            <a:off x="4892040" y="2176272"/>
+            <a:ext cx="2240280" cy="329184"/>
+          </a:xfrm>
+          <a:prstGeom prst="rect">
+            <a:avLst/>
+          </a:prstGeom>
+          <a:noFill/>
+        </p:spPr>
+        <p:txBody>
+          <a:bodyPr wrap="square" lIns="18288" rIns="18288" tIns="18288" bIns="18288" anchor="t">
+            <a:spAutoFit/>
+          </a:bodyPr>
+          <a:lstStyle/>
+          <a:p>
+            <a:pPr algn="l">
+              <a:spcAft>
+                <a:spcPts val="0"/>
+              </a:spcAft>
+            </a:pPr>
+            <a:r>
+              <a:rPr sz="1900" b="1" i="0">
+                <a:solidFill>
+                  <a:srgbClr val="178681"/>
+                </a:solidFill>
+                <a:latin typeface="Arial"/>
+              </a:rPr>
+              <a:t>Use</a:t>
+            </a:r>
+          </a:p>
+        </p:txBody>
+      </p:sp>
+      <p:sp>
+        <p:nvSpPr>
+          <p:cNvPr id="16" name="TextBox 15"/>
+          <p:cNvSpPr txBox="1"/>
+          <p:nvPr/>
+        </p:nvSpPr>
+        <p:spPr>
+          <a:xfrm>
+            <a:off x="4315968" y="2816352"/>
+            <a:ext cx="2880360" cy="1216152"/>
+          </a:xfrm>
+          <a:prstGeom prst="rect">
+            <a:avLst/>
+          </a:prstGeom>
+          <a:noFill/>
+        </p:spPr>
+        <p:txBody>
+          <a:bodyPr wrap="square" lIns="18288" rIns="18288" tIns="18288" bIns="18288" anchor="t">
+            <a:spAutoFit/>
+          </a:bodyPr>
+          <a:lstStyle/>
+          <a:p>
+            <a:pPr algn="l">
+              <a:spcAft>
+                <a:spcPts val="0"/>
+              </a:spcAft>
+            </a:pPr>
+            <a:r>
+              <a:rPr sz="1500" b="0" i="0">
+                <a:solidFill>
+                  <a:srgbClr val="263746"/>
+                </a:solidFill>
+                <a:latin typeface="Arial"/>
+              </a:rPr>
+              <a:t>Pooled augmentation failed. Tissue-specific ranking and low-weight training were more useful.</a:t>
+            </a:r>
+          </a:p>
+        </p:txBody>
+      </p:sp>
+      <p:sp>
+        <p:nvSpPr>
+          <p:cNvPr id="17" name="Rounded Rectangle 16"/>
+          <p:cNvSpPr/>
+          <p:nvPr/>
+        </p:nvSpPr>
+        <p:spPr>
+          <a:xfrm>
+            <a:off x="7735824" y="1920240"/>
+            <a:ext cx="3419856" cy="2487168"/>
+          </a:xfrm>
+          <a:prstGeom prst="roundRect">
+            <a:avLst/>
+          </a:prstGeom>
+          <a:solidFill>
+            <a:srgbClr val="F8F1E2"/>
+          </a:solidFill>
+          <a:ln w="10160">
+            <a:solidFill>
+              <a:srgbClr val="D37B00"/>
+            </a:solidFill>
+          </a:ln>
+        </p:spPr>
+        <p:style>
+          <a:lnRef idx="1">
+            <a:schemeClr val="accent1"/>
+          </a:lnRef>
+          <a:fillRef idx="3">
+            <a:schemeClr val="accent1"/>
+          </a:fillRef>
+          <a:effectRef idx="2">
+            <a:schemeClr val="accent1"/>
+          </a:effectRef>
+          <a:fontRef idx="minor">
+            <a:schemeClr val="lt1"/>
+          </a:fontRef>
+        </p:style>
+        <p:txBody>
+          <a:bodyPr rtlCol="0" anchor="ctr"/>
+          <a:lstStyle/>
+          <a:p>
+            <a:pPr algn="ctr"/>
+          </a:p>
+        </p:txBody>
+      </p:sp>
+      <p:sp>
+        <p:nvSpPr>
+          <p:cNvPr id="18" name="Oval 17"/>
+          <p:cNvSpPr/>
+          <p:nvPr/>
+        </p:nvSpPr>
+        <p:spPr>
+          <a:xfrm>
+            <a:off x="7973568" y="2167128"/>
+            <a:ext cx="475488" cy="475488"/>
+          </a:xfrm>
+          <a:prstGeom prst="ellipse">
+            <a:avLst/>
+          </a:prstGeom>
+          <a:solidFill>
+            <a:srgbClr val="D37B00"/>
+          </a:solidFill>
+          <a:ln>
+            <a:noFill/>
+          </a:ln>
+        </p:spPr>
+        <p:style>
+          <a:lnRef idx="1">
+            <a:schemeClr val="accent1"/>
+          </a:lnRef>
+          <a:fillRef idx="3">
+            <a:schemeClr val="accent1"/>
+          </a:fillRef>
+          <a:effectRef idx="2">
+            <a:schemeClr val="accent1"/>
+          </a:effectRef>
+          <a:fontRef idx="minor">
+            <a:schemeClr val="lt1"/>
+          </a:fontRef>
+        </p:style>
+        <p:txBody>
+          <a:bodyPr rtlCol="0" anchor="ctr"/>
+          <a:lstStyle/>
+          <a:p>
+            <a:pPr algn="ctr"/>
+          </a:p>
+        </p:txBody>
+      </p:sp>
+      <p:sp>
+        <p:nvSpPr>
+          <p:cNvPr id="19" name="TextBox 18"/>
+          <p:cNvSpPr txBox="1"/>
+          <p:nvPr/>
+        </p:nvSpPr>
+        <p:spPr>
+          <a:xfrm>
+            <a:off x="7973568" y="2221992"/>
+            <a:ext cx="475488" cy="274320"/>
+          </a:xfrm>
+          <a:prstGeom prst="rect">
+            <a:avLst/>
+          </a:prstGeom>
+          <a:noFill/>
+        </p:spPr>
+        <p:txBody>
+          <a:bodyPr wrap="square" lIns="18288" rIns="18288" tIns="18288" bIns="18288" anchor="t">
+            <a:spAutoFit/>
+          </a:bodyPr>
+          <a:lstStyle/>
+          <a:p>
+            <a:pPr algn="ctr">
+              <a:spcAft>
+                <a:spcPts val="0"/>
+              </a:spcAft>
+            </a:pPr>
+            <a:r>
+              <a:rPr sz="1600" b="1" i="0">
+                <a:solidFill>
+                  <a:srgbClr val="FFFFFF"/>
+                </a:solidFill>
+                <a:latin typeface="Arial"/>
+              </a:rPr>
+              <a:t>3</a:t>
+            </a:r>
+          </a:p>
+        </p:txBody>
+      </p:sp>
+      <p:sp>
+        <p:nvSpPr>
+          <p:cNvPr id="20" name="TextBox 19"/>
+          <p:cNvSpPr txBox="1"/>
+          <p:nvPr/>
+        </p:nvSpPr>
+        <p:spPr>
+          <a:xfrm>
+            <a:off x="8567928" y="2176272"/>
+            <a:ext cx="2240280" cy="329184"/>
+          </a:xfrm>
+          <a:prstGeom prst="rect">
+            <a:avLst/>
+          </a:prstGeom>
+          <a:noFill/>
+        </p:spPr>
+        <p:txBody>
+          <a:bodyPr wrap="square" lIns="18288" rIns="18288" tIns="18288" bIns="18288" anchor="t">
+            <a:spAutoFit/>
+          </a:bodyPr>
+          <a:lstStyle/>
+          <a:p>
+            <a:pPr algn="l">
+              <a:spcAft>
+                <a:spcPts val="0"/>
+              </a:spcAft>
+            </a:pPr>
+            <a:r>
+              <a:rPr sz="1900" b="1" i="0">
+                <a:solidFill>
+                  <a:srgbClr val="D37B00"/>
+                </a:solidFill>
+                <a:latin typeface="Arial"/>
+              </a:rPr>
+              <a:t>Interpret</a:t>
+            </a:r>
+          </a:p>
+        </p:txBody>
+      </p:sp>
+      <p:sp>
+        <p:nvSpPr>
+          <p:cNvPr id="21" name="TextBox 20"/>
+          <p:cNvSpPr txBox="1"/>
+          <p:nvPr/>
+        </p:nvSpPr>
+        <p:spPr>
+          <a:xfrm>
+            <a:off x="7991856" y="2816352"/>
+            <a:ext cx="2880360" cy="1216152"/>
+          </a:xfrm>
+          <a:prstGeom prst="rect">
+            <a:avLst/>
+          </a:prstGeom>
+          <a:noFill/>
+        </p:spPr>
+        <p:txBody>
+          <a:bodyPr wrap="square" lIns="18288" rIns="18288" tIns="18288" bIns="18288" anchor="t">
+            <a:spAutoFit/>
+          </a:bodyPr>
+          <a:lstStyle/>
+          <a:p>
+            <a:pPr algn="l">
+              <a:spcAft>
+                <a:spcPts val="0"/>
+              </a:spcAft>
+            </a:pPr>
+            <a:r>
+              <a:rPr sz="1500" b="0" i="0">
+                <a:solidFill>
+                  <a:srgbClr val="263746"/>
+                </a:solidFill>
+                <a:latin typeface="Arial"/>
+              </a:rPr>
+              <a:t>Thymus and soleus were clearest. Literature review separated recovery from complementary hypotheses.</a:t>
+            </a:r>
+          </a:p>
+        </p:txBody>
+      </p:sp>
+      <p:sp>
+        <p:nvSpPr>
+          <p:cNvPr id="22" name="Rounded Rectangle 21"/>
+          <p:cNvSpPr/>
+          <p:nvPr/>
+        </p:nvSpPr>
+        <p:spPr>
+          <a:xfrm>
+            <a:off x="384048" y="4709160"/>
+            <a:ext cx="10972800" cy="1188720"/>
+          </a:xfrm>
+          <a:prstGeom prst="roundRect">
+            <a:avLst/>
+          </a:prstGeom>
+          <a:solidFill>
+            <a:srgbClr val="082B55"/>
+          </a:solidFill>
+          <a:ln w="10160">
+            <a:solidFill>
+              <a:srgbClr val="082B55"/>
+            </a:solidFill>
+          </a:ln>
+        </p:spPr>
+        <p:style>
+          <a:lnRef idx="1">
+            <a:schemeClr val="accent1"/>
+          </a:lnRef>
+          <a:fillRef idx="3">
+            <a:schemeClr val="accent1"/>
+          </a:fillRef>
+          <a:effectRef idx="2">
+            <a:schemeClr val="accent1"/>
+          </a:effectRef>
+          <a:fontRef idx="minor">
+            <a:schemeClr val="lt1"/>
+          </a:fontRef>
+        </p:style>
+        <p:txBody>
+          <a:bodyPr rtlCol="0" anchor="ctr"/>
+          <a:lstStyle/>
+          <a:p>
+            <a:pPr algn="ctr"/>
+          </a:p>
+        </p:txBody>
+      </p:sp>
+      <p:sp>
+        <p:nvSpPr>
+          <p:cNvPr id="23" name="TextBox 22"/>
+          <p:cNvSpPr txBox="1"/>
+          <p:nvPr/>
+        </p:nvSpPr>
+        <p:spPr>
+          <a:xfrm>
+            <a:off x="685800" y="5010912"/>
+            <a:ext cx="1261872" cy="310896"/>
+          </a:xfrm>
+          <a:prstGeom prst="rect">
+            <a:avLst/>
+          </a:prstGeom>
+          <a:noFill/>
+        </p:spPr>
+        <p:txBody>
+          <a:bodyPr wrap="square" lIns="18288" rIns="18288" tIns="18288" bIns="18288" anchor="t">
+            <a:spAutoFit/>
+          </a:bodyPr>
+          <a:lstStyle/>
+          <a:p>
+            <a:pPr algn="l">
+              <a:spcAft>
+                <a:spcPts val="0"/>
+              </a:spcAft>
+            </a:pPr>
+            <a:r>
+              <a:rPr sz="1700" b="1" i="0">
+                <a:solidFill>
+                  <a:srgbClr val="FFD69A"/>
+                </a:solidFill>
+                <a:latin typeface="Arial"/>
+              </a:rPr>
+              <a:t>Next test</a:t>
+            </a:r>
+          </a:p>
+        </p:txBody>
+      </p:sp>
+      <p:sp>
+        <p:nvSpPr>
+          <p:cNvPr id="24" name="TextBox 23"/>
+          <p:cNvSpPr txBox="1"/>
+          <p:nvPr/>
+        </p:nvSpPr>
+        <p:spPr>
+          <a:xfrm>
+            <a:off x="1874519" y="4937760"/>
+            <a:ext cx="9070848" cy="530352"/>
+          </a:xfrm>
+          <a:prstGeom prst="rect">
+            <a:avLst/>
+          </a:prstGeom>
+          <a:noFill/>
+        </p:spPr>
+        <p:txBody>
+          <a:bodyPr wrap="square" lIns="18288" rIns="18288" tIns="18288" bIns="18288" anchor="ctr">
+            <a:spAutoFit/>
+          </a:bodyPr>
+          <a:lstStyle/>
+          <a:p>
+            <a:pPr algn="l">
+              <a:spcAft>
+                <a:spcPts val="0"/>
+              </a:spcAft>
+            </a:pPr>
+            <a:r>
+              <a:rPr sz="1600" b="0" i="0">
+                <a:solidFill>
+                  <a:srgbClr val="FFFFFF"/>
+                </a:solidFill>
+                <a:latin typeface="Arial"/>
+              </a:rPr>
+              <a:t>Use independent samples and cell-resolved assays to test thymus proliferation, soleus metabolism, kidney signaling and adrenal Psmb8.</a:t>
+            </a:r>
+          </a:p>
+        </p:txBody>
+      </p:sp>
+      <p:sp>
+        <p:nvSpPr>
+          <p:cNvPr id="25" name="TextBox 24"/>
+          <p:cNvSpPr txBox="1"/>
+          <p:nvPr/>
+        </p:nvSpPr>
+        <p:spPr>
+          <a:xfrm>
+            <a:off x="1874519" y="5532120"/>
+            <a:ext cx="9070848" cy="256032"/>
+          </a:xfrm>
+          <a:prstGeom prst="rect">
+            <a:avLst/>
+          </a:prstGeom>
+          <a:noFill/>
+        </p:spPr>
+        <p:txBody>
+          <a:bodyPr wrap="square" lIns="18288" rIns="18288" tIns="18288" bIns="18288" anchor="t">
+            <a:spAutoFit/>
+          </a:bodyPr>
+          <a:lstStyle/>
+          <a:p>
+            <a:pPr algn="l">
+              <a:spcAft>
+                <a:spcPts val="0"/>
+              </a:spcAft>
+            </a:pPr>
+            <a:r>
+              <a:rPr sz="1250" b="0" i="0">
+                <a:solidFill>
+                  <a:srgbClr val="BFD0E1"/>
+                </a:solidFill>
+                <a:latin typeface="Arial"/>
+              </a:rPr>
+              <a:t>Generated profiles never enter the biological sample count or the BH-FDR test.</a:t>
+            </a:r>
+          </a:p>
+        </p:txBody>
+      </p:sp>
+    </p:spTree>
+  </p:cSld>
+  <p:clrMapOvr>
+    <a:masterClrMapping/>
+  </p:clrMapOvr>
+</p:sld>
+</file>
+
+<file path=ppt/slides/slide16.xml><?xml version="1.0" encoding="utf-8"?>
 <p:sld xmlns:a="http://schemas.openxmlformats.org/drawingml/2006/main" xmlns:p="http://schemas.openxmlformats.org/presentationml/2006/main" xmlns:r="http://schemas.openxmlformats.org/officeDocument/2006/relationships">
   <p:cSld>
     <p:spTree>

--- a/presentation/SLSTP_2026_Generative_Transcriptomics.pptx
+++ b/presentation/SLSTP_2026_Generative_Transcriptomics.pptx
@@ -28,6 +28,7 @@
     <p:sldId id="302" r:id="rId26"/>
     <p:sldId id="303" r:id="rId27"/>
     <p:sldId id="304" r:id="rId28"/>
+    <p:sldId id="305" r:id="rId29"/>
   </p:sldIdLst>
   <p:sldSz cx="12192000" cy="6858000"/>
   <p:notesSz cx="6858000" cy="9144000"/>
@@ -962,7 +963,7 @@
           <a:p/>
           <a:p>
             <a:r>
-              <a:t>This is the complete 49-association inventory. P and R show promoted versus reinforced selection. Color independently shows aligning, complementary, ambiguous or unmatched literature. FLT-higher and FLT-lower directions come from real-data meta-analysis.</a:t>
+              <a:t>This is the complete 49-association inventory. The explicit P and R tags show promoted versus reinforced selection. Gene color independently shows aligning, complementary, ambiguous or unmatched literature. FLT-higher and FLT-lower directions come from real-data meta-analysis.</a:t>
             </a:r>
           </a:p>
         </p:txBody>
@@ -1184,13 +1185,13 @@
           <a:lstStyle/>
           <a:p>
             <a:r>
-              <a:t>Target time: 0:45</a:t>
+              <a:t>Target time: 0:40</a:t>
             </a:r>
           </a:p>
           <a:p/>
           <a:p>
             <a:r>
-              <a:t>Pooled muscle, kidney, spleen, skin, eye, adrenal gland, gastrocnemius and tibialis anterior also produced synthetic-informed genes. These findings remain in the inventory, but none formed a process-level story as coherent as thymus or soleus. They should be prioritized by biological relevance and available validation material rather than by a single secondary-tissue ranking.</a:t>
+              <a:t>Pooled muscle, kidney, spleen and skin each produced a distinct synthetic-informed result. Read these as separate hypotheses, not as grouped biology. Pooled muscle is heterogeneous, kidney suggests phosphoinositide and glucose handling, spleen suggests adhesion and extracellular-matrix or immune organization, and skin contributes a single interferon-linked candidate.</a:t>
             </a:r>
           </a:p>
         </p:txBody>
@@ -1266,7 +1267,7 @@
           <a:p/>
           <a:p>
             <a:r>
-              <a:t>The useful role was tissue-specific feature ranking or limited regularization, not increasing biological sample size. Literature annotation then separated exact recovery, process-level agreement and complementary hypotheses. Independent samples and cell-resolved experiments are the next tests.</a:t>
+              <a:t>Eye, adrenal gland, gastrocnemius and tibialis anterior are reported separately as well. Eye reinforces lower cytokinesis, adrenal contributes two unmatched candidates, gastrocnemius combines an NF-kappa-B stress signal with an autophagy or myogenesis candidate, and tibialis anterior spans stress, cell-cycle, ganglioside and mitophagy hypotheses.</a:t>
             </a:r>
           </a:p>
         </p:txBody>
@@ -1336,6 +1337,82 @@
           <a:lstStyle/>
           <a:p>
             <a:r>
+              <a:t>Target time: 0:40</a:t>
+            </a:r>
+          </a:p>
+          <a:p/>
+          <a:p>
+            <a:r>
+              <a:t>The useful role was tissue-specific feature ranking or limited regularization, not increasing biological sample size. Literature annotation then separated exact recovery, process-level agreement and complementary hypotheses. Independent samples and cell-resolved experiments are the next tests.</a:t>
+            </a:r>
+          </a:p>
+        </p:txBody>
+      </p:sp>
+      <p:sp>
+        <p:nvSpPr>
+          <p:cNvPr id="4" name="Slide Number Placeholder 3"/>
+          <p:cNvSpPr>
+            <a:spLocks noGrp="1"/>
+          </p:cNvSpPr>
+          <p:nvPr>
+            <p:ph type="sldNum" idx="5" sz="quarter"/>
+          </p:nvPr>
+        </p:nvSpPr>
+        <p:spPr/>
+      </p:sp>
+    </p:spTree>
+  </p:cSld>
+  <p:clrMapOvr>
+    <a:masterClrMapping/>
+  </p:clrMapOvr>
+</p:notes>
+</file>
+
+<file path=ppt/notesSlides/notesSlide18.xml><?xml version="1.0" encoding="utf-8"?>
+<p:notes xmlns:a="http://schemas.openxmlformats.org/drawingml/2006/main" xmlns:p="http://schemas.openxmlformats.org/presentationml/2006/main" xmlns:r="http://schemas.openxmlformats.org/officeDocument/2006/relationships">
+  <p:cSld>
+    <p:spTree>
+      <p:nvGrpSpPr>
+        <p:cNvPr id="1" name=""/>
+        <p:cNvGrpSpPr/>
+        <p:nvPr/>
+      </p:nvGrpSpPr>
+      <p:grpSpPr>
+        <a:xfrm>
+          <a:off x="0" y="0"/>
+          <a:ext cx="0" cy="0"/>
+          <a:chOff x="0" y="0"/>
+          <a:chExt cx="0" cy="0"/>
+        </a:xfrm>
+      </p:grpSpPr>
+      <p:sp>
+        <p:nvSpPr>
+          <p:cNvPr id="2" name="Slide Image Placeholder 1"/>
+          <p:cNvSpPr>
+            <a:spLocks noGrp="1"/>
+          </p:cNvSpPr>
+          <p:nvPr>
+            <p:ph type="sldImg" idx="2"/>
+          </p:nvPr>
+        </p:nvSpPr>
+        <p:spPr/>
+      </p:sp>
+      <p:sp>
+        <p:nvSpPr>
+          <p:cNvPr id="3" name="Notes Placeholder 2"/>
+          <p:cNvSpPr>
+            <a:spLocks noGrp="1"/>
+          </p:cNvSpPr>
+          <p:nvPr>
+            <p:ph type="body" idx="3" sz="quarter"/>
+          </p:nvPr>
+        </p:nvSpPr>
+        <p:spPr/>
+        <p:txBody>
+          <a:bodyPr/>
+          <a:lstStyle/>
+          <a:p>
+            <a:r>
               <a:t>Target time: 0:10</a:t>
             </a:r>
           </a:p>
@@ -1874,7 +1951,7 @@
           <a:p/>
           <a:p>
             <a:r>
-              <a:t>The pooled augmentation test was negative: balanced accuracy fell from 0.754 to 0.737 with real plus synthetic training. Tissue-specific analysis changed the result. Different tissues benefited from different synthetic uses, which argues against one global augmentation policy.</a:t>
+              <a:t>The pooled augmentation test was negative: balanced accuracy fell from 0.754 to 0.737 with real plus synthetic training. The bars use a true zero-to-one balanced-accuracy scale. Tissue-specific analysis changed the result. Different tissues benefited from different synthetic uses, which argues against one global augmentation policy.</a:t>
             </a:r>
           </a:p>
         </p:txBody>
@@ -25849,7 +25926,7 @@
         <p:spPr>
           <a:xfrm>
             <a:off x="411480" y="1709928"/>
-            <a:ext cx="1298448" cy="228600"/>
+            <a:ext cx="960120" cy="228600"/>
           </a:xfrm>
           <a:prstGeom prst="rect">
             <a:avLst/>
@@ -25870,24 +25947,63 @@
             <a:r>
               <a:rPr sz="1019" b="1" i="0">
                 <a:solidFill>
-                  <a:srgbClr val="082B55"/>
-                </a:solidFill>
-                <a:latin typeface="Arial"/>
-              </a:rPr>
-              <a:t>P: promoted (bold)</a:t>
-            </a:r>
-          </a:p>
-        </p:txBody>
-      </p:sp>
-      <p:sp>
-        <p:nvSpPr>
-          <p:cNvPr id="8" name="Rectangle 7"/>
+                  <a:srgbClr val="D96552"/>
+                </a:solidFill>
+                <a:latin typeface="Arial"/>
+              </a:rPr>
+              <a:t>[P] promoted</a:t>
+            </a:r>
+          </a:p>
+        </p:txBody>
+      </p:sp>
+      <p:sp>
+        <p:nvSpPr>
+          <p:cNvPr id="8" name="TextBox 7"/>
+          <p:cNvSpPr txBox="1"/>
+          <p:nvPr/>
+        </p:nvSpPr>
+        <p:spPr>
+          <a:xfrm>
+            <a:off x="1417320" y="1709928"/>
+            <a:ext cx="1078992" cy="228600"/>
+          </a:xfrm>
+          <a:prstGeom prst="rect">
+            <a:avLst/>
+          </a:prstGeom>
+          <a:noFill/>
+        </p:spPr>
+        <p:txBody>
+          <a:bodyPr wrap="square" lIns="18288" rIns="18288" tIns="18288" bIns="18288" anchor="t">
+            <a:spAutoFit/>
+          </a:bodyPr>
+          <a:lstStyle/>
+          <a:p>
+            <a:pPr algn="l">
+              <a:spcAft>
+                <a:spcPts val="0"/>
+              </a:spcAft>
+            </a:pPr>
+            <a:r>
+              <a:rPr sz="1019" b="1" i="0">
+                <a:solidFill>
+                  <a:srgbClr val="178681"/>
+                </a:solidFill>
+                <a:latin typeface="Arial"/>
+              </a:rPr>
+              <a:t>[R] reinforced</a:t>
+            </a:r>
+          </a:p>
+        </p:txBody>
+      </p:sp>
+      <p:sp>
+        <p:nvSpPr>
+          <p:cNvPr id="9" name="Rectangle 8"/>
           <p:cNvSpPr/>
           <p:nvPr/>
         </p:nvSpPr>
         <p:spPr>
           <a:xfrm>
-            <a:off x="1746504" y="1746504"/>
+            <a:off x="2660904" y="1746504"/>
             <a:ext cx="128016" cy="45720"/>
           </a:xfrm>
           <a:prstGeom prst="rect">
@@ -25924,13 +26040,13 @@
       </p:sp>
       <p:sp>
         <p:nvSpPr>
-          <p:cNvPr id="9" name="TextBox 8"/>
+          <p:cNvPr id="10" name="TextBox 9"/>
           <p:cNvSpPr txBox="1"/>
           <p:nvPr/>
         </p:nvSpPr>
         <p:spPr>
           <a:xfrm>
-            <a:off x="1920240" y="1691640"/>
+            <a:off x="2834640" y="1691640"/>
             <a:ext cx="841248" cy="228600"/>
           </a:xfrm>
           <a:prstGeom prst="rect">
@@ -25963,13 +26079,13 @@
       </p:sp>
       <p:sp>
         <p:nvSpPr>
-          <p:cNvPr id="10" name="Rectangle 9"/>
+          <p:cNvPr id="11" name="Rectangle 10"/>
           <p:cNvSpPr/>
           <p:nvPr/>
         </p:nvSpPr>
         <p:spPr>
           <a:xfrm>
-            <a:off x="2660904" y="1746504"/>
+            <a:off x="3575304" y="1746504"/>
             <a:ext cx="128016" cy="45720"/>
           </a:xfrm>
           <a:prstGeom prst="rect">
@@ -26006,13 +26122,13 @@
       </p:sp>
       <p:sp>
         <p:nvSpPr>
-          <p:cNvPr id="11" name="TextBox 10"/>
+          <p:cNvPr id="12" name="TextBox 11"/>
           <p:cNvSpPr txBox="1"/>
           <p:nvPr/>
         </p:nvSpPr>
         <p:spPr>
           <a:xfrm>
-            <a:off x="2834640" y="1691640"/>
+            <a:off x="3749040" y="1691640"/>
             <a:ext cx="1115568" cy="228600"/>
           </a:xfrm>
           <a:prstGeom prst="rect">
@@ -26045,13 +26161,13 @@
       </p:sp>
       <p:sp>
         <p:nvSpPr>
-          <p:cNvPr id="12" name="Rectangle 11"/>
+          <p:cNvPr id="13" name="Rectangle 12"/>
           <p:cNvSpPr/>
           <p:nvPr/>
         </p:nvSpPr>
         <p:spPr>
           <a:xfrm>
-            <a:off x="3877056" y="1746504"/>
+            <a:off x="4791456" y="1746504"/>
             <a:ext cx="128016" cy="45720"/>
           </a:xfrm>
           <a:prstGeom prst="rect">
@@ -26088,13 +26204,13 @@
       </p:sp>
       <p:sp>
         <p:nvSpPr>
-          <p:cNvPr id="13" name="TextBox 12"/>
+          <p:cNvPr id="14" name="TextBox 13"/>
           <p:cNvSpPr txBox="1"/>
           <p:nvPr/>
         </p:nvSpPr>
         <p:spPr>
           <a:xfrm>
-            <a:off x="4050792" y="1691640"/>
+            <a:off x="4965192" y="1691640"/>
             <a:ext cx="932688" cy="228600"/>
           </a:xfrm>
           <a:prstGeom prst="rect">
@@ -26127,13 +26243,13 @@
       </p:sp>
       <p:sp>
         <p:nvSpPr>
-          <p:cNvPr id="14" name="Rectangle 13"/>
+          <p:cNvPr id="15" name="Rectangle 14"/>
           <p:cNvSpPr/>
           <p:nvPr/>
         </p:nvSpPr>
         <p:spPr>
           <a:xfrm>
-            <a:off x="4919472" y="1746504"/>
+            <a:off x="5833872" y="1746504"/>
             <a:ext cx="128016" cy="45720"/>
           </a:xfrm>
           <a:prstGeom prst="rect">
@@ -26170,13 +26286,13 @@
       </p:sp>
       <p:sp>
         <p:nvSpPr>
-          <p:cNvPr id="15" name="TextBox 14"/>
+          <p:cNvPr id="16" name="TextBox 15"/>
           <p:cNvSpPr txBox="1"/>
           <p:nvPr/>
         </p:nvSpPr>
         <p:spPr>
           <a:xfrm>
-            <a:off x="5093208" y="1691640"/>
+            <a:off x="6007608" y="1691640"/>
             <a:ext cx="960120" cy="228600"/>
           </a:xfrm>
           <a:prstGeom prst="rect">
@@ -26209,53 +26325,14 @@
       </p:sp>
       <p:sp>
         <p:nvSpPr>
-          <p:cNvPr id="16" name="TextBox 15"/>
-          <p:cNvSpPr txBox="1"/>
-          <p:nvPr/>
-        </p:nvSpPr>
-        <p:spPr>
-          <a:xfrm>
-            <a:off x="6144768" y="1691640"/>
-            <a:ext cx="1609344" cy="228600"/>
-          </a:xfrm>
-          <a:prstGeom prst="rect">
-            <a:avLst/>
-          </a:prstGeom>
-          <a:noFill/>
-        </p:spPr>
-        <p:txBody>
-          <a:bodyPr wrap="square" lIns="18288" rIns="18288" tIns="18288" bIns="18288" anchor="t">
-            <a:spAutoFit/>
-          </a:bodyPr>
-          <a:lstStyle/>
-          <a:p>
-            <a:pPr algn="l">
-              <a:spcAft>
-                <a:spcPts val="0"/>
-              </a:spcAft>
-            </a:pPr>
-            <a:r>
-              <a:rPr sz="980" b="1" i="0">
-                <a:solidFill>
-                  <a:srgbClr val="082B55"/>
-                </a:solidFill>
-                <a:latin typeface="Arial"/>
-              </a:rPr>
-              <a:t>R: reinforced (regular)</a:t>
-            </a:r>
-          </a:p>
-        </p:txBody>
-      </p:sp>
-      <p:sp>
-        <p:nvSpPr>
           <p:cNvPr id="17" name="TextBox 16"/>
           <p:cNvSpPr txBox="1"/>
           <p:nvPr/>
         </p:nvSpPr>
         <p:spPr>
           <a:xfrm>
-            <a:off x="8805672" y="1691640"/>
-            <a:ext cx="2935224" cy="228600"/>
+            <a:off x="8412480" y="1691640"/>
+            <a:ext cx="3328416" cy="228600"/>
           </a:xfrm>
           <a:prstGeom prst="rect">
             <a:avLst/>
@@ -26280,7 +26357,7 @@
                 </a:solidFill>
                 <a:latin typeface="Arial"/>
               </a:rPr>
-              <a:t>Color = literature | P/R = selection</a:t>
+              <a:t>Tag = selection | Gene color = literature</a:t>
             </a:r>
           </a:p>
         </p:txBody>
@@ -26444,13 +26521,22 @@
               </a:spcAft>
             </a:pPr>
             <a:r>
+              <a:rPr sz="910" b="1" i="0">
+                <a:solidFill>
+                  <a:srgbClr val="D96552"/>
+                </a:solidFill>
+                <a:latin typeface="Arial"/>
+              </a:rPr>
+              <a:t>[P]</a:t>
+            </a:r>
+            <a:r>
               <a:rPr sz="980" b="1" i="1">
                 <a:solidFill>
                   <a:srgbClr val="2D6496"/>
                 </a:solidFill>
                 <a:latin typeface="Arial"/>
               </a:rPr>
-              <a:t>P:Hsd17b11</a:t>
+              <a:t>Hsd17b11</a:t>
             </a:r>
             <a:r>
               <a:rPr sz="980" b="0" i="0">
@@ -26462,13 +26548,22 @@
               <a:t>, </a:t>
             </a:r>
             <a:r>
+              <a:rPr sz="910" b="1" i="0">
+                <a:solidFill>
+                  <a:srgbClr val="D96552"/>
+                </a:solidFill>
+                <a:latin typeface="Arial"/>
+              </a:rPr>
+              <a:t>[P]</a:t>
+            </a:r>
+            <a:r>
               <a:rPr sz="980" b="1" i="1">
                 <a:solidFill>
                   <a:srgbClr val="2D6496"/>
                 </a:solidFill>
                 <a:latin typeface="Arial"/>
               </a:rPr>
-              <a:t>P:Etv1</a:t>
+              <a:t>Etv1</a:t>
             </a:r>
             <a:r>
               <a:rPr sz="980" b="0" i="0">
@@ -26480,13 +26575,22 @@
               <a:t>, </a:t>
             </a:r>
             <a:r>
-              <a:rPr sz="980" b="0" i="1">
+              <a:rPr sz="910" b="1" i="0">
+                <a:solidFill>
+                  <a:srgbClr val="178681"/>
+                </a:solidFill>
+                <a:latin typeface="Arial"/>
+              </a:rPr>
+              <a:t>[R]</a:t>
+            </a:r>
+            <a:r>
+              <a:rPr sz="980" b="1" i="1">
                 <a:solidFill>
                   <a:srgbClr val="8063A6"/>
                 </a:solidFill>
                 <a:latin typeface="Arial"/>
               </a:rPr>
-              <a:t>R:Snx7</a:t>
+              <a:t>Snx7</a:t>
             </a:r>
           </a:p>
         </p:txBody>
@@ -26558,13 +26662,22 @@
               </a:spcAft>
             </a:pPr>
             <a:r>
+              <a:rPr sz="910" b="1" i="0">
+                <a:solidFill>
+                  <a:srgbClr val="D96552"/>
+                </a:solidFill>
+                <a:latin typeface="Arial"/>
+              </a:rPr>
+              <a:t>[P]</a:t>
+            </a:r>
+            <a:r>
               <a:rPr sz="980" b="1" i="1">
                 <a:solidFill>
                   <a:srgbClr val="478A64"/>
                 </a:solidFill>
                 <a:latin typeface="Arial"/>
               </a:rPr>
-              <a:t>P:Nusap1</a:t>
+              <a:t>Nusap1</a:t>
             </a:r>
             <a:r>
               <a:rPr sz="980" b="0" i="0">
@@ -26576,13 +26689,22 @@
               <a:t>, </a:t>
             </a:r>
             <a:r>
+              <a:rPr sz="910" b="1" i="0">
+                <a:solidFill>
+                  <a:srgbClr val="D96552"/>
+                </a:solidFill>
+                <a:latin typeface="Arial"/>
+              </a:rPr>
+              <a:t>[P]</a:t>
+            </a:r>
+            <a:r>
               <a:rPr sz="980" b="1" i="1">
                 <a:solidFill>
                   <a:srgbClr val="478A64"/>
                 </a:solidFill>
                 <a:latin typeface="Arial"/>
               </a:rPr>
-              <a:t>P:Stmn1</a:t>
+              <a:t>Stmn1</a:t>
             </a:r>
             <a:r>
               <a:rPr sz="980" b="0" i="0">
@@ -26594,13 +26716,22 @@
               <a:t>, </a:t>
             </a:r>
             <a:r>
+              <a:rPr sz="910" b="1" i="0">
+                <a:solidFill>
+                  <a:srgbClr val="D96552"/>
+                </a:solidFill>
+                <a:latin typeface="Arial"/>
+              </a:rPr>
+              <a:t>[P]</a:t>
+            </a:r>
+            <a:r>
               <a:rPr sz="980" b="1" i="1">
                 <a:solidFill>
                   <a:srgbClr val="D37B00"/>
                 </a:solidFill>
                 <a:latin typeface="Arial"/>
               </a:rPr>
-              <a:t>P:Birc5</a:t>
+              <a:t>Birc5</a:t>
             </a:r>
             <a:r>
               <a:rPr sz="980" b="0" i="0">
@@ -26612,13 +26743,22 @@
               <a:t>, </a:t>
             </a:r>
             <a:r>
+              <a:rPr sz="910" b="1" i="0">
+                <a:solidFill>
+                  <a:srgbClr val="D96552"/>
+                </a:solidFill>
+                <a:latin typeface="Arial"/>
+              </a:rPr>
+              <a:t>[P]</a:t>
+            </a:r>
+            <a:r>
               <a:rPr sz="980" b="1" i="1">
                 <a:solidFill>
                   <a:srgbClr val="478A64"/>
                 </a:solidFill>
                 <a:latin typeface="Arial"/>
               </a:rPr>
-              <a:t>P:Cdk1</a:t>
+              <a:t>Cdk1</a:t>
             </a:r>
             <a:r>
               <a:rPr sz="980" b="0" i="0">
@@ -26630,13 +26770,22 @@
               <a:t>, </a:t>
             </a:r>
             <a:r>
+              <a:rPr sz="910" b="1" i="0">
+                <a:solidFill>
+                  <a:srgbClr val="D96552"/>
+                </a:solidFill>
+                <a:latin typeface="Arial"/>
+              </a:rPr>
+              <a:t>[P]</a:t>
+            </a:r>
+            <a:r>
               <a:rPr sz="980" b="1" i="1">
                 <a:solidFill>
                   <a:srgbClr val="478A64"/>
                 </a:solidFill>
                 <a:latin typeface="Arial"/>
               </a:rPr>
-              <a:t>P:Top2a</a:t>
+              <a:t>Top2a</a:t>
             </a:r>
             <a:r>
               <a:rPr sz="980" b="0" i="0">
@@ -26648,13 +26797,22 @@
               <a:t>, </a:t>
             </a:r>
             <a:r>
+              <a:rPr sz="910" b="1" i="0">
+                <a:solidFill>
+                  <a:srgbClr val="D96552"/>
+                </a:solidFill>
+                <a:latin typeface="Arial"/>
+              </a:rPr>
+              <a:t>[P]</a:t>
+            </a:r>
+            <a:r>
               <a:rPr sz="980" b="1" i="1">
                 <a:solidFill>
                   <a:srgbClr val="478A64"/>
                 </a:solidFill>
                 <a:latin typeface="Arial"/>
               </a:rPr>
-              <a:t>P:Ccnb2</a:t>
+              <a:t>Ccnb2</a:t>
             </a:r>
             <a:r>
               <a:rPr sz="980" b="0" i="0">
@@ -26666,13 +26824,22 @@
               <a:t>, </a:t>
             </a:r>
             <a:r>
+              <a:rPr sz="910" b="1" i="0">
+                <a:solidFill>
+                  <a:srgbClr val="D96552"/>
+                </a:solidFill>
+                <a:latin typeface="Arial"/>
+              </a:rPr>
+              <a:t>[P]</a:t>
+            </a:r>
+            <a:r>
               <a:rPr sz="980" b="1" i="1">
                 <a:solidFill>
                   <a:srgbClr val="478A64"/>
                 </a:solidFill>
                 <a:latin typeface="Arial"/>
               </a:rPr>
-              <a:t>P:Aurka</a:t>
+              <a:t>Aurka</a:t>
             </a:r>
             <a:r>
               <a:rPr sz="980" b="0" i="0">
@@ -26684,13 +26851,22 @@
               <a:t>, </a:t>
             </a:r>
             <a:r>
+              <a:rPr sz="910" b="1" i="0">
+                <a:solidFill>
+                  <a:srgbClr val="D96552"/>
+                </a:solidFill>
+                <a:latin typeface="Arial"/>
+              </a:rPr>
+              <a:t>[P]</a:t>
+            </a:r>
+            <a:r>
               <a:rPr sz="980" b="1" i="1">
                 <a:solidFill>
                   <a:srgbClr val="478A64"/>
                 </a:solidFill>
                 <a:latin typeface="Arial"/>
               </a:rPr>
-              <a:t>P:Ccne2</a:t>
+              <a:t>Ccne2</a:t>
             </a:r>
             <a:r>
               <a:rPr sz="980" b="0" i="0">
@@ -26702,13 +26878,22 @@
               <a:t>, </a:t>
             </a:r>
             <a:r>
+              <a:rPr sz="910" b="1" i="0">
+                <a:solidFill>
+                  <a:srgbClr val="D96552"/>
+                </a:solidFill>
+                <a:latin typeface="Arial"/>
+              </a:rPr>
+              <a:t>[P]</a:t>
+            </a:r>
+            <a:r>
               <a:rPr sz="980" b="1" i="1">
                 <a:solidFill>
                   <a:srgbClr val="478A64"/>
                 </a:solidFill>
                 <a:latin typeface="Arial"/>
               </a:rPr>
-              <a:t>P:Kif20a</a:t>
+              <a:t>Kif20a</a:t>
             </a:r>
             <a:r>
               <a:rPr sz="980" b="0" i="0">
@@ -26720,13 +26905,22 @@
               <a:t>, </a:t>
             </a:r>
             <a:r>
+              <a:rPr sz="910" b="1" i="0">
+                <a:solidFill>
+                  <a:srgbClr val="D96552"/>
+                </a:solidFill>
+                <a:latin typeface="Arial"/>
+              </a:rPr>
+              <a:t>[P]</a:t>
+            </a:r>
+            <a:r>
               <a:rPr sz="980" b="1" i="1">
                 <a:solidFill>
                   <a:srgbClr val="478A64"/>
                 </a:solidFill>
                 <a:latin typeface="Arial"/>
               </a:rPr>
-              <a:t>P:Pcna</a:t>
+              <a:t>Pcna</a:t>
             </a:r>
             <a:r>
               <a:rPr sz="980" b="0" i="0">
@@ -26738,13 +26932,22 @@
               <a:t>, </a:t>
             </a:r>
             <a:r>
+              <a:rPr sz="910" b="1" i="0">
+                <a:solidFill>
+                  <a:srgbClr val="D96552"/>
+                </a:solidFill>
+                <a:latin typeface="Arial"/>
+              </a:rPr>
+              <a:t>[P]</a:t>
+            </a:r>
+            <a:r>
               <a:rPr sz="980" b="1" i="1">
                 <a:solidFill>
                   <a:srgbClr val="478A64"/>
                 </a:solidFill>
                 <a:latin typeface="Arial"/>
               </a:rPr>
-              <a:t>P:Ccnf</a:t>
+              <a:t>Ccnf</a:t>
             </a:r>
             <a:r>
               <a:rPr sz="980" b="0" i="0">
@@ -26756,13 +26959,22 @@
               <a:t>, </a:t>
             </a:r>
             <a:r>
-              <a:rPr sz="980" b="0" i="1">
+              <a:rPr sz="910" b="1" i="0">
+                <a:solidFill>
+                  <a:srgbClr val="178681"/>
+                </a:solidFill>
+                <a:latin typeface="Arial"/>
+              </a:rPr>
+              <a:t>[R]</a:t>
+            </a:r>
+            <a:r>
+              <a:rPr sz="980" b="1" i="1">
                 <a:solidFill>
                   <a:srgbClr val="478A64"/>
                 </a:solidFill>
                 <a:latin typeface="Arial"/>
               </a:rPr>
-              <a:t>R:Ube2c</a:t>
+              <a:t>Ube2c</a:t>
             </a:r>
             <a:r>
               <a:rPr sz="980" b="0" i="0">
@@ -26774,13 +26986,22 @@
               <a:t>, </a:t>
             </a:r>
             <a:r>
-              <a:rPr sz="980" b="0" i="1">
+              <a:rPr sz="910" b="1" i="0">
+                <a:solidFill>
+                  <a:srgbClr val="178681"/>
+                </a:solidFill>
+                <a:latin typeface="Arial"/>
+              </a:rPr>
+              <a:t>[R]</a:t>
+            </a:r>
+            <a:r>
+              <a:rPr sz="980" b="1" i="1">
                 <a:solidFill>
                   <a:srgbClr val="478A64"/>
                 </a:solidFill>
                 <a:latin typeface="Arial"/>
               </a:rPr>
-              <a:t>R:Gmnn</a:t>
+              <a:t>Gmnn</a:t>
             </a:r>
           </a:p>
         </p:txBody>
@@ -26944,13 +27165,22 @@
               </a:spcAft>
             </a:pPr>
             <a:r>
+              <a:rPr sz="910" b="1" i="0">
+                <a:solidFill>
+                  <a:srgbClr val="D96552"/>
+                </a:solidFill>
+                <a:latin typeface="Arial"/>
+              </a:rPr>
+              <a:t>[P]</a:t>
+            </a:r>
+            <a:r>
               <a:rPr sz="980" b="1" i="1">
                 <a:solidFill>
                   <a:srgbClr val="2D6496"/>
                 </a:solidFill>
                 <a:latin typeface="Arial"/>
               </a:rPr>
-              <a:t>P:Rai14</a:t>
+              <a:t>Rai14</a:t>
             </a:r>
             <a:r>
               <a:rPr sz="980" b="0" i="0">
@@ -26962,13 +27192,22 @@
               <a:t>, </a:t>
             </a:r>
             <a:r>
+              <a:rPr sz="910" b="1" i="0">
+                <a:solidFill>
+                  <a:srgbClr val="D96552"/>
+                </a:solidFill>
+                <a:latin typeface="Arial"/>
+              </a:rPr>
+              <a:t>[P]</a:t>
+            </a:r>
+            <a:r>
               <a:rPr sz="980" b="1" i="1">
                 <a:solidFill>
                   <a:srgbClr val="2D6496"/>
                 </a:solidFill>
                 <a:latin typeface="Arial"/>
               </a:rPr>
-              <a:t>P:Myl9</a:t>
+              <a:t>Myl9</a:t>
             </a:r>
             <a:r>
               <a:rPr sz="980" b="0" i="0">
@@ -26980,13 +27219,22 @@
               <a:t>, </a:t>
             </a:r>
             <a:r>
+              <a:rPr sz="910" b="1" i="0">
+                <a:solidFill>
+                  <a:srgbClr val="D96552"/>
+                </a:solidFill>
+                <a:latin typeface="Arial"/>
+              </a:rPr>
+              <a:t>[P]</a:t>
+            </a:r>
+            <a:r>
               <a:rPr sz="980" b="1" i="1">
                 <a:solidFill>
                   <a:srgbClr val="2D6496"/>
                 </a:solidFill>
                 <a:latin typeface="Arial"/>
               </a:rPr>
-              <a:t>P:Ptprk</a:t>
+              <a:t>Ptprk</a:t>
             </a:r>
             <a:r>
               <a:rPr sz="980" b="0" i="0">
@@ -26998,13 +27246,22 @@
               <a:t>, </a:t>
             </a:r>
             <a:r>
-              <a:rPr sz="980" b="0" i="1">
+              <a:rPr sz="910" b="1" i="0">
+                <a:solidFill>
+                  <a:srgbClr val="178681"/>
+                </a:solidFill>
+                <a:latin typeface="Arial"/>
+              </a:rPr>
+              <a:t>[R]</a:t>
+            </a:r>
+            <a:r>
+              <a:rPr sz="980" b="1" i="1">
                 <a:solidFill>
                   <a:srgbClr val="2D6496"/>
                 </a:solidFill>
                 <a:latin typeface="Arial"/>
               </a:rPr>
-              <a:t>R:Loxl1</a:t>
+              <a:t>Loxl1</a:t>
             </a:r>
           </a:p>
         </p:txBody>
@@ -27246,13 +27503,22 @@
               </a:spcAft>
             </a:pPr>
             <a:r>
+              <a:rPr sz="910" b="1" i="0">
+                <a:solidFill>
+                  <a:srgbClr val="D96552"/>
+                </a:solidFill>
+                <a:latin typeface="Arial"/>
+              </a:rPr>
+              <a:t>[P]</a:t>
+            </a:r>
+            <a:r>
               <a:rPr sz="980" b="1" i="1">
                 <a:solidFill>
                   <a:srgbClr val="2D6496"/>
                 </a:solidFill>
                 <a:latin typeface="Arial"/>
               </a:rPr>
-              <a:t>P:Inpp4b</a:t>
+              <a:t>Inpp4b</a:t>
             </a:r>
             <a:r>
               <a:rPr sz="980" b="0" i="0">
@@ -27264,13 +27530,22 @@
               <a:t>, </a:t>
             </a:r>
             <a:r>
-              <a:rPr sz="980" b="0" i="1">
+              <a:rPr sz="910" b="1" i="0">
+                <a:solidFill>
+                  <a:srgbClr val="178681"/>
+                </a:solidFill>
+                <a:latin typeface="Arial"/>
+              </a:rPr>
+              <a:t>[R]</a:t>
+            </a:r>
+            <a:r>
+              <a:rPr sz="980" b="1" i="1">
                 <a:solidFill>
                   <a:srgbClr val="2D6496"/>
                 </a:solidFill>
                 <a:latin typeface="Arial"/>
               </a:rPr>
-              <a:t>R:Slc37a4</a:t>
+              <a:t>Slc37a4</a:t>
             </a:r>
           </a:p>
         </p:txBody>
@@ -27512,13 +27787,22 @@
               </a:spcAft>
             </a:pPr>
             <a:r>
+              <a:rPr sz="910" b="1" i="0">
+                <a:solidFill>
+                  <a:srgbClr val="D96552"/>
+                </a:solidFill>
+                <a:latin typeface="Arial"/>
+              </a:rPr>
+              <a:t>[P]</a:t>
+            </a:r>
+            <a:r>
               <a:rPr sz="980" b="1" i="1">
                 <a:solidFill>
                   <a:srgbClr val="478A64"/>
                 </a:solidFill>
                 <a:latin typeface="Arial"/>
               </a:rPr>
-              <a:t>P:Nfkbia</a:t>
+              <a:t>Nfkbia</a:t>
             </a:r>
           </a:p>
         </p:txBody>
@@ -27590,13 +27874,22 @@
               </a:spcAft>
             </a:pPr>
             <a:r>
+              <a:rPr sz="910" b="1" i="0">
+                <a:solidFill>
+                  <a:srgbClr val="D96552"/>
+                </a:solidFill>
+                <a:latin typeface="Arial"/>
+              </a:rPr>
+              <a:t>[P]</a:t>
+            </a:r>
+            <a:r>
               <a:rPr sz="980" b="1" i="1">
                 <a:solidFill>
                   <a:srgbClr val="2D6496"/>
                 </a:solidFill>
                 <a:latin typeface="Arial"/>
               </a:rPr>
-              <a:t>P:Fhl2</a:t>
+              <a:t>Fhl2</a:t>
             </a:r>
           </a:p>
         </p:txBody>
@@ -27838,13 +28131,22 @@
               </a:spcAft>
             </a:pPr>
             <a:r>
-              <a:rPr sz="980" b="0" i="1">
+              <a:rPr sz="910" b="1" i="0">
+                <a:solidFill>
+                  <a:srgbClr val="178681"/>
+                </a:solidFill>
+                <a:latin typeface="Arial"/>
+              </a:rPr>
+              <a:t>[R]</a:t>
+            </a:r>
+            <a:r>
+              <a:rPr sz="980" b="1" i="1">
                 <a:solidFill>
                   <a:srgbClr val="478A64"/>
                 </a:solidFill>
                 <a:latin typeface="Arial"/>
               </a:rPr>
-              <a:t>R:Klhl21</a:t>
+              <a:t>Klhl21</a:t>
             </a:r>
           </a:p>
         </p:txBody>
@@ -28009,13 +28311,22 @@
               </a:spcAft>
             </a:pPr>
             <a:r>
-              <a:rPr sz="980" b="0" i="1">
+              <a:rPr sz="910" b="1" i="0">
+                <a:solidFill>
+                  <a:srgbClr val="178681"/>
+                </a:solidFill>
+                <a:latin typeface="Arial"/>
+              </a:rPr>
+              <a:t>[R]</a:t>
+            </a:r>
+            <a:r>
+              <a:rPr sz="980" b="1" i="1">
                 <a:solidFill>
                   <a:srgbClr val="478A64"/>
                 </a:solidFill>
                 <a:latin typeface="Arial"/>
               </a:rPr>
-              <a:t>R:Sox4</a:t>
+              <a:t>Sox4</a:t>
             </a:r>
             <a:r>
               <a:rPr sz="980" b="0" i="0">
@@ -28027,13 +28338,22 @@
               <a:t>, </a:t>
             </a:r>
             <a:r>
-              <a:rPr sz="980" b="0" i="1">
+              <a:rPr sz="910" b="1" i="0">
+                <a:solidFill>
+                  <a:srgbClr val="178681"/>
+                </a:solidFill>
+                <a:latin typeface="Arial"/>
+              </a:rPr>
+              <a:t>[R]</a:t>
+            </a:r>
+            <a:r>
+              <a:rPr sz="980" b="1" i="1">
                 <a:solidFill>
                   <a:srgbClr val="478A64"/>
                 </a:solidFill>
                 <a:latin typeface="Arial"/>
               </a:rPr>
-              <a:t>R:Cebpd</a:t>
+              <a:t>Cebpd</a:t>
             </a:r>
             <a:r>
               <a:rPr sz="980" b="0" i="0">
@@ -28045,13 +28365,22 @@
               <a:t>, </a:t>
             </a:r>
             <a:r>
-              <a:rPr sz="980" b="0" i="1">
+              <a:rPr sz="910" b="1" i="0">
+                <a:solidFill>
+                  <a:srgbClr val="178681"/>
+                </a:solidFill>
+                <a:latin typeface="Arial"/>
+              </a:rPr>
+              <a:t>[R]</a:t>
+            </a:r>
+            <a:r>
+              <a:rPr sz="980" b="1" i="1">
                 <a:solidFill>
                   <a:srgbClr val="2D6496"/>
                 </a:solidFill>
                 <a:latin typeface="Arial"/>
               </a:rPr>
-              <a:t>R:Sh3bp5</a:t>
+              <a:t>Sh3bp5</a:t>
             </a:r>
             <a:r>
               <a:rPr sz="980" b="0" i="0">
@@ -28063,13 +28392,22 @@
               <a:t>, </a:t>
             </a:r>
             <a:r>
-              <a:rPr sz="980" b="0" i="1">
+              <a:rPr sz="910" b="1" i="0">
+                <a:solidFill>
+                  <a:srgbClr val="178681"/>
+                </a:solidFill>
+                <a:latin typeface="Arial"/>
+              </a:rPr>
+              <a:t>[R]</a:t>
+            </a:r>
+            <a:r>
+              <a:rPr sz="980" b="1" i="1">
                 <a:solidFill>
                   <a:srgbClr val="478A64"/>
                 </a:solidFill>
                 <a:latin typeface="Arial"/>
               </a:rPr>
-              <a:t>R:Prkcd</a:t>
+              <a:t>Prkcd</a:t>
             </a:r>
             <a:r>
               <a:rPr sz="980" b="0" i="0">
@@ -28081,13 +28419,22 @@
               <a:t>, </a:t>
             </a:r>
             <a:r>
-              <a:rPr sz="980" b="0" i="1">
+              <a:rPr sz="910" b="1" i="0">
+                <a:solidFill>
+                  <a:srgbClr val="178681"/>
+                </a:solidFill>
+                <a:latin typeface="Arial"/>
+              </a:rPr>
+              <a:t>[R]</a:t>
+            </a:r>
+            <a:r>
+              <a:rPr sz="980" b="1" i="1">
                 <a:solidFill>
                   <a:srgbClr val="478A64"/>
                 </a:solidFill>
                 <a:latin typeface="Arial"/>
               </a:rPr>
-              <a:t>R:Arid5b</a:t>
+              <a:t>Arid5b</a:t>
             </a:r>
             <a:r>
               <a:rPr sz="980" b="0" i="0">
@@ -28099,13 +28446,22 @@
               <a:t>, </a:t>
             </a:r>
             <a:r>
-              <a:rPr sz="980" b="0" i="1">
+              <a:rPr sz="910" b="1" i="0">
+                <a:solidFill>
+                  <a:srgbClr val="178681"/>
+                </a:solidFill>
+                <a:latin typeface="Arial"/>
+              </a:rPr>
+              <a:t>[R]</a:t>
+            </a:r>
+            <a:r>
+              <a:rPr sz="980" b="1" i="1">
                 <a:solidFill>
                   <a:srgbClr val="478A64"/>
                 </a:solidFill>
                 <a:latin typeface="Arial"/>
               </a:rPr>
-              <a:t>R:Sesn1</a:t>
+              <a:t>Sesn1</a:t>
             </a:r>
             <a:r>
               <a:rPr sz="980" b="0" i="0">
@@ -28117,13 +28473,22 @@
               <a:t>, </a:t>
             </a:r>
             <a:r>
-              <a:rPr sz="980" b="0" i="1">
+              <a:rPr sz="910" b="1" i="0">
+                <a:solidFill>
+                  <a:srgbClr val="178681"/>
+                </a:solidFill>
+                <a:latin typeface="Arial"/>
+              </a:rPr>
+              <a:t>[R]</a:t>
+            </a:r>
+            <a:r>
+              <a:rPr sz="980" b="1" i="1">
                 <a:solidFill>
                   <a:srgbClr val="2D6496"/>
                 </a:solidFill>
                 <a:latin typeface="Arial"/>
               </a:rPr>
-              <a:t>R:Tle1</a:t>
+              <a:t>Tle1</a:t>
             </a:r>
           </a:p>
         </p:txBody>
@@ -28195,13 +28560,22 @@
               </a:spcAft>
             </a:pPr>
             <a:r>
+              <a:rPr sz="910" b="1" i="0">
+                <a:solidFill>
+                  <a:srgbClr val="D96552"/>
+                </a:solidFill>
+                <a:latin typeface="Arial"/>
+              </a:rPr>
+              <a:t>[P]</a:t>
+            </a:r>
+            <a:r>
               <a:rPr sz="980" b="1" i="1">
                 <a:solidFill>
                   <a:srgbClr val="2D6496"/>
                 </a:solidFill>
                 <a:latin typeface="Arial"/>
               </a:rPr>
-              <a:t>P:Klhl21</a:t>
+              <a:t>Klhl21</a:t>
             </a:r>
             <a:r>
               <a:rPr sz="980" b="0" i="0">
@@ -28213,13 +28587,22 @@
               <a:t>, </a:t>
             </a:r>
             <a:r>
+              <a:rPr sz="910" b="1" i="0">
+                <a:solidFill>
+                  <a:srgbClr val="D96552"/>
+                </a:solidFill>
+                <a:latin typeface="Arial"/>
+              </a:rPr>
+              <a:t>[P]</a:t>
+            </a:r>
+            <a:r>
               <a:rPr sz="980" b="1" i="1">
                 <a:solidFill>
                   <a:srgbClr val="2D6496"/>
                 </a:solidFill>
                 <a:latin typeface="Arial"/>
               </a:rPr>
-              <a:t>P:Mapkapk5</a:t>
+              <a:t>Mapkapk5</a:t>
             </a:r>
             <a:r>
               <a:rPr sz="980" b="0" i="0">
@@ -28231,13 +28614,22 @@
               <a:t>, </a:t>
             </a:r>
             <a:r>
+              <a:rPr sz="910" b="1" i="0">
+                <a:solidFill>
+                  <a:srgbClr val="D96552"/>
+                </a:solidFill>
+                <a:latin typeface="Arial"/>
+              </a:rPr>
+              <a:t>[P]</a:t>
+            </a:r>
+            <a:r>
               <a:rPr sz="980" b="1" i="1">
                 <a:solidFill>
                   <a:srgbClr val="2D6496"/>
                 </a:solidFill>
                 <a:latin typeface="Arial"/>
               </a:rPr>
-              <a:t>P:Reep5</a:t>
+              <a:t>Reep5</a:t>
             </a:r>
             <a:r>
               <a:rPr sz="980" b="0" i="0">
@@ -28249,13 +28641,22 @@
               <a:t>, </a:t>
             </a:r>
             <a:r>
+              <a:rPr sz="910" b="1" i="0">
+                <a:solidFill>
+                  <a:srgbClr val="D96552"/>
+                </a:solidFill>
+                <a:latin typeface="Arial"/>
+              </a:rPr>
+              <a:t>[P]</a:t>
+            </a:r>
+            <a:r>
               <a:rPr sz="980" b="1" i="1">
                 <a:solidFill>
                   <a:srgbClr val="2D6496"/>
                 </a:solidFill>
                 <a:latin typeface="Arial"/>
               </a:rPr>
-              <a:t>P:Itgb5</a:t>
+              <a:t>Itgb5</a:t>
             </a:r>
             <a:r>
               <a:rPr sz="980" b="0" i="0">
@@ -28267,13 +28668,22 @@
               <a:t>, </a:t>
             </a:r>
             <a:r>
-              <a:rPr sz="980" b="0" i="1">
+              <a:rPr sz="910" b="1" i="0">
+                <a:solidFill>
+                  <a:srgbClr val="178681"/>
+                </a:solidFill>
+                <a:latin typeface="Arial"/>
+              </a:rPr>
+              <a:t>[R]</a:t>
+            </a:r>
+            <a:r>
+              <a:rPr sz="980" b="1" i="1">
                 <a:solidFill>
                   <a:srgbClr val="8063A6"/>
                 </a:solidFill>
                 <a:latin typeface="Arial"/>
               </a:rPr>
-              <a:t>R:Bphl</a:t>
+              <a:t>Bphl</a:t>
             </a:r>
           </a:p>
         </p:txBody>
@@ -28437,13 +28847,22 @@
               </a:spcAft>
             </a:pPr>
             <a:r>
-              <a:rPr sz="980" b="0" i="1">
+              <a:rPr sz="910" b="1" i="0">
+                <a:solidFill>
+                  <a:srgbClr val="178681"/>
+                </a:solidFill>
+                <a:latin typeface="Arial"/>
+              </a:rPr>
+              <a:t>[R]</a:t>
+            </a:r>
+            <a:r>
+              <a:rPr sz="980" b="1" i="1">
                 <a:solidFill>
                   <a:srgbClr val="D37B00"/>
                 </a:solidFill>
                 <a:latin typeface="Arial"/>
               </a:rPr>
-              <a:t>R:Tpm1</a:t>
+              <a:t>Tpm1</a:t>
             </a:r>
           </a:p>
         </p:txBody>
@@ -28515,13 +28934,22 @@
               </a:spcAft>
             </a:pPr>
             <a:r>
-              <a:rPr sz="980" b="0" i="1">
+              <a:rPr sz="910" b="1" i="0">
+                <a:solidFill>
+                  <a:srgbClr val="178681"/>
+                </a:solidFill>
+                <a:latin typeface="Arial"/>
+              </a:rPr>
+              <a:t>[R]</a:t>
+            </a:r>
+            <a:r>
+              <a:rPr sz="980" b="1" i="1">
                 <a:solidFill>
                   <a:srgbClr val="478A64"/>
                 </a:solidFill>
                 <a:latin typeface="Arial"/>
               </a:rPr>
-              <a:t>R:Bdh1</a:t>
+              <a:t>Bdh1</a:t>
             </a:r>
             <a:r>
               <a:rPr sz="980" b="0" i="0">
@@ -28533,13 +28961,22 @@
               <a:t>, </a:t>
             </a:r>
             <a:r>
-              <a:rPr sz="980" b="0" i="1">
+              <a:rPr sz="910" b="1" i="0">
+                <a:solidFill>
+                  <a:srgbClr val="178681"/>
+                </a:solidFill>
+                <a:latin typeface="Arial"/>
+              </a:rPr>
+              <a:t>[R]</a:t>
+            </a:r>
+            <a:r>
+              <a:rPr sz="980" b="1" i="1">
                 <a:solidFill>
                   <a:srgbClr val="478A64"/>
                 </a:solidFill>
                 <a:latin typeface="Arial"/>
               </a:rPr>
-              <a:t>R:Ech1</a:t>
+              <a:t>Ech1</a:t>
             </a:r>
             <a:r>
               <a:rPr sz="980" b="0" i="0">
@@ -28551,13 +28988,22 @@
               <a:t>, </a:t>
             </a:r>
             <a:r>
-              <a:rPr sz="980" b="0" i="1">
+              <a:rPr sz="910" b="1" i="0">
+                <a:solidFill>
+                  <a:srgbClr val="178681"/>
+                </a:solidFill>
+                <a:latin typeface="Arial"/>
+              </a:rPr>
+              <a:t>[R]</a:t>
+            </a:r>
+            <a:r>
+              <a:rPr sz="980" b="1" i="1">
                 <a:solidFill>
                   <a:srgbClr val="D37B00"/>
                 </a:solidFill>
                 <a:latin typeface="Arial"/>
               </a:rPr>
-              <a:t>R:Bnip3</a:t>
+              <a:t>Bnip3</a:t>
             </a:r>
             <a:r>
               <a:rPr sz="980" b="0" i="0">
@@ -28569,13 +29015,22 @@
               <a:t>, </a:t>
             </a:r>
             <a:r>
-              <a:rPr sz="980" b="0" i="1">
+              <a:rPr sz="910" b="1" i="0">
+                <a:solidFill>
+                  <a:srgbClr val="178681"/>
+                </a:solidFill>
+                <a:latin typeface="Arial"/>
+              </a:rPr>
+              <a:t>[R]</a:t>
+            </a:r>
+            <a:r>
+              <a:rPr sz="980" b="1" i="1">
                 <a:solidFill>
                   <a:srgbClr val="478A64"/>
                 </a:solidFill>
                 <a:latin typeface="Arial"/>
               </a:rPr>
-              <a:t>R:Decr1</a:t>
+              <a:t>Decr1</a:t>
             </a:r>
           </a:p>
         </p:txBody>
@@ -28739,13 +29194,22 @@
               </a:spcAft>
             </a:pPr>
             <a:r>
+              <a:rPr sz="910" b="1" i="0">
+                <a:solidFill>
+                  <a:srgbClr val="D96552"/>
+                </a:solidFill>
+                <a:latin typeface="Arial"/>
+              </a:rPr>
+              <a:t>[P]</a:t>
+            </a:r>
+            <a:r>
               <a:rPr sz="980" b="1" i="1">
                 <a:solidFill>
                   <a:srgbClr val="2D6496"/>
                 </a:solidFill>
                 <a:latin typeface="Arial"/>
               </a:rPr>
-              <a:t>P:Cebpd</a:t>
+              <a:t>Cebpd</a:t>
             </a:r>
             <a:r>
               <a:rPr sz="980" b="0" i="0">
@@ -28757,13 +29221,22 @@
               <a:t>, </a:t>
             </a:r>
             <a:r>
-              <a:rPr sz="980" b="0" i="1">
+              <a:rPr sz="910" b="1" i="0">
+                <a:solidFill>
+                  <a:srgbClr val="178681"/>
+                </a:solidFill>
+                <a:latin typeface="Arial"/>
+              </a:rPr>
+              <a:t>[R]</a:t>
+            </a:r>
+            <a:r>
+              <a:rPr sz="980" b="1" i="1">
                 <a:solidFill>
                   <a:srgbClr val="D37B00"/>
                 </a:solidFill>
                 <a:latin typeface="Arial"/>
               </a:rPr>
-              <a:t>R:Cdkn1a</a:t>
+              <a:t>Cdkn1a</a:t>
             </a:r>
             <a:r>
               <a:rPr sz="980" b="0" i="0">
@@ -28775,13 +29248,22 @@
               <a:t>, </a:t>
             </a:r>
             <a:r>
-              <a:rPr sz="980" b="0" i="1">
+              <a:rPr sz="910" b="1" i="0">
+                <a:solidFill>
+                  <a:srgbClr val="178681"/>
+                </a:solidFill>
+                <a:latin typeface="Arial"/>
+              </a:rPr>
+              <a:t>[R]</a:t>
+            </a:r>
+            <a:r>
+              <a:rPr sz="980" b="1" i="1">
                 <a:solidFill>
                   <a:srgbClr val="2D6496"/>
                 </a:solidFill>
                 <a:latin typeface="Arial"/>
               </a:rPr>
-              <a:t>R:St3gal5</a:t>
+              <a:t>St3gal5</a:t>
             </a:r>
             <a:r>
               <a:rPr sz="980" b="0" i="0">
@@ -28793,13 +29275,22 @@
               <a:t>, </a:t>
             </a:r>
             <a:r>
-              <a:rPr sz="980" b="0" i="1">
+              <a:rPr sz="910" b="1" i="0">
+                <a:solidFill>
+                  <a:srgbClr val="178681"/>
+                </a:solidFill>
+                <a:latin typeface="Arial"/>
+              </a:rPr>
+              <a:t>[R]</a:t>
+            </a:r>
+            <a:r>
+              <a:rPr sz="980" b="1" i="1">
                 <a:solidFill>
                   <a:srgbClr val="2D6496"/>
                 </a:solidFill>
                 <a:latin typeface="Arial"/>
               </a:rPr>
-              <a:t>R:Bnip3</a:t>
+              <a:t>Bnip3</a:t>
             </a:r>
           </a:p>
         </p:txBody>
@@ -29119,13 +29610,22 @@
               </a:spcAft>
             </a:pPr>
             <a:r>
+              <a:rPr sz="910" b="1" i="0">
+                <a:solidFill>
+                  <a:srgbClr val="D96552"/>
+                </a:solidFill>
+                <a:latin typeface="Arial"/>
+              </a:rPr>
+              <a:t>[P]</a:t>
+            </a:r>
+            <a:r>
               <a:rPr sz="980" b="1" i="1">
                 <a:solidFill>
                   <a:srgbClr val="8063A6"/>
                 </a:solidFill>
                 <a:latin typeface="Arial"/>
               </a:rPr>
-              <a:t>P:Psmb8</a:t>
+              <a:t>Psmb8</a:t>
             </a:r>
             <a:r>
               <a:rPr sz="980" b="0" i="0">
@@ -29137,13 +29637,22 @@
               <a:t>, </a:t>
             </a:r>
             <a:r>
-              <a:rPr sz="980" b="0" i="1">
+              <a:rPr sz="910" b="1" i="0">
+                <a:solidFill>
+                  <a:srgbClr val="178681"/>
+                </a:solidFill>
+                <a:latin typeface="Arial"/>
+              </a:rPr>
+              <a:t>[R]</a:t>
+            </a:r>
+            <a:r>
+              <a:rPr sz="980" b="1" i="1">
                 <a:solidFill>
                   <a:srgbClr val="8063A6"/>
                 </a:solidFill>
                 <a:latin typeface="Arial"/>
               </a:rPr>
-              <a:t>R:Tspan4</a:t>
+              <a:t>Tspan4</a:t>
             </a:r>
           </a:p>
         </p:txBody>
@@ -29307,13 +29816,22 @@
               </a:spcAft>
             </a:pPr>
             <a:r>
+              <a:rPr sz="910" b="1" i="0">
+                <a:solidFill>
+                  <a:srgbClr val="D96552"/>
+                </a:solidFill>
+                <a:latin typeface="Arial"/>
+              </a:rPr>
+              <a:t>[P]</a:t>
+            </a:r>
+            <a:r>
               <a:rPr sz="980" b="1" i="1">
                 <a:solidFill>
                   <a:srgbClr val="2D6496"/>
                 </a:solidFill>
                 <a:latin typeface="Arial"/>
               </a:rPr>
-              <a:t>P:Plscr1</a:t>
+              <a:t>Plscr1</a:t>
             </a:r>
           </a:p>
         </p:txBody>
@@ -29430,7 +29948,7 @@
                 </a:solidFill>
                 <a:latin typeface="Arial"/>
               </a:rPr>
-              <a:t>P/R reflects repeated feature selection; color independently reports literature interpretation for all 49 associations.</a:t>
+              <a:t>[P]/[R] tags report repeated feature selection; gene color independently reports literature interpretation for all 49 associations.</a:t>
             </a:r>
           </a:p>
         </p:txBody>
@@ -30966,7 +31484,7 @@
                 </a:solidFill>
                 <a:latin typeface="Arial"/>
               </a:rPr>
-              <a:t>ADDITIONAL FINDINGS</a:t>
+              <a:t>ADDITIONAL FINDINGS I</a:t>
             </a:r>
           </a:p>
         </p:txBody>
@@ -31005,7 +31523,7 @@
                 </a:solidFill>
                 <a:latin typeface="Arial"/>
               </a:rPr>
-              <a:t>Additional tissues produced narrower gene-level hypotheses</a:t>
+              <a:t>Each additional tissue defines a separate hypothesis</a:t>
             </a:r>
           </a:p>
         </p:txBody>
@@ -31044,21 +31562,138 @@
                 </a:solidFill>
                 <a:latin typeface="Arial"/>
               </a:rPr>
-              <a:t>Thymus and soleus remained the strongest coherent programs, but they were not the only synthetic-informed results.</a:t>
-            </a:r>
-          </a:p>
-        </p:txBody>
-      </p:sp>
-      <p:sp>
-        <p:nvSpPr>
-          <p:cNvPr id="7" name="Rectangle 6"/>
+              <a:t>These results remain distinct; their placement on one slide does not imply shared biology.</a:t>
+            </a:r>
+          </a:p>
+        </p:txBody>
+      </p:sp>
+      <p:sp>
+        <p:nvSpPr>
+          <p:cNvPr id="7" name="TextBox 6"/>
+          <p:cNvSpPr txBox="1"/>
+          <p:nvPr/>
+        </p:nvSpPr>
+        <p:spPr>
+          <a:xfrm>
+            <a:off x="658368" y="1828800"/>
+            <a:ext cx="1874519" cy="256032"/>
+          </a:xfrm>
+          <a:prstGeom prst="rect">
+            <a:avLst/>
+          </a:prstGeom>
+          <a:noFill/>
+        </p:spPr>
+        <p:txBody>
+          <a:bodyPr wrap="square" lIns="18288" rIns="18288" tIns="18288" bIns="18288" anchor="t">
+            <a:spAutoFit/>
+          </a:bodyPr>
+          <a:lstStyle/>
+          <a:p>
+            <a:pPr algn="l">
+              <a:spcAft>
+                <a:spcPts val="0"/>
+              </a:spcAft>
+            </a:pPr>
+            <a:r>
+              <a:rPr sz="1150" b="1" i="0">
+                <a:solidFill>
+                  <a:srgbClr val="59697A"/>
+                </a:solidFill>
+                <a:latin typeface="Arial"/>
+              </a:rPr>
+              <a:t>Analysis unit</a:t>
+            </a:r>
+          </a:p>
+        </p:txBody>
+      </p:sp>
+      <p:sp>
+        <p:nvSpPr>
+          <p:cNvPr id="8" name="TextBox 7"/>
+          <p:cNvSpPr txBox="1"/>
+          <p:nvPr/>
+        </p:nvSpPr>
+        <p:spPr>
+          <a:xfrm>
+            <a:off x="2697480" y="1828800"/>
+            <a:ext cx="3566160" cy="256032"/>
+          </a:xfrm>
+          <a:prstGeom prst="rect">
+            <a:avLst/>
+          </a:prstGeom>
+          <a:noFill/>
+        </p:spPr>
+        <p:txBody>
+          <a:bodyPr wrap="square" lIns="18288" rIns="18288" tIns="18288" bIns="18288" anchor="t">
+            <a:spAutoFit/>
+          </a:bodyPr>
+          <a:lstStyle/>
+          <a:p>
+            <a:pPr algn="l">
+              <a:spcAft>
+                <a:spcPts val="0"/>
+              </a:spcAft>
+            </a:pPr>
+            <a:r>
+              <a:rPr sz="1150" b="1" i="0">
+                <a:solidFill>
+                  <a:srgbClr val="59697A"/>
+                </a:solidFill>
+                <a:latin typeface="Arial"/>
+              </a:rPr>
+              <a:t>Synthetic-informed genes</a:t>
+            </a:r>
+          </a:p>
+        </p:txBody>
+      </p:sp>
+      <p:sp>
+        <p:nvSpPr>
+          <p:cNvPr id="9" name="TextBox 8"/>
+          <p:cNvSpPr txBox="1"/>
+          <p:nvPr/>
+        </p:nvSpPr>
+        <p:spPr>
+          <a:xfrm>
+            <a:off x="6583680" y="1828800"/>
+            <a:ext cx="4663440" cy="256032"/>
+          </a:xfrm>
+          <a:prstGeom prst="rect">
+            <a:avLst/>
+          </a:prstGeom>
+          <a:noFill/>
+        </p:spPr>
+        <p:txBody>
+          <a:bodyPr wrap="square" lIns="18288" rIns="18288" tIns="18288" bIns="18288" anchor="t">
+            <a:spAutoFit/>
+          </a:bodyPr>
+          <a:lstStyle/>
+          <a:p>
+            <a:pPr algn="l">
+              <a:spcAft>
+                <a:spcPts val="0"/>
+              </a:spcAft>
+            </a:pPr>
+            <a:r>
+              <a:rPr sz="1150" b="1" i="0">
+                <a:solidFill>
+                  <a:srgbClr val="59697A"/>
+                </a:solidFill>
+                <a:latin typeface="Arial"/>
+              </a:rPr>
+              <a:t>Interpretation</a:t>
+            </a:r>
+          </a:p>
+        </p:txBody>
+      </p:sp>
+      <p:sp>
+        <p:nvSpPr>
+          <p:cNvPr id="10" name="Rectangle 9"/>
           <p:cNvSpPr/>
           <p:nvPr/>
         </p:nvSpPr>
         <p:spPr>
           <a:xfrm>
-            <a:off x="393192" y="1847088"/>
-            <a:ext cx="11375136" cy="667512"/>
+            <a:off x="393192" y="2148840"/>
+            <a:ext cx="11375136" cy="804672"/>
           </a:xfrm>
           <a:prstGeom prst="rect">
             <a:avLst/>
@@ -31096,14 +31731,14 @@
       </p:sp>
       <p:sp>
         <p:nvSpPr>
-          <p:cNvPr id="8" name="Rectangle 7"/>
+          <p:cNvPr id="11" name="Rectangle 10"/>
           <p:cNvSpPr/>
           <p:nvPr/>
         </p:nvSpPr>
         <p:spPr>
           <a:xfrm>
-            <a:off x="393192" y="1847088"/>
-            <a:ext cx="73152" cy="667512"/>
+            <a:off x="393192" y="2148840"/>
+            <a:ext cx="73152" cy="804672"/>
           </a:xfrm>
           <a:prstGeom prst="rect">
             <a:avLst/>
@@ -31139,14 +31774,14 @@
       </p:sp>
       <p:sp>
         <p:nvSpPr>
-          <p:cNvPr id="9" name="TextBox 8"/>
+          <p:cNvPr id="12" name="TextBox 11"/>
           <p:cNvSpPr txBox="1"/>
           <p:nvPr/>
         </p:nvSpPr>
         <p:spPr>
           <a:xfrm>
-            <a:off x="640080" y="2002536"/>
-            <a:ext cx="1938528" cy="310896"/>
+            <a:off x="658368" y="2331720"/>
+            <a:ext cx="1874519" cy="402336"/>
           </a:xfrm>
           <a:prstGeom prst="rect">
             <a:avLst/>
@@ -31154,7 +31789,7 @@
           <a:noFill/>
         </p:spPr>
         <p:txBody>
-          <a:bodyPr wrap="square" lIns="18288" rIns="18288" tIns="18288" bIns="18288" anchor="t">
+          <a:bodyPr wrap="square" lIns="18288" rIns="18288" tIns="18288" bIns="18288" anchor="ctr">
             <a:spAutoFit/>
           </a:bodyPr>
           <a:lstStyle/>
@@ -31165,7 +31800,7 @@
               </a:spcAft>
             </a:pPr>
             <a:r>
-              <a:rPr sz="1600" b="1" i="0">
+              <a:rPr sz="1550" b="1" i="0">
                 <a:solidFill>
                   <a:srgbClr val="2D6496"/>
                 </a:solidFill>
@@ -31178,14 +31813,14 @@
       </p:sp>
       <p:sp>
         <p:nvSpPr>
-          <p:cNvPr id="10" name="TextBox 9"/>
+          <p:cNvPr id="13" name="TextBox 12"/>
           <p:cNvSpPr txBox="1"/>
           <p:nvPr/>
         </p:nvSpPr>
         <p:spPr>
           <a:xfrm>
-            <a:off x="2551176" y="1975104"/>
-            <a:ext cx="7040880" cy="365760"/>
+            <a:off x="2697480" y="2258568"/>
+            <a:ext cx="3566160" cy="566928"/>
           </a:xfrm>
           <a:prstGeom prst="rect">
             <a:avLst/>
@@ -31204,27 +31839,27 @@
               </a:spcAft>
             </a:pPr>
             <a:r>
-              <a:rPr sz="1400" b="0" i="0">
+              <a:rPr sz="1250" b="0" i="0">
                 <a:solidFill>
                   <a:srgbClr val="263746"/>
                 </a:solidFill>
                 <a:latin typeface="Arial"/>
               </a:rPr>
-              <a:t>12 genes: stress, differentiation, mitochondrial and signaling candidates</a:t>
-            </a:r>
-          </a:p>
-        </p:txBody>
-      </p:sp>
-      <p:sp>
-        <p:nvSpPr>
-          <p:cNvPr id="11" name="TextBox 10"/>
+              <a:t>12 genes: 4 promoted, 8 reinforced</a:t>
+            </a:r>
+          </a:p>
+        </p:txBody>
+      </p:sp>
+      <p:sp>
+        <p:nvSpPr>
+          <p:cNvPr id="14" name="TextBox 13"/>
           <p:cNvSpPr txBox="1"/>
           <p:nvPr/>
         </p:nvSpPr>
         <p:spPr>
           <a:xfrm>
-            <a:off x="9756648" y="1993392"/>
-            <a:ext cx="1682496" cy="310896"/>
+            <a:off x="6583680" y="2240280"/>
+            <a:ext cx="4754880" cy="603504"/>
           </a:xfrm>
           <a:prstGeom prst="rect">
             <a:avLst/>
@@ -31237,33 +31872,33 @@
           </a:bodyPr>
           <a:lstStyle/>
           <a:p>
-            <a:pPr algn="ctr">
+            <a:pPr algn="l">
               <a:spcAft>
                 <a:spcPts val="0"/>
               </a:spcAft>
             </a:pPr>
             <a:r>
-              <a:rPr sz="1250" b="1" i="0">
-                <a:solidFill>
-                  <a:srgbClr val="2D6496"/>
-                </a:solidFill>
-                <a:latin typeface="Arial"/>
-              </a:rPr>
-              <a:t>Mixed panel</a:t>
-            </a:r>
-          </a:p>
-        </p:txBody>
-      </p:sp>
-      <p:sp>
-        <p:nvSpPr>
-          <p:cNvPr id="12" name="Rectangle 11"/>
+              <a:rPr sz="1220" b="0" i="0">
+                <a:solidFill>
+                  <a:srgbClr val="263746"/>
+                </a:solidFill>
+                <a:latin typeface="Arial"/>
+              </a:rPr>
+              <a:t>Heterogeneous stress, differentiation, interferon and sialic-acid response; interpret with the anatomical muscle groups.</a:t>
+            </a:r>
+          </a:p>
+        </p:txBody>
+      </p:sp>
+      <p:sp>
+        <p:nvSpPr>
+          <p:cNvPr id="15" name="Rectangle 14"/>
           <p:cNvSpPr/>
           <p:nvPr/>
         </p:nvSpPr>
         <p:spPr>
           <a:xfrm>
-            <a:off x="393192" y="2660904"/>
-            <a:ext cx="11375136" cy="667512"/>
+            <a:off x="393192" y="3118104"/>
+            <a:ext cx="11375136" cy="804672"/>
           </a:xfrm>
           <a:prstGeom prst="rect">
             <a:avLst/>
@@ -31301,14 +31936,14 @@
       </p:sp>
       <p:sp>
         <p:nvSpPr>
-          <p:cNvPr id="13" name="Rectangle 12"/>
+          <p:cNvPr id="16" name="Rectangle 15"/>
           <p:cNvSpPr/>
           <p:nvPr/>
         </p:nvSpPr>
         <p:spPr>
           <a:xfrm>
-            <a:off x="393192" y="2660904"/>
-            <a:ext cx="73152" cy="667512"/>
+            <a:off x="393192" y="3118104"/>
+            <a:ext cx="73152" cy="804672"/>
           </a:xfrm>
           <a:prstGeom prst="rect">
             <a:avLst/>
@@ -31344,14 +31979,14 @@
       </p:sp>
       <p:sp>
         <p:nvSpPr>
-          <p:cNvPr id="14" name="TextBox 13"/>
+          <p:cNvPr id="17" name="TextBox 16"/>
           <p:cNvSpPr txBox="1"/>
           <p:nvPr/>
         </p:nvSpPr>
         <p:spPr>
           <a:xfrm>
-            <a:off x="640080" y="2816352"/>
-            <a:ext cx="1938528" cy="310896"/>
+            <a:off x="658368" y="3300984"/>
+            <a:ext cx="1874519" cy="402336"/>
           </a:xfrm>
           <a:prstGeom prst="rect">
             <a:avLst/>
@@ -31359,7 +31994,7 @@
           <a:noFill/>
         </p:spPr>
         <p:txBody>
-          <a:bodyPr wrap="square" lIns="18288" rIns="18288" tIns="18288" bIns="18288" anchor="t">
+          <a:bodyPr wrap="square" lIns="18288" rIns="18288" tIns="18288" bIns="18288" anchor="ctr">
             <a:spAutoFit/>
           </a:bodyPr>
           <a:lstStyle/>
@@ -31370,27 +32005,27 @@
               </a:spcAft>
             </a:pPr>
             <a:r>
-              <a:rPr sz="1600" b="1" i="0">
+              <a:rPr sz="1550" b="1" i="0">
                 <a:solidFill>
                   <a:srgbClr val="8063A6"/>
                 </a:solidFill>
                 <a:latin typeface="Arial"/>
               </a:rPr>
-              <a:t>Kidney + spleen</a:t>
-            </a:r>
-          </a:p>
-        </p:txBody>
-      </p:sp>
-      <p:sp>
-        <p:nvSpPr>
-          <p:cNvPr id="15" name="TextBox 14"/>
+              <a:t>Kidney</a:t>
+            </a:r>
+          </a:p>
+        </p:txBody>
+      </p:sp>
+      <p:sp>
+        <p:nvSpPr>
+          <p:cNvPr id="18" name="TextBox 17"/>
           <p:cNvSpPr txBox="1"/>
           <p:nvPr/>
         </p:nvSpPr>
         <p:spPr>
           <a:xfrm>
-            <a:off x="2551176" y="2788920"/>
-            <a:ext cx="7040880" cy="365760"/>
+            <a:off x="2697480" y="3227832"/>
+            <a:ext cx="3566160" cy="566928"/>
           </a:xfrm>
           <a:prstGeom prst="rect">
             <a:avLst/>
@@ -31409,27 +32044,27 @@
               </a:spcAft>
             </a:pPr>
             <a:r>
-              <a:rPr sz="1400" b="0" i="0">
+              <a:rPr sz="1250" b="0" i="0">
                 <a:solidFill>
                   <a:srgbClr val="263746"/>
                 </a:solidFill>
                 <a:latin typeface="Arial"/>
               </a:rPr>
-              <a:t>2 renal genes and 4 splenic adhesion/ECM candidates</a:t>
-            </a:r>
-          </a:p>
-        </p:txBody>
-      </p:sp>
-      <p:sp>
-        <p:nvSpPr>
-          <p:cNvPr id="16" name="TextBox 15"/>
+              <a:t>[P] Inpp4b higher; [R] Slc37a4 higher</a:t>
+            </a:r>
+          </a:p>
+        </p:txBody>
+      </p:sp>
+      <p:sp>
+        <p:nvSpPr>
+          <p:cNvPr id="19" name="TextBox 18"/>
           <p:cNvSpPr txBox="1"/>
           <p:nvPr/>
         </p:nvSpPr>
         <p:spPr>
           <a:xfrm>
-            <a:off x="9756648" y="2807208"/>
-            <a:ext cx="1682496" cy="310896"/>
+            <a:off x="6583680" y="3209544"/>
+            <a:ext cx="4754880" cy="603504"/>
           </a:xfrm>
           <a:prstGeom prst="rect">
             <a:avLst/>
@@ -31442,33 +32077,238 @@
           </a:bodyPr>
           <a:lstStyle/>
           <a:p>
-            <a:pPr algn="ctr">
+            <a:pPr algn="l">
               <a:spcAft>
                 <a:spcPts val="0"/>
               </a:spcAft>
             </a:pPr>
             <a:r>
-              <a:rPr sz="1250" b="1" i="0">
-                <a:solidFill>
-                  <a:srgbClr val="8063A6"/>
-                </a:solidFill>
-                <a:latin typeface="Arial"/>
-              </a:rPr>
-              <a:t>Gene-level</a:t>
-            </a:r>
-          </a:p>
-        </p:txBody>
-      </p:sp>
-      <p:sp>
-        <p:nvSpPr>
-          <p:cNvPr id="17" name="Rectangle 16"/>
+              <a:rPr sz="1220" b="0" i="0">
+                <a:solidFill>
+                  <a:srgbClr val="263746"/>
+                </a:solidFill>
+                <a:latin typeface="Arial"/>
+              </a:rPr>
+              <a:t>Renal phosphoinositide signaling and glucose-handling hypothesis; the pair had no shared Reactome enrichment.</a:t>
+            </a:r>
+          </a:p>
+        </p:txBody>
+      </p:sp>
+      <p:sp>
+        <p:nvSpPr>
+          <p:cNvPr id="20" name="Rectangle 19"/>
           <p:cNvSpPr/>
           <p:nvPr/>
         </p:nvSpPr>
         <p:spPr>
           <a:xfrm>
-            <a:off x="393192" y="3474720"/>
-            <a:ext cx="11375136" cy="667512"/>
+            <a:off x="393192" y="4087368"/>
+            <a:ext cx="11375136" cy="804672"/>
+          </a:xfrm>
+          <a:prstGeom prst="rect">
+            <a:avLst/>
+          </a:prstGeom>
+          <a:solidFill>
+            <a:srgbClr val="E8F3F1"/>
+          </a:solidFill>
+          <a:ln w="10160">
+            <a:solidFill>
+              <a:srgbClr val="DDE4E8"/>
+            </a:solidFill>
+          </a:ln>
+        </p:spPr>
+        <p:style>
+          <a:lnRef idx="1">
+            <a:schemeClr val="accent1"/>
+          </a:lnRef>
+          <a:fillRef idx="3">
+            <a:schemeClr val="accent1"/>
+          </a:fillRef>
+          <a:effectRef idx="2">
+            <a:schemeClr val="accent1"/>
+          </a:effectRef>
+          <a:fontRef idx="minor">
+            <a:schemeClr val="lt1"/>
+          </a:fontRef>
+        </p:style>
+        <p:txBody>
+          <a:bodyPr rtlCol="0" anchor="ctr"/>
+          <a:lstStyle/>
+          <a:p>
+            <a:pPr algn="ctr"/>
+          </a:p>
+        </p:txBody>
+      </p:sp>
+      <p:sp>
+        <p:nvSpPr>
+          <p:cNvPr id="21" name="Rectangle 20"/>
+          <p:cNvSpPr/>
+          <p:nvPr/>
+        </p:nvSpPr>
+        <p:spPr>
+          <a:xfrm>
+            <a:off x="393192" y="4087368"/>
+            <a:ext cx="73152" cy="804672"/>
+          </a:xfrm>
+          <a:prstGeom prst="rect">
+            <a:avLst/>
+          </a:prstGeom>
+          <a:solidFill>
+            <a:srgbClr val="178681"/>
+          </a:solidFill>
+          <a:ln>
+            <a:noFill/>
+          </a:ln>
+        </p:spPr>
+        <p:style>
+          <a:lnRef idx="1">
+            <a:schemeClr val="accent1"/>
+          </a:lnRef>
+          <a:fillRef idx="3">
+            <a:schemeClr val="accent1"/>
+          </a:fillRef>
+          <a:effectRef idx="2">
+            <a:schemeClr val="accent1"/>
+          </a:effectRef>
+          <a:fontRef idx="minor">
+            <a:schemeClr val="lt1"/>
+          </a:fontRef>
+        </p:style>
+        <p:txBody>
+          <a:bodyPr rtlCol="0" anchor="ctr"/>
+          <a:lstStyle/>
+          <a:p>
+            <a:pPr algn="ctr"/>
+          </a:p>
+        </p:txBody>
+      </p:sp>
+      <p:sp>
+        <p:nvSpPr>
+          <p:cNvPr id="22" name="TextBox 21"/>
+          <p:cNvSpPr txBox="1"/>
+          <p:nvPr/>
+        </p:nvSpPr>
+        <p:spPr>
+          <a:xfrm>
+            <a:off x="658368" y="4270248"/>
+            <a:ext cx="1874519" cy="402336"/>
+          </a:xfrm>
+          <a:prstGeom prst="rect">
+            <a:avLst/>
+          </a:prstGeom>
+          <a:noFill/>
+        </p:spPr>
+        <p:txBody>
+          <a:bodyPr wrap="square" lIns="18288" rIns="18288" tIns="18288" bIns="18288" anchor="ctr">
+            <a:spAutoFit/>
+          </a:bodyPr>
+          <a:lstStyle/>
+          <a:p>
+            <a:pPr algn="l">
+              <a:spcAft>
+                <a:spcPts val="0"/>
+              </a:spcAft>
+            </a:pPr>
+            <a:r>
+              <a:rPr sz="1550" b="1" i="0">
+                <a:solidFill>
+                  <a:srgbClr val="178681"/>
+                </a:solidFill>
+                <a:latin typeface="Arial"/>
+              </a:rPr>
+              <a:t>Spleen</a:t>
+            </a:r>
+          </a:p>
+        </p:txBody>
+      </p:sp>
+      <p:sp>
+        <p:nvSpPr>
+          <p:cNvPr id="23" name="TextBox 22"/>
+          <p:cNvSpPr txBox="1"/>
+          <p:nvPr/>
+        </p:nvSpPr>
+        <p:spPr>
+          <a:xfrm>
+            <a:off x="2697480" y="4197096"/>
+            <a:ext cx="3566160" cy="566928"/>
+          </a:xfrm>
+          <a:prstGeom prst="rect">
+            <a:avLst/>
+          </a:prstGeom>
+          <a:noFill/>
+        </p:spPr>
+        <p:txBody>
+          <a:bodyPr wrap="square" lIns="18288" rIns="18288" tIns="18288" bIns="18288" anchor="ctr">
+            <a:spAutoFit/>
+          </a:bodyPr>
+          <a:lstStyle/>
+          <a:p>
+            <a:pPr algn="l">
+              <a:spcAft>
+                <a:spcPts val="0"/>
+              </a:spcAft>
+            </a:pPr>
+            <a:r>
+              <a:rPr sz="1250" b="0" i="0">
+                <a:solidFill>
+                  <a:srgbClr val="263746"/>
+                </a:solidFill>
+                <a:latin typeface="Arial"/>
+              </a:rPr>
+              <a:t>[P] Rai14, Myl9, Ptprk higher; [R] Loxl1 higher</a:t>
+            </a:r>
+          </a:p>
+        </p:txBody>
+      </p:sp>
+      <p:sp>
+        <p:nvSpPr>
+          <p:cNvPr id="24" name="TextBox 23"/>
+          <p:cNvSpPr txBox="1"/>
+          <p:nvPr/>
+        </p:nvSpPr>
+        <p:spPr>
+          <a:xfrm>
+            <a:off x="6583680" y="4178808"/>
+            <a:ext cx="4754880" cy="603504"/>
+          </a:xfrm>
+          <a:prstGeom prst="rect">
+            <a:avLst/>
+          </a:prstGeom>
+          <a:noFill/>
+        </p:spPr>
+        <p:txBody>
+          <a:bodyPr wrap="square" lIns="18288" rIns="18288" tIns="18288" bIns="18288" anchor="ctr">
+            <a:spAutoFit/>
+          </a:bodyPr>
+          <a:lstStyle/>
+          <a:p>
+            <a:pPr algn="l">
+              <a:spcAft>
+                <a:spcPts val="0"/>
+              </a:spcAft>
+            </a:pPr>
+            <a:r>
+              <a:rPr sz="1220" b="0" i="0">
+                <a:solidFill>
+                  <a:srgbClr val="263746"/>
+                </a:solidFill>
+                <a:latin typeface="Arial"/>
+              </a:rPr>
+              <a:t>Adhesion, actomyosin and extracellular-matrix or immune-organization hypothesis; no coherent pathway enrichment.</a:t>
+            </a:r>
+          </a:p>
+        </p:txBody>
+      </p:sp>
+      <p:sp>
+        <p:nvSpPr>
+          <p:cNvPr id="25" name="Rectangle 24"/>
+          <p:cNvSpPr/>
+          <p:nvPr/>
+        </p:nvSpPr>
+        <p:spPr>
+          <a:xfrm>
+            <a:off x="393192" y="5056632"/>
+            <a:ext cx="11375136" cy="804672"/>
           </a:xfrm>
           <a:prstGeom prst="rect">
             <a:avLst/>
@@ -31506,14 +32346,14 @@
       </p:sp>
       <p:sp>
         <p:nvSpPr>
-          <p:cNvPr id="18" name="Rectangle 17"/>
+          <p:cNvPr id="26" name="Rectangle 25"/>
           <p:cNvSpPr/>
           <p:nvPr/>
         </p:nvSpPr>
         <p:spPr>
           <a:xfrm>
-            <a:off x="393192" y="3474720"/>
-            <a:ext cx="73152" cy="667512"/>
+            <a:off x="393192" y="5056632"/>
+            <a:ext cx="73152" cy="804672"/>
           </a:xfrm>
           <a:prstGeom prst="rect">
             <a:avLst/>
@@ -31549,14 +32389,14 @@
       </p:sp>
       <p:sp>
         <p:nvSpPr>
-          <p:cNvPr id="19" name="TextBox 18"/>
+          <p:cNvPr id="27" name="TextBox 26"/>
           <p:cNvSpPr txBox="1"/>
           <p:nvPr/>
         </p:nvSpPr>
         <p:spPr>
           <a:xfrm>
-            <a:off x="640080" y="3630168"/>
-            <a:ext cx="1938528" cy="310896"/>
+            <a:off x="658368" y="5239512"/>
+            <a:ext cx="1874519" cy="402336"/>
           </a:xfrm>
           <a:prstGeom prst="rect">
             <a:avLst/>
@@ -31564,7 +32404,7 @@
           <a:noFill/>
         </p:spPr>
         <p:txBody>
-          <a:bodyPr wrap="square" lIns="18288" rIns="18288" tIns="18288" bIns="18288" anchor="t">
+          <a:bodyPr wrap="square" lIns="18288" rIns="18288" tIns="18288" bIns="18288" anchor="ctr">
             <a:spAutoFit/>
           </a:bodyPr>
           <a:lstStyle/>
@@ -31575,27 +32415,27 @@
               </a:spcAft>
             </a:pPr>
             <a:r>
-              <a:rPr sz="1600" b="1" i="0">
+              <a:rPr sz="1550" b="1" i="0">
                 <a:solidFill>
                   <a:srgbClr val="D37B00"/>
                 </a:solidFill>
                 <a:latin typeface="Arial"/>
               </a:rPr>
-              <a:t>Skin + eye</a:t>
-            </a:r>
-          </a:p>
-        </p:txBody>
-      </p:sp>
-      <p:sp>
-        <p:nvSpPr>
-          <p:cNvPr id="20" name="TextBox 19"/>
+              <a:t>Skin</a:t>
+            </a:r>
+          </a:p>
+        </p:txBody>
+      </p:sp>
+      <p:sp>
+        <p:nvSpPr>
+          <p:cNvPr id="28" name="TextBox 27"/>
           <p:cNvSpPr txBox="1"/>
           <p:nvPr/>
         </p:nvSpPr>
         <p:spPr>
           <a:xfrm>
-            <a:off x="2551176" y="3602736"/>
-            <a:ext cx="7040880" cy="365760"/>
+            <a:off x="2697480" y="5166360"/>
+            <a:ext cx="3566160" cy="566928"/>
           </a:xfrm>
           <a:prstGeom prst="rect">
             <a:avLst/>
@@ -31614,27 +32454,27 @@
               </a:spcAft>
             </a:pPr>
             <a:r>
-              <a:rPr sz="1400" b="0" i="0">
+              <a:rPr sz="1250" b="0" i="0">
                 <a:solidFill>
                   <a:srgbClr val="263746"/>
                 </a:solidFill>
                 <a:latin typeface="Arial"/>
               </a:rPr>
-              <a:t>Plscr1 higher in skin; Klhl21 lower in eye</a:t>
-            </a:r>
-          </a:p>
-        </p:txBody>
-      </p:sp>
-      <p:sp>
-        <p:nvSpPr>
-          <p:cNvPr id="21" name="TextBox 20"/>
+              <a:t>[P] Plscr1 higher</a:t>
+            </a:r>
+          </a:p>
+        </p:txBody>
+      </p:sp>
+      <p:sp>
+        <p:nvSpPr>
+          <p:cNvPr id="29" name="TextBox 28"/>
           <p:cNvSpPr txBox="1"/>
           <p:nvPr/>
         </p:nvSpPr>
         <p:spPr>
           <a:xfrm>
-            <a:off x="9756648" y="3621024"/>
-            <a:ext cx="1682496" cy="310896"/>
+            <a:off x="6583680" y="5148072"/>
+            <a:ext cx="4754880" cy="603504"/>
           </a:xfrm>
           <a:prstGeom prst="rect">
             <a:avLst/>
@@ -31643,133 +32483,6 @@
         </p:spPr>
         <p:txBody>
           <a:bodyPr wrap="square" lIns="18288" rIns="18288" tIns="18288" bIns="18288" anchor="ctr">
-            <a:spAutoFit/>
-          </a:bodyPr>
-          <a:lstStyle/>
-          <a:p>
-            <a:pPr algn="ctr">
-              <a:spcAft>
-                <a:spcPts val="0"/>
-              </a:spcAft>
-            </a:pPr>
-            <a:r>
-              <a:rPr sz="1250" b="1" i="0">
-                <a:solidFill>
-                  <a:srgbClr val="D37B00"/>
-                </a:solidFill>
-                <a:latin typeface="Arial"/>
-              </a:rPr>
-              <a:t>Gene-level</a:t>
-            </a:r>
-          </a:p>
-        </p:txBody>
-      </p:sp>
-      <p:sp>
-        <p:nvSpPr>
-          <p:cNvPr id="22" name="Rectangle 21"/>
-          <p:cNvSpPr/>
-          <p:nvPr/>
-        </p:nvSpPr>
-        <p:spPr>
-          <a:xfrm>
-            <a:off x="393192" y="4288536"/>
-            <a:ext cx="11375136" cy="667512"/>
-          </a:xfrm>
-          <a:prstGeom prst="rect">
-            <a:avLst/>
-          </a:prstGeom>
-          <a:solidFill>
-            <a:srgbClr val="E8F3F1"/>
-          </a:solidFill>
-          <a:ln w="10160">
-            <a:solidFill>
-              <a:srgbClr val="DDE4E8"/>
-            </a:solidFill>
-          </a:ln>
-        </p:spPr>
-        <p:style>
-          <a:lnRef idx="1">
-            <a:schemeClr val="accent1"/>
-          </a:lnRef>
-          <a:fillRef idx="3">
-            <a:schemeClr val="accent1"/>
-          </a:fillRef>
-          <a:effectRef idx="2">
-            <a:schemeClr val="accent1"/>
-          </a:effectRef>
-          <a:fontRef idx="minor">
-            <a:schemeClr val="lt1"/>
-          </a:fontRef>
-        </p:style>
-        <p:txBody>
-          <a:bodyPr rtlCol="0" anchor="ctr"/>
-          <a:lstStyle/>
-          <a:p>
-            <a:pPr algn="ctr"/>
-          </a:p>
-        </p:txBody>
-      </p:sp>
-      <p:sp>
-        <p:nvSpPr>
-          <p:cNvPr id="23" name="Rectangle 22"/>
-          <p:cNvSpPr/>
-          <p:nvPr/>
-        </p:nvSpPr>
-        <p:spPr>
-          <a:xfrm>
-            <a:off x="393192" y="4288536"/>
-            <a:ext cx="73152" cy="667512"/>
-          </a:xfrm>
-          <a:prstGeom prst="rect">
-            <a:avLst/>
-          </a:prstGeom>
-          <a:solidFill>
-            <a:srgbClr val="178681"/>
-          </a:solidFill>
-          <a:ln>
-            <a:noFill/>
-          </a:ln>
-        </p:spPr>
-        <p:style>
-          <a:lnRef idx="1">
-            <a:schemeClr val="accent1"/>
-          </a:lnRef>
-          <a:fillRef idx="3">
-            <a:schemeClr val="accent1"/>
-          </a:fillRef>
-          <a:effectRef idx="2">
-            <a:schemeClr val="accent1"/>
-          </a:effectRef>
-          <a:fontRef idx="minor">
-            <a:schemeClr val="lt1"/>
-          </a:fontRef>
-        </p:style>
-        <p:txBody>
-          <a:bodyPr rtlCol="0" anchor="ctr"/>
-          <a:lstStyle/>
-          <a:p>
-            <a:pPr algn="ctr"/>
-          </a:p>
-        </p:txBody>
-      </p:sp>
-      <p:sp>
-        <p:nvSpPr>
-          <p:cNvPr id="24" name="TextBox 23"/>
-          <p:cNvSpPr txBox="1"/>
-          <p:nvPr/>
-        </p:nvSpPr>
-        <p:spPr>
-          <a:xfrm>
-            <a:off x="640080" y="4443983"/>
-            <a:ext cx="1938528" cy="310896"/>
-          </a:xfrm>
-          <a:prstGeom prst="rect">
-            <a:avLst/>
-          </a:prstGeom>
-          <a:noFill/>
-        </p:spPr>
-        <p:txBody>
-          <a:bodyPr wrap="square" lIns="18288" rIns="18288" tIns="18288" bIns="18288" anchor="t">
             <a:spAutoFit/>
           </a:bodyPr>
           <a:lstStyle/>
@@ -31780,27 +32493,27 @@
               </a:spcAft>
             </a:pPr>
             <a:r>
-              <a:rPr sz="1600" b="1" i="0">
-                <a:solidFill>
-                  <a:srgbClr val="178681"/>
-                </a:solidFill>
-                <a:latin typeface="Arial"/>
-              </a:rPr>
-              <a:t>Other muscle groups</a:t>
-            </a:r>
-          </a:p>
-        </p:txBody>
-      </p:sp>
-      <p:sp>
-        <p:nvSpPr>
-          <p:cNvPr id="25" name="TextBox 24"/>
+              <a:rPr sz="1220" b="0" i="0">
+                <a:solidFill>
+                  <a:srgbClr val="263746"/>
+                </a:solidFill>
+                <a:latin typeface="Arial"/>
+              </a:rPr>
+              <a:t>Interferon-linked skin candidate within broader cell-cycle and DNA-repair responses; a single-gene result.</a:t>
+            </a:r>
+          </a:p>
+        </p:txBody>
+      </p:sp>
+      <p:sp>
+        <p:nvSpPr>
+          <p:cNvPr id="30" name="TextBox 29"/>
           <p:cNvSpPr txBox="1"/>
           <p:nvPr/>
         </p:nvSpPr>
         <p:spPr>
           <a:xfrm>
-            <a:off x="2551176" y="4416551"/>
-            <a:ext cx="7040880" cy="365760"/>
+            <a:off x="329184" y="6510528"/>
+            <a:ext cx="10972800" cy="173736"/>
           </a:xfrm>
           <a:prstGeom prst="rect">
             <a:avLst/>
@@ -31819,296 +32532,13 @@
               </a:spcAft>
             </a:pPr>
             <a:r>
-              <a:rPr sz="1400" b="0" i="0">
-                <a:solidFill>
-                  <a:srgbClr val="263746"/>
-                </a:solidFill>
-                <a:latin typeface="Arial"/>
-              </a:rPr>
-              <a:t>Gastrocnemius 2 genes; tibialis anterior 4 genes</a:t>
-            </a:r>
-          </a:p>
-        </p:txBody>
-      </p:sp>
-      <p:sp>
-        <p:nvSpPr>
-          <p:cNvPr id="26" name="TextBox 25"/>
-          <p:cNvSpPr txBox="1"/>
-          <p:nvPr/>
-        </p:nvSpPr>
-        <p:spPr>
-          <a:xfrm>
-            <a:off x="9756648" y="4434840"/>
-            <a:ext cx="1682496" cy="310896"/>
-          </a:xfrm>
-          <a:prstGeom prst="rect">
-            <a:avLst/>
-          </a:prstGeom>
-          <a:noFill/>
-        </p:spPr>
-        <p:txBody>
-          <a:bodyPr wrap="square" lIns="18288" rIns="18288" tIns="18288" bIns="18288" anchor="ctr">
-            <a:spAutoFit/>
-          </a:bodyPr>
-          <a:lstStyle/>
-          <a:p>
-            <a:pPr algn="ctr">
-              <a:spcAft>
-                <a:spcPts val="0"/>
-              </a:spcAft>
-            </a:pPr>
-            <a:r>
-              <a:rPr sz="1250" b="1" i="0">
-                <a:solidFill>
-                  <a:srgbClr val="178681"/>
-                </a:solidFill>
-                <a:latin typeface="Arial"/>
-              </a:rPr>
-              <a:t>Gene-level</a:t>
-            </a:r>
-          </a:p>
-        </p:txBody>
-      </p:sp>
-      <p:sp>
-        <p:nvSpPr>
-          <p:cNvPr id="27" name="Rectangle 26"/>
-          <p:cNvSpPr/>
-          <p:nvPr/>
-        </p:nvSpPr>
-        <p:spPr>
-          <a:xfrm>
-            <a:off x="393192" y="5102352"/>
-            <a:ext cx="11375136" cy="667512"/>
-          </a:xfrm>
-          <a:prstGeom prst="rect">
-            <a:avLst/>
-          </a:prstGeom>
-          <a:solidFill>
-            <a:srgbClr val="F2F4F5"/>
-          </a:solidFill>
-          <a:ln w="10160">
-            <a:solidFill>
-              <a:srgbClr val="DDE4E8"/>
-            </a:solidFill>
-          </a:ln>
-        </p:spPr>
-        <p:style>
-          <a:lnRef idx="1">
-            <a:schemeClr val="accent1"/>
-          </a:lnRef>
-          <a:fillRef idx="3">
-            <a:schemeClr val="accent1"/>
-          </a:fillRef>
-          <a:effectRef idx="2">
-            <a:schemeClr val="accent1"/>
-          </a:effectRef>
-          <a:fontRef idx="minor">
-            <a:schemeClr val="lt1"/>
-          </a:fontRef>
-        </p:style>
-        <p:txBody>
-          <a:bodyPr rtlCol="0" anchor="ctr"/>
-          <a:lstStyle/>
-          <a:p>
-            <a:pPr algn="ctr"/>
-          </a:p>
-        </p:txBody>
-      </p:sp>
-      <p:sp>
-        <p:nvSpPr>
-          <p:cNvPr id="28" name="Rectangle 27"/>
-          <p:cNvSpPr/>
-          <p:nvPr/>
-        </p:nvSpPr>
-        <p:spPr>
-          <a:xfrm>
-            <a:off x="393192" y="5102352"/>
-            <a:ext cx="73152" cy="667512"/>
-          </a:xfrm>
-          <a:prstGeom prst="rect">
-            <a:avLst/>
-          </a:prstGeom>
-          <a:solidFill>
-            <a:srgbClr val="8A969E"/>
-          </a:solidFill>
-          <a:ln>
-            <a:noFill/>
-          </a:ln>
-        </p:spPr>
-        <p:style>
-          <a:lnRef idx="1">
-            <a:schemeClr val="accent1"/>
-          </a:lnRef>
-          <a:fillRef idx="3">
-            <a:schemeClr val="accent1"/>
-          </a:fillRef>
-          <a:effectRef idx="2">
-            <a:schemeClr val="accent1"/>
-          </a:effectRef>
-          <a:fontRef idx="minor">
-            <a:schemeClr val="lt1"/>
-          </a:fontRef>
-        </p:style>
-        <p:txBody>
-          <a:bodyPr rtlCol="0" anchor="ctr"/>
-          <a:lstStyle/>
-          <a:p>
-            <a:pPr algn="ctr"/>
-          </a:p>
-        </p:txBody>
-      </p:sp>
-      <p:sp>
-        <p:nvSpPr>
-          <p:cNvPr id="29" name="TextBox 28"/>
-          <p:cNvSpPr txBox="1"/>
-          <p:nvPr/>
-        </p:nvSpPr>
-        <p:spPr>
-          <a:xfrm>
-            <a:off x="640080" y="5257800"/>
-            <a:ext cx="1938528" cy="310896"/>
-          </a:xfrm>
-          <a:prstGeom prst="rect">
-            <a:avLst/>
-          </a:prstGeom>
-          <a:noFill/>
-        </p:spPr>
-        <p:txBody>
-          <a:bodyPr wrap="square" lIns="18288" rIns="18288" tIns="18288" bIns="18288" anchor="t">
-            <a:spAutoFit/>
-          </a:bodyPr>
-          <a:lstStyle/>
-          <a:p>
-            <a:pPr algn="l">
-              <a:spcAft>
-                <a:spcPts val="0"/>
-              </a:spcAft>
-            </a:pPr>
-            <a:r>
-              <a:rPr sz="1600" b="1" i="0">
+              <a:rPr sz="720" b="0" i="0">
                 <a:solidFill>
                   <a:srgbClr val="8A969E"/>
                 </a:solidFill>
                 <a:latin typeface="Arial"/>
               </a:rPr>
-              <a:t>Adrenal gland</a:t>
-            </a:r>
-          </a:p>
-        </p:txBody>
-      </p:sp>
-      <p:sp>
-        <p:nvSpPr>
-          <p:cNvPr id="30" name="TextBox 29"/>
-          <p:cNvSpPr txBox="1"/>
-          <p:nvPr/>
-        </p:nvSpPr>
-        <p:spPr>
-          <a:xfrm>
-            <a:off x="2551176" y="5230368"/>
-            <a:ext cx="7040880" cy="365760"/>
-          </a:xfrm>
-          <a:prstGeom prst="rect">
-            <a:avLst/>
-          </a:prstGeom>
-          <a:noFill/>
-        </p:spPr>
-        <p:txBody>
-          <a:bodyPr wrap="square" lIns="18288" rIns="18288" tIns="18288" bIns="18288" anchor="ctr">
-            <a:spAutoFit/>
-          </a:bodyPr>
-          <a:lstStyle/>
-          <a:p>
-            <a:pPr algn="l">
-              <a:spcAft>
-                <a:spcPts val="0"/>
-              </a:spcAft>
-            </a:pPr>
-            <a:r>
-              <a:rPr sz="1400" b="0" i="0">
-                <a:solidFill>
-                  <a:srgbClr val="263746"/>
-                </a:solidFill>
-                <a:latin typeface="Arial"/>
-              </a:rPr>
-              <a:t>Psmb8 and Tspan4 were lower in flight and literature unmatched</a:t>
-            </a:r>
-          </a:p>
-        </p:txBody>
-      </p:sp>
-      <p:sp>
-        <p:nvSpPr>
-          <p:cNvPr id="31" name="TextBox 30"/>
-          <p:cNvSpPr txBox="1"/>
-          <p:nvPr/>
-        </p:nvSpPr>
-        <p:spPr>
-          <a:xfrm>
-            <a:off x="9756648" y="5248656"/>
-            <a:ext cx="1682496" cy="310896"/>
-          </a:xfrm>
-          <a:prstGeom prst="rect">
-            <a:avLst/>
-          </a:prstGeom>
-          <a:noFill/>
-        </p:spPr>
-        <p:txBody>
-          <a:bodyPr wrap="square" lIns="18288" rIns="18288" tIns="18288" bIns="18288" anchor="ctr">
-            <a:spAutoFit/>
-          </a:bodyPr>
-          <a:lstStyle/>
-          <a:p>
-            <a:pPr algn="ctr">
-              <a:spcAft>
-                <a:spcPts val="0"/>
-              </a:spcAft>
-            </a:pPr>
-            <a:r>
-              <a:rPr sz="1250" b="1" i="0">
-                <a:solidFill>
-                  <a:srgbClr val="8A969E"/>
-                </a:solidFill>
-                <a:latin typeface="Arial"/>
-              </a:rPr>
-              <a:t>Unmatched</a:t>
-            </a:r>
-          </a:p>
-        </p:txBody>
-      </p:sp>
-      <p:sp>
-        <p:nvSpPr>
-          <p:cNvPr id="32" name="TextBox 31"/>
-          <p:cNvSpPr txBox="1"/>
-          <p:nvPr/>
-        </p:nvSpPr>
-        <p:spPr>
-          <a:xfrm>
-            <a:off x="685800" y="6035040"/>
-            <a:ext cx="10789920" cy="301752"/>
-          </a:xfrm>
-          <a:prstGeom prst="rect">
-            <a:avLst/>
-          </a:prstGeom>
-          <a:noFill/>
-        </p:spPr>
-        <p:txBody>
-          <a:bodyPr wrap="square" lIns="18288" rIns="18288" tIns="18288" bIns="18288" anchor="t">
-            <a:spAutoFit/>
-          </a:bodyPr>
-          <a:lstStyle/>
-          <a:p>
-            <a:pPr algn="ctr">
-              <a:spcAft>
-                <a:spcPts val="0"/>
-              </a:spcAft>
-            </a:pPr>
-            <a:r>
-              <a:rPr sz="1400" b="0" i="1">
-                <a:solidFill>
-                  <a:srgbClr val="59697A"/>
-                </a:solidFill>
-                <a:latin typeface="Arial"/>
-              </a:rPr>
-              <a:t>These findings remain available for follow-up without displacing the stronger thymus and soleus programs.</a:t>
+              <a:t>[P] promoted; [R] reinforced. All listed effects passed BH FDR in observed OSDR profiles.</a:t>
             </a:r>
           </a:p>
         </p:txBody>
@@ -32199,7 +32629,7 @@
                 </a:solidFill>
                 <a:latin typeface="Arial"/>
               </a:rPr>
-              <a:t>TAKEAWAYS</a:t>
+              <a:t>ADDITIONAL FINDINGS II</a:t>
             </a:r>
           </a:p>
         </p:txBody>
@@ -32238,7 +32668,7 @@
                 </a:solidFill>
                 <a:latin typeface="Arial"/>
               </a:rPr>
-              <a:t>Synthetic data helped most as a tissue-specific prior</a:t>
+              <a:t>Eye, adrenal and muscle-group results remain tissue-specific</a:t>
             </a:r>
           </a:p>
         </p:txBody>
@@ -32277,23 +32707,550 @@
                 </a:solidFill>
                 <a:latin typeface="Arial"/>
               </a:rPr>
-              <a:t>The generator created useful structure, not new biological replication.</a:t>
-            </a:r>
-          </a:p>
-        </p:txBody>
-      </p:sp>
-      <p:sp>
-        <p:nvSpPr>
-          <p:cNvPr id="7" name="Rounded Rectangle 6"/>
+              <a:t>Each row reports its own selected genes and the narrowest supported interpretation.</a:t>
+            </a:r>
+          </a:p>
+        </p:txBody>
+      </p:sp>
+      <p:sp>
+        <p:nvSpPr>
+          <p:cNvPr id="7" name="TextBox 6"/>
+          <p:cNvSpPr txBox="1"/>
+          <p:nvPr/>
+        </p:nvSpPr>
+        <p:spPr>
+          <a:xfrm>
+            <a:off x="658368" y="1828800"/>
+            <a:ext cx="1874519" cy="256032"/>
+          </a:xfrm>
+          <a:prstGeom prst="rect">
+            <a:avLst/>
+          </a:prstGeom>
+          <a:noFill/>
+        </p:spPr>
+        <p:txBody>
+          <a:bodyPr wrap="square" lIns="18288" rIns="18288" tIns="18288" bIns="18288" anchor="t">
+            <a:spAutoFit/>
+          </a:bodyPr>
+          <a:lstStyle/>
+          <a:p>
+            <a:pPr algn="l">
+              <a:spcAft>
+                <a:spcPts val="0"/>
+              </a:spcAft>
+            </a:pPr>
+            <a:r>
+              <a:rPr sz="1150" b="1" i="0">
+                <a:solidFill>
+                  <a:srgbClr val="59697A"/>
+                </a:solidFill>
+                <a:latin typeface="Arial"/>
+              </a:rPr>
+              <a:t>Analysis unit</a:t>
+            </a:r>
+          </a:p>
+        </p:txBody>
+      </p:sp>
+      <p:sp>
+        <p:nvSpPr>
+          <p:cNvPr id="8" name="TextBox 7"/>
+          <p:cNvSpPr txBox="1"/>
+          <p:nvPr/>
+        </p:nvSpPr>
+        <p:spPr>
+          <a:xfrm>
+            <a:off x="2697480" y="1828800"/>
+            <a:ext cx="3566160" cy="256032"/>
+          </a:xfrm>
+          <a:prstGeom prst="rect">
+            <a:avLst/>
+          </a:prstGeom>
+          <a:noFill/>
+        </p:spPr>
+        <p:txBody>
+          <a:bodyPr wrap="square" lIns="18288" rIns="18288" tIns="18288" bIns="18288" anchor="t">
+            <a:spAutoFit/>
+          </a:bodyPr>
+          <a:lstStyle/>
+          <a:p>
+            <a:pPr algn="l">
+              <a:spcAft>
+                <a:spcPts val="0"/>
+              </a:spcAft>
+            </a:pPr>
+            <a:r>
+              <a:rPr sz="1150" b="1" i="0">
+                <a:solidFill>
+                  <a:srgbClr val="59697A"/>
+                </a:solidFill>
+                <a:latin typeface="Arial"/>
+              </a:rPr>
+              <a:t>Synthetic-informed genes</a:t>
+            </a:r>
+          </a:p>
+        </p:txBody>
+      </p:sp>
+      <p:sp>
+        <p:nvSpPr>
+          <p:cNvPr id="9" name="TextBox 8"/>
+          <p:cNvSpPr txBox="1"/>
+          <p:nvPr/>
+        </p:nvSpPr>
+        <p:spPr>
+          <a:xfrm>
+            <a:off x="6583680" y="1828800"/>
+            <a:ext cx="4663440" cy="256032"/>
+          </a:xfrm>
+          <a:prstGeom prst="rect">
+            <a:avLst/>
+          </a:prstGeom>
+          <a:noFill/>
+        </p:spPr>
+        <p:txBody>
+          <a:bodyPr wrap="square" lIns="18288" rIns="18288" tIns="18288" bIns="18288" anchor="t">
+            <a:spAutoFit/>
+          </a:bodyPr>
+          <a:lstStyle/>
+          <a:p>
+            <a:pPr algn="l">
+              <a:spcAft>
+                <a:spcPts val="0"/>
+              </a:spcAft>
+            </a:pPr>
+            <a:r>
+              <a:rPr sz="1150" b="1" i="0">
+                <a:solidFill>
+                  <a:srgbClr val="59697A"/>
+                </a:solidFill>
+                <a:latin typeface="Arial"/>
+              </a:rPr>
+              <a:t>Interpretation</a:t>
+            </a:r>
+          </a:p>
+        </p:txBody>
+      </p:sp>
+      <p:sp>
+        <p:nvSpPr>
+          <p:cNvPr id="10" name="Rectangle 9"/>
           <p:cNvSpPr/>
           <p:nvPr/>
         </p:nvSpPr>
         <p:spPr>
           <a:xfrm>
-            <a:off x="384048" y="1920240"/>
-            <a:ext cx="3419856" cy="2487168"/>
-          </a:xfrm>
-          <a:prstGeom prst="roundRect">
+            <a:off x="393192" y="2148840"/>
+            <a:ext cx="11375136" cy="804672"/>
+          </a:xfrm>
+          <a:prstGeom prst="rect">
+            <a:avLst/>
+          </a:prstGeom>
+          <a:solidFill>
+            <a:srgbClr val="ECF4ED"/>
+          </a:solidFill>
+          <a:ln w="10160">
+            <a:solidFill>
+              <a:srgbClr val="DDE4E8"/>
+            </a:solidFill>
+          </a:ln>
+        </p:spPr>
+        <p:style>
+          <a:lnRef idx="1">
+            <a:schemeClr val="accent1"/>
+          </a:lnRef>
+          <a:fillRef idx="3">
+            <a:schemeClr val="accent1"/>
+          </a:fillRef>
+          <a:effectRef idx="2">
+            <a:schemeClr val="accent1"/>
+          </a:effectRef>
+          <a:fontRef idx="minor">
+            <a:schemeClr val="lt1"/>
+          </a:fontRef>
+        </p:style>
+        <p:txBody>
+          <a:bodyPr rtlCol="0" anchor="ctr"/>
+          <a:lstStyle/>
+          <a:p>
+            <a:pPr algn="ctr"/>
+          </a:p>
+        </p:txBody>
+      </p:sp>
+      <p:sp>
+        <p:nvSpPr>
+          <p:cNvPr id="11" name="Rectangle 10"/>
+          <p:cNvSpPr/>
+          <p:nvPr/>
+        </p:nvSpPr>
+        <p:spPr>
+          <a:xfrm>
+            <a:off x="393192" y="2148840"/>
+            <a:ext cx="73152" cy="804672"/>
+          </a:xfrm>
+          <a:prstGeom prst="rect">
+            <a:avLst/>
+          </a:prstGeom>
+          <a:solidFill>
+            <a:srgbClr val="478A64"/>
+          </a:solidFill>
+          <a:ln>
+            <a:noFill/>
+          </a:ln>
+        </p:spPr>
+        <p:style>
+          <a:lnRef idx="1">
+            <a:schemeClr val="accent1"/>
+          </a:lnRef>
+          <a:fillRef idx="3">
+            <a:schemeClr val="accent1"/>
+          </a:fillRef>
+          <a:effectRef idx="2">
+            <a:schemeClr val="accent1"/>
+          </a:effectRef>
+          <a:fontRef idx="minor">
+            <a:schemeClr val="lt1"/>
+          </a:fontRef>
+        </p:style>
+        <p:txBody>
+          <a:bodyPr rtlCol="0" anchor="ctr"/>
+          <a:lstStyle/>
+          <a:p>
+            <a:pPr algn="ctr"/>
+          </a:p>
+        </p:txBody>
+      </p:sp>
+      <p:sp>
+        <p:nvSpPr>
+          <p:cNvPr id="12" name="TextBox 11"/>
+          <p:cNvSpPr txBox="1"/>
+          <p:nvPr/>
+        </p:nvSpPr>
+        <p:spPr>
+          <a:xfrm>
+            <a:off x="658368" y="2331720"/>
+            <a:ext cx="1874519" cy="402336"/>
+          </a:xfrm>
+          <a:prstGeom prst="rect">
+            <a:avLst/>
+          </a:prstGeom>
+          <a:noFill/>
+        </p:spPr>
+        <p:txBody>
+          <a:bodyPr wrap="square" lIns="18288" rIns="18288" tIns="18288" bIns="18288" anchor="ctr">
+            <a:spAutoFit/>
+          </a:bodyPr>
+          <a:lstStyle/>
+          <a:p>
+            <a:pPr algn="l">
+              <a:spcAft>
+                <a:spcPts val="0"/>
+              </a:spcAft>
+            </a:pPr>
+            <a:r>
+              <a:rPr sz="1550" b="1" i="0">
+                <a:solidFill>
+                  <a:srgbClr val="478A64"/>
+                </a:solidFill>
+                <a:latin typeface="Arial"/>
+              </a:rPr>
+              <a:t>Eye</a:t>
+            </a:r>
+          </a:p>
+        </p:txBody>
+      </p:sp>
+      <p:sp>
+        <p:nvSpPr>
+          <p:cNvPr id="13" name="TextBox 12"/>
+          <p:cNvSpPr txBox="1"/>
+          <p:nvPr/>
+        </p:nvSpPr>
+        <p:spPr>
+          <a:xfrm>
+            <a:off x="2697480" y="2258568"/>
+            <a:ext cx="3566160" cy="566928"/>
+          </a:xfrm>
+          <a:prstGeom prst="rect">
+            <a:avLst/>
+          </a:prstGeom>
+          <a:noFill/>
+        </p:spPr>
+        <p:txBody>
+          <a:bodyPr wrap="square" lIns="18288" rIns="18288" tIns="18288" bIns="18288" anchor="ctr">
+            <a:spAutoFit/>
+          </a:bodyPr>
+          <a:lstStyle/>
+          <a:p>
+            <a:pPr algn="l">
+              <a:spcAft>
+                <a:spcPts val="0"/>
+              </a:spcAft>
+            </a:pPr>
+            <a:r>
+              <a:rPr sz="1250" b="0" i="0">
+                <a:solidFill>
+                  <a:srgbClr val="263746"/>
+                </a:solidFill>
+                <a:latin typeface="Arial"/>
+              </a:rPr>
+              <a:t>[R] Klhl21 lower</a:t>
+            </a:r>
+          </a:p>
+        </p:txBody>
+      </p:sp>
+      <p:sp>
+        <p:nvSpPr>
+          <p:cNvPr id="14" name="TextBox 13"/>
+          <p:cNvSpPr txBox="1"/>
+          <p:nvPr/>
+        </p:nvSpPr>
+        <p:spPr>
+          <a:xfrm>
+            <a:off x="6583680" y="2240280"/>
+            <a:ext cx="4754880" cy="603504"/>
+          </a:xfrm>
+          <a:prstGeom prst="rect">
+            <a:avLst/>
+          </a:prstGeom>
+          <a:noFill/>
+        </p:spPr>
+        <p:txBody>
+          <a:bodyPr wrap="square" lIns="18288" rIns="18288" tIns="18288" bIns="18288" anchor="ctr">
+            <a:spAutoFit/>
+          </a:bodyPr>
+          <a:lstStyle/>
+          <a:p>
+            <a:pPr algn="l">
+              <a:spcAft>
+                <a:spcPts val="0"/>
+              </a:spcAft>
+            </a:pPr>
+            <a:r>
+              <a:rPr sz="1220" b="0" i="0">
+                <a:solidFill>
+                  <a:srgbClr val="263746"/>
+                </a:solidFill>
+                <a:latin typeface="Arial"/>
+              </a:rPr>
+              <a:t>Process-level alignment with lower proliferation and cytokinesis in flight eye tissue; not an exact prior gene replication.</a:t>
+            </a:r>
+          </a:p>
+        </p:txBody>
+      </p:sp>
+      <p:sp>
+        <p:nvSpPr>
+          <p:cNvPr id="15" name="Rectangle 14"/>
+          <p:cNvSpPr/>
+          <p:nvPr/>
+        </p:nvSpPr>
+        <p:spPr>
+          <a:xfrm>
+            <a:off x="393192" y="3118104"/>
+            <a:ext cx="11375136" cy="804672"/>
+          </a:xfrm>
+          <a:prstGeom prst="rect">
+            <a:avLst/>
+          </a:prstGeom>
+          <a:solidFill>
+            <a:srgbClr val="F2F4F5"/>
+          </a:solidFill>
+          <a:ln w="10160">
+            <a:solidFill>
+              <a:srgbClr val="DDE4E8"/>
+            </a:solidFill>
+          </a:ln>
+        </p:spPr>
+        <p:style>
+          <a:lnRef idx="1">
+            <a:schemeClr val="accent1"/>
+          </a:lnRef>
+          <a:fillRef idx="3">
+            <a:schemeClr val="accent1"/>
+          </a:fillRef>
+          <a:effectRef idx="2">
+            <a:schemeClr val="accent1"/>
+          </a:effectRef>
+          <a:fontRef idx="minor">
+            <a:schemeClr val="lt1"/>
+          </a:fontRef>
+        </p:style>
+        <p:txBody>
+          <a:bodyPr rtlCol="0" anchor="ctr"/>
+          <a:lstStyle/>
+          <a:p>
+            <a:pPr algn="ctr"/>
+          </a:p>
+        </p:txBody>
+      </p:sp>
+      <p:sp>
+        <p:nvSpPr>
+          <p:cNvPr id="16" name="Rectangle 15"/>
+          <p:cNvSpPr/>
+          <p:nvPr/>
+        </p:nvSpPr>
+        <p:spPr>
+          <a:xfrm>
+            <a:off x="393192" y="3118104"/>
+            <a:ext cx="73152" cy="804672"/>
+          </a:xfrm>
+          <a:prstGeom prst="rect">
+            <a:avLst/>
+          </a:prstGeom>
+          <a:solidFill>
+            <a:srgbClr val="8A969E"/>
+          </a:solidFill>
+          <a:ln>
+            <a:noFill/>
+          </a:ln>
+        </p:spPr>
+        <p:style>
+          <a:lnRef idx="1">
+            <a:schemeClr val="accent1"/>
+          </a:lnRef>
+          <a:fillRef idx="3">
+            <a:schemeClr val="accent1"/>
+          </a:fillRef>
+          <a:effectRef idx="2">
+            <a:schemeClr val="accent1"/>
+          </a:effectRef>
+          <a:fontRef idx="minor">
+            <a:schemeClr val="lt1"/>
+          </a:fontRef>
+        </p:style>
+        <p:txBody>
+          <a:bodyPr rtlCol="0" anchor="ctr"/>
+          <a:lstStyle/>
+          <a:p>
+            <a:pPr algn="ctr"/>
+          </a:p>
+        </p:txBody>
+      </p:sp>
+      <p:sp>
+        <p:nvSpPr>
+          <p:cNvPr id="17" name="TextBox 16"/>
+          <p:cNvSpPr txBox="1"/>
+          <p:nvPr/>
+        </p:nvSpPr>
+        <p:spPr>
+          <a:xfrm>
+            <a:off x="658368" y="3300984"/>
+            <a:ext cx="1874519" cy="402336"/>
+          </a:xfrm>
+          <a:prstGeom prst="rect">
+            <a:avLst/>
+          </a:prstGeom>
+          <a:noFill/>
+        </p:spPr>
+        <p:txBody>
+          <a:bodyPr wrap="square" lIns="18288" rIns="18288" tIns="18288" bIns="18288" anchor="ctr">
+            <a:spAutoFit/>
+          </a:bodyPr>
+          <a:lstStyle/>
+          <a:p>
+            <a:pPr algn="l">
+              <a:spcAft>
+                <a:spcPts val="0"/>
+              </a:spcAft>
+            </a:pPr>
+            <a:r>
+              <a:rPr sz="1550" b="1" i="0">
+                <a:solidFill>
+                  <a:srgbClr val="8A969E"/>
+                </a:solidFill>
+                <a:latin typeface="Arial"/>
+              </a:rPr>
+              <a:t>Adrenal gland</a:t>
+            </a:r>
+          </a:p>
+        </p:txBody>
+      </p:sp>
+      <p:sp>
+        <p:nvSpPr>
+          <p:cNvPr id="18" name="TextBox 17"/>
+          <p:cNvSpPr txBox="1"/>
+          <p:nvPr/>
+        </p:nvSpPr>
+        <p:spPr>
+          <a:xfrm>
+            <a:off x="2697480" y="3227832"/>
+            <a:ext cx="3566160" cy="566928"/>
+          </a:xfrm>
+          <a:prstGeom prst="rect">
+            <a:avLst/>
+          </a:prstGeom>
+          <a:noFill/>
+        </p:spPr>
+        <p:txBody>
+          <a:bodyPr wrap="square" lIns="18288" rIns="18288" tIns="18288" bIns="18288" anchor="ctr">
+            <a:spAutoFit/>
+          </a:bodyPr>
+          <a:lstStyle/>
+          <a:p>
+            <a:pPr algn="l">
+              <a:spcAft>
+                <a:spcPts val="0"/>
+              </a:spcAft>
+            </a:pPr>
+            <a:r>
+              <a:rPr sz="1250" b="0" i="0">
+                <a:solidFill>
+                  <a:srgbClr val="263746"/>
+                </a:solidFill>
+                <a:latin typeface="Arial"/>
+              </a:rPr>
+              <a:t>[P] Psmb8 lower; [R] Tspan4 lower</a:t>
+            </a:r>
+          </a:p>
+        </p:txBody>
+      </p:sp>
+      <p:sp>
+        <p:nvSpPr>
+          <p:cNvPr id="19" name="TextBox 18"/>
+          <p:cNvSpPr txBox="1"/>
+          <p:nvPr/>
+        </p:nvSpPr>
+        <p:spPr>
+          <a:xfrm>
+            <a:off x="6583680" y="3209544"/>
+            <a:ext cx="4754880" cy="603504"/>
+          </a:xfrm>
+          <a:prstGeom prst="rect">
+            <a:avLst/>
+          </a:prstGeom>
+          <a:noFill/>
+        </p:spPr>
+        <p:txBody>
+          <a:bodyPr wrap="square" lIns="18288" rIns="18288" tIns="18288" bIns="18288" anchor="ctr">
+            <a:spAutoFit/>
+          </a:bodyPr>
+          <a:lstStyle/>
+          <a:p>
+            <a:pPr algn="l">
+              <a:spcAft>
+                <a:spcPts val="0"/>
+              </a:spcAft>
+            </a:pPr>
+            <a:r>
+              <a:rPr sz="1220" b="0" i="0">
+                <a:solidFill>
+                  <a:srgbClr val="263746"/>
+                </a:solidFill>
+                <a:latin typeface="Arial"/>
+              </a:rPr>
+              <a:t>Literature-unmatched immune, proteostasis or tissue-composition candidates; no adrenal mechanism is established.</a:t>
+            </a:r>
+          </a:p>
+        </p:txBody>
+      </p:sp>
+      <p:sp>
+        <p:nvSpPr>
+          <p:cNvPr id="20" name="Rectangle 19"/>
+          <p:cNvSpPr/>
+          <p:nvPr/>
+        </p:nvSpPr>
+        <p:spPr>
+          <a:xfrm>
+            <a:off x="393192" y="4087368"/>
+            <a:ext cx="11375136" cy="804672"/>
+          </a:xfrm>
+          <a:prstGeom prst="rect">
             <a:avLst/>
           </a:prstGeom>
           <a:solidFill>
@@ -32301,7 +33258,7 @@
           </a:solidFill>
           <a:ln w="10160">
             <a:solidFill>
-              <a:srgbClr val="2D6496"/>
+              <a:srgbClr val="DDE4E8"/>
             </a:solidFill>
           </a:ln>
         </p:spPr>
@@ -32329,16 +33286,16 @@
       </p:sp>
       <p:sp>
         <p:nvSpPr>
-          <p:cNvPr id="8" name="Oval 7"/>
+          <p:cNvPr id="21" name="Rectangle 20"/>
           <p:cNvSpPr/>
           <p:nvPr/>
         </p:nvSpPr>
         <p:spPr>
           <a:xfrm>
-            <a:off x="621792" y="2167128"/>
-            <a:ext cx="475488" cy="475488"/>
-          </a:xfrm>
-          <a:prstGeom prst="ellipse">
+            <a:off x="393192" y="4087368"/>
+            <a:ext cx="73152" cy="804672"/>
+          </a:xfrm>
+          <a:prstGeom prst="rect">
             <a:avLst/>
           </a:prstGeom>
           <a:solidFill>
@@ -32372,14 +33329,14 @@
       </p:sp>
       <p:sp>
         <p:nvSpPr>
-          <p:cNvPr id="9" name="TextBox 8"/>
+          <p:cNvPr id="22" name="TextBox 21"/>
           <p:cNvSpPr txBox="1"/>
           <p:nvPr/>
         </p:nvSpPr>
         <p:spPr>
           <a:xfrm>
-            <a:off x="621792" y="2221992"/>
-            <a:ext cx="475488" cy="274320"/>
+            <a:off x="658368" y="4270248"/>
+            <a:ext cx="1874519" cy="402336"/>
           </a:xfrm>
           <a:prstGeom prst="rect">
             <a:avLst/>
@@ -32387,46 +33344,7 @@
           <a:noFill/>
         </p:spPr>
         <p:txBody>
-          <a:bodyPr wrap="square" lIns="18288" rIns="18288" tIns="18288" bIns="18288" anchor="t">
-            <a:spAutoFit/>
-          </a:bodyPr>
-          <a:lstStyle/>
-          <a:p>
-            <a:pPr algn="ctr">
-              <a:spcAft>
-                <a:spcPts val="0"/>
-              </a:spcAft>
-            </a:pPr>
-            <a:r>
-              <a:rPr sz="1600" b="1" i="0">
-                <a:solidFill>
-                  <a:srgbClr val="FFFFFF"/>
-                </a:solidFill>
-                <a:latin typeface="Arial"/>
-              </a:rPr>
-              <a:t>1</a:t>
-            </a:r>
-          </a:p>
-        </p:txBody>
-      </p:sp>
-      <p:sp>
-        <p:nvSpPr>
-          <p:cNvPr id="10" name="TextBox 9"/>
-          <p:cNvSpPr txBox="1"/>
-          <p:nvPr/>
-        </p:nvSpPr>
-        <p:spPr>
-          <a:xfrm>
-            <a:off x="1216152" y="2176272"/>
-            <a:ext cx="2240280" cy="329184"/>
-          </a:xfrm>
-          <a:prstGeom prst="rect">
-            <a:avLst/>
-          </a:prstGeom>
-          <a:noFill/>
-        </p:spPr>
-        <p:txBody>
-          <a:bodyPr wrap="square" lIns="18288" rIns="18288" tIns="18288" bIns="18288" anchor="t">
+          <a:bodyPr wrap="square" lIns="18288" rIns="18288" tIns="18288" bIns="18288" anchor="ctr">
             <a:spAutoFit/>
           </a:bodyPr>
           <a:lstStyle/>
@@ -32437,27 +33355,27 @@
               </a:spcAft>
             </a:pPr>
             <a:r>
-              <a:rPr sz="1900" b="1" i="0">
+              <a:rPr sz="1550" b="1" i="0">
                 <a:solidFill>
                   <a:srgbClr val="2D6496"/>
                 </a:solidFill>
                 <a:latin typeface="Arial"/>
               </a:rPr>
-              <a:t>Generate</a:t>
-            </a:r>
-          </a:p>
-        </p:txBody>
-      </p:sp>
-      <p:sp>
-        <p:nvSpPr>
-          <p:cNvPr id="11" name="TextBox 10"/>
+              <a:t>Gastrocnemius</a:t>
+            </a:r>
+          </a:p>
+        </p:txBody>
+      </p:sp>
+      <p:sp>
+        <p:nvSpPr>
+          <p:cNvPr id="23" name="TextBox 22"/>
           <p:cNvSpPr txBox="1"/>
           <p:nvPr/>
         </p:nvSpPr>
         <p:spPr>
           <a:xfrm>
-            <a:off x="640080" y="2816352"/>
-            <a:ext cx="2880360" cy="1216152"/>
+            <a:off x="2697480" y="4197096"/>
+            <a:ext cx="3566160" cy="566928"/>
           </a:xfrm>
           <a:prstGeom prst="rect">
             <a:avLst/>
@@ -32465,7 +33383,7 @@
           <a:noFill/>
         </p:spPr>
         <p:txBody>
-          <a:bodyPr wrap="square" lIns="18288" rIns="18288" tIns="18288" bIns="18288" anchor="t">
+          <a:bodyPr wrap="square" lIns="18288" rIns="18288" tIns="18288" bIns="18288" anchor="ctr">
             <a:spAutoFit/>
           </a:bodyPr>
           <a:lstStyle/>
@@ -32476,29 +33394,68 @@
               </a:spcAft>
             </a:pPr>
             <a:r>
-              <a:rPr sz="1500" b="0" i="0">
+              <a:rPr sz="1250" b="0" i="0">
                 <a:solidFill>
                   <a:srgbClr val="263746"/>
                 </a:solidFill>
                 <a:latin typeface="Arial"/>
               </a:rPr>
-              <a:t>Conditional DDIM produced high-fidelity profiles with near-chance real-versus-synthetic separation.</a:t>
-            </a:r>
-          </a:p>
-        </p:txBody>
-      </p:sp>
-      <p:sp>
-        <p:nvSpPr>
-          <p:cNvPr id="12" name="Rounded Rectangle 11"/>
+              <a:t>[P] Nfkbia higher; [P] Fhl2 lower</a:t>
+            </a:r>
+          </a:p>
+        </p:txBody>
+      </p:sp>
+      <p:sp>
+        <p:nvSpPr>
+          <p:cNvPr id="24" name="TextBox 23"/>
+          <p:cNvSpPr txBox="1"/>
+          <p:nvPr/>
+        </p:nvSpPr>
+        <p:spPr>
+          <a:xfrm>
+            <a:off x="6583680" y="4178808"/>
+            <a:ext cx="4754880" cy="603504"/>
+          </a:xfrm>
+          <a:prstGeom prst="rect">
+            <a:avLst/>
+          </a:prstGeom>
+          <a:noFill/>
+        </p:spPr>
+        <p:txBody>
+          <a:bodyPr wrap="square" lIns="18288" rIns="18288" tIns="18288" bIns="18288" anchor="ctr">
+            <a:spAutoFit/>
+          </a:bodyPr>
+          <a:lstStyle/>
+          <a:p>
+            <a:pPr algn="l">
+              <a:spcAft>
+                <a:spcPts val="0"/>
+              </a:spcAft>
+            </a:pPr>
+            <a:r>
+              <a:rPr sz="1220" b="0" i="0">
+                <a:solidFill>
+                  <a:srgbClr val="263746"/>
+                </a:solidFill>
+                <a:latin typeface="Arial"/>
+              </a:rPr>
+              <a:t>NF-kappaB stress alignment plus an autophagy or myogenesis candidate; the two genes do not form a coherent pathway.</a:t>
+            </a:r>
+          </a:p>
+        </p:txBody>
+      </p:sp>
+      <p:sp>
+        <p:nvSpPr>
+          <p:cNvPr id="25" name="Rectangle 24"/>
           <p:cNvSpPr/>
           <p:nvPr/>
         </p:nvSpPr>
         <p:spPr>
           <a:xfrm>
-            <a:off x="4059936" y="1920240"/>
-            <a:ext cx="3419856" cy="2487168"/>
-          </a:xfrm>
-          <a:prstGeom prst="roundRect">
+            <a:off x="393192" y="5056632"/>
+            <a:ext cx="11375136" cy="804672"/>
+          </a:xfrm>
+          <a:prstGeom prst="rect">
             <a:avLst/>
           </a:prstGeom>
           <a:solidFill>
@@ -32506,7 +33463,7 @@
           </a:solidFill>
           <a:ln w="10160">
             <a:solidFill>
-              <a:srgbClr val="178681"/>
+              <a:srgbClr val="DDE4E8"/>
             </a:solidFill>
           </a:ln>
         </p:spPr>
@@ -32534,16 +33491,16 @@
       </p:sp>
       <p:sp>
         <p:nvSpPr>
-          <p:cNvPr id="13" name="Oval 12"/>
+          <p:cNvPr id="26" name="Rectangle 25"/>
           <p:cNvSpPr/>
           <p:nvPr/>
         </p:nvSpPr>
         <p:spPr>
           <a:xfrm>
-            <a:off x="4297680" y="2167128"/>
-            <a:ext cx="475488" cy="475488"/>
-          </a:xfrm>
-          <a:prstGeom prst="ellipse">
+            <a:off x="393192" y="5056632"/>
+            <a:ext cx="73152" cy="804672"/>
+          </a:xfrm>
+          <a:prstGeom prst="rect">
             <a:avLst/>
           </a:prstGeom>
           <a:solidFill>
@@ -32577,14 +33534,14 @@
       </p:sp>
       <p:sp>
         <p:nvSpPr>
-          <p:cNvPr id="14" name="TextBox 13"/>
+          <p:cNvPr id="27" name="TextBox 26"/>
           <p:cNvSpPr txBox="1"/>
           <p:nvPr/>
         </p:nvSpPr>
         <p:spPr>
           <a:xfrm>
-            <a:off x="4297680" y="2221992"/>
-            <a:ext cx="475488" cy="274320"/>
+            <a:off x="658368" y="5239512"/>
+            <a:ext cx="1874519" cy="402336"/>
           </a:xfrm>
           <a:prstGeom prst="rect">
             <a:avLst/>
@@ -32592,46 +33549,7 @@
           <a:noFill/>
         </p:spPr>
         <p:txBody>
-          <a:bodyPr wrap="square" lIns="18288" rIns="18288" tIns="18288" bIns="18288" anchor="t">
-            <a:spAutoFit/>
-          </a:bodyPr>
-          <a:lstStyle/>
-          <a:p>
-            <a:pPr algn="ctr">
-              <a:spcAft>
-                <a:spcPts val="0"/>
-              </a:spcAft>
-            </a:pPr>
-            <a:r>
-              <a:rPr sz="1600" b="1" i="0">
-                <a:solidFill>
-                  <a:srgbClr val="FFFFFF"/>
-                </a:solidFill>
-                <a:latin typeface="Arial"/>
-              </a:rPr>
-              <a:t>2</a:t>
-            </a:r>
-          </a:p>
-        </p:txBody>
-      </p:sp>
-      <p:sp>
-        <p:nvSpPr>
-          <p:cNvPr id="15" name="TextBox 14"/>
-          <p:cNvSpPr txBox="1"/>
-          <p:nvPr/>
-        </p:nvSpPr>
-        <p:spPr>
-          <a:xfrm>
-            <a:off x="4892040" y="2176272"/>
-            <a:ext cx="2240280" cy="329184"/>
-          </a:xfrm>
-          <a:prstGeom prst="rect">
-            <a:avLst/>
-          </a:prstGeom>
-          <a:noFill/>
-        </p:spPr>
-        <p:txBody>
-          <a:bodyPr wrap="square" lIns="18288" rIns="18288" tIns="18288" bIns="18288" anchor="t">
+          <a:bodyPr wrap="square" lIns="18288" rIns="18288" tIns="18288" bIns="18288" anchor="ctr">
             <a:spAutoFit/>
           </a:bodyPr>
           <a:lstStyle/>
@@ -32642,27 +33560,27 @@
               </a:spcAft>
             </a:pPr>
             <a:r>
-              <a:rPr sz="1900" b="1" i="0">
+              <a:rPr sz="1550" b="1" i="0">
                 <a:solidFill>
                   <a:srgbClr val="178681"/>
                 </a:solidFill>
                 <a:latin typeface="Arial"/>
               </a:rPr>
-              <a:t>Use</a:t>
-            </a:r>
-          </a:p>
-        </p:txBody>
-      </p:sp>
-      <p:sp>
-        <p:nvSpPr>
-          <p:cNvPr id="16" name="TextBox 15"/>
+              <a:t>Tibialis anterior</a:t>
+            </a:r>
+          </a:p>
+        </p:txBody>
+      </p:sp>
+      <p:sp>
+        <p:nvSpPr>
+          <p:cNvPr id="28" name="TextBox 27"/>
           <p:cNvSpPr txBox="1"/>
           <p:nvPr/>
         </p:nvSpPr>
         <p:spPr>
           <a:xfrm>
-            <a:off x="4315968" y="2816352"/>
-            <a:ext cx="2880360" cy="1216152"/>
+            <a:off x="2697480" y="5166360"/>
+            <a:ext cx="3566160" cy="566928"/>
           </a:xfrm>
           <a:prstGeom prst="rect">
             <a:avLst/>
@@ -32670,7 +33588,7 @@
           <a:noFill/>
         </p:spPr>
         <p:txBody>
-          <a:bodyPr wrap="square" lIns="18288" rIns="18288" tIns="18288" bIns="18288" anchor="t">
+          <a:bodyPr wrap="square" lIns="18288" rIns="18288" tIns="18288" bIns="18288" anchor="ctr">
             <a:spAutoFit/>
           </a:bodyPr>
           <a:lstStyle/>
@@ -32681,115 +33599,27 @@
               </a:spcAft>
             </a:pPr>
             <a:r>
-              <a:rPr sz="1500" b="0" i="0">
+              <a:rPr sz="1250" b="0" i="0">
                 <a:solidFill>
                   <a:srgbClr val="263746"/>
                 </a:solidFill>
                 <a:latin typeface="Arial"/>
               </a:rPr>
-              <a:t>Pooled augmentation failed. Tissue-specific ranking and low-weight training were more useful.</a:t>
-            </a:r>
-          </a:p>
-        </p:txBody>
-      </p:sp>
-      <p:sp>
-        <p:nvSpPr>
-          <p:cNvPr id="17" name="Rounded Rectangle 16"/>
-          <p:cNvSpPr/>
-          <p:nvPr/>
-        </p:nvSpPr>
-        <p:spPr>
-          <a:xfrm>
-            <a:off x="7735824" y="1920240"/>
-            <a:ext cx="3419856" cy="2487168"/>
-          </a:xfrm>
-          <a:prstGeom prst="roundRect">
-            <a:avLst/>
-          </a:prstGeom>
-          <a:solidFill>
-            <a:srgbClr val="F8F1E2"/>
-          </a:solidFill>
-          <a:ln w="10160">
-            <a:solidFill>
-              <a:srgbClr val="D37B00"/>
-            </a:solidFill>
-          </a:ln>
-        </p:spPr>
-        <p:style>
-          <a:lnRef idx="1">
-            <a:schemeClr val="accent1"/>
-          </a:lnRef>
-          <a:fillRef idx="3">
-            <a:schemeClr val="accent1"/>
-          </a:fillRef>
-          <a:effectRef idx="2">
-            <a:schemeClr val="accent1"/>
-          </a:effectRef>
-          <a:fontRef idx="minor">
-            <a:schemeClr val="lt1"/>
-          </a:fontRef>
-        </p:style>
-        <p:txBody>
-          <a:bodyPr rtlCol="0" anchor="ctr"/>
-          <a:lstStyle/>
-          <a:p>
-            <a:pPr algn="ctr"/>
-          </a:p>
-        </p:txBody>
-      </p:sp>
-      <p:sp>
-        <p:nvSpPr>
-          <p:cNvPr id="18" name="Oval 17"/>
-          <p:cNvSpPr/>
-          <p:nvPr/>
-        </p:nvSpPr>
-        <p:spPr>
-          <a:xfrm>
-            <a:off x="7973568" y="2167128"/>
-            <a:ext cx="475488" cy="475488"/>
-          </a:xfrm>
-          <a:prstGeom prst="ellipse">
-            <a:avLst/>
-          </a:prstGeom>
-          <a:solidFill>
-            <a:srgbClr val="D37B00"/>
-          </a:solidFill>
-          <a:ln>
-            <a:noFill/>
-          </a:ln>
-        </p:spPr>
-        <p:style>
-          <a:lnRef idx="1">
-            <a:schemeClr val="accent1"/>
-          </a:lnRef>
-          <a:fillRef idx="3">
-            <a:schemeClr val="accent1"/>
-          </a:fillRef>
-          <a:effectRef idx="2">
-            <a:schemeClr val="accent1"/>
-          </a:effectRef>
-          <a:fontRef idx="minor">
-            <a:schemeClr val="lt1"/>
-          </a:fontRef>
-        </p:style>
-        <p:txBody>
-          <a:bodyPr rtlCol="0" anchor="ctr"/>
-          <a:lstStyle/>
-          <a:p>
-            <a:pPr algn="ctr"/>
-          </a:p>
-        </p:txBody>
-      </p:sp>
-      <p:sp>
-        <p:nvSpPr>
-          <p:cNvPr id="19" name="TextBox 18"/>
+              <a:t>[P] Cebpd higher; [R] Cdkn1a, St3gal5, Bnip3 higher</a:t>
+            </a:r>
+          </a:p>
+        </p:txBody>
+      </p:sp>
+      <p:sp>
+        <p:nvSpPr>
+          <p:cNvPr id="29" name="TextBox 28"/>
           <p:cNvSpPr txBox="1"/>
           <p:nvPr/>
         </p:nvSpPr>
         <p:spPr>
           <a:xfrm>
-            <a:off x="7973568" y="2221992"/>
-            <a:ext cx="475488" cy="274320"/>
+            <a:off x="6583680" y="5148072"/>
+            <a:ext cx="4754880" cy="603504"/>
           </a:xfrm>
           <a:prstGeom prst="rect">
             <a:avLst/>
@@ -32797,46 +33627,7 @@
           <a:noFill/>
         </p:spPr>
         <p:txBody>
-          <a:bodyPr wrap="square" lIns="18288" rIns="18288" tIns="18288" bIns="18288" anchor="t">
-            <a:spAutoFit/>
-          </a:bodyPr>
-          <a:lstStyle/>
-          <a:p>
-            <a:pPr algn="ctr">
-              <a:spcAft>
-                <a:spcPts val="0"/>
-              </a:spcAft>
-            </a:pPr>
-            <a:r>
-              <a:rPr sz="1600" b="1" i="0">
-                <a:solidFill>
-                  <a:srgbClr val="FFFFFF"/>
-                </a:solidFill>
-                <a:latin typeface="Arial"/>
-              </a:rPr>
-              <a:t>3</a:t>
-            </a:r>
-          </a:p>
-        </p:txBody>
-      </p:sp>
-      <p:sp>
-        <p:nvSpPr>
-          <p:cNvPr id="20" name="TextBox 19"/>
-          <p:cNvSpPr txBox="1"/>
-          <p:nvPr/>
-        </p:nvSpPr>
-        <p:spPr>
-          <a:xfrm>
-            <a:off x="8567928" y="2176272"/>
-            <a:ext cx="2240280" cy="329184"/>
-          </a:xfrm>
-          <a:prstGeom prst="rect">
-            <a:avLst/>
-          </a:prstGeom>
-          <a:noFill/>
-        </p:spPr>
-        <p:txBody>
-          <a:bodyPr wrap="square" lIns="18288" rIns="18288" tIns="18288" bIns="18288" anchor="t">
+          <a:bodyPr wrap="square" lIns="18288" rIns="18288" tIns="18288" bIns="18288" anchor="ctr">
             <a:spAutoFit/>
           </a:bodyPr>
           <a:lstStyle/>
@@ -32847,27 +33638,27 @@
               </a:spcAft>
             </a:pPr>
             <a:r>
-              <a:rPr sz="1900" b="1" i="0">
-                <a:solidFill>
-                  <a:srgbClr val="D37B00"/>
-                </a:solidFill>
-                <a:latin typeface="Arial"/>
-              </a:rPr>
-              <a:t>Interpret</a:t>
-            </a:r>
-          </a:p>
-        </p:txBody>
-      </p:sp>
-      <p:sp>
-        <p:nvSpPr>
-          <p:cNvPr id="21" name="TextBox 20"/>
+              <a:rPr sz="1220" b="0" i="0">
+                <a:solidFill>
+                  <a:srgbClr val="263746"/>
+                </a:solidFill>
+                <a:latin typeface="Arial"/>
+              </a:rPr>
+              <a:t>Stress, cell-cycle, ganglioside-signaling and mitophagy candidates with mixed or complementary prior evidence.</a:t>
+            </a:r>
+          </a:p>
+        </p:txBody>
+      </p:sp>
+      <p:sp>
+        <p:nvSpPr>
+          <p:cNvPr id="30" name="TextBox 29"/>
           <p:cNvSpPr txBox="1"/>
           <p:nvPr/>
         </p:nvSpPr>
         <p:spPr>
           <a:xfrm>
-            <a:off x="7991856" y="2816352"/>
-            <a:ext cx="2880360" cy="1216152"/>
+            <a:off x="329184" y="6510528"/>
+            <a:ext cx="10972800" cy="173736"/>
           </a:xfrm>
           <a:prstGeom prst="rect">
             <a:avLst/>
@@ -32875,7 +33666,7 @@
           <a:noFill/>
         </p:spPr>
         <p:txBody>
-          <a:bodyPr wrap="square" lIns="18288" rIns="18288" tIns="18288" bIns="18288" anchor="t">
+          <a:bodyPr wrap="square" lIns="18288" rIns="18288" tIns="18288" bIns="18288" anchor="ctr">
             <a:spAutoFit/>
           </a:bodyPr>
           <a:lstStyle/>
@@ -32886,175 +33677,13 @@
               </a:spcAft>
             </a:pPr>
             <a:r>
-              <a:rPr sz="1500" b="0" i="0">
-                <a:solidFill>
-                  <a:srgbClr val="263746"/>
-                </a:solidFill>
-                <a:latin typeface="Arial"/>
-              </a:rPr>
-              <a:t>Thymus and soleus were clearest. Literature review separated recovery from complementary hypotheses.</a:t>
-            </a:r>
-          </a:p>
-        </p:txBody>
-      </p:sp>
-      <p:sp>
-        <p:nvSpPr>
-          <p:cNvPr id="22" name="Rounded Rectangle 21"/>
-          <p:cNvSpPr/>
-          <p:nvPr/>
-        </p:nvSpPr>
-        <p:spPr>
-          <a:xfrm>
-            <a:off x="384048" y="4709160"/>
-            <a:ext cx="10972800" cy="1188720"/>
-          </a:xfrm>
-          <a:prstGeom prst="roundRect">
-            <a:avLst/>
-          </a:prstGeom>
-          <a:solidFill>
-            <a:srgbClr val="082B55"/>
-          </a:solidFill>
-          <a:ln w="10160">
-            <a:solidFill>
-              <a:srgbClr val="082B55"/>
-            </a:solidFill>
-          </a:ln>
-        </p:spPr>
-        <p:style>
-          <a:lnRef idx="1">
-            <a:schemeClr val="accent1"/>
-          </a:lnRef>
-          <a:fillRef idx="3">
-            <a:schemeClr val="accent1"/>
-          </a:fillRef>
-          <a:effectRef idx="2">
-            <a:schemeClr val="accent1"/>
-          </a:effectRef>
-          <a:fontRef idx="minor">
-            <a:schemeClr val="lt1"/>
-          </a:fontRef>
-        </p:style>
-        <p:txBody>
-          <a:bodyPr rtlCol="0" anchor="ctr"/>
-          <a:lstStyle/>
-          <a:p>
-            <a:pPr algn="ctr"/>
-          </a:p>
-        </p:txBody>
-      </p:sp>
-      <p:sp>
-        <p:nvSpPr>
-          <p:cNvPr id="23" name="TextBox 22"/>
-          <p:cNvSpPr txBox="1"/>
-          <p:nvPr/>
-        </p:nvSpPr>
-        <p:spPr>
-          <a:xfrm>
-            <a:off x="685800" y="5010912"/>
-            <a:ext cx="1261872" cy="310896"/>
-          </a:xfrm>
-          <a:prstGeom prst="rect">
-            <a:avLst/>
-          </a:prstGeom>
-          <a:noFill/>
-        </p:spPr>
-        <p:txBody>
-          <a:bodyPr wrap="square" lIns="18288" rIns="18288" tIns="18288" bIns="18288" anchor="t">
-            <a:spAutoFit/>
-          </a:bodyPr>
-          <a:lstStyle/>
-          <a:p>
-            <a:pPr algn="l">
-              <a:spcAft>
-                <a:spcPts val="0"/>
-              </a:spcAft>
-            </a:pPr>
-            <a:r>
-              <a:rPr sz="1700" b="1" i="0">
-                <a:solidFill>
-                  <a:srgbClr val="FFD69A"/>
-                </a:solidFill>
-                <a:latin typeface="Arial"/>
-              </a:rPr>
-              <a:t>Next test</a:t>
-            </a:r>
-          </a:p>
-        </p:txBody>
-      </p:sp>
-      <p:sp>
-        <p:nvSpPr>
-          <p:cNvPr id="24" name="TextBox 23"/>
-          <p:cNvSpPr txBox="1"/>
-          <p:nvPr/>
-        </p:nvSpPr>
-        <p:spPr>
-          <a:xfrm>
-            <a:off x="1874519" y="4937760"/>
-            <a:ext cx="9070848" cy="530352"/>
-          </a:xfrm>
-          <a:prstGeom prst="rect">
-            <a:avLst/>
-          </a:prstGeom>
-          <a:noFill/>
-        </p:spPr>
-        <p:txBody>
-          <a:bodyPr wrap="square" lIns="18288" rIns="18288" tIns="18288" bIns="18288" anchor="ctr">
-            <a:spAutoFit/>
-          </a:bodyPr>
-          <a:lstStyle/>
-          <a:p>
-            <a:pPr algn="l">
-              <a:spcAft>
-                <a:spcPts val="0"/>
-              </a:spcAft>
-            </a:pPr>
-            <a:r>
-              <a:rPr sz="1600" b="0" i="0">
-                <a:solidFill>
-                  <a:srgbClr val="FFFFFF"/>
-                </a:solidFill>
-                <a:latin typeface="Arial"/>
-              </a:rPr>
-              <a:t>Use independent samples and cell-resolved assays to test thymus proliferation, soleus metabolism and prioritized candidates from additional tissues.</a:t>
-            </a:r>
-          </a:p>
-        </p:txBody>
-      </p:sp>
-      <p:sp>
-        <p:nvSpPr>
-          <p:cNvPr id="25" name="TextBox 24"/>
-          <p:cNvSpPr txBox="1"/>
-          <p:nvPr/>
-        </p:nvSpPr>
-        <p:spPr>
-          <a:xfrm>
-            <a:off x="1874519" y="5532120"/>
-            <a:ext cx="9070848" cy="256032"/>
-          </a:xfrm>
-          <a:prstGeom prst="rect">
-            <a:avLst/>
-          </a:prstGeom>
-          <a:noFill/>
-        </p:spPr>
-        <p:txBody>
-          <a:bodyPr wrap="square" lIns="18288" rIns="18288" tIns="18288" bIns="18288" anchor="t">
-            <a:spAutoFit/>
-          </a:bodyPr>
-          <a:lstStyle/>
-          <a:p>
-            <a:pPr algn="l">
-              <a:spcAft>
-                <a:spcPts val="0"/>
-              </a:spcAft>
-            </a:pPr>
-            <a:r>
-              <a:rPr sz="1250" b="0" i="0">
-                <a:solidFill>
-                  <a:srgbClr val="BFD0E1"/>
-                </a:solidFill>
-                <a:latin typeface="Arial"/>
-              </a:rPr>
-              <a:t>Generated profiles never enter the biological sample count or the BH-FDR test.</a:t>
+              <a:rPr sz="720" b="0" i="0">
+                <a:solidFill>
+                  <a:srgbClr val="8A969E"/>
+                </a:solidFill>
+                <a:latin typeface="Arial"/>
+              </a:rPr>
+              <a:t>[P] promoted; [R] reinforced. Interpretations follow the independent literature annotations in Table S16.</a:t>
             </a:r>
           </a:p>
         </p:txBody>
@@ -33068,6 +33697,952 @@
 </file>
 
 <file path=ppt/slides/slide17.xml><?xml version="1.0" encoding="utf-8"?>
+<p:sld xmlns:a="http://schemas.openxmlformats.org/drawingml/2006/main" xmlns:p="http://schemas.openxmlformats.org/presentationml/2006/main" xmlns:r="http://schemas.openxmlformats.org/officeDocument/2006/relationships">
+  <p:cSld>
+    <p:spTree>
+      <p:nvGrpSpPr>
+        <p:cNvPr id="1" name=""/>
+        <p:cNvGrpSpPr/>
+        <p:nvPr/>
+      </p:nvGrpSpPr>
+      <p:grpSpPr/>
+      <p:sp>
+        <p:nvSpPr>
+          <p:cNvPr id="2" name="Title 1"/>
+          <p:cNvSpPr>
+            <a:spLocks noGrp="1"/>
+          </p:cNvSpPr>
+          <p:nvPr>
+            <p:ph type="title"/>
+          </p:nvPr>
+        </p:nvSpPr>
+        <p:spPr/>
+        <p:txBody>
+          <a:bodyPr/>
+          <a:lstStyle/>
+          <a:p/>
+        </p:txBody>
+      </p:sp>
+      <p:sp>
+        <p:nvSpPr>
+          <p:cNvPr id="3" name="Content Placeholder 2"/>
+          <p:cNvSpPr>
+            <a:spLocks noGrp="1"/>
+          </p:cNvSpPr>
+          <p:nvPr>
+            <p:ph idx="1"/>
+          </p:nvPr>
+        </p:nvSpPr>
+        <p:spPr/>
+        <p:txBody>
+          <a:bodyPr/>
+          <a:lstStyle/>
+          <a:p/>
+        </p:txBody>
+      </p:sp>
+      <p:sp>
+        <p:nvSpPr>
+          <p:cNvPr id="4" name="TextBox 3"/>
+          <p:cNvSpPr txBox="1"/>
+          <p:nvPr/>
+        </p:nvSpPr>
+        <p:spPr>
+          <a:xfrm>
+            <a:off x="292608" y="530352"/>
+            <a:ext cx="5029200" cy="228600"/>
+          </a:xfrm>
+          <a:prstGeom prst="rect">
+            <a:avLst/>
+          </a:prstGeom>
+          <a:noFill/>
+        </p:spPr>
+        <p:txBody>
+          <a:bodyPr wrap="square" lIns="18288" rIns="18288" tIns="18288" bIns="18288" anchor="t">
+            <a:spAutoFit/>
+          </a:bodyPr>
+          <a:lstStyle/>
+          <a:p>
+            <a:pPr algn="l">
+              <a:spcAft>
+                <a:spcPts val="0"/>
+              </a:spcAft>
+            </a:pPr>
+            <a:r>
+              <a:rPr sz="1050" b="1" i="0">
+                <a:solidFill>
+                  <a:srgbClr val="9A6B20"/>
+                </a:solidFill>
+                <a:latin typeface="Arial"/>
+              </a:rPr>
+              <a:t>TAKEAWAYS</a:t>
+            </a:r>
+          </a:p>
+        </p:txBody>
+      </p:sp>
+      <p:sp>
+        <p:nvSpPr>
+          <p:cNvPr id="5" name="TextBox 4"/>
+          <p:cNvSpPr txBox="1"/>
+          <p:nvPr/>
+        </p:nvSpPr>
+        <p:spPr>
+          <a:xfrm>
+            <a:off x="292608" y="786384"/>
+            <a:ext cx="11430000" cy="585216"/>
+          </a:xfrm>
+          <a:prstGeom prst="rect">
+            <a:avLst/>
+          </a:prstGeom>
+          <a:noFill/>
+        </p:spPr>
+        <p:txBody>
+          <a:bodyPr wrap="square" lIns="18288" rIns="18288" tIns="18288" bIns="18288" anchor="ctr">
+            <a:spAutoFit/>
+          </a:bodyPr>
+          <a:lstStyle/>
+          <a:p>
+            <a:pPr algn="l">
+              <a:spcAft>
+                <a:spcPts val="0"/>
+              </a:spcAft>
+            </a:pPr>
+            <a:r>
+              <a:rPr sz="2700" b="1" i="0">
+                <a:solidFill>
+                  <a:srgbClr val="082B55"/>
+                </a:solidFill>
+                <a:latin typeface="Arial"/>
+              </a:rPr>
+              <a:t>Synthetic data helped most as a tissue-specific prior</a:t>
+            </a:r>
+          </a:p>
+        </p:txBody>
+      </p:sp>
+      <p:sp>
+        <p:nvSpPr>
+          <p:cNvPr id="6" name="TextBox 5"/>
+          <p:cNvSpPr txBox="1"/>
+          <p:nvPr/>
+        </p:nvSpPr>
+        <p:spPr>
+          <a:xfrm>
+            <a:off x="310896" y="1353312"/>
+            <a:ext cx="11247120" cy="310896"/>
+          </a:xfrm>
+          <a:prstGeom prst="rect">
+            <a:avLst/>
+          </a:prstGeom>
+          <a:noFill/>
+        </p:spPr>
+        <p:txBody>
+          <a:bodyPr wrap="square" lIns="18288" rIns="18288" tIns="18288" bIns="18288" anchor="ctr">
+            <a:spAutoFit/>
+          </a:bodyPr>
+          <a:lstStyle/>
+          <a:p>
+            <a:pPr algn="l">
+              <a:spcAft>
+                <a:spcPts val="0"/>
+              </a:spcAft>
+            </a:pPr>
+            <a:r>
+              <a:rPr sz="1450" b="0" i="0">
+                <a:solidFill>
+                  <a:srgbClr val="59697A"/>
+                </a:solidFill>
+                <a:latin typeface="Arial"/>
+              </a:rPr>
+              <a:t>The generator created useful structure, not new biological replication.</a:t>
+            </a:r>
+          </a:p>
+        </p:txBody>
+      </p:sp>
+      <p:sp>
+        <p:nvSpPr>
+          <p:cNvPr id="7" name="Rounded Rectangle 6"/>
+          <p:cNvSpPr/>
+          <p:nvPr/>
+        </p:nvSpPr>
+        <p:spPr>
+          <a:xfrm>
+            <a:off x="384048" y="1920240"/>
+            <a:ext cx="3419856" cy="2487168"/>
+          </a:xfrm>
+          <a:prstGeom prst="roundRect">
+            <a:avLst/>
+          </a:prstGeom>
+          <a:solidFill>
+            <a:srgbClr val="E9F1F7"/>
+          </a:solidFill>
+          <a:ln w="10160">
+            <a:solidFill>
+              <a:srgbClr val="2D6496"/>
+            </a:solidFill>
+          </a:ln>
+        </p:spPr>
+        <p:style>
+          <a:lnRef idx="1">
+            <a:schemeClr val="accent1"/>
+          </a:lnRef>
+          <a:fillRef idx="3">
+            <a:schemeClr val="accent1"/>
+          </a:fillRef>
+          <a:effectRef idx="2">
+            <a:schemeClr val="accent1"/>
+          </a:effectRef>
+          <a:fontRef idx="minor">
+            <a:schemeClr val="lt1"/>
+          </a:fontRef>
+        </p:style>
+        <p:txBody>
+          <a:bodyPr rtlCol="0" anchor="ctr"/>
+          <a:lstStyle/>
+          <a:p>
+            <a:pPr algn="ctr"/>
+          </a:p>
+        </p:txBody>
+      </p:sp>
+      <p:sp>
+        <p:nvSpPr>
+          <p:cNvPr id="8" name="Oval 7"/>
+          <p:cNvSpPr/>
+          <p:nvPr/>
+        </p:nvSpPr>
+        <p:spPr>
+          <a:xfrm>
+            <a:off x="621792" y="2167128"/>
+            <a:ext cx="475488" cy="475488"/>
+          </a:xfrm>
+          <a:prstGeom prst="ellipse">
+            <a:avLst/>
+          </a:prstGeom>
+          <a:solidFill>
+            <a:srgbClr val="2D6496"/>
+          </a:solidFill>
+          <a:ln>
+            <a:noFill/>
+          </a:ln>
+        </p:spPr>
+        <p:style>
+          <a:lnRef idx="1">
+            <a:schemeClr val="accent1"/>
+          </a:lnRef>
+          <a:fillRef idx="3">
+            <a:schemeClr val="accent1"/>
+          </a:fillRef>
+          <a:effectRef idx="2">
+            <a:schemeClr val="accent1"/>
+          </a:effectRef>
+          <a:fontRef idx="minor">
+            <a:schemeClr val="lt1"/>
+          </a:fontRef>
+        </p:style>
+        <p:txBody>
+          <a:bodyPr rtlCol="0" anchor="ctr"/>
+          <a:lstStyle/>
+          <a:p>
+            <a:pPr algn="ctr"/>
+          </a:p>
+        </p:txBody>
+      </p:sp>
+      <p:sp>
+        <p:nvSpPr>
+          <p:cNvPr id="9" name="TextBox 8"/>
+          <p:cNvSpPr txBox="1"/>
+          <p:nvPr/>
+        </p:nvSpPr>
+        <p:spPr>
+          <a:xfrm>
+            <a:off x="621792" y="2221992"/>
+            <a:ext cx="475488" cy="274320"/>
+          </a:xfrm>
+          <a:prstGeom prst="rect">
+            <a:avLst/>
+          </a:prstGeom>
+          <a:noFill/>
+        </p:spPr>
+        <p:txBody>
+          <a:bodyPr wrap="square" lIns="18288" rIns="18288" tIns="18288" bIns="18288" anchor="t">
+            <a:spAutoFit/>
+          </a:bodyPr>
+          <a:lstStyle/>
+          <a:p>
+            <a:pPr algn="ctr">
+              <a:spcAft>
+                <a:spcPts val="0"/>
+              </a:spcAft>
+            </a:pPr>
+            <a:r>
+              <a:rPr sz="1600" b="1" i="0">
+                <a:solidFill>
+                  <a:srgbClr val="FFFFFF"/>
+                </a:solidFill>
+                <a:latin typeface="Arial"/>
+              </a:rPr>
+              <a:t>1</a:t>
+            </a:r>
+          </a:p>
+        </p:txBody>
+      </p:sp>
+      <p:sp>
+        <p:nvSpPr>
+          <p:cNvPr id="10" name="TextBox 9"/>
+          <p:cNvSpPr txBox="1"/>
+          <p:nvPr/>
+        </p:nvSpPr>
+        <p:spPr>
+          <a:xfrm>
+            <a:off x="1216152" y="2176272"/>
+            <a:ext cx="2240280" cy="329184"/>
+          </a:xfrm>
+          <a:prstGeom prst="rect">
+            <a:avLst/>
+          </a:prstGeom>
+          <a:noFill/>
+        </p:spPr>
+        <p:txBody>
+          <a:bodyPr wrap="square" lIns="18288" rIns="18288" tIns="18288" bIns="18288" anchor="t">
+            <a:spAutoFit/>
+          </a:bodyPr>
+          <a:lstStyle/>
+          <a:p>
+            <a:pPr algn="l">
+              <a:spcAft>
+                <a:spcPts val="0"/>
+              </a:spcAft>
+            </a:pPr>
+            <a:r>
+              <a:rPr sz="1900" b="1" i="0">
+                <a:solidFill>
+                  <a:srgbClr val="2D6496"/>
+                </a:solidFill>
+                <a:latin typeface="Arial"/>
+              </a:rPr>
+              <a:t>Generate</a:t>
+            </a:r>
+          </a:p>
+        </p:txBody>
+      </p:sp>
+      <p:sp>
+        <p:nvSpPr>
+          <p:cNvPr id="11" name="TextBox 10"/>
+          <p:cNvSpPr txBox="1"/>
+          <p:nvPr/>
+        </p:nvSpPr>
+        <p:spPr>
+          <a:xfrm>
+            <a:off x="640080" y="2816352"/>
+            <a:ext cx="2880360" cy="1216152"/>
+          </a:xfrm>
+          <a:prstGeom prst="rect">
+            <a:avLst/>
+          </a:prstGeom>
+          <a:noFill/>
+        </p:spPr>
+        <p:txBody>
+          <a:bodyPr wrap="square" lIns="18288" rIns="18288" tIns="18288" bIns="18288" anchor="t">
+            <a:spAutoFit/>
+          </a:bodyPr>
+          <a:lstStyle/>
+          <a:p>
+            <a:pPr algn="l">
+              <a:spcAft>
+                <a:spcPts val="0"/>
+              </a:spcAft>
+            </a:pPr>
+            <a:r>
+              <a:rPr sz="1500" b="0" i="0">
+                <a:solidFill>
+                  <a:srgbClr val="263746"/>
+                </a:solidFill>
+                <a:latin typeface="Arial"/>
+              </a:rPr>
+              <a:t>Conditional DDIM produced high-fidelity profiles with near-chance real-versus-synthetic separation.</a:t>
+            </a:r>
+          </a:p>
+        </p:txBody>
+      </p:sp>
+      <p:sp>
+        <p:nvSpPr>
+          <p:cNvPr id="12" name="Rounded Rectangle 11"/>
+          <p:cNvSpPr/>
+          <p:nvPr/>
+        </p:nvSpPr>
+        <p:spPr>
+          <a:xfrm>
+            <a:off x="4059936" y="1920240"/>
+            <a:ext cx="3419856" cy="2487168"/>
+          </a:xfrm>
+          <a:prstGeom prst="roundRect">
+            <a:avLst/>
+          </a:prstGeom>
+          <a:solidFill>
+            <a:srgbClr val="E8F3F1"/>
+          </a:solidFill>
+          <a:ln w="10160">
+            <a:solidFill>
+              <a:srgbClr val="178681"/>
+            </a:solidFill>
+          </a:ln>
+        </p:spPr>
+        <p:style>
+          <a:lnRef idx="1">
+            <a:schemeClr val="accent1"/>
+          </a:lnRef>
+          <a:fillRef idx="3">
+            <a:schemeClr val="accent1"/>
+          </a:fillRef>
+          <a:effectRef idx="2">
+            <a:schemeClr val="accent1"/>
+          </a:effectRef>
+          <a:fontRef idx="minor">
+            <a:schemeClr val="lt1"/>
+          </a:fontRef>
+        </p:style>
+        <p:txBody>
+          <a:bodyPr rtlCol="0" anchor="ctr"/>
+          <a:lstStyle/>
+          <a:p>
+            <a:pPr algn="ctr"/>
+          </a:p>
+        </p:txBody>
+      </p:sp>
+      <p:sp>
+        <p:nvSpPr>
+          <p:cNvPr id="13" name="Oval 12"/>
+          <p:cNvSpPr/>
+          <p:nvPr/>
+        </p:nvSpPr>
+        <p:spPr>
+          <a:xfrm>
+            <a:off x="4297680" y="2167128"/>
+            <a:ext cx="475488" cy="475488"/>
+          </a:xfrm>
+          <a:prstGeom prst="ellipse">
+            <a:avLst/>
+          </a:prstGeom>
+          <a:solidFill>
+            <a:srgbClr val="178681"/>
+          </a:solidFill>
+          <a:ln>
+            <a:noFill/>
+          </a:ln>
+        </p:spPr>
+        <p:style>
+          <a:lnRef idx="1">
+            <a:schemeClr val="accent1"/>
+          </a:lnRef>
+          <a:fillRef idx="3">
+            <a:schemeClr val="accent1"/>
+          </a:fillRef>
+          <a:effectRef idx="2">
+            <a:schemeClr val="accent1"/>
+          </a:effectRef>
+          <a:fontRef idx="minor">
+            <a:schemeClr val="lt1"/>
+          </a:fontRef>
+        </p:style>
+        <p:txBody>
+          <a:bodyPr rtlCol="0" anchor="ctr"/>
+          <a:lstStyle/>
+          <a:p>
+            <a:pPr algn="ctr"/>
+          </a:p>
+        </p:txBody>
+      </p:sp>
+      <p:sp>
+        <p:nvSpPr>
+          <p:cNvPr id="14" name="TextBox 13"/>
+          <p:cNvSpPr txBox="1"/>
+          <p:nvPr/>
+        </p:nvSpPr>
+        <p:spPr>
+          <a:xfrm>
+            <a:off x="4297680" y="2221992"/>
+            <a:ext cx="475488" cy="274320"/>
+          </a:xfrm>
+          <a:prstGeom prst="rect">
+            <a:avLst/>
+          </a:prstGeom>
+          <a:noFill/>
+        </p:spPr>
+        <p:txBody>
+          <a:bodyPr wrap="square" lIns="18288" rIns="18288" tIns="18288" bIns="18288" anchor="t">
+            <a:spAutoFit/>
+          </a:bodyPr>
+          <a:lstStyle/>
+          <a:p>
+            <a:pPr algn="ctr">
+              <a:spcAft>
+                <a:spcPts val="0"/>
+              </a:spcAft>
+            </a:pPr>
+            <a:r>
+              <a:rPr sz="1600" b="1" i="0">
+                <a:solidFill>
+                  <a:srgbClr val="FFFFFF"/>
+                </a:solidFill>
+                <a:latin typeface="Arial"/>
+              </a:rPr>
+              <a:t>2</a:t>
+            </a:r>
+          </a:p>
+        </p:txBody>
+      </p:sp>
+      <p:sp>
+        <p:nvSpPr>
+          <p:cNvPr id="15" name="TextBox 14"/>
+          <p:cNvSpPr txBox="1"/>
+          <p:nvPr/>
+        </p:nvSpPr>
+        <p:spPr>
+          <a:xfrm>
+            <a:off x="4892040" y="2176272"/>
+            <a:ext cx="2240280" cy="329184"/>
+          </a:xfrm>
+          <a:prstGeom prst="rect">
+            <a:avLst/>
+          </a:prstGeom>
+          <a:noFill/>
+        </p:spPr>
+        <p:txBody>
+          <a:bodyPr wrap="square" lIns="18288" rIns="18288" tIns="18288" bIns="18288" anchor="t">
+            <a:spAutoFit/>
+          </a:bodyPr>
+          <a:lstStyle/>
+          <a:p>
+            <a:pPr algn="l">
+              <a:spcAft>
+                <a:spcPts val="0"/>
+              </a:spcAft>
+            </a:pPr>
+            <a:r>
+              <a:rPr sz="1900" b="1" i="0">
+                <a:solidFill>
+                  <a:srgbClr val="178681"/>
+                </a:solidFill>
+                <a:latin typeface="Arial"/>
+              </a:rPr>
+              <a:t>Use</a:t>
+            </a:r>
+          </a:p>
+        </p:txBody>
+      </p:sp>
+      <p:sp>
+        <p:nvSpPr>
+          <p:cNvPr id="16" name="TextBox 15"/>
+          <p:cNvSpPr txBox="1"/>
+          <p:nvPr/>
+        </p:nvSpPr>
+        <p:spPr>
+          <a:xfrm>
+            <a:off x="4315968" y="2816352"/>
+            <a:ext cx="2880360" cy="1216152"/>
+          </a:xfrm>
+          <a:prstGeom prst="rect">
+            <a:avLst/>
+          </a:prstGeom>
+          <a:noFill/>
+        </p:spPr>
+        <p:txBody>
+          <a:bodyPr wrap="square" lIns="18288" rIns="18288" tIns="18288" bIns="18288" anchor="t">
+            <a:spAutoFit/>
+          </a:bodyPr>
+          <a:lstStyle/>
+          <a:p>
+            <a:pPr algn="l">
+              <a:spcAft>
+                <a:spcPts val="0"/>
+              </a:spcAft>
+            </a:pPr>
+            <a:r>
+              <a:rPr sz="1500" b="0" i="0">
+                <a:solidFill>
+                  <a:srgbClr val="263746"/>
+                </a:solidFill>
+                <a:latin typeface="Arial"/>
+              </a:rPr>
+              <a:t>Pooled augmentation failed. Tissue-specific ranking and low-weight training were more useful.</a:t>
+            </a:r>
+          </a:p>
+        </p:txBody>
+      </p:sp>
+      <p:sp>
+        <p:nvSpPr>
+          <p:cNvPr id="17" name="Rounded Rectangle 16"/>
+          <p:cNvSpPr/>
+          <p:nvPr/>
+        </p:nvSpPr>
+        <p:spPr>
+          <a:xfrm>
+            <a:off x="7735824" y="1920240"/>
+            <a:ext cx="3419856" cy="2487168"/>
+          </a:xfrm>
+          <a:prstGeom prst="roundRect">
+            <a:avLst/>
+          </a:prstGeom>
+          <a:solidFill>
+            <a:srgbClr val="F8F1E2"/>
+          </a:solidFill>
+          <a:ln w="10160">
+            <a:solidFill>
+              <a:srgbClr val="D37B00"/>
+            </a:solidFill>
+          </a:ln>
+        </p:spPr>
+        <p:style>
+          <a:lnRef idx="1">
+            <a:schemeClr val="accent1"/>
+          </a:lnRef>
+          <a:fillRef idx="3">
+            <a:schemeClr val="accent1"/>
+          </a:fillRef>
+          <a:effectRef idx="2">
+            <a:schemeClr val="accent1"/>
+          </a:effectRef>
+          <a:fontRef idx="minor">
+            <a:schemeClr val="lt1"/>
+          </a:fontRef>
+        </p:style>
+        <p:txBody>
+          <a:bodyPr rtlCol="0" anchor="ctr"/>
+          <a:lstStyle/>
+          <a:p>
+            <a:pPr algn="ctr"/>
+          </a:p>
+        </p:txBody>
+      </p:sp>
+      <p:sp>
+        <p:nvSpPr>
+          <p:cNvPr id="18" name="Oval 17"/>
+          <p:cNvSpPr/>
+          <p:nvPr/>
+        </p:nvSpPr>
+        <p:spPr>
+          <a:xfrm>
+            <a:off x="7973568" y="2167128"/>
+            <a:ext cx="475488" cy="475488"/>
+          </a:xfrm>
+          <a:prstGeom prst="ellipse">
+            <a:avLst/>
+          </a:prstGeom>
+          <a:solidFill>
+            <a:srgbClr val="D37B00"/>
+          </a:solidFill>
+          <a:ln>
+            <a:noFill/>
+          </a:ln>
+        </p:spPr>
+        <p:style>
+          <a:lnRef idx="1">
+            <a:schemeClr val="accent1"/>
+          </a:lnRef>
+          <a:fillRef idx="3">
+            <a:schemeClr val="accent1"/>
+          </a:fillRef>
+          <a:effectRef idx="2">
+            <a:schemeClr val="accent1"/>
+          </a:effectRef>
+          <a:fontRef idx="minor">
+            <a:schemeClr val="lt1"/>
+          </a:fontRef>
+        </p:style>
+        <p:txBody>
+          <a:bodyPr rtlCol="0" anchor="ctr"/>
+          <a:lstStyle/>
+          <a:p>
+            <a:pPr algn="ctr"/>
+          </a:p>
+        </p:txBody>
+      </p:sp>
+      <p:sp>
+        <p:nvSpPr>
+          <p:cNvPr id="19" name="TextBox 18"/>
+          <p:cNvSpPr txBox="1"/>
+          <p:nvPr/>
+        </p:nvSpPr>
+        <p:spPr>
+          <a:xfrm>
+            <a:off x="7973568" y="2221992"/>
+            <a:ext cx="475488" cy="274320"/>
+          </a:xfrm>
+          <a:prstGeom prst="rect">
+            <a:avLst/>
+          </a:prstGeom>
+          <a:noFill/>
+        </p:spPr>
+        <p:txBody>
+          <a:bodyPr wrap="square" lIns="18288" rIns="18288" tIns="18288" bIns="18288" anchor="t">
+            <a:spAutoFit/>
+          </a:bodyPr>
+          <a:lstStyle/>
+          <a:p>
+            <a:pPr algn="ctr">
+              <a:spcAft>
+                <a:spcPts val="0"/>
+              </a:spcAft>
+            </a:pPr>
+            <a:r>
+              <a:rPr sz="1600" b="1" i="0">
+                <a:solidFill>
+                  <a:srgbClr val="FFFFFF"/>
+                </a:solidFill>
+                <a:latin typeface="Arial"/>
+              </a:rPr>
+              <a:t>3</a:t>
+            </a:r>
+          </a:p>
+        </p:txBody>
+      </p:sp>
+      <p:sp>
+        <p:nvSpPr>
+          <p:cNvPr id="20" name="TextBox 19"/>
+          <p:cNvSpPr txBox="1"/>
+          <p:nvPr/>
+        </p:nvSpPr>
+        <p:spPr>
+          <a:xfrm>
+            <a:off x="8567928" y="2176272"/>
+            <a:ext cx="2240280" cy="329184"/>
+          </a:xfrm>
+          <a:prstGeom prst="rect">
+            <a:avLst/>
+          </a:prstGeom>
+          <a:noFill/>
+        </p:spPr>
+        <p:txBody>
+          <a:bodyPr wrap="square" lIns="18288" rIns="18288" tIns="18288" bIns="18288" anchor="t">
+            <a:spAutoFit/>
+          </a:bodyPr>
+          <a:lstStyle/>
+          <a:p>
+            <a:pPr algn="l">
+              <a:spcAft>
+                <a:spcPts val="0"/>
+              </a:spcAft>
+            </a:pPr>
+            <a:r>
+              <a:rPr sz="1900" b="1" i="0">
+                <a:solidFill>
+                  <a:srgbClr val="D37B00"/>
+                </a:solidFill>
+                <a:latin typeface="Arial"/>
+              </a:rPr>
+              <a:t>Interpret</a:t>
+            </a:r>
+          </a:p>
+        </p:txBody>
+      </p:sp>
+      <p:sp>
+        <p:nvSpPr>
+          <p:cNvPr id="21" name="TextBox 20"/>
+          <p:cNvSpPr txBox="1"/>
+          <p:nvPr/>
+        </p:nvSpPr>
+        <p:spPr>
+          <a:xfrm>
+            <a:off x="7991856" y="2816352"/>
+            <a:ext cx="2880360" cy="1216152"/>
+          </a:xfrm>
+          <a:prstGeom prst="rect">
+            <a:avLst/>
+          </a:prstGeom>
+          <a:noFill/>
+        </p:spPr>
+        <p:txBody>
+          <a:bodyPr wrap="square" lIns="18288" rIns="18288" tIns="18288" bIns="18288" anchor="t">
+            <a:spAutoFit/>
+          </a:bodyPr>
+          <a:lstStyle/>
+          <a:p>
+            <a:pPr algn="l">
+              <a:spcAft>
+                <a:spcPts val="0"/>
+              </a:spcAft>
+            </a:pPr>
+            <a:r>
+              <a:rPr sz="1500" b="0" i="0">
+                <a:solidFill>
+                  <a:srgbClr val="263746"/>
+                </a:solidFill>
+                <a:latin typeface="Arial"/>
+              </a:rPr>
+              <a:t>Thymus and soleus were clearest. Literature review separated recovery from complementary hypotheses.</a:t>
+            </a:r>
+          </a:p>
+        </p:txBody>
+      </p:sp>
+      <p:sp>
+        <p:nvSpPr>
+          <p:cNvPr id="22" name="Rounded Rectangle 21"/>
+          <p:cNvSpPr/>
+          <p:nvPr/>
+        </p:nvSpPr>
+        <p:spPr>
+          <a:xfrm>
+            <a:off x="384048" y="4709160"/>
+            <a:ext cx="10972800" cy="1188720"/>
+          </a:xfrm>
+          <a:prstGeom prst="roundRect">
+            <a:avLst/>
+          </a:prstGeom>
+          <a:solidFill>
+            <a:srgbClr val="082B55"/>
+          </a:solidFill>
+          <a:ln w="10160">
+            <a:solidFill>
+              <a:srgbClr val="082B55"/>
+            </a:solidFill>
+          </a:ln>
+        </p:spPr>
+        <p:style>
+          <a:lnRef idx="1">
+            <a:schemeClr val="accent1"/>
+          </a:lnRef>
+          <a:fillRef idx="3">
+            <a:schemeClr val="accent1"/>
+          </a:fillRef>
+          <a:effectRef idx="2">
+            <a:schemeClr val="accent1"/>
+          </a:effectRef>
+          <a:fontRef idx="minor">
+            <a:schemeClr val="lt1"/>
+          </a:fontRef>
+        </p:style>
+        <p:txBody>
+          <a:bodyPr rtlCol="0" anchor="ctr"/>
+          <a:lstStyle/>
+          <a:p>
+            <a:pPr algn="ctr"/>
+          </a:p>
+        </p:txBody>
+      </p:sp>
+      <p:sp>
+        <p:nvSpPr>
+          <p:cNvPr id="23" name="TextBox 22"/>
+          <p:cNvSpPr txBox="1"/>
+          <p:nvPr/>
+        </p:nvSpPr>
+        <p:spPr>
+          <a:xfrm>
+            <a:off x="685800" y="5010912"/>
+            <a:ext cx="1261872" cy="310896"/>
+          </a:xfrm>
+          <a:prstGeom prst="rect">
+            <a:avLst/>
+          </a:prstGeom>
+          <a:noFill/>
+        </p:spPr>
+        <p:txBody>
+          <a:bodyPr wrap="square" lIns="18288" rIns="18288" tIns="18288" bIns="18288" anchor="t">
+            <a:spAutoFit/>
+          </a:bodyPr>
+          <a:lstStyle/>
+          <a:p>
+            <a:pPr algn="l">
+              <a:spcAft>
+                <a:spcPts val="0"/>
+              </a:spcAft>
+            </a:pPr>
+            <a:r>
+              <a:rPr sz="1700" b="1" i="0">
+                <a:solidFill>
+                  <a:srgbClr val="FFD69A"/>
+                </a:solidFill>
+                <a:latin typeface="Arial"/>
+              </a:rPr>
+              <a:t>Next test</a:t>
+            </a:r>
+          </a:p>
+        </p:txBody>
+      </p:sp>
+      <p:sp>
+        <p:nvSpPr>
+          <p:cNvPr id="24" name="TextBox 23"/>
+          <p:cNvSpPr txBox="1"/>
+          <p:nvPr/>
+        </p:nvSpPr>
+        <p:spPr>
+          <a:xfrm>
+            <a:off x="1874519" y="4937760"/>
+            <a:ext cx="9070848" cy="530352"/>
+          </a:xfrm>
+          <a:prstGeom prst="rect">
+            <a:avLst/>
+          </a:prstGeom>
+          <a:noFill/>
+        </p:spPr>
+        <p:txBody>
+          <a:bodyPr wrap="square" lIns="18288" rIns="18288" tIns="18288" bIns="18288" anchor="ctr">
+            <a:spAutoFit/>
+          </a:bodyPr>
+          <a:lstStyle/>
+          <a:p>
+            <a:pPr algn="l">
+              <a:spcAft>
+                <a:spcPts val="0"/>
+              </a:spcAft>
+            </a:pPr>
+            <a:r>
+              <a:rPr sz="1600" b="0" i="0">
+                <a:solidFill>
+                  <a:srgbClr val="FFFFFF"/>
+                </a:solidFill>
+                <a:latin typeface="Arial"/>
+              </a:rPr>
+              <a:t>Use independent samples and cell-resolved assays to test thymus proliferation, soleus metabolism and prioritized candidates from additional tissues.</a:t>
+            </a:r>
+          </a:p>
+        </p:txBody>
+      </p:sp>
+      <p:sp>
+        <p:nvSpPr>
+          <p:cNvPr id="25" name="TextBox 24"/>
+          <p:cNvSpPr txBox="1"/>
+          <p:nvPr/>
+        </p:nvSpPr>
+        <p:spPr>
+          <a:xfrm>
+            <a:off x="1874519" y="5532120"/>
+            <a:ext cx="9070848" cy="256032"/>
+          </a:xfrm>
+          <a:prstGeom prst="rect">
+            <a:avLst/>
+          </a:prstGeom>
+          <a:noFill/>
+        </p:spPr>
+        <p:txBody>
+          <a:bodyPr wrap="square" lIns="18288" rIns="18288" tIns="18288" bIns="18288" anchor="t">
+            <a:spAutoFit/>
+          </a:bodyPr>
+          <a:lstStyle/>
+          <a:p>
+            <a:pPr algn="l">
+              <a:spcAft>
+                <a:spcPts val="0"/>
+              </a:spcAft>
+            </a:pPr>
+            <a:r>
+              <a:rPr sz="1250" b="0" i="0">
+                <a:solidFill>
+                  <a:srgbClr val="BFD0E1"/>
+                </a:solidFill>
+                <a:latin typeface="Arial"/>
+              </a:rPr>
+              <a:t>Generated profiles never enter the biological sample count or the BH-FDR test.</a:t>
+            </a:r>
+          </a:p>
+        </p:txBody>
+      </p:sp>
+    </p:spTree>
+  </p:cSld>
+  <p:clrMapOvr>
+    <a:masterClrMapping/>
+  </p:clrMapOvr>
+</p:sld>
+</file>
+
+<file path=ppt/slides/slide18.xml><?xml version="1.0" encoding="utf-8"?>
 <p:sld xmlns:a="http://schemas.openxmlformats.org/drawingml/2006/main" xmlns:p="http://schemas.openxmlformats.org/presentationml/2006/main" xmlns:r="http://schemas.openxmlformats.org/officeDocument/2006/relationships">
   <p:cSld>
     <p:spTree>
@@ -40288,8 +41863,254 @@
         </p:nvSpPr>
         <p:spPr>
           <a:xfrm>
-            <a:off x="713232" y="5126766"/>
-            <a:ext cx="566928" cy="359633"/>
+            <a:off x="640080" y="5486400"/>
+            <a:ext cx="2633472" cy="10972"/>
+          </a:xfrm>
+          <a:prstGeom prst="rect">
+            <a:avLst/>
+          </a:prstGeom>
+          <a:solidFill>
+            <a:srgbClr val="D8DEE2"/>
+          </a:solidFill>
+          <a:ln>
+            <a:noFill/>
+          </a:ln>
+        </p:spPr>
+        <p:style>
+          <a:lnRef idx="1">
+            <a:schemeClr val="accent1"/>
+          </a:lnRef>
+          <a:fillRef idx="3">
+            <a:schemeClr val="accent1"/>
+          </a:fillRef>
+          <a:effectRef idx="2">
+            <a:schemeClr val="accent1"/>
+          </a:effectRef>
+          <a:fontRef idx="minor">
+            <a:schemeClr val="lt1"/>
+          </a:fontRef>
+        </p:style>
+        <p:txBody>
+          <a:bodyPr rtlCol="0" anchor="ctr"/>
+          <a:lstStyle/>
+          <a:p>
+            <a:pPr algn="ctr"/>
+          </a:p>
+        </p:txBody>
+      </p:sp>
+      <p:sp>
+        <p:nvSpPr>
+          <p:cNvPr id="10" name="TextBox 9"/>
+          <p:cNvSpPr txBox="1"/>
+          <p:nvPr/>
+        </p:nvSpPr>
+        <p:spPr>
+          <a:xfrm>
+            <a:off x="393192" y="5394960"/>
+            <a:ext cx="201168" cy="182880"/>
+          </a:xfrm>
+          <a:prstGeom prst="rect">
+            <a:avLst/>
+          </a:prstGeom>
+          <a:noFill/>
+        </p:spPr>
+        <p:txBody>
+          <a:bodyPr wrap="square" lIns="0" rIns="0" tIns="0" bIns="0" anchor="t">
+            <a:spAutoFit/>
+          </a:bodyPr>
+          <a:lstStyle/>
+          <a:p>
+            <a:pPr algn="r">
+              <a:spcAft>
+                <a:spcPts val="0"/>
+              </a:spcAft>
+            </a:pPr>
+            <a:r>
+              <a:rPr sz="850" b="0" i="0">
+                <a:solidFill>
+                  <a:srgbClr val="8A969E"/>
+                </a:solidFill>
+                <a:latin typeface="Arial"/>
+              </a:rPr>
+              <a:t>0</a:t>
+            </a:r>
+          </a:p>
+        </p:txBody>
+      </p:sp>
+      <p:sp>
+        <p:nvSpPr>
+          <p:cNvPr id="11" name="Rectangle 10"/>
+          <p:cNvSpPr/>
+          <p:nvPr/>
+        </p:nvSpPr>
+        <p:spPr>
+          <a:xfrm>
+            <a:off x="640080" y="4114800"/>
+            <a:ext cx="2633472" cy="10972"/>
+          </a:xfrm>
+          <a:prstGeom prst="rect">
+            <a:avLst/>
+          </a:prstGeom>
+          <a:solidFill>
+            <a:srgbClr val="D8DEE2"/>
+          </a:solidFill>
+          <a:ln>
+            <a:noFill/>
+          </a:ln>
+        </p:spPr>
+        <p:style>
+          <a:lnRef idx="1">
+            <a:schemeClr val="accent1"/>
+          </a:lnRef>
+          <a:fillRef idx="3">
+            <a:schemeClr val="accent1"/>
+          </a:fillRef>
+          <a:effectRef idx="2">
+            <a:schemeClr val="accent1"/>
+          </a:effectRef>
+          <a:fontRef idx="minor">
+            <a:schemeClr val="lt1"/>
+          </a:fontRef>
+        </p:style>
+        <p:txBody>
+          <a:bodyPr rtlCol="0" anchor="ctr"/>
+          <a:lstStyle/>
+          <a:p>
+            <a:pPr algn="ctr"/>
+          </a:p>
+        </p:txBody>
+      </p:sp>
+      <p:sp>
+        <p:nvSpPr>
+          <p:cNvPr id="12" name="TextBox 11"/>
+          <p:cNvSpPr txBox="1"/>
+          <p:nvPr/>
+        </p:nvSpPr>
+        <p:spPr>
+          <a:xfrm>
+            <a:off x="393192" y="4023360"/>
+            <a:ext cx="201168" cy="182880"/>
+          </a:xfrm>
+          <a:prstGeom prst="rect">
+            <a:avLst/>
+          </a:prstGeom>
+          <a:noFill/>
+        </p:spPr>
+        <p:txBody>
+          <a:bodyPr wrap="square" lIns="0" rIns="0" tIns="0" bIns="0" anchor="t">
+            <a:spAutoFit/>
+          </a:bodyPr>
+          <a:lstStyle/>
+          <a:p>
+            <a:pPr algn="r">
+              <a:spcAft>
+                <a:spcPts val="0"/>
+              </a:spcAft>
+            </a:pPr>
+            <a:r>
+              <a:rPr sz="850" b="0" i="0">
+                <a:solidFill>
+                  <a:srgbClr val="8A969E"/>
+                </a:solidFill>
+                <a:latin typeface="Arial"/>
+              </a:rPr>
+              <a:t>0.5</a:t>
+            </a:r>
+          </a:p>
+        </p:txBody>
+      </p:sp>
+      <p:sp>
+        <p:nvSpPr>
+          <p:cNvPr id="13" name="Rectangle 12"/>
+          <p:cNvSpPr/>
+          <p:nvPr/>
+        </p:nvSpPr>
+        <p:spPr>
+          <a:xfrm>
+            <a:off x="640080" y="2743200"/>
+            <a:ext cx="2633472" cy="10972"/>
+          </a:xfrm>
+          <a:prstGeom prst="rect">
+            <a:avLst/>
+          </a:prstGeom>
+          <a:solidFill>
+            <a:srgbClr val="D8DEE2"/>
+          </a:solidFill>
+          <a:ln>
+            <a:noFill/>
+          </a:ln>
+        </p:spPr>
+        <p:style>
+          <a:lnRef idx="1">
+            <a:schemeClr val="accent1"/>
+          </a:lnRef>
+          <a:fillRef idx="3">
+            <a:schemeClr val="accent1"/>
+          </a:fillRef>
+          <a:effectRef idx="2">
+            <a:schemeClr val="accent1"/>
+          </a:effectRef>
+          <a:fontRef idx="minor">
+            <a:schemeClr val="lt1"/>
+          </a:fontRef>
+        </p:style>
+        <p:txBody>
+          <a:bodyPr rtlCol="0" anchor="ctr"/>
+          <a:lstStyle/>
+          <a:p>
+            <a:pPr algn="ctr"/>
+          </a:p>
+        </p:txBody>
+      </p:sp>
+      <p:sp>
+        <p:nvSpPr>
+          <p:cNvPr id="14" name="TextBox 13"/>
+          <p:cNvSpPr txBox="1"/>
+          <p:nvPr/>
+        </p:nvSpPr>
+        <p:spPr>
+          <a:xfrm>
+            <a:off x="393192" y="2651760"/>
+            <a:ext cx="201168" cy="182880"/>
+          </a:xfrm>
+          <a:prstGeom prst="rect">
+            <a:avLst/>
+          </a:prstGeom>
+          <a:noFill/>
+        </p:spPr>
+        <p:txBody>
+          <a:bodyPr wrap="square" lIns="0" rIns="0" tIns="0" bIns="0" anchor="t">
+            <a:spAutoFit/>
+          </a:bodyPr>
+          <a:lstStyle/>
+          <a:p>
+            <a:pPr algn="r">
+              <a:spcAft>
+                <a:spcPts val="0"/>
+              </a:spcAft>
+            </a:pPr>
+            <a:r>
+              <a:rPr sz="850" b="0" i="0">
+                <a:solidFill>
+                  <a:srgbClr val="8A969E"/>
+                </a:solidFill>
+                <a:latin typeface="Arial"/>
+              </a:rPr>
+              <a:t>1.0</a:t>
+            </a:r>
+          </a:p>
+        </p:txBody>
+      </p:sp>
+      <p:sp>
+        <p:nvSpPr>
+          <p:cNvPr id="15" name="Rectangle 14"/>
+          <p:cNvSpPr/>
+          <p:nvPr/>
+        </p:nvSpPr>
+        <p:spPr>
+          <a:xfrm>
+            <a:off x="713232" y="3418027"/>
+            <a:ext cx="566928" cy="2068372"/>
           </a:xfrm>
           <a:prstGeom prst="rect">
             <a:avLst/>
@@ -40325,13 +42146,13 @@
       </p:sp>
       <p:sp>
         <p:nvSpPr>
-          <p:cNvPr id="10" name="TextBox 9"/>
+          <p:cNvPr id="16" name="TextBox 15"/>
           <p:cNvSpPr txBox="1"/>
           <p:nvPr/>
         </p:nvSpPr>
         <p:spPr>
           <a:xfrm>
-            <a:off x="640080" y="4806726"/>
+            <a:off x="640080" y="3097987"/>
             <a:ext cx="713232" cy="256032"/>
           </a:xfrm>
           <a:prstGeom prst="rect">
@@ -40364,7 +42185,7 @@
       </p:sp>
       <p:sp>
         <p:nvSpPr>
-          <p:cNvPr id="11" name="TextBox 10"/>
+          <p:cNvPr id="17" name="TextBox 16"/>
           <p:cNvSpPr txBox="1"/>
           <p:nvPr/>
         </p:nvSpPr>
@@ -40403,14 +42224,14 @@
       </p:sp>
       <p:sp>
         <p:nvSpPr>
-          <p:cNvPr id="12" name="Rectangle 11"/>
+          <p:cNvPr id="18" name="Rectangle 17"/>
           <p:cNvSpPr/>
           <p:nvPr/>
         </p:nvSpPr>
         <p:spPr>
           <a:xfrm>
-            <a:off x="1591056" y="5312892"/>
-            <a:ext cx="566928" cy="173507"/>
+            <a:off x="1591056" y="3579876"/>
+            <a:ext cx="566928" cy="1906524"/>
           </a:xfrm>
           <a:prstGeom prst="rect">
             <a:avLst/>
@@ -40446,13 +42267,13 @@
       </p:sp>
       <p:sp>
         <p:nvSpPr>
-          <p:cNvPr id="13" name="TextBox 12"/>
+          <p:cNvPr id="19" name="TextBox 18"/>
           <p:cNvSpPr txBox="1"/>
           <p:nvPr/>
         </p:nvSpPr>
         <p:spPr>
           <a:xfrm>
-            <a:off x="1517904" y="4992852"/>
+            <a:off x="1517904" y="3259836"/>
             <a:ext cx="713232" cy="256032"/>
           </a:xfrm>
           <a:prstGeom prst="rect">
@@ -40485,7 +42306,7 @@
       </p:sp>
       <p:sp>
         <p:nvSpPr>
-          <p:cNvPr id="14" name="TextBox 13"/>
+          <p:cNvPr id="20" name="TextBox 19"/>
           <p:cNvSpPr txBox="1"/>
           <p:nvPr/>
         </p:nvSpPr>
@@ -40524,14 +42345,14 @@
       </p:sp>
       <p:sp>
         <p:nvSpPr>
-          <p:cNvPr id="15" name="Rectangle 14"/>
+          <p:cNvPr id="21" name="Rectangle 20"/>
           <p:cNvSpPr/>
           <p:nvPr/>
         </p:nvSpPr>
         <p:spPr>
           <a:xfrm>
-            <a:off x="2468880" y="5180396"/>
-            <a:ext cx="566928" cy="306003"/>
+            <a:off x="2468880" y="3464661"/>
+            <a:ext cx="566928" cy="2021738"/>
           </a:xfrm>
           <a:prstGeom prst="rect">
             <a:avLst/>
@@ -40567,13 +42388,13 @@
       </p:sp>
       <p:sp>
         <p:nvSpPr>
-          <p:cNvPr id="16" name="TextBox 15"/>
+          <p:cNvPr id="22" name="TextBox 21"/>
           <p:cNvSpPr txBox="1"/>
           <p:nvPr/>
         </p:nvSpPr>
         <p:spPr>
           <a:xfrm>
-            <a:off x="2395728" y="4860356"/>
+            <a:off x="2395728" y="3144621"/>
             <a:ext cx="713232" cy="256032"/>
           </a:xfrm>
           <a:prstGeom prst="rect">
@@ -40606,7 +42427,7 @@
       </p:sp>
       <p:sp>
         <p:nvSpPr>
-          <p:cNvPr id="17" name="TextBox 16"/>
+          <p:cNvPr id="23" name="TextBox 22"/>
           <p:cNvSpPr txBox="1"/>
           <p:nvPr/>
         </p:nvSpPr>
@@ -40645,20 +42466,20 @@
       </p:sp>
       <p:sp>
         <p:nvSpPr>
-          <p:cNvPr id="18" name="Rectangle 17"/>
+          <p:cNvPr id="24" name="Rectangle 23"/>
           <p:cNvSpPr/>
           <p:nvPr/>
         </p:nvSpPr>
         <p:spPr>
           <a:xfrm>
-            <a:off x="576072" y="5486400"/>
-            <a:ext cx="2697480" cy="13716"/>
+            <a:off x="640080" y="5486400"/>
+            <a:ext cx="2633472" cy="18288"/>
           </a:xfrm>
           <a:prstGeom prst="rect">
             <a:avLst/>
           </a:prstGeom>
           <a:solidFill>
-            <a:srgbClr val="A9B5BC"/>
+            <a:srgbClr val="86949D"/>
           </a:solidFill>
           <a:ln>
             <a:noFill/>
@@ -40688,7 +42509,7 @@
       </p:sp>
       <p:sp>
         <p:nvSpPr>
-          <p:cNvPr id="19" name="TextBox 18"/>
+          <p:cNvPr id="25" name="TextBox 24"/>
           <p:cNvSpPr txBox="1"/>
           <p:nvPr/>
         </p:nvSpPr>
@@ -40720,14 +42541,14 @@
                 </a:solidFill>
                 <a:latin typeface="Arial"/>
               </a:rPr>
-              <a:t>Balanced accuracy</a:t>
-            </a:r>
-          </a:p>
-        </p:txBody>
-      </p:sp>
-      <p:sp>
-        <p:nvSpPr>
-          <p:cNvPr id="20" name="Rounded Rectangle 19"/>
+              <a:t>Balanced accuracy (0-1)</a:t>
+            </a:r>
+          </a:p>
+        </p:txBody>
+      </p:sp>
+      <p:sp>
+        <p:nvSpPr>
+          <p:cNvPr id="26" name="Rounded Rectangle 25"/>
           <p:cNvSpPr/>
           <p:nvPr/>
         </p:nvSpPr>
@@ -40772,7 +42593,7 @@
       </p:sp>
       <p:sp>
         <p:nvSpPr>
-          <p:cNvPr id="21" name="TextBox 20"/>
+          <p:cNvPr id="27" name="TextBox 26"/>
           <p:cNvSpPr txBox="1"/>
           <p:nvPr/>
         </p:nvSpPr>
@@ -40811,7 +42632,7 @@
       </p:sp>
       <p:pic>
         <p:nvPicPr>
-          <p:cNvPr id="22" name="Balanced accuracy before and after tissue-specific synthetic use" descr="Balanced accuracy before and after tissue-specific synthetic use"/>
+          <p:cNvPr id="28" name="Balanced accuracy before and after tissue-specific synthetic use" descr="Balanced accuracy before and after tissue-specific synthetic use"/>
           <p:cNvPicPr>
             <a:picLocks noChangeAspect="1"/>
           </p:cNvPicPr>
@@ -40835,7 +42656,7 @@
       </p:pic>
       <p:sp>
         <p:nvSpPr>
-          <p:cNvPr id="23" name="TextBox 22"/>
+          <p:cNvPr id="29" name="TextBox 28"/>
           <p:cNvSpPr txBox="1"/>
           <p:nvPr/>
         </p:nvSpPr>
@@ -40874,7 +42695,7 @@
       </p:sp>
       <p:sp>
         <p:nvSpPr>
-          <p:cNvPr id="24" name="TextBox 23"/>
+          <p:cNvPr id="30" name="TextBox 29"/>
           <p:cNvSpPr txBox="1"/>
           <p:nvPr/>
         </p:nvSpPr>

--- a/presentation/SLSTP_2026_Generative_Transcriptomics.pptx
+++ b/presentation/SLSTP_2026_Generative_Transcriptomics.pptx
@@ -1191,7 +1191,7 @@
           <a:p/>
           <a:p>
             <a:r>
-              <a:t>Pooled muscle, kidney, spleen and skin each produced a distinct synthetic-informed result. Read these as separate hypotheses, not as grouped biology. Pooled muscle is heterogeneous, kidney suggests phosphoinositide and glucose handling, spleen suggests adhesion and extracellular-matrix or immune organization, and skin contributes a single interferon-linked candidate.</a:t>
+              <a:t>Promoted and reinforced genes are shown on separate subrows for each tissue. Pooled muscle, kidney, spleen and skin each produced a distinct synthetic-informed result. Read these as separate hypotheses, not as grouped biology. Pooled muscle is heterogeneous, kidney suggests phosphoinositide and glucose handling, spleen suggests adhesion and extracellular-matrix or immune organization, and skin contributes a single interferon-linked candidate.</a:t>
             </a:r>
           </a:p>
         </p:txBody>
@@ -1267,7 +1267,7 @@
           <a:p/>
           <a:p>
             <a:r>
-              <a:t>Eye, adrenal gland, gastrocnemius and tibialis anterior are reported separately as well. Eye reinforces lower cytokinesis, adrenal contributes two unmatched candidates, gastrocnemius combines an NF-kappa-B stress signal with an autophagy or myogenesis candidate, and tibialis anterior spans stress, cell-cycle, ganglioside and mitophagy hypotheses.</a:t>
+              <a:t>Promoted and reinforced genes remain separated here as well. Eye reinforces lower cytokinesis, adrenal contributes two unmatched candidates, gastrocnemius combines an NF-kappa-B stress signal with an autophagy or myogenesis candidate, and tibialis anterior spans stress, cell-cycle, ganglioside and mitophagy hypotheses.</a:t>
             </a:r>
           </a:p>
         </p:txBody>
@@ -31562,7 +31562,7 @@
                 </a:solidFill>
                 <a:latin typeface="Arial"/>
               </a:rPr>
-              <a:t>These results remain distinct; their placement on one slide does not imply shared biology.</a:t>
+              <a:t>Promoted and reinforced selections are separated within every tissue.</a:t>
             </a:r>
           </a:p>
         </p:txBody>
@@ -31576,7 +31576,7 @@
         <p:spPr>
           <a:xfrm>
             <a:off x="658368" y="1828800"/>
-            <a:ext cx="1874519" cy="256032"/>
+            <a:ext cx="1554480" cy="256032"/>
           </a:xfrm>
           <a:prstGeom prst="rect">
             <a:avLst/>
@@ -31614,8 +31614,8 @@
         </p:nvSpPr>
         <p:spPr>
           <a:xfrm>
-            <a:off x="2697480" y="1828800"/>
-            <a:ext cx="3566160" cy="256032"/>
+            <a:off x="2267712" y="1828800"/>
+            <a:ext cx="1051560" cy="256032"/>
           </a:xfrm>
           <a:prstGeom prst="rect">
             <a:avLst/>
@@ -31640,7 +31640,7 @@
                 </a:solidFill>
                 <a:latin typeface="Arial"/>
               </a:rPr>
-              <a:t>Synthetic-informed genes</a:t>
+              <a:t>Selection</a:t>
             </a:r>
           </a:p>
         </p:txBody>
@@ -31653,8 +31653,8 @@
         </p:nvSpPr>
         <p:spPr>
           <a:xfrm>
-            <a:off x="6583680" y="1828800"/>
-            <a:ext cx="4663440" cy="256032"/>
+            <a:off x="3456432" y="1828800"/>
+            <a:ext cx="2880360" cy="256032"/>
           </a:xfrm>
           <a:prstGeom prst="rect">
             <a:avLst/>
@@ -31679,6 +31679,45 @@
                 </a:solidFill>
                 <a:latin typeface="Arial"/>
               </a:rPr>
+              <a:t>Genes and FLT direction</a:t>
+            </a:r>
+          </a:p>
+        </p:txBody>
+      </p:sp>
+      <p:sp>
+        <p:nvSpPr>
+          <p:cNvPr id="10" name="TextBox 9"/>
+          <p:cNvSpPr txBox="1"/>
+          <p:nvPr/>
+        </p:nvSpPr>
+        <p:spPr>
+          <a:xfrm>
+            <a:off x="6583680" y="1828800"/>
+            <a:ext cx="4663440" cy="256032"/>
+          </a:xfrm>
+          <a:prstGeom prst="rect">
+            <a:avLst/>
+          </a:prstGeom>
+          <a:noFill/>
+        </p:spPr>
+        <p:txBody>
+          <a:bodyPr wrap="square" lIns="18288" rIns="18288" tIns="18288" bIns="18288" anchor="t">
+            <a:spAutoFit/>
+          </a:bodyPr>
+          <a:lstStyle/>
+          <a:p>
+            <a:pPr algn="l">
+              <a:spcAft>
+                <a:spcPts val="0"/>
+              </a:spcAft>
+            </a:pPr>
+            <a:r>
+              <a:rPr sz="1150" b="1" i="0">
+                <a:solidFill>
+                  <a:srgbClr val="59697A"/>
+                </a:solidFill>
+                <a:latin typeface="Arial"/>
+              </a:rPr>
               <a:t>Interpretation</a:t>
             </a:r>
           </a:p>
@@ -31686,7 +31725,7 @@
       </p:sp>
       <p:sp>
         <p:nvSpPr>
-          <p:cNvPr id="10" name="Rectangle 9"/>
+          <p:cNvPr id="11" name="Rectangle 10"/>
           <p:cNvSpPr/>
           <p:nvPr/>
         </p:nvSpPr>
@@ -31731,7 +31770,7 @@
       </p:sp>
       <p:sp>
         <p:nvSpPr>
-          <p:cNvPr id="11" name="Rectangle 10"/>
+          <p:cNvPr id="12" name="Rectangle 11"/>
           <p:cNvSpPr/>
           <p:nvPr/>
         </p:nvSpPr>
@@ -31774,14 +31813,14 @@
       </p:sp>
       <p:sp>
         <p:nvSpPr>
-          <p:cNvPr id="12" name="TextBox 11"/>
+          <p:cNvPr id="13" name="TextBox 12"/>
           <p:cNvSpPr txBox="1"/>
           <p:nvPr/>
         </p:nvSpPr>
         <p:spPr>
           <a:xfrm>
             <a:off x="658368" y="2331720"/>
-            <a:ext cx="1874519" cy="402336"/>
+            <a:ext cx="1481328" cy="402336"/>
           </a:xfrm>
           <a:prstGeom prst="rect">
             <a:avLst/>
@@ -31800,7 +31839,7 @@
               </a:spcAft>
             </a:pPr>
             <a:r>
-              <a:rPr sz="1550" b="1" i="0">
+              <a:rPr sz="1500" b="1" i="0">
                 <a:solidFill>
                   <a:srgbClr val="2D6496"/>
                 </a:solidFill>
@@ -31813,14 +31852,57 @@
       </p:sp>
       <p:sp>
         <p:nvSpPr>
-          <p:cNvPr id="13" name="TextBox 12"/>
+          <p:cNvPr id="14" name="Rectangle 13"/>
+          <p:cNvSpPr/>
+          <p:nvPr/>
+        </p:nvSpPr>
+        <p:spPr>
+          <a:xfrm>
+            <a:off x="2212848" y="2551176"/>
+            <a:ext cx="4041648" cy="10972"/>
+          </a:xfrm>
+          <a:prstGeom prst="rect">
+            <a:avLst/>
+          </a:prstGeom>
+          <a:solidFill>
+            <a:srgbClr val="DDE4E8"/>
+          </a:solidFill>
+          <a:ln>
+            <a:noFill/>
+          </a:ln>
+        </p:spPr>
+        <p:style>
+          <a:lnRef idx="1">
+            <a:schemeClr val="accent1"/>
+          </a:lnRef>
+          <a:fillRef idx="3">
+            <a:schemeClr val="accent1"/>
+          </a:fillRef>
+          <a:effectRef idx="2">
+            <a:schemeClr val="accent1"/>
+          </a:effectRef>
+          <a:fontRef idx="minor">
+            <a:schemeClr val="lt1"/>
+          </a:fontRef>
+        </p:style>
+        <p:txBody>
+          <a:bodyPr rtlCol="0" anchor="ctr"/>
+          <a:lstStyle/>
+          <a:p>
+            <a:pPr algn="ctr"/>
+          </a:p>
+        </p:txBody>
+      </p:sp>
+      <p:sp>
+        <p:nvSpPr>
+          <p:cNvPr id="15" name="TextBox 14"/>
           <p:cNvSpPr txBox="1"/>
           <p:nvPr/>
         </p:nvSpPr>
         <p:spPr>
           <a:xfrm>
-            <a:off x="2697480" y="2258568"/>
-            <a:ext cx="3566160" cy="566928"/>
+            <a:off x="2267712" y="2221992"/>
+            <a:ext cx="1024128" cy="228600"/>
           </a:xfrm>
           <a:prstGeom prst="rect">
             <a:avLst/>
@@ -31839,27 +31921,27 @@
               </a:spcAft>
             </a:pPr>
             <a:r>
-              <a:rPr sz="1250" b="0" i="0">
-                <a:solidFill>
-                  <a:srgbClr val="263746"/>
-                </a:solidFill>
-                <a:latin typeface="Arial"/>
-              </a:rPr>
-              <a:t>12 genes: 4 promoted, 8 reinforced</a:t>
-            </a:r>
-          </a:p>
-        </p:txBody>
-      </p:sp>
-      <p:sp>
-        <p:nvSpPr>
-          <p:cNvPr id="14" name="TextBox 13"/>
+              <a:rPr sz="1050" b="1" i="0">
+                <a:solidFill>
+                  <a:srgbClr val="D96552"/>
+                </a:solidFill>
+                <a:latin typeface="Arial"/>
+              </a:rPr>
+              <a:t>Promoted</a:t>
+            </a:r>
+          </a:p>
+        </p:txBody>
+      </p:sp>
+      <p:sp>
+        <p:nvSpPr>
+          <p:cNvPr id="16" name="TextBox 15"/>
           <p:cNvSpPr txBox="1"/>
           <p:nvPr/>
         </p:nvSpPr>
         <p:spPr>
           <a:xfrm>
-            <a:off x="6583680" y="2240280"/>
-            <a:ext cx="4754880" cy="603504"/>
+            <a:off x="3456432" y="2194560"/>
+            <a:ext cx="2816352" cy="320040"/>
           </a:xfrm>
           <a:prstGeom prst="rect">
             <a:avLst/>
@@ -31878,6 +31960,123 @@
               </a:spcAft>
             </a:pPr>
             <a:r>
+              <a:rPr sz="1050" b="0" i="0">
+                <a:solidFill>
+                  <a:srgbClr val="263746"/>
+                </a:solidFill>
+                <a:latin typeface="Arial"/>
+              </a:rPr>
+              <a:t>Lower: Klhl21, Mapkapk5, Reep5, Itgb5</a:t>
+            </a:r>
+          </a:p>
+        </p:txBody>
+      </p:sp>
+      <p:sp>
+        <p:nvSpPr>
+          <p:cNvPr id="17" name="TextBox 16"/>
+          <p:cNvSpPr txBox="1"/>
+          <p:nvPr/>
+        </p:nvSpPr>
+        <p:spPr>
+          <a:xfrm>
+            <a:off x="2267712" y="2624328"/>
+            <a:ext cx="1024128" cy="228600"/>
+          </a:xfrm>
+          <a:prstGeom prst="rect">
+            <a:avLst/>
+          </a:prstGeom>
+          <a:noFill/>
+        </p:spPr>
+        <p:txBody>
+          <a:bodyPr wrap="square" lIns="18288" rIns="18288" tIns="18288" bIns="18288" anchor="ctr">
+            <a:spAutoFit/>
+          </a:bodyPr>
+          <a:lstStyle/>
+          <a:p>
+            <a:pPr algn="l">
+              <a:spcAft>
+                <a:spcPts val="0"/>
+              </a:spcAft>
+            </a:pPr>
+            <a:r>
+              <a:rPr sz="1050" b="1" i="0">
+                <a:solidFill>
+                  <a:srgbClr val="178681"/>
+                </a:solidFill>
+                <a:latin typeface="Arial"/>
+              </a:rPr>
+              <a:t>Reinforced</a:t>
+            </a:r>
+          </a:p>
+        </p:txBody>
+      </p:sp>
+      <p:sp>
+        <p:nvSpPr>
+          <p:cNvPr id="18" name="TextBox 17"/>
+          <p:cNvSpPr txBox="1"/>
+          <p:nvPr/>
+        </p:nvSpPr>
+        <p:spPr>
+          <a:xfrm>
+            <a:off x="3456432" y="2587752"/>
+            <a:ext cx="2816352" cy="320040"/>
+          </a:xfrm>
+          <a:prstGeom prst="rect">
+            <a:avLst/>
+          </a:prstGeom>
+          <a:noFill/>
+        </p:spPr>
+        <p:txBody>
+          <a:bodyPr wrap="square" lIns="18288" rIns="18288" tIns="18288" bIns="18288" anchor="ctr">
+            <a:spAutoFit/>
+          </a:bodyPr>
+          <a:lstStyle/>
+          <a:p>
+            <a:pPr algn="l">
+              <a:spcAft>
+                <a:spcPts val="0"/>
+              </a:spcAft>
+            </a:pPr>
+            <a:r>
+              <a:rPr sz="1050" b="0" i="0">
+                <a:solidFill>
+                  <a:srgbClr val="263746"/>
+                </a:solidFill>
+                <a:latin typeface="Arial"/>
+              </a:rPr>
+              <a:t>Higher: Sox4, Cebpd, Sh3bp5, Prkcd, Arid5b, Sesn1, Tle1; lower: Bphl</a:t>
+            </a:r>
+          </a:p>
+        </p:txBody>
+      </p:sp>
+      <p:sp>
+        <p:nvSpPr>
+          <p:cNvPr id="19" name="TextBox 18"/>
+          <p:cNvSpPr txBox="1"/>
+          <p:nvPr/>
+        </p:nvSpPr>
+        <p:spPr>
+          <a:xfrm>
+            <a:off x="6583680" y="2240280"/>
+            <a:ext cx="4754880" cy="603504"/>
+          </a:xfrm>
+          <a:prstGeom prst="rect">
+            <a:avLst/>
+          </a:prstGeom>
+          <a:noFill/>
+        </p:spPr>
+        <p:txBody>
+          <a:bodyPr wrap="square" lIns="18288" rIns="18288" tIns="18288" bIns="18288" anchor="ctr">
+            <a:spAutoFit/>
+          </a:bodyPr>
+          <a:lstStyle/>
+          <a:p>
+            <a:pPr algn="l">
+              <a:spcAft>
+                <a:spcPts val="0"/>
+              </a:spcAft>
+            </a:pPr>
+            <a:r>
               <a:rPr sz="1220" b="0" i="0">
                 <a:solidFill>
                   <a:srgbClr val="263746"/>
@@ -31891,7 +32090,7 @@
       </p:sp>
       <p:sp>
         <p:nvSpPr>
-          <p:cNvPr id="15" name="Rectangle 14"/>
+          <p:cNvPr id="20" name="Rectangle 19"/>
           <p:cNvSpPr/>
           <p:nvPr/>
         </p:nvSpPr>
@@ -31936,7 +32135,7 @@
       </p:sp>
       <p:sp>
         <p:nvSpPr>
-          <p:cNvPr id="16" name="Rectangle 15"/>
+          <p:cNvPr id="21" name="Rectangle 20"/>
           <p:cNvSpPr/>
           <p:nvPr/>
         </p:nvSpPr>
@@ -31979,14 +32178,14 @@
       </p:sp>
       <p:sp>
         <p:nvSpPr>
-          <p:cNvPr id="17" name="TextBox 16"/>
+          <p:cNvPr id="22" name="TextBox 21"/>
           <p:cNvSpPr txBox="1"/>
           <p:nvPr/>
         </p:nvSpPr>
         <p:spPr>
           <a:xfrm>
             <a:off x="658368" y="3300984"/>
-            <a:ext cx="1874519" cy="402336"/>
+            <a:ext cx="1481328" cy="402336"/>
           </a:xfrm>
           <a:prstGeom prst="rect">
             <a:avLst/>
@@ -32005,7 +32204,7 @@
               </a:spcAft>
             </a:pPr>
             <a:r>
-              <a:rPr sz="1550" b="1" i="0">
+              <a:rPr sz="1500" b="1" i="0">
                 <a:solidFill>
                   <a:srgbClr val="8063A6"/>
                 </a:solidFill>
@@ -32018,14 +32217,57 @@
       </p:sp>
       <p:sp>
         <p:nvSpPr>
-          <p:cNvPr id="18" name="TextBox 17"/>
+          <p:cNvPr id="23" name="Rectangle 22"/>
+          <p:cNvSpPr/>
+          <p:nvPr/>
+        </p:nvSpPr>
+        <p:spPr>
+          <a:xfrm>
+            <a:off x="2212848" y="3520440"/>
+            <a:ext cx="4041648" cy="10972"/>
+          </a:xfrm>
+          <a:prstGeom prst="rect">
+            <a:avLst/>
+          </a:prstGeom>
+          <a:solidFill>
+            <a:srgbClr val="DDE4E8"/>
+          </a:solidFill>
+          <a:ln>
+            <a:noFill/>
+          </a:ln>
+        </p:spPr>
+        <p:style>
+          <a:lnRef idx="1">
+            <a:schemeClr val="accent1"/>
+          </a:lnRef>
+          <a:fillRef idx="3">
+            <a:schemeClr val="accent1"/>
+          </a:fillRef>
+          <a:effectRef idx="2">
+            <a:schemeClr val="accent1"/>
+          </a:effectRef>
+          <a:fontRef idx="minor">
+            <a:schemeClr val="lt1"/>
+          </a:fontRef>
+        </p:style>
+        <p:txBody>
+          <a:bodyPr rtlCol="0" anchor="ctr"/>
+          <a:lstStyle/>
+          <a:p>
+            <a:pPr algn="ctr"/>
+          </a:p>
+        </p:txBody>
+      </p:sp>
+      <p:sp>
+        <p:nvSpPr>
+          <p:cNvPr id="24" name="TextBox 23"/>
           <p:cNvSpPr txBox="1"/>
           <p:nvPr/>
         </p:nvSpPr>
         <p:spPr>
           <a:xfrm>
-            <a:off x="2697480" y="3227832"/>
-            <a:ext cx="3566160" cy="566928"/>
+            <a:off x="2267712" y="3191256"/>
+            <a:ext cx="1024128" cy="228600"/>
           </a:xfrm>
           <a:prstGeom prst="rect">
             <a:avLst/>
@@ -32044,27 +32286,27 @@
               </a:spcAft>
             </a:pPr>
             <a:r>
-              <a:rPr sz="1250" b="0" i="0">
-                <a:solidFill>
-                  <a:srgbClr val="263746"/>
-                </a:solidFill>
-                <a:latin typeface="Arial"/>
-              </a:rPr>
-              <a:t>[P] Inpp4b higher; [R] Slc37a4 higher</a:t>
-            </a:r>
-          </a:p>
-        </p:txBody>
-      </p:sp>
-      <p:sp>
-        <p:nvSpPr>
-          <p:cNvPr id="19" name="TextBox 18"/>
+              <a:rPr sz="1050" b="1" i="0">
+                <a:solidFill>
+                  <a:srgbClr val="D96552"/>
+                </a:solidFill>
+                <a:latin typeface="Arial"/>
+              </a:rPr>
+              <a:t>Promoted</a:t>
+            </a:r>
+          </a:p>
+        </p:txBody>
+      </p:sp>
+      <p:sp>
+        <p:nvSpPr>
+          <p:cNvPr id="25" name="TextBox 24"/>
           <p:cNvSpPr txBox="1"/>
           <p:nvPr/>
         </p:nvSpPr>
         <p:spPr>
           <a:xfrm>
-            <a:off x="6583680" y="3209544"/>
-            <a:ext cx="4754880" cy="603504"/>
+            <a:off x="3456432" y="3163824"/>
+            <a:ext cx="2816352" cy="320040"/>
           </a:xfrm>
           <a:prstGeom prst="rect">
             <a:avLst/>
@@ -32083,6 +32325,123 @@
               </a:spcAft>
             </a:pPr>
             <a:r>
+              <a:rPr sz="1050" b="0" i="0">
+                <a:solidFill>
+                  <a:srgbClr val="263746"/>
+                </a:solidFill>
+                <a:latin typeface="Arial"/>
+              </a:rPr>
+              <a:t>Inpp4b higher</a:t>
+            </a:r>
+          </a:p>
+        </p:txBody>
+      </p:sp>
+      <p:sp>
+        <p:nvSpPr>
+          <p:cNvPr id="26" name="TextBox 25"/>
+          <p:cNvSpPr txBox="1"/>
+          <p:nvPr/>
+        </p:nvSpPr>
+        <p:spPr>
+          <a:xfrm>
+            <a:off x="2267712" y="3593592"/>
+            <a:ext cx="1024128" cy="228600"/>
+          </a:xfrm>
+          <a:prstGeom prst="rect">
+            <a:avLst/>
+          </a:prstGeom>
+          <a:noFill/>
+        </p:spPr>
+        <p:txBody>
+          <a:bodyPr wrap="square" lIns="18288" rIns="18288" tIns="18288" bIns="18288" anchor="ctr">
+            <a:spAutoFit/>
+          </a:bodyPr>
+          <a:lstStyle/>
+          <a:p>
+            <a:pPr algn="l">
+              <a:spcAft>
+                <a:spcPts val="0"/>
+              </a:spcAft>
+            </a:pPr>
+            <a:r>
+              <a:rPr sz="1050" b="1" i="0">
+                <a:solidFill>
+                  <a:srgbClr val="178681"/>
+                </a:solidFill>
+                <a:latin typeface="Arial"/>
+              </a:rPr>
+              <a:t>Reinforced</a:t>
+            </a:r>
+          </a:p>
+        </p:txBody>
+      </p:sp>
+      <p:sp>
+        <p:nvSpPr>
+          <p:cNvPr id="27" name="TextBox 26"/>
+          <p:cNvSpPr txBox="1"/>
+          <p:nvPr/>
+        </p:nvSpPr>
+        <p:spPr>
+          <a:xfrm>
+            <a:off x="3456432" y="3557016"/>
+            <a:ext cx="2816352" cy="320040"/>
+          </a:xfrm>
+          <a:prstGeom prst="rect">
+            <a:avLst/>
+          </a:prstGeom>
+          <a:noFill/>
+        </p:spPr>
+        <p:txBody>
+          <a:bodyPr wrap="square" lIns="18288" rIns="18288" tIns="18288" bIns="18288" anchor="ctr">
+            <a:spAutoFit/>
+          </a:bodyPr>
+          <a:lstStyle/>
+          <a:p>
+            <a:pPr algn="l">
+              <a:spcAft>
+                <a:spcPts val="0"/>
+              </a:spcAft>
+            </a:pPr>
+            <a:r>
+              <a:rPr sz="1050" b="0" i="0">
+                <a:solidFill>
+                  <a:srgbClr val="263746"/>
+                </a:solidFill>
+                <a:latin typeface="Arial"/>
+              </a:rPr>
+              <a:t>Slc37a4 higher</a:t>
+            </a:r>
+          </a:p>
+        </p:txBody>
+      </p:sp>
+      <p:sp>
+        <p:nvSpPr>
+          <p:cNvPr id="28" name="TextBox 27"/>
+          <p:cNvSpPr txBox="1"/>
+          <p:nvPr/>
+        </p:nvSpPr>
+        <p:spPr>
+          <a:xfrm>
+            <a:off x="6583680" y="3209544"/>
+            <a:ext cx="4754880" cy="603504"/>
+          </a:xfrm>
+          <a:prstGeom prst="rect">
+            <a:avLst/>
+          </a:prstGeom>
+          <a:noFill/>
+        </p:spPr>
+        <p:txBody>
+          <a:bodyPr wrap="square" lIns="18288" rIns="18288" tIns="18288" bIns="18288" anchor="ctr">
+            <a:spAutoFit/>
+          </a:bodyPr>
+          <a:lstStyle/>
+          <a:p>
+            <a:pPr algn="l">
+              <a:spcAft>
+                <a:spcPts val="0"/>
+              </a:spcAft>
+            </a:pPr>
+            <a:r>
               <a:rPr sz="1220" b="0" i="0">
                 <a:solidFill>
                   <a:srgbClr val="263746"/>
@@ -32096,7 +32455,7 @@
       </p:sp>
       <p:sp>
         <p:nvSpPr>
-          <p:cNvPr id="20" name="Rectangle 19"/>
+          <p:cNvPr id="29" name="Rectangle 28"/>
           <p:cNvSpPr/>
           <p:nvPr/>
         </p:nvSpPr>
@@ -32141,7 +32500,7 @@
       </p:sp>
       <p:sp>
         <p:nvSpPr>
-          <p:cNvPr id="21" name="Rectangle 20"/>
+          <p:cNvPr id="30" name="Rectangle 29"/>
           <p:cNvSpPr/>
           <p:nvPr/>
         </p:nvSpPr>
@@ -32184,14 +32543,14 @@
       </p:sp>
       <p:sp>
         <p:nvSpPr>
-          <p:cNvPr id="22" name="TextBox 21"/>
+          <p:cNvPr id="31" name="TextBox 30"/>
           <p:cNvSpPr txBox="1"/>
           <p:nvPr/>
         </p:nvSpPr>
         <p:spPr>
           <a:xfrm>
             <a:off x="658368" y="4270248"/>
-            <a:ext cx="1874519" cy="402336"/>
+            <a:ext cx="1481328" cy="402336"/>
           </a:xfrm>
           <a:prstGeom prst="rect">
             <a:avLst/>
@@ -32210,7 +32569,7 @@
               </a:spcAft>
             </a:pPr>
             <a:r>
-              <a:rPr sz="1550" b="1" i="0">
+              <a:rPr sz="1500" b="1" i="0">
                 <a:solidFill>
                   <a:srgbClr val="178681"/>
                 </a:solidFill>
@@ -32223,14 +32582,57 @@
       </p:sp>
       <p:sp>
         <p:nvSpPr>
-          <p:cNvPr id="23" name="TextBox 22"/>
+          <p:cNvPr id="32" name="Rectangle 31"/>
+          <p:cNvSpPr/>
+          <p:nvPr/>
+        </p:nvSpPr>
+        <p:spPr>
+          <a:xfrm>
+            <a:off x="2212848" y="4489704"/>
+            <a:ext cx="4041648" cy="10972"/>
+          </a:xfrm>
+          <a:prstGeom prst="rect">
+            <a:avLst/>
+          </a:prstGeom>
+          <a:solidFill>
+            <a:srgbClr val="DDE4E8"/>
+          </a:solidFill>
+          <a:ln>
+            <a:noFill/>
+          </a:ln>
+        </p:spPr>
+        <p:style>
+          <a:lnRef idx="1">
+            <a:schemeClr val="accent1"/>
+          </a:lnRef>
+          <a:fillRef idx="3">
+            <a:schemeClr val="accent1"/>
+          </a:fillRef>
+          <a:effectRef idx="2">
+            <a:schemeClr val="accent1"/>
+          </a:effectRef>
+          <a:fontRef idx="minor">
+            <a:schemeClr val="lt1"/>
+          </a:fontRef>
+        </p:style>
+        <p:txBody>
+          <a:bodyPr rtlCol="0" anchor="ctr"/>
+          <a:lstStyle/>
+          <a:p>
+            <a:pPr algn="ctr"/>
+          </a:p>
+        </p:txBody>
+      </p:sp>
+      <p:sp>
+        <p:nvSpPr>
+          <p:cNvPr id="33" name="TextBox 32"/>
           <p:cNvSpPr txBox="1"/>
           <p:nvPr/>
         </p:nvSpPr>
         <p:spPr>
           <a:xfrm>
-            <a:off x="2697480" y="4197096"/>
-            <a:ext cx="3566160" cy="566928"/>
+            <a:off x="2267712" y="4160520"/>
+            <a:ext cx="1024128" cy="228600"/>
           </a:xfrm>
           <a:prstGeom prst="rect">
             <a:avLst/>
@@ -32249,27 +32651,27 @@
               </a:spcAft>
             </a:pPr>
             <a:r>
-              <a:rPr sz="1250" b="0" i="0">
-                <a:solidFill>
-                  <a:srgbClr val="263746"/>
-                </a:solidFill>
-                <a:latin typeface="Arial"/>
-              </a:rPr>
-              <a:t>[P] Rai14, Myl9, Ptprk higher; [R] Loxl1 higher</a:t>
-            </a:r>
-          </a:p>
-        </p:txBody>
-      </p:sp>
-      <p:sp>
-        <p:nvSpPr>
-          <p:cNvPr id="24" name="TextBox 23"/>
+              <a:rPr sz="1050" b="1" i="0">
+                <a:solidFill>
+                  <a:srgbClr val="D96552"/>
+                </a:solidFill>
+                <a:latin typeface="Arial"/>
+              </a:rPr>
+              <a:t>Promoted</a:t>
+            </a:r>
+          </a:p>
+        </p:txBody>
+      </p:sp>
+      <p:sp>
+        <p:nvSpPr>
+          <p:cNvPr id="34" name="TextBox 33"/>
           <p:cNvSpPr txBox="1"/>
           <p:nvPr/>
         </p:nvSpPr>
         <p:spPr>
           <a:xfrm>
-            <a:off x="6583680" y="4178808"/>
-            <a:ext cx="4754880" cy="603504"/>
+            <a:off x="3456432" y="4133088"/>
+            <a:ext cx="2816352" cy="320040"/>
           </a:xfrm>
           <a:prstGeom prst="rect">
             <a:avLst/>
@@ -32288,6 +32690,123 @@
               </a:spcAft>
             </a:pPr>
             <a:r>
+              <a:rPr sz="1050" b="0" i="0">
+                <a:solidFill>
+                  <a:srgbClr val="263746"/>
+                </a:solidFill>
+                <a:latin typeface="Arial"/>
+              </a:rPr>
+              <a:t>Rai14, Myl9, Ptprk higher</a:t>
+            </a:r>
+          </a:p>
+        </p:txBody>
+      </p:sp>
+      <p:sp>
+        <p:nvSpPr>
+          <p:cNvPr id="35" name="TextBox 34"/>
+          <p:cNvSpPr txBox="1"/>
+          <p:nvPr/>
+        </p:nvSpPr>
+        <p:spPr>
+          <a:xfrm>
+            <a:off x="2267712" y="4562856"/>
+            <a:ext cx="1024128" cy="228600"/>
+          </a:xfrm>
+          <a:prstGeom prst="rect">
+            <a:avLst/>
+          </a:prstGeom>
+          <a:noFill/>
+        </p:spPr>
+        <p:txBody>
+          <a:bodyPr wrap="square" lIns="18288" rIns="18288" tIns="18288" bIns="18288" anchor="ctr">
+            <a:spAutoFit/>
+          </a:bodyPr>
+          <a:lstStyle/>
+          <a:p>
+            <a:pPr algn="l">
+              <a:spcAft>
+                <a:spcPts val="0"/>
+              </a:spcAft>
+            </a:pPr>
+            <a:r>
+              <a:rPr sz="1050" b="1" i="0">
+                <a:solidFill>
+                  <a:srgbClr val="178681"/>
+                </a:solidFill>
+                <a:latin typeface="Arial"/>
+              </a:rPr>
+              <a:t>Reinforced</a:t>
+            </a:r>
+          </a:p>
+        </p:txBody>
+      </p:sp>
+      <p:sp>
+        <p:nvSpPr>
+          <p:cNvPr id="36" name="TextBox 35"/>
+          <p:cNvSpPr txBox="1"/>
+          <p:nvPr/>
+        </p:nvSpPr>
+        <p:spPr>
+          <a:xfrm>
+            <a:off x="3456432" y="4526280"/>
+            <a:ext cx="2816352" cy="320040"/>
+          </a:xfrm>
+          <a:prstGeom prst="rect">
+            <a:avLst/>
+          </a:prstGeom>
+          <a:noFill/>
+        </p:spPr>
+        <p:txBody>
+          <a:bodyPr wrap="square" lIns="18288" rIns="18288" tIns="18288" bIns="18288" anchor="ctr">
+            <a:spAutoFit/>
+          </a:bodyPr>
+          <a:lstStyle/>
+          <a:p>
+            <a:pPr algn="l">
+              <a:spcAft>
+                <a:spcPts val="0"/>
+              </a:spcAft>
+            </a:pPr>
+            <a:r>
+              <a:rPr sz="1050" b="0" i="0">
+                <a:solidFill>
+                  <a:srgbClr val="263746"/>
+                </a:solidFill>
+                <a:latin typeface="Arial"/>
+              </a:rPr>
+              <a:t>Loxl1 higher</a:t>
+            </a:r>
+          </a:p>
+        </p:txBody>
+      </p:sp>
+      <p:sp>
+        <p:nvSpPr>
+          <p:cNvPr id="37" name="TextBox 36"/>
+          <p:cNvSpPr txBox="1"/>
+          <p:nvPr/>
+        </p:nvSpPr>
+        <p:spPr>
+          <a:xfrm>
+            <a:off x="6583680" y="4178808"/>
+            <a:ext cx="4754880" cy="603504"/>
+          </a:xfrm>
+          <a:prstGeom prst="rect">
+            <a:avLst/>
+          </a:prstGeom>
+          <a:noFill/>
+        </p:spPr>
+        <p:txBody>
+          <a:bodyPr wrap="square" lIns="18288" rIns="18288" tIns="18288" bIns="18288" anchor="ctr">
+            <a:spAutoFit/>
+          </a:bodyPr>
+          <a:lstStyle/>
+          <a:p>
+            <a:pPr algn="l">
+              <a:spcAft>
+                <a:spcPts val="0"/>
+              </a:spcAft>
+            </a:pPr>
+            <a:r>
               <a:rPr sz="1220" b="0" i="0">
                 <a:solidFill>
                   <a:srgbClr val="263746"/>
@@ -32301,7 +32820,7 @@
       </p:sp>
       <p:sp>
         <p:nvSpPr>
-          <p:cNvPr id="25" name="Rectangle 24"/>
+          <p:cNvPr id="38" name="Rectangle 37"/>
           <p:cNvSpPr/>
           <p:nvPr/>
         </p:nvSpPr>
@@ -32346,7 +32865,7 @@
       </p:sp>
       <p:sp>
         <p:nvSpPr>
-          <p:cNvPr id="26" name="Rectangle 25"/>
+          <p:cNvPr id="39" name="Rectangle 38"/>
           <p:cNvSpPr/>
           <p:nvPr/>
         </p:nvSpPr>
@@ -32389,14 +32908,14 @@
       </p:sp>
       <p:sp>
         <p:nvSpPr>
-          <p:cNvPr id="27" name="TextBox 26"/>
+          <p:cNvPr id="40" name="TextBox 39"/>
           <p:cNvSpPr txBox="1"/>
           <p:nvPr/>
         </p:nvSpPr>
         <p:spPr>
           <a:xfrm>
             <a:off x="658368" y="5239512"/>
-            <a:ext cx="1874519" cy="402336"/>
+            <a:ext cx="1481328" cy="402336"/>
           </a:xfrm>
           <a:prstGeom prst="rect">
             <a:avLst/>
@@ -32415,7 +32934,7 @@
               </a:spcAft>
             </a:pPr>
             <a:r>
-              <a:rPr sz="1550" b="1" i="0">
+              <a:rPr sz="1500" b="1" i="0">
                 <a:solidFill>
                   <a:srgbClr val="D37B00"/>
                 </a:solidFill>
@@ -32428,14 +32947,57 @@
       </p:sp>
       <p:sp>
         <p:nvSpPr>
-          <p:cNvPr id="28" name="TextBox 27"/>
+          <p:cNvPr id="41" name="Rectangle 40"/>
+          <p:cNvSpPr/>
+          <p:nvPr/>
+        </p:nvSpPr>
+        <p:spPr>
+          <a:xfrm>
+            <a:off x="2212848" y="5458968"/>
+            <a:ext cx="4041648" cy="10972"/>
+          </a:xfrm>
+          <a:prstGeom prst="rect">
+            <a:avLst/>
+          </a:prstGeom>
+          <a:solidFill>
+            <a:srgbClr val="DDE4E8"/>
+          </a:solidFill>
+          <a:ln>
+            <a:noFill/>
+          </a:ln>
+        </p:spPr>
+        <p:style>
+          <a:lnRef idx="1">
+            <a:schemeClr val="accent1"/>
+          </a:lnRef>
+          <a:fillRef idx="3">
+            <a:schemeClr val="accent1"/>
+          </a:fillRef>
+          <a:effectRef idx="2">
+            <a:schemeClr val="accent1"/>
+          </a:effectRef>
+          <a:fontRef idx="minor">
+            <a:schemeClr val="lt1"/>
+          </a:fontRef>
+        </p:style>
+        <p:txBody>
+          <a:bodyPr rtlCol="0" anchor="ctr"/>
+          <a:lstStyle/>
+          <a:p>
+            <a:pPr algn="ctr"/>
+          </a:p>
+        </p:txBody>
+      </p:sp>
+      <p:sp>
+        <p:nvSpPr>
+          <p:cNvPr id="42" name="TextBox 41"/>
           <p:cNvSpPr txBox="1"/>
           <p:nvPr/>
         </p:nvSpPr>
         <p:spPr>
           <a:xfrm>
-            <a:off x="2697480" y="5166360"/>
-            <a:ext cx="3566160" cy="566928"/>
+            <a:off x="2267712" y="5129784"/>
+            <a:ext cx="1024128" cy="228600"/>
           </a:xfrm>
           <a:prstGeom prst="rect">
             <a:avLst/>
@@ -32454,27 +33016,27 @@
               </a:spcAft>
             </a:pPr>
             <a:r>
-              <a:rPr sz="1250" b="0" i="0">
-                <a:solidFill>
-                  <a:srgbClr val="263746"/>
-                </a:solidFill>
-                <a:latin typeface="Arial"/>
-              </a:rPr>
-              <a:t>[P] Plscr1 higher</a:t>
-            </a:r>
-          </a:p>
-        </p:txBody>
-      </p:sp>
-      <p:sp>
-        <p:nvSpPr>
-          <p:cNvPr id="29" name="TextBox 28"/>
+              <a:rPr sz="1050" b="1" i="0">
+                <a:solidFill>
+                  <a:srgbClr val="D96552"/>
+                </a:solidFill>
+                <a:latin typeface="Arial"/>
+              </a:rPr>
+              <a:t>Promoted</a:t>
+            </a:r>
+          </a:p>
+        </p:txBody>
+      </p:sp>
+      <p:sp>
+        <p:nvSpPr>
+          <p:cNvPr id="43" name="TextBox 42"/>
           <p:cNvSpPr txBox="1"/>
           <p:nvPr/>
         </p:nvSpPr>
         <p:spPr>
           <a:xfrm>
-            <a:off x="6583680" y="5148072"/>
-            <a:ext cx="4754880" cy="603504"/>
+            <a:off x="3456432" y="5102352"/>
+            <a:ext cx="2816352" cy="320040"/>
           </a:xfrm>
           <a:prstGeom prst="rect">
             <a:avLst/>
@@ -32493,27 +33055,27 @@
               </a:spcAft>
             </a:pPr>
             <a:r>
-              <a:rPr sz="1220" b="0" i="0">
+              <a:rPr sz="1050" b="0" i="0">
                 <a:solidFill>
                   <a:srgbClr val="263746"/>
                 </a:solidFill>
                 <a:latin typeface="Arial"/>
               </a:rPr>
-              <a:t>Interferon-linked skin candidate within broader cell-cycle and DNA-repair responses; a single-gene result.</a:t>
-            </a:r>
-          </a:p>
-        </p:txBody>
-      </p:sp>
-      <p:sp>
-        <p:nvSpPr>
-          <p:cNvPr id="30" name="TextBox 29"/>
+              <a:t>Plscr1 higher</a:t>
+            </a:r>
+          </a:p>
+        </p:txBody>
+      </p:sp>
+      <p:sp>
+        <p:nvSpPr>
+          <p:cNvPr id="44" name="TextBox 43"/>
           <p:cNvSpPr txBox="1"/>
           <p:nvPr/>
         </p:nvSpPr>
         <p:spPr>
           <a:xfrm>
-            <a:off x="329184" y="6510528"/>
-            <a:ext cx="10972800" cy="173736"/>
+            <a:off x="2267712" y="5532120"/>
+            <a:ext cx="1024128" cy="228600"/>
           </a:xfrm>
           <a:prstGeom prst="rect">
             <a:avLst/>
@@ -32532,13 +33094,130 @@
               </a:spcAft>
             </a:pPr>
             <a:r>
+              <a:rPr sz="1050" b="1" i="0">
+                <a:solidFill>
+                  <a:srgbClr val="178681"/>
+                </a:solidFill>
+                <a:latin typeface="Arial"/>
+              </a:rPr>
+              <a:t>Reinforced</a:t>
+            </a:r>
+          </a:p>
+        </p:txBody>
+      </p:sp>
+      <p:sp>
+        <p:nvSpPr>
+          <p:cNvPr id="45" name="TextBox 44"/>
+          <p:cNvSpPr txBox="1"/>
+          <p:nvPr/>
+        </p:nvSpPr>
+        <p:spPr>
+          <a:xfrm>
+            <a:off x="3456432" y="5495544"/>
+            <a:ext cx="2816352" cy="320040"/>
+          </a:xfrm>
+          <a:prstGeom prst="rect">
+            <a:avLst/>
+          </a:prstGeom>
+          <a:noFill/>
+        </p:spPr>
+        <p:txBody>
+          <a:bodyPr wrap="square" lIns="18288" rIns="18288" tIns="18288" bIns="18288" anchor="ctr">
+            <a:spAutoFit/>
+          </a:bodyPr>
+          <a:lstStyle/>
+          <a:p>
+            <a:pPr algn="l">
+              <a:spcAft>
+                <a:spcPts val="0"/>
+              </a:spcAft>
+            </a:pPr>
+            <a:r>
+              <a:rPr sz="1050" b="0" i="0">
+                <a:solidFill>
+                  <a:srgbClr val="263746"/>
+                </a:solidFill>
+                <a:latin typeface="Arial"/>
+              </a:rPr>
+              <a:t>None</a:t>
+            </a:r>
+          </a:p>
+        </p:txBody>
+      </p:sp>
+      <p:sp>
+        <p:nvSpPr>
+          <p:cNvPr id="46" name="TextBox 45"/>
+          <p:cNvSpPr txBox="1"/>
+          <p:nvPr/>
+        </p:nvSpPr>
+        <p:spPr>
+          <a:xfrm>
+            <a:off x="6583680" y="5148072"/>
+            <a:ext cx="4754880" cy="603504"/>
+          </a:xfrm>
+          <a:prstGeom prst="rect">
+            <a:avLst/>
+          </a:prstGeom>
+          <a:noFill/>
+        </p:spPr>
+        <p:txBody>
+          <a:bodyPr wrap="square" lIns="18288" rIns="18288" tIns="18288" bIns="18288" anchor="ctr">
+            <a:spAutoFit/>
+          </a:bodyPr>
+          <a:lstStyle/>
+          <a:p>
+            <a:pPr algn="l">
+              <a:spcAft>
+                <a:spcPts val="0"/>
+              </a:spcAft>
+            </a:pPr>
+            <a:r>
+              <a:rPr sz="1220" b="0" i="0">
+                <a:solidFill>
+                  <a:srgbClr val="263746"/>
+                </a:solidFill>
+                <a:latin typeface="Arial"/>
+              </a:rPr>
+              <a:t>Interferon-linked skin candidate within broader cell-cycle and DNA-repair responses; a single-gene result.</a:t>
+            </a:r>
+          </a:p>
+        </p:txBody>
+      </p:sp>
+      <p:sp>
+        <p:nvSpPr>
+          <p:cNvPr id="47" name="TextBox 46"/>
+          <p:cNvSpPr txBox="1"/>
+          <p:nvPr/>
+        </p:nvSpPr>
+        <p:spPr>
+          <a:xfrm>
+            <a:off x="329184" y="6510528"/>
+            <a:ext cx="10972800" cy="173736"/>
+          </a:xfrm>
+          <a:prstGeom prst="rect">
+            <a:avLst/>
+          </a:prstGeom>
+          <a:noFill/>
+        </p:spPr>
+        <p:txBody>
+          <a:bodyPr wrap="square" lIns="18288" rIns="18288" tIns="18288" bIns="18288" anchor="ctr">
+            <a:spAutoFit/>
+          </a:bodyPr>
+          <a:lstStyle/>
+          <a:p>
+            <a:pPr algn="l">
+              <a:spcAft>
+                <a:spcPts val="0"/>
+              </a:spcAft>
+            </a:pPr>
+            <a:r>
               <a:rPr sz="720" b="0" i="0">
                 <a:solidFill>
                   <a:srgbClr val="8A969E"/>
                 </a:solidFill>
                 <a:latin typeface="Arial"/>
               </a:rPr>
-              <a:t>[P] promoted; [R] reinforced. All listed effects passed BH FDR in observed OSDR profiles.</a:t>
+              <a:t>All listed effects passed BH FDR in observed OSDR profiles; 'None' means no gene in that selection category.</a:t>
             </a:r>
           </a:p>
         </p:txBody>
@@ -32707,7 +33386,7 @@
                 </a:solidFill>
                 <a:latin typeface="Arial"/>
               </a:rPr>
-              <a:t>Each row reports its own selected genes and the narrowest supported interpretation.</a:t>
+              <a:t>Promoted and reinforced selections are separated within every tissue.</a:t>
             </a:r>
           </a:p>
         </p:txBody>
@@ -32721,7 +33400,7 @@
         <p:spPr>
           <a:xfrm>
             <a:off x="658368" y="1828800"/>
-            <a:ext cx="1874519" cy="256032"/>
+            <a:ext cx="1554480" cy="256032"/>
           </a:xfrm>
           <a:prstGeom prst="rect">
             <a:avLst/>
@@ -32759,8 +33438,8 @@
         </p:nvSpPr>
         <p:spPr>
           <a:xfrm>
-            <a:off x="2697480" y="1828800"/>
-            <a:ext cx="3566160" cy="256032"/>
+            <a:off x="2267712" y="1828800"/>
+            <a:ext cx="1051560" cy="256032"/>
           </a:xfrm>
           <a:prstGeom prst="rect">
             <a:avLst/>
@@ -32785,7 +33464,7 @@
                 </a:solidFill>
                 <a:latin typeface="Arial"/>
               </a:rPr>
-              <a:t>Synthetic-informed genes</a:t>
+              <a:t>Selection</a:t>
             </a:r>
           </a:p>
         </p:txBody>
@@ -32798,8 +33477,8 @@
         </p:nvSpPr>
         <p:spPr>
           <a:xfrm>
-            <a:off x="6583680" y="1828800"/>
-            <a:ext cx="4663440" cy="256032"/>
+            <a:off x="3456432" y="1828800"/>
+            <a:ext cx="2880360" cy="256032"/>
           </a:xfrm>
           <a:prstGeom prst="rect">
             <a:avLst/>
@@ -32824,6 +33503,45 @@
                 </a:solidFill>
                 <a:latin typeface="Arial"/>
               </a:rPr>
+              <a:t>Genes and FLT direction</a:t>
+            </a:r>
+          </a:p>
+        </p:txBody>
+      </p:sp>
+      <p:sp>
+        <p:nvSpPr>
+          <p:cNvPr id="10" name="TextBox 9"/>
+          <p:cNvSpPr txBox="1"/>
+          <p:nvPr/>
+        </p:nvSpPr>
+        <p:spPr>
+          <a:xfrm>
+            <a:off x="6583680" y="1828800"/>
+            <a:ext cx="4663440" cy="256032"/>
+          </a:xfrm>
+          <a:prstGeom prst="rect">
+            <a:avLst/>
+          </a:prstGeom>
+          <a:noFill/>
+        </p:spPr>
+        <p:txBody>
+          <a:bodyPr wrap="square" lIns="18288" rIns="18288" tIns="18288" bIns="18288" anchor="t">
+            <a:spAutoFit/>
+          </a:bodyPr>
+          <a:lstStyle/>
+          <a:p>
+            <a:pPr algn="l">
+              <a:spcAft>
+                <a:spcPts val="0"/>
+              </a:spcAft>
+            </a:pPr>
+            <a:r>
+              <a:rPr sz="1150" b="1" i="0">
+                <a:solidFill>
+                  <a:srgbClr val="59697A"/>
+                </a:solidFill>
+                <a:latin typeface="Arial"/>
+              </a:rPr>
               <a:t>Interpretation</a:t>
             </a:r>
           </a:p>
@@ -32831,7 +33549,7 @@
       </p:sp>
       <p:sp>
         <p:nvSpPr>
-          <p:cNvPr id="10" name="Rectangle 9"/>
+          <p:cNvPr id="11" name="Rectangle 10"/>
           <p:cNvSpPr/>
           <p:nvPr/>
         </p:nvSpPr>
@@ -32876,7 +33594,7 @@
       </p:sp>
       <p:sp>
         <p:nvSpPr>
-          <p:cNvPr id="11" name="Rectangle 10"/>
+          <p:cNvPr id="12" name="Rectangle 11"/>
           <p:cNvSpPr/>
           <p:nvPr/>
         </p:nvSpPr>
@@ -32919,14 +33637,14 @@
       </p:sp>
       <p:sp>
         <p:nvSpPr>
-          <p:cNvPr id="12" name="TextBox 11"/>
+          <p:cNvPr id="13" name="TextBox 12"/>
           <p:cNvSpPr txBox="1"/>
           <p:nvPr/>
         </p:nvSpPr>
         <p:spPr>
           <a:xfrm>
             <a:off x="658368" y="2331720"/>
-            <a:ext cx="1874519" cy="402336"/>
+            <a:ext cx="1481328" cy="402336"/>
           </a:xfrm>
           <a:prstGeom prst="rect">
             <a:avLst/>
@@ -32945,7 +33663,7 @@
               </a:spcAft>
             </a:pPr>
             <a:r>
-              <a:rPr sz="1550" b="1" i="0">
+              <a:rPr sz="1500" b="1" i="0">
                 <a:solidFill>
                   <a:srgbClr val="478A64"/>
                 </a:solidFill>
@@ -32958,14 +33676,57 @@
       </p:sp>
       <p:sp>
         <p:nvSpPr>
-          <p:cNvPr id="13" name="TextBox 12"/>
+          <p:cNvPr id="14" name="Rectangle 13"/>
+          <p:cNvSpPr/>
+          <p:nvPr/>
+        </p:nvSpPr>
+        <p:spPr>
+          <a:xfrm>
+            <a:off x="2212848" y="2551176"/>
+            <a:ext cx="4041648" cy="10972"/>
+          </a:xfrm>
+          <a:prstGeom prst="rect">
+            <a:avLst/>
+          </a:prstGeom>
+          <a:solidFill>
+            <a:srgbClr val="DDE4E8"/>
+          </a:solidFill>
+          <a:ln>
+            <a:noFill/>
+          </a:ln>
+        </p:spPr>
+        <p:style>
+          <a:lnRef idx="1">
+            <a:schemeClr val="accent1"/>
+          </a:lnRef>
+          <a:fillRef idx="3">
+            <a:schemeClr val="accent1"/>
+          </a:fillRef>
+          <a:effectRef idx="2">
+            <a:schemeClr val="accent1"/>
+          </a:effectRef>
+          <a:fontRef idx="minor">
+            <a:schemeClr val="lt1"/>
+          </a:fontRef>
+        </p:style>
+        <p:txBody>
+          <a:bodyPr rtlCol="0" anchor="ctr"/>
+          <a:lstStyle/>
+          <a:p>
+            <a:pPr algn="ctr"/>
+          </a:p>
+        </p:txBody>
+      </p:sp>
+      <p:sp>
+        <p:nvSpPr>
+          <p:cNvPr id="15" name="TextBox 14"/>
           <p:cNvSpPr txBox="1"/>
           <p:nvPr/>
         </p:nvSpPr>
         <p:spPr>
           <a:xfrm>
-            <a:off x="2697480" y="2258568"/>
-            <a:ext cx="3566160" cy="566928"/>
+            <a:off x="2267712" y="2221992"/>
+            <a:ext cx="1024128" cy="228600"/>
           </a:xfrm>
           <a:prstGeom prst="rect">
             <a:avLst/>
@@ -32984,27 +33745,27 @@
               </a:spcAft>
             </a:pPr>
             <a:r>
-              <a:rPr sz="1250" b="0" i="0">
-                <a:solidFill>
-                  <a:srgbClr val="263746"/>
-                </a:solidFill>
-                <a:latin typeface="Arial"/>
-              </a:rPr>
-              <a:t>[R] Klhl21 lower</a:t>
-            </a:r>
-          </a:p>
-        </p:txBody>
-      </p:sp>
-      <p:sp>
-        <p:nvSpPr>
-          <p:cNvPr id="14" name="TextBox 13"/>
+              <a:rPr sz="1050" b="1" i="0">
+                <a:solidFill>
+                  <a:srgbClr val="D96552"/>
+                </a:solidFill>
+                <a:latin typeface="Arial"/>
+              </a:rPr>
+              <a:t>Promoted</a:t>
+            </a:r>
+          </a:p>
+        </p:txBody>
+      </p:sp>
+      <p:sp>
+        <p:nvSpPr>
+          <p:cNvPr id="16" name="TextBox 15"/>
           <p:cNvSpPr txBox="1"/>
           <p:nvPr/>
         </p:nvSpPr>
         <p:spPr>
           <a:xfrm>
-            <a:off x="6583680" y="2240280"/>
-            <a:ext cx="4754880" cy="603504"/>
+            <a:off x="3456432" y="2194560"/>
+            <a:ext cx="2816352" cy="320040"/>
           </a:xfrm>
           <a:prstGeom prst="rect">
             <a:avLst/>
@@ -33023,6 +33784,123 @@
               </a:spcAft>
             </a:pPr>
             <a:r>
+              <a:rPr sz="1050" b="0" i="0">
+                <a:solidFill>
+                  <a:srgbClr val="263746"/>
+                </a:solidFill>
+                <a:latin typeface="Arial"/>
+              </a:rPr>
+              <a:t>None</a:t>
+            </a:r>
+          </a:p>
+        </p:txBody>
+      </p:sp>
+      <p:sp>
+        <p:nvSpPr>
+          <p:cNvPr id="17" name="TextBox 16"/>
+          <p:cNvSpPr txBox="1"/>
+          <p:nvPr/>
+        </p:nvSpPr>
+        <p:spPr>
+          <a:xfrm>
+            <a:off x="2267712" y="2624328"/>
+            <a:ext cx="1024128" cy="228600"/>
+          </a:xfrm>
+          <a:prstGeom prst="rect">
+            <a:avLst/>
+          </a:prstGeom>
+          <a:noFill/>
+        </p:spPr>
+        <p:txBody>
+          <a:bodyPr wrap="square" lIns="18288" rIns="18288" tIns="18288" bIns="18288" anchor="ctr">
+            <a:spAutoFit/>
+          </a:bodyPr>
+          <a:lstStyle/>
+          <a:p>
+            <a:pPr algn="l">
+              <a:spcAft>
+                <a:spcPts val="0"/>
+              </a:spcAft>
+            </a:pPr>
+            <a:r>
+              <a:rPr sz="1050" b="1" i="0">
+                <a:solidFill>
+                  <a:srgbClr val="178681"/>
+                </a:solidFill>
+                <a:latin typeface="Arial"/>
+              </a:rPr>
+              <a:t>Reinforced</a:t>
+            </a:r>
+          </a:p>
+        </p:txBody>
+      </p:sp>
+      <p:sp>
+        <p:nvSpPr>
+          <p:cNvPr id="18" name="TextBox 17"/>
+          <p:cNvSpPr txBox="1"/>
+          <p:nvPr/>
+        </p:nvSpPr>
+        <p:spPr>
+          <a:xfrm>
+            <a:off x="3456432" y="2587752"/>
+            <a:ext cx="2816352" cy="320040"/>
+          </a:xfrm>
+          <a:prstGeom prst="rect">
+            <a:avLst/>
+          </a:prstGeom>
+          <a:noFill/>
+        </p:spPr>
+        <p:txBody>
+          <a:bodyPr wrap="square" lIns="18288" rIns="18288" tIns="18288" bIns="18288" anchor="ctr">
+            <a:spAutoFit/>
+          </a:bodyPr>
+          <a:lstStyle/>
+          <a:p>
+            <a:pPr algn="l">
+              <a:spcAft>
+                <a:spcPts val="0"/>
+              </a:spcAft>
+            </a:pPr>
+            <a:r>
+              <a:rPr sz="1050" b="0" i="0">
+                <a:solidFill>
+                  <a:srgbClr val="263746"/>
+                </a:solidFill>
+                <a:latin typeface="Arial"/>
+              </a:rPr>
+              <a:t>Klhl21 lower</a:t>
+            </a:r>
+          </a:p>
+        </p:txBody>
+      </p:sp>
+      <p:sp>
+        <p:nvSpPr>
+          <p:cNvPr id="19" name="TextBox 18"/>
+          <p:cNvSpPr txBox="1"/>
+          <p:nvPr/>
+        </p:nvSpPr>
+        <p:spPr>
+          <a:xfrm>
+            <a:off x="6583680" y="2240280"/>
+            <a:ext cx="4754880" cy="603504"/>
+          </a:xfrm>
+          <a:prstGeom prst="rect">
+            <a:avLst/>
+          </a:prstGeom>
+          <a:noFill/>
+        </p:spPr>
+        <p:txBody>
+          <a:bodyPr wrap="square" lIns="18288" rIns="18288" tIns="18288" bIns="18288" anchor="ctr">
+            <a:spAutoFit/>
+          </a:bodyPr>
+          <a:lstStyle/>
+          <a:p>
+            <a:pPr algn="l">
+              <a:spcAft>
+                <a:spcPts val="0"/>
+              </a:spcAft>
+            </a:pPr>
+            <a:r>
               <a:rPr sz="1220" b="0" i="0">
                 <a:solidFill>
                   <a:srgbClr val="263746"/>
@@ -33036,7 +33914,7 @@
       </p:sp>
       <p:sp>
         <p:nvSpPr>
-          <p:cNvPr id="15" name="Rectangle 14"/>
+          <p:cNvPr id="20" name="Rectangle 19"/>
           <p:cNvSpPr/>
           <p:nvPr/>
         </p:nvSpPr>
@@ -33081,7 +33959,7 @@
       </p:sp>
       <p:sp>
         <p:nvSpPr>
-          <p:cNvPr id="16" name="Rectangle 15"/>
+          <p:cNvPr id="21" name="Rectangle 20"/>
           <p:cNvSpPr/>
           <p:nvPr/>
         </p:nvSpPr>
@@ -33124,14 +34002,14 @@
       </p:sp>
       <p:sp>
         <p:nvSpPr>
-          <p:cNvPr id="17" name="TextBox 16"/>
+          <p:cNvPr id="22" name="TextBox 21"/>
           <p:cNvSpPr txBox="1"/>
           <p:nvPr/>
         </p:nvSpPr>
         <p:spPr>
           <a:xfrm>
             <a:off x="658368" y="3300984"/>
-            <a:ext cx="1874519" cy="402336"/>
+            <a:ext cx="1481328" cy="402336"/>
           </a:xfrm>
           <a:prstGeom prst="rect">
             <a:avLst/>
@@ -33150,7 +34028,7 @@
               </a:spcAft>
             </a:pPr>
             <a:r>
-              <a:rPr sz="1550" b="1" i="0">
+              <a:rPr sz="1500" b="1" i="0">
                 <a:solidFill>
                   <a:srgbClr val="8A969E"/>
                 </a:solidFill>
@@ -33163,14 +34041,57 @@
       </p:sp>
       <p:sp>
         <p:nvSpPr>
-          <p:cNvPr id="18" name="TextBox 17"/>
+          <p:cNvPr id="23" name="Rectangle 22"/>
+          <p:cNvSpPr/>
+          <p:nvPr/>
+        </p:nvSpPr>
+        <p:spPr>
+          <a:xfrm>
+            <a:off x="2212848" y="3520440"/>
+            <a:ext cx="4041648" cy="10972"/>
+          </a:xfrm>
+          <a:prstGeom prst="rect">
+            <a:avLst/>
+          </a:prstGeom>
+          <a:solidFill>
+            <a:srgbClr val="DDE4E8"/>
+          </a:solidFill>
+          <a:ln>
+            <a:noFill/>
+          </a:ln>
+        </p:spPr>
+        <p:style>
+          <a:lnRef idx="1">
+            <a:schemeClr val="accent1"/>
+          </a:lnRef>
+          <a:fillRef idx="3">
+            <a:schemeClr val="accent1"/>
+          </a:fillRef>
+          <a:effectRef idx="2">
+            <a:schemeClr val="accent1"/>
+          </a:effectRef>
+          <a:fontRef idx="minor">
+            <a:schemeClr val="lt1"/>
+          </a:fontRef>
+        </p:style>
+        <p:txBody>
+          <a:bodyPr rtlCol="0" anchor="ctr"/>
+          <a:lstStyle/>
+          <a:p>
+            <a:pPr algn="ctr"/>
+          </a:p>
+        </p:txBody>
+      </p:sp>
+      <p:sp>
+        <p:nvSpPr>
+          <p:cNvPr id="24" name="TextBox 23"/>
           <p:cNvSpPr txBox="1"/>
           <p:nvPr/>
         </p:nvSpPr>
         <p:spPr>
           <a:xfrm>
-            <a:off x="2697480" y="3227832"/>
-            <a:ext cx="3566160" cy="566928"/>
+            <a:off x="2267712" y="3191256"/>
+            <a:ext cx="1024128" cy="228600"/>
           </a:xfrm>
           <a:prstGeom prst="rect">
             <a:avLst/>
@@ -33189,27 +34110,27 @@
               </a:spcAft>
             </a:pPr>
             <a:r>
-              <a:rPr sz="1250" b="0" i="0">
-                <a:solidFill>
-                  <a:srgbClr val="263746"/>
-                </a:solidFill>
-                <a:latin typeface="Arial"/>
-              </a:rPr>
-              <a:t>[P] Psmb8 lower; [R] Tspan4 lower</a:t>
-            </a:r>
-          </a:p>
-        </p:txBody>
-      </p:sp>
-      <p:sp>
-        <p:nvSpPr>
-          <p:cNvPr id="19" name="TextBox 18"/>
+              <a:rPr sz="1050" b="1" i="0">
+                <a:solidFill>
+                  <a:srgbClr val="D96552"/>
+                </a:solidFill>
+                <a:latin typeface="Arial"/>
+              </a:rPr>
+              <a:t>Promoted</a:t>
+            </a:r>
+          </a:p>
+        </p:txBody>
+      </p:sp>
+      <p:sp>
+        <p:nvSpPr>
+          <p:cNvPr id="25" name="TextBox 24"/>
           <p:cNvSpPr txBox="1"/>
           <p:nvPr/>
         </p:nvSpPr>
         <p:spPr>
           <a:xfrm>
-            <a:off x="6583680" y="3209544"/>
-            <a:ext cx="4754880" cy="603504"/>
+            <a:off x="3456432" y="3163824"/>
+            <a:ext cx="2816352" cy="320040"/>
           </a:xfrm>
           <a:prstGeom prst="rect">
             <a:avLst/>
@@ -33228,6 +34149,123 @@
               </a:spcAft>
             </a:pPr>
             <a:r>
+              <a:rPr sz="1050" b="0" i="0">
+                <a:solidFill>
+                  <a:srgbClr val="263746"/>
+                </a:solidFill>
+                <a:latin typeface="Arial"/>
+              </a:rPr>
+              <a:t>Psmb8 lower</a:t>
+            </a:r>
+          </a:p>
+        </p:txBody>
+      </p:sp>
+      <p:sp>
+        <p:nvSpPr>
+          <p:cNvPr id="26" name="TextBox 25"/>
+          <p:cNvSpPr txBox="1"/>
+          <p:nvPr/>
+        </p:nvSpPr>
+        <p:spPr>
+          <a:xfrm>
+            <a:off x="2267712" y="3593592"/>
+            <a:ext cx="1024128" cy="228600"/>
+          </a:xfrm>
+          <a:prstGeom prst="rect">
+            <a:avLst/>
+          </a:prstGeom>
+          <a:noFill/>
+        </p:spPr>
+        <p:txBody>
+          <a:bodyPr wrap="square" lIns="18288" rIns="18288" tIns="18288" bIns="18288" anchor="ctr">
+            <a:spAutoFit/>
+          </a:bodyPr>
+          <a:lstStyle/>
+          <a:p>
+            <a:pPr algn="l">
+              <a:spcAft>
+                <a:spcPts val="0"/>
+              </a:spcAft>
+            </a:pPr>
+            <a:r>
+              <a:rPr sz="1050" b="1" i="0">
+                <a:solidFill>
+                  <a:srgbClr val="178681"/>
+                </a:solidFill>
+                <a:latin typeface="Arial"/>
+              </a:rPr>
+              <a:t>Reinforced</a:t>
+            </a:r>
+          </a:p>
+        </p:txBody>
+      </p:sp>
+      <p:sp>
+        <p:nvSpPr>
+          <p:cNvPr id="27" name="TextBox 26"/>
+          <p:cNvSpPr txBox="1"/>
+          <p:nvPr/>
+        </p:nvSpPr>
+        <p:spPr>
+          <a:xfrm>
+            <a:off x="3456432" y="3557016"/>
+            <a:ext cx="2816352" cy="320040"/>
+          </a:xfrm>
+          <a:prstGeom prst="rect">
+            <a:avLst/>
+          </a:prstGeom>
+          <a:noFill/>
+        </p:spPr>
+        <p:txBody>
+          <a:bodyPr wrap="square" lIns="18288" rIns="18288" tIns="18288" bIns="18288" anchor="ctr">
+            <a:spAutoFit/>
+          </a:bodyPr>
+          <a:lstStyle/>
+          <a:p>
+            <a:pPr algn="l">
+              <a:spcAft>
+                <a:spcPts val="0"/>
+              </a:spcAft>
+            </a:pPr>
+            <a:r>
+              <a:rPr sz="1050" b="0" i="0">
+                <a:solidFill>
+                  <a:srgbClr val="263746"/>
+                </a:solidFill>
+                <a:latin typeface="Arial"/>
+              </a:rPr>
+              <a:t>Tspan4 lower</a:t>
+            </a:r>
+          </a:p>
+        </p:txBody>
+      </p:sp>
+      <p:sp>
+        <p:nvSpPr>
+          <p:cNvPr id="28" name="TextBox 27"/>
+          <p:cNvSpPr txBox="1"/>
+          <p:nvPr/>
+        </p:nvSpPr>
+        <p:spPr>
+          <a:xfrm>
+            <a:off x="6583680" y="3209544"/>
+            <a:ext cx="4754880" cy="603504"/>
+          </a:xfrm>
+          <a:prstGeom prst="rect">
+            <a:avLst/>
+          </a:prstGeom>
+          <a:noFill/>
+        </p:spPr>
+        <p:txBody>
+          <a:bodyPr wrap="square" lIns="18288" rIns="18288" tIns="18288" bIns="18288" anchor="ctr">
+            <a:spAutoFit/>
+          </a:bodyPr>
+          <a:lstStyle/>
+          <a:p>
+            <a:pPr algn="l">
+              <a:spcAft>
+                <a:spcPts val="0"/>
+              </a:spcAft>
+            </a:pPr>
+            <a:r>
               <a:rPr sz="1220" b="0" i="0">
                 <a:solidFill>
                   <a:srgbClr val="263746"/>
@@ -33241,7 +34279,7 @@
       </p:sp>
       <p:sp>
         <p:nvSpPr>
-          <p:cNvPr id="20" name="Rectangle 19"/>
+          <p:cNvPr id="29" name="Rectangle 28"/>
           <p:cNvSpPr/>
           <p:nvPr/>
         </p:nvSpPr>
@@ -33286,7 +34324,7 @@
       </p:sp>
       <p:sp>
         <p:nvSpPr>
-          <p:cNvPr id="21" name="Rectangle 20"/>
+          <p:cNvPr id="30" name="Rectangle 29"/>
           <p:cNvSpPr/>
           <p:nvPr/>
         </p:nvSpPr>
@@ -33329,14 +34367,14 @@
       </p:sp>
       <p:sp>
         <p:nvSpPr>
-          <p:cNvPr id="22" name="TextBox 21"/>
+          <p:cNvPr id="31" name="TextBox 30"/>
           <p:cNvSpPr txBox="1"/>
           <p:nvPr/>
         </p:nvSpPr>
         <p:spPr>
           <a:xfrm>
             <a:off x="658368" y="4270248"/>
-            <a:ext cx="1874519" cy="402336"/>
+            <a:ext cx="1481328" cy="402336"/>
           </a:xfrm>
           <a:prstGeom prst="rect">
             <a:avLst/>
@@ -33355,7 +34393,7 @@
               </a:spcAft>
             </a:pPr>
             <a:r>
-              <a:rPr sz="1550" b="1" i="0">
+              <a:rPr sz="1500" b="1" i="0">
                 <a:solidFill>
                   <a:srgbClr val="2D6496"/>
                 </a:solidFill>
@@ -33368,14 +34406,57 @@
       </p:sp>
       <p:sp>
         <p:nvSpPr>
-          <p:cNvPr id="23" name="TextBox 22"/>
+          <p:cNvPr id="32" name="Rectangle 31"/>
+          <p:cNvSpPr/>
+          <p:nvPr/>
+        </p:nvSpPr>
+        <p:spPr>
+          <a:xfrm>
+            <a:off x="2212848" y="4489704"/>
+            <a:ext cx="4041648" cy="10972"/>
+          </a:xfrm>
+          <a:prstGeom prst="rect">
+            <a:avLst/>
+          </a:prstGeom>
+          <a:solidFill>
+            <a:srgbClr val="DDE4E8"/>
+          </a:solidFill>
+          <a:ln>
+            <a:noFill/>
+          </a:ln>
+        </p:spPr>
+        <p:style>
+          <a:lnRef idx="1">
+            <a:schemeClr val="accent1"/>
+          </a:lnRef>
+          <a:fillRef idx="3">
+            <a:schemeClr val="accent1"/>
+          </a:fillRef>
+          <a:effectRef idx="2">
+            <a:schemeClr val="accent1"/>
+          </a:effectRef>
+          <a:fontRef idx="minor">
+            <a:schemeClr val="lt1"/>
+          </a:fontRef>
+        </p:style>
+        <p:txBody>
+          <a:bodyPr rtlCol="0" anchor="ctr"/>
+          <a:lstStyle/>
+          <a:p>
+            <a:pPr algn="ctr"/>
+          </a:p>
+        </p:txBody>
+      </p:sp>
+      <p:sp>
+        <p:nvSpPr>
+          <p:cNvPr id="33" name="TextBox 32"/>
           <p:cNvSpPr txBox="1"/>
           <p:nvPr/>
         </p:nvSpPr>
         <p:spPr>
           <a:xfrm>
-            <a:off x="2697480" y="4197096"/>
-            <a:ext cx="3566160" cy="566928"/>
+            <a:off x="2267712" y="4160520"/>
+            <a:ext cx="1024128" cy="228600"/>
           </a:xfrm>
           <a:prstGeom prst="rect">
             <a:avLst/>
@@ -33394,27 +34475,27 @@
               </a:spcAft>
             </a:pPr>
             <a:r>
-              <a:rPr sz="1250" b="0" i="0">
-                <a:solidFill>
-                  <a:srgbClr val="263746"/>
-                </a:solidFill>
-                <a:latin typeface="Arial"/>
-              </a:rPr>
-              <a:t>[P] Nfkbia higher; [P] Fhl2 lower</a:t>
-            </a:r>
-          </a:p>
-        </p:txBody>
-      </p:sp>
-      <p:sp>
-        <p:nvSpPr>
-          <p:cNvPr id="24" name="TextBox 23"/>
+              <a:rPr sz="1050" b="1" i="0">
+                <a:solidFill>
+                  <a:srgbClr val="D96552"/>
+                </a:solidFill>
+                <a:latin typeface="Arial"/>
+              </a:rPr>
+              <a:t>Promoted</a:t>
+            </a:r>
+          </a:p>
+        </p:txBody>
+      </p:sp>
+      <p:sp>
+        <p:nvSpPr>
+          <p:cNvPr id="34" name="TextBox 33"/>
           <p:cNvSpPr txBox="1"/>
           <p:nvPr/>
         </p:nvSpPr>
         <p:spPr>
           <a:xfrm>
-            <a:off x="6583680" y="4178808"/>
-            <a:ext cx="4754880" cy="603504"/>
+            <a:off x="3456432" y="4133088"/>
+            <a:ext cx="2816352" cy="320040"/>
           </a:xfrm>
           <a:prstGeom prst="rect">
             <a:avLst/>
@@ -33433,6 +34514,123 @@
               </a:spcAft>
             </a:pPr>
             <a:r>
+              <a:rPr sz="1050" b="0" i="0">
+                <a:solidFill>
+                  <a:srgbClr val="263746"/>
+                </a:solidFill>
+                <a:latin typeface="Arial"/>
+              </a:rPr>
+              <a:t>Nfkbia higher; Fhl2 lower</a:t>
+            </a:r>
+          </a:p>
+        </p:txBody>
+      </p:sp>
+      <p:sp>
+        <p:nvSpPr>
+          <p:cNvPr id="35" name="TextBox 34"/>
+          <p:cNvSpPr txBox="1"/>
+          <p:nvPr/>
+        </p:nvSpPr>
+        <p:spPr>
+          <a:xfrm>
+            <a:off x="2267712" y="4562856"/>
+            <a:ext cx="1024128" cy="228600"/>
+          </a:xfrm>
+          <a:prstGeom prst="rect">
+            <a:avLst/>
+          </a:prstGeom>
+          <a:noFill/>
+        </p:spPr>
+        <p:txBody>
+          <a:bodyPr wrap="square" lIns="18288" rIns="18288" tIns="18288" bIns="18288" anchor="ctr">
+            <a:spAutoFit/>
+          </a:bodyPr>
+          <a:lstStyle/>
+          <a:p>
+            <a:pPr algn="l">
+              <a:spcAft>
+                <a:spcPts val="0"/>
+              </a:spcAft>
+            </a:pPr>
+            <a:r>
+              <a:rPr sz="1050" b="1" i="0">
+                <a:solidFill>
+                  <a:srgbClr val="178681"/>
+                </a:solidFill>
+                <a:latin typeface="Arial"/>
+              </a:rPr>
+              <a:t>Reinforced</a:t>
+            </a:r>
+          </a:p>
+        </p:txBody>
+      </p:sp>
+      <p:sp>
+        <p:nvSpPr>
+          <p:cNvPr id="36" name="TextBox 35"/>
+          <p:cNvSpPr txBox="1"/>
+          <p:nvPr/>
+        </p:nvSpPr>
+        <p:spPr>
+          <a:xfrm>
+            <a:off x="3456432" y="4526280"/>
+            <a:ext cx="2816352" cy="320040"/>
+          </a:xfrm>
+          <a:prstGeom prst="rect">
+            <a:avLst/>
+          </a:prstGeom>
+          <a:noFill/>
+        </p:spPr>
+        <p:txBody>
+          <a:bodyPr wrap="square" lIns="18288" rIns="18288" tIns="18288" bIns="18288" anchor="ctr">
+            <a:spAutoFit/>
+          </a:bodyPr>
+          <a:lstStyle/>
+          <a:p>
+            <a:pPr algn="l">
+              <a:spcAft>
+                <a:spcPts val="0"/>
+              </a:spcAft>
+            </a:pPr>
+            <a:r>
+              <a:rPr sz="1050" b="0" i="0">
+                <a:solidFill>
+                  <a:srgbClr val="263746"/>
+                </a:solidFill>
+                <a:latin typeface="Arial"/>
+              </a:rPr>
+              <a:t>None</a:t>
+            </a:r>
+          </a:p>
+        </p:txBody>
+      </p:sp>
+      <p:sp>
+        <p:nvSpPr>
+          <p:cNvPr id="37" name="TextBox 36"/>
+          <p:cNvSpPr txBox="1"/>
+          <p:nvPr/>
+        </p:nvSpPr>
+        <p:spPr>
+          <a:xfrm>
+            <a:off x="6583680" y="4178808"/>
+            <a:ext cx="4754880" cy="603504"/>
+          </a:xfrm>
+          <a:prstGeom prst="rect">
+            <a:avLst/>
+          </a:prstGeom>
+          <a:noFill/>
+        </p:spPr>
+        <p:txBody>
+          <a:bodyPr wrap="square" lIns="18288" rIns="18288" tIns="18288" bIns="18288" anchor="ctr">
+            <a:spAutoFit/>
+          </a:bodyPr>
+          <a:lstStyle/>
+          <a:p>
+            <a:pPr algn="l">
+              <a:spcAft>
+                <a:spcPts val="0"/>
+              </a:spcAft>
+            </a:pPr>
+            <a:r>
               <a:rPr sz="1220" b="0" i="0">
                 <a:solidFill>
                   <a:srgbClr val="263746"/>
@@ -33446,7 +34644,7 @@
       </p:sp>
       <p:sp>
         <p:nvSpPr>
-          <p:cNvPr id="25" name="Rectangle 24"/>
+          <p:cNvPr id="38" name="Rectangle 37"/>
           <p:cNvSpPr/>
           <p:nvPr/>
         </p:nvSpPr>
@@ -33491,7 +34689,7 @@
       </p:sp>
       <p:sp>
         <p:nvSpPr>
-          <p:cNvPr id="26" name="Rectangle 25"/>
+          <p:cNvPr id="39" name="Rectangle 38"/>
           <p:cNvSpPr/>
           <p:nvPr/>
         </p:nvSpPr>
@@ -33534,14 +34732,14 @@
       </p:sp>
       <p:sp>
         <p:nvSpPr>
-          <p:cNvPr id="27" name="TextBox 26"/>
+          <p:cNvPr id="40" name="TextBox 39"/>
           <p:cNvSpPr txBox="1"/>
           <p:nvPr/>
         </p:nvSpPr>
         <p:spPr>
           <a:xfrm>
             <a:off x="658368" y="5239512"/>
-            <a:ext cx="1874519" cy="402336"/>
+            <a:ext cx="1481328" cy="402336"/>
           </a:xfrm>
           <a:prstGeom prst="rect">
             <a:avLst/>
@@ -33560,7 +34758,7 @@
               </a:spcAft>
             </a:pPr>
             <a:r>
-              <a:rPr sz="1550" b="1" i="0">
+              <a:rPr sz="1500" b="1" i="0">
                 <a:solidFill>
                   <a:srgbClr val="178681"/>
                 </a:solidFill>
@@ -33573,14 +34771,57 @@
       </p:sp>
       <p:sp>
         <p:nvSpPr>
-          <p:cNvPr id="28" name="TextBox 27"/>
+          <p:cNvPr id="41" name="Rectangle 40"/>
+          <p:cNvSpPr/>
+          <p:nvPr/>
+        </p:nvSpPr>
+        <p:spPr>
+          <a:xfrm>
+            <a:off x="2212848" y="5458968"/>
+            <a:ext cx="4041648" cy="10972"/>
+          </a:xfrm>
+          <a:prstGeom prst="rect">
+            <a:avLst/>
+          </a:prstGeom>
+          <a:solidFill>
+            <a:srgbClr val="DDE4E8"/>
+          </a:solidFill>
+          <a:ln>
+            <a:noFill/>
+          </a:ln>
+        </p:spPr>
+        <p:style>
+          <a:lnRef idx="1">
+            <a:schemeClr val="accent1"/>
+          </a:lnRef>
+          <a:fillRef idx="3">
+            <a:schemeClr val="accent1"/>
+          </a:fillRef>
+          <a:effectRef idx="2">
+            <a:schemeClr val="accent1"/>
+          </a:effectRef>
+          <a:fontRef idx="minor">
+            <a:schemeClr val="lt1"/>
+          </a:fontRef>
+        </p:style>
+        <p:txBody>
+          <a:bodyPr rtlCol="0" anchor="ctr"/>
+          <a:lstStyle/>
+          <a:p>
+            <a:pPr algn="ctr"/>
+          </a:p>
+        </p:txBody>
+      </p:sp>
+      <p:sp>
+        <p:nvSpPr>
+          <p:cNvPr id="42" name="TextBox 41"/>
           <p:cNvSpPr txBox="1"/>
           <p:nvPr/>
         </p:nvSpPr>
         <p:spPr>
           <a:xfrm>
-            <a:off x="2697480" y="5166360"/>
-            <a:ext cx="3566160" cy="566928"/>
+            <a:off x="2267712" y="5129784"/>
+            <a:ext cx="1024128" cy="228600"/>
           </a:xfrm>
           <a:prstGeom prst="rect">
             <a:avLst/>
@@ -33599,27 +34840,27 @@
               </a:spcAft>
             </a:pPr>
             <a:r>
-              <a:rPr sz="1250" b="0" i="0">
-                <a:solidFill>
-                  <a:srgbClr val="263746"/>
-                </a:solidFill>
-                <a:latin typeface="Arial"/>
-              </a:rPr>
-              <a:t>[P] Cebpd higher; [R] Cdkn1a, St3gal5, Bnip3 higher</a:t>
-            </a:r>
-          </a:p>
-        </p:txBody>
-      </p:sp>
-      <p:sp>
-        <p:nvSpPr>
-          <p:cNvPr id="29" name="TextBox 28"/>
+              <a:rPr sz="1050" b="1" i="0">
+                <a:solidFill>
+                  <a:srgbClr val="D96552"/>
+                </a:solidFill>
+                <a:latin typeface="Arial"/>
+              </a:rPr>
+              <a:t>Promoted</a:t>
+            </a:r>
+          </a:p>
+        </p:txBody>
+      </p:sp>
+      <p:sp>
+        <p:nvSpPr>
+          <p:cNvPr id="43" name="TextBox 42"/>
           <p:cNvSpPr txBox="1"/>
           <p:nvPr/>
         </p:nvSpPr>
         <p:spPr>
           <a:xfrm>
-            <a:off x="6583680" y="5148072"/>
-            <a:ext cx="4754880" cy="603504"/>
+            <a:off x="3456432" y="5102352"/>
+            <a:ext cx="2816352" cy="320040"/>
           </a:xfrm>
           <a:prstGeom prst="rect">
             <a:avLst/>
@@ -33638,27 +34879,27 @@
               </a:spcAft>
             </a:pPr>
             <a:r>
-              <a:rPr sz="1220" b="0" i="0">
+              <a:rPr sz="1050" b="0" i="0">
                 <a:solidFill>
                   <a:srgbClr val="263746"/>
                 </a:solidFill>
                 <a:latin typeface="Arial"/>
               </a:rPr>
-              <a:t>Stress, cell-cycle, ganglioside-signaling and mitophagy candidates with mixed or complementary prior evidence.</a:t>
-            </a:r>
-          </a:p>
-        </p:txBody>
-      </p:sp>
-      <p:sp>
-        <p:nvSpPr>
-          <p:cNvPr id="30" name="TextBox 29"/>
+              <a:t>Cebpd higher</a:t>
+            </a:r>
+          </a:p>
+        </p:txBody>
+      </p:sp>
+      <p:sp>
+        <p:nvSpPr>
+          <p:cNvPr id="44" name="TextBox 43"/>
           <p:cNvSpPr txBox="1"/>
           <p:nvPr/>
         </p:nvSpPr>
         <p:spPr>
           <a:xfrm>
-            <a:off x="329184" y="6510528"/>
-            <a:ext cx="10972800" cy="173736"/>
+            <a:off x="2267712" y="5532120"/>
+            <a:ext cx="1024128" cy="228600"/>
           </a:xfrm>
           <a:prstGeom prst="rect">
             <a:avLst/>
@@ -33677,13 +34918,130 @@
               </a:spcAft>
             </a:pPr>
             <a:r>
+              <a:rPr sz="1050" b="1" i="0">
+                <a:solidFill>
+                  <a:srgbClr val="178681"/>
+                </a:solidFill>
+                <a:latin typeface="Arial"/>
+              </a:rPr>
+              <a:t>Reinforced</a:t>
+            </a:r>
+          </a:p>
+        </p:txBody>
+      </p:sp>
+      <p:sp>
+        <p:nvSpPr>
+          <p:cNvPr id="45" name="TextBox 44"/>
+          <p:cNvSpPr txBox="1"/>
+          <p:nvPr/>
+        </p:nvSpPr>
+        <p:spPr>
+          <a:xfrm>
+            <a:off x="3456432" y="5495544"/>
+            <a:ext cx="2816352" cy="320040"/>
+          </a:xfrm>
+          <a:prstGeom prst="rect">
+            <a:avLst/>
+          </a:prstGeom>
+          <a:noFill/>
+        </p:spPr>
+        <p:txBody>
+          <a:bodyPr wrap="square" lIns="18288" rIns="18288" tIns="18288" bIns="18288" anchor="ctr">
+            <a:spAutoFit/>
+          </a:bodyPr>
+          <a:lstStyle/>
+          <a:p>
+            <a:pPr algn="l">
+              <a:spcAft>
+                <a:spcPts val="0"/>
+              </a:spcAft>
+            </a:pPr>
+            <a:r>
+              <a:rPr sz="1050" b="0" i="0">
+                <a:solidFill>
+                  <a:srgbClr val="263746"/>
+                </a:solidFill>
+                <a:latin typeface="Arial"/>
+              </a:rPr>
+              <a:t>Cdkn1a, St3gal5, Bnip3 higher</a:t>
+            </a:r>
+          </a:p>
+        </p:txBody>
+      </p:sp>
+      <p:sp>
+        <p:nvSpPr>
+          <p:cNvPr id="46" name="TextBox 45"/>
+          <p:cNvSpPr txBox="1"/>
+          <p:nvPr/>
+        </p:nvSpPr>
+        <p:spPr>
+          <a:xfrm>
+            <a:off x="6583680" y="5148072"/>
+            <a:ext cx="4754880" cy="603504"/>
+          </a:xfrm>
+          <a:prstGeom prst="rect">
+            <a:avLst/>
+          </a:prstGeom>
+          <a:noFill/>
+        </p:spPr>
+        <p:txBody>
+          <a:bodyPr wrap="square" lIns="18288" rIns="18288" tIns="18288" bIns="18288" anchor="ctr">
+            <a:spAutoFit/>
+          </a:bodyPr>
+          <a:lstStyle/>
+          <a:p>
+            <a:pPr algn="l">
+              <a:spcAft>
+                <a:spcPts val="0"/>
+              </a:spcAft>
+            </a:pPr>
+            <a:r>
+              <a:rPr sz="1220" b="0" i="0">
+                <a:solidFill>
+                  <a:srgbClr val="263746"/>
+                </a:solidFill>
+                <a:latin typeface="Arial"/>
+              </a:rPr>
+              <a:t>Stress, cell-cycle, ganglioside-signaling and mitophagy candidates with mixed or complementary prior evidence.</a:t>
+            </a:r>
+          </a:p>
+        </p:txBody>
+      </p:sp>
+      <p:sp>
+        <p:nvSpPr>
+          <p:cNvPr id="47" name="TextBox 46"/>
+          <p:cNvSpPr txBox="1"/>
+          <p:nvPr/>
+        </p:nvSpPr>
+        <p:spPr>
+          <a:xfrm>
+            <a:off x="329184" y="6510528"/>
+            <a:ext cx="10972800" cy="173736"/>
+          </a:xfrm>
+          <a:prstGeom prst="rect">
+            <a:avLst/>
+          </a:prstGeom>
+          <a:noFill/>
+        </p:spPr>
+        <p:txBody>
+          <a:bodyPr wrap="square" lIns="18288" rIns="18288" tIns="18288" bIns="18288" anchor="ctr">
+            <a:spAutoFit/>
+          </a:bodyPr>
+          <a:lstStyle/>
+          <a:p>
+            <a:pPr algn="l">
+              <a:spcAft>
+                <a:spcPts val="0"/>
+              </a:spcAft>
+            </a:pPr>
+            <a:r>
               <a:rPr sz="720" b="0" i="0">
                 <a:solidFill>
                   <a:srgbClr val="8A969E"/>
                 </a:solidFill>
                 <a:latin typeface="Arial"/>
               </a:rPr>
-              <a:t>[P] promoted; [R] reinforced. Interpretations follow the independent literature annotations in Table S16.</a:t>
+              <a:t>Interpretations follow the independent literature annotations in Table S16; 'None' means no gene in that selection category.</a:t>
             </a:r>
           </a:p>
         </p:txBody>

--- a/presentation/SLSTP_2026_Generative_Transcriptomics.pptx
+++ b/presentation/SLSTP_2026_Generative_Transcriptomics.pptx
@@ -1571,7 +1571,7 @@
           <a:p/>
           <a:p>
             <a:r>
-              <a:t>We built one pipeline that can change data source, transformation, feature set, harmonization, model, training scope and conditions without changing the evaluation contract. It supports OSDR-only, ARCHS4-only and ARCHS4-pretrained plus OSDR-adapted runs, with pooled or per-tissue cohorts. We completed WGAN-GP and DDIM generator branches. The selected path used TPM, 974 mouse landmarks, no global correction and a DDIM conditioned on tissue, FLT/GC, accession and material.</a:t>
+              <a:t>Each card shows alternatives available at one pipeline stage, and the heavy outlines identify the downstream branch. We used both ARCHS4 and NASA OSDR across multiple studies and all tissues. The selected path used TPM, training-fitted MaxAbs scaling, 974 mouse landmarks, no global correction, ARCHS4 pretraining plus OSDR adaptation, and a DDIM conditioned on tissue, FLT/GC, accession and material. WGAN-GP and the other preprocessing and harmonization choices remained benchmark alternatives.</a:t>
             </a:r>
           </a:p>
         </p:txBody>
@@ -38144,7 +38144,7 @@
                 </a:solidFill>
                 <a:latin typeface="Arial"/>
               </a:rPr>
-              <a:t>Data scope, transforms, harmonization, training and conditioning can change without changing the evaluation contract.</a:t>
+              <a:t>Each stage exposes alternatives; a strong outline marks the configuration used downstream.</a:t>
             </a:r>
           </a:p>
         </p:txBody>
@@ -38157,8 +38157,8 @@
         </p:nvSpPr>
         <p:spPr>
           <a:xfrm>
-            <a:off x="320040" y="1901952"/>
-            <a:ext cx="2148840" cy="2359152"/>
+            <a:off x="320040" y="1828800"/>
+            <a:ext cx="2148840" cy="3063240"/>
           </a:xfrm>
           <a:prstGeom prst="roundRect">
             <a:avLst/>
@@ -38168,7 +38168,7 @@
           </a:solidFill>
           <a:ln w="10160">
             <a:solidFill>
-              <a:srgbClr val="2D6496"/>
+              <a:srgbClr val="DDE4E8"/>
             </a:solidFill>
           </a:ln>
         </p:spPr>
@@ -38196,16 +38196,16 @@
       </p:sp>
       <p:sp>
         <p:nvSpPr>
-          <p:cNvPr id="8" name="Rectangle 7"/>
+          <p:cNvPr id="8" name="Oval 7"/>
           <p:cNvSpPr/>
           <p:nvPr/>
         </p:nvSpPr>
         <p:spPr>
           <a:xfrm>
-            <a:off x="320040" y="1901952"/>
-            <a:ext cx="2148840" cy="36576"/>
-          </a:xfrm>
-          <a:prstGeom prst="rect">
+            <a:off x="466344" y="1993392"/>
+            <a:ext cx="292608" cy="292608"/>
+          </a:xfrm>
+          <a:prstGeom prst="ellipse">
             <a:avLst/>
           </a:prstGeom>
           <a:solidFill>
@@ -38245,8 +38245,8 @@
         </p:nvSpPr>
         <p:spPr>
           <a:xfrm>
-            <a:off x="484632" y="2167128"/>
-            <a:ext cx="1819656" cy="347472"/>
+            <a:off x="466344" y="2034540"/>
+            <a:ext cx="292608" cy="182880"/>
           </a:xfrm>
           <a:prstGeom prst="rect">
             <a:avLst/>
@@ -38254,7 +38254,46 @@
           <a:noFill/>
         </p:spPr>
         <p:txBody>
-          <a:bodyPr wrap="square" lIns="18288" rIns="18288" tIns="18288" bIns="18288" anchor="t">
+          <a:bodyPr wrap="square" lIns="0" rIns="0" tIns="0" bIns="0" anchor="t">
+            <a:spAutoFit/>
+          </a:bodyPr>
+          <a:lstStyle/>
+          <a:p>
+            <a:pPr algn="ctr">
+              <a:spcAft>
+                <a:spcPts val="0"/>
+              </a:spcAft>
+            </a:pPr>
+            <a:r>
+              <a:rPr sz="1050" b="1" i="0">
+                <a:solidFill>
+                  <a:srgbClr val="FFFFFF"/>
+                </a:solidFill>
+                <a:latin typeface="Arial"/>
+              </a:rPr>
+              <a:t>1</a:t>
+            </a:r>
+          </a:p>
+        </p:txBody>
+      </p:sp>
+      <p:sp>
+        <p:nvSpPr>
+          <p:cNvPr id="10" name="TextBox 9"/>
+          <p:cNvSpPr txBox="1"/>
+          <p:nvPr/>
+        </p:nvSpPr>
+        <p:spPr>
+          <a:xfrm>
+            <a:off x="850392" y="2002536"/>
+            <a:ext cx="1435608" cy="274320"/>
+          </a:xfrm>
+          <a:prstGeom prst="rect">
+            <a:avLst/>
+          </a:prstGeom>
+          <a:noFill/>
+        </p:spPr>
+        <p:txBody>
+          <a:bodyPr wrap="square" lIns="18288" rIns="18288" tIns="18288" bIns="18288" anchor="ctr">
             <a:spAutoFit/>
           </a:bodyPr>
           <a:lstStyle/>
@@ -38265,27 +38304,70 @@
               </a:spcAft>
             </a:pPr>
             <a:r>
-              <a:rPr sz="1600" b="1" i="0">
+              <a:rPr sz="1400" b="1" i="0">
                 <a:solidFill>
                   <a:srgbClr val="2D6496"/>
                 </a:solidFill>
                 <a:latin typeface="Arial"/>
               </a:rPr>
-              <a:t>Data + scope</a:t>
-            </a:r>
-          </a:p>
-        </p:txBody>
-      </p:sp>
-      <p:sp>
-        <p:nvSpPr>
-          <p:cNvPr id="10" name="TextBox 9"/>
+              <a:t>Data scope</a:t>
+            </a:r>
+          </a:p>
+        </p:txBody>
+      </p:sp>
+      <p:sp>
+        <p:nvSpPr>
+          <p:cNvPr id="11" name="Rectangle 10"/>
+          <p:cNvSpPr/>
+          <p:nvPr/>
+        </p:nvSpPr>
+        <p:spPr>
+          <a:xfrm>
+            <a:off x="466344" y="2359152"/>
+            <a:ext cx="1856231" cy="22860"/>
+          </a:xfrm>
+          <a:prstGeom prst="rect">
+            <a:avLst/>
+          </a:prstGeom>
+          <a:solidFill>
+            <a:srgbClr val="2D6496"/>
+          </a:solidFill>
+          <a:ln>
+            <a:noFill/>
+          </a:ln>
+        </p:spPr>
+        <p:style>
+          <a:lnRef idx="1">
+            <a:schemeClr val="accent1"/>
+          </a:lnRef>
+          <a:fillRef idx="3">
+            <a:schemeClr val="accent1"/>
+          </a:fillRef>
+          <a:effectRef idx="2">
+            <a:schemeClr val="accent1"/>
+          </a:effectRef>
+          <a:fontRef idx="minor">
+            <a:schemeClr val="lt1"/>
+          </a:fontRef>
+        </p:style>
+        <p:txBody>
+          <a:bodyPr rtlCol="0" anchor="ctr"/>
+          <a:lstStyle/>
+          <a:p>
+            <a:pPr algn="ctr"/>
+          </a:p>
+        </p:txBody>
+      </p:sp>
+      <p:sp>
+        <p:nvSpPr>
+          <p:cNvPr id="12" name="TextBox 11"/>
           <p:cNvSpPr txBox="1"/>
           <p:nvPr/>
         </p:nvSpPr>
         <p:spPr>
           <a:xfrm>
-            <a:off x="484632" y="2660904"/>
-            <a:ext cx="1819656" cy="1280160"/>
+            <a:off x="466344" y="2487168"/>
+            <a:ext cx="1847088" cy="164592"/>
           </a:xfrm>
           <a:prstGeom prst="rect">
             <a:avLst/>
@@ -38293,7 +38375,7 @@
           <a:noFill/>
         </p:spPr>
         <p:txBody>
-          <a:bodyPr wrap="square" lIns="18288" rIns="18288" tIns="18288" bIns="18288" anchor="t">
+          <a:bodyPr wrap="square" lIns="0" rIns="0" tIns="0" bIns="0" anchor="t">
             <a:spAutoFit/>
           </a:bodyPr>
           <a:lstStyle/>
@@ -38304,29 +38386,781 @@
               </a:spcAft>
             </a:pPr>
             <a:r>
-              <a:rPr sz="1320" b="0" i="0">
+              <a:rPr sz="840" b="1" i="0">
+                <a:solidFill>
+                  <a:srgbClr val="59697A"/>
+                </a:solidFill>
+                <a:latin typeface="Arial"/>
+              </a:rPr>
+              <a:t>Sources</a:t>
+            </a:r>
+          </a:p>
+        </p:txBody>
+      </p:sp>
+      <p:sp>
+        <p:nvSpPr>
+          <p:cNvPr id="13" name="Rounded Rectangle 12"/>
+          <p:cNvSpPr/>
+          <p:nvPr/>
+        </p:nvSpPr>
+        <p:spPr>
+          <a:xfrm>
+            <a:off x="466344" y="2688336"/>
+            <a:ext cx="905255" cy="329184"/>
+          </a:xfrm>
+          <a:prstGeom prst="roundRect">
+            <a:avLst/>
+          </a:prstGeom>
+          <a:solidFill>
+            <a:srgbClr val="FFFFFF"/>
+          </a:solidFill>
+          <a:ln w="25400">
+            <a:solidFill>
+              <a:srgbClr val="2D6496"/>
+            </a:solidFill>
+          </a:ln>
+        </p:spPr>
+        <p:style>
+          <a:lnRef idx="1">
+            <a:schemeClr val="accent1"/>
+          </a:lnRef>
+          <a:fillRef idx="3">
+            <a:schemeClr val="accent1"/>
+          </a:fillRef>
+          <a:effectRef idx="2">
+            <a:schemeClr val="accent1"/>
+          </a:effectRef>
+          <a:fontRef idx="minor">
+            <a:schemeClr val="lt1"/>
+          </a:fontRef>
+        </p:style>
+        <p:txBody>
+          <a:bodyPr rtlCol="0" anchor="ctr"/>
+          <a:lstStyle/>
+          <a:p>
+            <a:pPr algn="ctr"/>
+          </a:p>
+        </p:txBody>
+      </p:sp>
+      <p:sp>
+        <p:nvSpPr>
+          <p:cNvPr id="14" name="Oval 13"/>
+          <p:cNvSpPr/>
+          <p:nvPr/>
+        </p:nvSpPr>
+        <p:spPr>
+          <a:xfrm>
+            <a:off x="516636" y="2827324"/>
+            <a:ext cx="50292" cy="50292"/>
+          </a:xfrm>
+          <a:prstGeom prst="ellipse">
+            <a:avLst/>
+          </a:prstGeom>
+          <a:solidFill>
+            <a:srgbClr val="2D6496"/>
+          </a:solidFill>
+          <a:ln>
+            <a:noFill/>
+          </a:ln>
+        </p:spPr>
+        <p:style>
+          <a:lnRef idx="1">
+            <a:schemeClr val="accent1"/>
+          </a:lnRef>
+          <a:fillRef idx="3">
+            <a:schemeClr val="accent1"/>
+          </a:fillRef>
+          <a:effectRef idx="2">
+            <a:schemeClr val="accent1"/>
+          </a:effectRef>
+          <a:fontRef idx="minor">
+            <a:schemeClr val="lt1"/>
+          </a:fontRef>
+        </p:style>
+        <p:txBody>
+          <a:bodyPr rtlCol="0" anchor="ctr"/>
+          <a:lstStyle/>
+          <a:p>
+            <a:pPr algn="ctr"/>
+          </a:p>
+        </p:txBody>
+      </p:sp>
+      <p:sp>
+        <p:nvSpPr>
+          <p:cNvPr id="15" name="TextBox 14"/>
+          <p:cNvSpPr txBox="1"/>
+          <p:nvPr/>
+        </p:nvSpPr>
+        <p:spPr>
+          <a:xfrm>
+            <a:off x="603504" y="2738628"/>
+            <a:ext cx="740663" cy="210312"/>
+          </a:xfrm>
+          <a:prstGeom prst="rect">
+            <a:avLst/>
+          </a:prstGeom>
+          <a:noFill/>
+        </p:spPr>
+        <p:txBody>
+          <a:bodyPr wrap="square" lIns="0" rIns="0" tIns="0" bIns="0" anchor="ctr">
+            <a:spAutoFit/>
+          </a:bodyPr>
+          <a:lstStyle/>
+          <a:p>
+            <a:pPr algn="ctr">
+              <a:spcAft>
+                <a:spcPts val="0"/>
+              </a:spcAft>
+            </a:pPr>
+            <a:r>
+              <a:rPr sz="880" b="1" i="0">
                 <a:solidFill>
                   <a:srgbClr val="263746"/>
                 </a:solidFill>
                 <a:latin typeface="Arial"/>
               </a:rPr>
-              <a:t>OSDR API or ARCHS4
-one or many studies
-pooled or per tissue</a:t>
-            </a:r>
-          </a:p>
-        </p:txBody>
-      </p:sp>
-      <p:sp>
-        <p:nvSpPr>
-          <p:cNvPr id="11" name="Rounded Rectangle 10"/>
+              <a:t>OSDR API</a:t>
+            </a:r>
+          </a:p>
+        </p:txBody>
+      </p:sp>
+      <p:sp>
+        <p:nvSpPr>
+          <p:cNvPr id="16" name="Rounded Rectangle 15"/>
           <p:cNvSpPr/>
           <p:nvPr/>
         </p:nvSpPr>
         <p:spPr>
           <a:xfrm>
-            <a:off x="2651760" y="1901952"/>
-            <a:ext cx="2148840" cy="2359152"/>
+            <a:off x="1417319" y="2688336"/>
+            <a:ext cx="905255" cy="329184"/>
+          </a:xfrm>
+          <a:prstGeom prst="roundRect">
+            <a:avLst/>
+          </a:prstGeom>
+          <a:solidFill>
+            <a:srgbClr val="FFFFFF"/>
+          </a:solidFill>
+          <a:ln w="25400">
+            <a:solidFill>
+              <a:srgbClr val="2D6496"/>
+            </a:solidFill>
+          </a:ln>
+        </p:spPr>
+        <p:style>
+          <a:lnRef idx="1">
+            <a:schemeClr val="accent1"/>
+          </a:lnRef>
+          <a:fillRef idx="3">
+            <a:schemeClr val="accent1"/>
+          </a:fillRef>
+          <a:effectRef idx="2">
+            <a:schemeClr val="accent1"/>
+          </a:effectRef>
+          <a:fontRef idx="minor">
+            <a:schemeClr val="lt1"/>
+          </a:fontRef>
+        </p:style>
+        <p:txBody>
+          <a:bodyPr rtlCol="0" anchor="ctr"/>
+          <a:lstStyle/>
+          <a:p>
+            <a:pPr algn="ctr"/>
+          </a:p>
+        </p:txBody>
+      </p:sp>
+      <p:sp>
+        <p:nvSpPr>
+          <p:cNvPr id="17" name="Oval 16"/>
+          <p:cNvSpPr/>
+          <p:nvPr/>
+        </p:nvSpPr>
+        <p:spPr>
+          <a:xfrm>
+            <a:off x="1467611" y="2827324"/>
+            <a:ext cx="50292" cy="50292"/>
+          </a:xfrm>
+          <a:prstGeom prst="ellipse">
+            <a:avLst/>
+          </a:prstGeom>
+          <a:solidFill>
+            <a:srgbClr val="2D6496"/>
+          </a:solidFill>
+          <a:ln>
+            <a:noFill/>
+          </a:ln>
+        </p:spPr>
+        <p:style>
+          <a:lnRef idx="1">
+            <a:schemeClr val="accent1"/>
+          </a:lnRef>
+          <a:fillRef idx="3">
+            <a:schemeClr val="accent1"/>
+          </a:fillRef>
+          <a:effectRef idx="2">
+            <a:schemeClr val="accent1"/>
+          </a:effectRef>
+          <a:fontRef idx="minor">
+            <a:schemeClr val="lt1"/>
+          </a:fontRef>
+        </p:style>
+        <p:txBody>
+          <a:bodyPr rtlCol="0" anchor="ctr"/>
+          <a:lstStyle/>
+          <a:p>
+            <a:pPr algn="ctr"/>
+          </a:p>
+        </p:txBody>
+      </p:sp>
+      <p:sp>
+        <p:nvSpPr>
+          <p:cNvPr id="18" name="TextBox 17"/>
+          <p:cNvSpPr txBox="1"/>
+          <p:nvPr/>
+        </p:nvSpPr>
+        <p:spPr>
+          <a:xfrm>
+            <a:off x="1554479" y="2738628"/>
+            <a:ext cx="740663" cy="210312"/>
+          </a:xfrm>
+          <a:prstGeom prst="rect">
+            <a:avLst/>
+          </a:prstGeom>
+          <a:noFill/>
+        </p:spPr>
+        <p:txBody>
+          <a:bodyPr wrap="square" lIns="0" rIns="0" tIns="0" bIns="0" anchor="ctr">
+            <a:spAutoFit/>
+          </a:bodyPr>
+          <a:lstStyle/>
+          <a:p>
+            <a:pPr algn="ctr">
+              <a:spcAft>
+                <a:spcPts val="0"/>
+              </a:spcAft>
+            </a:pPr>
+            <a:r>
+              <a:rPr sz="880" b="1" i="0">
+                <a:solidFill>
+                  <a:srgbClr val="263746"/>
+                </a:solidFill>
+                <a:latin typeface="Arial"/>
+              </a:rPr>
+              <a:t>ARCHS4</a:t>
+            </a:r>
+          </a:p>
+        </p:txBody>
+      </p:sp>
+      <p:sp>
+        <p:nvSpPr>
+          <p:cNvPr id="19" name="TextBox 18"/>
+          <p:cNvSpPr txBox="1"/>
+          <p:nvPr/>
+        </p:nvSpPr>
+        <p:spPr>
+          <a:xfrm>
+            <a:off x="466344" y="3182112"/>
+            <a:ext cx="1847088" cy="164592"/>
+          </a:xfrm>
+          <a:prstGeom prst="rect">
+            <a:avLst/>
+          </a:prstGeom>
+          <a:noFill/>
+        </p:spPr>
+        <p:txBody>
+          <a:bodyPr wrap="square" lIns="0" rIns="0" tIns="0" bIns="0" anchor="t">
+            <a:spAutoFit/>
+          </a:bodyPr>
+          <a:lstStyle/>
+          <a:p>
+            <a:pPr algn="l">
+              <a:spcAft>
+                <a:spcPts val="0"/>
+              </a:spcAft>
+            </a:pPr>
+            <a:r>
+              <a:rPr sz="840" b="1" i="0">
+                <a:solidFill>
+                  <a:srgbClr val="59697A"/>
+                </a:solidFill>
+                <a:latin typeface="Arial"/>
+              </a:rPr>
+              <a:t>Studies</a:t>
+            </a:r>
+          </a:p>
+        </p:txBody>
+      </p:sp>
+      <p:sp>
+        <p:nvSpPr>
+          <p:cNvPr id="20" name="Rounded Rectangle 19"/>
+          <p:cNvSpPr/>
+          <p:nvPr/>
+        </p:nvSpPr>
+        <p:spPr>
+          <a:xfrm>
+            <a:off x="466344" y="3383280"/>
+            <a:ext cx="905255" cy="329184"/>
+          </a:xfrm>
+          <a:prstGeom prst="roundRect">
+            <a:avLst/>
+          </a:prstGeom>
+          <a:solidFill>
+            <a:srgbClr val="F7F9FA"/>
+          </a:solidFill>
+          <a:ln w="8255">
+            <a:solidFill>
+              <a:srgbClr val="C9D2D8"/>
+            </a:solidFill>
+          </a:ln>
+        </p:spPr>
+        <p:style>
+          <a:lnRef idx="1">
+            <a:schemeClr val="accent1"/>
+          </a:lnRef>
+          <a:fillRef idx="3">
+            <a:schemeClr val="accent1"/>
+          </a:fillRef>
+          <a:effectRef idx="2">
+            <a:schemeClr val="accent1"/>
+          </a:effectRef>
+          <a:fontRef idx="minor">
+            <a:schemeClr val="lt1"/>
+          </a:fontRef>
+        </p:style>
+        <p:txBody>
+          <a:bodyPr rtlCol="0" anchor="ctr"/>
+          <a:lstStyle/>
+          <a:p>
+            <a:pPr algn="ctr"/>
+          </a:p>
+        </p:txBody>
+      </p:sp>
+      <p:sp>
+        <p:nvSpPr>
+          <p:cNvPr id="21" name="TextBox 20"/>
+          <p:cNvSpPr txBox="1"/>
+          <p:nvPr/>
+        </p:nvSpPr>
+        <p:spPr>
+          <a:xfrm>
+            <a:off x="521208" y="3433572"/>
+            <a:ext cx="795527" cy="210312"/>
+          </a:xfrm>
+          <a:prstGeom prst="rect">
+            <a:avLst/>
+          </a:prstGeom>
+          <a:noFill/>
+        </p:spPr>
+        <p:txBody>
+          <a:bodyPr wrap="square" lIns="0" rIns="0" tIns="0" bIns="0" anchor="ctr">
+            <a:spAutoFit/>
+          </a:bodyPr>
+          <a:lstStyle/>
+          <a:p>
+            <a:pPr algn="ctr">
+              <a:spcAft>
+                <a:spcPts val="0"/>
+              </a:spcAft>
+            </a:pPr>
+            <a:r>
+              <a:rPr sz="880" b="0" i="0">
+                <a:solidFill>
+                  <a:srgbClr val="59697A"/>
+                </a:solidFill>
+                <a:latin typeface="Arial"/>
+              </a:rPr>
+              <a:t>Single</a:t>
+            </a:r>
+          </a:p>
+        </p:txBody>
+      </p:sp>
+      <p:sp>
+        <p:nvSpPr>
+          <p:cNvPr id="22" name="Rounded Rectangle 21"/>
+          <p:cNvSpPr/>
+          <p:nvPr/>
+        </p:nvSpPr>
+        <p:spPr>
+          <a:xfrm>
+            <a:off x="1417319" y="3383280"/>
+            <a:ext cx="905255" cy="329184"/>
+          </a:xfrm>
+          <a:prstGeom prst="roundRect">
+            <a:avLst/>
+          </a:prstGeom>
+          <a:solidFill>
+            <a:srgbClr val="FFFFFF"/>
+          </a:solidFill>
+          <a:ln w="25400">
+            <a:solidFill>
+              <a:srgbClr val="2D6496"/>
+            </a:solidFill>
+          </a:ln>
+        </p:spPr>
+        <p:style>
+          <a:lnRef idx="1">
+            <a:schemeClr val="accent1"/>
+          </a:lnRef>
+          <a:fillRef idx="3">
+            <a:schemeClr val="accent1"/>
+          </a:fillRef>
+          <a:effectRef idx="2">
+            <a:schemeClr val="accent1"/>
+          </a:effectRef>
+          <a:fontRef idx="minor">
+            <a:schemeClr val="lt1"/>
+          </a:fontRef>
+        </p:style>
+        <p:txBody>
+          <a:bodyPr rtlCol="0" anchor="ctr"/>
+          <a:lstStyle/>
+          <a:p>
+            <a:pPr algn="ctr"/>
+          </a:p>
+        </p:txBody>
+      </p:sp>
+      <p:sp>
+        <p:nvSpPr>
+          <p:cNvPr id="23" name="Oval 22"/>
+          <p:cNvSpPr/>
+          <p:nvPr/>
+        </p:nvSpPr>
+        <p:spPr>
+          <a:xfrm>
+            <a:off x="1467611" y="3522268"/>
+            <a:ext cx="50292" cy="50292"/>
+          </a:xfrm>
+          <a:prstGeom prst="ellipse">
+            <a:avLst/>
+          </a:prstGeom>
+          <a:solidFill>
+            <a:srgbClr val="2D6496"/>
+          </a:solidFill>
+          <a:ln>
+            <a:noFill/>
+          </a:ln>
+        </p:spPr>
+        <p:style>
+          <a:lnRef idx="1">
+            <a:schemeClr val="accent1"/>
+          </a:lnRef>
+          <a:fillRef idx="3">
+            <a:schemeClr val="accent1"/>
+          </a:fillRef>
+          <a:effectRef idx="2">
+            <a:schemeClr val="accent1"/>
+          </a:effectRef>
+          <a:fontRef idx="minor">
+            <a:schemeClr val="lt1"/>
+          </a:fontRef>
+        </p:style>
+        <p:txBody>
+          <a:bodyPr rtlCol="0" anchor="ctr"/>
+          <a:lstStyle/>
+          <a:p>
+            <a:pPr algn="ctr"/>
+          </a:p>
+        </p:txBody>
+      </p:sp>
+      <p:sp>
+        <p:nvSpPr>
+          <p:cNvPr id="24" name="TextBox 23"/>
+          <p:cNvSpPr txBox="1"/>
+          <p:nvPr/>
+        </p:nvSpPr>
+        <p:spPr>
+          <a:xfrm>
+            <a:off x="1554479" y="3433572"/>
+            <a:ext cx="740663" cy="210312"/>
+          </a:xfrm>
+          <a:prstGeom prst="rect">
+            <a:avLst/>
+          </a:prstGeom>
+          <a:noFill/>
+        </p:spPr>
+        <p:txBody>
+          <a:bodyPr wrap="square" lIns="0" rIns="0" tIns="0" bIns="0" anchor="ctr">
+            <a:spAutoFit/>
+          </a:bodyPr>
+          <a:lstStyle/>
+          <a:p>
+            <a:pPr algn="ctr">
+              <a:spcAft>
+                <a:spcPts val="0"/>
+              </a:spcAft>
+            </a:pPr>
+            <a:r>
+              <a:rPr sz="880" b="1" i="0">
+                <a:solidFill>
+                  <a:srgbClr val="263746"/>
+                </a:solidFill>
+                <a:latin typeface="Arial"/>
+              </a:rPr>
+              <a:t>Multiple</a:t>
+            </a:r>
+          </a:p>
+        </p:txBody>
+      </p:sp>
+      <p:sp>
+        <p:nvSpPr>
+          <p:cNvPr id="25" name="TextBox 24"/>
+          <p:cNvSpPr txBox="1"/>
+          <p:nvPr/>
+        </p:nvSpPr>
+        <p:spPr>
+          <a:xfrm>
+            <a:off x="466344" y="3877056"/>
+            <a:ext cx="1847088" cy="164592"/>
+          </a:xfrm>
+          <a:prstGeom prst="rect">
+            <a:avLst/>
+          </a:prstGeom>
+          <a:noFill/>
+        </p:spPr>
+        <p:txBody>
+          <a:bodyPr wrap="square" lIns="0" rIns="0" tIns="0" bIns="0" anchor="t">
+            <a:spAutoFit/>
+          </a:bodyPr>
+          <a:lstStyle/>
+          <a:p>
+            <a:pPr algn="l">
+              <a:spcAft>
+                <a:spcPts val="0"/>
+              </a:spcAft>
+            </a:pPr>
+            <a:r>
+              <a:rPr sz="840" b="1" i="0">
+                <a:solidFill>
+                  <a:srgbClr val="59697A"/>
+                </a:solidFill>
+                <a:latin typeface="Arial"/>
+              </a:rPr>
+              <a:t>Tissues</a:t>
+            </a:r>
+          </a:p>
+        </p:txBody>
+      </p:sp>
+      <p:sp>
+        <p:nvSpPr>
+          <p:cNvPr id="26" name="Rounded Rectangle 25"/>
+          <p:cNvSpPr/>
+          <p:nvPr/>
+        </p:nvSpPr>
+        <p:spPr>
+          <a:xfrm>
+            <a:off x="466344" y="4078224"/>
+            <a:ext cx="905255" cy="329184"/>
+          </a:xfrm>
+          <a:prstGeom prst="roundRect">
+            <a:avLst/>
+          </a:prstGeom>
+          <a:solidFill>
+            <a:srgbClr val="F7F9FA"/>
+          </a:solidFill>
+          <a:ln w="8255">
+            <a:solidFill>
+              <a:srgbClr val="C9D2D8"/>
+            </a:solidFill>
+          </a:ln>
+        </p:spPr>
+        <p:style>
+          <a:lnRef idx="1">
+            <a:schemeClr val="accent1"/>
+          </a:lnRef>
+          <a:fillRef idx="3">
+            <a:schemeClr val="accent1"/>
+          </a:fillRef>
+          <a:effectRef idx="2">
+            <a:schemeClr val="accent1"/>
+          </a:effectRef>
+          <a:fontRef idx="minor">
+            <a:schemeClr val="lt1"/>
+          </a:fontRef>
+        </p:style>
+        <p:txBody>
+          <a:bodyPr rtlCol="0" anchor="ctr"/>
+          <a:lstStyle/>
+          <a:p>
+            <a:pPr algn="ctr"/>
+          </a:p>
+        </p:txBody>
+      </p:sp>
+      <p:sp>
+        <p:nvSpPr>
+          <p:cNvPr id="27" name="TextBox 26"/>
+          <p:cNvSpPr txBox="1"/>
+          <p:nvPr/>
+        </p:nvSpPr>
+        <p:spPr>
+          <a:xfrm>
+            <a:off x="521208" y="4128515"/>
+            <a:ext cx="795527" cy="210312"/>
+          </a:xfrm>
+          <a:prstGeom prst="rect">
+            <a:avLst/>
+          </a:prstGeom>
+          <a:noFill/>
+        </p:spPr>
+        <p:txBody>
+          <a:bodyPr wrap="square" lIns="0" rIns="0" tIns="0" bIns="0" anchor="ctr">
+            <a:spAutoFit/>
+          </a:bodyPr>
+          <a:lstStyle/>
+          <a:p>
+            <a:pPr algn="ctr">
+              <a:spcAft>
+                <a:spcPts val="0"/>
+              </a:spcAft>
+            </a:pPr>
+            <a:r>
+              <a:rPr sz="880" b="0" i="0">
+                <a:solidFill>
+                  <a:srgbClr val="59697A"/>
+                </a:solidFill>
+                <a:latin typeface="Arial"/>
+              </a:rPr>
+              <a:t>Per tissue</a:t>
+            </a:r>
+          </a:p>
+        </p:txBody>
+      </p:sp>
+      <p:sp>
+        <p:nvSpPr>
+          <p:cNvPr id="28" name="Rounded Rectangle 27"/>
+          <p:cNvSpPr/>
+          <p:nvPr/>
+        </p:nvSpPr>
+        <p:spPr>
+          <a:xfrm>
+            <a:off x="1417319" y="4078224"/>
+            <a:ext cx="905255" cy="329184"/>
+          </a:xfrm>
+          <a:prstGeom prst="roundRect">
+            <a:avLst/>
+          </a:prstGeom>
+          <a:solidFill>
+            <a:srgbClr val="FFFFFF"/>
+          </a:solidFill>
+          <a:ln w="25400">
+            <a:solidFill>
+              <a:srgbClr val="2D6496"/>
+            </a:solidFill>
+          </a:ln>
+        </p:spPr>
+        <p:style>
+          <a:lnRef idx="1">
+            <a:schemeClr val="accent1"/>
+          </a:lnRef>
+          <a:fillRef idx="3">
+            <a:schemeClr val="accent1"/>
+          </a:fillRef>
+          <a:effectRef idx="2">
+            <a:schemeClr val="accent1"/>
+          </a:effectRef>
+          <a:fontRef idx="minor">
+            <a:schemeClr val="lt1"/>
+          </a:fontRef>
+        </p:style>
+        <p:txBody>
+          <a:bodyPr rtlCol="0" anchor="ctr"/>
+          <a:lstStyle/>
+          <a:p>
+            <a:pPr algn="ctr"/>
+          </a:p>
+        </p:txBody>
+      </p:sp>
+      <p:sp>
+        <p:nvSpPr>
+          <p:cNvPr id="29" name="Oval 28"/>
+          <p:cNvSpPr/>
+          <p:nvPr/>
+        </p:nvSpPr>
+        <p:spPr>
+          <a:xfrm>
+            <a:off x="1467611" y="4217212"/>
+            <a:ext cx="50292" cy="50292"/>
+          </a:xfrm>
+          <a:prstGeom prst="ellipse">
+            <a:avLst/>
+          </a:prstGeom>
+          <a:solidFill>
+            <a:srgbClr val="2D6496"/>
+          </a:solidFill>
+          <a:ln>
+            <a:noFill/>
+          </a:ln>
+        </p:spPr>
+        <p:style>
+          <a:lnRef idx="1">
+            <a:schemeClr val="accent1"/>
+          </a:lnRef>
+          <a:fillRef idx="3">
+            <a:schemeClr val="accent1"/>
+          </a:fillRef>
+          <a:effectRef idx="2">
+            <a:schemeClr val="accent1"/>
+          </a:effectRef>
+          <a:fontRef idx="minor">
+            <a:schemeClr val="lt1"/>
+          </a:fontRef>
+        </p:style>
+        <p:txBody>
+          <a:bodyPr rtlCol="0" anchor="ctr"/>
+          <a:lstStyle/>
+          <a:p>
+            <a:pPr algn="ctr"/>
+          </a:p>
+        </p:txBody>
+      </p:sp>
+      <p:sp>
+        <p:nvSpPr>
+          <p:cNvPr id="30" name="TextBox 29"/>
+          <p:cNvSpPr txBox="1"/>
+          <p:nvPr/>
+        </p:nvSpPr>
+        <p:spPr>
+          <a:xfrm>
+            <a:off x="1554479" y="4128515"/>
+            <a:ext cx="740663" cy="210312"/>
+          </a:xfrm>
+          <a:prstGeom prst="rect">
+            <a:avLst/>
+          </a:prstGeom>
+          <a:noFill/>
+        </p:spPr>
+        <p:txBody>
+          <a:bodyPr wrap="square" lIns="0" rIns="0" tIns="0" bIns="0" anchor="ctr">
+            <a:spAutoFit/>
+          </a:bodyPr>
+          <a:lstStyle/>
+          <a:p>
+            <a:pPr algn="ctr">
+              <a:spcAft>
+                <a:spcPts val="0"/>
+              </a:spcAft>
+            </a:pPr>
+            <a:r>
+              <a:rPr sz="880" b="1" i="0">
+                <a:solidFill>
+                  <a:srgbClr val="263746"/>
+                </a:solidFill>
+                <a:latin typeface="Arial"/>
+              </a:rPr>
+              <a:t>All tissues</a:t>
+            </a:r>
+          </a:p>
+        </p:txBody>
+      </p:sp>
+      <p:sp>
+        <p:nvSpPr>
+          <p:cNvPr id="31" name="Rounded Rectangle 30"/>
+          <p:cNvSpPr/>
+          <p:nvPr/>
+        </p:nvSpPr>
+        <p:spPr>
+          <a:xfrm>
+            <a:off x="2651760" y="1828800"/>
+            <a:ext cx="2148840" cy="3063240"/>
           </a:xfrm>
           <a:prstGeom prst="roundRect">
             <a:avLst/>
@@ -38336,7 +39170,7 @@
           </a:solidFill>
           <a:ln w="10160">
             <a:solidFill>
-              <a:srgbClr val="178681"/>
+              <a:srgbClr val="DDE4E8"/>
             </a:solidFill>
           </a:ln>
         </p:spPr>
@@ -38364,16 +39198,16 @@
       </p:sp>
       <p:sp>
         <p:nvSpPr>
-          <p:cNvPr id="12" name="Rectangle 11"/>
+          <p:cNvPr id="32" name="Oval 31"/>
           <p:cNvSpPr/>
           <p:nvPr/>
         </p:nvSpPr>
         <p:spPr>
           <a:xfrm>
-            <a:off x="2651760" y="1901952"/>
-            <a:ext cx="2148840" cy="36576"/>
-          </a:xfrm>
-          <a:prstGeom prst="rect">
+            <a:off x="2798064" y="1993392"/>
+            <a:ext cx="292608" cy="292608"/>
+          </a:xfrm>
+          <a:prstGeom prst="ellipse">
             <a:avLst/>
           </a:prstGeom>
           <a:solidFill>
@@ -38407,14 +39241,14 @@
       </p:sp>
       <p:sp>
         <p:nvSpPr>
-          <p:cNvPr id="13" name="TextBox 12"/>
+          <p:cNvPr id="33" name="TextBox 32"/>
           <p:cNvSpPr txBox="1"/>
           <p:nvPr/>
         </p:nvSpPr>
         <p:spPr>
           <a:xfrm>
-            <a:off x="2816352" y="2167128"/>
-            <a:ext cx="1819656" cy="347472"/>
+            <a:off x="2798064" y="2034540"/>
+            <a:ext cx="292608" cy="182880"/>
           </a:xfrm>
           <a:prstGeom prst="rect">
             <a:avLst/>
@@ -38422,7 +39256,46 @@
           <a:noFill/>
         </p:spPr>
         <p:txBody>
-          <a:bodyPr wrap="square" lIns="18288" rIns="18288" tIns="18288" bIns="18288" anchor="t">
+          <a:bodyPr wrap="square" lIns="0" rIns="0" tIns="0" bIns="0" anchor="t">
+            <a:spAutoFit/>
+          </a:bodyPr>
+          <a:lstStyle/>
+          <a:p>
+            <a:pPr algn="ctr">
+              <a:spcAft>
+                <a:spcPts val="0"/>
+              </a:spcAft>
+            </a:pPr>
+            <a:r>
+              <a:rPr sz="1050" b="1" i="0">
+                <a:solidFill>
+                  <a:srgbClr val="FFFFFF"/>
+                </a:solidFill>
+                <a:latin typeface="Arial"/>
+              </a:rPr>
+              <a:t>2</a:t>
+            </a:r>
+          </a:p>
+        </p:txBody>
+      </p:sp>
+      <p:sp>
+        <p:nvSpPr>
+          <p:cNvPr id="34" name="TextBox 33"/>
+          <p:cNvSpPr txBox="1"/>
+          <p:nvPr/>
+        </p:nvSpPr>
+        <p:spPr>
+          <a:xfrm>
+            <a:off x="3182112" y="2002536"/>
+            <a:ext cx="1435608" cy="274320"/>
+          </a:xfrm>
+          <a:prstGeom prst="rect">
+            <a:avLst/>
+          </a:prstGeom>
+          <a:noFill/>
+        </p:spPr>
+        <p:txBody>
+          <a:bodyPr wrap="square" lIns="18288" rIns="18288" tIns="18288" bIns="18288" anchor="ctr">
             <a:spAutoFit/>
           </a:bodyPr>
           <a:lstStyle/>
@@ -38433,7 +39306,7 @@
               </a:spcAft>
             </a:pPr>
             <a:r>
-              <a:rPr sz="1600" b="1" i="0">
+              <a:rPr sz="1400" b="1" i="0">
                 <a:solidFill>
                   <a:srgbClr val="178681"/>
                 </a:solidFill>
@@ -38446,14 +39319,57 @@
       </p:sp>
       <p:sp>
         <p:nvSpPr>
-          <p:cNvPr id="14" name="TextBox 13"/>
+          <p:cNvPr id="35" name="Rectangle 34"/>
+          <p:cNvSpPr/>
+          <p:nvPr/>
+        </p:nvSpPr>
+        <p:spPr>
+          <a:xfrm>
+            <a:off x="2798064" y="2359152"/>
+            <a:ext cx="1856231" cy="22860"/>
+          </a:xfrm>
+          <a:prstGeom prst="rect">
+            <a:avLst/>
+          </a:prstGeom>
+          <a:solidFill>
+            <a:srgbClr val="178681"/>
+          </a:solidFill>
+          <a:ln>
+            <a:noFill/>
+          </a:ln>
+        </p:spPr>
+        <p:style>
+          <a:lnRef idx="1">
+            <a:schemeClr val="accent1"/>
+          </a:lnRef>
+          <a:fillRef idx="3">
+            <a:schemeClr val="accent1"/>
+          </a:fillRef>
+          <a:effectRef idx="2">
+            <a:schemeClr val="accent1"/>
+          </a:effectRef>
+          <a:fontRef idx="minor">
+            <a:schemeClr val="lt1"/>
+          </a:fontRef>
+        </p:style>
+        <p:txBody>
+          <a:bodyPr rtlCol="0" anchor="ctr"/>
+          <a:lstStyle/>
+          <a:p>
+            <a:pPr algn="ctr"/>
+          </a:p>
+        </p:txBody>
+      </p:sp>
+      <p:sp>
+        <p:nvSpPr>
+          <p:cNvPr id="36" name="TextBox 35"/>
           <p:cNvSpPr txBox="1"/>
           <p:nvPr/>
         </p:nvSpPr>
         <p:spPr>
           <a:xfrm>
-            <a:off x="2816352" y="2660904"/>
-            <a:ext cx="1819656" cy="1280160"/>
+            <a:off x="2798064" y="2487168"/>
+            <a:ext cx="1847088" cy="164592"/>
           </a:xfrm>
           <a:prstGeom prst="rect">
             <a:avLst/>
@@ -38461,7 +39377,7 @@
           <a:noFill/>
         </p:spPr>
         <p:txBody>
-          <a:bodyPr wrap="square" lIns="18288" rIns="18288" tIns="18288" bIns="18288" anchor="t">
+          <a:bodyPr wrap="square" lIns="0" rIns="0" tIns="0" bIns="0" anchor="t">
             <a:spAutoFit/>
           </a:bodyPr>
           <a:lstStyle/>
@@ -38472,29 +39388,990 @@
               </a:spcAft>
             </a:pPr>
             <a:r>
-              <a:rPr sz="1320" b="0" i="0">
+              <a:rPr sz="840" b="1" i="0">
+                <a:solidFill>
+                  <a:srgbClr val="59697A"/>
+                </a:solidFill>
+                <a:latin typeface="Arial"/>
+              </a:rPr>
+              <a:t>Expression</a:t>
+            </a:r>
+          </a:p>
+        </p:txBody>
+      </p:sp>
+      <p:sp>
+        <p:nvSpPr>
+          <p:cNvPr id="37" name="Rounded Rectangle 36"/>
+          <p:cNvSpPr/>
+          <p:nvPr/>
+        </p:nvSpPr>
+        <p:spPr>
+          <a:xfrm>
+            <a:off x="2798064" y="2688336"/>
+            <a:ext cx="588263" cy="329184"/>
+          </a:xfrm>
+          <a:prstGeom prst="roundRect">
+            <a:avLst/>
+          </a:prstGeom>
+          <a:solidFill>
+            <a:srgbClr val="F7F9FA"/>
+          </a:solidFill>
+          <a:ln w="8255">
+            <a:solidFill>
+              <a:srgbClr val="C9D2D8"/>
+            </a:solidFill>
+          </a:ln>
+        </p:spPr>
+        <p:style>
+          <a:lnRef idx="1">
+            <a:schemeClr val="accent1"/>
+          </a:lnRef>
+          <a:fillRef idx="3">
+            <a:schemeClr val="accent1"/>
+          </a:fillRef>
+          <a:effectRef idx="2">
+            <a:schemeClr val="accent1"/>
+          </a:effectRef>
+          <a:fontRef idx="minor">
+            <a:schemeClr val="lt1"/>
+          </a:fontRef>
+        </p:style>
+        <p:txBody>
+          <a:bodyPr rtlCol="0" anchor="ctr"/>
+          <a:lstStyle/>
+          <a:p>
+            <a:pPr algn="ctr"/>
+          </a:p>
+        </p:txBody>
+      </p:sp>
+      <p:sp>
+        <p:nvSpPr>
+          <p:cNvPr id="38" name="TextBox 37"/>
+          <p:cNvSpPr txBox="1"/>
+          <p:nvPr/>
+        </p:nvSpPr>
+        <p:spPr>
+          <a:xfrm>
+            <a:off x="2852928" y="2738628"/>
+            <a:ext cx="478535" cy="210312"/>
+          </a:xfrm>
+          <a:prstGeom prst="rect">
+            <a:avLst/>
+          </a:prstGeom>
+          <a:noFill/>
+        </p:spPr>
+        <p:txBody>
+          <a:bodyPr wrap="square" lIns="0" rIns="0" tIns="0" bIns="0" anchor="ctr">
+            <a:spAutoFit/>
+          </a:bodyPr>
+          <a:lstStyle/>
+          <a:p>
+            <a:pPr algn="ctr">
+              <a:spcAft>
+                <a:spcPts val="0"/>
+              </a:spcAft>
+            </a:pPr>
+            <a:r>
+              <a:rPr sz="819" b="0" i="0">
+                <a:solidFill>
+                  <a:srgbClr val="59697A"/>
+                </a:solidFill>
+                <a:latin typeface="Arial"/>
+              </a:rPr>
+              <a:t>Raw</a:t>
+            </a:r>
+          </a:p>
+        </p:txBody>
+      </p:sp>
+      <p:sp>
+        <p:nvSpPr>
+          <p:cNvPr id="39" name="Rounded Rectangle 38"/>
+          <p:cNvSpPr/>
+          <p:nvPr/>
+        </p:nvSpPr>
+        <p:spPr>
+          <a:xfrm>
+            <a:off x="3432048" y="2688336"/>
+            <a:ext cx="588263" cy="329184"/>
+          </a:xfrm>
+          <a:prstGeom prst="roundRect">
+            <a:avLst/>
+          </a:prstGeom>
+          <a:solidFill>
+            <a:srgbClr val="F7F9FA"/>
+          </a:solidFill>
+          <a:ln w="8255">
+            <a:solidFill>
+              <a:srgbClr val="C9D2D8"/>
+            </a:solidFill>
+          </a:ln>
+        </p:spPr>
+        <p:style>
+          <a:lnRef idx="1">
+            <a:schemeClr val="accent1"/>
+          </a:lnRef>
+          <a:fillRef idx="3">
+            <a:schemeClr val="accent1"/>
+          </a:fillRef>
+          <a:effectRef idx="2">
+            <a:schemeClr val="accent1"/>
+          </a:effectRef>
+          <a:fontRef idx="minor">
+            <a:schemeClr val="lt1"/>
+          </a:fontRef>
+        </p:style>
+        <p:txBody>
+          <a:bodyPr rtlCol="0" anchor="ctr"/>
+          <a:lstStyle/>
+          <a:p>
+            <a:pPr algn="ctr"/>
+          </a:p>
+        </p:txBody>
+      </p:sp>
+      <p:sp>
+        <p:nvSpPr>
+          <p:cNvPr id="40" name="TextBox 39"/>
+          <p:cNvSpPr txBox="1"/>
+          <p:nvPr/>
+        </p:nvSpPr>
+        <p:spPr>
+          <a:xfrm>
+            <a:off x="3486912" y="2738628"/>
+            <a:ext cx="478535" cy="210312"/>
+          </a:xfrm>
+          <a:prstGeom prst="rect">
+            <a:avLst/>
+          </a:prstGeom>
+          <a:noFill/>
+        </p:spPr>
+        <p:txBody>
+          <a:bodyPr wrap="square" lIns="0" rIns="0" tIns="0" bIns="0" anchor="ctr">
+            <a:spAutoFit/>
+          </a:bodyPr>
+          <a:lstStyle/>
+          <a:p>
+            <a:pPr algn="ctr">
+              <a:spcAft>
+                <a:spcPts val="0"/>
+              </a:spcAft>
+            </a:pPr>
+            <a:r>
+              <a:rPr sz="819" b="0" i="0">
+                <a:solidFill>
+                  <a:srgbClr val="59697A"/>
+                </a:solidFill>
+                <a:latin typeface="Arial"/>
+              </a:rPr>
+              <a:t>CPM</a:t>
+            </a:r>
+          </a:p>
+        </p:txBody>
+      </p:sp>
+      <p:sp>
+        <p:nvSpPr>
+          <p:cNvPr id="41" name="Rounded Rectangle 40"/>
+          <p:cNvSpPr/>
+          <p:nvPr/>
+        </p:nvSpPr>
+        <p:spPr>
+          <a:xfrm>
+            <a:off x="4066031" y="2688336"/>
+            <a:ext cx="588263" cy="329184"/>
+          </a:xfrm>
+          <a:prstGeom prst="roundRect">
+            <a:avLst/>
+          </a:prstGeom>
+          <a:solidFill>
+            <a:srgbClr val="FFFFFF"/>
+          </a:solidFill>
+          <a:ln w="25400">
+            <a:solidFill>
+              <a:srgbClr val="178681"/>
+            </a:solidFill>
+          </a:ln>
+        </p:spPr>
+        <p:style>
+          <a:lnRef idx="1">
+            <a:schemeClr val="accent1"/>
+          </a:lnRef>
+          <a:fillRef idx="3">
+            <a:schemeClr val="accent1"/>
+          </a:fillRef>
+          <a:effectRef idx="2">
+            <a:schemeClr val="accent1"/>
+          </a:effectRef>
+          <a:fontRef idx="minor">
+            <a:schemeClr val="lt1"/>
+          </a:fontRef>
+        </p:style>
+        <p:txBody>
+          <a:bodyPr rtlCol="0" anchor="ctr"/>
+          <a:lstStyle/>
+          <a:p>
+            <a:pPr algn="ctr"/>
+          </a:p>
+        </p:txBody>
+      </p:sp>
+      <p:sp>
+        <p:nvSpPr>
+          <p:cNvPr id="42" name="Oval 41"/>
+          <p:cNvSpPr/>
+          <p:nvPr/>
+        </p:nvSpPr>
+        <p:spPr>
+          <a:xfrm>
+            <a:off x="4116323" y="2827324"/>
+            <a:ext cx="50292" cy="50292"/>
+          </a:xfrm>
+          <a:prstGeom prst="ellipse">
+            <a:avLst/>
+          </a:prstGeom>
+          <a:solidFill>
+            <a:srgbClr val="178681"/>
+          </a:solidFill>
+          <a:ln>
+            <a:noFill/>
+          </a:ln>
+        </p:spPr>
+        <p:style>
+          <a:lnRef idx="1">
+            <a:schemeClr val="accent1"/>
+          </a:lnRef>
+          <a:fillRef idx="3">
+            <a:schemeClr val="accent1"/>
+          </a:fillRef>
+          <a:effectRef idx="2">
+            <a:schemeClr val="accent1"/>
+          </a:effectRef>
+          <a:fontRef idx="minor">
+            <a:schemeClr val="lt1"/>
+          </a:fontRef>
+        </p:style>
+        <p:txBody>
+          <a:bodyPr rtlCol="0" anchor="ctr"/>
+          <a:lstStyle/>
+          <a:p>
+            <a:pPr algn="ctr"/>
+          </a:p>
+        </p:txBody>
+      </p:sp>
+      <p:sp>
+        <p:nvSpPr>
+          <p:cNvPr id="43" name="TextBox 42"/>
+          <p:cNvSpPr txBox="1"/>
+          <p:nvPr/>
+        </p:nvSpPr>
+        <p:spPr>
+          <a:xfrm>
+            <a:off x="4203192" y="2738628"/>
+            <a:ext cx="423671" cy="210312"/>
+          </a:xfrm>
+          <a:prstGeom prst="rect">
+            <a:avLst/>
+          </a:prstGeom>
+          <a:noFill/>
+        </p:spPr>
+        <p:txBody>
+          <a:bodyPr wrap="square" lIns="0" rIns="0" tIns="0" bIns="0" anchor="ctr">
+            <a:spAutoFit/>
+          </a:bodyPr>
+          <a:lstStyle/>
+          <a:p>
+            <a:pPr algn="ctr">
+              <a:spcAft>
+                <a:spcPts val="0"/>
+              </a:spcAft>
+            </a:pPr>
+            <a:r>
+              <a:rPr sz="819" b="1" i="0">
                 <a:solidFill>
                   <a:srgbClr val="263746"/>
                 </a:solidFill>
                 <a:latin typeface="Arial"/>
               </a:rPr>
-              <a:t>raw / CPM / TPM
-log + scaling
-all genes / HVG / L1000</a:t>
-            </a:r>
-          </a:p>
-        </p:txBody>
-      </p:sp>
-      <p:sp>
-        <p:nvSpPr>
-          <p:cNvPr id="15" name="Rounded Rectangle 14"/>
+              <a:t>TPM</a:t>
+            </a:r>
+          </a:p>
+        </p:txBody>
+      </p:sp>
+      <p:sp>
+        <p:nvSpPr>
+          <p:cNvPr id="44" name="TextBox 43"/>
+          <p:cNvSpPr txBox="1"/>
+          <p:nvPr/>
+        </p:nvSpPr>
+        <p:spPr>
+          <a:xfrm>
+            <a:off x="2798064" y="3182112"/>
+            <a:ext cx="1847088" cy="164592"/>
+          </a:xfrm>
+          <a:prstGeom prst="rect">
+            <a:avLst/>
+          </a:prstGeom>
+          <a:noFill/>
+        </p:spPr>
+        <p:txBody>
+          <a:bodyPr wrap="square" lIns="0" rIns="0" tIns="0" bIns="0" anchor="t">
+            <a:spAutoFit/>
+          </a:bodyPr>
+          <a:lstStyle/>
+          <a:p>
+            <a:pPr algn="l">
+              <a:spcAft>
+                <a:spcPts val="0"/>
+              </a:spcAft>
+            </a:pPr>
+            <a:r>
+              <a:rPr sz="840" b="1" i="0">
+                <a:solidFill>
+                  <a:srgbClr val="59697A"/>
+                </a:solidFill>
+                <a:latin typeface="Arial"/>
+              </a:rPr>
+              <a:t>Scaling</a:t>
+            </a:r>
+          </a:p>
+        </p:txBody>
+      </p:sp>
+      <p:sp>
+        <p:nvSpPr>
+          <p:cNvPr id="45" name="Rounded Rectangle 44"/>
           <p:cNvSpPr/>
           <p:nvPr/>
         </p:nvSpPr>
         <p:spPr>
           <a:xfrm>
-            <a:off x="4983480" y="1901952"/>
-            <a:ext cx="2148840" cy="2359152"/>
+            <a:off x="2798064" y="3383280"/>
+            <a:ext cx="588263" cy="329184"/>
+          </a:xfrm>
+          <a:prstGeom prst="roundRect">
+            <a:avLst/>
+          </a:prstGeom>
+          <a:solidFill>
+            <a:srgbClr val="F7F9FA"/>
+          </a:solidFill>
+          <a:ln w="8255">
+            <a:solidFill>
+              <a:srgbClr val="C9D2D8"/>
+            </a:solidFill>
+          </a:ln>
+        </p:spPr>
+        <p:style>
+          <a:lnRef idx="1">
+            <a:schemeClr val="accent1"/>
+          </a:lnRef>
+          <a:fillRef idx="3">
+            <a:schemeClr val="accent1"/>
+          </a:fillRef>
+          <a:effectRef idx="2">
+            <a:schemeClr val="accent1"/>
+          </a:effectRef>
+          <a:fontRef idx="minor">
+            <a:schemeClr val="lt1"/>
+          </a:fontRef>
+        </p:style>
+        <p:txBody>
+          <a:bodyPr rtlCol="0" anchor="ctr"/>
+          <a:lstStyle/>
+          <a:p>
+            <a:pPr algn="ctr"/>
+          </a:p>
+        </p:txBody>
+      </p:sp>
+      <p:sp>
+        <p:nvSpPr>
+          <p:cNvPr id="46" name="TextBox 45"/>
+          <p:cNvSpPr txBox="1"/>
+          <p:nvPr/>
+        </p:nvSpPr>
+        <p:spPr>
+          <a:xfrm>
+            <a:off x="2852928" y="3433572"/>
+            <a:ext cx="478535" cy="210312"/>
+          </a:xfrm>
+          <a:prstGeom prst="rect">
+            <a:avLst/>
+          </a:prstGeom>
+          <a:noFill/>
+        </p:spPr>
+        <p:txBody>
+          <a:bodyPr wrap="square" lIns="0" rIns="0" tIns="0" bIns="0" anchor="ctr">
+            <a:spAutoFit/>
+          </a:bodyPr>
+          <a:lstStyle/>
+          <a:p>
+            <a:pPr algn="ctr">
+              <a:spcAft>
+                <a:spcPts val="0"/>
+              </a:spcAft>
+            </a:pPr>
+            <a:r>
+              <a:rPr sz="819" b="0" i="0">
+                <a:solidFill>
+                  <a:srgbClr val="59697A"/>
+                </a:solidFill>
+                <a:latin typeface="Arial"/>
+              </a:rPr>
+              <a:t>None</a:t>
+            </a:r>
+          </a:p>
+        </p:txBody>
+      </p:sp>
+      <p:sp>
+        <p:nvSpPr>
+          <p:cNvPr id="47" name="Rounded Rectangle 46"/>
+          <p:cNvSpPr/>
+          <p:nvPr/>
+        </p:nvSpPr>
+        <p:spPr>
+          <a:xfrm>
+            <a:off x="3432048" y="3383280"/>
+            <a:ext cx="588263" cy="329184"/>
+          </a:xfrm>
+          <a:prstGeom prst="roundRect">
+            <a:avLst/>
+          </a:prstGeom>
+          <a:solidFill>
+            <a:srgbClr val="F7F9FA"/>
+          </a:solidFill>
+          <a:ln w="8255">
+            <a:solidFill>
+              <a:srgbClr val="C9D2D8"/>
+            </a:solidFill>
+          </a:ln>
+        </p:spPr>
+        <p:style>
+          <a:lnRef idx="1">
+            <a:schemeClr val="accent1"/>
+          </a:lnRef>
+          <a:fillRef idx="3">
+            <a:schemeClr val="accent1"/>
+          </a:fillRef>
+          <a:effectRef idx="2">
+            <a:schemeClr val="accent1"/>
+          </a:effectRef>
+          <a:fontRef idx="minor">
+            <a:schemeClr val="lt1"/>
+          </a:fontRef>
+        </p:style>
+        <p:txBody>
+          <a:bodyPr rtlCol="0" anchor="ctr"/>
+          <a:lstStyle/>
+          <a:p>
+            <a:pPr algn="ctr"/>
+          </a:p>
+        </p:txBody>
+      </p:sp>
+      <p:sp>
+        <p:nvSpPr>
+          <p:cNvPr id="48" name="TextBox 47"/>
+          <p:cNvSpPr txBox="1"/>
+          <p:nvPr/>
+        </p:nvSpPr>
+        <p:spPr>
+          <a:xfrm>
+            <a:off x="3486912" y="3433572"/>
+            <a:ext cx="478535" cy="210312"/>
+          </a:xfrm>
+          <a:prstGeom prst="rect">
+            <a:avLst/>
+          </a:prstGeom>
+          <a:noFill/>
+        </p:spPr>
+        <p:txBody>
+          <a:bodyPr wrap="square" lIns="0" rIns="0" tIns="0" bIns="0" anchor="ctr">
+            <a:spAutoFit/>
+          </a:bodyPr>
+          <a:lstStyle/>
+          <a:p>
+            <a:pPr algn="ctr">
+              <a:spcAft>
+                <a:spcPts val="0"/>
+              </a:spcAft>
+            </a:pPr>
+            <a:r>
+              <a:rPr sz="819" b="0" i="0">
+                <a:solidFill>
+                  <a:srgbClr val="59697A"/>
+                </a:solidFill>
+                <a:latin typeface="Arial"/>
+              </a:rPr>
+              <a:t>Z-score</a:t>
+            </a:r>
+          </a:p>
+        </p:txBody>
+      </p:sp>
+      <p:sp>
+        <p:nvSpPr>
+          <p:cNvPr id="49" name="Rounded Rectangle 48"/>
+          <p:cNvSpPr/>
+          <p:nvPr/>
+        </p:nvSpPr>
+        <p:spPr>
+          <a:xfrm>
+            <a:off x="4066031" y="3383280"/>
+            <a:ext cx="588263" cy="329184"/>
+          </a:xfrm>
+          <a:prstGeom prst="roundRect">
+            <a:avLst/>
+          </a:prstGeom>
+          <a:solidFill>
+            <a:srgbClr val="FFFFFF"/>
+          </a:solidFill>
+          <a:ln w="25400">
+            <a:solidFill>
+              <a:srgbClr val="178681"/>
+            </a:solidFill>
+          </a:ln>
+        </p:spPr>
+        <p:style>
+          <a:lnRef idx="1">
+            <a:schemeClr val="accent1"/>
+          </a:lnRef>
+          <a:fillRef idx="3">
+            <a:schemeClr val="accent1"/>
+          </a:fillRef>
+          <a:effectRef idx="2">
+            <a:schemeClr val="accent1"/>
+          </a:effectRef>
+          <a:fontRef idx="minor">
+            <a:schemeClr val="lt1"/>
+          </a:fontRef>
+        </p:style>
+        <p:txBody>
+          <a:bodyPr rtlCol="0" anchor="ctr"/>
+          <a:lstStyle/>
+          <a:p>
+            <a:pPr algn="ctr"/>
+          </a:p>
+        </p:txBody>
+      </p:sp>
+      <p:sp>
+        <p:nvSpPr>
+          <p:cNvPr id="50" name="Oval 49"/>
+          <p:cNvSpPr/>
+          <p:nvPr/>
+        </p:nvSpPr>
+        <p:spPr>
+          <a:xfrm>
+            <a:off x="4116323" y="3522268"/>
+            <a:ext cx="50292" cy="50292"/>
+          </a:xfrm>
+          <a:prstGeom prst="ellipse">
+            <a:avLst/>
+          </a:prstGeom>
+          <a:solidFill>
+            <a:srgbClr val="178681"/>
+          </a:solidFill>
+          <a:ln>
+            <a:noFill/>
+          </a:ln>
+        </p:spPr>
+        <p:style>
+          <a:lnRef idx="1">
+            <a:schemeClr val="accent1"/>
+          </a:lnRef>
+          <a:fillRef idx="3">
+            <a:schemeClr val="accent1"/>
+          </a:fillRef>
+          <a:effectRef idx="2">
+            <a:schemeClr val="accent1"/>
+          </a:effectRef>
+          <a:fontRef idx="minor">
+            <a:schemeClr val="lt1"/>
+          </a:fontRef>
+        </p:style>
+        <p:txBody>
+          <a:bodyPr rtlCol="0" anchor="ctr"/>
+          <a:lstStyle/>
+          <a:p>
+            <a:pPr algn="ctr"/>
+          </a:p>
+        </p:txBody>
+      </p:sp>
+      <p:sp>
+        <p:nvSpPr>
+          <p:cNvPr id="51" name="TextBox 50"/>
+          <p:cNvSpPr txBox="1"/>
+          <p:nvPr/>
+        </p:nvSpPr>
+        <p:spPr>
+          <a:xfrm>
+            <a:off x="4203192" y="3433572"/>
+            <a:ext cx="423671" cy="210312"/>
+          </a:xfrm>
+          <a:prstGeom prst="rect">
+            <a:avLst/>
+          </a:prstGeom>
+          <a:noFill/>
+        </p:spPr>
+        <p:txBody>
+          <a:bodyPr wrap="square" lIns="0" rIns="0" tIns="0" bIns="0" anchor="ctr">
+            <a:spAutoFit/>
+          </a:bodyPr>
+          <a:lstStyle/>
+          <a:p>
+            <a:pPr algn="ctr">
+              <a:spcAft>
+                <a:spcPts val="0"/>
+              </a:spcAft>
+            </a:pPr>
+            <a:r>
+              <a:rPr sz="819" b="1" i="0">
+                <a:solidFill>
+                  <a:srgbClr val="263746"/>
+                </a:solidFill>
+                <a:latin typeface="Arial"/>
+              </a:rPr>
+              <a:t>MaxAbs</a:t>
+            </a:r>
+          </a:p>
+        </p:txBody>
+      </p:sp>
+      <p:sp>
+        <p:nvSpPr>
+          <p:cNvPr id="52" name="TextBox 51"/>
+          <p:cNvSpPr txBox="1"/>
+          <p:nvPr/>
+        </p:nvSpPr>
+        <p:spPr>
+          <a:xfrm>
+            <a:off x="2798064" y="3877056"/>
+            <a:ext cx="1847088" cy="164592"/>
+          </a:xfrm>
+          <a:prstGeom prst="rect">
+            <a:avLst/>
+          </a:prstGeom>
+          <a:noFill/>
+        </p:spPr>
+        <p:txBody>
+          <a:bodyPr wrap="square" lIns="0" rIns="0" tIns="0" bIns="0" anchor="t">
+            <a:spAutoFit/>
+          </a:bodyPr>
+          <a:lstStyle/>
+          <a:p>
+            <a:pPr algn="l">
+              <a:spcAft>
+                <a:spcPts val="0"/>
+              </a:spcAft>
+            </a:pPr>
+            <a:r>
+              <a:rPr sz="840" b="1" i="0">
+                <a:solidFill>
+                  <a:srgbClr val="59697A"/>
+                </a:solidFill>
+                <a:latin typeface="Arial"/>
+              </a:rPr>
+              <a:t>Features</a:t>
+            </a:r>
+          </a:p>
+        </p:txBody>
+      </p:sp>
+      <p:sp>
+        <p:nvSpPr>
+          <p:cNvPr id="53" name="Rounded Rectangle 52"/>
+          <p:cNvSpPr/>
+          <p:nvPr/>
+        </p:nvSpPr>
+        <p:spPr>
+          <a:xfrm>
+            <a:off x="2798064" y="4078224"/>
+            <a:ext cx="588263" cy="329184"/>
+          </a:xfrm>
+          <a:prstGeom prst="roundRect">
+            <a:avLst/>
+          </a:prstGeom>
+          <a:solidFill>
+            <a:srgbClr val="F7F9FA"/>
+          </a:solidFill>
+          <a:ln w="8255">
+            <a:solidFill>
+              <a:srgbClr val="C9D2D8"/>
+            </a:solidFill>
+          </a:ln>
+        </p:spPr>
+        <p:style>
+          <a:lnRef idx="1">
+            <a:schemeClr val="accent1"/>
+          </a:lnRef>
+          <a:fillRef idx="3">
+            <a:schemeClr val="accent1"/>
+          </a:fillRef>
+          <a:effectRef idx="2">
+            <a:schemeClr val="accent1"/>
+          </a:effectRef>
+          <a:fontRef idx="minor">
+            <a:schemeClr val="lt1"/>
+          </a:fontRef>
+        </p:style>
+        <p:txBody>
+          <a:bodyPr rtlCol="0" anchor="ctr"/>
+          <a:lstStyle/>
+          <a:p>
+            <a:pPr algn="ctr"/>
+          </a:p>
+        </p:txBody>
+      </p:sp>
+      <p:sp>
+        <p:nvSpPr>
+          <p:cNvPr id="54" name="TextBox 53"/>
+          <p:cNvSpPr txBox="1"/>
+          <p:nvPr/>
+        </p:nvSpPr>
+        <p:spPr>
+          <a:xfrm>
+            <a:off x="2852928" y="4128515"/>
+            <a:ext cx="478535" cy="210312"/>
+          </a:xfrm>
+          <a:prstGeom prst="rect">
+            <a:avLst/>
+          </a:prstGeom>
+          <a:noFill/>
+        </p:spPr>
+        <p:txBody>
+          <a:bodyPr wrap="square" lIns="0" rIns="0" tIns="0" bIns="0" anchor="ctr">
+            <a:spAutoFit/>
+          </a:bodyPr>
+          <a:lstStyle/>
+          <a:p>
+            <a:pPr algn="ctr">
+              <a:spcAft>
+                <a:spcPts val="0"/>
+              </a:spcAft>
+            </a:pPr>
+            <a:r>
+              <a:rPr sz="819" b="0" i="0">
+                <a:solidFill>
+                  <a:srgbClr val="59697A"/>
+                </a:solidFill>
+                <a:latin typeface="Arial"/>
+              </a:rPr>
+              <a:t>All</a:t>
+            </a:r>
+          </a:p>
+        </p:txBody>
+      </p:sp>
+      <p:sp>
+        <p:nvSpPr>
+          <p:cNvPr id="55" name="Rounded Rectangle 54"/>
+          <p:cNvSpPr/>
+          <p:nvPr/>
+        </p:nvSpPr>
+        <p:spPr>
+          <a:xfrm>
+            <a:off x="3432048" y="4078224"/>
+            <a:ext cx="588263" cy="329184"/>
+          </a:xfrm>
+          <a:prstGeom prst="roundRect">
+            <a:avLst/>
+          </a:prstGeom>
+          <a:solidFill>
+            <a:srgbClr val="F7F9FA"/>
+          </a:solidFill>
+          <a:ln w="8255">
+            <a:solidFill>
+              <a:srgbClr val="C9D2D8"/>
+            </a:solidFill>
+          </a:ln>
+        </p:spPr>
+        <p:style>
+          <a:lnRef idx="1">
+            <a:schemeClr val="accent1"/>
+          </a:lnRef>
+          <a:fillRef idx="3">
+            <a:schemeClr val="accent1"/>
+          </a:fillRef>
+          <a:effectRef idx="2">
+            <a:schemeClr val="accent1"/>
+          </a:effectRef>
+          <a:fontRef idx="minor">
+            <a:schemeClr val="lt1"/>
+          </a:fontRef>
+        </p:style>
+        <p:txBody>
+          <a:bodyPr rtlCol="0" anchor="ctr"/>
+          <a:lstStyle/>
+          <a:p>
+            <a:pPr algn="ctr"/>
+          </a:p>
+        </p:txBody>
+      </p:sp>
+      <p:sp>
+        <p:nvSpPr>
+          <p:cNvPr id="56" name="TextBox 55"/>
+          <p:cNvSpPr txBox="1"/>
+          <p:nvPr/>
+        </p:nvSpPr>
+        <p:spPr>
+          <a:xfrm>
+            <a:off x="3486912" y="4128515"/>
+            <a:ext cx="478535" cy="210312"/>
+          </a:xfrm>
+          <a:prstGeom prst="rect">
+            <a:avLst/>
+          </a:prstGeom>
+          <a:noFill/>
+        </p:spPr>
+        <p:txBody>
+          <a:bodyPr wrap="square" lIns="0" rIns="0" tIns="0" bIns="0" anchor="ctr">
+            <a:spAutoFit/>
+          </a:bodyPr>
+          <a:lstStyle/>
+          <a:p>
+            <a:pPr algn="ctr">
+              <a:spcAft>
+                <a:spcPts val="0"/>
+              </a:spcAft>
+            </a:pPr>
+            <a:r>
+              <a:rPr sz="819" b="0" i="0">
+                <a:solidFill>
+                  <a:srgbClr val="59697A"/>
+                </a:solidFill>
+                <a:latin typeface="Arial"/>
+              </a:rPr>
+              <a:t>HVG</a:t>
+            </a:r>
+          </a:p>
+        </p:txBody>
+      </p:sp>
+      <p:sp>
+        <p:nvSpPr>
+          <p:cNvPr id="57" name="Rounded Rectangle 56"/>
+          <p:cNvSpPr/>
+          <p:nvPr/>
+        </p:nvSpPr>
+        <p:spPr>
+          <a:xfrm>
+            <a:off x="4066031" y="4078224"/>
+            <a:ext cx="588263" cy="329184"/>
+          </a:xfrm>
+          <a:prstGeom prst="roundRect">
+            <a:avLst/>
+          </a:prstGeom>
+          <a:solidFill>
+            <a:srgbClr val="FFFFFF"/>
+          </a:solidFill>
+          <a:ln w="25400">
+            <a:solidFill>
+              <a:srgbClr val="178681"/>
+            </a:solidFill>
+          </a:ln>
+        </p:spPr>
+        <p:style>
+          <a:lnRef idx="1">
+            <a:schemeClr val="accent1"/>
+          </a:lnRef>
+          <a:fillRef idx="3">
+            <a:schemeClr val="accent1"/>
+          </a:fillRef>
+          <a:effectRef idx="2">
+            <a:schemeClr val="accent1"/>
+          </a:effectRef>
+          <a:fontRef idx="minor">
+            <a:schemeClr val="lt1"/>
+          </a:fontRef>
+        </p:style>
+        <p:txBody>
+          <a:bodyPr rtlCol="0" anchor="ctr"/>
+          <a:lstStyle/>
+          <a:p>
+            <a:pPr algn="ctr"/>
+          </a:p>
+        </p:txBody>
+      </p:sp>
+      <p:sp>
+        <p:nvSpPr>
+          <p:cNvPr id="58" name="Oval 57"/>
+          <p:cNvSpPr/>
+          <p:nvPr/>
+        </p:nvSpPr>
+        <p:spPr>
+          <a:xfrm>
+            <a:off x="4116323" y="4217212"/>
+            <a:ext cx="50292" cy="50292"/>
+          </a:xfrm>
+          <a:prstGeom prst="ellipse">
+            <a:avLst/>
+          </a:prstGeom>
+          <a:solidFill>
+            <a:srgbClr val="178681"/>
+          </a:solidFill>
+          <a:ln>
+            <a:noFill/>
+          </a:ln>
+        </p:spPr>
+        <p:style>
+          <a:lnRef idx="1">
+            <a:schemeClr val="accent1"/>
+          </a:lnRef>
+          <a:fillRef idx="3">
+            <a:schemeClr val="accent1"/>
+          </a:fillRef>
+          <a:effectRef idx="2">
+            <a:schemeClr val="accent1"/>
+          </a:effectRef>
+          <a:fontRef idx="minor">
+            <a:schemeClr val="lt1"/>
+          </a:fontRef>
+        </p:style>
+        <p:txBody>
+          <a:bodyPr rtlCol="0" anchor="ctr"/>
+          <a:lstStyle/>
+          <a:p>
+            <a:pPr algn="ctr"/>
+          </a:p>
+        </p:txBody>
+      </p:sp>
+      <p:sp>
+        <p:nvSpPr>
+          <p:cNvPr id="59" name="TextBox 58"/>
+          <p:cNvSpPr txBox="1"/>
+          <p:nvPr/>
+        </p:nvSpPr>
+        <p:spPr>
+          <a:xfrm>
+            <a:off x="4203192" y="4128515"/>
+            <a:ext cx="423671" cy="210312"/>
+          </a:xfrm>
+          <a:prstGeom prst="rect">
+            <a:avLst/>
+          </a:prstGeom>
+          <a:noFill/>
+        </p:spPr>
+        <p:txBody>
+          <a:bodyPr wrap="square" lIns="0" rIns="0" tIns="0" bIns="0" anchor="ctr">
+            <a:spAutoFit/>
+          </a:bodyPr>
+          <a:lstStyle/>
+          <a:p>
+            <a:pPr algn="ctr">
+              <a:spcAft>
+                <a:spcPts val="0"/>
+              </a:spcAft>
+            </a:pPr>
+            <a:r>
+              <a:rPr sz="819" b="1" i="0">
+                <a:solidFill>
+                  <a:srgbClr val="263746"/>
+                </a:solidFill>
+                <a:latin typeface="Arial"/>
+              </a:rPr>
+              <a:t>L1000</a:t>
+            </a:r>
+          </a:p>
+        </p:txBody>
+      </p:sp>
+      <p:sp>
+        <p:nvSpPr>
+          <p:cNvPr id="60" name="Rounded Rectangle 59"/>
+          <p:cNvSpPr/>
+          <p:nvPr/>
+        </p:nvSpPr>
+        <p:spPr>
+          <a:xfrm>
+            <a:off x="4983480" y="1828800"/>
+            <a:ext cx="2148840" cy="3063240"/>
           </a:xfrm>
           <a:prstGeom prst="roundRect">
             <a:avLst/>
@@ -38504,7 +40381,7 @@
           </a:solidFill>
           <a:ln w="10160">
             <a:solidFill>
-              <a:srgbClr val="8063A6"/>
+              <a:srgbClr val="DDE4E8"/>
             </a:solidFill>
           </a:ln>
         </p:spPr>
@@ -38532,16 +40409,16 @@
       </p:sp>
       <p:sp>
         <p:nvSpPr>
-          <p:cNvPr id="16" name="Rectangle 15"/>
+          <p:cNvPr id="61" name="Oval 60"/>
           <p:cNvSpPr/>
           <p:nvPr/>
         </p:nvSpPr>
         <p:spPr>
           <a:xfrm>
-            <a:off x="4983480" y="1901952"/>
-            <a:ext cx="2148840" cy="36576"/>
-          </a:xfrm>
-          <a:prstGeom prst="rect">
+            <a:off x="5129784" y="1993392"/>
+            <a:ext cx="292608" cy="292608"/>
+          </a:xfrm>
+          <a:prstGeom prst="ellipse">
             <a:avLst/>
           </a:prstGeom>
           <a:solidFill>
@@ -38575,14 +40452,14 @@
       </p:sp>
       <p:sp>
         <p:nvSpPr>
-          <p:cNvPr id="17" name="TextBox 16"/>
+          <p:cNvPr id="62" name="TextBox 61"/>
           <p:cNvSpPr txBox="1"/>
           <p:nvPr/>
         </p:nvSpPr>
         <p:spPr>
           <a:xfrm>
-            <a:off x="5148072" y="2167128"/>
-            <a:ext cx="1819656" cy="347472"/>
+            <a:off x="5129784" y="2034540"/>
+            <a:ext cx="292608" cy="182880"/>
           </a:xfrm>
           <a:prstGeom prst="rect">
             <a:avLst/>
@@ -38590,7 +40467,46 @@
           <a:noFill/>
         </p:spPr>
         <p:txBody>
-          <a:bodyPr wrap="square" lIns="18288" rIns="18288" tIns="18288" bIns="18288" anchor="t">
+          <a:bodyPr wrap="square" lIns="0" rIns="0" tIns="0" bIns="0" anchor="t">
+            <a:spAutoFit/>
+          </a:bodyPr>
+          <a:lstStyle/>
+          <a:p>
+            <a:pPr algn="ctr">
+              <a:spcAft>
+                <a:spcPts val="0"/>
+              </a:spcAft>
+            </a:pPr>
+            <a:r>
+              <a:rPr sz="1050" b="1" i="0">
+                <a:solidFill>
+                  <a:srgbClr val="FFFFFF"/>
+                </a:solidFill>
+                <a:latin typeface="Arial"/>
+              </a:rPr>
+              <a:t>3</a:t>
+            </a:r>
+          </a:p>
+        </p:txBody>
+      </p:sp>
+      <p:sp>
+        <p:nvSpPr>
+          <p:cNvPr id="63" name="TextBox 62"/>
+          <p:cNvSpPr txBox="1"/>
+          <p:nvPr/>
+        </p:nvSpPr>
+        <p:spPr>
+          <a:xfrm>
+            <a:off x="5513832" y="2002536"/>
+            <a:ext cx="1435608" cy="274320"/>
+          </a:xfrm>
+          <a:prstGeom prst="rect">
+            <a:avLst/>
+          </a:prstGeom>
+          <a:noFill/>
+        </p:spPr>
+        <p:txBody>
+          <a:bodyPr wrap="square" lIns="18288" rIns="18288" tIns="18288" bIns="18288" anchor="ctr">
             <a:spAutoFit/>
           </a:bodyPr>
           <a:lstStyle/>
@@ -38601,27 +40517,70 @@
               </a:spcAft>
             </a:pPr>
             <a:r>
-              <a:rPr sz="1600" b="1" i="0">
+              <a:rPr sz="1400" b="1" i="0">
                 <a:solidFill>
                   <a:srgbClr val="8063A6"/>
                 </a:solidFill>
                 <a:latin typeface="Arial"/>
               </a:rPr>
-              <a:t>Harmonize</a:t>
-            </a:r>
-          </a:p>
-        </p:txBody>
-      </p:sp>
-      <p:sp>
-        <p:nvSpPr>
-          <p:cNvPr id="18" name="TextBox 17"/>
+              <a:t>Harmonization</a:t>
+            </a:r>
+          </a:p>
+        </p:txBody>
+      </p:sp>
+      <p:sp>
+        <p:nvSpPr>
+          <p:cNvPr id="64" name="Rectangle 63"/>
+          <p:cNvSpPr/>
+          <p:nvPr/>
+        </p:nvSpPr>
+        <p:spPr>
+          <a:xfrm>
+            <a:off x="5129784" y="2359152"/>
+            <a:ext cx="1856231" cy="22860"/>
+          </a:xfrm>
+          <a:prstGeom prst="rect">
+            <a:avLst/>
+          </a:prstGeom>
+          <a:solidFill>
+            <a:srgbClr val="8063A6"/>
+          </a:solidFill>
+          <a:ln>
+            <a:noFill/>
+          </a:ln>
+        </p:spPr>
+        <p:style>
+          <a:lnRef idx="1">
+            <a:schemeClr val="accent1"/>
+          </a:lnRef>
+          <a:fillRef idx="3">
+            <a:schemeClr val="accent1"/>
+          </a:fillRef>
+          <a:effectRef idx="2">
+            <a:schemeClr val="accent1"/>
+          </a:effectRef>
+          <a:fontRef idx="minor">
+            <a:schemeClr val="lt1"/>
+          </a:fontRef>
+        </p:style>
+        <p:txBody>
+          <a:bodyPr rtlCol="0" anchor="ctr"/>
+          <a:lstStyle/>
+          <a:p>
+            <a:pPr algn="ctr"/>
+          </a:p>
+        </p:txBody>
+      </p:sp>
+      <p:sp>
+        <p:nvSpPr>
+          <p:cNvPr id="65" name="TextBox 64"/>
           <p:cNvSpPr txBox="1"/>
           <p:nvPr/>
         </p:nvSpPr>
         <p:spPr>
           <a:xfrm>
-            <a:off x="5148072" y="2660904"/>
-            <a:ext cx="1819656" cy="1280160"/>
+            <a:off x="5129784" y="2487168"/>
+            <a:ext cx="1847088" cy="164592"/>
           </a:xfrm>
           <a:prstGeom prst="rect">
             <a:avLst/>
@@ -38629,7 +40588,7 @@
           <a:noFill/>
         </p:spPr>
         <p:txBody>
-          <a:bodyPr wrap="square" lIns="18288" rIns="18288" tIns="18288" bIns="18288" anchor="t">
+          <a:bodyPr wrap="square" lIns="0" rIns="0" tIns="0" bIns="0" anchor="t">
             <a:spAutoFit/>
           </a:bodyPr>
           <a:lstStyle/>
@@ -38640,29 +40599,406 @@
               </a:spcAft>
             </a:pPr>
             <a:r>
-              <a:rPr sz="1320" b="0" i="0">
+              <a:rPr sz="840" b="1" i="0">
+                <a:solidFill>
+                  <a:srgbClr val="59697A"/>
+                </a:solidFill>
+                <a:latin typeface="Arial"/>
+              </a:rPr>
+              <a:t>Global or study correction</a:t>
+            </a:r>
+          </a:p>
+        </p:txBody>
+      </p:sp>
+      <p:sp>
+        <p:nvSpPr>
+          <p:cNvPr id="66" name="Rounded Rectangle 65"/>
+          <p:cNvSpPr/>
+          <p:nvPr/>
+        </p:nvSpPr>
+        <p:spPr>
+          <a:xfrm>
+            <a:off x="5129784" y="2688336"/>
+            <a:ext cx="1856231" cy="329184"/>
+          </a:xfrm>
+          <a:prstGeom prst="roundRect">
+            <a:avLst/>
+          </a:prstGeom>
+          <a:solidFill>
+            <a:srgbClr val="FFFFFF"/>
+          </a:solidFill>
+          <a:ln w="25400">
+            <a:solidFill>
+              <a:srgbClr val="8063A6"/>
+            </a:solidFill>
+          </a:ln>
+        </p:spPr>
+        <p:style>
+          <a:lnRef idx="1">
+            <a:schemeClr val="accent1"/>
+          </a:lnRef>
+          <a:fillRef idx="3">
+            <a:schemeClr val="accent1"/>
+          </a:fillRef>
+          <a:effectRef idx="2">
+            <a:schemeClr val="accent1"/>
+          </a:effectRef>
+          <a:fontRef idx="minor">
+            <a:schemeClr val="lt1"/>
+          </a:fontRef>
+        </p:style>
+        <p:txBody>
+          <a:bodyPr rtlCol="0" anchor="ctr"/>
+          <a:lstStyle/>
+          <a:p>
+            <a:pPr algn="ctr"/>
+          </a:p>
+        </p:txBody>
+      </p:sp>
+      <p:sp>
+        <p:nvSpPr>
+          <p:cNvPr id="67" name="Oval 66"/>
+          <p:cNvSpPr/>
+          <p:nvPr/>
+        </p:nvSpPr>
+        <p:spPr>
+          <a:xfrm>
+            <a:off x="5180076" y="2827324"/>
+            <a:ext cx="50292" cy="50292"/>
+          </a:xfrm>
+          <a:prstGeom prst="ellipse">
+            <a:avLst/>
+          </a:prstGeom>
+          <a:solidFill>
+            <a:srgbClr val="8063A6"/>
+          </a:solidFill>
+          <a:ln>
+            <a:noFill/>
+          </a:ln>
+        </p:spPr>
+        <p:style>
+          <a:lnRef idx="1">
+            <a:schemeClr val="accent1"/>
+          </a:lnRef>
+          <a:fillRef idx="3">
+            <a:schemeClr val="accent1"/>
+          </a:fillRef>
+          <a:effectRef idx="2">
+            <a:schemeClr val="accent1"/>
+          </a:effectRef>
+          <a:fontRef idx="minor">
+            <a:schemeClr val="lt1"/>
+          </a:fontRef>
+        </p:style>
+        <p:txBody>
+          <a:bodyPr rtlCol="0" anchor="ctr"/>
+          <a:lstStyle/>
+          <a:p>
+            <a:pPr algn="ctr"/>
+          </a:p>
+        </p:txBody>
+      </p:sp>
+      <p:sp>
+        <p:nvSpPr>
+          <p:cNvPr id="68" name="TextBox 67"/>
+          <p:cNvSpPr txBox="1"/>
+          <p:nvPr/>
+        </p:nvSpPr>
+        <p:spPr>
+          <a:xfrm>
+            <a:off x="5266944" y="2738628"/>
+            <a:ext cx="1691639" cy="210312"/>
+          </a:xfrm>
+          <a:prstGeom prst="rect">
+            <a:avLst/>
+          </a:prstGeom>
+          <a:noFill/>
+        </p:spPr>
+        <p:txBody>
+          <a:bodyPr wrap="square" lIns="0" rIns="0" tIns="0" bIns="0" anchor="ctr">
+            <a:spAutoFit/>
+          </a:bodyPr>
+          <a:lstStyle/>
+          <a:p>
+            <a:pPr algn="ctr">
+              <a:spcAft>
+                <a:spcPts val="0"/>
+              </a:spcAft>
+            </a:pPr>
+            <a:r>
+              <a:rPr sz="919" b="1" i="0">
                 <a:solidFill>
                   <a:srgbClr val="263746"/>
                 </a:solidFill>
                 <a:latin typeface="Arial"/>
               </a:rPr>
-              <a:t>none or study z
-ComBat / MBatch
-MOBER adapter</a:t>
-            </a:r>
-          </a:p>
-        </p:txBody>
-      </p:sp>
-      <p:sp>
-        <p:nvSpPr>
-          <p:cNvPr id="19" name="Rounded Rectangle 18"/>
+              <a:t>None</a:t>
+            </a:r>
+          </a:p>
+        </p:txBody>
+      </p:sp>
+      <p:sp>
+        <p:nvSpPr>
+          <p:cNvPr id="69" name="Rounded Rectangle 68"/>
           <p:cNvSpPr/>
           <p:nvPr/>
         </p:nvSpPr>
         <p:spPr>
           <a:xfrm>
-            <a:off x="7315200" y="1901952"/>
-            <a:ext cx="2148840" cy="2359152"/>
+            <a:off x="5129784" y="3145536"/>
+            <a:ext cx="1856231" cy="329184"/>
+          </a:xfrm>
+          <a:prstGeom prst="roundRect">
+            <a:avLst/>
+          </a:prstGeom>
+          <a:solidFill>
+            <a:srgbClr val="F7F9FA"/>
+          </a:solidFill>
+          <a:ln w="8255">
+            <a:solidFill>
+              <a:srgbClr val="C9D2D8"/>
+            </a:solidFill>
+          </a:ln>
+        </p:spPr>
+        <p:style>
+          <a:lnRef idx="1">
+            <a:schemeClr val="accent1"/>
+          </a:lnRef>
+          <a:fillRef idx="3">
+            <a:schemeClr val="accent1"/>
+          </a:fillRef>
+          <a:effectRef idx="2">
+            <a:schemeClr val="accent1"/>
+          </a:effectRef>
+          <a:fontRef idx="minor">
+            <a:schemeClr val="lt1"/>
+          </a:fontRef>
+        </p:style>
+        <p:txBody>
+          <a:bodyPr rtlCol="0" anchor="ctr"/>
+          <a:lstStyle/>
+          <a:p>
+            <a:pPr algn="ctr"/>
+          </a:p>
+        </p:txBody>
+      </p:sp>
+      <p:sp>
+        <p:nvSpPr>
+          <p:cNvPr id="70" name="TextBox 69"/>
+          <p:cNvSpPr txBox="1"/>
+          <p:nvPr/>
+        </p:nvSpPr>
+        <p:spPr>
+          <a:xfrm>
+            <a:off x="5184648" y="3195828"/>
+            <a:ext cx="1746503" cy="210312"/>
+          </a:xfrm>
+          <a:prstGeom prst="rect">
+            <a:avLst/>
+          </a:prstGeom>
+          <a:noFill/>
+        </p:spPr>
+        <p:txBody>
+          <a:bodyPr wrap="square" lIns="0" rIns="0" tIns="0" bIns="0" anchor="ctr">
+            <a:spAutoFit/>
+          </a:bodyPr>
+          <a:lstStyle/>
+          <a:p>
+            <a:pPr algn="ctr">
+              <a:spcAft>
+                <a:spcPts val="0"/>
+              </a:spcAft>
+            </a:pPr>
+            <a:r>
+              <a:rPr sz="919" b="0" i="0">
+                <a:solidFill>
+                  <a:srgbClr val="59697A"/>
+                </a:solidFill>
+                <a:latin typeface="Arial"/>
+              </a:rPr>
+              <a:t>Within-study z-score</a:t>
+            </a:r>
+          </a:p>
+        </p:txBody>
+      </p:sp>
+      <p:sp>
+        <p:nvSpPr>
+          <p:cNvPr id="71" name="Rounded Rectangle 70"/>
+          <p:cNvSpPr/>
+          <p:nvPr/>
+        </p:nvSpPr>
+        <p:spPr>
+          <a:xfrm>
+            <a:off x="5129784" y="3602736"/>
+            <a:ext cx="1856231" cy="329184"/>
+          </a:xfrm>
+          <a:prstGeom prst="roundRect">
+            <a:avLst/>
+          </a:prstGeom>
+          <a:solidFill>
+            <a:srgbClr val="F7F9FA"/>
+          </a:solidFill>
+          <a:ln w="8255">
+            <a:solidFill>
+              <a:srgbClr val="C9D2D8"/>
+            </a:solidFill>
+          </a:ln>
+        </p:spPr>
+        <p:style>
+          <a:lnRef idx="1">
+            <a:schemeClr val="accent1"/>
+          </a:lnRef>
+          <a:fillRef idx="3">
+            <a:schemeClr val="accent1"/>
+          </a:fillRef>
+          <a:effectRef idx="2">
+            <a:schemeClr val="accent1"/>
+          </a:effectRef>
+          <a:fontRef idx="minor">
+            <a:schemeClr val="lt1"/>
+          </a:fontRef>
+        </p:style>
+        <p:txBody>
+          <a:bodyPr rtlCol="0" anchor="ctr"/>
+          <a:lstStyle/>
+          <a:p>
+            <a:pPr algn="ctr"/>
+          </a:p>
+        </p:txBody>
+      </p:sp>
+      <p:sp>
+        <p:nvSpPr>
+          <p:cNvPr id="72" name="TextBox 71"/>
+          <p:cNvSpPr txBox="1"/>
+          <p:nvPr/>
+        </p:nvSpPr>
+        <p:spPr>
+          <a:xfrm>
+            <a:off x="5184648" y="3653028"/>
+            <a:ext cx="1746503" cy="210312"/>
+          </a:xfrm>
+          <a:prstGeom prst="rect">
+            <a:avLst/>
+          </a:prstGeom>
+          <a:noFill/>
+        </p:spPr>
+        <p:txBody>
+          <a:bodyPr wrap="square" lIns="0" rIns="0" tIns="0" bIns="0" anchor="ctr">
+            <a:spAutoFit/>
+          </a:bodyPr>
+          <a:lstStyle/>
+          <a:p>
+            <a:pPr algn="ctr">
+              <a:spcAft>
+                <a:spcPts val="0"/>
+              </a:spcAft>
+            </a:pPr>
+            <a:r>
+              <a:rPr sz="919" b="0" i="0">
+                <a:solidFill>
+                  <a:srgbClr val="59697A"/>
+                </a:solidFill>
+                <a:latin typeface="Arial"/>
+              </a:rPr>
+              <a:t>ComBat / MBatch</a:t>
+            </a:r>
+          </a:p>
+        </p:txBody>
+      </p:sp>
+      <p:sp>
+        <p:nvSpPr>
+          <p:cNvPr id="73" name="Rounded Rectangle 72"/>
+          <p:cNvSpPr/>
+          <p:nvPr/>
+        </p:nvSpPr>
+        <p:spPr>
+          <a:xfrm>
+            <a:off x="5129784" y="4059935"/>
+            <a:ext cx="1856231" cy="329184"/>
+          </a:xfrm>
+          <a:prstGeom prst="roundRect">
+            <a:avLst/>
+          </a:prstGeom>
+          <a:solidFill>
+            <a:srgbClr val="F7F9FA"/>
+          </a:solidFill>
+          <a:ln w="8255">
+            <a:solidFill>
+              <a:srgbClr val="C9D2D8"/>
+            </a:solidFill>
+          </a:ln>
+        </p:spPr>
+        <p:style>
+          <a:lnRef idx="1">
+            <a:schemeClr val="accent1"/>
+          </a:lnRef>
+          <a:fillRef idx="3">
+            <a:schemeClr val="accent1"/>
+          </a:fillRef>
+          <a:effectRef idx="2">
+            <a:schemeClr val="accent1"/>
+          </a:effectRef>
+          <a:fontRef idx="minor">
+            <a:schemeClr val="lt1"/>
+          </a:fontRef>
+        </p:style>
+        <p:txBody>
+          <a:bodyPr rtlCol="0" anchor="ctr"/>
+          <a:lstStyle/>
+          <a:p>
+            <a:pPr algn="ctr"/>
+          </a:p>
+        </p:txBody>
+      </p:sp>
+      <p:sp>
+        <p:nvSpPr>
+          <p:cNvPr id="74" name="TextBox 73"/>
+          <p:cNvSpPr txBox="1"/>
+          <p:nvPr/>
+        </p:nvSpPr>
+        <p:spPr>
+          <a:xfrm>
+            <a:off x="5184648" y="4110227"/>
+            <a:ext cx="1746503" cy="210312"/>
+          </a:xfrm>
+          <a:prstGeom prst="rect">
+            <a:avLst/>
+          </a:prstGeom>
+          <a:noFill/>
+        </p:spPr>
+        <p:txBody>
+          <a:bodyPr wrap="square" lIns="0" rIns="0" tIns="0" bIns="0" anchor="ctr">
+            <a:spAutoFit/>
+          </a:bodyPr>
+          <a:lstStyle/>
+          <a:p>
+            <a:pPr algn="ctr">
+              <a:spcAft>
+                <a:spcPts val="0"/>
+              </a:spcAft>
+            </a:pPr>
+            <a:r>
+              <a:rPr sz="919" b="0" i="0">
+                <a:solidFill>
+                  <a:srgbClr val="59697A"/>
+                </a:solidFill>
+                <a:latin typeface="Arial"/>
+              </a:rPr>
+              <a:t>MOBER</a:t>
+            </a:r>
+          </a:p>
+        </p:txBody>
+      </p:sp>
+      <p:sp>
+        <p:nvSpPr>
+          <p:cNvPr id="75" name="Rounded Rectangle 74"/>
+          <p:cNvSpPr/>
+          <p:nvPr/>
+        </p:nvSpPr>
+        <p:spPr>
+          <a:xfrm>
+            <a:off x="7315200" y="1828800"/>
+            <a:ext cx="2148840" cy="3063240"/>
           </a:xfrm>
           <a:prstGeom prst="roundRect">
             <a:avLst/>
@@ -38672,7 +41008,7 @@
           </a:solidFill>
           <a:ln w="10160">
             <a:solidFill>
-              <a:srgbClr val="D37B00"/>
+              <a:srgbClr val="DDE4E8"/>
             </a:solidFill>
           </a:ln>
         </p:spPr>
@@ -38700,16 +41036,16 @@
       </p:sp>
       <p:sp>
         <p:nvSpPr>
-          <p:cNvPr id="20" name="Rectangle 19"/>
+          <p:cNvPr id="76" name="Oval 75"/>
           <p:cNvSpPr/>
           <p:nvPr/>
         </p:nvSpPr>
         <p:spPr>
           <a:xfrm>
-            <a:off x="7315200" y="1901952"/>
-            <a:ext cx="2148840" cy="36576"/>
-          </a:xfrm>
-          <a:prstGeom prst="rect">
+            <a:off x="7461504" y="1993392"/>
+            <a:ext cx="292608" cy="292608"/>
+          </a:xfrm>
+          <a:prstGeom prst="ellipse">
             <a:avLst/>
           </a:prstGeom>
           <a:solidFill>
@@ -38743,14 +41079,14 @@
       </p:sp>
       <p:sp>
         <p:nvSpPr>
-          <p:cNvPr id="21" name="TextBox 20"/>
+          <p:cNvPr id="77" name="TextBox 76"/>
           <p:cNvSpPr txBox="1"/>
           <p:nvPr/>
         </p:nvSpPr>
         <p:spPr>
           <a:xfrm>
-            <a:off x="7479792" y="2167128"/>
-            <a:ext cx="1819656" cy="347472"/>
+            <a:off x="7461504" y="2034540"/>
+            <a:ext cx="292608" cy="182880"/>
           </a:xfrm>
           <a:prstGeom prst="rect">
             <a:avLst/>
@@ -38758,7 +41094,46 @@
           <a:noFill/>
         </p:spPr>
         <p:txBody>
-          <a:bodyPr wrap="square" lIns="18288" rIns="18288" tIns="18288" bIns="18288" anchor="t">
+          <a:bodyPr wrap="square" lIns="0" rIns="0" tIns="0" bIns="0" anchor="t">
+            <a:spAutoFit/>
+          </a:bodyPr>
+          <a:lstStyle/>
+          <a:p>
+            <a:pPr algn="ctr">
+              <a:spcAft>
+                <a:spcPts val="0"/>
+              </a:spcAft>
+            </a:pPr>
+            <a:r>
+              <a:rPr sz="1050" b="1" i="0">
+                <a:solidFill>
+                  <a:srgbClr val="FFFFFF"/>
+                </a:solidFill>
+                <a:latin typeface="Arial"/>
+              </a:rPr>
+              <a:t>4</a:t>
+            </a:r>
+          </a:p>
+        </p:txBody>
+      </p:sp>
+      <p:sp>
+        <p:nvSpPr>
+          <p:cNvPr id="78" name="TextBox 77"/>
+          <p:cNvSpPr txBox="1"/>
+          <p:nvPr/>
+        </p:nvSpPr>
+        <p:spPr>
+          <a:xfrm>
+            <a:off x="7845552" y="2002536"/>
+            <a:ext cx="1435608" cy="274320"/>
+          </a:xfrm>
+          <a:prstGeom prst="rect">
+            <a:avLst/>
+          </a:prstGeom>
+          <a:noFill/>
+        </p:spPr>
+        <p:txBody>
+          <a:bodyPr wrap="square" lIns="18288" rIns="18288" tIns="18288" bIns="18288" anchor="ctr">
             <a:spAutoFit/>
           </a:bodyPr>
           <a:lstStyle/>
@@ -38769,27 +41144,70 @@
               </a:spcAft>
             </a:pPr>
             <a:r>
-              <a:rPr sz="1600" b="1" i="0">
+              <a:rPr sz="1400" b="1" i="0">
                 <a:solidFill>
                   <a:srgbClr val="D37B00"/>
                 </a:solidFill>
                 <a:latin typeface="Arial"/>
               </a:rPr>
-              <a:t>Model + train</a:t>
-            </a:r>
-          </a:p>
-        </p:txBody>
-      </p:sp>
-      <p:sp>
-        <p:nvSpPr>
-          <p:cNvPr id="22" name="TextBox 21"/>
+              <a:t>Model training</a:t>
+            </a:r>
+          </a:p>
+        </p:txBody>
+      </p:sp>
+      <p:sp>
+        <p:nvSpPr>
+          <p:cNvPr id="79" name="Rectangle 78"/>
+          <p:cNvSpPr/>
+          <p:nvPr/>
+        </p:nvSpPr>
+        <p:spPr>
+          <a:xfrm>
+            <a:off x="7461504" y="2359152"/>
+            <a:ext cx="1856231" cy="22860"/>
+          </a:xfrm>
+          <a:prstGeom prst="rect">
+            <a:avLst/>
+          </a:prstGeom>
+          <a:solidFill>
+            <a:srgbClr val="D37B00"/>
+          </a:solidFill>
+          <a:ln>
+            <a:noFill/>
+          </a:ln>
+        </p:spPr>
+        <p:style>
+          <a:lnRef idx="1">
+            <a:schemeClr val="accent1"/>
+          </a:lnRef>
+          <a:fillRef idx="3">
+            <a:schemeClr val="accent1"/>
+          </a:fillRef>
+          <a:effectRef idx="2">
+            <a:schemeClr val="accent1"/>
+          </a:effectRef>
+          <a:fontRef idx="minor">
+            <a:schemeClr val="lt1"/>
+          </a:fontRef>
+        </p:style>
+        <p:txBody>
+          <a:bodyPr rtlCol="0" anchor="ctr"/>
+          <a:lstStyle/>
+          <a:p>
+            <a:pPr algn="ctr"/>
+          </a:p>
+        </p:txBody>
+      </p:sp>
+      <p:sp>
+        <p:nvSpPr>
+          <p:cNvPr id="80" name="TextBox 79"/>
           <p:cNvSpPr txBox="1"/>
           <p:nvPr/>
         </p:nvSpPr>
         <p:spPr>
           <a:xfrm>
-            <a:off x="7479792" y="2660904"/>
-            <a:ext cx="1819656" cy="1280160"/>
+            <a:off x="7461504" y="2487168"/>
+            <a:ext cx="1847088" cy="164592"/>
           </a:xfrm>
           <a:prstGeom prst="rect">
             <a:avLst/>
@@ -38797,7 +41215,7 @@
           <a:noFill/>
         </p:spPr>
         <p:txBody>
-          <a:bodyPr wrap="square" lIns="18288" rIns="18288" tIns="18288" bIns="18288" anchor="t">
+          <a:bodyPr wrap="square" lIns="0" rIns="0" tIns="0" bIns="0" anchor="t">
             <a:spAutoFit/>
           </a:bodyPr>
           <a:lstStyle/>
@@ -38808,29 +41226,572 @@
               </a:spcAft>
             </a:pPr>
             <a:r>
-              <a:rPr sz="1320" b="0" i="0">
+              <a:rPr sz="840" b="1" i="0">
+                <a:solidFill>
+                  <a:srgbClr val="59697A"/>
+                </a:solidFill>
+                <a:latin typeface="Arial"/>
+              </a:rPr>
+              <a:t>Generator</a:t>
+            </a:r>
+          </a:p>
+        </p:txBody>
+      </p:sp>
+      <p:sp>
+        <p:nvSpPr>
+          <p:cNvPr id="81" name="Rounded Rectangle 80"/>
+          <p:cNvSpPr/>
+          <p:nvPr/>
+        </p:nvSpPr>
+        <p:spPr>
+          <a:xfrm>
+            <a:off x="7461504" y="2688336"/>
+            <a:ext cx="905255" cy="329184"/>
+          </a:xfrm>
+          <a:prstGeom prst="roundRect">
+            <a:avLst/>
+          </a:prstGeom>
+          <a:solidFill>
+            <a:srgbClr val="F7F9FA"/>
+          </a:solidFill>
+          <a:ln w="8255">
+            <a:solidFill>
+              <a:srgbClr val="C9D2D8"/>
+            </a:solidFill>
+          </a:ln>
+        </p:spPr>
+        <p:style>
+          <a:lnRef idx="1">
+            <a:schemeClr val="accent1"/>
+          </a:lnRef>
+          <a:fillRef idx="3">
+            <a:schemeClr val="accent1"/>
+          </a:fillRef>
+          <a:effectRef idx="2">
+            <a:schemeClr val="accent1"/>
+          </a:effectRef>
+          <a:fontRef idx="minor">
+            <a:schemeClr val="lt1"/>
+          </a:fontRef>
+        </p:style>
+        <p:txBody>
+          <a:bodyPr rtlCol="0" anchor="ctr"/>
+          <a:lstStyle/>
+          <a:p>
+            <a:pPr algn="ctr"/>
+          </a:p>
+        </p:txBody>
+      </p:sp>
+      <p:sp>
+        <p:nvSpPr>
+          <p:cNvPr id="82" name="TextBox 81"/>
+          <p:cNvSpPr txBox="1"/>
+          <p:nvPr/>
+        </p:nvSpPr>
+        <p:spPr>
+          <a:xfrm>
+            <a:off x="7516368" y="2738628"/>
+            <a:ext cx="795527" cy="210312"/>
+          </a:xfrm>
+          <a:prstGeom prst="rect">
+            <a:avLst/>
+          </a:prstGeom>
+          <a:noFill/>
+        </p:spPr>
+        <p:txBody>
+          <a:bodyPr wrap="square" lIns="0" rIns="0" tIns="0" bIns="0" anchor="ctr">
+            <a:spAutoFit/>
+          </a:bodyPr>
+          <a:lstStyle/>
+          <a:p>
+            <a:pPr algn="ctr">
+              <a:spcAft>
+                <a:spcPts val="0"/>
+              </a:spcAft>
+            </a:pPr>
+            <a:r>
+              <a:rPr sz="880" b="0" i="0">
+                <a:solidFill>
+                  <a:srgbClr val="59697A"/>
+                </a:solidFill>
+                <a:latin typeface="Arial"/>
+              </a:rPr>
+              <a:t>WGAN-GP</a:t>
+            </a:r>
+          </a:p>
+        </p:txBody>
+      </p:sp>
+      <p:sp>
+        <p:nvSpPr>
+          <p:cNvPr id="83" name="Rounded Rectangle 82"/>
+          <p:cNvSpPr/>
+          <p:nvPr/>
+        </p:nvSpPr>
+        <p:spPr>
+          <a:xfrm>
+            <a:off x="8412480" y="2688336"/>
+            <a:ext cx="905255" cy="329184"/>
+          </a:xfrm>
+          <a:prstGeom prst="roundRect">
+            <a:avLst/>
+          </a:prstGeom>
+          <a:solidFill>
+            <a:srgbClr val="FFFFFF"/>
+          </a:solidFill>
+          <a:ln w="25400">
+            <a:solidFill>
+              <a:srgbClr val="D37B00"/>
+            </a:solidFill>
+          </a:ln>
+        </p:spPr>
+        <p:style>
+          <a:lnRef idx="1">
+            <a:schemeClr val="accent1"/>
+          </a:lnRef>
+          <a:fillRef idx="3">
+            <a:schemeClr val="accent1"/>
+          </a:fillRef>
+          <a:effectRef idx="2">
+            <a:schemeClr val="accent1"/>
+          </a:effectRef>
+          <a:fontRef idx="minor">
+            <a:schemeClr val="lt1"/>
+          </a:fontRef>
+        </p:style>
+        <p:txBody>
+          <a:bodyPr rtlCol="0" anchor="ctr"/>
+          <a:lstStyle/>
+          <a:p>
+            <a:pPr algn="ctr"/>
+          </a:p>
+        </p:txBody>
+      </p:sp>
+      <p:sp>
+        <p:nvSpPr>
+          <p:cNvPr id="84" name="Oval 83"/>
+          <p:cNvSpPr/>
+          <p:nvPr/>
+        </p:nvSpPr>
+        <p:spPr>
+          <a:xfrm>
+            <a:off x="8462772" y="2827324"/>
+            <a:ext cx="50292" cy="50292"/>
+          </a:xfrm>
+          <a:prstGeom prst="ellipse">
+            <a:avLst/>
+          </a:prstGeom>
+          <a:solidFill>
+            <a:srgbClr val="D37B00"/>
+          </a:solidFill>
+          <a:ln>
+            <a:noFill/>
+          </a:ln>
+        </p:spPr>
+        <p:style>
+          <a:lnRef idx="1">
+            <a:schemeClr val="accent1"/>
+          </a:lnRef>
+          <a:fillRef idx="3">
+            <a:schemeClr val="accent1"/>
+          </a:fillRef>
+          <a:effectRef idx="2">
+            <a:schemeClr val="accent1"/>
+          </a:effectRef>
+          <a:fontRef idx="minor">
+            <a:schemeClr val="lt1"/>
+          </a:fontRef>
+        </p:style>
+        <p:txBody>
+          <a:bodyPr rtlCol="0" anchor="ctr"/>
+          <a:lstStyle/>
+          <a:p>
+            <a:pPr algn="ctr"/>
+          </a:p>
+        </p:txBody>
+      </p:sp>
+      <p:sp>
+        <p:nvSpPr>
+          <p:cNvPr id="85" name="TextBox 84"/>
+          <p:cNvSpPr txBox="1"/>
+          <p:nvPr/>
+        </p:nvSpPr>
+        <p:spPr>
+          <a:xfrm>
+            <a:off x="8549640" y="2738628"/>
+            <a:ext cx="740663" cy="210312"/>
+          </a:xfrm>
+          <a:prstGeom prst="rect">
+            <a:avLst/>
+          </a:prstGeom>
+          <a:noFill/>
+        </p:spPr>
+        <p:txBody>
+          <a:bodyPr wrap="square" lIns="0" rIns="0" tIns="0" bIns="0" anchor="ctr">
+            <a:spAutoFit/>
+          </a:bodyPr>
+          <a:lstStyle/>
+          <a:p>
+            <a:pPr algn="ctr">
+              <a:spcAft>
+                <a:spcPts val="0"/>
+              </a:spcAft>
+            </a:pPr>
+            <a:r>
+              <a:rPr sz="880" b="1" i="0">
                 <a:solidFill>
                   <a:srgbClr val="263746"/>
                 </a:solidFill>
                 <a:latin typeface="Arial"/>
               </a:rPr>
-              <a:t>WGAN-GP or DDIM
-OSDR or ARCHS4
-pretrain + adapt</a:t>
-            </a:r>
-          </a:p>
-        </p:txBody>
-      </p:sp>
-      <p:sp>
-        <p:nvSpPr>
-          <p:cNvPr id="23" name="Rounded Rectangle 22"/>
+              <a:t>DDIM</a:t>
+            </a:r>
+          </a:p>
+        </p:txBody>
+      </p:sp>
+      <p:sp>
+        <p:nvSpPr>
+          <p:cNvPr id="86" name="TextBox 85"/>
+          <p:cNvSpPr txBox="1"/>
+          <p:nvPr/>
+        </p:nvSpPr>
+        <p:spPr>
+          <a:xfrm>
+            <a:off x="7461504" y="3182112"/>
+            <a:ext cx="1847088" cy="164592"/>
+          </a:xfrm>
+          <a:prstGeom prst="rect">
+            <a:avLst/>
+          </a:prstGeom>
+          <a:noFill/>
+        </p:spPr>
+        <p:txBody>
+          <a:bodyPr wrap="square" lIns="0" rIns="0" tIns="0" bIns="0" anchor="t">
+            <a:spAutoFit/>
+          </a:bodyPr>
+          <a:lstStyle/>
+          <a:p>
+            <a:pPr algn="l">
+              <a:spcAft>
+                <a:spcPts val="0"/>
+              </a:spcAft>
+            </a:pPr>
+            <a:r>
+              <a:rPr sz="840" b="1" i="0">
+                <a:solidFill>
+                  <a:srgbClr val="59697A"/>
+                </a:solidFill>
+                <a:latin typeface="Arial"/>
+              </a:rPr>
+              <a:t>Training source</a:t>
+            </a:r>
+          </a:p>
+        </p:txBody>
+      </p:sp>
+      <p:sp>
+        <p:nvSpPr>
+          <p:cNvPr id="87" name="Rounded Rectangle 86"/>
           <p:cNvSpPr/>
           <p:nvPr/>
         </p:nvSpPr>
         <p:spPr>
           <a:xfrm>
-            <a:off x="9646920" y="1901952"/>
-            <a:ext cx="2148840" cy="2359152"/>
+            <a:off x="7461504" y="3383280"/>
+            <a:ext cx="1856231" cy="329184"/>
+          </a:xfrm>
+          <a:prstGeom prst="roundRect">
+            <a:avLst/>
+          </a:prstGeom>
+          <a:solidFill>
+            <a:srgbClr val="F7F9FA"/>
+          </a:solidFill>
+          <a:ln w="8255">
+            <a:solidFill>
+              <a:srgbClr val="C9D2D8"/>
+            </a:solidFill>
+          </a:ln>
+        </p:spPr>
+        <p:style>
+          <a:lnRef idx="1">
+            <a:schemeClr val="accent1"/>
+          </a:lnRef>
+          <a:fillRef idx="3">
+            <a:schemeClr val="accent1"/>
+          </a:fillRef>
+          <a:effectRef idx="2">
+            <a:schemeClr val="accent1"/>
+          </a:effectRef>
+          <a:fontRef idx="minor">
+            <a:schemeClr val="lt1"/>
+          </a:fontRef>
+        </p:style>
+        <p:txBody>
+          <a:bodyPr rtlCol="0" anchor="ctr"/>
+          <a:lstStyle/>
+          <a:p>
+            <a:pPr algn="ctr"/>
+          </a:p>
+        </p:txBody>
+      </p:sp>
+      <p:sp>
+        <p:nvSpPr>
+          <p:cNvPr id="88" name="TextBox 87"/>
+          <p:cNvSpPr txBox="1"/>
+          <p:nvPr/>
+        </p:nvSpPr>
+        <p:spPr>
+          <a:xfrm>
+            <a:off x="7516368" y="3433572"/>
+            <a:ext cx="1746503" cy="210312"/>
+          </a:xfrm>
+          <a:prstGeom prst="rect">
+            <a:avLst/>
+          </a:prstGeom>
+          <a:noFill/>
+        </p:spPr>
+        <p:txBody>
+          <a:bodyPr wrap="square" lIns="0" rIns="0" tIns="0" bIns="0" anchor="ctr">
+            <a:spAutoFit/>
+          </a:bodyPr>
+          <a:lstStyle/>
+          <a:p>
+            <a:pPr algn="ctr">
+              <a:spcAft>
+                <a:spcPts val="0"/>
+              </a:spcAft>
+            </a:pPr>
+            <a:r>
+              <a:rPr sz="919" b="0" i="0">
+                <a:solidFill>
+                  <a:srgbClr val="59697A"/>
+                </a:solidFill>
+                <a:latin typeface="Arial"/>
+              </a:rPr>
+              <a:t>OSDR only</a:t>
+            </a:r>
+          </a:p>
+        </p:txBody>
+      </p:sp>
+      <p:sp>
+        <p:nvSpPr>
+          <p:cNvPr id="89" name="Rounded Rectangle 88"/>
+          <p:cNvSpPr/>
+          <p:nvPr/>
+        </p:nvSpPr>
+        <p:spPr>
+          <a:xfrm>
+            <a:off x="7461504" y="3840480"/>
+            <a:ext cx="1856231" cy="329184"/>
+          </a:xfrm>
+          <a:prstGeom prst="roundRect">
+            <a:avLst/>
+          </a:prstGeom>
+          <a:solidFill>
+            <a:srgbClr val="F7F9FA"/>
+          </a:solidFill>
+          <a:ln w="8255">
+            <a:solidFill>
+              <a:srgbClr val="C9D2D8"/>
+            </a:solidFill>
+          </a:ln>
+        </p:spPr>
+        <p:style>
+          <a:lnRef idx="1">
+            <a:schemeClr val="accent1"/>
+          </a:lnRef>
+          <a:fillRef idx="3">
+            <a:schemeClr val="accent1"/>
+          </a:fillRef>
+          <a:effectRef idx="2">
+            <a:schemeClr val="accent1"/>
+          </a:effectRef>
+          <a:fontRef idx="minor">
+            <a:schemeClr val="lt1"/>
+          </a:fontRef>
+        </p:style>
+        <p:txBody>
+          <a:bodyPr rtlCol="0" anchor="ctr"/>
+          <a:lstStyle/>
+          <a:p>
+            <a:pPr algn="ctr"/>
+          </a:p>
+        </p:txBody>
+      </p:sp>
+      <p:sp>
+        <p:nvSpPr>
+          <p:cNvPr id="90" name="TextBox 89"/>
+          <p:cNvSpPr txBox="1"/>
+          <p:nvPr/>
+        </p:nvSpPr>
+        <p:spPr>
+          <a:xfrm>
+            <a:off x="7516368" y="3890772"/>
+            <a:ext cx="1746503" cy="210312"/>
+          </a:xfrm>
+          <a:prstGeom prst="rect">
+            <a:avLst/>
+          </a:prstGeom>
+          <a:noFill/>
+        </p:spPr>
+        <p:txBody>
+          <a:bodyPr wrap="square" lIns="0" rIns="0" tIns="0" bIns="0" anchor="ctr">
+            <a:spAutoFit/>
+          </a:bodyPr>
+          <a:lstStyle/>
+          <a:p>
+            <a:pPr algn="ctr">
+              <a:spcAft>
+                <a:spcPts val="0"/>
+              </a:spcAft>
+            </a:pPr>
+            <a:r>
+              <a:rPr sz="919" b="0" i="0">
+                <a:solidFill>
+                  <a:srgbClr val="59697A"/>
+                </a:solidFill>
+                <a:latin typeface="Arial"/>
+              </a:rPr>
+              <a:t>ARCHS4 only</a:t>
+            </a:r>
+          </a:p>
+        </p:txBody>
+      </p:sp>
+      <p:sp>
+        <p:nvSpPr>
+          <p:cNvPr id="91" name="Rounded Rectangle 90"/>
+          <p:cNvSpPr/>
+          <p:nvPr/>
+        </p:nvSpPr>
+        <p:spPr>
+          <a:xfrm>
+            <a:off x="7461504" y="4297680"/>
+            <a:ext cx="1856231" cy="329184"/>
+          </a:xfrm>
+          <a:prstGeom prst="roundRect">
+            <a:avLst/>
+          </a:prstGeom>
+          <a:solidFill>
+            <a:srgbClr val="FFFFFF"/>
+          </a:solidFill>
+          <a:ln w="25400">
+            <a:solidFill>
+              <a:srgbClr val="D37B00"/>
+            </a:solidFill>
+          </a:ln>
+        </p:spPr>
+        <p:style>
+          <a:lnRef idx="1">
+            <a:schemeClr val="accent1"/>
+          </a:lnRef>
+          <a:fillRef idx="3">
+            <a:schemeClr val="accent1"/>
+          </a:fillRef>
+          <a:effectRef idx="2">
+            <a:schemeClr val="accent1"/>
+          </a:effectRef>
+          <a:fontRef idx="minor">
+            <a:schemeClr val="lt1"/>
+          </a:fontRef>
+        </p:style>
+        <p:txBody>
+          <a:bodyPr rtlCol="0" anchor="ctr"/>
+          <a:lstStyle/>
+          <a:p>
+            <a:pPr algn="ctr"/>
+          </a:p>
+        </p:txBody>
+      </p:sp>
+      <p:sp>
+        <p:nvSpPr>
+          <p:cNvPr id="92" name="Oval 91"/>
+          <p:cNvSpPr/>
+          <p:nvPr/>
+        </p:nvSpPr>
+        <p:spPr>
+          <a:xfrm>
+            <a:off x="7511796" y="4436668"/>
+            <a:ext cx="50292" cy="50292"/>
+          </a:xfrm>
+          <a:prstGeom prst="ellipse">
+            <a:avLst/>
+          </a:prstGeom>
+          <a:solidFill>
+            <a:srgbClr val="D37B00"/>
+          </a:solidFill>
+          <a:ln>
+            <a:noFill/>
+          </a:ln>
+        </p:spPr>
+        <p:style>
+          <a:lnRef idx="1">
+            <a:schemeClr val="accent1"/>
+          </a:lnRef>
+          <a:fillRef idx="3">
+            <a:schemeClr val="accent1"/>
+          </a:fillRef>
+          <a:effectRef idx="2">
+            <a:schemeClr val="accent1"/>
+          </a:effectRef>
+          <a:fontRef idx="minor">
+            <a:schemeClr val="lt1"/>
+          </a:fontRef>
+        </p:style>
+        <p:txBody>
+          <a:bodyPr rtlCol="0" anchor="ctr"/>
+          <a:lstStyle/>
+          <a:p>
+            <a:pPr algn="ctr"/>
+          </a:p>
+        </p:txBody>
+      </p:sp>
+      <p:sp>
+        <p:nvSpPr>
+          <p:cNvPr id="93" name="TextBox 92"/>
+          <p:cNvSpPr txBox="1"/>
+          <p:nvPr/>
+        </p:nvSpPr>
+        <p:spPr>
+          <a:xfrm>
+            <a:off x="7598664" y="4347972"/>
+            <a:ext cx="1691639" cy="210312"/>
+          </a:xfrm>
+          <a:prstGeom prst="rect">
+            <a:avLst/>
+          </a:prstGeom>
+          <a:noFill/>
+        </p:spPr>
+        <p:txBody>
+          <a:bodyPr wrap="square" lIns="0" rIns="0" tIns="0" bIns="0" anchor="ctr">
+            <a:spAutoFit/>
+          </a:bodyPr>
+          <a:lstStyle/>
+          <a:p>
+            <a:pPr algn="ctr">
+              <a:spcAft>
+                <a:spcPts val="0"/>
+              </a:spcAft>
+            </a:pPr>
+            <a:r>
+              <a:rPr sz="919" b="1" i="0">
+                <a:solidFill>
+                  <a:srgbClr val="263746"/>
+                </a:solidFill>
+                <a:latin typeface="Arial"/>
+              </a:rPr>
+              <a:t>Pretrain + adapt</a:t>
+            </a:r>
+          </a:p>
+        </p:txBody>
+      </p:sp>
+      <p:sp>
+        <p:nvSpPr>
+          <p:cNvPr id="94" name="Rounded Rectangle 93"/>
+          <p:cNvSpPr/>
+          <p:nvPr/>
+        </p:nvSpPr>
+        <p:spPr>
+          <a:xfrm>
+            <a:off x="9646920" y="1828800"/>
+            <a:ext cx="2148840" cy="3063240"/>
           </a:xfrm>
           <a:prstGeom prst="roundRect">
             <a:avLst/>
@@ -38840,7 +41801,7 @@
           </a:solidFill>
           <a:ln w="10160">
             <a:solidFill>
-              <a:srgbClr val="478A64"/>
+              <a:srgbClr val="DDE4E8"/>
             </a:solidFill>
           </a:ln>
         </p:spPr>
@@ -38868,16 +41829,16 @@
       </p:sp>
       <p:sp>
         <p:nvSpPr>
-          <p:cNvPr id="24" name="Rectangle 23"/>
+          <p:cNvPr id="95" name="Oval 94"/>
           <p:cNvSpPr/>
           <p:nvPr/>
         </p:nvSpPr>
         <p:spPr>
           <a:xfrm>
-            <a:off x="9646920" y="1901952"/>
-            <a:ext cx="2148840" cy="36576"/>
-          </a:xfrm>
-          <a:prstGeom prst="rect">
+            <a:off x="9793224" y="1993392"/>
+            <a:ext cx="292608" cy="292608"/>
+          </a:xfrm>
+          <a:prstGeom prst="ellipse">
             <a:avLst/>
           </a:prstGeom>
           <a:solidFill>
@@ -38911,14 +41872,14 @@
       </p:sp>
       <p:sp>
         <p:nvSpPr>
-          <p:cNvPr id="25" name="TextBox 24"/>
+          <p:cNvPr id="96" name="TextBox 95"/>
           <p:cNvSpPr txBox="1"/>
           <p:nvPr/>
         </p:nvSpPr>
         <p:spPr>
           <a:xfrm>
-            <a:off x="9811512" y="2167128"/>
-            <a:ext cx="1819656" cy="347472"/>
+            <a:off x="9793224" y="2034540"/>
+            <a:ext cx="292608" cy="182880"/>
           </a:xfrm>
           <a:prstGeom prst="rect">
             <a:avLst/>
@@ -38926,7 +41887,46 @@
           <a:noFill/>
         </p:spPr>
         <p:txBody>
-          <a:bodyPr wrap="square" lIns="18288" rIns="18288" tIns="18288" bIns="18288" anchor="t">
+          <a:bodyPr wrap="square" lIns="0" rIns="0" tIns="0" bIns="0" anchor="t">
+            <a:spAutoFit/>
+          </a:bodyPr>
+          <a:lstStyle/>
+          <a:p>
+            <a:pPr algn="ctr">
+              <a:spcAft>
+                <a:spcPts val="0"/>
+              </a:spcAft>
+            </a:pPr>
+            <a:r>
+              <a:rPr sz="1050" b="1" i="0">
+                <a:solidFill>
+                  <a:srgbClr val="FFFFFF"/>
+                </a:solidFill>
+                <a:latin typeface="Arial"/>
+              </a:rPr>
+              <a:t>5</a:t>
+            </a:r>
+          </a:p>
+        </p:txBody>
+      </p:sp>
+      <p:sp>
+        <p:nvSpPr>
+          <p:cNvPr id="97" name="TextBox 96"/>
+          <p:cNvSpPr txBox="1"/>
+          <p:nvPr/>
+        </p:nvSpPr>
+        <p:spPr>
+          <a:xfrm>
+            <a:off x="10177272" y="2002536"/>
+            <a:ext cx="1435608" cy="274320"/>
+          </a:xfrm>
+          <a:prstGeom prst="rect">
+            <a:avLst/>
+          </a:prstGeom>
+          <a:noFill/>
+        </p:spPr>
+        <p:txBody>
+          <a:bodyPr wrap="square" lIns="18288" rIns="18288" tIns="18288" bIns="18288" anchor="ctr">
             <a:spAutoFit/>
           </a:bodyPr>
           <a:lstStyle/>
@@ -38937,27 +41937,70 @@
               </a:spcAft>
             </a:pPr>
             <a:r>
-              <a:rPr sz="1600" b="1" i="0">
+              <a:rPr sz="1400" b="1" i="0">
                 <a:solidFill>
                   <a:srgbClr val="478A64"/>
                 </a:solidFill>
                 <a:latin typeface="Arial"/>
               </a:rPr>
-              <a:t>Condition</a:t>
-            </a:r>
-          </a:p>
-        </p:txBody>
-      </p:sp>
-      <p:sp>
-        <p:nvSpPr>
-          <p:cNvPr id="26" name="TextBox 25"/>
+              <a:t>Conditioning</a:t>
+            </a:r>
+          </a:p>
+        </p:txBody>
+      </p:sp>
+      <p:sp>
+        <p:nvSpPr>
+          <p:cNvPr id="98" name="Rectangle 97"/>
+          <p:cNvSpPr/>
+          <p:nvPr/>
+        </p:nvSpPr>
+        <p:spPr>
+          <a:xfrm>
+            <a:off x="9793224" y="2359152"/>
+            <a:ext cx="1856231" cy="22860"/>
+          </a:xfrm>
+          <a:prstGeom prst="rect">
+            <a:avLst/>
+          </a:prstGeom>
+          <a:solidFill>
+            <a:srgbClr val="478A64"/>
+          </a:solidFill>
+          <a:ln>
+            <a:noFill/>
+          </a:ln>
+        </p:spPr>
+        <p:style>
+          <a:lnRef idx="1">
+            <a:schemeClr val="accent1"/>
+          </a:lnRef>
+          <a:fillRef idx="3">
+            <a:schemeClr val="accent1"/>
+          </a:fillRef>
+          <a:effectRef idx="2">
+            <a:schemeClr val="accent1"/>
+          </a:effectRef>
+          <a:fontRef idx="minor">
+            <a:schemeClr val="lt1"/>
+          </a:fontRef>
+        </p:style>
+        <p:txBody>
+          <a:bodyPr rtlCol="0" anchor="ctr"/>
+          <a:lstStyle/>
+          <a:p>
+            <a:pPr algn="ctr"/>
+          </a:p>
+        </p:txBody>
+      </p:sp>
+      <p:sp>
+        <p:nvSpPr>
+          <p:cNvPr id="99" name="TextBox 98"/>
           <p:cNvSpPr txBox="1"/>
           <p:nvPr/>
         </p:nvSpPr>
         <p:spPr>
           <a:xfrm>
-            <a:off x="9811512" y="2660904"/>
-            <a:ext cx="1819656" cy="1280160"/>
+            <a:off x="9793224" y="2487168"/>
+            <a:ext cx="1847088" cy="164592"/>
           </a:xfrm>
           <a:prstGeom prst="rect">
             <a:avLst/>
@@ -38965,7 +42008,7 @@
           <a:noFill/>
         </p:spPr>
         <p:txBody>
-          <a:bodyPr wrap="square" lIns="18288" rIns="18288" tIns="18288" bIns="18288" anchor="t">
+          <a:bodyPr wrap="square" lIns="0" rIns="0" tIns="0" bIns="0" anchor="t">
             <a:spAutoFit/>
           </a:bodyPr>
           <a:lstStyle/>
@@ -38976,29 +42019,619 @@
               </a:spcAft>
             </a:pPr>
             <a:r>
-              <a:rPr sz="1320" b="0" i="0">
+              <a:rPr sz="840" b="1" i="0">
+                <a:solidFill>
+                  <a:srgbClr val="59697A"/>
+                </a:solidFill>
+                <a:latin typeface="Arial"/>
+              </a:rPr>
+              <a:t>Model inputs</a:t>
+            </a:r>
+          </a:p>
+        </p:txBody>
+      </p:sp>
+      <p:sp>
+        <p:nvSpPr>
+          <p:cNvPr id="100" name="Rounded Rectangle 99"/>
+          <p:cNvSpPr/>
+          <p:nvPr/>
+        </p:nvSpPr>
+        <p:spPr>
+          <a:xfrm>
+            <a:off x="9793224" y="2670048"/>
+            <a:ext cx="1856231" cy="329184"/>
+          </a:xfrm>
+          <a:prstGeom prst="roundRect">
+            <a:avLst/>
+          </a:prstGeom>
+          <a:solidFill>
+            <a:srgbClr val="FFFFFF"/>
+          </a:solidFill>
+          <a:ln w="25400">
+            <a:solidFill>
+              <a:srgbClr val="478A64"/>
+            </a:solidFill>
+          </a:ln>
+        </p:spPr>
+        <p:style>
+          <a:lnRef idx="1">
+            <a:schemeClr val="accent1"/>
+          </a:lnRef>
+          <a:fillRef idx="3">
+            <a:schemeClr val="accent1"/>
+          </a:fillRef>
+          <a:effectRef idx="2">
+            <a:schemeClr val="accent1"/>
+          </a:effectRef>
+          <a:fontRef idx="minor">
+            <a:schemeClr val="lt1"/>
+          </a:fontRef>
+        </p:style>
+        <p:txBody>
+          <a:bodyPr rtlCol="0" anchor="ctr"/>
+          <a:lstStyle/>
+          <a:p>
+            <a:pPr algn="ctr"/>
+          </a:p>
+        </p:txBody>
+      </p:sp>
+      <p:sp>
+        <p:nvSpPr>
+          <p:cNvPr id="101" name="Oval 100"/>
+          <p:cNvSpPr/>
+          <p:nvPr/>
+        </p:nvSpPr>
+        <p:spPr>
+          <a:xfrm>
+            <a:off x="9843516" y="2809036"/>
+            <a:ext cx="50292" cy="50292"/>
+          </a:xfrm>
+          <a:prstGeom prst="ellipse">
+            <a:avLst/>
+          </a:prstGeom>
+          <a:solidFill>
+            <a:srgbClr val="478A64"/>
+          </a:solidFill>
+          <a:ln>
+            <a:noFill/>
+          </a:ln>
+        </p:spPr>
+        <p:style>
+          <a:lnRef idx="1">
+            <a:schemeClr val="accent1"/>
+          </a:lnRef>
+          <a:fillRef idx="3">
+            <a:schemeClr val="accent1"/>
+          </a:fillRef>
+          <a:effectRef idx="2">
+            <a:schemeClr val="accent1"/>
+          </a:effectRef>
+          <a:fontRef idx="minor">
+            <a:schemeClr val="lt1"/>
+          </a:fontRef>
+        </p:style>
+        <p:txBody>
+          <a:bodyPr rtlCol="0" anchor="ctr"/>
+          <a:lstStyle/>
+          <a:p>
+            <a:pPr algn="ctr"/>
+          </a:p>
+        </p:txBody>
+      </p:sp>
+      <p:sp>
+        <p:nvSpPr>
+          <p:cNvPr id="102" name="TextBox 101"/>
+          <p:cNvSpPr txBox="1"/>
+          <p:nvPr/>
+        </p:nvSpPr>
+        <p:spPr>
+          <a:xfrm>
+            <a:off x="9930384" y="2720340"/>
+            <a:ext cx="1691639" cy="210312"/>
+          </a:xfrm>
+          <a:prstGeom prst="rect">
+            <a:avLst/>
+          </a:prstGeom>
+          <a:noFill/>
+        </p:spPr>
+        <p:txBody>
+          <a:bodyPr wrap="square" lIns="0" rIns="0" tIns="0" bIns="0" anchor="ctr">
+            <a:spAutoFit/>
+          </a:bodyPr>
+          <a:lstStyle/>
+          <a:p>
+            <a:pPr algn="ctr">
+              <a:spcAft>
+                <a:spcPts val="0"/>
+              </a:spcAft>
+            </a:pPr>
+            <a:r>
+              <a:rPr sz="890" b="1" i="0">
                 <a:solidFill>
                   <a:srgbClr val="263746"/>
                 </a:solidFill>
                 <a:latin typeface="Arial"/>
               </a:rPr>
-              <a:t>FLT/GC + tissue
-study + material
-available covariates</a:t>
-            </a:r>
-          </a:p>
-        </p:txBody>
-      </p:sp>
-      <p:sp>
-        <p:nvSpPr>
-          <p:cNvPr id="27" name="Rounded Rectangle 26"/>
+              <a:t>Tissue</a:t>
+            </a:r>
+          </a:p>
+        </p:txBody>
+      </p:sp>
+      <p:sp>
+        <p:nvSpPr>
+          <p:cNvPr id="103" name="Rounded Rectangle 102"/>
           <p:cNvSpPr/>
           <p:nvPr/>
         </p:nvSpPr>
         <p:spPr>
           <a:xfrm>
-            <a:off x="320040" y="4526280"/>
-            <a:ext cx="11475720" cy="1170432"/>
+            <a:off x="9793224" y="3054096"/>
+            <a:ext cx="1856231" cy="329184"/>
+          </a:xfrm>
+          <a:prstGeom prst="roundRect">
+            <a:avLst/>
+          </a:prstGeom>
+          <a:solidFill>
+            <a:srgbClr val="FFFFFF"/>
+          </a:solidFill>
+          <a:ln w="25400">
+            <a:solidFill>
+              <a:srgbClr val="478A64"/>
+            </a:solidFill>
+          </a:ln>
+        </p:spPr>
+        <p:style>
+          <a:lnRef idx="1">
+            <a:schemeClr val="accent1"/>
+          </a:lnRef>
+          <a:fillRef idx="3">
+            <a:schemeClr val="accent1"/>
+          </a:fillRef>
+          <a:effectRef idx="2">
+            <a:schemeClr val="accent1"/>
+          </a:effectRef>
+          <a:fontRef idx="minor">
+            <a:schemeClr val="lt1"/>
+          </a:fontRef>
+        </p:style>
+        <p:txBody>
+          <a:bodyPr rtlCol="0" anchor="ctr"/>
+          <a:lstStyle/>
+          <a:p>
+            <a:pPr algn="ctr"/>
+          </a:p>
+        </p:txBody>
+      </p:sp>
+      <p:sp>
+        <p:nvSpPr>
+          <p:cNvPr id="104" name="Oval 103"/>
+          <p:cNvSpPr/>
+          <p:nvPr/>
+        </p:nvSpPr>
+        <p:spPr>
+          <a:xfrm>
+            <a:off x="9843516" y="3193084"/>
+            <a:ext cx="50292" cy="50292"/>
+          </a:xfrm>
+          <a:prstGeom prst="ellipse">
+            <a:avLst/>
+          </a:prstGeom>
+          <a:solidFill>
+            <a:srgbClr val="478A64"/>
+          </a:solidFill>
+          <a:ln>
+            <a:noFill/>
+          </a:ln>
+        </p:spPr>
+        <p:style>
+          <a:lnRef idx="1">
+            <a:schemeClr val="accent1"/>
+          </a:lnRef>
+          <a:fillRef idx="3">
+            <a:schemeClr val="accent1"/>
+          </a:fillRef>
+          <a:effectRef idx="2">
+            <a:schemeClr val="accent1"/>
+          </a:effectRef>
+          <a:fontRef idx="minor">
+            <a:schemeClr val="lt1"/>
+          </a:fontRef>
+        </p:style>
+        <p:txBody>
+          <a:bodyPr rtlCol="0" anchor="ctr"/>
+          <a:lstStyle/>
+          <a:p>
+            <a:pPr algn="ctr"/>
+          </a:p>
+        </p:txBody>
+      </p:sp>
+      <p:sp>
+        <p:nvSpPr>
+          <p:cNvPr id="105" name="TextBox 104"/>
+          <p:cNvSpPr txBox="1"/>
+          <p:nvPr/>
+        </p:nvSpPr>
+        <p:spPr>
+          <a:xfrm>
+            <a:off x="9930384" y="3104388"/>
+            <a:ext cx="1691639" cy="210312"/>
+          </a:xfrm>
+          <a:prstGeom prst="rect">
+            <a:avLst/>
+          </a:prstGeom>
+          <a:noFill/>
+        </p:spPr>
+        <p:txBody>
+          <a:bodyPr wrap="square" lIns="0" rIns="0" tIns="0" bIns="0" anchor="ctr">
+            <a:spAutoFit/>
+          </a:bodyPr>
+          <a:lstStyle/>
+          <a:p>
+            <a:pPr algn="ctr">
+              <a:spcAft>
+                <a:spcPts val="0"/>
+              </a:spcAft>
+            </a:pPr>
+            <a:r>
+              <a:rPr sz="890" b="1" i="0">
+                <a:solidFill>
+                  <a:srgbClr val="263746"/>
+                </a:solidFill>
+                <a:latin typeface="Arial"/>
+              </a:rPr>
+              <a:t>FLT / GC</a:t>
+            </a:r>
+          </a:p>
+        </p:txBody>
+      </p:sp>
+      <p:sp>
+        <p:nvSpPr>
+          <p:cNvPr id="106" name="Rounded Rectangle 105"/>
+          <p:cNvSpPr/>
+          <p:nvPr/>
+        </p:nvSpPr>
+        <p:spPr>
+          <a:xfrm>
+            <a:off x="9793224" y="3438144"/>
+            <a:ext cx="1856231" cy="329184"/>
+          </a:xfrm>
+          <a:prstGeom prst="roundRect">
+            <a:avLst/>
+          </a:prstGeom>
+          <a:solidFill>
+            <a:srgbClr val="FFFFFF"/>
+          </a:solidFill>
+          <a:ln w="25400">
+            <a:solidFill>
+              <a:srgbClr val="478A64"/>
+            </a:solidFill>
+          </a:ln>
+        </p:spPr>
+        <p:style>
+          <a:lnRef idx="1">
+            <a:schemeClr val="accent1"/>
+          </a:lnRef>
+          <a:fillRef idx="3">
+            <a:schemeClr val="accent1"/>
+          </a:fillRef>
+          <a:effectRef idx="2">
+            <a:schemeClr val="accent1"/>
+          </a:effectRef>
+          <a:fontRef idx="minor">
+            <a:schemeClr val="lt1"/>
+          </a:fontRef>
+        </p:style>
+        <p:txBody>
+          <a:bodyPr rtlCol="0" anchor="ctr"/>
+          <a:lstStyle/>
+          <a:p>
+            <a:pPr algn="ctr"/>
+          </a:p>
+        </p:txBody>
+      </p:sp>
+      <p:sp>
+        <p:nvSpPr>
+          <p:cNvPr id="107" name="Oval 106"/>
+          <p:cNvSpPr/>
+          <p:nvPr/>
+        </p:nvSpPr>
+        <p:spPr>
+          <a:xfrm>
+            <a:off x="9843516" y="3577132"/>
+            <a:ext cx="50292" cy="50292"/>
+          </a:xfrm>
+          <a:prstGeom prst="ellipse">
+            <a:avLst/>
+          </a:prstGeom>
+          <a:solidFill>
+            <a:srgbClr val="478A64"/>
+          </a:solidFill>
+          <a:ln>
+            <a:noFill/>
+          </a:ln>
+        </p:spPr>
+        <p:style>
+          <a:lnRef idx="1">
+            <a:schemeClr val="accent1"/>
+          </a:lnRef>
+          <a:fillRef idx="3">
+            <a:schemeClr val="accent1"/>
+          </a:fillRef>
+          <a:effectRef idx="2">
+            <a:schemeClr val="accent1"/>
+          </a:effectRef>
+          <a:fontRef idx="minor">
+            <a:schemeClr val="lt1"/>
+          </a:fontRef>
+        </p:style>
+        <p:txBody>
+          <a:bodyPr rtlCol="0" anchor="ctr"/>
+          <a:lstStyle/>
+          <a:p>
+            <a:pPr algn="ctr"/>
+          </a:p>
+        </p:txBody>
+      </p:sp>
+      <p:sp>
+        <p:nvSpPr>
+          <p:cNvPr id="108" name="TextBox 107"/>
+          <p:cNvSpPr txBox="1"/>
+          <p:nvPr/>
+        </p:nvSpPr>
+        <p:spPr>
+          <a:xfrm>
+            <a:off x="9930384" y="3488436"/>
+            <a:ext cx="1691639" cy="210312"/>
+          </a:xfrm>
+          <a:prstGeom prst="rect">
+            <a:avLst/>
+          </a:prstGeom>
+          <a:noFill/>
+        </p:spPr>
+        <p:txBody>
+          <a:bodyPr wrap="square" lIns="0" rIns="0" tIns="0" bIns="0" anchor="ctr">
+            <a:spAutoFit/>
+          </a:bodyPr>
+          <a:lstStyle/>
+          <a:p>
+            <a:pPr algn="ctr">
+              <a:spcAft>
+                <a:spcPts val="0"/>
+              </a:spcAft>
+            </a:pPr>
+            <a:r>
+              <a:rPr sz="890" b="1" i="0">
+                <a:solidFill>
+                  <a:srgbClr val="263746"/>
+                </a:solidFill>
+                <a:latin typeface="Arial"/>
+              </a:rPr>
+              <a:t>Accession</a:t>
+            </a:r>
+          </a:p>
+        </p:txBody>
+      </p:sp>
+      <p:sp>
+        <p:nvSpPr>
+          <p:cNvPr id="109" name="Rounded Rectangle 108"/>
+          <p:cNvSpPr/>
+          <p:nvPr/>
+        </p:nvSpPr>
+        <p:spPr>
+          <a:xfrm>
+            <a:off x="9793224" y="3822191"/>
+            <a:ext cx="1856231" cy="329184"/>
+          </a:xfrm>
+          <a:prstGeom prst="roundRect">
+            <a:avLst/>
+          </a:prstGeom>
+          <a:solidFill>
+            <a:srgbClr val="FFFFFF"/>
+          </a:solidFill>
+          <a:ln w="25400">
+            <a:solidFill>
+              <a:srgbClr val="478A64"/>
+            </a:solidFill>
+          </a:ln>
+        </p:spPr>
+        <p:style>
+          <a:lnRef idx="1">
+            <a:schemeClr val="accent1"/>
+          </a:lnRef>
+          <a:fillRef idx="3">
+            <a:schemeClr val="accent1"/>
+          </a:fillRef>
+          <a:effectRef idx="2">
+            <a:schemeClr val="accent1"/>
+          </a:effectRef>
+          <a:fontRef idx="minor">
+            <a:schemeClr val="lt1"/>
+          </a:fontRef>
+        </p:style>
+        <p:txBody>
+          <a:bodyPr rtlCol="0" anchor="ctr"/>
+          <a:lstStyle/>
+          <a:p>
+            <a:pPr algn="ctr"/>
+          </a:p>
+        </p:txBody>
+      </p:sp>
+      <p:sp>
+        <p:nvSpPr>
+          <p:cNvPr id="110" name="Oval 109"/>
+          <p:cNvSpPr/>
+          <p:nvPr/>
+        </p:nvSpPr>
+        <p:spPr>
+          <a:xfrm>
+            <a:off x="9843516" y="3961180"/>
+            <a:ext cx="50292" cy="50292"/>
+          </a:xfrm>
+          <a:prstGeom prst="ellipse">
+            <a:avLst/>
+          </a:prstGeom>
+          <a:solidFill>
+            <a:srgbClr val="478A64"/>
+          </a:solidFill>
+          <a:ln>
+            <a:noFill/>
+          </a:ln>
+        </p:spPr>
+        <p:style>
+          <a:lnRef idx="1">
+            <a:schemeClr val="accent1"/>
+          </a:lnRef>
+          <a:fillRef idx="3">
+            <a:schemeClr val="accent1"/>
+          </a:fillRef>
+          <a:effectRef idx="2">
+            <a:schemeClr val="accent1"/>
+          </a:effectRef>
+          <a:fontRef idx="minor">
+            <a:schemeClr val="lt1"/>
+          </a:fontRef>
+        </p:style>
+        <p:txBody>
+          <a:bodyPr rtlCol="0" anchor="ctr"/>
+          <a:lstStyle/>
+          <a:p>
+            <a:pPr algn="ctr"/>
+          </a:p>
+        </p:txBody>
+      </p:sp>
+      <p:sp>
+        <p:nvSpPr>
+          <p:cNvPr id="111" name="TextBox 110"/>
+          <p:cNvSpPr txBox="1"/>
+          <p:nvPr/>
+        </p:nvSpPr>
+        <p:spPr>
+          <a:xfrm>
+            <a:off x="9930384" y="3872483"/>
+            <a:ext cx="1691639" cy="210312"/>
+          </a:xfrm>
+          <a:prstGeom prst="rect">
+            <a:avLst/>
+          </a:prstGeom>
+          <a:noFill/>
+        </p:spPr>
+        <p:txBody>
+          <a:bodyPr wrap="square" lIns="0" rIns="0" tIns="0" bIns="0" anchor="ctr">
+            <a:spAutoFit/>
+          </a:bodyPr>
+          <a:lstStyle/>
+          <a:p>
+            <a:pPr algn="ctr">
+              <a:spcAft>
+                <a:spcPts val="0"/>
+              </a:spcAft>
+            </a:pPr>
+            <a:r>
+              <a:rPr sz="890" b="1" i="0">
+                <a:solidFill>
+                  <a:srgbClr val="263746"/>
+                </a:solidFill>
+                <a:latin typeface="Arial"/>
+              </a:rPr>
+              <a:t>Material type</a:t>
+            </a:r>
+          </a:p>
+        </p:txBody>
+      </p:sp>
+      <p:sp>
+        <p:nvSpPr>
+          <p:cNvPr id="112" name="Rounded Rectangle 111"/>
+          <p:cNvSpPr/>
+          <p:nvPr/>
+        </p:nvSpPr>
+        <p:spPr>
+          <a:xfrm>
+            <a:off x="9793224" y="4206240"/>
+            <a:ext cx="1856231" cy="329184"/>
+          </a:xfrm>
+          <a:prstGeom prst="roundRect">
+            <a:avLst/>
+          </a:prstGeom>
+          <a:solidFill>
+            <a:srgbClr val="F7F9FA"/>
+          </a:solidFill>
+          <a:ln w="8255">
+            <a:solidFill>
+              <a:srgbClr val="C9D2D8"/>
+            </a:solidFill>
+          </a:ln>
+        </p:spPr>
+        <p:style>
+          <a:lnRef idx="1">
+            <a:schemeClr val="accent1"/>
+          </a:lnRef>
+          <a:fillRef idx="3">
+            <a:schemeClr val="accent1"/>
+          </a:fillRef>
+          <a:effectRef idx="2">
+            <a:schemeClr val="accent1"/>
+          </a:effectRef>
+          <a:fontRef idx="minor">
+            <a:schemeClr val="lt1"/>
+          </a:fontRef>
+        </p:style>
+        <p:txBody>
+          <a:bodyPr rtlCol="0" anchor="ctr"/>
+          <a:lstStyle/>
+          <a:p>
+            <a:pPr algn="ctr"/>
+          </a:p>
+        </p:txBody>
+      </p:sp>
+      <p:sp>
+        <p:nvSpPr>
+          <p:cNvPr id="113" name="TextBox 112"/>
+          <p:cNvSpPr txBox="1"/>
+          <p:nvPr/>
+        </p:nvSpPr>
+        <p:spPr>
+          <a:xfrm>
+            <a:off x="9848088" y="4256531"/>
+            <a:ext cx="1746503" cy="210312"/>
+          </a:xfrm>
+          <a:prstGeom prst="rect">
+            <a:avLst/>
+          </a:prstGeom>
+          <a:noFill/>
+        </p:spPr>
+        <p:txBody>
+          <a:bodyPr wrap="square" lIns="0" rIns="0" tIns="0" bIns="0" anchor="ctr">
+            <a:spAutoFit/>
+          </a:bodyPr>
+          <a:lstStyle/>
+          <a:p>
+            <a:pPr algn="ctr">
+              <a:spcAft>
+                <a:spcPts val="0"/>
+              </a:spcAft>
+            </a:pPr>
+            <a:r>
+              <a:rPr sz="890" b="0" i="0">
+                <a:solidFill>
+                  <a:srgbClr val="59697A"/>
+                </a:solidFill>
+                <a:latin typeface="Arial"/>
+              </a:rPr>
+              <a:t>Sex / age</a:t>
+            </a:r>
+          </a:p>
+        </p:txBody>
+      </p:sp>
+      <p:sp>
+        <p:nvSpPr>
+          <p:cNvPr id="114" name="Rounded Rectangle 113"/>
+          <p:cNvSpPr/>
+          <p:nvPr/>
+        </p:nvSpPr>
+        <p:spPr>
+          <a:xfrm>
+            <a:off x="320040" y="5120640"/>
+            <a:ext cx="11475720" cy="1097280"/>
           </a:xfrm>
           <a:prstGeom prst="roundRect">
             <a:avLst/>
@@ -39036,14 +42669,14 @@
       </p:sp>
       <p:sp>
         <p:nvSpPr>
-          <p:cNvPr id="28" name="TextBox 27"/>
+          <p:cNvPr id="115" name="TextBox 114"/>
           <p:cNvSpPr txBox="1"/>
           <p:nvPr/>
         </p:nvSpPr>
         <p:spPr>
           <a:xfrm>
-            <a:off x="603504" y="4736592"/>
-            <a:ext cx="1508760" cy="256032"/>
+            <a:off x="585216" y="5321808"/>
+            <a:ext cx="1298448" cy="228600"/>
           </a:xfrm>
           <a:prstGeom prst="rect">
             <a:avLst/>
@@ -39062,7 +42695,7 @@
               </a:spcAft>
             </a:pPr>
             <a:r>
-              <a:rPr sz="1300" b="1" i="0">
+              <a:rPr sz="1080" b="1" i="0">
                 <a:solidFill>
                   <a:srgbClr val="9A6B20"/>
                 </a:solidFill>
@@ -39075,62 +42708,14 @@
       </p:sp>
       <p:sp>
         <p:nvSpPr>
-          <p:cNvPr id="29" name="TextBox 28"/>
+          <p:cNvPr id="116" name="TextBox 115"/>
           <p:cNvSpPr txBox="1"/>
           <p:nvPr/>
         </p:nvSpPr>
         <p:spPr>
           <a:xfrm>
-            <a:off x="2057400" y="4681728"/>
-            <a:ext cx="9281160" cy="502920"/>
-          </a:xfrm>
-          <a:prstGeom prst="rect">
-            <a:avLst/>
-          </a:prstGeom>
-          <a:noFill/>
-        </p:spPr>
-        <p:txBody>
-          <a:bodyPr wrap="square" lIns="18288" rIns="18288" tIns="18288" bIns="18288" anchor="t">
-            <a:spAutoFit/>
-          </a:bodyPr>
-          <a:lstStyle/>
-          <a:p>
-            <a:pPr>
-              <a:spcAft>
-                <a:spcPts val="0"/>
-              </a:spcAft>
-            </a:pPr>
-            <a:r>
-              <a:rPr sz="1460" b="1" i="0">
-                <a:solidFill>
-                  <a:srgbClr val="082B55"/>
-                </a:solidFill>
-                <a:latin typeface="Arial"/>
-              </a:rPr>
-              <a:t>TPM / MaxAbs -&gt; ARCHS4 DDIM -&gt; OSDR adaptation. </a:t>
-            </a:r>
-            <a:r>
-              <a:rPr sz="1460" b="0" i="0">
-                <a:solidFill>
-                  <a:srgbClr val="263746"/>
-                </a:solidFill>
-                <a:latin typeface="Arial"/>
-              </a:rPr>
-              <a:t>Conditions: tissue, FLT/GC, accession and material; no global batch correction.</a:t>
-            </a:r>
-          </a:p>
-        </p:txBody>
-      </p:sp>
-      <p:sp>
-        <p:nvSpPr>
-          <p:cNvPr id="30" name="TextBox 29"/>
-          <p:cNvSpPr txBox="1"/>
-          <p:nvPr/>
-        </p:nvSpPr>
-        <p:spPr>
-          <a:xfrm>
-            <a:off x="2057400" y="5212080"/>
-            <a:ext cx="9281160" cy="301752"/>
+            <a:off x="585216" y="5669280"/>
+            <a:ext cx="1234440" cy="256032"/>
           </a:xfrm>
           <a:prstGeom prst="rect">
             <a:avLst/>
@@ -39149,27 +42734,115 @@
               </a:spcAft>
             </a:pPr>
             <a:r>
-              <a:rPr sz="1250" b="0" i="0">
+              <a:rPr sz="1050" b="0" i="0">
                 <a:solidFill>
                   <a:srgbClr val="59697A"/>
                 </a:solidFill>
                 <a:latin typeface="Arial"/>
               </a:rPr>
-              <a:t>A 463-row experiment plan and nine matched liver harmonization arms were screened before full training.</a:t>
-            </a:r>
-          </a:p>
-        </p:txBody>
-      </p:sp>
-      <p:sp>
-        <p:nvSpPr>
-          <p:cNvPr id="31" name="TextBox 30"/>
+              <a:t>No global correction</a:t>
+            </a:r>
+          </a:p>
+        </p:txBody>
+      </p:sp>
+      <p:sp>
+        <p:nvSpPr>
+          <p:cNvPr id="117" name="Rounded Rectangle 116"/>
+          <p:cNvSpPr/>
+          <p:nvPr/>
+        </p:nvSpPr>
+        <p:spPr>
+          <a:xfrm>
+            <a:off x="1938528" y="5303520"/>
+            <a:ext cx="1591056" cy="329184"/>
+          </a:xfrm>
+          <a:prstGeom prst="roundRect">
+            <a:avLst/>
+          </a:prstGeom>
+          <a:solidFill>
+            <a:srgbClr val="FFFFFF"/>
+          </a:solidFill>
+          <a:ln w="25400">
+            <a:solidFill>
+              <a:srgbClr val="178681"/>
+            </a:solidFill>
+          </a:ln>
+        </p:spPr>
+        <p:style>
+          <a:lnRef idx="1">
+            <a:schemeClr val="accent1"/>
+          </a:lnRef>
+          <a:fillRef idx="3">
+            <a:schemeClr val="accent1"/>
+          </a:fillRef>
+          <a:effectRef idx="2">
+            <a:schemeClr val="accent1"/>
+          </a:effectRef>
+          <a:fontRef idx="minor">
+            <a:schemeClr val="lt1"/>
+          </a:fontRef>
+        </p:style>
+        <p:txBody>
+          <a:bodyPr rtlCol="0" anchor="ctr"/>
+          <a:lstStyle/>
+          <a:p>
+            <a:pPr algn="ctr"/>
+          </a:p>
+        </p:txBody>
+      </p:sp>
+      <p:sp>
+        <p:nvSpPr>
+          <p:cNvPr id="118" name="Oval 117"/>
+          <p:cNvSpPr/>
+          <p:nvPr/>
+        </p:nvSpPr>
+        <p:spPr>
+          <a:xfrm>
+            <a:off x="1988820" y="5442508"/>
+            <a:ext cx="50292" cy="50292"/>
+          </a:xfrm>
+          <a:prstGeom prst="ellipse">
+            <a:avLst/>
+          </a:prstGeom>
+          <a:solidFill>
+            <a:srgbClr val="178681"/>
+          </a:solidFill>
+          <a:ln>
+            <a:noFill/>
+          </a:ln>
+        </p:spPr>
+        <p:style>
+          <a:lnRef idx="1">
+            <a:schemeClr val="accent1"/>
+          </a:lnRef>
+          <a:fillRef idx="3">
+            <a:schemeClr val="accent1"/>
+          </a:fillRef>
+          <a:effectRef idx="2">
+            <a:schemeClr val="accent1"/>
+          </a:effectRef>
+          <a:fontRef idx="minor">
+            <a:schemeClr val="lt1"/>
+          </a:fontRef>
+        </p:style>
+        <p:txBody>
+          <a:bodyPr rtlCol="0" anchor="ctr"/>
+          <a:lstStyle/>
+          <a:p>
+            <a:pPr algn="ctr"/>
+          </a:p>
+        </p:txBody>
+      </p:sp>
+      <p:sp>
+        <p:nvSpPr>
+          <p:cNvPr id="119" name="TextBox 118"/>
           <p:cNvSpPr txBox="1"/>
           <p:nvPr/>
         </p:nvSpPr>
         <p:spPr>
           <a:xfrm>
-            <a:off x="329184" y="6510528"/>
-            <a:ext cx="10972800" cy="173736"/>
+            <a:off x="2075688" y="5353812"/>
+            <a:ext cx="1426464" cy="210312"/>
           </a:xfrm>
           <a:prstGeom prst="rect">
             <a:avLst/>
@@ -39177,7 +42850,386 @@
           <a:noFill/>
         </p:spPr>
         <p:txBody>
-          <a:bodyPr wrap="square" lIns="18288" rIns="18288" tIns="18288" bIns="18288" anchor="ctr">
+          <a:bodyPr wrap="square" lIns="0" rIns="0" tIns="0" bIns="0" anchor="ctr">
+            <a:spAutoFit/>
+          </a:bodyPr>
+          <a:lstStyle/>
+          <a:p>
+            <a:pPr algn="ctr">
+              <a:spcAft>
+                <a:spcPts val="0"/>
+              </a:spcAft>
+            </a:pPr>
+            <a:r>
+              <a:rPr sz="930" b="1" i="0">
+                <a:solidFill>
+                  <a:srgbClr val="263746"/>
+                </a:solidFill>
+                <a:latin typeface="Arial"/>
+              </a:rPr>
+              <a:t>ARCHS4 pretrain</a:t>
+            </a:r>
+          </a:p>
+        </p:txBody>
+      </p:sp>
+      <p:sp>
+        <p:nvSpPr>
+          <p:cNvPr id="120" name="Right Arrow 119"/>
+          <p:cNvSpPr/>
+          <p:nvPr/>
+        </p:nvSpPr>
+        <p:spPr>
+          <a:xfrm>
+            <a:off x="3584448" y="5367528"/>
+            <a:ext cx="210312" cy="182880"/>
+          </a:xfrm>
+          <a:prstGeom prst="rightArrow">
+            <a:avLst/>
+          </a:prstGeom>
+          <a:solidFill>
+            <a:srgbClr val="8A969E"/>
+          </a:solidFill>
+          <a:ln>
+            <a:noFill/>
+          </a:ln>
+        </p:spPr>
+        <p:style>
+          <a:lnRef idx="1">
+            <a:schemeClr val="accent1"/>
+          </a:lnRef>
+          <a:fillRef idx="3">
+            <a:schemeClr val="accent1"/>
+          </a:fillRef>
+          <a:effectRef idx="2">
+            <a:schemeClr val="accent1"/>
+          </a:effectRef>
+          <a:fontRef idx="minor">
+            <a:schemeClr val="lt1"/>
+          </a:fontRef>
+        </p:style>
+        <p:txBody>
+          <a:bodyPr rtlCol="0" anchor="ctr"/>
+          <a:lstStyle/>
+          <a:p>
+            <a:pPr algn="ctr"/>
+          </a:p>
+        </p:txBody>
+      </p:sp>
+      <p:sp>
+        <p:nvSpPr>
+          <p:cNvPr id="121" name="Rounded Rectangle 120"/>
+          <p:cNvSpPr/>
+          <p:nvPr/>
+        </p:nvSpPr>
+        <p:spPr>
+          <a:xfrm>
+            <a:off x="3858768" y="5303520"/>
+            <a:ext cx="1591056" cy="329184"/>
+          </a:xfrm>
+          <a:prstGeom prst="roundRect">
+            <a:avLst/>
+          </a:prstGeom>
+          <a:solidFill>
+            <a:srgbClr val="FFFFFF"/>
+          </a:solidFill>
+          <a:ln w="25400">
+            <a:solidFill>
+              <a:srgbClr val="2D6496"/>
+            </a:solidFill>
+          </a:ln>
+        </p:spPr>
+        <p:style>
+          <a:lnRef idx="1">
+            <a:schemeClr val="accent1"/>
+          </a:lnRef>
+          <a:fillRef idx="3">
+            <a:schemeClr val="accent1"/>
+          </a:fillRef>
+          <a:effectRef idx="2">
+            <a:schemeClr val="accent1"/>
+          </a:effectRef>
+          <a:fontRef idx="minor">
+            <a:schemeClr val="lt1"/>
+          </a:fontRef>
+        </p:style>
+        <p:txBody>
+          <a:bodyPr rtlCol="0" anchor="ctr"/>
+          <a:lstStyle/>
+          <a:p>
+            <a:pPr algn="ctr"/>
+          </a:p>
+        </p:txBody>
+      </p:sp>
+      <p:sp>
+        <p:nvSpPr>
+          <p:cNvPr id="122" name="Oval 121"/>
+          <p:cNvSpPr/>
+          <p:nvPr/>
+        </p:nvSpPr>
+        <p:spPr>
+          <a:xfrm>
+            <a:off x="3909059" y="5442508"/>
+            <a:ext cx="50292" cy="50292"/>
+          </a:xfrm>
+          <a:prstGeom prst="ellipse">
+            <a:avLst/>
+          </a:prstGeom>
+          <a:solidFill>
+            <a:srgbClr val="2D6496"/>
+          </a:solidFill>
+          <a:ln>
+            <a:noFill/>
+          </a:ln>
+        </p:spPr>
+        <p:style>
+          <a:lnRef idx="1">
+            <a:schemeClr val="accent1"/>
+          </a:lnRef>
+          <a:fillRef idx="3">
+            <a:schemeClr val="accent1"/>
+          </a:fillRef>
+          <a:effectRef idx="2">
+            <a:schemeClr val="accent1"/>
+          </a:effectRef>
+          <a:fontRef idx="minor">
+            <a:schemeClr val="lt1"/>
+          </a:fontRef>
+        </p:style>
+        <p:txBody>
+          <a:bodyPr rtlCol="0" anchor="ctr"/>
+          <a:lstStyle/>
+          <a:p>
+            <a:pPr algn="ctr"/>
+          </a:p>
+        </p:txBody>
+      </p:sp>
+      <p:sp>
+        <p:nvSpPr>
+          <p:cNvPr id="123" name="TextBox 122"/>
+          <p:cNvSpPr txBox="1"/>
+          <p:nvPr/>
+        </p:nvSpPr>
+        <p:spPr>
+          <a:xfrm>
+            <a:off x="3995928" y="5353812"/>
+            <a:ext cx="1426464" cy="210312"/>
+          </a:xfrm>
+          <a:prstGeom prst="rect">
+            <a:avLst/>
+          </a:prstGeom>
+          <a:noFill/>
+        </p:spPr>
+        <p:txBody>
+          <a:bodyPr wrap="square" lIns="0" rIns="0" tIns="0" bIns="0" anchor="ctr">
+            <a:spAutoFit/>
+          </a:bodyPr>
+          <a:lstStyle/>
+          <a:p>
+            <a:pPr algn="ctr">
+              <a:spcAft>
+                <a:spcPts val="0"/>
+              </a:spcAft>
+            </a:pPr>
+            <a:r>
+              <a:rPr sz="930" b="1" i="0">
+                <a:solidFill>
+                  <a:srgbClr val="263746"/>
+                </a:solidFill>
+                <a:latin typeface="Arial"/>
+              </a:rPr>
+              <a:t>OSDR adaptation</a:t>
+            </a:r>
+          </a:p>
+        </p:txBody>
+      </p:sp>
+      <p:sp>
+        <p:nvSpPr>
+          <p:cNvPr id="124" name="Right Arrow 123"/>
+          <p:cNvSpPr/>
+          <p:nvPr/>
+        </p:nvSpPr>
+        <p:spPr>
+          <a:xfrm>
+            <a:off x="5504688" y="5367528"/>
+            <a:ext cx="210312" cy="182880"/>
+          </a:xfrm>
+          <a:prstGeom prst="rightArrow">
+            <a:avLst/>
+          </a:prstGeom>
+          <a:solidFill>
+            <a:srgbClr val="8A969E"/>
+          </a:solidFill>
+          <a:ln>
+            <a:noFill/>
+          </a:ln>
+        </p:spPr>
+        <p:style>
+          <a:lnRef idx="1">
+            <a:schemeClr val="accent1"/>
+          </a:lnRef>
+          <a:fillRef idx="3">
+            <a:schemeClr val="accent1"/>
+          </a:fillRef>
+          <a:effectRef idx="2">
+            <a:schemeClr val="accent1"/>
+          </a:effectRef>
+          <a:fontRef idx="minor">
+            <a:schemeClr val="lt1"/>
+          </a:fontRef>
+        </p:style>
+        <p:txBody>
+          <a:bodyPr rtlCol="0" anchor="ctr"/>
+          <a:lstStyle/>
+          <a:p>
+            <a:pPr algn="ctr"/>
+          </a:p>
+        </p:txBody>
+      </p:sp>
+      <p:sp>
+        <p:nvSpPr>
+          <p:cNvPr id="125" name="Rounded Rectangle 124"/>
+          <p:cNvSpPr/>
+          <p:nvPr/>
+        </p:nvSpPr>
+        <p:spPr>
+          <a:xfrm>
+            <a:off x="5779008" y="5303520"/>
+            <a:ext cx="1591056" cy="329184"/>
+          </a:xfrm>
+          <a:prstGeom prst="roundRect">
+            <a:avLst/>
+          </a:prstGeom>
+          <a:solidFill>
+            <a:srgbClr val="FFFFFF"/>
+          </a:solidFill>
+          <a:ln w="25400">
+            <a:solidFill>
+              <a:srgbClr val="D37B00"/>
+            </a:solidFill>
+          </a:ln>
+        </p:spPr>
+        <p:style>
+          <a:lnRef idx="1">
+            <a:schemeClr val="accent1"/>
+          </a:lnRef>
+          <a:fillRef idx="3">
+            <a:schemeClr val="accent1"/>
+          </a:fillRef>
+          <a:effectRef idx="2">
+            <a:schemeClr val="accent1"/>
+          </a:effectRef>
+          <a:fontRef idx="minor">
+            <a:schemeClr val="lt1"/>
+          </a:fontRef>
+        </p:style>
+        <p:txBody>
+          <a:bodyPr rtlCol="0" anchor="ctr"/>
+          <a:lstStyle/>
+          <a:p>
+            <a:pPr algn="ctr"/>
+          </a:p>
+        </p:txBody>
+      </p:sp>
+      <p:sp>
+        <p:nvSpPr>
+          <p:cNvPr id="126" name="Oval 125"/>
+          <p:cNvSpPr/>
+          <p:nvPr/>
+        </p:nvSpPr>
+        <p:spPr>
+          <a:xfrm>
+            <a:off x="5829300" y="5442508"/>
+            <a:ext cx="50292" cy="50292"/>
+          </a:xfrm>
+          <a:prstGeom prst="ellipse">
+            <a:avLst/>
+          </a:prstGeom>
+          <a:solidFill>
+            <a:srgbClr val="D37B00"/>
+          </a:solidFill>
+          <a:ln>
+            <a:noFill/>
+          </a:ln>
+        </p:spPr>
+        <p:style>
+          <a:lnRef idx="1">
+            <a:schemeClr val="accent1"/>
+          </a:lnRef>
+          <a:fillRef idx="3">
+            <a:schemeClr val="accent1"/>
+          </a:fillRef>
+          <a:effectRef idx="2">
+            <a:schemeClr val="accent1"/>
+          </a:effectRef>
+          <a:fontRef idx="minor">
+            <a:schemeClr val="lt1"/>
+          </a:fontRef>
+        </p:style>
+        <p:txBody>
+          <a:bodyPr rtlCol="0" anchor="ctr"/>
+          <a:lstStyle/>
+          <a:p>
+            <a:pPr algn="ctr"/>
+          </a:p>
+        </p:txBody>
+      </p:sp>
+      <p:sp>
+        <p:nvSpPr>
+          <p:cNvPr id="127" name="TextBox 126"/>
+          <p:cNvSpPr txBox="1"/>
+          <p:nvPr/>
+        </p:nvSpPr>
+        <p:spPr>
+          <a:xfrm>
+            <a:off x="5916168" y="5353812"/>
+            <a:ext cx="1426464" cy="210312"/>
+          </a:xfrm>
+          <a:prstGeom prst="rect">
+            <a:avLst/>
+          </a:prstGeom>
+          <a:noFill/>
+        </p:spPr>
+        <p:txBody>
+          <a:bodyPr wrap="square" lIns="0" rIns="0" tIns="0" bIns="0" anchor="ctr">
+            <a:spAutoFit/>
+          </a:bodyPr>
+          <a:lstStyle/>
+          <a:p>
+            <a:pPr algn="ctr">
+              <a:spcAft>
+                <a:spcPts val="0"/>
+              </a:spcAft>
+            </a:pPr>
+            <a:r>
+              <a:rPr sz="930" b="1" i="0">
+                <a:solidFill>
+                  <a:srgbClr val="263746"/>
+                </a:solidFill>
+                <a:latin typeface="Arial"/>
+              </a:rPr>
+              <a:t>Conditional DDIM</a:t>
+            </a:r>
+          </a:p>
+        </p:txBody>
+      </p:sp>
+      <p:sp>
+        <p:nvSpPr>
+          <p:cNvPr id="128" name="TextBox 127"/>
+          <p:cNvSpPr txBox="1"/>
+          <p:nvPr/>
+        </p:nvSpPr>
+        <p:spPr>
+          <a:xfrm>
+            <a:off x="7699248" y="5276088"/>
+            <a:ext cx="3675887" cy="246888"/>
+          </a:xfrm>
+          <a:prstGeom prst="rect">
+            <a:avLst/>
+          </a:prstGeom>
+          <a:noFill/>
+        </p:spPr>
+        <p:txBody>
+          <a:bodyPr wrap="square" lIns="18288" rIns="18288" tIns="18288" bIns="18288" anchor="t">
             <a:spAutoFit/>
           </a:bodyPr>
           <a:lstStyle/>
@@ -39188,13 +43240,91 @@
               </a:spcAft>
             </a:pPr>
             <a:r>
+              <a:rPr sz="1170" b="1" i="0">
+                <a:solidFill>
+                  <a:srgbClr val="082B55"/>
+                </a:solidFill>
+                <a:latin typeface="Arial"/>
+              </a:rPr>
+              <a:t>TPM | MaxAbs | 974 landmarks</a:t>
+            </a:r>
+          </a:p>
+        </p:txBody>
+      </p:sp>
+      <p:sp>
+        <p:nvSpPr>
+          <p:cNvPr id="129" name="TextBox 128"/>
+          <p:cNvSpPr txBox="1"/>
+          <p:nvPr/>
+        </p:nvSpPr>
+        <p:spPr>
+          <a:xfrm>
+            <a:off x="7699248" y="5614416"/>
+            <a:ext cx="3675887" cy="246888"/>
+          </a:xfrm>
+          <a:prstGeom prst="rect">
+            <a:avLst/>
+          </a:prstGeom>
+          <a:noFill/>
+        </p:spPr>
+        <p:txBody>
+          <a:bodyPr wrap="square" lIns="18288" rIns="18288" tIns="18288" bIns="18288" anchor="t">
+            <a:spAutoFit/>
+          </a:bodyPr>
+          <a:lstStyle/>
+          <a:p>
+            <a:pPr algn="l">
+              <a:spcAft>
+                <a:spcPts val="0"/>
+              </a:spcAft>
+            </a:pPr>
+            <a:r>
+              <a:rPr sz="1080" b="0" i="0">
+                <a:solidFill>
+                  <a:srgbClr val="263746"/>
+                </a:solidFill>
+                <a:latin typeface="Arial"/>
+              </a:rPr>
+              <a:t>Tissue | FLT / GC | Accession | Material type</a:t>
+            </a:r>
+          </a:p>
+        </p:txBody>
+      </p:sp>
+      <p:sp>
+        <p:nvSpPr>
+          <p:cNvPr id="130" name="TextBox 129"/>
+          <p:cNvSpPr txBox="1"/>
+          <p:nvPr/>
+        </p:nvSpPr>
+        <p:spPr>
+          <a:xfrm>
+            <a:off x="329184" y="6510528"/>
+            <a:ext cx="10972800" cy="173736"/>
+          </a:xfrm>
+          <a:prstGeom prst="rect">
+            <a:avLst/>
+          </a:prstGeom>
+          <a:noFill/>
+        </p:spPr>
+        <p:txBody>
+          <a:bodyPr wrap="square" lIns="18288" rIns="18288" tIns="18288" bIns="18288" anchor="ctr">
+            <a:spAutoFit/>
+          </a:bodyPr>
+          <a:lstStyle/>
+          <a:p>
+            <a:pPr algn="l">
+              <a:spcAft>
+                <a:spcPts val="0"/>
+              </a:spcAft>
+            </a:pPr>
+            <a:r>
               <a:rPr sz="720" b="0" i="0">
                 <a:solidFill>
                   <a:srgbClr val="8A969E"/>
                 </a:solidFill>
                 <a:latin typeface="Arial"/>
               </a:rPr>
-              <a:t>Generator sources: Vinas et al., Bioinformatics (2022); Lacan et al., BMC Bioinformatics (2026).</a:t>
+              <a:t>Screen: 463 planned configurations and nine matched liver harmonization arms. Models: Vinas et al. (2022); Lacan et al. (2026).</a:t>
             </a:r>
           </a:p>
         </p:txBody>

--- a/presentation/SLSTP_2026_Generative_Transcriptomics.pptx
+++ b/presentation/SLSTP_2026_Generative_Transcriptomics.pptx
@@ -1191,7 +1191,7 @@
           <a:p/>
           <a:p>
             <a:r>
-              <a:t>Promoted and reinforced genes are shown on separate subrows for each tissue. Pooled muscle, kidney, spleen and skin each produced a distinct synthetic-informed result. Read these as separate hypotheses, not as grouped biology. Pooled muscle is heterogeneous, kidney suggests phosphoinositide and glucose handling, spleen suggests adhesion and extracellular-matrix or immune organization, and skin contributes a single interferon-linked candidate.</a:t>
+              <a:t>Promoted and reinforced genes are shown on separate subrows for each tissue. Pooled muscle, kidney, spleen and skin each produced a distinct synthetic-informed result. The rows share a slide for presentation space; each remains a separate hypothesis. Pooled muscle is heterogeneous, kidney suggests phosphoinositide and glucose handling, spleen suggests adhesion and extracellular-matrix or immune organization, and skin contributes a single interferon-linked candidate.</a:t>
             </a:r>
           </a:p>
         </p:txBody>
@@ -1343,7 +1343,7 @@
           <a:p/>
           <a:p>
             <a:r>
-              <a:t>The useful role was tissue-specific feature ranking or limited regularization, not increasing biological sample size. Literature annotation then separated exact recovery, process-level agreement and complementary hypotheses. Independent samples and cell-resolved experiments are the next tests.</a:t>
+              <a:t>Synthetic data was useful for tissue-specific feature ranking and limited regularization. It did not increase biological sample size. Literature annotation separated exact recovery, process-level agreement and complementary hypotheses. Independent samples and cell-resolved experiments are the next tests.</a:t>
             </a:r>
           </a:p>
         </p:txBody>
@@ -1647,7 +1647,7 @@
           <a:p/>
           <a:p>
             <a:r>
-              <a:t>Both WGAN-GP and DDIM had high correlation and F1. DDIM had adversarial accuracy near 0.5 and a lower Frechet-distance ratio, so it was harder to separate from real profiles and closer in distribution. The metrics use each model's stated evaluation split. These results are why the remaining analyses use DDIM.</a:t>
+              <a:t>Both WGAN-GP and DDIM had high correlation and F1. DDIM had adversarial accuracy near 0.5 and a lower Frechet-distance ratio, so it was harder to separate from real profiles and closer in distribution. The metrics use each model's stated evaluation split. DDIM was used for the remaining analyses.</a:t>
             </a:r>
           </a:p>
         </p:txBody>

--- a/presentation/SLSTP_2026_Generative_Transcriptomics.pptx
+++ b/presentation/SLSTP_2026_Generative_Transcriptomics.pptx
@@ -46656,7 +46656,7 @@
         </p:nvSpPr>
         <p:spPr>
           <a:xfrm>
-            <a:off x="585216" y="5321808"/>
+            <a:off x="585216" y="5312664"/>
             <a:ext cx="1298448" cy="228600"/>
           </a:xfrm>
           <a:prstGeom prst="rect">
@@ -46695,8 +46695,8 @@
         </p:nvSpPr>
         <p:spPr>
           <a:xfrm>
-            <a:off x="585216" y="5669280"/>
-            <a:ext cx="1234440" cy="256032"/>
+            <a:off x="585216" y="5660136"/>
+            <a:ext cx="1234440" cy="219456"/>
           </a:xfrm>
           <a:prstGeom prst="rect">
             <a:avLst/>
@@ -46715,13 +46715,13 @@
               </a:spcAft>
             </a:pPr>
             <a:r>
-              <a:rPr sz="1050" b="0" i="0">
+              <a:rPr sz="960" b="0" i="0">
                 <a:solidFill>
                   <a:srgbClr val="59697A"/>
                 </a:solidFill>
                 <a:latin typeface="Arial"/>
               </a:rPr>
-              <a:t>No global correction</a:t>
+              <a:t>Used downstream</a:t>
             </a:r>
           </a:p>
         </p:txBody>
@@ -46734,8 +46734,8 @@
         </p:nvSpPr>
         <p:spPr>
           <a:xfrm>
-            <a:off x="1938528" y="5303520"/>
-            <a:ext cx="1591056" cy="329184"/>
+            <a:off x="1920240" y="5239512"/>
+            <a:ext cx="1965960" cy="448056"/>
           </a:xfrm>
           <a:prstGeom prst="roundRect">
             <a:avLst/>
@@ -46743,7 +46743,7 @@
           <a:solidFill>
             <a:srgbClr val="FFFFFF"/>
           </a:solidFill>
-          <a:ln w="25400">
+          <a:ln w="10160">
             <a:solidFill>
               <a:srgbClr val="178681"/>
             </a:solidFill>
@@ -46773,44 +46773,40 @@
       </p:sp>
       <p:sp>
         <p:nvSpPr>
-          <p:cNvPr id="118" name="Oval 117"/>
-          <p:cNvSpPr/>
-          <p:nvPr/>
-        </p:nvSpPr>
-        <p:spPr>
-          <a:xfrm>
-            <a:off x="1988820" y="5442508"/>
-            <a:ext cx="50292" cy="50292"/>
-          </a:xfrm>
-          <a:prstGeom prst="ellipse">
-            <a:avLst/>
-          </a:prstGeom>
-          <a:solidFill>
-            <a:srgbClr val="178681"/>
-          </a:solidFill>
-          <a:ln>
-            <a:noFill/>
-          </a:ln>
-        </p:spPr>
-        <p:style>
-          <a:lnRef idx="1">
-            <a:schemeClr val="accent1"/>
-          </a:lnRef>
-          <a:fillRef idx="3">
-            <a:schemeClr val="accent1"/>
-          </a:fillRef>
-          <a:effectRef idx="2">
-            <a:schemeClr val="accent1"/>
-          </a:effectRef>
-          <a:fontRef idx="minor">
-            <a:schemeClr val="lt1"/>
-          </a:fontRef>
-        </p:style>
-        <p:txBody>
-          <a:bodyPr rtlCol="0" anchor="ctr"/>
-          <a:lstStyle/>
-          <a:p>
-            <a:pPr algn="ctr"/>
+          <p:cNvPr id="118" name="TextBox 117"/>
+          <p:cNvSpPr txBox="1"/>
+          <p:nvPr/>
+        </p:nvSpPr>
+        <p:spPr>
+          <a:xfrm>
+            <a:off x="2011680" y="5285232"/>
+            <a:ext cx="1783080" cy="109728"/>
+          </a:xfrm>
+          <a:prstGeom prst="rect">
+            <a:avLst/>
+          </a:prstGeom>
+          <a:noFill/>
+        </p:spPr>
+        <p:txBody>
+          <a:bodyPr wrap="square" lIns="0" rIns="0" tIns="0" bIns="0" anchor="t">
+            <a:spAutoFit/>
+          </a:bodyPr>
+          <a:lstStyle/>
+          <a:p>
+            <a:pPr algn="l">
+              <a:spcAft>
+                <a:spcPts val="0"/>
+              </a:spcAft>
+            </a:pPr>
+            <a:r>
+              <a:rPr sz="710" b="1" i="0">
+                <a:solidFill>
+                  <a:srgbClr val="178681"/>
+                </a:solidFill>
+                <a:latin typeface="Arial"/>
+              </a:rPr>
+              <a:t>PREPROCESS</a:t>
+            </a:r>
           </a:p>
         </p:txBody>
       </p:sp>
@@ -46822,8 +46818,8 @@
         </p:nvSpPr>
         <p:spPr>
           <a:xfrm>
-            <a:off x="2075688" y="5353812"/>
-            <a:ext cx="1426464" cy="210312"/>
+            <a:off x="2011680" y="5431536"/>
+            <a:ext cx="1783080" cy="173736"/>
           </a:xfrm>
           <a:prstGeom prst="rect">
             <a:avLst/>
@@ -46831,7 +46827,7 @@
           <a:noFill/>
         </p:spPr>
         <p:txBody>
-          <a:bodyPr wrap="square" lIns="0" rIns="0" tIns="0" bIns="0" anchor="ctr">
+          <a:bodyPr wrap="square" lIns="0" rIns="0" tIns="0" bIns="0" anchor="t">
             <a:spAutoFit/>
           </a:bodyPr>
           <a:lstStyle/>
@@ -46842,13 +46838,13 @@
               </a:spcAft>
             </a:pPr>
             <a:r>
-              <a:rPr sz="930" b="1" i="0">
+              <a:rPr sz="910" b="1" i="0">
                 <a:solidFill>
                   <a:srgbClr val="263746"/>
                 </a:solidFill>
                 <a:latin typeface="Arial"/>
               </a:rPr>
-              <a:t>ARCHS4 pretrain</a:t>
+              <a:t>TPM / MaxAbs / 974 landmarks</a:t>
             </a:r>
           </a:p>
         </p:txBody>
@@ -46861,7 +46857,7 @@
         </p:nvSpPr>
         <p:spPr>
           <a:xfrm>
-            <a:off x="3584448" y="5367528"/>
+            <a:off x="3950208" y="5358384"/>
             <a:ext cx="210312" cy="182880"/>
           </a:xfrm>
           <a:prstGeom prst="rightArrow">
@@ -46904,8 +46900,1215 @@
         </p:nvSpPr>
         <p:spPr>
           <a:xfrm>
-            <a:off x="3858768" y="5303520"/>
-            <a:ext cx="1591056" cy="329184"/>
+            <a:off x="4251960" y="5239512"/>
+            <a:ext cx="1691640" cy="448056"/>
+          </a:xfrm>
+          <a:prstGeom prst="roundRect">
+            <a:avLst/>
+          </a:prstGeom>
+          <a:solidFill>
+            <a:srgbClr val="FFFFFF"/>
+          </a:solidFill>
+          <a:ln w="10160">
+            <a:solidFill>
+              <a:srgbClr val="178681"/>
+            </a:solidFill>
+          </a:ln>
+        </p:spPr>
+        <p:style>
+          <a:lnRef idx="1">
+            <a:schemeClr val="accent1"/>
+          </a:lnRef>
+          <a:fillRef idx="3">
+            <a:schemeClr val="accent1"/>
+          </a:fillRef>
+          <a:effectRef idx="2">
+            <a:schemeClr val="accent1"/>
+          </a:effectRef>
+          <a:fontRef idx="minor">
+            <a:schemeClr val="lt1"/>
+          </a:fontRef>
+        </p:style>
+        <p:txBody>
+          <a:bodyPr rtlCol="0" anchor="ctr"/>
+          <a:lstStyle/>
+          <a:p>
+            <a:pPr algn="ctr"/>
+          </a:p>
+        </p:txBody>
+      </p:sp>
+      <p:sp>
+        <p:nvSpPr>
+          <p:cNvPr id="122" name="TextBox 121"/>
+          <p:cNvSpPr txBox="1"/>
+          <p:nvPr/>
+        </p:nvSpPr>
+        <p:spPr>
+          <a:xfrm>
+            <a:off x="4343400" y="5285232"/>
+            <a:ext cx="1508760" cy="109728"/>
+          </a:xfrm>
+          <a:prstGeom prst="rect">
+            <a:avLst/>
+          </a:prstGeom>
+          <a:noFill/>
+        </p:spPr>
+        <p:txBody>
+          <a:bodyPr wrap="square" lIns="0" rIns="0" tIns="0" bIns="0" anchor="t">
+            <a:spAutoFit/>
+          </a:bodyPr>
+          <a:lstStyle/>
+          <a:p>
+            <a:pPr algn="l">
+              <a:spcAft>
+                <a:spcPts val="0"/>
+              </a:spcAft>
+            </a:pPr>
+            <a:r>
+              <a:rPr sz="710" b="1" i="0">
+                <a:solidFill>
+                  <a:srgbClr val="178681"/>
+                </a:solidFill>
+                <a:latin typeface="Arial"/>
+              </a:rPr>
+              <a:t>PRETRAIN</a:t>
+            </a:r>
+          </a:p>
+        </p:txBody>
+      </p:sp>
+      <p:sp>
+        <p:nvSpPr>
+          <p:cNvPr id="123" name="TextBox 122"/>
+          <p:cNvSpPr txBox="1"/>
+          <p:nvPr/>
+        </p:nvSpPr>
+        <p:spPr>
+          <a:xfrm>
+            <a:off x="4343400" y="5431536"/>
+            <a:ext cx="1508760" cy="173736"/>
+          </a:xfrm>
+          <a:prstGeom prst="rect">
+            <a:avLst/>
+          </a:prstGeom>
+          <a:noFill/>
+        </p:spPr>
+        <p:txBody>
+          <a:bodyPr wrap="square" lIns="0" rIns="0" tIns="0" bIns="0" anchor="t">
+            <a:spAutoFit/>
+          </a:bodyPr>
+          <a:lstStyle/>
+          <a:p>
+            <a:pPr algn="ctr">
+              <a:spcAft>
+                <a:spcPts val="0"/>
+              </a:spcAft>
+            </a:pPr>
+            <a:r>
+              <a:rPr sz="910" b="1" i="0">
+                <a:solidFill>
+                  <a:srgbClr val="263746"/>
+                </a:solidFill>
+                <a:latin typeface="Arial"/>
+              </a:rPr>
+              <a:t>ARCHS4</a:t>
+            </a:r>
+          </a:p>
+        </p:txBody>
+      </p:sp>
+      <p:sp>
+        <p:nvSpPr>
+          <p:cNvPr id="124" name="Right Arrow 123"/>
+          <p:cNvSpPr/>
+          <p:nvPr/>
+        </p:nvSpPr>
+        <p:spPr>
+          <a:xfrm>
+            <a:off x="6007608" y="5358384"/>
+            <a:ext cx="210312" cy="182880"/>
+          </a:xfrm>
+          <a:prstGeom prst="rightArrow">
+            <a:avLst/>
+          </a:prstGeom>
+          <a:solidFill>
+            <a:srgbClr val="8A969E"/>
+          </a:solidFill>
+          <a:ln>
+            <a:noFill/>
+          </a:ln>
+        </p:spPr>
+        <p:style>
+          <a:lnRef idx="1">
+            <a:schemeClr val="accent1"/>
+          </a:lnRef>
+          <a:fillRef idx="3">
+            <a:schemeClr val="accent1"/>
+          </a:fillRef>
+          <a:effectRef idx="2">
+            <a:schemeClr val="accent1"/>
+          </a:effectRef>
+          <a:fontRef idx="minor">
+            <a:schemeClr val="lt1"/>
+          </a:fontRef>
+        </p:style>
+        <p:txBody>
+          <a:bodyPr rtlCol="0" anchor="ctr"/>
+          <a:lstStyle/>
+          <a:p>
+            <a:pPr algn="ctr"/>
+          </a:p>
+        </p:txBody>
+      </p:sp>
+      <p:sp>
+        <p:nvSpPr>
+          <p:cNvPr id="125" name="Rounded Rectangle 124"/>
+          <p:cNvSpPr/>
+          <p:nvPr/>
+        </p:nvSpPr>
+        <p:spPr>
+          <a:xfrm>
+            <a:off x="6309360" y="5239512"/>
+            <a:ext cx="1691640" cy="448056"/>
+          </a:xfrm>
+          <a:prstGeom prst="roundRect">
+            <a:avLst/>
+          </a:prstGeom>
+          <a:solidFill>
+            <a:srgbClr val="FFFFFF"/>
+          </a:solidFill>
+          <a:ln w="10160">
+            <a:solidFill>
+              <a:srgbClr val="2D6496"/>
+            </a:solidFill>
+          </a:ln>
+        </p:spPr>
+        <p:style>
+          <a:lnRef idx="1">
+            <a:schemeClr val="accent1"/>
+          </a:lnRef>
+          <a:fillRef idx="3">
+            <a:schemeClr val="accent1"/>
+          </a:fillRef>
+          <a:effectRef idx="2">
+            <a:schemeClr val="accent1"/>
+          </a:effectRef>
+          <a:fontRef idx="minor">
+            <a:schemeClr val="lt1"/>
+          </a:fontRef>
+        </p:style>
+        <p:txBody>
+          <a:bodyPr rtlCol="0" anchor="ctr"/>
+          <a:lstStyle/>
+          <a:p>
+            <a:pPr algn="ctr"/>
+          </a:p>
+        </p:txBody>
+      </p:sp>
+      <p:sp>
+        <p:nvSpPr>
+          <p:cNvPr id="126" name="TextBox 125"/>
+          <p:cNvSpPr txBox="1"/>
+          <p:nvPr/>
+        </p:nvSpPr>
+        <p:spPr>
+          <a:xfrm>
+            <a:off x="6400800" y="5285232"/>
+            <a:ext cx="1508760" cy="109728"/>
+          </a:xfrm>
+          <a:prstGeom prst="rect">
+            <a:avLst/>
+          </a:prstGeom>
+          <a:noFill/>
+        </p:spPr>
+        <p:txBody>
+          <a:bodyPr wrap="square" lIns="0" rIns="0" tIns="0" bIns="0" anchor="t">
+            <a:spAutoFit/>
+          </a:bodyPr>
+          <a:lstStyle/>
+          <a:p>
+            <a:pPr algn="l">
+              <a:spcAft>
+                <a:spcPts val="0"/>
+              </a:spcAft>
+            </a:pPr>
+            <a:r>
+              <a:rPr sz="710" b="1" i="0">
+                <a:solidFill>
+                  <a:srgbClr val="2D6496"/>
+                </a:solidFill>
+                <a:latin typeface="Arial"/>
+              </a:rPr>
+              <a:t>ADAPT</a:t>
+            </a:r>
+          </a:p>
+        </p:txBody>
+      </p:sp>
+      <p:sp>
+        <p:nvSpPr>
+          <p:cNvPr id="127" name="TextBox 126"/>
+          <p:cNvSpPr txBox="1"/>
+          <p:nvPr/>
+        </p:nvSpPr>
+        <p:spPr>
+          <a:xfrm>
+            <a:off x="6400800" y="5431536"/>
+            <a:ext cx="1508760" cy="173736"/>
+          </a:xfrm>
+          <a:prstGeom prst="rect">
+            <a:avLst/>
+          </a:prstGeom>
+          <a:noFill/>
+        </p:spPr>
+        <p:txBody>
+          <a:bodyPr wrap="square" lIns="0" rIns="0" tIns="0" bIns="0" anchor="t">
+            <a:spAutoFit/>
+          </a:bodyPr>
+          <a:lstStyle/>
+          <a:p>
+            <a:pPr algn="ctr">
+              <a:spcAft>
+                <a:spcPts val="0"/>
+              </a:spcAft>
+            </a:pPr>
+            <a:r>
+              <a:rPr sz="910" b="1" i="0">
+                <a:solidFill>
+                  <a:srgbClr val="263746"/>
+                </a:solidFill>
+                <a:latin typeface="Arial"/>
+              </a:rPr>
+              <a:t>OSDR</a:t>
+            </a:r>
+          </a:p>
+        </p:txBody>
+      </p:sp>
+      <p:sp>
+        <p:nvSpPr>
+          <p:cNvPr id="128" name="Right Arrow 127"/>
+          <p:cNvSpPr/>
+          <p:nvPr/>
+        </p:nvSpPr>
+        <p:spPr>
+          <a:xfrm>
+            <a:off x="8065008" y="5358384"/>
+            <a:ext cx="210312" cy="182880"/>
+          </a:xfrm>
+          <a:prstGeom prst="rightArrow">
+            <a:avLst/>
+          </a:prstGeom>
+          <a:solidFill>
+            <a:srgbClr val="8A969E"/>
+          </a:solidFill>
+          <a:ln>
+            <a:noFill/>
+          </a:ln>
+        </p:spPr>
+        <p:style>
+          <a:lnRef idx="1">
+            <a:schemeClr val="accent1"/>
+          </a:lnRef>
+          <a:fillRef idx="3">
+            <a:schemeClr val="accent1"/>
+          </a:fillRef>
+          <a:effectRef idx="2">
+            <a:schemeClr val="accent1"/>
+          </a:effectRef>
+          <a:fontRef idx="minor">
+            <a:schemeClr val="lt1"/>
+          </a:fontRef>
+        </p:style>
+        <p:txBody>
+          <a:bodyPr rtlCol="0" anchor="ctr"/>
+          <a:lstStyle/>
+          <a:p>
+            <a:pPr algn="ctr"/>
+          </a:p>
+        </p:txBody>
+      </p:sp>
+      <p:sp>
+        <p:nvSpPr>
+          <p:cNvPr id="129" name="Rounded Rectangle 128"/>
+          <p:cNvSpPr/>
+          <p:nvPr/>
+        </p:nvSpPr>
+        <p:spPr>
+          <a:xfrm>
+            <a:off x="8366760" y="5239512"/>
+            <a:ext cx="2240280" cy="448056"/>
+          </a:xfrm>
+          <a:prstGeom prst="roundRect">
+            <a:avLst/>
+          </a:prstGeom>
+          <a:solidFill>
+            <a:srgbClr val="FFFFFF"/>
+          </a:solidFill>
+          <a:ln w="10160">
+            <a:solidFill>
+              <a:srgbClr val="D37B00"/>
+            </a:solidFill>
+          </a:ln>
+        </p:spPr>
+        <p:style>
+          <a:lnRef idx="1">
+            <a:schemeClr val="accent1"/>
+          </a:lnRef>
+          <a:fillRef idx="3">
+            <a:schemeClr val="accent1"/>
+          </a:fillRef>
+          <a:effectRef idx="2">
+            <a:schemeClr val="accent1"/>
+          </a:effectRef>
+          <a:fontRef idx="minor">
+            <a:schemeClr val="lt1"/>
+          </a:fontRef>
+        </p:style>
+        <p:txBody>
+          <a:bodyPr rtlCol="0" anchor="ctr"/>
+          <a:lstStyle/>
+          <a:p>
+            <a:pPr algn="ctr"/>
+          </a:p>
+        </p:txBody>
+      </p:sp>
+      <p:sp>
+        <p:nvSpPr>
+          <p:cNvPr id="130" name="TextBox 129"/>
+          <p:cNvSpPr txBox="1"/>
+          <p:nvPr/>
+        </p:nvSpPr>
+        <p:spPr>
+          <a:xfrm>
+            <a:off x="8458200" y="5285232"/>
+            <a:ext cx="2057400" cy="109728"/>
+          </a:xfrm>
+          <a:prstGeom prst="rect">
+            <a:avLst/>
+          </a:prstGeom>
+          <a:noFill/>
+        </p:spPr>
+        <p:txBody>
+          <a:bodyPr wrap="square" lIns="0" rIns="0" tIns="0" bIns="0" anchor="t">
+            <a:spAutoFit/>
+          </a:bodyPr>
+          <a:lstStyle/>
+          <a:p>
+            <a:pPr algn="l">
+              <a:spcAft>
+                <a:spcPts val="0"/>
+              </a:spcAft>
+            </a:pPr>
+            <a:r>
+              <a:rPr sz="710" b="1" i="0">
+                <a:solidFill>
+                  <a:srgbClr val="D37B00"/>
+                </a:solidFill>
+                <a:latin typeface="Arial"/>
+              </a:rPr>
+              <a:t>GENERATE</a:t>
+            </a:r>
+          </a:p>
+        </p:txBody>
+      </p:sp>
+      <p:sp>
+        <p:nvSpPr>
+          <p:cNvPr id="131" name="TextBox 130"/>
+          <p:cNvSpPr txBox="1"/>
+          <p:nvPr/>
+        </p:nvSpPr>
+        <p:spPr>
+          <a:xfrm>
+            <a:off x="8458200" y="5431536"/>
+            <a:ext cx="2057400" cy="173736"/>
+          </a:xfrm>
+          <a:prstGeom prst="rect">
+            <a:avLst/>
+          </a:prstGeom>
+          <a:noFill/>
+        </p:spPr>
+        <p:txBody>
+          <a:bodyPr wrap="square" lIns="0" rIns="0" tIns="0" bIns="0" anchor="t">
+            <a:spAutoFit/>
+          </a:bodyPr>
+          <a:lstStyle/>
+          <a:p>
+            <a:pPr algn="ctr">
+              <a:spcAft>
+                <a:spcPts val="0"/>
+              </a:spcAft>
+            </a:pPr>
+            <a:r>
+              <a:rPr sz="910" b="1" i="0">
+                <a:solidFill>
+                  <a:srgbClr val="263746"/>
+                </a:solidFill>
+                <a:latin typeface="Arial"/>
+              </a:rPr>
+              <a:t>Conditional DDIM</a:t>
+            </a:r>
+          </a:p>
+        </p:txBody>
+      </p:sp>
+      <p:sp>
+        <p:nvSpPr>
+          <p:cNvPr id="132" name="TextBox 131"/>
+          <p:cNvSpPr txBox="1"/>
+          <p:nvPr/>
+        </p:nvSpPr>
+        <p:spPr>
+          <a:xfrm>
+            <a:off x="1920240" y="5824728"/>
+            <a:ext cx="658368" cy="146304"/>
+          </a:xfrm>
+          <a:prstGeom prst="rect">
+            <a:avLst/>
+          </a:prstGeom>
+          <a:noFill/>
+        </p:spPr>
+        <p:txBody>
+          <a:bodyPr wrap="square" lIns="0" rIns="0" tIns="0" bIns="0" anchor="t">
+            <a:spAutoFit/>
+          </a:bodyPr>
+          <a:lstStyle/>
+          <a:p>
+            <a:pPr algn="l">
+              <a:spcAft>
+                <a:spcPts val="0"/>
+              </a:spcAft>
+            </a:pPr>
+            <a:r>
+              <a:rPr sz="730" b="1" i="0">
+                <a:solidFill>
+                  <a:srgbClr val="478A64"/>
+                </a:solidFill>
+                <a:latin typeface="Arial"/>
+              </a:rPr>
+              <a:t>CONDITION</a:t>
+            </a:r>
+          </a:p>
+        </p:txBody>
+      </p:sp>
+      <p:sp>
+        <p:nvSpPr>
+          <p:cNvPr id="133" name="Rounded Rectangle 132"/>
+          <p:cNvSpPr/>
+          <p:nvPr/>
+        </p:nvSpPr>
+        <p:spPr>
+          <a:xfrm>
+            <a:off x="2633472" y="5733288"/>
+            <a:ext cx="822960" cy="329184"/>
+          </a:xfrm>
+          <a:prstGeom prst="roundRect">
+            <a:avLst/>
+          </a:prstGeom>
+          <a:solidFill>
+            <a:srgbClr val="FFFFFF"/>
+          </a:solidFill>
+          <a:ln w="25400">
+            <a:solidFill>
+              <a:srgbClr val="478A64"/>
+            </a:solidFill>
+          </a:ln>
+        </p:spPr>
+        <p:style>
+          <a:lnRef idx="1">
+            <a:schemeClr val="accent1"/>
+          </a:lnRef>
+          <a:fillRef idx="3">
+            <a:schemeClr val="accent1"/>
+          </a:fillRef>
+          <a:effectRef idx="2">
+            <a:schemeClr val="accent1"/>
+          </a:effectRef>
+          <a:fontRef idx="minor">
+            <a:schemeClr val="lt1"/>
+          </a:fontRef>
+        </p:style>
+        <p:txBody>
+          <a:bodyPr rtlCol="0" anchor="ctr"/>
+          <a:lstStyle/>
+          <a:p>
+            <a:pPr algn="ctr"/>
+          </a:p>
+        </p:txBody>
+      </p:sp>
+      <p:sp>
+        <p:nvSpPr>
+          <p:cNvPr id="134" name="Oval 133"/>
+          <p:cNvSpPr/>
+          <p:nvPr/>
+        </p:nvSpPr>
+        <p:spPr>
+          <a:xfrm>
+            <a:off x="2683764" y="5872276"/>
+            <a:ext cx="50292" cy="50292"/>
+          </a:xfrm>
+          <a:prstGeom prst="ellipse">
+            <a:avLst/>
+          </a:prstGeom>
+          <a:solidFill>
+            <a:srgbClr val="478A64"/>
+          </a:solidFill>
+          <a:ln>
+            <a:noFill/>
+          </a:ln>
+        </p:spPr>
+        <p:style>
+          <a:lnRef idx="1">
+            <a:schemeClr val="accent1"/>
+          </a:lnRef>
+          <a:fillRef idx="3">
+            <a:schemeClr val="accent1"/>
+          </a:fillRef>
+          <a:effectRef idx="2">
+            <a:schemeClr val="accent1"/>
+          </a:effectRef>
+          <a:fontRef idx="minor">
+            <a:schemeClr val="lt1"/>
+          </a:fontRef>
+        </p:style>
+        <p:txBody>
+          <a:bodyPr rtlCol="0" anchor="ctr"/>
+          <a:lstStyle/>
+          <a:p>
+            <a:pPr algn="ctr"/>
+          </a:p>
+        </p:txBody>
+      </p:sp>
+      <p:sp>
+        <p:nvSpPr>
+          <p:cNvPr id="135" name="TextBox 134"/>
+          <p:cNvSpPr txBox="1"/>
+          <p:nvPr/>
+        </p:nvSpPr>
+        <p:spPr>
+          <a:xfrm>
+            <a:off x="2770632" y="5783579"/>
+            <a:ext cx="658368" cy="210312"/>
+          </a:xfrm>
+          <a:prstGeom prst="rect">
+            <a:avLst/>
+          </a:prstGeom>
+          <a:noFill/>
+        </p:spPr>
+        <p:txBody>
+          <a:bodyPr wrap="square" lIns="0" rIns="0" tIns="0" bIns="0" anchor="ctr">
+            <a:spAutoFit/>
+          </a:bodyPr>
+          <a:lstStyle/>
+          <a:p>
+            <a:pPr algn="ctr">
+              <a:spcAft>
+                <a:spcPts val="0"/>
+              </a:spcAft>
+            </a:pPr>
+            <a:r>
+              <a:rPr sz="780" b="1" i="0">
+                <a:solidFill>
+                  <a:srgbClr val="263746"/>
+                </a:solidFill>
+                <a:latin typeface="Arial"/>
+              </a:rPr>
+              <a:t>Tissue</a:t>
+            </a:r>
+          </a:p>
+        </p:txBody>
+      </p:sp>
+      <p:sp>
+        <p:nvSpPr>
+          <p:cNvPr id="136" name="Rounded Rectangle 135"/>
+          <p:cNvSpPr/>
+          <p:nvPr/>
+        </p:nvSpPr>
+        <p:spPr>
+          <a:xfrm>
+            <a:off x="3520440" y="5733288"/>
+            <a:ext cx="914400" cy="329184"/>
+          </a:xfrm>
+          <a:prstGeom prst="roundRect">
+            <a:avLst/>
+          </a:prstGeom>
+          <a:solidFill>
+            <a:srgbClr val="FFFFFF"/>
+          </a:solidFill>
+          <a:ln w="25400">
+            <a:solidFill>
+              <a:srgbClr val="478A64"/>
+            </a:solidFill>
+          </a:ln>
+        </p:spPr>
+        <p:style>
+          <a:lnRef idx="1">
+            <a:schemeClr val="accent1"/>
+          </a:lnRef>
+          <a:fillRef idx="3">
+            <a:schemeClr val="accent1"/>
+          </a:fillRef>
+          <a:effectRef idx="2">
+            <a:schemeClr val="accent1"/>
+          </a:effectRef>
+          <a:fontRef idx="minor">
+            <a:schemeClr val="lt1"/>
+          </a:fontRef>
+        </p:style>
+        <p:txBody>
+          <a:bodyPr rtlCol="0" anchor="ctr"/>
+          <a:lstStyle/>
+          <a:p>
+            <a:pPr algn="ctr"/>
+          </a:p>
+        </p:txBody>
+      </p:sp>
+      <p:sp>
+        <p:nvSpPr>
+          <p:cNvPr id="137" name="Oval 136"/>
+          <p:cNvSpPr/>
+          <p:nvPr/>
+        </p:nvSpPr>
+        <p:spPr>
+          <a:xfrm>
+            <a:off x="3570732" y="5872276"/>
+            <a:ext cx="50292" cy="50292"/>
+          </a:xfrm>
+          <a:prstGeom prst="ellipse">
+            <a:avLst/>
+          </a:prstGeom>
+          <a:solidFill>
+            <a:srgbClr val="478A64"/>
+          </a:solidFill>
+          <a:ln>
+            <a:noFill/>
+          </a:ln>
+        </p:spPr>
+        <p:style>
+          <a:lnRef idx="1">
+            <a:schemeClr val="accent1"/>
+          </a:lnRef>
+          <a:fillRef idx="3">
+            <a:schemeClr val="accent1"/>
+          </a:fillRef>
+          <a:effectRef idx="2">
+            <a:schemeClr val="accent1"/>
+          </a:effectRef>
+          <a:fontRef idx="minor">
+            <a:schemeClr val="lt1"/>
+          </a:fontRef>
+        </p:style>
+        <p:txBody>
+          <a:bodyPr rtlCol="0" anchor="ctr"/>
+          <a:lstStyle/>
+          <a:p>
+            <a:pPr algn="ctr"/>
+          </a:p>
+        </p:txBody>
+      </p:sp>
+      <p:sp>
+        <p:nvSpPr>
+          <p:cNvPr id="138" name="TextBox 137"/>
+          <p:cNvSpPr txBox="1"/>
+          <p:nvPr/>
+        </p:nvSpPr>
+        <p:spPr>
+          <a:xfrm>
+            <a:off x="3657600" y="5783579"/>
+            <a:ext cx="749808" cy="210312"/>
+          </a:xfrm>
+          <a:prstGeom prst="rect">
+            <a:avLst/>
+          </a:prstGeom>
+          <a:noFill/>
+        </p:spPr>
+        <p:txBody>
+          <a:bodyPr wrap="square" lIns="0" rIns="0" tIns="0" bIns="0" anchor="ctr">
+            <a:spAutoFit/>
+          </a:bodyPr>
+          <a:lstStyle/>
+          <a:p>
+            <a:pPr algn="ctr">
+              <a:spcAft>
+                <a:spcPts val="0"/>
+              </a:spcAft>
+            </a:pPr>
+            <a:r>
+              <a:rPr sz="780" b="1" i="0">
+                <a:solidFill>
+                  <a:srgbClr val="263746"/>
+                </a:solidFill>
+                <a:latin typeface="Arial"/>
+              </a:rPr>
+              <a:t>FLT / GC</a:t>
+            </a:r>
+          </a:p>
+        </p:txBody>
+      </p:sp>
+      <p:sp>
+        <p:nvSpPr>
+          <p:cNvPr id="139" name="Rounded Rectangle 138"/>
+          <p:cNvSpPr/>
+          <p:nvPr/>
+        </p:nvSpPr>
+        <p:spPr>
+          <a:xfrm>
+            <a:off x="4498848" y="5733288"/>
+            <a:ext cx="1042415" cy="329184"/>
+          </a:xfrm>
+          <a:prstGeom prst="roundRect">
+            <a:avLst/>
+          </a:prstGeom>
+          <a:solidFill>
+            <a:srgbClr val="FFFFFF"/>
+          </a:solidFill>
+          <a:ln w="25400">
+            <a:solidFill>
+              <a:srgbClr val="478A64"/>
+            </a:solidFill>
+          </a:ln>
+        </p:spPr>
+        <p:style>
+          <a:lnRef idx="1">
+            <a:schemeClr val="accent1"/>
+          </a:lnRef>
+          <a:fillRef idx="3">
+            <a:schemeClr val="accent1"/>
+          </a:fillRef>
+          <a:effectRef idx="2">
+            <a:schemeClr val="accent1"/>
+          </a:effectRef>
+          <a:fontRef idx="minor">
+            <a:schemeClr val="lt1"/>
+          </a:fontRef>
+        </p:style>
+        <p:txBody>
+          <a:bodyPr rtlCol="0" anchor="ctr"/>
+          <a:lstStyle/>
+          <a:p>
+            <a:pPr algn="ctr"/>
+          </a:p>
+        </p:txBody>
+      </p:sp>
+      <p:sp>
+        <p:nvSpPr>
+          <p:cNvPr id="140" name="Oval 139"/>
+          <p:cNvSpPr/>
+          <p:nvPr/>
+        </p:nvSpPr>
+        <p:spPr>
+          <a:xfrm>
+            <a:off x="4549140" y="5872276"/>
+            <a:ext cx="50292" cy="50292"/>
+          </a:xfrm>
+          <a:prstGeom prst="ellipse">
+            <a:avLst/>
+          </a:prstGeom>
+          <a:solidFill>
+            <a:srgbClr val="478A64"/>
+          </a:solidFill>
+          <a:ln>
+            <a:noFill/>
+          </a:ln>
+        </p:spPr>
+        <p:style>
+          <a:lnRef idx="1">
+            <a:schemeClr val="accent1"/>
+          </a:lnRef>
+          <a:fillRef idx="3">
+            <a:schemeClr val="accent1"/>
+          </a:fillRef>
+          <a:effectRef idx="2">
+            <a:schemeClr val="accent1"/>
+          </a:effectRef>
+          <a:fontRef idx="minor">
+            <a:schemeClr val="lt1"/>
+          </a:fontRef>
+        </p:style>
+        <p:txBody>
+          <a:bodyPr rtlCol="0" anchor="ctr"/>
+          <a:lstStyle/>
+          <a:p>
+            <a:pPr algn="ctr"/>
+          </a:p>
+        </p:txBody>
+      </p:sp>
+      <p:sp>
+        <p:nvSpPr>
+          <p:cNvPr id="141" name="TextBox 140"/>
+          <p:cNvSpPr txBox="1"/>
+          <p:nvPr/>
+        </p:nvSpPr>
+        <p:spPr>
+          <a:xfrm>
+            <a:off x="4636008" y="5783579"/>
+            <a:ext cx="877824" cy="210312"/>
+          </a:xfrm>
+          <a:prstGeom prst="rect">
+            <a:avLst/>
+          </a:prstGeom>
+          <a:noFill/>
+        </p:spPr>
+        <p:txBody>
+          <a:bodyPr wrap="square" lIns="0" rIns="0" tIns="0" bIns="0" anchor="ctr">
+            <a:spAutoFit/>
+          </a:bodyPr>
+          <a:lstStyle/>
+          <a:p>
+            <a:pPr algn="ctr">
+              <a:spcAft>
+                <a:spcPts val="0"/>
+              </a:spcAft>
+            </a:pPr>
+            <a:r>
+              <a:rPr sz="780" b="1" i="0">
+                <a:solidFill>
+                  <a:srgbClr val="263746"/>
+                </a:solidFill>
+                <a:latin typeface="Arial"/>
+              </a:rPr>
+              <a:t>Accession</a:t>
+            </a:r>
+          </a:p>
+        </p:txBody>
+      </p:sp>
+      <p:sp>
+        <p:nvSpPr>
+          <p:cNvPr id="142" name="Rounded Rectangle 141"/>
+          <p:cNvSpPr/>
+          <p:nvPr/>
+        </p:nvSpPr>
+        <p:spPr>
+          <a:xfrm>
+            <a:off x="5605272" y="5733288"/>
+            <a:ext cx="1261872" cy="329184"/>
+          </a:xfrm>
+          <a:prstGeom prst="roundRect">
+            <a:avLst/>
+          </a:prstGeom>
+          <a:solidFill>
+            <a:srgbClr val="FFFFFF"/>
+          </a:solidFill>
+          <a:ln w="25400">
+            <a:solidFill>
+              <a:srgbClr val="478A64"/>
+            </a:solidFill>
+          </a:ln>
+        </p:spPr>
+        <p:style>
+          <a:lnRef idx="1">
+            <a:schemeClr val="accent1"/>
+          </a:lnRef>
+          <a:fillRef idx="3">
+            <a:schemeClr val="accent1"/>
+          </a:fillRef>
+          <a:effectRef idx="2">
+            <a:schemeClr val="accent1"/>
+          </a:effectRef>
+          <a:fontRef idx="minor">
+            <a:schemeClr val="lt1"/>
+          </a:fontRef>
+        </p:style>
+        <p:txBody>
+          <a:bodyPr rtlCol="0" anchor="ctr"/>
+          <a:lstStyle/>
+          <a:p>
+            <a:pPr algn="ctr"/>
+          </a:p>
+        </p:txBody>
+      </p:sp>
+      <p:sp>
+        <p:nvSpPr>
+          <p:cNvPr id="143" name="Oval 142"/>
+          <p:cNvSpPr/>
+          <p:nvPr/>
+        </p:nvSpPr>
+        <p:spPr>
+          <a:xfrm>
+            <a:off x="5655564" y="5872276"/>
+            <a:ext cx="50292" cy="50292"/>
+          </a:xfrm>
+          <a:prstGeom prst="ellipse">
+            <a:avLst/>
+          </a:prstGeom>
+          <a:solidFill>
+            <a:srgbClr val="478A64"/>
+          </a:solidFill>
+          <a:ln>
+            <a:noFill/>
+          </a:ln>
+        </p:spPr>
+        <p:style>
+          <a:lnRef idx="1">
+            <a:schemeClr val="accent1"/>
+          </a:lnRef>
+          <a:fillRef idx="3">
+            <a:schemeClr val="accent1"/>
+          </a:fillRef>
+          <a:effectRef idx="2">
+            <a:schemeClr val="accent1"/>
+          </a:effectRef>
+          <a:fontRef idx="minor">
+            <a:schemeClr val="lt1"/>
+          </a:fontRef>
+        </p:style>
+        <p:txBody>
+          <a:bodyPr rtlCol="0" anchor="ctr"/>
+          <a:lstStyle/>
+          <a:p>
+            <a:pPr algn="ctr"/>
+          </a:p>
+        </p:txBody>
+      </p:sp>
+      <p:sp>
+        <p:nvSpPr>
+          <p:cNvPr id="144" name="TextBox 143"/>
+          <p:cNvSpPr txBox="1"/>
+          <p:nvPr/>
+        </p:nvSpPr>
+        <p:spPr>
+          <a:xfrm>
+            <a:off x="5742432" y="5783579"/>
+            <a:ext cx="1097280" cy="210312"/>
+          </a:xfrm>
+          <a:prstGeom prst="rect">
+            <a:avLst/>
+          </a:prstGeom>
+          <a:noFill/>
+        </p:spPr>
+        <p:txBody>
+          <a:bodyPr wrap="square" lIns="0" rIns="0" tIns="0" bIns="0" anchor="ctr">
+            <a:spAutoFit/>
+          </a:bodyPr>
+          <a:lstStyle/>
+          <a:p>
+            <a:pPr algn="ctr">
+              <a:spcAft>
+                <a:spcPts val="0"/>
+              </a:spcAft>
+            </a:pPr>
+            <a:r>
+              <a:rPr sz="780" b="1" i="0">
+                <a:solidFill>
+                  <a:srgbClr val="263746"/>
+                </a:solidFill>
+                <a:latin typeface="Arial"/>
+              </a:rPr>
+              <a:t>Material type</a:t>
+            </a:r>
+          </a:p>
+        </p:txBody>
+      </p:sp>
+      <p:sp>
+        <p:nvSpPr>
+          <p:cNvPr id="145" name="TextBox 144"/>
+          <p:cNvSpPr txBox="1"/>
+          <p:nvPr/>
+        </p:nvSpPr>
+        <p:spPr>
+          <a:xfrm>
+            <a:off x="7095744" y="5824728"/>
+            <a:ext cx="749808" cy="146304"/>
+          </a:xfrm>
+          <a:prstGeom prst="rect">
+            <a:avLst/>
+          </a:prstGeom>
+          <a:noFill/>
+        </p:spPr>
+        <p:txBody>
+          <a:bodyPr wrap="square" lIns="0" rIns="0" tIns="0" bIns="0" anchor="t">
+            <a:spAutoFit/>
+          </a:bodyPr>
+          <a:lstStyle/>
+          <a:p>
+            <a:pPr algn="l">
+              <a:spcAft>
+                <a:spcPts val="0"/>
+              </a:spcAft>
+            </a:pPr>
+            <a:r>
+              <a:rPr sz="730" b="1" i="0">
+                <a:solidFill>
+                  <a:srgbClr val="8063A6"/>
+                </a:solidFill>
+                <a:latin typeface="Arial"/>
+              </a:rPr>
+              <a:t>HARMONIZE</a:t>
+            </a:r>
+          </a:p>
+        </p:txBody>
+      </p:sp>
+      <p:sp>
+        <p:nvSpPr>
+          <p:cNvPr id="146" name="Rounded Rectangle 145"/>
+          <p:cNvSpPr/>
+          <p:nvPr/>
+        </p:nvSpPr>
+        <p:spPr>
+          <a:xfrm>
+            <a:off x="7909560" y="5733288"/>
+            <a:ext cx="713232" cy="329184"/>
+          </a:xfrm>
+          <a:prstGeom prst="roundRect">
+            <a:avLst/>
+          </a:prstGeom>
+          <a:solidFill>
+            <a:srgbClr val="FFFFFF"/>
+          </a:solidFill>
+          <a:ln w="25400">
+            <a:solidFill>
+              <a:srgbClr val="8063A6"/>
+            </a:solidFill>
+          </a:ln>
+        </p:spPr>
+        <p:style>
+          <a:lnRef idx="1">
+            <a:schemeClr val="accent1"/>
+          </a:lnRef>
+          <a:fillRef idx="3">
+            <a:schemeClr val="accent1"/>
+          </a:fillRef>
+          <a:effectRef idx="2">
+            <a:schemeClr val="accent1"/>
+          </a:effectRef>
+          <a:fontRef idx="minor">
+            <a:schemeClr val="lt1"/>
+          </a:fontRef>
+        </p:style>
+        <p:txBody>
+          <a:bodyPr rtlCol="0" anchor="ctr"/>
+          <a:lstStyle/>
+          <a:p>
+            <a:pPr algn="ctr"/>
+          </a:p>
+        </p:txBody>
+      </p:sp>
+      <p:sp>
+        <p:nvSpPr>
+          <p:cNvPr id="147" name="Oval 146"/>
+          <p:cNvSpPr/>
+          <p:nvPr/>
+        </p:nvSpPr>
+        <p:spPr>
+          <a:xfrm>
+            <a:off x="7959852" y="5872276"/>
+            <a:ext cx="50292" cy="50292"/>
+          </a:xfrm>
+          <a:prstGeom prst="ellipse">
+            <a:avLst/>
+          </a:prstGeom>
+          <a:solidFill>
+            <a:srgbClr val="8063A6"/>
+          </a:solidFill>
+          <a:ln>
+            <a:noFill/>
+          </a:ln>
+        </p:spPr>
+        <p:style>
+          <a:lnRef idx="1">
+            <a:schemeClr val="accent1"/>
+          </a:lnRef>
+          <a:fillRef idx="3">
+            <a:schemeClr val="accent1"/>
+          </a:fillRef>
+          <a:effectRef idx="2">
+            <a:schemeClr val="accent1"/>
+          </a:effectRef>
+          <a:fontRef idx="minor">
+            <a:schemeClr val="lt1"/>
+          </a:fontRef>
+        </p:style>
+        <p:txBody>
+          <a:bodyPr rtlCol="0" anchor="ctr"/>
+          <a:lstStyle/>
+          <a:p>
+            <a:pPr algn="ctr"/>
+          </a:p>
+        </p:txBody>
+      </p:sp>
+      <p:sp>
+        <p:nvSpPr>
+          <p:cNvPr id="148" name="TextBox 147"/>
+          <p:cNvSpPr txBox="1"/>
+          <p:nvPr/>
+        </p:nvSpPr>
+        <p:spPr>
+          <a:xfrm>
+            <a:off x="8046720" y="5783579"/>
+            <a:ext cx="548640" cy="210312"/>
+          </a:xfrm>
+          <a:prstGeom prst="rect">
+            <a:avLst/>
+          </a:prstGeom>
+          <a:noFill/>
+        </p:spPr>
+        <p:txBody>
+          <a:bodyPr wrap="square" lIns="0" rIns="0" tIns="0" bIns="0" anchor="ctr">
+            <a:spAutoFit/>
+          </a:bodyPr>
+          <a:lstStyle/>
+          <a:p>
+            <a:pPr algn="ctr">
+              <a:spcAft>
+                <a:spcPts val="0"/>
+              </a:spcAft>
+            </a:pPr>
+            <a:r>
+              <a:rPr sz="780" b="1" i="0">
+                <a:solidFill>
+                  <a:srgbClr val="263746"/>
+                </a:solidFill>
+                <a:latin typeface="Arial"/>
+              </a:rPr>
+              <a:t>None</a:t>
+            </a:r>
+          </a:p>
+        </p:txBody>
+      </p:sp>
+      <p:sp>
+        <p:nvSpPr>
+          <p:cNvPr id="149" name="TextBox 148"/>
+          <p:cNvSpPr txBox="1"/>
+          <p:nvPr/>
+        </p:nvSpPr>
+        <p:spPr>
+          <a:xfrm>
+            <a:off x="8869680" y="5824728"/>
+            <a:ext cx="420624" cy="146304"/>
+          </a:xfrm>
+          <a:prstGeom prst="rect">
+            <a:avLst/>
+          </a:prstGeom>
+          <a:noFill/>
+        </p:spPr>
+        <p:txBody>
+          <a:bodyPr wrap="square" lIns="0" rIns="0" tIns="0" bIns="0" anchor="t">
+            <a:spAutoFit/>
+          </a:bodyPr>
+          <a:lstStyle/>
+          <a:p>
+            <a:pPr algn="l">
+              <a:spcAft>
+                <a:spcPts val="0"/>
+              </a:spcAft>
+            </a:pPr>
+            <a:r>
+              <a:rPr sz="730" b="1" i="0">
+                <a:solidFill>
+                  <a:srgbClr val="2D6496"/>
+                </a:solidFill>
+                <a:latin typeface="Arial"/>
+              </a:rPr>
+              <a:t>SCOPE</a:t>
+            </a:r>
+          </a:p>
+        </p:txBody>
+      </p:sp>
+      <p:sp>
+        <p:nvSpPr>
+          <p:cNvPr id="150" name="Rounded Rectangle 149"/>
+          <p:cNvSpPr/>
+          <p:nvPr/>
+        </p:nvSpPr>
+        <p:spPr>
+          <a:xfrm>
+            <a:off x="9363456" y="5733288"/>
+            <a:ext cx="1097280" cy="329184"/>
           </a:xfrm>
           <a:prstGeom prst="roundRect">
             <a:avLst/>
@@ -46943,13 +48146,13 @@
       </p:sp>
       <p:sp>
         <p:nvSpPr>
-          <p:cNvPr id="122" name="Oval 121"/>
+          <p:cNvPr id="151" name="Oval 150"/>
           <p:cNvSpPr/>
           <p:nvPr/>
         </p:nvSpPr>
         <p:spPr>
           <a:xfrm>
-            <a:off x="3909059" y="5442508"/>
+            <a:off x="9413748" y="5872276"/>
             <a:ext cx="50292" cy="50292"/>
           </a:xfrm>
           <a:prstGeom prst="ellipse">
@@ -46986,14 +48189,14 @@
       </p:sp>
       <p:sp>
         <p:nvSpPr>
-          <p:cNvPr id="123" name="TextBox 122"/>
+          <p:cNvPr id="152" name="TextBox 151"/>
           <p:cNvSpPr txBox="1"/>
           <p:nvPr/>
         </p:nvSpPr>
         <p:spPr>
           <a:xfrm>
-            <a:off x="3995928" y="5353812"/>
-            <a:ext cx="1426464" cy="210312"/>
+            <a:off x="9500616" y="5783579"/>
+            <a:ext cx="932688" cy="210312"/>
           </a:xfrm>
           <a:prstGeom prst="rect">
             <a:avLst/>
@@ -47012,268 +48215,20 @@
               </a:spcAft>
             </a:pPr>
             <a:r>
-              <a:rPr sz="930" b="1" i="0">
+              <a:rPr sz="780" b="1" i="0">
                 <a:solidFill>
                   <a:srgbClr val="263746"/>
                 </a:solidFill>
                 <a:latin typeface="Arial"/>
               </a:rPr>
-              <a:t>OSDR adaptation</a:t>
-            </a:r>
-          </a:p>
-        </p:txBody>
-      </p:sp>
-      <p:sp>
-        <p:nvSpPr>
-          <p:cNvPr id="124" name="Right Arrow 123"/>
-          <p:cNvSpPr/>
-          <p:nvPr/>
-        </p:nvSpPr>
-        <p:spPr>
-          <a:xfrm>
-            <a:off x="5504688" y="5367528"/>
-            <a:ext cx="210312" cy="182880"/>
-          </a:xfrm>
-          <a:prstGeom prst="rightArrow">
-            <a:avLst/>
-          </a:prstGeom>
-          <a:solidFill>
-            <a:srgbClr val="8A969E"/>
-          </a:solidFill>
-          <a:ln>
-            <a:noFill/>
-          </a:ln>
-        </p:spPr>
-        <p:style>
-          <a:lnRef idx="1">
-            <a:schemeClr val="accent1"/>
-          </a:lnRef>
-          <a:fillRef idx="3">
-            <a:schemeClr val="accent1"/>
-          </a:fillRef>
-          <a:effectRef idx="2">
-            <a:schemeClr val="accent1"/>
-          </a:effectRef>
-          <a:fontRef idx="minor">
-            <a:schemeClr val="lt1"/>
-          </a:fontRef>
-        </p:style>
-        <p:txBody>
-          <a:bodyPr rtlCol="0" anchor="ctr"/>
-          <a:lstStyle/>
-          <a:p>
-            <a:pPr algn="ctr"/>
-          </a:p>
-        </p:txBody>
-      </p:sp>
-      <p:sp>
-        <p:nvSpPr>
-          <p:cNvPr id="125" name="Rounded Rectangle 124"/>
-          <p:cNvSpPr/>
-          <p:nvPr/>
-        </p:nvSpPr>
-        <p:spPr>
-          <a:xfrm>
-            <a:off x="5779008" y="5303520"/>
-            <a:ext cx="1591056" cy="329184"/>
-          </a:xfrm>
-          <a:prstGeom prst="roundRect">
-            <a:avLst/>
-          </a:prstGeom>
-          <a:solidFill>
-            <a:srgbClr val="FFFFFF"/>
-          </a:solidFill>
-          <a:ln w="25400">
-            <a:solidFill>
-              <a:srgbClr val="D37B00"/>
-            </a:solidFill>
-          </a:ln>
-        </p:spPr>
-        <p:style>
-          <a:lnRef idx="1">
-            <a:schemeClr val="accent1"/>
-          </a:lnRef>
-          <a:fillRef idx="3">
-            <a:schemeClr val="accent1"/>
-          </a:fillRef>
-          <a:effectRef idx="2">
-            <a:schemeClr val="accent1"/>
-          </a:effectRef>
-          <a:fontRef idx="minor">
-            <a:schemeClr val="lt1"/>
-          </a:fontRef>
-        </p:style>
-        <p:txBody>
-          <a:bodyPr rtlCol="0" anchor="ctr"/>
-          <a:lstStyle/>
-          <a:p>
-            <a:pPr algn="ctr"/>
-          </a:p>
-        </p:txBody>
-      </p:sp>
-      <p:sp>
-        <p:nvSpPr>
-          <p:cNvPr id="126" name="Oval 125"/>
-          <p:cNvSpPr/>
-          <p:nvPr/>
-        </p:nvSpPr>
-        <p:spPr>
-          <a:xfrm>
-            <a:off x="5829300" y="5442508"/>
-            <a:ext cx="50292" cy="50292"/>
-          </a:xfrm>
-          <a:prstGeom prst="ellipse">
-            <a:avLst/>
-          </a:prstGeom>
-          <a:solidFill>
-            <a:srgbClr val="D37B00"/>
-          </a:solidFill>
-          <a:ln>
-            <a:noFill/>
-          </a:ln>
-        </p:spPr>
-        <p:style>
-          <a:lnRef idx="1">
-            <a:schemeClr val="accent1"/>
-          </a:lnRef>
-          <a:fillRef idx="3">
-            <a:schemeClr val="accent1"/>
-          </a:fillRef>
-          <a:effectRef idx="2">
-            <a:schemeClr val="accent1"/>
-          </a:effectRef>
-          <a:fontRef idx="minor">
-            <a:schemeClr val="lt1"/>
-          </a:fontRef>
-        </p:style>
-        <p:txBody>
-          <a:bodyPr rtlCol="0" anchor="ctr"/>
-          <a:lstStyle/>
-          <a:p>
-            <a:pPr algn="ctr"/>
-          </a:p>
-        </p:txBody>
-      </p:sp>
-      <p:sp>
-        <p:nvSpPr>
-          <p:cNvPr id="127" name="TextBox 126"/>
-          <p:cNvSpPr txBox="1"/>
-          <p:nvPr/>
-        </p:nvSpPr>
-        <p:spPr>
-          <a:xfrm>
-            <a:off x="5916168" y="5353812"/>
-            <a:ext cx="1426464" cy="210312"/>
-          </a:xfrm>
-          <a:prstGeom prst="rect">
-            <a:avLst/>
-          </a:prstGeom>
-          <a:noFill/>
-        </p:spPr>
-        <p:txBody>
-          <a:bodyPr wrap="square" lIns="0" rIns="0" tIns="0" bIns="0" anchor="ctr">
-            <a:spAutoFit/>
-          </a:bodyPr>
-          <a:lstStyle/>
-          <a:p>
-            <a:pPr algn="ctr">
-              <a:spcAft>
-                <a:spcPts val="0"/>
-              </a:spcAft>
-            </a:pPr>
-            <a:r>
-              <a:rPr sz="930" b="1" i="0">
-                <a:solidFill>
-                  <a:srgbClr val="263746"/>
-                </a:solidFill>
-                <a:latin typeface="Arial"/>
-              </a:rPr>
-              <a:t>Conditional DDIM</a:t>
-            </a:r>
-          </a:p>
-        </p:txBody>
-      </p:sp>
-      <p:sp>
-        <p:nvSpPr>
-          <p:cNvPr id="128" name="TextBox 127"/>
-          <p:cNvSpPr txBox="1"/>
-          <p:nvPr/>
-        </p:nvSpPr>
-        <p:spPr>
-          <a:xfrm>
-            <a:off x="7699248" y="5276088"/>
-            <a:ext cx="3675887" cy="246888"/>
-          </a:xfrm>
-          <a:prstGeom prst="rect">
-            <a:avLst/>
-          </a:prstGeom>
-          <a:noFill/>
-        </p:spPr>
-        <p:txBody>
-          <a:bodyPr wrap="square" lIns="18288" rIns="18288" tIns="18288" bIns="18288" anchor="t">
-            <a:spAutoFit/>
-          </a:bodyPr>
-          <a:lstStyle/>
-          <a:p>
-            <a:pPr algn="l">
-              <a:spcAft>
-                <a:spcPts val="0"/>
-              </a:spcAft>
-            </a:pPr>
-            <a:r>
-              <a:rPr sz="1170" b="1" i="0">
-                <a:solidFill>
-                  <a:srgbClr val="082B55"/>
-                </a:solidFill>
-                <a:latin typeface="Arial"/>
-              </a:rPr>
-              <a:t>TPM | MaxAbs | 974 landmarks</a:t>
-            </a:r>
-          </a:p>
-        </p:txBody>
-      </p:sp>
-      <p:sp>
-        <p:nvSpPr>
-          <p:cNvPr id="129" name="TextBox 128"/>
-          <p:cNvSpPr txBox="1"/>
-          <p:nvPr/>
-        </p:nvSpPr>
-        <p:spPr>
-          <a:xfrm>
-            <a:off x="7699248" y="5614416"/>
-            <a:ext cx="3675887" cy="246888"/>
-          </a:xfrm>
-          <a:prstGeom prst="rect">
-            <a:avLst/>
-          </a:prstGeom>
-          <a:noFill/>
-        </p:spPr>
-        <p:txBody>
-          <a:bodyPr wrap="square" lIns="18288" rIns="18288" tIns="18288" bIns="18288" anchor="t">
-            <a:spAutoFit/>
-          </a:bodyPr>
-          <a:lstStyle/>
-          <a:p>
-            <a:pPr algn="l">
-              <a:spcAft>
-                <a:spcPts val="0"/>
-              </a:spcAft>
-            </a:pPr>
-            <a:r>
-              <a:rPr sz="1080" b="0" i="0">
-                <a:solidFill>
-                  <a:srgbClr val="263746"/>
-                </a:solidFill>
-                <a:latin typeface="Arial"/>
-              </a:rPr>
-              <a:t>Tissue | FLT / GC | Accession | Material type</a:t>
-            </a:r>
-          </a:p>
-        </p:txBody>
-      </p:sp>
-      <p:sp>
-        <p:nvSpPr>
-          <p:cNvPr id="130" name="TextBox 129"/>
+              <a:t>All tissues</a:t>
+            </a:r>
+          </a:p>
+        </p:txBody>
+      </p:sp>
+      <p:sp>
+        <p:nvSpPr>
+          <p:cNvPr id="153" name="TextBox 152"/>
           <p:cNvSpPr txBox="1"/>
           <p:nvPr/>
         </p:nvSpPr>

--- a/presentation/SLSTP_2026_Generative_Transcriptomics.pptx
+++ b/presentation/SLSTP_2026_Generative_Transcriptomics.pptx
@@ -1039,7 +1039,7 @@
           <a:p/>
           <a:p>
             <a:r>
-              <a:t>Thymus produced the clearest promoted panel. The lower mitotic and DNA-replication genes agree with prior reports of thymic involution and altered cell-cycle expression after flight. Higher Hsd17b11 and Etv1 add lipid-handling and T-cell-state hypotheses. Because this is bulk RNA-seq, the pattern may reflect transcription, cell composition or both.</a:t>
+              <a:t>Thymus produced the clearest promoted panel. The lower mitotic and DNA-replication genes agree with prior reports of thymic involution and altered cell-cycle expression after flight. Higher Hsd17b11 and Etv1 add lipid-handling and T-cell-state hypotheses. A matched sensitivity model without material-type conditioning preserved the cell-cycle interpretation, so the process-level result did not depend on that label. Because this is bulk RNA-seq, the pattern may reflect transcription, cell composition or both.</a:t>
             </a:r>
           </a:p>
         </p:txBody>
@@ -1115,7 +1115,7 @@
           <a:p/>
           <a:p>
             <a:r>
-              <a:t>Soleus improved with real plus generated training. The selected genes were already stable in real-only analysis, so synthetic data reinforced rather than introduced the panel. Lower Bdh1, Ech1, Bnip3 and Decr1, with higher Tpm1, support altered oxidative metabolism and contractile remodeling. The literature is mixed for Bnip3 and Tpm1, which is recorded explicitly.</a:t>
+              <a:t>Soleus improved with real plus generated training. The selected genes were already stable in real-only analysis, so synthetic data reinforced rather than introduced the panel. Lower Bdh1, Ech1, Bnip3 and Decr1, with higher Tpm1, support altered oxidative metabolism and contractile remodeling. In the matched no-material sensitivity model, soleus selected the real-only arm and the synthetic attribution disappeared. The real OSDR association remains, but the contribution attributed to generated profiles is conditioning-sensitive.</a:t>
             </a:r>
           </a:p>
         </p:txBody>
@@ -33347,7 +33347,7 @@
                 </a:solidFill>
                 <a:latin typeface="Arial"/>
               </a:rPr>
-              <a:t>The core panel recovers cell-cycle biology; two flight-higher genes extend the hypothesis.</a:t>
+              <a:t>The cell-cycle program persisted without material conditioning; two FLT-higher genes extend the hypothesis.</a:t>
             </a:r>
           </a:p>
         </p:txBody>
@@ -34070,7 +34070,7 @@
                 </a:solidFill>
                 <a:latin typeface="Arial"/>
               </a:rPr>
-              <a:t>This result strengthens an existing real-data pattern rather than promoting a new soleus gene.</a:t>
+              <a:t>The real-data program is coherent, but its synthetic reinforcement required explicit material conditioning.</a:t>
             </a:r>
           </a:p>
         </p:txBody>
@@ -39006,7 +39006,7 @@
                 </a:solidFill>
                 <a:latin typeface="Arial"/>
               </a:rPr>
-              <a:t>Thymus and soleus were clearest. Literature review separated recovery from complementary hypotheses.</a:t>
+              <a:t>Thymus was robust to material ablation; soleus was conditioning-sensitive. Literature review separated recovery from extension.</a:t>
             </a:r>
           </a:p>
         </p:txBody>
@@ -46836,7 +46836,7 @@
         <p:spPr>
           <a:xfrm>
             <a:off x="475488" y="1901952"/>
-            <a:ext cx="3584448" cy="292608"/>
+            <a:ext cx="5504688" cy="292608"/>
           </a:xfrm>
           <a:prstGeom prst="rect">
             <a:avLst/>
@@ -46882,8 +46882,8 @@
         </p:blipFill>
         <p:spPr>
           <a:xfrm>
-            <a:off x="438912" y="2675147"/>
-            <a:ext cx="3675887" cy="1343112"/>
+            <a:off x="347472" y="2263491"/>
+            <a:ext cx="5779008" cy="2111560"/>
           </a:xfrm>
           <a:prstGeom prst="rect">
             <a:avLst/>
@@ -46898,8 +46898,8 @@
         </p:nvSpPr>
         <p:spPr>
           <a:xfrm>
-            <a:off x="512064" y="4507992"/>
-            <a:ext cx="3529584" cy="256032"/>
+            <a:off x="512064" y="4471416"/>
+            <a:ext cx="5449824" cy="256032"/>
           </a:xfrm>
           <a:prstGeom prst="rect">
             <a:avLst/>
@@ -46918,7 +46918,7 @@
               </a:spcAft>
             </a:pPr>
             <a:r>
-              <a:rPr sz="1080" b="1" i="0">
+              <a:rPr sz="1130" b="1" i="0">
                 <a:solidFill>
                   <a:srgbClr val="263746"/>
                 </a:solidFill>
@@ -46937,8 +46937,8 @@
         </p:nvSpPr>
         <p:spPr>
           <a:xfrm>
-            <a:off x="512064" y="4828032"/>
-            <a:ext cx="3529584" cy="347472"/>
+            <a:off x="512064" y="4782312"/>
+            <a:ext cx="5449824" cy="310896"/>
           </a:xfrm>
           <a:prstGeom prst="rect">
             <a:avLst/>
@@ -46957,7 +46957,7 @@
               </a:spcAft>
             </a:pPr>
             <a:r>
-              <a:rPr sz="1010" b="0" i="0">
+              <a:rPr sz="1060" b="0" i="0">
                 <a:solidFill>
                   <a:srgbClr val="59697A"/>
                 </a:solidFill>
@@ -46976,8 +46976,8 @@
         </p:nvSpPr>
         <p:spPr>
           <a:xfrm>
-            <a:off x="4233672" y="1874519"/>
-            <a:ext cx="13716" cy="3429000"/>
+            <a:off x="6281928" y="1874519"/>
+            <a:ext cx="13716" cy="3950208"/>
           </a:xfrm>
           <a:prstGeom prst="rect">
             <a:avLst/>
@@ -47019,8 +47019,8 @@
         </p:nvSpPr>
         <p:spPr>
           <a:xfrm>
-            <a:off x="4498848" y="1984248"/>
-            <a:ext cx="1920240" cy="256032"/>
+            <a:off x="6537960" y="1984248"/>
+            <a:ext cx="1554480" cy="256032"/>
           </a:xfrm>
           <a:prstGeom prst="rect">
             <a:avLst/>
@@ -47039,7 +47039,7 @@
               </a:spcAft>
             </a:pPr>
             <a:r>
-              <a:rPr sz="1150" b="1" i="0">
+              <a:rPr sz="1050" b="1" i="0">
                 <a:solidFill>
                   <a:srgbClr val="59697A"/>
                 </a:solidFill>
@@ -47058,8 +47058,8 @@
         </p:nvSpPr>
         <p:spPr>
           <a:xfrm>
-            <a:off x="6720840" y="1984248"/>
-            <a:ext cx="1188720" cy="256032"/>
+            <a:off x="8165592" y="1984248"/>
+            <a:ext cx="960120" cy="256032"/>
           </a:xfrm>
           <a:prstGeom prst="rect">
             <a:avLst/>
@@ -47078,7 +47078,7 @@
               </a:spcAft>
             </a:pPr>
             <a:r>
-              <a:rPr sz="1150" b="1" i="0">
+              <a:rPr sz="1050" b="1" i="0">
                 <a:solidFill>
                   <a:srgbClr val="D96552"/>
                 </a:solidFill>
@@ -47097,8 +47097,8 @@
         </p:nvSpPr>
         <p:spPr>
           <a:xfrm>
-            <a:off x="8311896" y="1984248"/>
-            <a:ext cx="1188720" cy="256032"/>
+            <a:off x="9262872" y="1984248"/>
+            <a:ext cx="804672" cy="256032"/>
           </a:xfrm>
           <a:prstGeom prst="rect">
             <a:avLst/>
@@ -47117,7 +47117,7 @@
               </a:spcAft>
             </a:pPr>
             <a:r>
-              <a:rPr sz="1150" b="1" i="0">
+              <a:rPr sz="1050" b="1" i="0">
                 <a:solidFill>
                   <a:srgbClr val="178681"/>
                 </a:solidFill>
@@ -47136,8 +47136,8 @@
         </p:nvSpPr>
         <p:spPr>
           <a:xfrm>
-            <a:off x="9838944" y="1984248"/>
-            <a:ext cx="1627632" cy="256032"/>
+            <a:off x="10222992" y="1984248"/>
+            <a:ext cx="1234440" cy="256032"/>
           </a:xfrm>
           <a:prstGeom prst="rect">
             <a:avLst/>
@@ -47156,13 +47156,13 @@
               </a:spcAft>
             </a:pPr>
             <a:r>
-              <a:rPr sz="1150" b="1" i="0">
+              <a:rPr sz="1050" b="1" i="0">
                 <a:solidFill>
                   <a:srgbClr val="59697A"/>
                 </a:solidFill>
                 <a:latin typeface="Arial"/>
               </a:rPr>
-              <a:t>How to read it</a:t>
+              <a:t>Read</a:t>
             </a:r>
           </a:p>
         </p:txBody>
@@ -47175,8 +47175,8 @@
         </p:nvSpPr>
         <p:spPr>
           <a:xfrm>
-            <a:off x="4498848" y="2340864"/>
-            <a:ext cx="7059168" cy="20116"/>
+            <a:off x="6537960" y="2340864"/>
+            <a:ext cx="4983480" cy="20116"/>
           </a:xfrm>
           <a:prstGeom prst="rect">
             <a:avLst/>
@@ -47218,8 +47218,8 @@
         </p:nvSpPr>
         <p:spPr>
           <a:xfrm>
-            <a:off x="4480560" y="2505456"/>
-            <a:ext cx="7086600" cy="493776"/>
+            <a:off x="6519672" y="2496312"/>
+            <a:ext cx="5020056" cy="457200"/>
           </a:xfrm>
           <a:prstGeom prst="rect">
             <a:avLst/>
@@ -47261,8 +47261,8 @@
         </p:nvSpPr>
         <p:spPr>
           <a:xfrm>
-            <a:off x="4562856" y="2578608"/>
-            <a:ext cx="1920240" cy="310896"/>
+            <a:off x="6601968" y="2560320"/>
+            <a:ext cx="1490472" cy="292608"/>
           </a:xfrm>
           <a:prstGeom prst="rect">
             <a:avLst/>
@@ -47281,7 +47281,7 @@
               </a:spcAft>
             </a:pPr>
             <a:r>
-              <a:rPr sz="1350" b="0" i="0">
+              <a:rPr sz="1120" b="0" i="0">
                 <a:solidFill>
                   <a:srgbClr val="263746"/>
                 </a:solidFill>
@@ -47300,8 +47300,8 @@
         </p:nvSpPr>
         <p:spPr>
           <a:xfrm>
-            <a:off x="6684264" y="2578608"/>
-            <a:ext cx="1261872" cy="310896"/>
+            <a:off x="8165592" y="2560320"/>
+            <a:ext cx="960120" cy="292608"/>
           </a:xfrm>
           <a:prstGeom prst="rect">
             <a:avLst/>
@@ -47320,7 +47320,7 @@
               </a:spcAft>
             </a:pPr>
             <a:r>
-              <a:rPr sz="1550" b="1" i="0">
+              <a:rPr sz="1330" b="1" i="0">
                 <a:solidFill>
                   <a:srgbClr val="D96552"/>
                 </a:solidFill>
@@ -47339,8 +47339,8 @@
         </p:nvSpPr>
         <p:spPr>
           <a:xfrm>
-            <a:off x="8275320" y="2578608"/>
-            <a:ext cx="1261872" cy="310896"/>
+            <a:off x="9253728" y="2560320"/>
+            <a:ext cx="804672" cy="292608"/>
           </a:xfrm>
           <a:prstGeom prst="rect">
             <a:avLst/>
@@ -47359,7 +47359,7 @@
               </a:spcAft>
             </a:pPr>
             <a:r>
-              <a:rPr sz="1550" b="1" i="0">
+              <a:rPr sz="1330" b="1" i="0">
                 <a:solidFill>
                   <a:srgbClr val="178681"/>
                 </a:solidFill>
@@ -47378,8 +47378,8 @@
         </p:nvSpPr>
         <p:spPr>
           <a:xfrm>
-            <a:off x="9857232" y="2578608"/>
-            <a:ext cx="1481328" cy="310896"/>
+            <a:off x="10222992" y="2560320"/>
+            <a:ext cx="1234440" cy="292608"/>
           </a:xfrm>
           <a:prstGeom prst="rect">
             <a:avLst/>
@@ -47398,7 +47398,7 @@
               </a:spcAft>
             </a:pPr>
             <a:r>
-              <a:rPr sz="1300" b="0" i="0">
+              <a:rPr sz="1070" b="0" i="0">
                 <a:solidFill>
                   <a:srgbClr val="59697A"/>
                 </a:solidFill>
@@ -47417,8 +47417,8 @@
         </p:nvSpPr>
         <p:spPr>
           <a:xfrm>
-            <a:off x="4562856" y="3163824"/>
-            <a:ext cx="1920240" cy="310896"/>
+            <a:off x="6601968" y="3099815"/>
+            <a:ext cx="1490472" cy="292608"/>
           </a:xfrm>
           <a:prstGeom prst="rect">
             <a:avLst/>
@@ -47437,7 +47437,7 @@
               </a:spcAft>
             </a:pPr>
             <a:r>
-              <a:rPr sz="1350" b="0" i="0">
+              <a:rPr sz="1120" b="0" i="0">
                 <a:solidFill>
                   <a:srgbClr val="263746"/>
                 </a:solidFill>
@@ -47456,8 +47456,8 @@
         </p:nvSpPr>
         <p:spPr>
           <a:xfrm>
-            <a:off x="6684264" y="3163824"/>
-            <a:ext cx="1261872" cy="310896"/>
+            <a:off x="8165592" y="3099815"/>
+            <a:ext cx="960120" cy="292608"/>
           </a:xfrm>
           <a:prstGeom prst="rect">
             <a:avLst/>
@@ -47476,7 +47476,7 @@
               </a:spcAft>
             </a:pPr>
             <a:r>
-              <a:rPr sz="1550" b="1" i="0">
+              <a:rPr sz="1330" b="1" i="0">
                 <a:solidFill>
                   <a:srgbClr val="D96552"/>
                 </a:solidFill>
@@ -47495,8 +47495,8 @@
         </p:nvSpPr>
         <p:spPr>
           <a:xfrm>
-            <a:off x="8275320" y="3163824"/>
-            <a:ext cx="1261872" cy="310896"/>
+            <a:off x="9253728" y="3099815"/>
+            <a:ext cx="804672" cy="292608"/>
           </a:xfrm>
           <a:prstGeom prst="rect">
             <a:avLst/>
@@ -47515,7 +47515,7 @@
               </a:spcAft>
             </a:pPr>
             <a:r>
-              <a:rPr sz="1550" b="1" i="0">
+              <a:rPr sz="1330" b="1" i="0">
                 <a:solidFill>
                   <a:srgbClr val="178681"/>
                 </a:solidFill>
@@ -47534,8 +47534,8 @@
         </p:nvSpPr>
         <p:spPr>
           <a:xfrm>
-            <a:off x="9857232" y="3163824"/>
-            <a:ext cx="1481328" cy="310896"/>
+            <a:off x="10222992" y="3099815"/>
+            <a:ext cx="1234440" cy="292608"/>
           </a:xfrm>
           <a:prstGeom prst="rect">
             <a:avLst/>
@@ -47554,7 +47554,7 @@
               </a:spcAft>
             </a:pPr>
             <a:r>
-              <a:rPr sz="1300" b="0" i="0">
+              <a:rPr sz="1070" b="0" i="0">
                 <a:solidFill>
                   <a:srgbClr val="59697A"/>
                 </a:solidFill>
@@ -47573,8 +47573,8 @@
         </p:nvSpPr>
         <p:spPr>
           <a:xfrm>
-            <a:off x="4480560" y="3675887"/>
-            <a:ext cx="7086600" cy="493776"/>
+            <a:off x="6519672" y="3575303"/>
+            <a:ext cx="5020056" cy="457200"/>
           </a:xfrm>
           <a:prstGeom prst="rect">
             <a:avLst/>
@@ -47616,8 +47616,8 @@
         </p:nvSpPr>
         <p:spPr>
           <a:xfrm>
-            <a:off x="4562856" y="3749039"/>
-            <a:ext cx="1920240" cy="310896"/>
+            <a:off x="6601968" y="3639311"/>
+            <a:ext cx="1490472" cy="292608"/>
           </a:xfrm>
           <a:prstGeom prst="rect">
             <a:avLst/>
@@ -47636,7 +47636,7 @@
               </a:spcAft>
             </a:pPr>
             <a:r>
-              <a:rPr sz="1350" b="1" i="0">
+              <a:rPr sz="1120" b="1" i="0">
                 <a:solidFill>
                   <a:srgbClr val="263746"/>
                 </a:solidFill>
@@ -47655,8 +47655,8 @@
         </p:nvSpPr>
         <p:spPr>
           <a:xfrm>
-            <a:off x="6684264" y="3749039"/>
-            <a:ext cx="1261872" cy="310896"/>
+            <a:off x="8165592" y="3639311"/>
+            <a:ext cx="960120" cy="292608"/>
           </a:xfrm>
           <a:prstGeom prst="rect">
             <a:avLst/>
@@ -47675,7 +47675,7 @@
               </a:spcAft>
             </a:pPr>
             <a:r>
-              <a:rPr sz="1550" b="1" i="0">
+              <a:rPr sz="1330" b="1" i="0">
                 <a:solidFill>
                   <a:srgbClr val="D96552"/>
                 </a:solidFill>
@@ -47694,8 +47694,8 @@
         </p:nvSpPr>
         <p:spPr>
           <a:xfrm>
-            <a:off x="8275320" y="3749039"/>
-            <a:ext cx="1261872" cy="310896"/>
+            <a:off x="9253728" y="3639311"/>
+            <a:ext cx="804672" cy="292608"/>
           </a:xfrm>
           <a:prstGeom prst="rect">
             <a:avLst/>
@@ -47714,7 +47714,7 @@
               </a:spcAft>
             </a:pPr>
             <a:r>
-              <a:rPr sz="1550" b="1" i="0">
+              <a:rPr sz="1330" b="1" i="0">
                 <a:solidFill>
                   <a:srgbClr val="178681"/>
                 </a:solidFill>
@@ -47733,8 +47733,8 @@
         </p:nvSpPr>
         <p:spPr>
           <a:xfrm>
-            <a:off x="9857232" y="3749039"/>
-            <a:ext cx="1481328" cy="310896"/>
+            <a:off x="10222992" y="3639311"/>
+            <a:ext cx="1234440" cy="292608"/>
           </a:xfrm>
           <a:prstGeom prst="rect">
             <a:avLst/>
@@ -47753,7 +47753,7 @@
               </a:spcAft>
             </a:pPr>
             <a:r>
-              <a:rPr sz="1300" b="0" i="0">
+              <a:rPr sz="1070" b="0" i="0">
                 <a:solidFill>
                   <a:srgbClr val="59697A"/>
                 </a:solidFill>
@@ -47772,8 +47772,8 @@
         </p:nvSpPr>
         <p:spPr>
           <a:xfrm>
-            <a:off x="4562856" y="4334256"/>
-            <a:ext cx="1920240" cy="310896"/>
+            <a:off x="6601968" y="4178808"/>
+            <a:ext cx="1490472" cy="292608"/>
           </a:xfrm>
           <a:prstGeom prst="rect">
             <a:avLst/>
@@ -47792,7 +47792,7 @@
               </a:spcAft>
             </a:pPr>
             <a:r>
-              <a:rPr sz="1350" b="1" i="0">
+              <a:rPr sz="1120" b="1" i="0">
                 <a:solidFill>
                   <a:srgbClr val="263746"/>
                 </a:solidFill>
@@ -47811,8 +47811,8 @@
         </p:nvSpPr>
         <p:spPr>
           <a:xfrm>
-            <a:off x="6684264" y="4334256"/>
-            <a:ext cx="1261872" cy="310896"/>
+            <a:off x="8165592" y="4178808"/>
+            <a:ext cx="960120" cy="292608"/>
           </a:xfrm>
           <a:prstGeom prst="rect">
             <a:avLst/>
@@ -47831,7 +47831,7 @@
               </a:spcAft>
             </a:pPr>
             <a:r>
-              <a:rPr sz="1550" b="1" i="0">
+              <a:rPr sz="1330" b="1" i="0">
                 <a:solidFill>
                   <a:srgbClr val="D96552"/>
                 </a:solidFill>
@@ -47850,8 +47850,8 @@
         </p:nvSpPr>
         <p:spPr>
           <a:xfrm>
-            <a:off x="8275320" y="4334256"/>
-            <a:ext cx="1261872" cy="310896"/>
+            <a:off x="9253728" y="4178808"/>
+            <a:ext cx="804672" cy="292608"/>
           </a:xfrm>
           <a:prstGeom prst="rect">
             <a:avLst/>
@@ -47870,7 +47870,7 @@
               </a:spcAft>
             </a:pPr>
             <a:r>
-              <a:rPr sz="1550" b="1" i="0">
+              <a:rPr sz="1330" b="1" i="0">
                 <a:solidFill>
                   <a:srgbClr val="178681"/>
                 </a:solidFill>
@@ -47889,8 +47889,8 @@
         </p:nvSpPr>
         <p:spPr>
           <a:xfrm>
-            <a:off x="9857232" y="4334256"/>
-            <a:ext cx="1481328" cy="310896"/>
+            <a:off x="10222992" y="4178808"/>
+            <a:ext cx="1234440" cy="292608"/>
           </a:xfrm>
           <a:prstGeom prst="rect">
             <a:avLst/>
@@ -47909,7 +47909,7 @@
               </a:spcAft>
             </a:pPr>
             <a:r>
-              <a:rPr sz="1300" b="0" i="0">
+              <a:rPr sz="1070" b="0" i="0">
                 <a:solidFill>
                   <a:srgbClr val="59697A"/>
                 </a:solidFill>
@@ -47922,14 +47922,57 @@
       </p:sp>
       <p:sp>
         <p:nvSpPr>
-          <p:cNvPr id="35" name="TextBox 34"/>
+          <p:cNvPr id="35" name="Rectangle 34"/>
+          <p:cNvSpPr/>
+          <p:nvPr/>
+        </p:nvSpPr>
+        <p:spPr>
+          <a:xfrm>
+            <a:off x="502920" y="5212080"/>
+            <a:ext cx="5513832" cy="13716"/>
+          </a:xfrm>
+          <a:prstGeom prst="rect">
+            <a:avLst/>
+          </a:prstGeom>
+          <a:solidFill>
+            <a:srgbClr val="D5DDE2"/>
+          </a:solidFill>
+          <a:ln>
+            <a:noFill/>
+          </a:ln>
+        </p:spPr>
+        <p:style>
+          <a:lnRef idx="1">
+            <a:schemeClr val="accent1"/>
+          </a:lnRef>
+          <a:fillRef idx="3">
+            <a:schemeClr val="accent1"/>
+          </a:fillRef>
+          <a:effectRef idx="2">
+            <a:schemeClr val="accent1"/>
+          </a:effectRef>
+          <a:fontRef idx="minor">
+            <a:schemeClr val="lt1"/>
+          </a:fontRef>
+        </p:style>
+        <p:txBody>
+          <a:bodyPr rtlCol="0" anchor="ctr"/>
+          <a:lstStyle/>
+          <a:p>
+            <a:pPr algn="ctr"/>
+          </a:p>
+        </p:txBody>
+      </p:sp>
+      <p:sp>
+        <p:nvSpPr>
+          <p:cNvPr id="36" name="TextBox 35"/>
           <p:cNvSpPr txBox="1"/>
           <p:nvPr/>
         </p:nvSpPr>
         <p:spPr>
           <a:xfrm>
-            <a:off x="502920" y="5431536"/>
-            <a:ext cx="1463040" cy="219456"/>
+            <a:off x="502920" y="5376672"/>
+            <a:ext cx="1600200" cy="219456"/>
           </a:xfrm>
           <a:prstGeom prst="rect">
             <a:avLst/>
@@ -47948,7 +47991,7 @@
               </a:spcAft>
             </a:pPr>
             <a:r>
-              <a:rPr sz="1000" b="1" i="0">
+              <a:rPr sz="1040" b="1" i="0">
                 <a:solidFill>
                   <a:srgbClr val="2D6496"/>
                 </a:solidFill>
@@ -47961,14 +48004,14 @@
       </p:sp>
       <p:sp>
         <p:nvSpPr>
-          <p:cNvPr id="36" name="TextBox 35"/>
+          <p:cNvPr id="37" name="TextBox 36"/>
           <p:cNvSpPr txBox="1"/>
           <p:nvPr/>
         </p:nvSpPr>
         <p:spPr>
           <a:xfrm>
-            <a:off x="1874519" y="5413248"/>
-            <a:ext cx="2231136" cy="246888"/>
+            <a:off x="3108960" y="5358384"/>
+            <a:ext cx="2852928" cy="246888"/>
           </a:xfrm>
           <a:prstGeom prst="rect">
             <a:avLst/>
@@ -47987,7 +48030,7 @@
               </a:spcAft>
             </a:pPr>
             <a:r>
-              <a:rPr sz="1000" b="0" i="0">
+              <a:rPr sz="1040" b="0" i="0">
                 <a:solidFill>
                   <a:srgbClr val="263746"/>
                 </a:solidFill>
@@ -48000,14 +48043,53 @@
       </p:sp>
       <p:sp>
         <p:nvSpPr>
-          <p:cNvPr id="37" name="Rectangle 36"/>
+          <p:cNvPr id="38" name="TextBox 37"/>
+          <p:cNvSpPr txBox="1"/>
+          <p:nvPr/>
+        </p:nvSpPr>
+        <p:spPr>
+          <a:xfrm>
+            <a:off x="502920" y="5678424"/>
+            <a:ext cx="5458968" cy="228600"/>
+          </a:xfrm>
+          <a:prstGeom prst="rect">
+            <a:avLst/>
+          </a:prstGeom>
+          <a:noFill/>
+        </p:spPr>
+        <p:txBody>
+          <a:bodyPr wrap="square" lIns="0" rIns="0" tIns="0" bIns="0" anchor="t">
+            <a:spAutoFit/>
+          </a:bodyPr>
+          <a:lstStyle/>
+          <a:p>
+            <a:pPr algn="ctr">
+              <a:spcAft>
+                <a:spcPts val="0"/>
+              </a:spcAft>
+            </a:pPr>
+            <a:r>
+              <a:rPr sz="969" b="0" i="0">
+                <a:solidFill>
+                  <a:srgbClr val="59697A"/>
+                </a:solidFill>
+                <a:latin typeface="Arial"/>
+              </a:rPr>
+              <a:t>Balanced accuracy is preserved in generated tissue labels.</a:t>
+            </a:r>
+          </a:p>
+        </p:txBody>
+      </p:sp>
+      <p:sp>
+        <p:nvSpPr>
+          <p:cNvPr id="39" name="Rectangle 38"/>
           <p:cNvSpPr/>
           <p:nvPr/>
         </p:nvSpPr>
         <p:spPr>
           <a:xfrm>
-            <a:off x="4498848" y="5266944"/>
-            <a:ext cx="50292" cy="676656"/>
+            <a:off x="6537960" y="4901184"/>
+            <a:ext cx="50292" cy="713232"/>
           </a:xfrm>
           <a:prstGeom prst="rect">
             <a:avLst/>
@@ -48043,14 +48125,14 @@
       </p:sp>
       <p:sp>
         <p:nvSpPr>
-          <p:cNvPr id="38" name="TextBox 37"/>
+          <p:cNvPr id="40" name="TextBox 39"/>
           <p:cNvSpPr txBox="1"/>
           <p:nvPr/>
         </p:nvSpPr>
         <p:spPr>
           <a:xfrm>
-            <a:off x="4736592" y="5358384"/>
-            <a:ext cx="1353312" cy="283464"/>
+            <a:off x="6766560" y="4937760"/>
+            <a:ext cx="1298448" cy="283464"/>
           </a:xfrm>
           <a:prstGeom prst="rect">
             <a:avLst/>
@@ -48069,7 +48151,7 @@
               </a:spcAft>
             </a:pPr>
             <a:r>
-              <a:rPr sz="1700" b="1" i="0">
+              <a:rPr sz="1600" b="1" i="0">
                 <a:solidFill>
                   <a:srgbClr val="082B55"/>
                 </a:solidFill>
@@ -48082,14 +48164,14 @@
       </p:sp>
       <p:sp>
         <p:nvSpPr>
-          <p:cNvPr id="39" name="TextBox 38"/>
+          <p:cNvPr id="41" name="TextBox 40"/>
           <p:cNvSpPr txBox="1"/>
           <p:nvPr/>
         </p:nvSpPr>
         <p:spPr>
           <a:xfrm>
-            <a:off x="6272784" y="5349240"/>
-            <a:ext cx="5084064" cy="292608"/>
+            <a:off x="8147304" y="4919472"/>
+            <a:ext cx="3310128" cy="429768"/>
           </a:xfrm>
           <a:prstGeom prst="rect">
             <a:avLst/>
@@ -48097,7 +48179,7 @@
           <a:noFill/>
         </p:spPr>
         <p:txBody>
-          <a:bodyPr wrap="square" lIns="0" rIns="0" tIns="0" bIns="0" anchor="t">
+          <a:bodyPr wrap="square" lIns="0" rIns="0" tIns="0" bIns="0" anchor="ctr">
             <a:spAutoFit/>
           </a:bodyPr>
           <a:lstStyle/>
@@ -48108,27 +48190,27 @@
               </a:spcAft>
             </a:pPr>
             <a:r>
-              <a:rPr sz="1330" b="0" i="0">
+              <a:rPr sz="1180" b="0" i="0">
                 <a:solidFill>
                   <a:srgbClr val="263746"/>
                 </a:solidFill>
                 <a:latin typeface="Arial"/>
               </a:rPr>
-              <a:t>Comparable correlation, higher F1, and lower separability and FD.</a:t>
-            </a:r>
-          </a:p>
-        </p:txBody>
-      </p:sp>
-      <p:sp>
-        <p:nvSpPr>
-          <p:cNvPr id="40" name="TextBox 39"/>
+              <a:t>Higher F1 with lower separability and FD.</a:t>
+            </a:r>
+          </a:p>
+        </p:txBody>
+      </p:sp>
+      <p:sp>
+        <p:nvSpPr>
+          <p:cNvPr id="42" name="TextBox 41"/>
           <p:cNvSpPr txBox="1"/>
           <p:nvPr/>
         </p:nvSpPr>
         <p:spPr>
           <a:xfrm>
-            <a:off x="4736592" y="5742432"/>
-            <a:ext cx="6620256" cy="228600"/>
+            <a:off x="6766560" y="5458968"/>
+            <a:ext cx="4663440" cy="365760"/>
           </a:xfrm>
           <a:prstGeom prst="rect">
             <a:avLst/>
@@ -48147,7 +48229,7 @@
               </a:spcAft>
             </a:pPr>
             <a:r>
-              <a:rPr sz="1070" b="0" i="0">
+              <a:rPr sz="980" b="0" i="0">
                 <a:solidFill>
                   <a:srgbClr val="59697A"/>
                 </a:solidFill>
@@ -48160,7 +48242,7 @@
       </p:sp>
       <p:sp>
         <p:nvSpPr>
-          <p:cNvPr id="41" name="TextBox 40"/>
+          <p:cNvPr id="43" name="TextBox 42"/>
           <p:cNvSpPr txBox="1"/>
           <p:nvPr/>
         </p:nvSpPr>

--- a/presentation/SLSTP_2026_Generative_Transcriptomics.pptx
+++ b/presentation/SLSTP_2026_Generative_Transcriptomics.pptx
@@ -46836,7 +46836,7 @@
         <p:spPr>
           <a:xfrm>
             <a:off x="475488" y="1901952"/>
-            <a:ext cx="5504688" cy="292608"/>
+            <a:ext cx="6510528" cy="292608"/>
           </a:xfrm>
           <a:prstGeom prst="rect">
             <a:avLst/>
@@ -46882,8 +46882,8 @@
         </p:blipFill>
         <p:spPr>
           <a:xfrm>
-            <a:off x="347472" y="2263491"/>
-            <a:ext cx="5779008" cy="2111560"/>
+            <a:off x="186730" y="2185416"/>
+            <a:ext cx="6832011" cy="2496312"/>
           </a:xfrm>
           <a:prstGeom prst="rect">
             <a:avLst/>
@@ -46898,8 +46898,8 @@
         </p:nvSpPr>
         <p:spPr>
           <a:xfrm>
-            <a:off x="512064" y="4471416"/>
-            <a:ext cx="5449824" cy="256032"/>
+            <a:off x="512064" y="4727448"/>
+            <a:ext cx="6309360" cy="256032"/>
           </a:xfrm>
           <a:prstGeom prst="rect">
             <a:avLst/>
@@ -46937,8 +46937,8 @@
         </p:nvSpPr>
         <p:spPr>
           <a:xfrm>
-            <a:off x="512064" y="4782312"/>
-            <a:ext cx="5449824" cy="310896"/>
+            <a:off x="512064" y="5038344"/>
+            <a:ext cx="6309360" cy="310896"/>
           </a:xfrm>
           <a:prstGeom prst="rect">
             <a:avLst/>
@@ -46976,7 +46976,7 @@
         </p:nvSpPr>
         <p:spPr>
           <a:xfrm>
-            <a:off x="6281928" y="1874519"/>
+            <a:off x="7159752" y="1874519"/>
             <a:ext cx="13716" cy="3950208"/>
           </a:xfrm>
           <a:prstGeom prst="rect">
@@ -47019,8 +47019,8 @@
         </p:nvSpPr>
         <p:spPr>
           <a:xfrm>
-            <a:off x="6537960" y="1984248"/>
-            <a:ext cx="1554480" cy="256032"/>
+            <a:off x="7351775" y="1984248"/>
+            <a:ext cx="1298448" cy="256032"/>
           </a:xfrm>
           <a:prstGeom prst="rect">
             <a:avLst/>
@@ -47039,7 +47039,7 @@
               </a:spcAft>
             </a:pPr>
             <a:r>
-              <a:rPr sz="1050" b="1" i="0">
+              <a:rPr sz="1000" b="1" i="0">
                 <a:solidFill>
                   <a:srgbClr val="59697A"/>
                 </a:solidFill>
@@ -47058,8 +47058,8 @@
         </p:nvSpPr>
         <p:spPr>
           <a:xfrm>
-            <a:off x="8165592" y="1984248"/>
-            <a:ext cx="960120" cy="256032"/>
+            <a:off x="8750808" y="1984248"/>
+            <a:ext cx="777240" cy="256032"/>
           </a:xfrm>
           <a:prstGeom prst="rect">
             <a:avLst/>
@@ -47078,7 +47078,7 @@
               </a:spcAft>
             </a:pPr>
             <a:r>
-              <a:rPr sz="1050" b="1" i="0">
+              <a:rPr sz="1000" b="1" i="0">
                 <a:solidFill>
                   <a:srgbClr val="D96552"/>
                 </a:solidFill>
@@ -47097,8 +47097,8 @@
         </p:nvSpPr>
         <p:spPr>
           <a:xfrm>
-            <a:off x="9262872" y="1984248"/>
-            <a:ext cx="804672" cy="256032"/>
+            <a:off x="9619488" y="1984248"/>
+            <a:ext cx="694944" cy="256032"/>
           </a:xfrm>
           <a:prstGeom prst="rect">
             <a:avLst/>
@@ -47117,7 +47117,7 @@
               </a:spcAft>
             </a:pPr>
             <a:r>
-              <a:rPr sz="1050" b="1" i="0">
+              <a:rPr sz="1000" b="1" i="0">
                 <a:solidFill>
                   <a:srgbClr val="178681"/>
                 </a:solidFill>
@@ -47136,8 +47136,8 @@
         </p:nvSpPr>
         <p:spPr>
           <a:xfrm>
-            <a:off x="10222992" y="1984248"/>
-            <a:ext cx="1234440" cy="256032"/>
+            <a:off x="10451592" y="1984248"/>
+            <a:ext cx="1005840" cy="256032"/>
           </a:xfrm>
           <a:prstGeom prst="rect">
             <a:avLst/>
@@ -47156,7 +47156,7 @@
               </a:spcAft>
             </a:pPr>
             <a:r>
-              <a:rPr sz="1050" b="1" i="0">
+              <a:rPr sz="1000" b="1" i="0">
                 <a:solidFill>
                   <a:srgbClr val="59697A"/>
                 </a:solidFill>
@@ -47175,8 +47175,8 @@
         </p:nvSpPr>
         <p:spPr>
           <a:xfrm>
-            <a:off x="6537960" y="2340864"/>
-            <a:ext cx="4983480" cy="20116"/>
+            <a:off x="7351775" y="2340864"/>
+            <a:ext cx="4187952" cy="20116"/>
           </a:xfrm>
           <a:prstGeom prst="rect">
             <a:avLst/>
@@ -47218,8 +47218,8 @@
         </p:nvSpPr>
         <p:spPr>
           <a:xfrm>
-            <a:off x="6519672" y="2496312"/>
-            <a:ext cx="5020056" cy="457200"/>
+            <a:off x="7333488" y="2496312"/>
+            <a:ext cx="4215384" cy="457200"/>
           </a:xfrm>
           <a:prstGeom prst="rect">
             <a:avLst/>
@@ -47261,8 +47261,8 @@
         </p:nvSpPr>
         <p:spPr>
           <a:xfrm>
-            <a:off x="6601968" y="2560320"/>
-            <a:ext cx="1490472" cy="292608"/>
+            <a:off x="7406640" y="2560320"/>
+            <a:ext cx="1271016" cy="292608"/>
           </a:xfrm>
           <a:prstGeom prst="rect">
             <a:avLst/>
@@ -47281,7 +47281,7 @@
               </a:spcAft>
             </a:pPr>
             <a:r>
-              <a:rPr sz="1120" b="0" i="0">
+              <a:rPr sz="1030" b="0" i="0">
                 <a:solidFill>
                   <a:srgbClr val="263746"/>
                 </a:solidFill>
@@ -47300,8 +47300,8 @@
         </p:nvSpPr>
         <p:spPr>
           <a:xfrm>
-            <a:off x="8165592" y="2560320"/>
-            <a:ext cx="960120" cy="292608"/>
+            <a:off x="8750808" y="2560320"/>
+            <a:ext cx="777240" cy="292608"/>
           </a:xfrm>
           <a:prstGeom prst="rect">
             <a:avLst/>
@@ -47320,7 +47320,7 @@
               </a:spcAft>
             </a:pPr>
             <a:r>
-              <a:rPr sz="1330" b="1" i="0">
+              <a:rPr sz="1260" b="1" i="0">
                 <a:solidFill>
                   <a:srgbClr val="D96552"/>
                 </a:solidFill>
@@ -47339,8 +47339,8 @@
         </p:nvSpPr>
         <p:spPr>
           <a:xfrm>
-            <a:off x="9253728" y="2560320"/>
-            <a:ext cx="804672" cy="292608"/>
+            <a:off x="9619488" y="2560320"/>
+            <a:ext cx="694944" cy="292608"/>
           </a:xfrm>
           <a:prstGeom prst="rect">
             <a:avLst/>
@@ -47359,7 +47359,7 @@
               </a:spcAft>
             </a:pPr>
             <a:r>
-              <a:rPr sz="1330" b="1" i="0">
+              <a:rPr sz="1260" b="1" i="0">
                 <a:solidFill>
                   <a:srgbClr val="178681"/>
                 </a:solidFill>
@@ -47378,8 +47378,8 @@
         </p:nvSpPr>
         <p:spPr>
           <a:xfrm>
-            <a:off x="10222992" y="2560320"/>
-            <a:ext cx="1234440" cy="292608"/>
+            <a:off x="10451592" y="2560320"/>
+            <a:ext cx="1005840" cy="292608"/>
           </a:xfrm>
           <a:prstGeom prst="rect">
             <a:avLst/>
@@ -47398,7 +47398,7 @@
               </a:spcAft>
             </a:pPr>
             <a:r>
-              <a:rPr sz="1070" b="0" i="0">
+              <a:rPr sz="1019" b="0" i="0">
                 <a:solidFill>
                   <a:srgbClr val="59697A"/>
                 </a:solidFill>
@@ -47417,8 +47417,8 @@
         </p:nvSpPr>
         <p:spPr>
           <a:xfrm>
-            <a:off x="6601968" y="3099815"/>
-            <a:ext cx="1490472" cy="292608"/>
+            <a:off x="7406640" y="3099815"/>
+            <a:ext cx="1271016" cy="292608"/>
           </a:xfrm>
           <a:prstGeom prst="rect">
             <a:avLst/>
@@ -47437,7 +47437,7 @@
               </a:spcAft>
             </a:pPr>
             <a:r>
-              <a:rPr sz="1120" b="0" i="0">
+              <a:rPr sz="1030" b="0" i="0">
                 <a:solidFill>
                   <a:srgbClr val="263746"/>
                 </a:solidFill>
@@ -47456,8 +47456,8 @@
         </p:nvSpPr>
         <p:spPr>
           <a:xfrm>
-            <a:off x="8165592" y="3099815"/>
-            <a:ext cx="960120" cy="292608"/>
+            <a:off x="8750808" y="3099815"/>
+            <a:ext cx="777240" cy="292608"/>
           </a:xfrm>
           <a:prstGeom prst="rect">
             <a:avLst/>
@@ -47476,7 +47476,7 @@
               </a:spcAft>
             </a:pPr>
             <a:r>
-              <a:rPr sz="1330" b="1" i="0">
+              <a:rPr sz="1260" b="1" i="0">
                 <a:solidFill>
                   <a:srgbClr val="D96552"/>
                 </a:solidFill>
@@ -47495,8 +47495,8 @@
         </p:nvSpPr>
         <p:spPr>
           <a:xfrm>
-            <a:off x="9253728" y="3099815"/>
-            <a:ext cx="804672" cy="292608"/>
+            <a:off x="9619488" y="3099815"/>
+            <a:ext cx="694944" cy="292608"/>
           </a:xfrm>
           <a:prstGeom prst="rect">
             <a:avLst/>
@@ -47515,7 +47515,7 @@
               </a:spcAft>
             </a:pPr>
             <a:r>
-              <a:rPr sz="1330" b="1" i="0">
+              <a:rPr sz="1260" b="1" i="0">
                 <a:solidFill>
                   <a:srgbClr val="178681"/>
                 </a:solidFill>
@@ -47534,8 +47534,8 @@
         </p:nvSpPr>
         <p:spPr>
           <a:xfrm>
-            <a:off x="10222992" y="3099815"/>
-            <a:ext cx="1234440" cy="292608"/>
+            <a:off x="10451592" y="3099815"/>
+            <a:ext cx="1005840" cy="292608"/>
           </a:xfrm>
           <a:prstGeom prst="rect">
             <a:avLst/>
@@ -47554,7 +47554,7 @@
               </a:spcAft>
             </a:pPr>
             <a:r>
-              <a:rPr sz="1070" b="0" i="0">
+              <a:rPr sz="1019" b="0" i="0">
                 <a:solidFill>
                   <a:srgbClr val="59697A"/>
                 </a:solidFill>
@@ -47573,8 +47573,8 @@
         </p:nvSpPr>
         <p:spPr>
           <a:xfrm>
-            <a:off x="6519672" y="3575303"/>
-            <a:ext cx="5020056" cy="457200"/>
+            <a:off x="7333488" y="3575303"/>
+            <a:ext cx="4215384" cy="457200"/>
           </a:xfrm>
           <a:prstGeom prst="rect">
             <a:avLst/>
@@ -47616,8 +47616,8 @@
         </p:nvSpPr>
         <p:spPr>
           <a:xfrm>
-            <a:off x="6601968" y="3639311"/>
-            <a:ext cx="1490472" cy="292608"/>
+            <a:off x="7406640" y="3639311"/>
+            <a:ext cx="1271016" cy="292608"/>
           </a:xfrm>
           <a:prstGeom prst="rect">
             <a:avLst/>
@@ -47636,13 +47636,13 @@
               </a:spcAft>
             </a:pPr>
             <a:r>
-              <a:rPr sz="1120" b="1" i="0">
+              <a:rPr sz="1030" b="1" i="0">
                 <a:solidFill>
                   <a:srgbClr val="263746"/>
                 </a:solidFill>
                 <a:latin typeface="Arial"/>
               </a:rPr>
-              <a:t>Adversarial accuracy</a:t>
+              <a:t>Adversarial acc.</a:t>
             </a:r>
           </a:p>
         </p:txBody>
@@ -47655,8 +47655,8 @@
         </p:nvSpPr>
         <p:spPr>
           <a:xfrm>
-            <a:off x="8165592" y="3639311"/>
-            <a:ext cx="960120" cy="292608"/>
+            <a:off x="8750808" y="3639311"/>
+            <a:ext cx="777240" cy="292608"/>
           </a:xfrm>
           <a:prstGeom prst="rect">
             <a:avLst/>
@@ -47675,7 +47675,7 @@
               </a:spcAft>
             </a:pPr>
             <a:r>
-              <a:rPr sz="1330" b="1" i="0">
+              <a:rPr sz="1260" b="1" i="0">
                 <a:solidFill>
                   <a:srgbClr val="D96552"/>
                 </a:solidFill>
@@ -47694,8 +47694,8 @@
         </p:nvSpPr>
         <p:spPr>
           <a:xfrm>
-            <a:off x="9253728" y="3639311"/>
-            <a:ext cx="804672" cy="292608"/>
+            <a:off x="9619488" y="3639311"/>
+            <a:ext cx="694944" cy="292608"/>
           </a:xfrm>
           <a:prstGeom prst="rect">
             <a:avLst/>
@@ -47714,7 +47714,7 @@
               </a:spcAft>
             </a:pPr>
             <a:r>
-              <a:rPr sz="1330" b="1" i="0">
+              <a:rPr sz="1260" b="1" i="0">
                 <a:solidFill>
                   <a:srgbClr val="178681"/>
                 </a:solidFill>
@@ -47733,8 +47733,8 @@
         </p:nvSpPr>
         <p:spPr>
           <a:xfrm>
-            <a:off x="10222992" y="3639311"/>
-            <a:ext cx="1234440" cy="292608"/>
+            <a:off x="10451592" y="3639311"/>
+            <a:ext cx="1005840" cy="292608"/>
           </a:xfrm>
           <a:prstGeom prst="rect">
             <a:avLst/>
@@ -47753,13 +47753,13 @@
               </a:spcAft>
             </a:pPr>
             <a:r>
-              <a:rPr sz="1070" b="0" i="0">
+              <a:rPr sz="1019" b="0" i="0">
                 <a:solidFill>
                   <a:srgbClr val="59697A"/>
                 </a:solidFill>
                 <a:latin typeface="Arial"/>
               </a:rPr>
-              <a:t>closer to 0.5</a:t>
+              <a:t>near 0.5</a:t>
             </a:r>
           </a:p>
         </p:txBody>
@@ -47772,8 +47772,8 @@
         </p:nvSpPr>
         <p:spPr>
           <a:xfrm>
-            <a:off x="6601968" y="4178808"/>
-            <a:ext cx="1490472" cy="292608"/>
+            <a:off x="7406640" y="4178808"/>
+            <a:ext cx="1271016" cy="292608"/>
           </a:xfrm>
           <a:prstGeom prst="rect">
             <a:avLst/>
@@ -47792,7 +47792,7 @@
               </a:spcAft>
             </a:pPr>
             <a:r>
-              <a:rPr sz="1120" b="1" i="0">
+              <a:rPr sz="1030" b="1" i="0">
                 <a:solidFill>
                   <a:srgbClr val="263746"/>
                 </a:solidFill>
@@ -47811,8 +47811,8 @@
         </p:nvSpPr>
         <p:spPr>
           <a:xfrm>
-            <a:off x="8165592" y="4178808"/>
-            <a:ext cx="960120" cy="292608"/>
+            <a:off x="8750808" y="4178808"/>
+            <a:ext cx="777240" cy="292608"/>
           </a:xfrm>
           <a:prstGeom prst="rect">
             <a:avLst/>
@@ -47831,7 +47831,7 @@
               </a:spcAft>
             </a:pPr>
             <a:r>
-              <a:rPr sz="1330" b="1" i="0">
+              <a:rPr sz="1260" b="1" i="0">
                 <a:solidFill>
                   <a:srgbClr val="D96552"/>
                 </a:solidFill>
@@ -47850,8 +47850,8 @@
         </p:nvSpPr>
         <p:spPr>
           <a:xfrm>
-            <a:off x="9253728" y="4178808"/>
-            <a:ext cx="804672" cy="292608"/>
+            <a:off x="9619488" y="4178808"/>
+            <a:ext cx="694944" cy="292608"/>
           </a:xfrm>
           <a:prstGeom prst="rect">
             <a:avLst/>
@@ -47870,7 +47870,7 @@
               </a:spcAft>
             </a:pPr>
             <a:r>
-              <a:rPr sz="1330" b="1" i="0">
+              <a:rPr sz="1260" b="1" i="0">
                 <a:solidFill>
                   <a:srgbClr val="178681"/>
                 </a:solidFill>
@@ -47889,8 +47889,8 @@
         </p:nvSpPr>
         <p:spPr>
           <a:xfrm>
-            <a:off x="10222992" y="4178808"/>
-            <a:ext cx="1234440" cy="292608"/>
+            <a:off x="10451592" y="4178808"/>
+            <a:ext cx="1005840" cy="292608"/>
           </a:xfrm>
           <a:prstGeom prst="rect">
             <a:avLst/>
@@ -47909,7 +47909,7 @@
               </a:spcAft>
             </a:pPr>
             <a:r>
-              <a:rPr sz="1070" b="0" i="0">
+              <a:rPr sz="1019" b="0" i="0">
                 <a:solidFill>
                   <a:srgbClr val="59697A"/>
                 </a:solidFill>
@@ -47928,8 +47928,8 @@
         </p:nvSpPr>
         <p:spPr>
           <a:xfrm>
-            <a:off x="502920" y="5212080"/>
-            <a:ext cx="5513832" cy="13716"/>
+            <a:off x="502920" y="5404104"/>
+            <a:ext cx="6428232" cy="13716"/>
           </a:xfrm>
           <a:prstGeom prst="rect">
             <a:avLst/>
@@ -47971,7 +47971,7 @@
         </p:nvSpPr>
         <p:spPr>
           <a:xfrm>
-            <a:off x="502920" y="5376672"/>
+            <a:off x="502920" y="5559552"/>
             <a:ext cx="1600200" cy="219456"/>
           </a:xfrm>
           <a:prstGeom prst="rect">
@@ -48010,7 +48010,7 @@
         </p:nvSpPr>
         <p:spPr>
           <a:xfrm>
-            <a:off x="3108960" y="5358384"/>
+            <a:off x="3931920" y="5541264"/>
             <a:ext cx="2852928" cy="246888"/>
           </a:xfrm>
           <a:prstGeom prst="rect">
@@ -48049,8 +48049,8 @@
         </p:nvSpPr>
         <p:spPr>
           <a:xfrm>
-            <a:off x="502920" y="5678424"/>
-            <a:ext cx="5458968" cy="228600"/>
+            <a:off x="502920" y="5843016"/>
+            <a:ext cx="6281928" cy="228600"/>
           </a:xfrm>
           <a:prstGeom prst="rect">
             <a:avLst/>
@@ -48088,7 +48088,7 @@
         </p:nvSpPr>
         <p:spPr>
           <a:xfrm>
-            <a:off x="6537960" y="4901184"/>
+            <a:off x="7351775" y="4901184"/>
             <a:ext cx="50292" cy="713232"/>
           </a:xfrm>
           <a:prstGeom prst="rect">
@@ -48131,8 +48131,8 @@
         </p:nvSpPr>
         <p:spPr>
           <a:xfrm>
-            <a:off x="6766560" y="4937760"/>
-            <a:ext cx="1298448" cy="283464"/>
+            <a:off x="7580375" y="4937760"/>
+            <a:ext cx="1207008" cy="283464"/>
           </a:xfrm>
           <a:prstGeom prst="rect">
             <a:avLst/>
@@ -48170,8 +48170,8 @@
         </p:nvSpPr>
         <p:spPr>
           <a:xfrm>
-            <a:off x="8147304" y="4919472"/>
-            <a:ext cx="3310128" cy="429768"/>
+            <a:off x="8897112" y="4919472"/>
+            <a:ext cx="2542032" cy="429768"/>
           </a:xfrm>
           <a:prstGeom prst="rect">
             <a:avLst/>
@@ -48190,7 +48190,7 @@
               </a:spcAft>
             </a:pPr>
             <a:r>
-              <a:rPr sz="1180" b="0" i="0">
+              <a:rPr sz="1130" b="0" i="0">
                 <a:solidFill>
                   <a:srgbClr val="263746"/>
                 </a:solidFill>
@@ -48209,8 +48209,8 @@
         </p:nvSpPr>
         <p:spPr>
           <a:xfrm>
-            <a:off x="6766560" y="5458968"/>
-            <a:ext cx="4663440" cy="365760"/>
+            <a:off x="7580375" y="5458968"/>
+            <a:ext cx="3858768" cy="365760"/>
           </a:xfrm>
           <a:prstGeom prst="rect">
             <a:avLst/>
@@ -48229,7 +48229,7 @@
               </a:spcAft>
             </a:pPr>
             <a:r>
-              <a:rPr sz="980" b="0" i="0">
+              <a:rPr sz="950" b="0" i="0">
                 <a:solidFill>
                   <a:srgbClr val="59697A"/>
                 </a:solidFill>

--- a/presentation/SLSTP_2026_Generative_Transcriptomics.pptx
+++ b/presentation/SLSTP_2026_Generative_Transcriptomics.pptx
@@ -1875,7 +1875,7 @@
           <a:p/>
           <a:p>
             <a:r>
-              <a:t>Synthetic data can be used for direct training, mixed training or feature guidance. Each tissue could choose among five arms. The eligibility check used held-out real profiles. Once features were nominated, FLT/GC effects and BH FDR were computed from observed OSDR samples only.</a:t>
+              <a:t>Each arm makes two decisions: which profiles rank the genes and which profiles fit the classifier. In both guided arms, real and synthetic evidence jointly rank genes. Guided real fit then trains only on observed profiles. Guided 5% also uses condition-recentered synthetic profiles, but they contribute only 5% of total classifier weight. This is a weight, not a 5% increase in animal count. Held-out real profiles determine eligibility, and FLT/GC effects and BH FDR are computed from observed OSDR profiles only.</a:t>
             </a:r>
           </a:p>
         </p:txBody>
@@ -2027,7 +2027,7 @@
           <a:p/>
           <a:p>
             <a:r>
-              <a:t>Reinforced genes were selected with and without synthetic guidance. Promoted genes crossed the stable-selection rule only with synthetic guidance. Promoted does not mean biologically novel. All 49 synthetic-informed tissue-gene associations also had BH FDR below 0.05 in real data.</a:t>
+              <a:t>The blue set contains genes selected stably by real-only ranking, and the teal set contains genes selected stably by the eligible synthetic-guided arm. Thirty-four were real-only, 23 were selected by both arms and classified as reinforced, and 26 were selected only with guidance and classified as promoted. Promoted does not mean biologically novel. All 49 synthetic-informed tissue-gene associations passed BH FDR in observed OSDR profiles.</a:t>
             </a:r>
           </a:p>
         </p:txBody>
@@ -49069,7 +49069,7 @@
                 </a:solidFill>
                 <a:latin typeface="Arial"/>
               </a:rPr>
-              <a:t>Five analysis arms tested different uses of synthetic data</a:t>
+              <a:t>Five arms separate gene ranking from classifier fitting</a:t>
             </a:r>
           </a:p>
         </p:txBody>
@@ -49108,7 +49108,7 @@
                 </a:solidFill>
                 <a:latin typeface="Arial"/>
               </a:rPr>
-              <a:t>Held-out real profiles determined which arm, if any, was eligible within each tissue.</a:t>
+              <a:t>Guided arms use synthetic profiles to help choose genes; they do not treat generated profiles as new animals.</a:t>
             </a:r>
           </a:p>
         </p:txBody>
@@ -49121,8 +49121,8 @@
         </p:nvSpPr>
         <p:spPr>
           <a:xfrm>
-            <a:off x="420624" y="1847088"/>
-            <a:ext cx="1078992" cy="210312"/>
+            <a:off x="429768" y="1828800"/>
+            <a:ext cx="603504" cy="201168"/>
           </a:xfrm>
           <a:prstGeom prst="rect">
             <a:avLst/>
@@ -49141,185 +49141,29 @@
               </a:spcAft>
             </a:pPr>
             <a:r>
-              <a:rPr sz="919" b="1" i="0">
+              <a:rPr sz="880" b="1" i="0">
                 <a:solidFill>
                   <a:srgbClr val="59697A"/>
                 </a:solidFill>
                 <a:latin typeface="Arial"/>
               </a:rPr>
-              <a:t>Inputs</a:t>
-            </a:r>
-          </a:p>
-        </p:txBody>
-      </p:sp>
-      <p:sp>
-        <p:nvSpPr>
-          <p:cNvPr id="8" name="TextBox 7"/>
-          <p:cNvSpPr txBox="1"/>
-          <p:nvPr/>
-        </p:nvSpPr>
-        <p:spPr>
-          <a:xfrm>
-            <a:off x="1234440" y="1828800"/>
-            <a:ext cx="1078992" cy="228600"/>
-          </a:xfrm>
-          <a:prstGeom prst="rect">
-            <a:avLst/>
-          </a:prstGeom>
-          <a:noFill/>
-        </p:spPr>
-        <p:txBody>
-          <a:bodyPr wrap="square" lIns="0" rIns="0" tIns="0" bIns="0" anchor="t">
-            <a:spAutoFit/>
-          </a:bodyPr>
-          <a:lstStyle/>
-          <a:p>
-            <a:pPr algn="l">
-              <a:spcAft>
-                <a:spcPts val="0"/>
-              </a:spcAft>
-            </a:pPr>
-            <a:r>
-              <a:rPr sz="1150" b="1" i="0">
-                <a:solidFill>
-                  <a:srgbClr val="2D6496"/>
-                </a:solidFill>
-                <a:latin typeface="Arial"/>
-              </a:rPr>
-              <a:t>Real OSDR</a:t>
-            </a:r>
-          </a:p>
-        </p:txBody>
-      </p:sp>
-      <p:sp>
-        <p:nvSpPr>
-          <p:cNvPr id="9" name="TextBox 8"/>
-          <p:cNvSpPr txBox="1"/>
-          <p:nvPr/>
-        </p:nvSpPr>
-        <p:spPr>
-          <a:xfrm>
-            <a:off x="2176272" y="1828800"/>
-            <a:ext cx="1280160" cy="228600"/>
-          </a:xfrm>
-          <a:prstGeom prst="rect">
-            <a:avLst/>
-          </a:prstGeom>
-          <a:noFill/>
-        </p:spPr>
-        <p:txBody>
-          <a:bodyPr wrap="square" lIns="0" rIns="0" tIns="0" bIns="0" anchor="t">
-            <a:spAutoFit/>
-          </a:bodyPr>
-          <a:lstStyle/>
-          <a:p>
-            <a:pPr algn="l">
-              <a:spcAft>
-                <a:spcPts val="0"/>
-              </a:spcAft>
-            </a:pPr>
-            <a:r>
-              <a:rPr sz="1040" b="0" i="0">
-                <a:solidFill>
-                  <a:srgbClr val="59697A"/>
-                </a:solidFill>
-                <a:latin typeface="Arial"/>
-              </a:rPr>
-              <a:t>observed profiles</a:t>
-            </a:r>
-          </a:p>
-        </p:txBody>
-      </p:sp>
-      <p:sp>
-        <p:nvSpPr>
-          <p:cNvPr id="10" name="TextBox 9"/>
-          <p:cNvSpPr txBox="1"/>
-          <p:nvPr/>
-        </p:nvSpPr>
-        <p:spPr>
-          <a:xfrm>
-            <a:off x="3749039" y="1828800"/>
-            <a:ext cx="621792" cy="228600"/>
-          </a:xfrm>
-          <a:prstGeom prst="rect">
-            <a:avLst/>
-          </a:prstGeom>
-          <a:noFill/>
-        </p:spPr>
-        <p:txBody>
-          <a:bodyPr wrap="square" lIns="0" rIns="0" tIns="0" bIns="0" anchor="t">
-            <a:spAutoFit/>
-          </a:bodyPr>
-          <a:lstStyle/>
-          <a:p>
-            <a:pPr algn="l">
-              <a:spcAft>
-                <a:spcPts val="0"/>
-              </a:spcAft>
-            </a:pPr>
-            <a:r>
-              <a:rPr sz="1150" b="1" i="0">
-                <a:solidFill>
-                  <a:srgbClr val="D96552"/>
-                </a:solidFill>
-                <a:latin typeface="Arial"/>
-              </a:rPr>
-              <a:t>DDIM</a:t>
-            </a:r>
-          </a:p>
-        </p:txBody>
-      </p:sp>
-      <p:sp>
-        <p:nvSpPr>
-          <p:cNvPr id="11" name="TextBox 10"/>
-          <p:cNvSpPr txBox="1"/>
-          <p:nvPr/>
-        </p:nvSpPr>
-        <p:spPr>
-          <a:xfrm>
-            <a:off x="4370832" y="1828800"/>
-            <a:ext cx="1874519" cy="228600"/>
-          </a:xfrm>
-          <a:prstGeom prst="rect">
-            <a:avLst/>
-          </a:prstGeom>
-          <a:noFill/>
-        </p:spPr>
-        <p:txBody>
-          <a:bodyPr wrap="square" lIns="0" rIns="0" tIns="0" bIns="0" anchor="t">
-            <a:spAutoFit/>
-          </a:bodyPr>
-          <a:lstStyle/>
-          <a:p>
-            <a:pPr algn="l">
-              <a:spcAft>
-                <a:spcPts val="0"/>
-              </a:spcAft>
-            </a:pPr>
-            <a:r>
-              <a:rPr sz="1040" b="0" i="0">
-                <a:solidFill>
-                  <a:srgbClr val="59697A"/>
-                </a:solidFill>
-                <a:latin typeface="Arial"/>
-              </a:rPr>
-              <a:t>matched synthetic profiles</a:t>
-            </a:r>
-          </a:p>
-        </p:txBody>
-      </p:sp>
-      <p:sp>
-        <p:nvSpPr>
-          <p:cNvPr id="12" name="Rectangle 11"/>
+              <a:t>INPUTS</a:t>
+            </a:r>
+          </a:p>
+        </p:txBody>
+      </p:sp>
+      <p:sp>
+        <p:nvSpPr>
+          <p:cNvPr id="8" name="Oval 7"/>
           <p:cNvSpPr/>
           <p:nvPr/>
         </p:nvSpPr>
         <p:spPr>
           <a:xfrm>
-            <a:off x="1481328" y="2240280"/>
-            <a:ext cx="1938528" cy="32004"/>
-          </a:xfrm>
-          <a:prstGeom prst="rect">
+            <a:off x="1097280" y="1810512"/>
+            <a:ext cx="219456" cy="219456"/>
+          </a:xfrm>
+          <a:prstGeom prst="ellipse">
             <a:avLst/>
           </a:prstGeom>
           <a:solidFill>
@@ -49353,14 +49197,14 @@
       </p:sp>
       <p:sp>
         <p:nvSpPr>
-          <p:cNvPr id="13" name="TextBox 12"/>
+          <p:cNvPr id="9" name="TextBox 8"/>
           <p:cNvSpPr txBox="1"/>
           <p:nvPr/>
         </p:nvSpPr>
         <p:spPr>
           <a:xfrm>
-            <a:off x="1517904" y="2331720"/>
-            <a:ext cx="1865376" cy="384048"/>
+            <a:off x="1097280" y="1815084"/>
+            <a:ext cx="219456" cy="210311"/>
           </a:xfrm>
           <a:prstGeom prst="rect">
             <a:avLst/>
@@ -49379,29 +49223,68 @@
               </a:spcAft>
             </a:pPr>
             <a:r>
-              <a:rPr sz="1160" b="1" i="0">
-                <a:solidFill>
-                  <a:srgbClr val="082B55"/>
-                </a:solidFill>
-                <a:latin typeface="Arial"/>
-              </a:rPr>
-              <a:t>Real only</a:t>
-            </a:r>
-          </a:p>
-        </p:txBody>
-      </p:sp>
-      <p:sp>
-        <p:nvSpPr>
-          <p:cNvPr id="14" name="Rectangle 13"/>
+              <a:rPr sz="819" b="1" i="0">
+                <a:solidFill>
+                  <a:srgbClr val="FFFFFF"/>
+                </a:solidFill>
+                <a:latin typeface="Arial"/>
+              </a:rPr>
+              <a:t>R</a:t>
+            </a:r>
+          </a:p>
+        </p:txBody>
+      </p:sp>
+      <p:sp>
+        <p:nvSpPr>
+          <p:cNvPr id="10" name="TextBox 9"/>
+          <p:cNvSpPr txBox="1"/>
+          <p:nvPr/>
+        </p:nvSpPr>
+        <p:spPr>
+          <a:xfrm>
+            <a:off x="1389888" y="1810512"/>
+            <a:ext cx="1078992" cy="219456"/>
+          </a:xfrm>
+          <a:prstGeom prst="rect">
+            <a:avLst/>
+          </a:prstGeom>
+          <a:noFill/>
+        </p:spPr>
+        <p:txBody>
+          <a:bodyPr wrap="square" lIns="0" rIns="0" tIns="0" bIns="0" anchor="t">
+            <a:spAutoFit/>
+          </a:bodyPr>
+          <a:lstStyle/>
+          <a:p>
+            <a:pPr algn="l">
+              <a:spcAft>
+                <a:spcPts val="0"/>
+              </a:spcAft>
+            </a:pPr>
+            <a:r>
+              <a:rPr sz="1080" b="1" i="0">
+                <a:solidFill>
+                  <a:srgbClr val="2D6496"/>
+                </a:solidFill>
+                <a:latin typeface="Arial"/>
+              </a:rPr>
+              <a:t>real OSDR</a:t>
+            </a:r>
+          </a:p>
+        </p:txBody>
+      </p:sp>
+      <p:sp>
+        <p:nvSpPr>
+          <p:cNvPr id="11" name="Oval 10"/>
           <p:cNvSpPr/>
           <p:nvPr/>
         </p:nvSpPr>
         <p:spPr>
           <a:xfrm>
-            <a:off x="3511296" y="2240280"/>
-            <a:ext cx="1938528" cy="32004"/>
-          </a:xfrm>
-          <a:prstGeom prst="rect">
+            <a:off x="2660904" y="1810512"/>
+            <a:ext cx="219456" cy="219456"/>
+          </a:xfrm>
+          <a:prstGeom prst="ellipse">
             <a:avLst/>
           </a:prstGeom>
           <a:solidFill>
@@ -49435,14 +49318,14 @@
       </p:sp>
       <p:sp>
         <p:nvSpPr>
-          <p:cNvPr id="15" name="TextBox 14"/>
+          <p:cNvPr id="12" name="TextBox 11"/>
           <p:cNvSpPr txBox="1"/>
           <p:nvPr/>
         </p:nvSpPr>
         <p:spPr>
           <a:xfrm>
-            <a:off x="3547872" y="2331720"/>
-            <a:ext cx="1865376" cy="384048"/>
+            <a:off x="2660904" y="1815084"/>
+            <a:ext cx="219456" cy="210311"/>
           </a:xfrm>
           <a:prstGeom prst="rect">
             <a:avLst/>
@@ -49461,9 +49344,977 @@
               </a:spcAft>
             </a:pPr>
             <a:r>
-              <a:rPr sz="1160" b="1" i="0">
-                <a:solidFill>
-                  <a:srgbClr val="082B55"/>
+              <a:rPr sz="819" b="1" i="0">
+                <a:solidFill>
+                  <a:srgbClr val="FFFFFF"/>
+                </a:solidFill>
+                <a:latin typeface="Arial"/>
+              </a:rPr>
+              <a:t>S</a:t>
+            </a:r>
+          </a:p>
+        </p:txBody>
+      </p:sp>
+      <p:sp>
+        <p:nvSpPr>
+          <p:cNvPr id="13" name="TextBox 12"/>
+          <p:cNvSpPr txBox="1"/>
+          <p:nvPr/>
+        </p:nvSpPr>
+        <p:spPr>
+          <a:xfrm>
+            <a:off x="2953512" y="1810512"/>
+            <a:ext cx="1298448" cy="219456"/>
+          </a:xfrm>
+          <a:prstGeom prst="rect">
+            <a:avLst/>
+          </a:prstGeom>
+          <a:noFill/>
+        </p:spPr>
+        <p:txBody>
+          <a:bodyPr wrap="square" lIns="0" rIns="0" tIns="0" bIns="0" anchor="t">
+            <a:spAutoFit/>
+          </a:bodyPr>
+          <a:lstStyle/>
+          <a:p>
+            <a:pPr algn="l">
+              <a:spcAft>
+                <a:spcPts val="0"/>
+              </a:spcAft>
+            </a:pPr>
+            <a:r>
+              <a:rPr sz="1080" b="1" i="0">
+                <a:solidFill>
+                  <a:srgbClr val="D96552"/>
+                </a:solidFill>
+                <a:latin typeface="Arial"/>
+              </a:rPr>
+              <a:t>matched DDIM</a:t>
+            </a:r>
+          </a:p>
+        </p:txBody>
+      </p:sp>
+      <p:sp>
+        <p:nvSpPr>
+          <p:cNvPr id="14" name="TextBox 13"/>
+          <p:cNvSpPr txBox="1"/>
+          <p:nvPr/>
+        </p:nvSpPr>
+        <p:spPr>
+          <a:xfrm>
+            <a:off x="5577840" y="1819656"/>
+            <a:ext cx="640080" cy="201168"/>
+          </a:xfrm>
+          <a:prstGeom prst="rect">
+            <a:avLst/>
+          </a:prstGeom>
+          <a:noFill/>
+        </p:spPr>
+        <p:txBody>
+          <a:bodyPr wrap="square" lIns="0" rIns="0" tIns="0" bIns="0" anchor="t">
+            <a:spAutoFit/>
+          </a:bodyPr>
+          <a:lstStyle/>
+          <a:p>
+            <a:pPr algn="l">
+              <a:spcAft>
+                <a:spcPts val="0"/>
+              </a:spcAft>
+            </a:pPr>
+            <a:r>
+              <a:rPr sz="880" b="1" i="0">
+                <a:solidFill>
+                  <a:srgbClr val="178681"/>
+                </a:solidFill>
+                <a:latin typeface="Arial"/>
+              </a:rPr>
+              <a:t>GUIDED</a:t>
+            </a:r>
+          </a:p>
+        </p:txBody>
+      </p:sp>
+      <p:sp>
+        <p:nvSpPr>
+          <p:cNvPr id="15" name="TextBox 14"/>
+          <p:cNvSpPr txBox="1"/>
+          <p:nvPr/>
+        </p:nvSpPr>
+        <p:spPr>
+          <a:xfrm>
+            <a:off x="6263640" y="1801368"/>
+            <a:ext cx="1874519" cy="228600"/>
+          </a:xfrm>
+          <a:prstGeom prst="rect">
+            <a:avLst/>
+          </a:prstGeom>
+          <a:noFill/>
+        </p:spPr>
+        <p:txBody>
+          <a:bodyPr wrap="square" lIns="0" rIns="0" tIns="0" bIns="0" anchor="t">
+            <a:spAutoFit/>
+          </a:bodyPr>
+          <a:lstStyle/>
+          <a:p>
+            <a:pPr algn="l">
+              <a:spcAft>
+                <a:spcPts val="0"/>
+              </a:spcAft>
+            </a:pPr>
+            <a:r>
+              <a:rPr sz="1050" b="0" i="0">
+                <a:solidFill>
+                  <a:srgbClr val="263746"/>
+                </a:solidFill>
+                <a:latin typeface="Arial"/>
+              </a:rPr>
+              <a:t>R + S help rank genes</a:t>
+            </a:r>
+          </a:p>
+        </p:txBody>
+      </p:sp>
+      <p:sp>
+        <p:nvSpPr>
+          <p:cNvPr id="16" name="TextBox 15"/>
+          <p:cNvSpPr txBox="1"/>
+          <p:nvPr/>
+        </p:nvSpPr>
+        <p:spPr>
+          <a:xfrm>
+            <a:off x="8604504" y="1819656"/>
+            <a:ext cx="347472" cy="201168"/>
+          </a:xfrm>
+          <a:prstGeom prst="rect">
+            <a:avLst/>
+          </a:prstGeom>
+          <a:noFill/>
+        </p:spPr>
+        <p:txBody>
+          <a:bodyPr wrap="square" lIns="0" rIns="0" tIns="0" bIns="0" anchor="t">
+            <a:spAutoFit/>
+          </a:bodyPr>
+          <a:lstStyle/>
+          <a:p>
+            <a:pPr algn="l">
+              <a:spcAft>
+                <a:spcPts val="0"/>
+              </a:spcAft>
+            </a:pPr>
+            <a:r>
+              <a:rPr sz="880" b="1" i="0">
+                <a:solidFill>
+                  <a:srgbClr val="D37B00"/>
+                </a:solidFill>
+                <a:latin typeface="Arial"/>
+              </a:rPr>
+              <a:t>5%</a:t>
+            </a:r>
+          </a:p>
+        </p:txBody>
+      </p:sp>
+      <p:sp>
+        <p:nvSpPr>
+          <p:cNvPr id="17" name="TextBox 16"/>
+          <p:cNvSpPr txBox="1"/>
+          <p:nvPr/>
+        </p:nvSpPr>
+        <p:spPr>
+          <a:xfrm>
+            <a:off x="8997696" y="1801368"/>
+            <a:ext cx="2542032" cy="228600"/>
+          </a:xfrm>
+          <a:prstGeom prst="rect">
+            <a:avLst/>
+          </a:prstGeom>
+          <a:noFill/>
+        </p:spPr>
+        <p:txBody>
+          <a:bodyPr wrap="square" lIns="0" rIns="0" tIns="0" bIns="0" anchor="t">
+            <a:spAutoFit/>
+          </a:bodyPr>
+          <a:lstStyle/>
+          <a:p>
+            <a:pPr algn="l">
+              <a:spcAft>
+                <a:spcPts val="0"/>
+              </a:spcAft>
+            </a:pPr>
+            <a:r>
+              <a:rPr sz="1050" b="0" i="0">
+                <a:solidFill>
+                  <a:srgbClr val="263746"/>
+                </a:solidFill>
+                <a:latin typeface="Arial"/>
+              </a:rPr>
+              <a:t>S carries 5% of total fit weight</a:t>
+            </a:r>
+          </a:p>
+        </p:txBody>
+      </p:sp>
+      <p:sp>
+        <p:nvSpPr>
+          <p:cNvPr id="18" name="TextBox 17"/>
+          <p:cNvSpPr txBox="1"/>
+          <p:nvPr/>
+        </p:nvSpPr>
+        <p:spPr>
+          <a:xfrm>
+            <a:off x="603504" y="2176272"/>
+            <a:ext cx="1993392" cy="201168"/>
+          </a:xfrm>
+          <a:prstGeom prst="rect">
+            <a:avLst/>
+          </a:prstGeom>
+          <a:noFill/>
+        </p:spPr>
+        <p:txBody>
+          <a:bodyPr wrap="square" lIns="0" rIns="0" tIns="0" bIns="0" anchor="t">
+            <a:spAutoFit/>
+          </a:bodyPr>
+          <a:lstStyle/>
+          <a:p>
+            <a:pPr algn="l">
+              <a:spcAft>
+                <a:spcPts val="0"/>
+              </a:spcAft>
+            </a:pPr>
+            <a:r>
+              <a:rPr sz="900" b="1" i="0">
+                <a:solidFill>
+                  <a:srgbClr val="59697A"/>
+                </a:solidFill>
+                <a:latin typeface="Arial"/>
+              </a:rPr>
+              <a:t>ANALYSIS ARM</a:t>
+            </a:r>
+          </a:p>
+        </p:txBody>
+      </p:sp>
+      <p:sp>
+        <p:nvSpPr>
+          <p:cNvPr id="19" name="TextBox 18"/>
+          <p:cNvSpPr txBox="1"/>
+          <p:nvPr/>
+        </p:nvSpPr>
+        <p:spPr>
+          <a:xfrm>
+            <a:off x="2807208" y="2176272"/>
+            <a:ext cx="2651760" cy="201168"/>
+          </a:xfrm>
+          <a:prstGeom prst="rect">
+            <a:avLst/>
+          </a:prstGeom>
+          <a:noFill/>
+        </p:spPr>
+        <p:txBody>
+          <a:bodyPr wrap="square" lIns="0" rIns="0" tIns="0" bIns="0" anchor="t">
+            <a:spAutoFit/>
+          </a:bodyPr>
+          <a:lstStyle/>
+          <a:p>
+            <a:pPr algn="l">
+              <a:spcAft>
+                <a:spcPts val="0"/>
+              </a:spcAft>
+            </a:pPr>
+            <a:r>
+              <a:rPr sz="900" b="1" i="0">
+                <a:solidFill>
+                  <a:srgbClr val="59697A"/>
+                </a:solidFill>
+                <a:latin typeface="Arial"/>
+              </a:rPr>
+              <a:t>GENE RANKING</a:t>
+            </a:r>
+          </a:p>
+        </p:txBody>
+      </p:sp>
+      <p:sp>
+        <p:nvSpPr>
+          <p:cNvPr id="20" name="TextBox 19"/>
+          <p:cNvSpPr txBox="1"/>
+          <p:nvPr/>
+        </p:nvSpPr>
+        <p:spPr>
+          <a:xfrm>
+            <a:off x="5879592" y="2176272"/>
+            <a:ext cx="2697480" cy="201168"/>
+          </a:xfrm>
+          <a:prstGeom prst="rect">
+            <a:avLst/>
+          </a:prstGeom>
+          <a:noFill/>
+        </p:spPr>
+        <p:txBody>
+          <a:bodyPr wrap="square" lIns="0" rIns="0" tIns="0" bIns="0" anchor="t">
+            <a:spAutoFit/>
+          </a:bodyPr>
+          <a:lstStyle/>
+          <a:p>
+            <a:pPr algn="l">
+              <a:spcAft>
+                <a:spcPts val="0"/>
+              </a:spcAft>
+            </a:pPr>
+            <a:r>
+              <a:rPr sz="900" b="1" i="0">
+                <a:solidFill>
+                  <a:srgbClr val="59697A"/>
+                </a:solidFill>
+                <a:latin typeface="Arial"/>
+              </a:rPr>
+              <a:t>CLASSIFIER FIT</a:t>
+            </a:r>
+          </a:p>
+        </p:txBody>
+      </p:sp>
+      <p:sp>
+        <p:nvSpPr>
+          <p:cNvPr id="21" name="TextBox 20"/>
+          <p:cNvSpPr txBox="1"/>
+          <p:nvPr/>
+        </p:nvSpPr>
+        <p:spPr>
+          <a:xfrm>
+            <a:off x="8979408" y="2176272"/>
+            <a:ext cx="2487168" cy="201168"/>
+          </a:xfrm>
+          <a:prstGeom prst="rect">
+            <a:avLst/>
+          </a:prstGeom>
+          <a:noFill/>
+        </p:spPr>
+        <p:txBody>
+          <a:bodyPr wrap="square" lIns="0" rIns="0" tIns="0" bIns="0" anchor="t">
+            <a:spAutoFit/>
+          </a:bodyPr>
+          <a:lstStyle/>
+          <a:p>
+            <a:pPr algn="l">
+              <a:spcAft>
+                <a:spcPts val="0"/>
+              </a:spcAft>
+            </a:pPr>
+            <a:r>
+              <a:rPr sz="900" b="1" i="0">
+                <a:solidFill>
+                  <a:srgbClr val="59697A"/>
+                </a:solidFill>
+                <a:latin typeface="Arial"/>
+              </a:rPr>
+              <a:t>WHAT IT TESTS</a:t>
+            </a:r>
+          </a:p>
+        </p:txBody>
+      </p:sp>
+      <p:sp>
+        <p:nvSpPr>
+          <p:cNvPr id="22" name="Rectangle 21"/>
+          <p:cNvSpPr/>
+          <p:nvPr/>
+        </p:nvSpPr>
+        <p:spPr>
+          <a:xfrm>
+            <a:off x="429768" y="2414016"/>
+            <a:ext cx="11137392" cy="20116"/>
+          </a:xfrm>
+          <a:prstGeom prst="rect">
+            <a:avLst/>
+          </a:prstGeom>
+          <a:solidFill>
+            <a:srgbClr val="082B55"/>
+          </a:solidFill>
+          <a:ln>
+            <a:noFill/>
+          </a:ln>
+        </p:spPr>
+        <p:style>
+          <a:lnRef idx="1">
+            <a:schemeClr val="accent1"/>
+          </a:lnRef>
+          <a:fillRef idx="3">
+            <a:schemeClr val="accent1"/>
+          </a:fillRef>
+          <a:effectRef idx="2">
+            <a:schemeClr val="accent1"/>
+          </a:effectRef>
+          <a:fontRef idx="minor">
+            <a:schemeClr val="lt1"/>
+          </a:fontRef>
+        </p:style>
+        <p:txBody>
+          <a:bodyPr rtlCol="0" anchor="ctr"/>
+          <a:lstStyle/>
+          <a:p>
+            <a:pPr algn="ctr"/>
+          </a:p>
+        </p:txBody>
+      </p:sp>
+      <p:sp>
+        <p:nvSpPr>
+          <p:cNvPr id="23" name="Rectangle 22"/>
+          <p:cNvSpPr/>
+          <p:nvPr/>
+        </p:nvSpPr>
+        <p:spPr>
+          <a:xfrm>
+            <a:off x="429768" y="2496312"/>
+            <a:ext cx="11137392" cy="457200"/>
+          </a:xfrm>
+          <a:prstGeom prst="rect">
+            <a:avLst/>
+          </a:prstGeom>
+          <a:solidFill>
+            <a:srgbClr val="F4F6F7"/>
+          </a:solidFill>
+          <a:ln>
+            <a:noFill/>
+          </a:ln>
+        </p:spPr>
+        <p:style>
+          <a:lnRef idx="1">
+            <a:schemeClr val="accent1"/>
+          </a:lnRef>
+          <a:fillRef idx="3">
+            <a:schemeClr val="accent1"/>
+          </a:fillRef>
+          <a:effectRef idx="2">
+            <a:schemeClr val="accent1"/>
+          </a:effectRef>
+          <a:fontRef idx="minor">
+            <a:schemeClr val="lt1"/>
+          </a:fontRef>
+        </p:style>
+        <p:txBody>
+          <a:bodyPr rtlCol="0" anchor="ctr"/>
+          <a:lstStyle/>
+          <a:p>
+            <a:pPr algn="ctr"/>
+          </a:p>
+        </p:txBody>
+      </p:sp>
+      <p:sp>
+        <p:nvSpPr>
+          <p:cNvPr id="24" name="Rectangle 23"/>
+          <p:cNvSpPr/>
+          <p:nvPr/>
+        </p:nvSpPr>
+        <p:spPr>
+          <a:xfrm>
+            <a:off x="429768" y="2496312"/>
+            <a:ext cx="50292" cy="457200"/>
+          </a:xfrm>
+          <a:prstGeom prst="rect">
+            <a:avLst/>
+          </a:prstGeom>
+          <a:solidFill>
+            <a:srgbClr val="2D6496"/>
+          </a:solidFill>
+          <a:ln>
+            <a:noFill/>
+          </a:ln>
+        </p:spPr>
+        <p:style>
+          <a:lnRef idx="1">
+            <a:schemeClr val="accent1"/>
+          </a:lnRef>
+          <a:fillRef idx="3">
+            <a:schemeClr val="accent1"/>
+          </a:fillRef>
+          <a:effectRef idx="2">
+            <a:schemeClr val="accent1"/>
+          </a:effectRef>
+          <a:fontRef idx="minor">
+            <a:schemeClr val="lt1"/>
+          </a:fontRef>
+        </p:style>
+        <p:txBody>
+          <a:bodyPr rtlCol="0" anchor="ctr"/>
+          <a:lstStyle/>
+          <a:p>
+            <a:pPr algn="ctr"/>
+          </a:p>
+        </p:txBody>
+      </p:sp>
+      <p:sp>
+        <p:nvSpPr>
+          <p:cNvPr id="25" name="TextBox 24"/>
+          <p:cNvSpPr txBox="1"/>
+          <p:nvPr/>
+        </p:nvSpPr>
+        <p:spPr>
+          <a:xfrm>
+            <a:off x="612648" y="2569464"/>
+            <a:ext cx="1984248" cy="301752"/>
+          </a:xfrm>
+          <a:prstGeom prst="rect">
+            <a:avLst/>
+          </a:prstGeom>
+          <a:noFill/>
+        </p:spPr>
+        <p:txBody>
+          <a:bodyPr wrap="square" lIns="0" rIns="0" tIns="0" bIns="0" anchor="ctr">
+            <a:spAutoFit/>
+          </a:bodyPr>
+          <a:lstStyle/>
+          <a:p>
+            <a:pPr algn="l">
+              <a:spcAft>
+                <a:spcPts val="0"/>
+              </a:spcAft>
+            </a:pPr>
+            <a:r>
+              <a:rPr sz="1120" b="1" i="0">
+                <a:solidFill>
+                  <a:srgbClr val="2D6496"/>
+                </a:solidFill>
+                <a:latin typeface="Arial"/>
+              </a:rPr>
+              <a:t>Real only</a:t>
+            </a:r>
+          </a:p>
+        </p:txBody>
+      </p:sp>
+      <p:sp>
+        <p:nvSpPr>
+          <p:cNvPr id="26" name="Oval 25"/>
+          <p:cNvSpPr/>
+          <p:nvPr/>
+        </p:nvSpPr>
+        <p:spPr>
+          <a:xfrm>
+            <a:off x="2816352" y="2615184"/>
+            <a:ext cx="219456" cy="219456"/>
+          </a:xfrm>
+          <a:prstGeom prst="ellipse">
+            <a:avLst/>
+          </a:prstGeom>
+          <a:solidFill>
+            <a:srgbClr val="2D6496"/>
+          </a:solidFill>
+          <a:ln>
+            <a:noFill/>
+          </a:ln>
+        </p:spPr>
+        <p:style>
+          <a:lnRef idx="1">
+            <a:schemeClr val="accent1"/>
+          </a:lnRef>
+          <a:fillRef idx="3">
+            <a:schemeClr val="accent1"/>
+          </a:fillRef>
+          <a:effectRef idx="2">
+            <a:schemeClr val="accent1"/>
+          </a:effectRef>
+          <a:fontRef idx="minor">
+            <a:schemeClr val="lt1"/>
+          </a:fontRef>
+        </p:style>
+        <p:txBody>
+          <a:bodyPr rtlCol="0" anchor="ctr"/>
+          <a:lstStyle/>
+          <a:p>
+            <a:pPr algn="ctr"/>
+          </a:p>
+        </p:txBody>
+      </p:sp>
+      <p:sp>
+        <p:nvSpPr>
+          <p:cNvPr id="27" name="TextBox 26"/>
+          <p:cNvSpPr txBox="1"/>
+          <p:nvPr/>
+        </p:nvSpPr>
+        <p:spPr>
+          <a:xfrm>
+            <a:off x="2816352" y="2619756"/>
+            <a:ext cx="219456" cy="210311"/>
+          </a:xfrm>
+          <a:prstGeom prst="rect">
+            <a:avLst/>
+          </a:prstGeom>
+          <a:noFill/>
+        </p:spPr>
+        <p:txBody>
+          <a:bodyPr wrap="square" lIns="0" rIns="0" tIns="0" bIns="0" anchor="ctr">
+            <a:spAutoFit/>
+          </a:bodyPr>
+          <a:lstStyle/>
+          <a:p>
+            <a:pPr algn="ctr">
+              <a:spcAft>
+                <a:spcPts val="0"/>
+              </a:spcAft>
+            </a:pPr>
+            <a:r>
+              <a:rPr sz="819" b="1" i="0">
+                <a:solidFill>
+                  <a:srgbClr val="FFFFFF"/>
+                </a:solidFill>
+                <a:latin typeface="Arial"/>
+              </a:rPr>
+              <a:t>R</a:t>
+            </a:r>
+          </a:p>
+        </p:txBody>
+      </p:sp>
+      <p:sp>
+        <p:nvSpPr>
+          <p:cNvPr id="28" name="Right Arrow 27"/>
+          <p:cNvSpPr/>
+          <p:nvPr/>
+        </p:nvSpPr>
+        <p:spPr>
+          <a:xfrm>
+            <a:off x="3127248" y="2651760"/>
+            <a:ext cx="237744" cy="128016"/>
+          </a:xfrm>
+          <a:prstGeom prst="rightArrow">
+            <a:avLst/>
+          </a:prstGeom>
+          <a:solidFill>
+            <a:srgbClr val="8A969E"/>
+          </a:solidFill>
+          <a:ln>
+            <a:noFill/>
+          </a:ln>
+        </p:spPr>
+        <p:style>
+          <a:lnRef idx="1">
+            <a:schemeClr val="accent1"/>
+          </a:lnRef>
+          <a:fillRef idx="3">
+            <a:schemeClr val="accent1"/>
+          </a:fillRef>
+          <a:effectRef idx="2">
+            <a:schemeClr val="accent1"/>
+          </a:effectRef>
+          <a:fontRef idx="minor">
+            <a:schemeClr val="lt1"/>
+          </a:fontRef>
+        </p:style>
+        <p:txBody>
+          <a:bodyPr rtlCol="0" anchor="ctr"/>
+          <a:lstStyle/>
+          <a:p>
+            <a:pPr algn="ctr"/>
+          </a:p>
+        </p:txBody>
+      </p:sp>
+      <p:sp>
+        <p:nvSpPr>
+          <p:cNvPr id="29" name="TextBox 28"/>
+          <p:cNvSpPr txBox="1"/>
+          <p:nvPr/>
+        </p:nvSpPr>
+        <p:spPr>
+          <a:xfrm>
+            <a:off x="3465576" y="2569464"/>
+            <a:ext cx="1627632" cy="301752"/>
+          </a:xfrm>
+          <a:prstGeom prst="rect">
+            <a:avLst/>
+          </a:prstGeom>
+          <a:noFill/>
+        </p:spPr>
+        <p:txBody>
+          <a:bodyPr wrap="square" lIns="0" rIns="0" tIns="0" bIns="0" anchor="ctr">
+            <a:spAutoFit/>
+          </a:bodyPr>
+          <a:lstStyle/>
+          <a:p>
+            <a:pPr algn="l">
+              <a:spcAft>
+                <a:spcPts val="0"/>
+              </a:spcAft>
+            </a:pPr>
+            <a:r>
+              <a:rPr sz="1040" b="1" i="0">
+                <a:solidFill>
+                  <a:srgbClr val="263746"/>
+                </a:solidFill>
+                <a:latin typeface="Arial"/>
+              </a:rPr>
+              <a:t>Rank from real</a:t>
+            </a:r>
+          </a:p>
+        </p:txBody>
+      </p:sp>
+      <p:sp>
+        <p:nvSpPr>
+          <p:cNvPr id="30" name="Oval 29"/>
+          <p:cNvSpPr/>
+          <p:nvPr/>
+        </p:nvSpPr>
+        <p:spPr>
+          <a:xfrm>
+            <a:off x="5897880" y="2615184"/>
+            <a:ext cx="219456" cy="219456"/>
+          </a:xfrm>
+          <a:prstGeom prst="ellipse">
+            <a:avLst/>
+          </a:prstGeom>
+          <a:solidFill>
+            <a:srgbClr val="2D6496"/>
+          </a:solidFill>
+          <a:ln>
+            <a:noFill/>
+          </a:ln>
+        </p:spPr>
+        <p:style>
+          <a:lnRef idx="1">
+            <a:schemeClr val="accent1"/>
+          </a:lnRef>
+          <a:fillRef idx="3">
+            <a:schemeClr val="accent1"/>
+          </a:fillRef>
+          <a:effectRef idx="2">
+            <a:schemeClr val="accent1"/>
+          </a:effectRef>
+          <a:fontRef idx="minor">
+            <a:schemeClr val="lt1"/>
+          </a:fontRef>
+        </p:style>
+        <p:txBody>
+          <a:bodyPr rtlCol="0" anchor="ctr"/>
+          <a:lstStyle/>
+          <a:p>
+            <a:pPr algn="ctr"/>
+          </a:p>
+        </p:txBody>
+      </p:sp>
+      <p:sp>
+        <p:nvSpPr>
+          <p:cNvPr id="31" name="TextBox 30"/>
+          <p:cNvSpPr txBox="1"/>
+          <p:nvPr/>
+        </p:nvSpPr>
+        <p:spPr>
+          <a:xfrm>
+            <a:off x="5897880" y="2619756"/>
+            <a:ext cx="219456" cy="210311"/>
+          </a:xfrm>
+          <a:prstGeom prst="rect">
+            <a:avLst/>
+          </a:prstGeom>
+          <a:noFill/>
+        </p:spPr>
+        <p:txBody>
+          <a:bodyPr wrap="square" lIns="0" rIns="0" tIns="0" bIns="0" anchor="ctr">
+            <a:spAutoFit/>
+          </a:bodyPr>
+          <a:lstStyle/>
+          <a:p>
+            <a:pPr algn="ctr">
+              <a:spcAft>
+                <a:spcPts val="0"/>
+              </a:spcAft>
+            </a:pPr>
+            <a:r>
+              <a:rPr sz="819" b="1" i="0">
+                <a:solidFill>
+                  <a:srgbClr val="FFFFFF"/>
+                </a:solidFill>
+                <a:latin typeface="Arial"/>
+              </a:rPr>
+              <a:t>R</a:t>
+            </a:r>
+          </a:p>
+        </p:txBody>
+      </p:sp>
+      <p:sp>
+        <p:nvSpPr>
+          <p:cNvPr id="32" name="Right Arrow 31"/>
+          <p:cNvSpPr/>
+          <p:nvPr/>
+        </p:nvSpPr>
+        <p:spPr>
+          <a:xfrm>
+            <a:off x="6208776" y="2651760"/>
+            <a:ext cx="237744" cy="128016"/>
+          </a:xfrm>
+          <a:prstGeom prst="rightArrow">
+            <a:avLst/>
+          </a:prstGeom>
+          <a:solidFill>
+            <a:srgbClr val="8A969E"/>
+          </a:solidFill>
+          <a:ln>
+            <a:noFill/>
+          </a:ln>
+        </p:spPr>
+        <p:style>
+          <a:lnRef idx="1">
+            <a:schemeClr val="accent1"/>
+          </a:lnRef>
+          <a:fillRef idx="3">
+            <a:schemeClr val="accent1"/>
+          </a:fillRef>
+          <a:effectRef idx="2">
+            <a:schemeClr val="accent1"/>
+          </a:effectRef>
+          <a:fontRef idx="minor">
+            <a:schemeClr val="lt1"/>
+          </a:fontRef>
+        </p:style>
+        <p:txBody>
+          <a:bodyPr rtlCol="0" anchor="ctr"/>
+          <a:lstStyle/>
+          <a:p>
+            <a:pPr algn="ctr"/>
+          </a:p>
+        </p:txBody>
+      </p:sp>
+      <p:sp>
+        <p:nvSpPr>
+          <p:cNvPr id="33" name="TextBox 32"/>
+          <p:cNvSpPr txBox="1"/>
+          <p:nvPr/>
+        </p:nvSpPr>
+        <p:spPr>
+          <a:xfrm>
+            <a:off x="6547104" y="2569464"/>
+            <a:ext cx="1563624" cy="301752"/>
+          </a:xfrm>
+          <a:prstGeom prst="rect">
+            <a:avLst/>
+          </a:prstGeom>
+          <a:noFill/>
+        </p:spPr>
+        <p:txBody>
+          <a:bodyPr wrap="square" lIns="0" rIns="0" tIns="0" bIns="0" anchor="ctr">
+            <a:spAutoFit/>
+          </a:bodyPr>
+          <a:lstStyle/>
+          <a:p>
+            <a:pPr algn="l">
+              <a:spcAft>
+                <a:spcPts val="0"/>
+              </a:spcAft>
+            </a:pPr>
+            <a:r>
+              <a:rPr sz="1040" b="1" i="0">
+                <a:solidFill>
+                  <a:srgbClr val="263746"/>
+                </a:solidFill>
+                <a:latin typeface="Arial"/>
+              </a:rPr>
+              <a:t>Fit real</a:t>
+            </a:r>
+          </a:p>
+        </p:txBody>
+      </p:sp>
+      <p:sp>
+        <p:nvSpPr>
+          <p:cNvPr id="34" name="TextBox 33"/>
+          <p:cNvSpPr txBox="1"/>
+          <p:nvPr/>
+        </p:nvSpPr>
+        <p:spPr>
+          <a:xfrm>
+            <a:off x="8988552" y="2569464"/>
+            <a:ext cx="2468880" cy="301752"/>
+          </a:xfrm>
+          <a:prstGeom prst="rect">
+            <a:avLst/>
+          </a:prstGeom>
+          <a:noFill/>
+        </p:spPr>
+        <p:txBody>
+          <a:bodyPr wrap="square" lIns="0" rIns="0" tIns="0" bIns="0" anchor="ctr">
+            <a:spAutoFit/>
+          </a:bodyPr>
+          <a:lstStyle/>
+          <a:p>
+            <a:pPr algn="l">
+              <a:spcAft>
+                <a:spcPts val="0"/>
+              </a:spcAft>
+            </a:pPr>
+            <a:r>
+              <a:rPr sz="1050" b="0" i="0">
+                <a:solidFill>
+                  <a:srgbClr val="263746"/>
+                </a:solidFill>
+                <a:latin typeface="Arial"/>
+              </a:rPr>
+              <a:t>Baseline</a:t>
+            </a:r>
+          </a:p>
+        </p:txBody>
+      </p:sp>
+      <p:sp>
+        <p:nvSpPr>
+          <p:cNvPr id="35" name="Rectangle 34"/>
+          <p:cNvSpPr/>
+          <p:nvPr/>
+        </p:nvSpPr>
+        <p:spPr>
+          <a:xfrm>
+            <a:off x="429768" y="3017520"/>
+            <a:ext cx="50292" cy="457200"/>
+          </a:xfrm>
+          <a:prstGeom prst="rect">
+            <a:avLst/>
+          </a:prstGeom>
+          <a:solidFill>
+            <a:srgbClr val="D96552"/>
+          </a:solidFill>
+          <a:ln>
+            <a:noFill/>
+          </a:ln>
+        </p:spPr>
+        <p:style>
+          <a:lnRef idx="1">
+            <a:schemeClr val="accent1"/>
+          </a:lnRef>
+          <a:fillRef idx="3">
+            <a:schemeClr val="accent1"/>
+          </a:fillRef>
+          <a:effectRef idx="2">
+            <a:schemeClr val="accent1"/>
+          </a:effectRef>
+          <a:fontRef idx="minor">
+            <a:schemeClr val="lt1"/>
+          </a:fontRef>
+        </p:style>
+        <p:txBody>
+          <a:bodyPr rtlCol="0" anchor="ctr"/>
+          <a:lstStyle/>
+          <a:p>
+            <a:pPr algn="ctr"/>
+          </a:p>
+        </p:txBody>
+      </p:sp>
+      <p:sp>
+        <p:nvSpPr>
+          <p:cNvPr id="36" name="TextBox 35"/>
+          <p:cNvSpPr txBox="1"/>
+          <p:nvPr/>
+        </p:nvSpPr>
+        <p:spPr>
+          <a:xfrm>
+            <a:off x="612648" y="3090672"/>
+            <a:ext cx="1984248" cy="301752"/>
+          </a:xfrm>
+          <a:prstGeom prst="rect">
+            <a:avLst/>
+          </a:prstGeom>
+          <a:noFill/>
+        </p:spPr>
+        <p:txBody>
+          <a:bodyPr wrap="square" lIns="0" rIns="0" tIns="0" bIns="0" anchor="ctr">
+            <a:spAutoFit/>
+          </a:bodyPr>
+          <a:lstStyle/>
+          <a:p>
+            <a:pPr algn="l">
+              <a:spcAft>
+                <a:spcPts val="0"/>
+              </a:spcAft>
+            </a:pPr>
+            <a:r>
+              <a:rPr sz="1120" b="1" i="0">
+                <a:solidFill>
+                  <a:srgbClr val="D96552"/>
                 </a:solidFill>
                 <a:latin typeface="Arial"/>
               </a:rPr>
@@ -49474,14 +50325,424 @@
       </p:sp>
       <p:sp>
         <p:nvSpPr>
-          <p:cNvPr id="16" name="Rectangle 15"/>
+          <p:cNvPr id="37" name="Oval 36"/>
           <p:cNvSpPr/>
           <p:nvPr/>
         </p:nvSpPr>
         <p:spPr>
           <a:xfrm>
-            <a:off x="5541264" y="2240280"/>
-            <a:ext cx="1938528" cy="32004"/>
+            <a:off x="2816352" y="3136391"/>
+            <a:ext cx="219456" cy="219456"/>
+          </a:xfrm>
+          <a:prstGeom prst="ellipse">
+            <a:avLst/>
+          </a:prstGeom>
+          <a:solidFill>
+            <a:srgbClr val="D96552"/>
+          </a:solidFill>
+          <a:ln>
+            <a:noFill/>
+          </a:ln>
+        </p:spPr>
+        <p:style>
+          <a:lnRef idx="1">
+            <a:schemeClr val="accent1"/>
+          </a:lnRef>
+          <a:fillRef idx="3">
+            <a:schemeClr val="accent1"/>
+          </a:fillRef>
+          <a:effectRef idx="2">
+            <a:schemeClr val="accent1"/>
+          </a:effectRef>
+          <a:fontRef idx="minor">
+            <a:schemeClr val="lt1"/>
+          </a:fontRef>
+        </p:style>
+        <p:txBody>
+          <a:bodyPr rtlCol="0" anchor="ctr"/>
+          <a:lstStyle/>
+          <a:p>
+            <a:pPr algn="ctr"/>
+          </a:p>
+        </p:txBody>
+      </p:sp>
+      <p:sp>
+        <p:nvSpPr>
+          <p:cNvPr id="38" name="TextBox 37"/>
+          <p:cNvSpPr txBox="1"/>
+          <p:nvPr/>
+        </p:nvSpPr>
+        <p:spPr>
+          <a:xfrm>
+            <a:off x="2816352" y="3140963"/>
+            <a:ext cx="219456" cy="210311"/>
+          </a:xfrm>
+          <a:prstGeom prst="rect">
+            <a:avLst/>
+          </a:prstGeom>
+          <a:noFill/>
+        </p:spPr>
+        <p:txBody>
+          <a:bodyPr wrap="square" lIns="0" rIns="0" tIns="0" bIns="0" anchor="ctr">
+            <a:spAutoFit/>
+          </a:bodyPr>
+          <a:lstStyle/>
+          <a:p>
+            <a:pPr algn="ctr">
+              <a:spcAft>
+                <a:spcPts val="0"/>
+              </a:spcAft>
+            </a:pPr>
+            <a:r>
+              <a:rPr sz="819" b="1" i="0">
+                <a:solidFill>
+                  <a:srgbClr val="FFFFFF"/>
+                </a:solidFill>
+                <a:latin typeface="Arial"/>
+              </a:rPr>
+              <a:t>S</a:t>
+            </a:r>
+          </a:p>
+        </p:txBody>
+      </p:sp>
+      <p:sp>
+        <p:nvSpPr>
+          <p:cNvPr id="39" name="Right Arrow 38"/>
+          <p:cNvSpPr/>
+          <p:nvPr/>
+        </p:nvSpPr>
+        <p:spPr>
+          <a:xfrm>
+            <a:off x="3127248" y="3172968"/>
+            <a:ext cx="237744" cy="128016"/>
+          </a:xfrm>
+          <a:prstGeom prst="rightArrow">
+            <a:avLst/>
+          </a:prstGeom>
+          <a:solidFill>
+            <a:srgbClr val="8A969E"/>
+          </a:solidFill>
+          <a:ln>
+            <a:noFill/>
+          </a:ln>
+        </p:spPr>
+        <p:style>
+          <a:lnRef idx="1">
+            <a:schemeClr val="accent1"/>
+          </a:lnRef>
+          <a:fillRef idx="3">
+            <a:schemeClr val="accent1"/>
+          </a:fillRef>
+          <a:effectRef idx="2">
+            <a:schemeClr val="accent1"/>
+          </a:effectRef>
+          <a:fontRef idx="minor">
+            <a:schemeClr val="lt1"/>
+          </a:fontRef>
+        </p:style>
+        <p:txBody>
+          <a:bodyPr rtlCol="0" anchor="ctr"/>
+          <a:lstStyle/>
+          <a:p>
+            <a:pPr algn="ctr"/>
+          </a:p>
+        </p:txBody>
+      </p:sp>
+      <p:sp>
+        <p:nvSpPr>
+          <p:cNvPr id="40" name="TextBox 39"/>
+          <p:cNvSpPr txBox="1"/>
+          <p:nvPr/>
+        </p:nvSpPr>
+        <p:spPr>
+          <a:xfrm>
+            <a:off x="3465576" y="3090672"/>
+            <a:ext cx="1627632" cy="301752"/>
+          </a:xfrm>
+          <a:prstGeom prst="rect">
+            <a:avLst/>
+          </a:prstGeom>
+          <a:noFill/>
+        </p:spPr>
+        <p:txBody>
+          <a:bodyPr wrap="square" lIns="0" rIns="0" tIns="0" bIns="0" anchor="ctr">
+            <a:spAutoFit/>
+          </a:bodyPr>
+          <a:lstStyle/>
+          <a:p>
+            <a:pPr algn="l">
+              <a:spcAft>
+                <a:spcPts val="0"/>
+              </a:spcAft>
+            </a:pPr>
+            <a:r>
+              <a:rPr sz="1040" b="1" i="0">
+                <a:solidFill>
+                  <a:srgbClr val="263746"/>
+                </a:solidFill>
+                <a:latin typeface="Arial"/>
+              </a:rPr>
+              <a:t>Rank from generated</a:t>
+            </a:r>
+          </a:p>
+        </p:txBody>
+      </p:sp>
+      <p:sp>
+        <p:nvSpPr>
+          <p:cNvPr id="41" name="Oval 40"/>
+          <p:cNvSpPr/>
+          <p:nvPr/>
+        </p:nvSpPr>
+        <p:spPr>
+          <a:xfrm>
+            <a:off x="5897880" y="3136391"/>
+            <a:ext cx="219456" cy="219456"/>
+          </a:xfrm>
+          <a:prstGeom prst="ellipse">
+            <a:avLst/>
+          </a:prstGeom>
+          <a:solidFill>
+            <a:srgbClr val="D96552"/>
+          </a:solidFill>
+          <a:ln>
+            <a:noFill/>
+          </a:ln>
+        </p:spPr>
+        <p:style>
+          <a:lnRef idx="1">
+            <a:schemeClr val="accent1"/>
+          </a:lnRef>
+          <a:fillRef idx="3">
+            <a:schemeClr val="accent1"/>
+          </a:fillRef>
+          <a:effectRef idx="2">
+            <a:schemeClr val="accent1"/>
+          </a:effectRef>
+          <a:fontRef idx="minor">
+            <a:schemeClr val="lt1"/>
+          </a:fontRef>
+        </p:style>
+        <p:txBody>
+          <a:bodyPr rtlCol="0" anchor="ctr"/>
+          <a:lstStyle/>
+          <a:p>
+            <a:pPr algn="ctr"/>
+          </a:p>
+        </p:txBody>
+      </p:sp>
+      <p:sp>
+        <p:nvSpPr>
+          <p:cNvPr id="42" name="TextBox 41"/>
+          <p:cNvSpPr txBox="1"/>
+          <p:nvPr/>
+        </p:nvSpPr>
+        <p:spPr>
+          <a:xfrm>
+            <a:off x="5897880" y="3140963"/>
+            <a:ext cx="219456" cy="210311"/>
+          </a:xfrm>
+          <a:prstGeom prst="rect">
+            <a:avLst/>
+          </a:prstGeom>
+          <a:noFill/>
+        </p:spPr>
+        <p:txBody>
+          <a:bodyPr wrap="square" lIns="0" rIns="0" tIns="0" bIns="0" anchor="ctr">
+            <a:spAutoFit/>
+          </a:bodyPr>
+          <a:lstStyle/>
+          <a:p>
+            <a:pPr algn="ctr">
+              <a:spcAft>
+                <a:spcPts val="0"/>
+              </a:spcAft>
+            </a:pPr>
+            <a:r>
+              <a:rPr sz="819" b="1" i="0">
+                <a:solidFill>
+                  <a:srgbClr val="FFFFFF"/>
+                </a:solidFill>
+                <a:latin typeface="Arial"/>
+              </a:rPr>
+              <a:t>S</a:t>
+            </a:r>
+          </a:p>
+        </p:txBody>
+      </p:sp>
+      <p:sp>
+        <p:nvSpPr>
+          <p:cNvPr id="43" name="Right Arrow 42"/>
+          <p:cNvSpPr/>
+          <p:nvPr/>
+        </p:nvSpPr>
+        <p:spPr>
+          <a:xfrm>
+            <a:off x="6208776" y="3172968"/>
+            <a:ext cx="237744" cy="128016"/>
+          </a:xfrm>
+          <a:prstGeom prst="rightArrow">
+            <a:avLst/>
+          </a:prstGeom>
+          <a:solidFill>
+            <a:srgbClr val="8A969E"/>
+          </a:solidFill>
+          <a:ln>
+            <a:noFill/>
+          </a:ln>
+        </p:spPr>
+        <p:style>
+          <a:lnRef idx="1">
+            <a:schemeClr val="accent1"/>
+          </a:lnRef>
+          <a:fillRef idx="3">
+            <a:schemeClr val="accent1"/>
+          </a:fillRef>
+          <a:effectRef idx="2">
+            <a:schemeClr val="accent1"/>
+          </a:effectRef>
+          <a:fontRef idx="minor">
+            <a:schemeClr val="lt1"/>
+          </a:fontRef>
+        </p:style>
+        <p:txBody>
+          <a:bodyPr rtlCol="0" anchor="ctr"/>
+          <a:lstStyle/>
+          <a:p>
+            <a:pPr algn="ctr"/>
+          </a:p>
+        </p:txBody>
+      </p:sp>
+      <p:sp>
+        <p:nvSpPr>
+          <p:cNvPr id="44" name="TextBox 43"/>
+          <p:cNvSpPr txBox="1"/>
+          <p:nvPr/>
+        </p:nvSpPr>
+        <p:spPr>
+          <a:xfrm>
+            <a:off x="6547104" y="3090672"/>
+            <a:ext cx="1563624" cy="301752"/>
+          </a:xfrm>
+          <a:prstGeom prst="rect">
+            <a:avLst/>
+          </a:prstGeom>
+          <a:noFill/>
+        </p:spPr>
+        <p:txBody>
+          <a:bodyPr wrap="square" lIns="0" rIns="0" tIns="0" bIns="0" anchor="ctr">
+            <a:spAutoFit/>
+          </a:bodyPr>
+          <a:lstStyle/>
+          <a:p>
+            <a:pPr algn="l">
+              <a:spcAft>
+                <a:spcPts val="0"/>
+              </a:spcAft>
+            </a:pPr>
+            <a:r>
+              <a:rPr sz="1040" b="1" i="0">
+                <a:solidFill>
+                  <a:srgbClr val="263746"/>
+                </a:solidFill>
+                <a:latin typeface="Arial"/>
+              </a:rPr>
+              <a:t>Fit generated</a:t>
+            </a:r>
+          </a:p>
+        </p:txBody>
+      </p:sp>
+      <p:sp>
+        <p:nvSpPr>
+          <p:cNvPr id="45" name="TextBox 44"/>
+          <p:cNvSpPr txBox="1"/>
+          <p:nvPr/>
+        </p:nvSpPr>
+        <p:spPr>
+          <a:xfrm>
+            <a:off x="8988552" y="3090672"/>
+            <a:ext cx="2468880" cy="301752"/>
+          </a:xfrm>
+          <a:prstGeom prst="rect">
+            <a:avLst/>
+          </a:prstGeom>
+          <a:noFill/>
+        </p:spPr>
+        <p:txBody>
+          <a:bodyPr wrap="square" lIns="0" rIns="0" tIns="0" bIns="0" anchor="ctr">
+            <a:spAutoFit/>
+          </a:bodyPr>
+          <a:lstStyle/>
+          <a:p>
+            <a:pPr algn="l">
+              <a:spcAft>
+                <a:spcPts val="0"/>
+              </a:spcAft>
+            </a:pPr>
+            <a:r>
+              <a:rPr sz="1050" b="0" i="0">
+                <a:solidFill>
+                  <a:srgbClr val="263746"/>
+                </a:solidFill>
+                <a:latin typeface="Arial"/>
+              </a:rPr>
+              <a:t>Synthetic-only stress test</a:t>
+            </a:r>
+          </a:p>
+        </p:txBody>
+      </p:sp>
+      <p:sp>
+        <p:nvSpPr>
+          <p:cNvPr id="46" name="Rectangle 45"/>
+          <p:cNvSpPr/>
+          <p:nvPr/>
+        </p:nvSpPr>
+        <p:spPr>
+          <a:xfrm>
+            <a:off x="429768" y="3538728"/>
+            <a:ext cx="11137392" cy="457200"/>
+          </a:xfrm>
+          <a:prstGeom prst="rect">
+            <a:avLst/>
+          </a:prstGeom>
+          <a:solidFill>
+            <a:srgbClr val="F4F6F7"/>
+          </a:solidFill>
+          <a:ln>
+            <a:noFill/>
+          </a:ln>
+        </p:spPr>
+        <p:style>
+          <a:lnRef idx="1">
+            <a:schemeClr val="accent1"/>
+          </a:lnRef>
+          <a:fillRef idx="3">
+            <a:schemeClr val="accent1"/>
+          </a:fillRef>
+          <a:effectRef idx="2">
+            <a:schemeClr val="accent1"/>
+          </a:effectRef>
+          <a:fontRef idx="minor">
+            <a:schemeClr val="lt1"/>
+          </a:fontRef>
+        </p:style>
+        <p:txBody>
+          <a:bodyPr rtlCol="0" anchor="ctr"/>
+          <a:lstStyle/>
+          <a:p>
+            <a:pPr algn="ctr"/>
+          </a:p>
+        </p:txBody>
+      </p:sp>
+      <p:sp>
+        <p:nvSpPr>
+          <p:cNvPr id="47" name="Rectangle 46"/>
+          <p:cNvSpPr/>
+          <p:nvPr/>
+        </p:nvSpPr>
+        <p:spPr>
+          <a:xfrm>
+            <a:off x="429768" y="3538728"/>
+            <a:ext cx="50292" cy="457200"/>
           </a:xfrm>
           <a:prstGeom prst="rect">
             <a:avLst/>
@@ -49517,14 +50778,96 @@
       </p:sp>
       <p:sp>
         <p:nvSpPr>
-          <p:cNvPr id="17" name="TextBox 16"/>
+          <p:cNvPr id="48" name="TextBox 47"/>
           <p:cNvSpPr txBox="1"/>
           <p:nvPr/>
         </p:nvSpPr>
         <p:spPr>
           <a:xfrm>
-            <a:off x="5577840" y="2331720"/>
-            <a:ext cx="1865376" cy="384048"/>
+            <a:off x="612648" y="3611880"/>
+            <a:ext cx="1984248" cy="301752"/>
+          </a:xfrm>
+          <a:prstGeom prst="rect">
+            <a:avLst/>
+          </a:prstGeom>
+          <a:noFill/>
+        </p:spPr>
+        <p:txBody>
+          <a:bodyPr wrap="square" lIns="0" rIns="0" tIns="0" bIns="0" anchor="ctr">
+            <a:spAutoFit/>
+          </a:bodyPr>
+          <a:lstStyle/>
+          <a:p>
+            <a:pPr algn="l">
+              <a:spcAft>
+                <a:spcPts val="0"/>
+              </a:spcAft>
+            </a:pPr>
+            <a:r>
+              <a:rPr sz="1120" b="1" i="0">
+                <a:solidFill>
+                  <a:srgbClr val="178681"/>
+                </a:solidFill>
+                <a:latin typeface="Arial"/>
+              </a:rPr>
+              <a:t>Real + generated</a:t>
+            </a:r>
+          </a:p>
+        </p:txBody>
+      </p:sp>
+      <p:sp>
+        <p:nvSpPr>
+          <p:cNvPr id="49" name="Oval 48"/>
+          <p:cNvSpPr/>
+          <p:nvPr/>
+        </p:nvSpPr>
+        <p:spPr>
+          <a:xfrm>
+            <a:off x="2816352" y="3657600"/>
+            <a:ext cx="219456" cy="219456"/>
+          </a:xfrm>
+          <a:prstGeom prst="ellipse">
+            <a:avLst/>
+          </a:prstGeom>
+          <a:solidFill>
+            <a:srgbClr val="2D6496"/>
+          </a:solidFill>
+          <a:ln>
+            <a:noFill/>
+          </a:ln>
+        </p:spPr>
+        <p:style>
+          <a:lnRef idx="1">
+            <a:schemeClr val="accent1"/>
+          </a:lnRef>
+          <a:fillRef idx="3">
+            <a:schemeClr val="accent1"/>
+          </a:fillRef>
+          <a:effectRef idx="2">
+            <a:schemeClr val="accent1"/>
+          </a:effectRef>
+          <a:fontRef idx="minor">
+            <a:schemeClr val="lt1"/>
+          </a:fontRef>
+        </p:style>
+        <p:txBody>
+          <a:bodyPr rtlCol="0" anchor="ctr"/>
+          <a:lstStyle/>
+          <a:p>
+            <a:pPr algn="ctr"/>
+          </a:p>
+        </p:txBody>
+      </p:sp>
+      <p:sp>
+        <p:nvSpPr>
+          <p:cNvPr id="50" name="TextBox 49"/>
+          <p:cNvSpPr txBox="1"/>
+          <p:nvPr/>
+        </p:nvSpPr>
+        <p:spPr>
+          <a:xfrm>
+            <a:off x="2816352" y="3662172"/>
+            <a:ext cx="219456" cy="210311"/>
           </a:xfrm>
           <a:prstGeom prst="rect">
             <a:avLst/>
@@ -49543,27 +50886,554 @@
               </a:spcAft>
             </a:pPr>
             <a:r>
-              <a:rPr sz="1160" b="1" i="0">
-                <a:solidFill>
-                  <a:srgbClr val="082B55"/>
-                </a:solidFill>
-                <a:latin typeface="Arial"/>
-              </a:rPr>
-              <a:t>Real + generated</a:t>
-            </a:r>
-          </a:p>
-        </p:txBody>
-      </p:sp>
-      <p:sp>
-        <p:nvSpPr>
-          <p:cNvPr id="18" name="Rectangle 17"/>
+              <a:rPr sz="819" b="1" i="0">
+                <a:solidFill>
+                  <a:srgbClr val="FFFFFF"/>
+                </a:solidFill>
+                <a:latin typeface="Arial"/>
+              </a:rPr>
+              <a:t>R</a:t>
+            </a:r>
+          </a:p>
+        </p:txBody>
+      </p:sp>
+      <p:sp>
+        <p:nvSpPr>
+          <p:cNvPr id="51" name="TextBox 50"/>
+          <p:cNvSpPr txBox="1"/>
+          <p:nvPr/>
+        </p:nvSpPr>
+        <p:spPr>
+          <a:xfrm>
+            <a:off x="3063240" y="3666744"/>
+            <a:ext cx="164592" cy="182880"/>
+          </a:xfrm>
+          <a:prstGeom prst="rect">
+            <a:avLst/>
+          </a:prstGeom>
+          <a:noFill/>
+        </p:spPr>
+        <p:txBody>
+          <a:bodyPr wrap="square" lIns="0" rIns="0" tIns="0" bIns="0" anchor="t">
+            <a:spAutoFit/>
+          </a:bodyPr>
+          <a:lstStyle/>
+          <a:p>
+            <a:pPr algn="ctr">
+              <a:spcAft>
+                <a:spcPts val="0"/>
+              </a:spcAft>
+            </a:pPr>
+            <a:r>
+              <a:rPr sz="950" b="1" i="0">
+                <a:solidFill>
+                  <a:srgbClr val="59697A"/>
+                </a:solidFill>
+                <a:latin typeface="Arial"/>
+              </a:rPr>
+              <a:t>+</a:t>
+            </a:r>
+          </a:p>
+        </p:txBody>
+      </p:sp>
+      <p:sp>
+        <p:nvSpPr>
+          <p:cNvPr id="52" name="Oval 51"/>
           <p:cNvSpPr/>
           <p:nvPr/>
         </p:nvSpPr>
         <p:spPr>
           <a:xfrm>
-            <a:off x="7571232" y="2240280"/>
-            <a:ext cx="1938528" cy="32004"/>
+            <a:off x="3246120" y="3657600"/>
+            <a:ext cx="219456" cy="219456"/>
+          </a:xfrm>
+          <a:prstGeom prst="ellipse">
+            <a:avLst/>
+          </a:prstGeom>
+          <a:solidFill>
+            <a:srgbClr val="D96552"/>
+          </a:solidFill>
+          <a:ln>
+            <a:noFill/>
+          </a:ln>
+        </p:spPr>
+        <p:style>
+          <a:lnRef idx="1">
+            <a:schemeClr val="accent1"/>
+          </a:lnRef>
+          <a:fillRef idx="3">
+            <a:schemeClr val="accent1"/>
+          </a:fillRef>
+          <a:effectRef idx="2">
+            <a:schemeClr val="accent1"/>
+          </a:effectRef>
+          <a:fontRef idx="minor">
+            <a:schemeClr val="lt1"/>
+          </a:fontRef>
+        </p:style>
+        <p:txBody>
+          <a:bodyPr rtlCol="0" anchor="ctr"/>
+          <a:lstStyle/>
+          <a:p>
+            <a:pPr algn="ctr"/>
+          </a:p>
+        </p:txBody>
+      </p:sp>
+      <p:sp>
+        <p:nvSpPr>
+          <p:cNvPr id="53" name="TextBox 52"/>
+          <p:cNvSpPr txBox="1"/>
+          <p:nvPr/>
+        </p:nvSpPr>
+        <p:spPr>
+          <a:xfrm>
+            <a:off x="3246120" y="3662172"/>
+            <a:ext cx="219456" cy="210311"/>
+          </a:xfrm>
+          <a:prstGeom prst="rect">
+            <a:avLst/>
+          </a:prstGeom>
+          <a:noFill/>
+        </p:spPr>
+        <p:txBody>
+          <a:bodyPr wrap="square" lIns="0" rIns="0" tIns="0" bIns="0" anchor="ctr">
+            <a:spAutoFit/>
+          </a:bodyPr>
+          <a:lstStyle/>
+          <a:p>
+            <a:pPr algn="ctr">
+              <a:spcAft>
+                <a:spcPts val="0"/>
+              </a:spcAft>
+            </a:pPr>
+            <a:r>
+              <a:rPr sz="819" b="1" i="0">
+                <a:solidFill>
+                  <a:srgbClr val="FFFFFF"/>
+                </a:solidFill>
+                <a:latin typeface="Arial"/>
+              </a:rPr>
+              <a:t>S</a:t>
+            </a:r>
+          </a:p>
+        </p:txBody>
+      </p:sp>
+      <p:sp>
+        <p:nvSpPr>
+          <p:cNvPr id="54" name="Right Arrow 53"/>
+          <p:cNvSpPr/>
+          <p:nvPr/>
+        </p:nvSpPr>
+        <p:spPr>
+          <a:xfrm>
+            <a:off x="3566160" y="3694176"/>
+            <a:ext cx="237744" cy="128016"/>
+          </a:xfrm>
+          <a:prstGeom prst="rightArrow">
+            <a:avLst/>
+          </a:prstGeom>
+          <a:solidFill>
+            <a:srgbClr val="8A969E"/>
+          </a:solidFill>
+          <a:ln>
+            <a:noFill/>
+          </a:ln>
+        </p:spPr>
+        <p:style>
+          <a:lnRef idx="1">
+            <a:schemeClr val="accent1"/>
+          </a:lnRef>
+          <a:fillRef idx="3">
+            <a:schemeClr val="accent1"/>
+          </a:fillRef>
+          <a:effectRef idx="2">
+            <a:schemeClr val="accent1"/>
+          </a:effectRef>
+          <a:fontRef idx="minor">
+            <a:schemeClr val="lt1"/>
+          </a:fontRef>
+        </p:style>
+        <p:txBody>
+          <a:bodyPr rtlCol="0" anchor="ctr"/>
+          <a:lstStyle/>
+          <a:p>
+            <a:pPr algn="ctr"/>
+          </a:p>
+        </p:txBody>
+      </p:sp>
+      <p:sp>
+        <p:nvSpPr>
+          <p:cNvPr id="55" name="TextBox 54"/>
+          <p:cNvSpPr txBox="1"/>
+          <p:nvPr/>
+        </p:nvSpPr>
+        <p:spPr>
+          <a:xfrm>
+            <a:off x="3904487" y="3611880"/>
+            <a:ext cx="1627632" cy="301752"/>
+          </a:xfrm>
+          <a:prstGeom prst="rect">
+            <a:avLst/>
+          </a:prstGeom>
+          <a:noFill/>
+        </p:spPr>
+        <p:txBody>
+          <a:bodyPr wrap="square" lIns="0" rIns="0" tIns="0" bIns="0" anchor="ctr">
+            <a:spAutoFit/>
+          </a:bodyPr>
+          <a:lstStyle/>
+          <a:p>
+            <a:pPr algn="l">
+              <a:spcAft>
+                <a:spcPts val="0"/>
+              </a:spcAft>
+            </a:pPr>
+            <a:r>
+              <a:rPr sz="1040" b="1" i="0">
+                <a:solidFill>
+                  <a:srgbClr val="263746"/>
+                </a:solidFill>
+                <a:latin typeface="Arial"/>
+              </a:rPr>
+              <a:t>Consensus rank</a:t>
+            </a:r>
+          </a:p>
+        </p:txBody>
+      </p:sp>
+      <p:sp>
+        <p:nvSpPr>
+          <p:cNvPr id="56" name="Oval 55"/>
+          <p:cNvSpPr/>
+          <p:nvPr/>
+        </p:nvSpPr>
+        <p:spPr>
+          <a:xfrm>
+            <a:off x="5897880" y="3657600"/>
+            <a:ext cx="219456" cy="219456"/>
+          </a:xfrm>
+          <a:prstGeom prst="ellipse">
+            <a:avLst/>
+          </a:prstGeom>
+          <a:solidFill>
+            <a:srgbClr val="2D6496"/>
+          </a:solidFill>
+          <a:ln>
+            <a:noFill/>
+          </a:ln>
+        </p:spPr>
+        <p:style>
+          <a:lnRef idx="1">
+            <a:schemeClr val="accent1"/>
+          </a:lnRef>
+          <a:fillRef idx="3">
+            <a:schemeClr val="accent1"/>
+          </a:fillRef>
+          <a:effectRef idx="2">
+            <a:schemeClr val="accent1"/>
+          </a:effectRef>
+          <a:fontRef idx="minor">
+            <a:schemeClr val="lt1"/>
+          </a:fontRef>
+        </p:style>
+        <p:txBody>
+          <a:bodyPr rtlCol="0" anchor="ctr"/>
+          <a:lstStyle/>
+          <a:p>
+            <a:pPr algn="ctr"/>
+          </a:p>
+        </p:txBody>
+      </p:sp>
+      <p:sp>
+        <p:nvSpPr>
+          <p:cNvPr id="57" name="TextBox 56"/>
+          <p:cNvSpPr txBox="1"/>
+          <p:nvPr/>
+        </p:nvSpPr>
+        <p:spPr>
+          <a:xfrm>
+            <a:off x="5897880" y="3662172"/>
+            <a:ext cx="219456" cy="210311"/>
+          </a:xfrm>
+          <a:prstGeom prst="rect">
+            <a:avLst/>
+          </a:prstGeom>
+          <a:noFill/>
+        </p:spPr>
+        <p:txBody>
+          <a:bodyPr wrap="square" lIns="0" rIns="0" tIns="0" bIns="0" anchor="ctr">
+            <a:spAutoFit/>
+          </a:bodyPr>
+          <a:lstStyle/>
+          <a:p>
+            <a:pPr algn="ctr">
+              <a:spcAft>
+                <a:spcPts val="0"/>
+              </a:spcAft>
+            </a:pPr>
+            <a:r>
+              <a:rPr sz="819" b="1" i="0">
+                <a:solidFill>
+                  <a:srgbClr val="FFFFFF"/>
+                </a:solidFill>
+                <a:latin typeface="Arial"/>
+              </a:rPr>
+              <a:t>R</a:t>
+            </a:r>
+          </a:p>
+        </p:txBody>
+      </p:sp>
+      <p:sp>
+        <p:nvSpPr>
+          <p:cNvPr id="58" name="TextBox 57"/>
+          <p:cNvSpPr txBox="1"/>
+          <p:nvPr/>
+        </p:nvSpPr>
+        <p:spPr>
+          <a:xfrm>
+            <a:off x="6144768" y="3666744"/>
+            <a:ext cx="164592" cy="182880"/>
+          </a:xfrm>
+          <a:prstGeom prst="rect">
+            <a:avLst/>
+          </a:prstGeom>
+          <a:noFill/>
+        </p:spPr>
+        <p:txBody>
+          <a:bodyPr wrap="square" lIns="0" rIns="0" tIns="0" bIns="0" anchor="t">
+            <a:spAutoFit/>
+          </a:bodyPr>
+          <a:lstStyle/>
+          <a:p>
+            <a:pPr algn="ctr">
+              <a:spcAft>
+                <a:spcPts val="0"/>
+              </a:spcAft>
+            </a:pPr>
+            <a:r>
+              <a:rPr sz="950" b="1" i="0">
+                <a:solidFill>
+                  <a:srgbClr val="59697A"/>
+                </a:solidFill>
+                <a:latin typeface="Arial"/>
+              </a:rPr>
+              <a:t>+</a:t>
+            </a:r>
+          </a:p>
+        </p:txBody>
+      </p:sp>
+      <p:sp>
+        <p:nvSpPr>
+          <p:cNvPr id="59" name="Oval 58"/>
+          <p:cNvSpPr/>
+          <p:nvPr/>
+        </p:nvSpPr>
+        <p:spPr>
+          <a:xfrm>
+            <a:off x="6327648" y="3657600"/>
+            <a:ext cx="219456" cy="219456"/>
+          </a:xfrm>
+          <a:prstGeom prst="ellipse">
+            <a:avLst/>
+          </a:prstGeom>
+          <a:solidFill>
+            <a:srgbClr val="D96552"/>
+          </a:solidFill>
+          <a:ln>
+            <a:noFill/>
+          </a:ln>
+        </p:spPr>
+        <p:style>
+          <a:lnRef idx="1">
+            <a:schemeClr val="accent1"/>
+          </a:lnRef>
+          <a:fillRef idx="3">
+            <a:schemeClr val="accent1"/>
+          </a:fillRef>
+          <a:effectRef idx="2">
+            <a:schemeClr val="accent1"/>
+          </a:effectRef>
+          <a:fontRef idx="minor">
+            <a:schemeClr val="lt1"/>
+          </a:fontRef>
+        </p:style>
+        <p:txBody>
+          <a:bodyPr rtlCol="0" anchor="ctr"/>
+          <a:lstStyle/>
+          <a:p>
+            <a:pPr algn="ctr"/>
+          </a:p>
+        </p:txBody>
+      </p:sp>
+      <p:sp>
+        <p:nvSpPr>
+          <p:cNvPr id="60" name="TextBox 59"/>
+          <p:cNvSpPr txBox="1"/>
+          <p:nvPr/>
+        </p:nvSpPr>
+        <p:spPr>
+          <a:xfrm>
+            <a:off x="6327648" y="3662172"/>
+            <a:ext cx="219456" cy="210311"/>
+          </a:xfrm>
+          <a:prstGeom prst="rect">
+            <a:avLst/>
+          </a:prstGeom>
+          <a:noFill/>
+        </p:spPr>
+        <p:txBody>
+          <a:bodyPr wrap="square" lIns="0" rIns="0" tIns="0" bIns="0" anchor="ctr">
+            <a:spAutoFit/>
+          </a:bodyPr>
+          <a:lstStyle/>
+          <a:p>
+            <a:pPr algn="ctr">
+              <a:spcAft>
+                <a:spcPts val="0"/>
+              </a:spcAft>
+            </a:pPr>
+            <a:r>
+              <a:rPr sz="819" b="1" i="0">
+                <a:solidFill>
+                  <a:srgbClr val="FFFFFF"/>
+                </a:solidFill>
+                <a:latin typeface="Arial"/>
+              </a:rPr>
+              <a:t>S</a:t>
+            </a:r>
+          </a:p>
+        </p:txBody>
+      </p:sp>
+      <p:sp>
+        <p:nvSpPr>
+          <p:cNvPr id="61" name="Right Arrow 60"/>
+          <p:cNvSpPr/>
+          <p:nvPr/>
+        </p:nvSpPr>
+        <p:spPr>
+          <a:xfrm>
+            <a:off x="6647688" y="3694176"/>
+            <a:ext cx="237744" cy="128016"/>
+          </a:xfrm>
+          <a:prstGeom prst="rightArrow">
+            <a:avLst/>
+          </a:prstGeom>
+          <a:solidFill>
+            <a:srgbClr val="8A969E"/>
+          </a:solidFill>
+          <a:ln>
+            <a:noFill/>
+          </a:ln>
+        </p:spPr>
+        <p:style>
+          <a:lnRef idx="1">
+            <a:schemeClr val="accent1"/>
+          </a:lnRef>
+          <a:fillRef idx="3">
+            <a:schemeClr val="accent1"/>
+          </a:fillRef>
+          <a:effectRef idx="2">
+            <a:schemeClr val="accent1"/>
+          </a:effectRef>
+          <a:fontRef idx="minor">
+            <a:schemeClr val="lt1"/>
+          </a:fontRef>
+        </p:style>
+        <p:txBody>
+          <a:bodyPr rtlCol="0" anchor="ctr"/>
+          <a:lstStyle/>
+          <a:p>
+            <a:pPr algn="ctr"/>
+          </a:p>
+        </p:txBody>
+      </p:sp>
+      <p:sp>
+        <p:nvSpPr>
+          <p:cNvPr id="62" name="TextBox 61"/>
+          <p:cNvSpPr txBox="1"/>
+          <p:nvPr/>
+        </p:nvSpPr>
+        <p:spPr>
+          <a:xfrm>
+            <a:off x="6986016" y="3611880"/>
+            <a:ext cx="1563624" cy="301752"/>
+          </a:xfrm>
+          <a:prstGeom prst="rect">
+            <a:avLst/>
+          </a:prstGeom>
+          <a:noFill/>
+        </p:spPr>
+        <p:txBody>
+          <a:bodyPr wrap="square" lIns="0" rIns="0" tIns="0" bIns="0" anchor="ctr">
+            <a:spAutoFit/>
+          </a:bodyPr>
+          <a:lstStyle/>
+          <a:p>
+            <a:pPr algn="l">
+              <a:spcAft>
+                <a:spcPts val="0"/>
+              </a:spcAft>
+            </a:pPr>
+            <a:r>
+              <a:rPr sz="1040" b="1" i="0">
+                <a:solidFill>
+                  <a:srgbClr val="263746"/>
+                </a:solidFill>
+                <a:latin typeface="Arial"/>
+              </a:rPr>
+              <a:t>Equal total weight</a:t>
+            </a:r>
+          </a:p>
+        </p:txBody>
+      </p:sp>
+      <p:sp>
+        <p:nvSpPr>
+          <p:cNvPr id="63" name="TextBox 62"/>
+          <p:cNvSpPr txBox="1"/>
+          <p:nvPr/>
+        </p:nvSpPr>
+        <p:spPr>
+          <a:xfrm>
+            <a:off x="8988552" y="3611880"/>
+            <a:ext cx="2468880" cy="301752"/>
+          </a:xfrm>
+          <a:prstGeom prst="rect">
+            <a:avLst/>
+          </a:prstGeom>
+          <a:noFill/>
+        </p:spPr>
+        <p:txBody>
+          <a:bodyPr wrap="square" lIns="0" rIns="0" tIns="0" bIns="0" anchor="ctr">
+            <a:spAutoFit/>
+          </a:bodyPr>
+          <a:lstStyle/>
+          <a:p>
+            <a:pPr algn="l">
+              <a:spcAft>
+                <a:spcPts val="0"/>
+              </a:spcAft>
+            </a:pPr>
+            <a:r>
+              <a:rPr sz="1050" b="0" i="0">
+                <a:solidFill>
+                  <a:srgbClr val="263746"/>
+                </a:solidFill>
+                <a:latin typeface="Arial"/>
+              </a:rPr>
+              <a:t>Direct augmentation</a:t>
+            </a:r>
+          </a:p>
+        </p:txBody>
+      </p:sp>
+      <p:sp>
+        <p:nvSpPr>
+          <p:cNvPr id="64" name="Rectangle 63"/>
+          <p:cNvSpPr/>
+          <p:nvPr/>
+        </p:nvSpPr>
+        <p:spPr>
+          <a:xfrm>
+            <a:off x="429768" y="4059935"/>
+            <a:ext cx="50292" cy="457200"/>
           </a:xfrm>
           <a:prstGeom prst="rect">
             <a:avLst/>
@@ -49599,14 +51469,96 @@
       </p:sp>
       <p:sp>
         <p:nvSpPr>
-          <p:cNvPr id="19" name="TextBox 18"/>
+          <p:cNvPr id="65" name="TextBox 64"/>
           <p:cNvSpPr txBox="1"/>
           <p:nvPr/>
         </p:nvSpPr>
         <p:spPr>
           <a:xfrm>
-            <a:off x="7607808" y="2331720"/>
-            <a:ext cx="1865376" cy="384048"/>
+            <a:off x="612648" y="4133087"/>
+            <a:ext cx="1984248" cy="301752"/>
+          </a:xfrm>
+          <a:prstGeom prst="rect">
+            <a:avLst/>
+          </a:prstGeom>
+          <a:noFill/>
+        </p:spPr>
+        <p:txBody>
+          <a:bodyPr wrap="square" lIns="0" rIns="0" tIns="0" bIns="0" anchor="ctr">
+            <a:spAutoFit/>
+          </a:bodyPr>
+          <a:lstStyle/>
+          <a:p>
+            <a:pPr algn="l">
+              <a:spcAft>
+                <a:spcPts val="0"/>
+              </a:spcAft>
+            </a:pPr>
+            <a:r>
+              <a:rPr sz="1120" b="1" i="0">
+                <a:solidFill>
+                  <a:srgbClr val="178681"/>
+                </a:solidFill>
+                <a:latin typeface="Arial"/>
+              </a:rPr>
+              <a:t>Guided: real fit</a:t>
+            </a:r>
+          </a:p>
+        </p:txBody>
+      </p:sp>
+      <p:sp>
+        <p:nvSpPr>
+          <p:cNvPr id="66" name="Oval 65"/>
+          <p:cNvSpPr/>
+          <p:nvPr/>
+        </p:nvSpPr>
+        <p:spPr>
+          <a:xfrm>
+            <a:off x="2816352" y="4178807"/>
+            <a:ext cx="219456" cy="219456"/>
+          </a:xfrm>
+          <a:prstGeom prst="ellipse">
+            <a:avLst/>
+          </a:prstGeom>
+          <a:solidFill>
+            <a:srgbClr val="2D6496"/>
+          </a:solidFill>
+          <a:ln>
+            <a:noFill/>
+          </a:ln>
+        </p:spPr>
+        <p:style>
+          <a:lnRef idx="1">
+            <a:schemeClr val="accent1"/>
+          </a:lnRef>
+          <a:fillRef idx="3">
+            <a:schemeClr val="accent1"/>
+          </a:fillRef>
+          <a:effectRef idx="2">
+            <a:schemeClr val="accent1"/>
+          </a:effectRef>
+          <a:fontRef idx="minor">
+            <a:schemeClr val="lt1"/>
+          </a:fontRef>
+        </p:style>
+        <p:txBody>
+          <a:bodyPr rtlCol="0" anchor="ctr"/>
+          <a:lstStyle/>
+          <a:p>
+            <a:pPr algn="ctr"/>
+          </a:p>
+        </p:txBody>
+      </p:sp>
+      <p:sp>
+        <p:nvSpPr>
+          <p:cNvPr id="67" name="TextBox 66"/>
+          <p:cNvSpPr txBox="1"/>
+          <p:nvPr/>
+        </p:nvSpPr>
+        <p:spPr>
+          <a:xfrm>
+            <a:off x="2816352" y="4183379"/>
+            <a:ext cx="219456" cy="210311"/>
           </a:xfrm>
           <a:prstGeom prst="rect">
             <a:avLst/>
@@ -49625,27 +51577,476 @@
               </a:spcAft>
             </a:pPr>
             <a:r>
-              <a:rPr sz="1160" b="1" i="0">
-                <a:solidFill>
-                  <a:srgbClr val="082B55"/>
-                </a:solidFill>
-                <a:latin typeface="Arial"/>
-              </a:rPr>
-              <a:t>Guided, real fit</a:t>
-            </a:r>
-          </a:p>
-        </p:txBody>
-      </p:sp>
-      <p:sp>
-        <p:nvSpPr>
-          <p:cNvPr id="20" name="Rectangle 19"/>
+              <a:rPr sz="819" b="1" i="0">
+                <a:solidFill>
+                  <a:srgbClr val="FFFFFF"/>
+                </a:solidFill>
+                <a:latin typeface="Arial"/>
+              </a:rPr>
+              <a:t>R</a:t>
+            </a:r>
+          </a:p>
+        </p:txBody>
+      </p:sp>
+      <p:sp>
+        <p:nvSpPr>
+          <p:cNvPr id="68" name="TextBox 67"/>
+          <p:cNvSpPr txBox="1"/>
+          <p:nvPr/>
+        </p:nvSpPr>
+        <p:spPr>
+          <a:xfrm>
+            <a:off x="3063240" y="4187951"/>
+            <a:ext cx="164592" cy="182880"/>
+          </a:xfrm>
+          <a:prstGeom prst="rect">
+            <a:avLst/>
+          </a:prstGeom>
+          <a:noFill/>
+        </p:spPr>
+        <p:txBody>
+          <a:bodyPr wrap="square" lIns="0" rIns="0" tIns="0" bIns="0" anchor="t">
+            <a:spAutoFit/>
+          </a:bodyPr>
+          <a:lstStyle/>
+          <a:p>
+            <a:pPr algn="ctr">
+              <a:spcAft>
+                <a:spcPts val="0"/>
+              </a:spcAft>
+            </a:pPr>
+            <a:r>
+              <a:rPr sz="950" b="1" i="0">
+                <a:solidFill>
+                  <a:srgbClr val="59697A"/>
+                </a:solidFill>
+                <a:latin typeface="Arial"/>
+              </a:rPr>
+              <a:t>+</a:t>
+            </a:r>
+          </a:p>
+        </p:txBody>
+      </p:sp>
+      <p:sp>
+        <p:nvSpPr>
+          <p:cNvPr id="69" name="Oval 68"/>
           <p:cNvSpPr/>
           <p:nvPr/>
         </p:nvSpPr>
         <p:spPr>
           <a:xfrm>
-            <a:off x="9601200" y="2240280"/>
-            <a:ext cx="1938528" cy="32004"/>
+            <a:off x="3246120" y="4178807"/>
+            <a:ext cx="219456" cy="219456"/>
+          </a:xfrm>
+          <a:prstGeom prst="ellipse">
+            <a:avLst/>
+          </a:prstGeom>
+          <a:solidFill>
+            <a:srgbClr val="D96552"/>
+          </a:solidFill>
+          <a:ln>
+            <a:noFill/>
+          </a:ln>
+        </p:spPr>
+        <p:style>
+          <a:lnRef idx="1">
+            <a:schemeClr val="accent1"/>
+          </a:lnRef>
+          <a:fillRef idx="3">
+            <a:schemeClr val="accent1"/>
+          </a:fillRef>
+          <a:effectRef idx="2">
+            <a:schemeClr val="accent1"/>
+          </a:effectRef>
+          <a:fontRef idx="minor">
+            <a:schemeClr val="lt1"/>
+          </a:fontRef>
+        </p:style>
+        <p:txBody>
+          <a:bodyPr rtlCol="0" anchor="ctr"/>
+          <a:lstStyle/>
+          <a:p>
+            <a:pPr algn="ctr"/>
+          </a:p>
+        </p:txBody>
+      </p:sp>
+      <p:sp>
+        <p:nvSpPr>
+          <p:cNvPr id="70" name="TextBox 69"/>
+          <p:cNvSpPr txBox="1"/>
+          <p:nvPr/>
+        </p:nvSpPr>
+        <p:spPr>
+          <a:xfrm>
+            <a:off x="3246120" y="4183379"/>
+            <a:ext cx="219456" cy="210311"/>
+          </a:xfrm>
+          <a:prstGeom prst="rect">
+            <a:avLst/>
+          </a:prstGeom>
+          <a:noFill/>
+        </p:spPr>
+        <p:txBody>
+          <a:bodyPr wrap="square" lIns="0" rIns="0" tIns="0" bIns="0" anchor="ctr">
+            <a:spAutoFit/>
+          </a:bodyPr>
+          <a:lstStyle/>
+          <a:p>
+            <a:pPr algn="ctr">
+              <a:spcAft>
+                <a:spcPts val="0"/>
+              </a:spcAft>
+            </a:pPr>
+            <a:r>
+              <a:rPr sz="819" b="1" i="0">
+                <a:solidFill>
+                  <a:srgbClr val="FFFFFF"/>
+                </a:solidFill>
+                <a:latin typeface="Arial"/>
+              </a:rPr>
+              <a:t>S</a:t>
+            </a:r>
+          </a:p>
+        </p:txBody>
+      </p:sp>
+      <p:sp>
+        <p:nvSpPr>
+          <p:cNvPr id="71" name="Right Arrow 70"/>
+          <p:cNvSpPr/>
+          <p:nvPr/>
+        </p:nvSpPr>
+        <p:spPr>
+          <a:xfrm>
+            <a:off x="3566160" y="4215383"/>
+            <a:ext cx="237744" cy="128016"/>
+          </a:xfrm>
+          <a:prstGeom prst="rightArrow">
+            <a:avLst/>
+          </a:prstGeom>
+          <a:solidFill>
+            <a:srgbClr val="8A969E"/>
+          </a:solidFill>
+          <a:ln>
+            <a:noFill/>
+          </a:ln>
+        </p:spPr>
+        <p:style>
+          <a:lnRef idx="1">
+            <a:schemeClr val="accent1"/>
+          </a:lnRef>
+          <a:fillRef idx="3">
+            <a:schemeClr val="accent1"/>
+          </a:fillRef>
+          <a:effectRef idx="2">
+            <a:schemeClr val="accent1"/>
+          </a:effectRef>
+          <a:fontRef idx="minor">
+            <a:schemeClr val="lt1"/>
+          </a:fontRef>
+        </p:style>
+        <p:txBody>
+          <a:bodyPr rtlCol="0" anchor="ctr"/>
+          <a:lstStyle/>
+          <a:p>
+            <a:pPr algn="ctr"/>
+          </a:p>
+        </p:txBody>
+      </p:sp>
+      <p:sp>
+        <p:nvSpPr>
+          <p:cNvPr id="72" name="TextBox 71"/>
+          <p:cNvSpPr txBox="1"/>
+          <p:nvPr/>
+        </p:nvSpPr>
+        <p:spPr>
+          <a:xfrm>
+            <a:off x="3904487" y="4133087"/>
+            <a:ext cx="1627632" cy="301752"/>
+          </a:xfrm>
+          <a:prstGeom prst="rect">
+            <a:avLst/>
+          </a:prstGeom>
+          <a:noFill/>
+        </p:spPr>
+        <p:txBody>
+          <a:bodyPr wrap="square" lIns="0" rIns="0" tIns="0" bIns="0" anchor="ctr">
+            <a:spAutoFit/>
+          </a:bodyPr>
+          <a:lstStyle/>
+          <a:p>
+            <a:pPr algn="l">
+              <a:spcAft>
+                <a:spcPts val="0"/>
+              </a:spcAft>
+            </a:pPr>
+            <a:r>
+              <a:rPr sz="1040" b="1" i="0">
+                <a:solidFill>
+                  <a:srgbClr val="263746"/>
+                </a:solidFill>
+                <a:latin typeface="Arial"/>
+              </a:rPr>
+              <a:t>Consensus rank</a:t>
+            </a:r>
+          </a:p>
+        </p:txBody>
+      </p:sp>
+      <p:sp>
+        <p:nvSpPr>
+          <p:cNvPr id="73" name="Oval 72"/>
+          <p:cNvSpPr/>
+          <p:nvPr/>
+        </p:nvSpPr>
+        <p:spPr>
+          <a:xfrm>
+            <a:off x="5897880" y="4178807"/>
+            <a:ext cx="219456" cy="219456"/>
+          </a:xfrm>
+          <a:prstGeom prst="ellipse">
+            <a:avLst/>
+          </a:prstGeom>
+          <a:solidFill>
+            <a:srgbClr val="2D6496"/>
+          </a:solidFill>
+          <a:ln>
+            <a:noFill/>
+          </a:ln>
+        </p:spPr>
+        <p:style>
+          <a:lnRef idx="1">
+            <a:schemeClr val="accent1"/>
+          </a:lnRef>
+          <a:fillRef idx="3">
+            <a:schemeClr val="accent1"/>
+          </a:fillRef>
+          <a:effectRef idx="2">
+            <a:schemeClr val="accent1"/>
+          </a:effectRef>
+          <a:fontRef idx="minor">
+            <a:schemeClr val="lt1"/>
+          </a:fontRef>
+        </p:style>
+        <p:txBody>
+          <a:bodyPr rtlCol="0" anchor="ctr"/>
+          <a:lstStyle/>
+          <a:p>
+            <a:pPr algn="ctr"/>
+          </a:p>
+        </p:txBody>
+      </p:sp>
+      <p:sp>
+        <p:nvSpPr>
+          <p:cNvPr id="74" name="TextBox 73"/>
+          <p:cNvSpPr txBox="1"/>
+          <p:nvPr/>
+        </p:nvSpPr>
+        <p:spPr>
+          <a:xfrm>
+            <a:off x="5897880" y="4183379"/>
+            <a:ext cx="219456" cy="210311"/>
+          </a:xfrm>
+          <a:prstGeom prst="rect">
+            <a:avLst/>
+          </a:prstGeom>
+          <a:noFill/>
+        </p:spPr>
+        <p:txBody>
+          <a:bodyPr wrap="square" lIns="0" rIns="0" tIns="0" bIns="0" anchor="ctr">
+            <a:spAutoFit/>
+          </a:bodyPr>
+          <a:lstStyle/>
+          <a:p>
+            <a:pPr algn="ctr">
+              <a:spcAft>
+                <a:spcPts val="0"/>
+              </a:spcAft>
+            </a:pPr>
+            <a:r>
+              <a:rPr sz="819" b="1" i="0">
+                <a:solidFill>
+                  <a:srgbClr val="FFFFFF"/>
+                </a:solidFill>
+                <a:latin typeface="Arial"/>
+              </a:rPr>
+              <a:t>R</a:t>
+            </a:r>
+          </a:p>
+        </p:txBody>
+      </p:sp>
+      <p:sp>
+        <p:nvSpPr>
+          <p:cNvPr id="75" name="Right Arrow 74"/>
+          <p:cNvSpPr/>
+          <p:nvPr/>
+        </p:nvSpPr>
+        <p:spPr>
+          <a:xfrm>
+            <a:off x="6208776" y="4215383"/>
+            <a:ext cx="237744" cy="128016"/>
+          </a:xfrm>
+          <a:prstGeom prst="rightArrow">
+            <a:avLst/>
+          </a:prstGeom>
+          <a:solidFill>
+            <a:srgbClr val="8A969E"/>
+          </a:solidFill>
+          <a:ln>
+            <a:noFill/>
+          </a:ln>
+        </p:spPr>
+        <p:style>
+          <a:lnRef idx="1">
+            <a:schemeClr val="accent1"/>
+          </a:lnRef>
+          <a:fillRef idx="3">
+            <a:schemeClr val="accent1"/>
+          </a:fillRef>
+          <a:effectRef idx="2">
+            <a:schemeClr val="accent1"/>
+          </a:effectRef>
+          <a:fontRef idx="minor">
+            <a:schemeClr val="lt1"/>
+          </a:fontRef>
+        </p:style>
+        <p:txBody>
+          <a:bodyPr rtlCol="0" anchor="ctr"/>
+          <a:lstStyle/>
+          <a:p>
+            <a:pPr algn="ctr"/>
+          </a:p>
+        </p:txBody>
+      </p:sp>
+      <p:sp>
+        <p:nvSpPr>
+          <p:cNvPr id="76" name="TextBox 75"/>
+          <p:cNvSpPr txBox="1"/>
+          <p:nvPr/>
+        </p:nvSpPr>
+        <p:spPr>
+          <a:xfrm>
+            <a:off x="6547104" y="4133087"/>
+            <a:ext cx="1563624" cy="301752"/>
+          </a:xfrm>
+          <a:prstGeom prst="rect">
+            <a:avLst/>
+          </a:prstGeom>
+          <a:noFill/>
+        </p:spPr>
+        <p:txBody>
+          <a:bodyPr wrap="square" lIns="0" rIns="0" tIns="0" bIns="0" anchor="ctr">
+            <a:spAutoFit/>
+          </a:bodyPr>
+          <a:lstStyle/>
+          <a:p>
+            <a:pPr algn="l">
+              <a:spcAft>
+                <a:spcPts val="0"/>
+              </a:spcAft>
+            </a:pPr>
+            <a:r>
+              <a:rPr sz="1040" b="1" i="0">
+                <a:solidFill>
+                  <a:srgbClr val="263746"/>
+                </a:solidFill>
+                <a:latin typeface="Arial"/>
+              </a:rPr>
+              <a:t>Fit real only</a:t>
+            </a:r>
+          </a:p>
+        </p:txBody>
+      </p:sp>
+      <p:sp>
+        <p:nvSpPr>
+          <p:cNvPr id="77" name="TextBox 76"/>
+          <p:cNvSpPr txBox="1"/>
+          <p:nvPr/>
+        </p:nvSpPr>
+        <p:spPr>
+          <a:xfrm>
+            <a:off x="8988552" y="4133087"/>
+            <a:ext cx="2468880" cy="301752"/>
+          </a:xfrm>
+          <a:prstGeom prst="rect">
+            <a:avLst/>
+          </a:prstGeom>
+          <a:noFill/>
+        </p:spPr>
+        <p:txBody>
+          <a:bodyPr wrap="square" lIns="0" rIns="0" tIns="0" bIns="0" anchor="ctr">
+            <a:spAutoFit/>
+          </a:bodyPr>
+          <a:lstStyle/>
+          <a:p>
+            <a:pPr algn="l">
+              <a:spcAft>
+                <a:spcPts val="0"/>
+              </a:spcAft>
+            </a:pPr>
+            <a:r>
+              <a:rPr sz="1050" b="0" i="0">
+                <a:solidFill>
+                  <a:srgbClr val="263746"/>
+                </a:solidFill>
+                <a:latin typeface="Arial"/>
+              </a:rPr>
+              <a:t>Feature guidance only</a:t>
+            </a:r>
+          </a:p>
+        </p:txBody>
+      </p:sp>
+      <p:sp>
+        <p:nvSpPr>
+          <p:cNvPr id="78" name="Rectangle 77"/>
+          <p:cNvSpPr/>
+          <p:nvPr/>
+        </p:nvSpPr>
+        <p:spPr>
+          <a:xfrm>
+            <a:off x="429768" y="4581144"/>
+            <a:ext cx="11137392" cy="457200"/>
+          </a:xfrm>
+          <a:prstGeom prst="rect">
+            <a:avLst/>
+          </a:prstGeom>
+          <a:solidFill>
+            <a:srgbClr val="F4F6F7"/>
+          </a:solidFill>
+          <a:ln>
+            <a:noFill/>
+          </a:ln>
+        </p:spPr>
+        <p:style>
+          <a:lnRef idx="1">
+            <a:schemeClr val="accent1"/>
+          </a:lnRef>
+          <a:fillRef idx="3">
+            <a:schemeClr val="accent1"/>
+          </a:fillRef>
+          <a:effectRef idx="2">
+            <a:schemeClr val="accent1"/>
+          </a:effectRef>
+          <a:fontRef idx="minor">
+            <a:schemeClr val="lt1"/>
+          </a:fontRef>
+        </p:style>
+        <p:txBody>
+          <a:bodyPr rtlCol="0" anchor="ctr"/>
+          <a:lstStyle/>
+          <a:p>
+            <a:pPr algn="ctr"/>
+          </a:p>
+        </p:txBody>
+      </p:sp>
+      <p:sp>
+        <p:nvSpPr>
+          <p:cNvPr id="79" name="Rectangle 78"/>
+          <p:cNvSpPr/>
+          <p:nvPr/>
+        </p:nvSpPr>
+        <p:spPr>
+          <a:xfrm>
+            <a:off x="429768" y="4581144"/>
+            <a:ext cx="50292" cy="457200"/>
           </a:xfrm>
           <a:prstGeom prst="rect">
             <a:avLst/>
@@ -49681,14 +52082,96 @@
       </p:sp>
       <p:sp>
         <p:nvSpPr>
-          <p:cNvPr id="21" name="TextBox 20"/>
+          <p:cNvPr id="80" name="TextBox 79"/>
           <p:cNvSpPr txBox="1"/>
           <p:nvPr/>
         </p:nvSpPr>
         <p:spPr>
           <a:xfrm>
-            <a:off x="9637776" y="2331720"/>
-            <a:ext cx="1865376" cy="384048"/>
+            <a:off x="612648" y="4654296"/>
+            <a:ext cx="1984248" cy="301752"/>
+          </a:xfrm>
+          <a:prstGeom prst="rect">
+            <a:avLst/>
+          </a:prstGeom>
+          <a:noFill/>
+        </p:spPr>
+        <p:txBody>
+          <a:bodyPr wrap="square" lIns="0" rIns="0" tIns="0" bIns="0" anchor="ctr">
+            <a:spAutoFit/>
+          </a:bodyPr>
+          <a:lstStyle/>
+          <a:p>
+            <a:pPr algn="l">
+              <a:spcAft>
+                <a:spcPts val="0"/>
+              </a:spcAft>
+            </a:pPr>
+            <a:r>
+              <a:rPr sz="1120" b="1" i="0">
+                <a:solidFill>
+                  <a:srgbClr val="D37B00"/>
+                </a:solidFill>
+                <a:latin typeface="Arial"/>
+              </a:rPr>
+              <a:t>Guided: 5% synthetic</a:t>
+            </a:r>
+          </a:p>
+        </p:txBody>
+      </p:sp>
+      <p:sp>
+        <p:nvSpPr>
+          <p:cNvPr id="81" name="Oval 80"/>
+          <p:cNvSpPr/>
+          <p:nvPr/>
+        </p:nvSpPr>
+        <p:spPr>
+          <a:xfrm>
+            <a:off x="2816352" y="4700016"/>
+            <a:ext cx="219456" cy="219456"/>
+          </a:xfrm>
+          <a:prstGeom prst="ellipse">
+            <a:avLst/>
+          </a:prstGeom>
+          <a:solidFill>
+            <a:srgbClr val="2D6496"/>
+          </a:solidFill>
+          <a:ln>
+            <a:noFill/>
+          </a:ln>
+        </p:spPr>
+        <p:style>
+          <a:lnRef idx="1">
+            <a:schemeClr val="accent1"/>
+          </a:lnRef>
+          <a:fillRef idx="3">
+            <a:schemeClr val="accent1"/>
+          </a:fillRef>
+          <a:effectRef idx="2">
+            <a:schemeClr val="accent1"/>
+          </a:effectRef>
+          <a:fontRef idx="minor">
+            <a:schemeClr val="lt1"/>
+          </a:fontRef>
+        </p:style>
+        <p:txBody>
+          <a:bodyPr rtlCol="0" anchor="ctr"/>
+          <a:lstStyle/>
+          <a:p>
+            <a:pPr algn="ctr"/>
+          </a:p>
+        </p:txBody>
+      </p:sp>
+      <p:sp>
+        <p:nvSpPr>
+          <p:cNvPr id="82" name="TextBox 81"/>
+          <p:cNvSpPr txBox="1"/>
+          <p:nvPr/>
+        </p:nvSpPr>
+        <p:spPr>
+          <a:xfrm>
+            <a:off x="2816352" y="4704588"/>
+            <a:ext cx="219456" cy="210311"/>
           </a:xfrm>
           <a:prstGeom prst="rect">
             <a:avLst/>
@@ -49707,33 +52190,72 @@
               </a:spcAft>
             </a:pPr>
             <a:r>
-              <a:rPr sz="1160" b="1" i="0">
-                <a:solidFill>
-                  <a:srgbClr val="082B55"/>
-                </a:solidFill>
-                <a:latin typeface="Arial"/>
-              </a:rPr>
-              <a:t>Guided, 5% synthetic</a:t>
-            </a:r>
-          </a:p>
-        </p:txBody>
-      </p:sp>
-      <p:sp>
-        <p:nvSpPr>
-          <p:cNvPr id="22" name="Rectangle 21"/>
+              <a:rPr sz="819" b="1" i="0">
+                <a:solidFill>
+                  <a:srgbClr val="FFFFFF"/>
+                </a:solidFill>
+                <a:latin typeface="Arial"/>
+              </a:rPr>
+              <a:t>R</a:t>
+            </a:r>
+          </a:p>
+        </p:txBody>
+      </p:sp>
+      <p:sp>
+        <p:nvSpPr>
+          <p:cNvPr id="83" name="TextBox 82"/>
+          <p:cNvSpPr txBox="1"/>
+          <p:nvPr/>
+        </p:nvSpPr>
+        <p:spPr>
+          <a:xfrm>
+            <a:off x="3063240" y="4709159"/>
+            <a:ext cx="164592" cy="182880"/>
+          </a:xfrm>
+          <a:prstGeom prst="rect">
+            <a:avLst/>
+          </a:prstGeom>
+          <a:noFill/>
+        </p:spPr>
+        <p:txBody>
+          <a:bodyPr wrap="square" lIns="0" rIns="0" tIns="0" bIns="0" anchor="t">
+            <a:spAutoFit/>
+          </a:bodyPr>
+          <a:lstStyle/>
+          <a:p>
+            <a:pPr algn="ctr">
+              <a:spcAft>
+                <a:spcPts val="0"/>
+              </a:spcAft>
+            </a:pPr>
+            <a:r>
+              <a:rPr sz="950" b="1" i="0">
+                <a:solidFill>
+                  <a:srgbClr val="59697A"/>
+                </a:solidFill>
+                <a:latin typeface="Arial"/>
+              </a:rPr>
+              <a:t>+</a:t>
+            </a:r>
+          </a:p>
+        </p:txBody>
+      </p:sp>
+      <p:sp>
+        <p:nvSpPr>
+          <p:cNvPr id="84" name="Oval 83"/>
           <p:cNvSpPr/>
           <p:nvPr/>
         </p:nvSpPr>
         <p:spPr>
           <a:xfrm>
-            <a:off x="420624" y="2807208"/>
-            <a:ext cx="11201400" cy="557784"/>
-          </a:xfrm>
-          <a:prstGeom prst="rect">
+            <a:off x="3246120" y="4700016"/>
+            <a:ext cx="219456" cy="219456"/>
+          </a:xfrm>
+          <a:prstGeom prst="ellipse">
             <a:avLst/>
           </a:prstGeom>
           <a:solidFill>
-            <a:srgbClr val="F4F6F7"/>
+            <a:srgbClr val="D96552"/>
           </a:solidFill>
           <a:ln>
             <a:noFill/>
@@ -49763,14 +52285,14 @@
       </p:sp>
       <p:sp>
         <p:nvSpPr>
-          <p:cNvPr id="23" name="TextBox 22"/>
+          <p:cNvPr id="85" name="TextBox 84"/>
           <p:cNvSpPr txBox="1"/>
           <p:nvPr/>
         </p:nvSpPr>
         <p:spPr>
           <a:xfrm>
-            <a:off x="466344" y="2944368"/>
-            <a:ext cx="841248" cy="219456"/>
+            <a:off x="3246120" y="4704588"/>
+            <a:ext cx="219456" cy="210311"/>
           </a:xfrm>
           <a:prstGeom prst="rect">
             <a:avLst/>
@@ -49778,7 +52300,89 @@
           <a:noFill/>
         </p:spPr>
         <p:txBody>
-          <a:bodyPr wrap="square" lIns="0" rIns="0" tIns="0" bIns="0" anchor="t">
+          <a:bodyPr wrap="square" lIns="0" rIns="0" tIns="0" bIns="0" anchor="ctr">
+            <a:spAutoFit/>
+          </a:bodyPr>
+          <a:lstStyle/>
+          <a:p>
+            <a:pPr algn="ctr">
+              <a:spcAft>
+                <a:spcPts val="0"/>
+              </a:spcAft>
+            </a:pPr>
+            <a:r>
+              <a:rPr sz="819" b="1" i="0">
+                <a:solidFill>
+                  <a:srgbClr val="FFFFFF"/>
+                </a:solidFill>
+                <a:latin typeface="Arial"/>
+              </a:rPr>
+              <a:t>S</a:t>
+            </a:r>
+          </a:p>
+        </p:txBody>
+      </p:sp>
+      <p:sp>
+        <p:nvSpPr>
+          <p:cNvPr id="86" name="Right Arrow 85"/>
+          <p:cNvSpPr/>
+          <p:nvPr/>
+        </p:nvSpPr>
+        <p:spPr>
+          <a:xfrm>
+            <a:off x="3566160" y="4736592"/>
+            <a:ext cx="237744" cy="128016"/>
+          </a:xfrm>
+          <a:prstGeom prst="rightArrow">
+            <a:avLst/>
+          </a:prstGeom>
+          <a:solidFill>
+            <a:srgbClr val="8A969E"/>
+          </a:solidFill>
+          <a:ln>
+            <a:noFill/>
+          </a:ln>
+        </p:spPr>
+        <p:style>
+          <a:lnRef idx="1">
+            <a:schemeClr val="accent1"/>
+          </a:lnRef>
+          <a:fillRef idx="3">
+            <a:schemeClr val="accent1"/>
+          </a:fillRef>
+          <a:effectRef idx="2">
+            <a:schemeClr val="accent1"/>
+          </a:effectRef>
+          <a:fontRef idx="minor">
+            <a:schemeClr val="lt1"/>
+          </a:fontRef>
+        </p:style>
+        <p:txBody>
+          <a:bodyPr rtlCol="0" anchor="ctr"/>
+          <a:lstStyle/>
+          <a:p>
+            <a:pPr algn="ctr"/>
+          </a:p>
+        </p:txBody>
+      </p:sp>
+      <p:sp>
+        <p:nvSpPr>
+          <p:cNvPr id="87" name="TextBox 86"/>
+          <p:cNvSpPr txBox="1"/>
+          <p:nvPr/>
+        </p:nvSpPr>
+        <p:spPr>
+          <a:xfrm>
+            <a:off x="3904487" y="4654296"/>
+            <a:ext cx="1627632" cy="301752"/>
+          </a:xfrm>
+          <a:prstGeom prst="rect">
+            <a:avLst/>
+          </a:prstGeom>
+          <a:noFill/>
+        </p:spPr>
+        <p:txBody>
+          <a:bodyPr wrap="square" lIns="0" rIns="0" tIns="0" bIns="0" anchor="ctr">
             <a:spAutoFit/>
           </a:bodyPr>
           <a:lstStyle/>
@@ -49789,27 +52393,70 @@
               </a:spcAft>
             </a:pPr>
             <a:r>
-              <a:rPr sz="919" b="1" i="0">
-                <a:solidFill>
-                  <a:srgbClr val="59697A"/>
-                </a:solidFill>
-                <a:latin typeface="Arial"/>
-              </a:rPr>
-              <a:t>RANK</a:t>
-            </a:r>
-          </a:p>
-        </p:txBody>
-      </p:sp>
-      <p:sp>
-        <p:nvSpPr>
-          <p:cNvPr id="24" name="TextBox 23"/>
+              <a:rPr sz="1040" b="1" i="0">
+                <a:solidFill>
+                  <a:srgbClr val="263746"/>
+                </a:solidFill>
+                <a:latin typeface="Arial"/>
+              </a:rPr>
+              <a:t>Consensus rank</a:t>
+            </a:r>
+          </a:p>
+        </p:txBody>
+      </p:sp>
+      <p:sp>
+        <p:nvSpPr>
+          <p:cNvPr id="88" name="Oval 87"/>
+          <p:cNvSpPr/>
+          <p:nvPr/>
+        </p:nvSpPr>
+        <p:spPr>
+          <a:xfrm>
+            <a:off x="5897880" y="4700016"/>
+            <a:ext cx="219456" cy="219456"/>
+          </a:xfrm>
+          <a:prstGeom prst="ellipse">
+            <a:avLst/>
+          </a:prstGeom>
+          <a:solidFill>
+            <a:srgbClr val="2D6496"/>
+          </a:solidFill>
+          <a:ln>
+            <a:noFill/>
+          </a:ln>
+        </p:spPr>
+        <p:style>
+          <a:lnRef idx="1">
+            <a:schemeClr val="accent1"/>
+          </a:lnRef>
+          <a:fillRef idx="3">
+            <a:schemeClr val="accent1"/>
+          </a:fillRef>
+          <a:effectRef idx="2">
+            <a:schemeClr val="accent1"/>
+          </a:effectRef>
+          <a:fontRef idx="minor">
+            <a:schemeClr val="lt1"/>
+          </a:fontRef>
+        </p:style>
+        <p:txBody>
+          <a:bodyPr rtlCol="0" anchor="ctr"/>
+          <a:lstStyle/>
+          <a:p>
+            <a:pPr algn="ctr"/>
+          </a:p>
+        </p:txBody>
+      </p:sp>
+      <p:sp>
+        <p:nvSpPr>
+          <p:cNvPr id="89" name="TextBox 88"/>
           <p:cNvSpPr txBox="1"/>
           <p:nvPr/>
         </p:nvSpPr>
         <p:spPr>
           <a:xfrm>
-            <a:off x="1527048" y="2880360"/>
-            <a:ext cx="1847088" cy="365760"/>
+            <a:off x="5897880" y="4704588"/>
+            <a:ext cx="219456" cy="210311"/>
           </a:xfrm>
           <a:prstGeom prst="rect">
             <a:avLst/>
@@ -49828,27 +52475,27 @@
               </a:spcAft>
             </a:pPr>
             <a:r>
-              <a:rPr sz="1120" b="1" i="0">
-                <a:solidFill>
-                  <a:srgbClr val="263746"/>
-                </a:solidFill>
-                <a:latin typeface="Arial"/>
-              </a:rPr>
-              <a:t>Real</a:t>
-            </a:r>
-          </a:p>
-        </p:txBody>
-      </p:sp>
-      <p:sp>
-        <p:nvSpPr>
-          <p:cNvPr id="25" name="TextBox 24"/>
+              <a:rPr sz="819" b="1" i="0">
+                <a:solidFill>
+                  <a:srgbClr val="FFFFFF"/>
+                </a:solidFill>
+                <a:latin typeface="Arial"/>
+              </a:rPr>
+              <a:t>R</a:t>
+            </a:r>
+          </a:p>
+        </p:txBody>
+      </p:sp>
+      <p:sp>
+        <p:nvSpPr>
+          <p:cNvPr id="90" name="TextBox 89"/>
           <p:cNvSpPr txBox="1"/>
           <p:nvPr/>
         </p:nvSpPr>
         <p:spPr>
           <a:xfrm>
-            <a:off x="3557016" y="2880360"/>
-            <a:ext cx="1847088" cy="365760"/>
+            <a:off x="6144768" y="4709159"/>
+            <a:ext cx="164592" cy="182880"/>
           </a:xfrm>
           <a:prstGeom prst="rect">
             <a:avLst/>
@@ -49856,7 +52503,7 @@
           <a:noFill/>
         </p:spPr>
         <p:txBody>
-          <a:bodyPr wrap="square" lIns="0" rIns="0" tIns="0" bIns="0" anchor="ctr">
+          <a:bodyPr wrap="square" lIns="0" rIns="0" tIns="0" bIns="0" anchor="t">
             <a:spAutoFit/>
           </a:bodyPr>
           <a:lstStyle/>
@@ -49867,27 +52514,70 @@
               </a:spcAft>
             </a:pPr>
             <a:r>
-              <a:rPr sz="1120" b="1" i="0">
-                <a:solidFill>
-                  <a:srgbClr val="263746"/>
-                </a:solidFill>
-                <a:latin typeface="Arial"/>
-              </a:rPr>
-              <a:t>Generated</a:t>
-            </a:r>
-          </a:p>
-        </p:txBody>
-      </p:sp>
-      <p:sp>
-        <p:nvSpPr>
-          <p:cNvPr id="26" name="TextBox 25"/>
+              <a:rPr sz="950" b="1" i="0">
+                <a:solidFill>
+                  <a:srgbClr val="59697A"/>
+                </a:solidFill>
+                <a:latin typeface="Arial"/>
+              </a:rPr>
+              <a:t>+</a:t>
+            </a:r>
+          </a:p>
+        </p:txBody>
+      </p:sp>
+      <p:sp>
+        <p:nvSpPr>
+          <p:cNvPr id="91" name="Oval 90"/>
+          <p:cNvSpPr/>
+          <p:nvPr/>
+        </p:nvSpPr>
+        <p:spPr>
+          <a:xfrm>
+            <a:off x="6327648" y="4700016"/>
+            <a:ext cx="219456" cy="219456"/>
+          </a:xfrm>
+          <a:prstGeom prst="ellipse">
+            <a:avLst/>
+          </a:prstGeom>
+          <a:solidFill>
+            <a:srgbClr val="D96552"/>
+          </a:solidFill>
+          <a:ln>
+            <a:noFill/>
+          </a:ln>
+        </p:spPr>
+        <p:style>
+          <a:lnRef idx="1">
+            <a:schemeClr val="accent1"/>
+          </a:lnRef>
+          <a:fillRef idx="3">
+            <a:schemeClr val="accent1"/>
+          </a:fillRef>
+          <a:effectRef idx="2">
+            <a:schemeClr val="accent1"/>
+          </a:effectRef>
+          <a:fontRef idx="minor">
+            <a:schemeClr val="lt1"/>
+          </a:fontRef>
+        </p:style>
+        <p:txBody>
+          <a:bodyPr rtlCol="0" anchor="ctr"/>
+          <a:lstStyle/>
+          <a:p>
+            <a:pPr algn="ctr"/>
+          </a:p>
+        </p:txBody>
+      </p:sp>
+      <p:sp>
+        <p:nvSpPr>
+          <p:cNvPr id="92" name="TextBox 91"/>
           <p:cNvSpPr txBox="1"/>
           <p:nvPr/>
         </p:nvSpPr>
         <p:spPr>
           <a:xfrm>
-            <a:off x="5586984" y="2880360"/>
-            <a:ext cx="1847088" cy="365760"/>
+            <a:off x="6327648" y="4704588"/>
+            <a:ext cx="219456" cy="210311"/>
           </a:xfrm>
           <a:prstGeom prst="rect">
             <a:avLst/>
@@ -49906,27 +52596,70 @@
               </a:spcAft>
             </a:pPr>
             <a:r>
-              <a:rPr sz="1120" b="1" i="0">
-                <a:solidFill>
-                  <a:srgbClr val="263746"/>
-                </a:solidFill>
-                <a:latin typeface="Arial"/>
-              </a:rPr>
-              <a:t>Consensus</a:t>
-            </a:r>
-          </a:p>
-        </p:txBody>
-      </p:sp>
-      <p:sp>
-        <p:nvSpPr>
-          <p:cNvPr id="27" name="TextBox 26"/>
+              <a:rPr sz="819" b="1" i="0">
+                <a:solidFill>
+                  <a:srgbClr val="FFFFFF"/>
+                </a:solidFill>
+                <a:latin typeface="Arial"/>
+              </a:rPr>
+              <a:t>S</a:t>
+            </a:r>
+          </a:p>
+        </p:txBody>
+      </p:sp>
+      <p:sp>
+        <p:nvSpPr>
+          <p:cNvPr id="93" name="Right Arrow 92"/>
+          <p:cNvSpPr/>
+          <p:nvPr/>
+        </p:nvSpPr>
+        <p:spPr>
+          <a:xfrm>
+            <a:off x="6647688" y="4736592"/>
+            <a:ext cx="237744" cy="128016"/>
+          </a:xfrm>
+          <a:prstGeom prst="rightArrow">
+            <a:avLst/>
+          </a:prstGeom>
+          <a:solidFill>
+            <a:srgbClr val="8A969E"/>
+          </a:solidFill>
+          <a:ln>
+            <a:noFill/>
+          </a:ln>
+        </p:spPr>
+        <p:style>
+          <a:lnRef idx="1">
+            <a:schemeClr val="accent1"/>
+          </a:lnRef>
+          <a:fillRef idx="3">
+            <a:schemeClr val="accent1"/>
+          </a:fillRef>
+          <a:effectRef idx="2">
+            <a:schemeClr val="accent1"/>
+          </a:effectRef>
+          <a:fontRef idx="minor">
+            <a:schemeClr val="lt1"/>
+          </a:fontRef>
+        </p:style>
+        <p:txBody>
+          <a:bodyPr rtlCol="0" anchor="ctr"/>
+          <a:lstStyle/>
+          <a:p>
+            <a:pPr algn="ctr"/>
+          </a:p>
+        </p:txBody>
+      </p:sp>
+      <p:sp>
+        <p:nvSpPr>
+          <p:cNvPr id="94" name="TextBox 93"/>
           <p:cNvSpPr txBox="1"/>
           <p:nvPr/>
         </p:nvSpPr>
         <p:spPr>
           <a:xfrm>
-            <a:off x="7616952" y="2880360"/>
-            <a:ext cx="1847088" cy="365760"/>
+            <a:off x="6986016" y="4654296"/>
+            <a:ext cx="1563624" cy="301752"/>
           </a:xfrm>
           <a:prstGeom prst="rect">
             <a:avLst/>
@@ -49935,84 +52668,6 @@
         </p:spPr>
         <p:txBody>
           <a:bodyPr wrap="square" lIns="0" rIns="0" tIns="0" bIns="0" anchor="ctr">
-            <a:spAutoFit/>
-          </a:bodyPr>
-          <a:lstStyle/>
-          <a:p>
-            <a:pPr algn="ctr">
-              <a:spcAft>
-                <a:spcPts val="0"/>
-              </a:spcAft>
-            </a:pPr>
-            <a:r>
-              <a:rPr sz="1120" b="1" i="0">
-                <a:solidFill>
-                  <a:srgbClr val="263746"/>
-                </a:solidFill>
-                <a:latin typeface="Arial"/>
-              </a:rPr>
-              <a:t>Consensus</a:t>
-            </a:r>
-          </a:p>
-        </p:txBody>
-      </p:sp>
-      <p:sp>
-        <p:nvSpPr>
-          <p:cNvPr id="28" name="TextBox 27"/>
-          <p:cNvSpPr txBox="1"/>
-          <p:nvPr/>
-        </p:nvSpPr>
-        <p:spPr>
-          <a:xfrm>
-            <a:off x="9646920" y="2880360"/>
-            <a:ext cx="1847088" cy="365760"/>
-          </a:xfrm>
-          <a:prstGeom prst="rect">
-            <a:avLst/>
-          </a:prstGeom>
-          <a:noFill/>
-        </p:spPr>
-        <p:txBody>
-          <a:bodyPr wrap="square" lIns="0" rIns="0" tIns="0" bIns="0" anchor="ctr">
-            <a:spAutoFit/>
-          </a:bodyPr>
-          <a:lstStyle/>
-          <a:p>
-            <a:pPr algn="ctr">
-              <a:spcAft>
-                <a:spcPts val="0"/>
-              </a:spcAft>
-            </a:pPr>
-            <a:r>
-              <a:rPr sz="1120" b="1" i="0">
-                <a:solidFill>
-                  <a:srgbClr val="263746"/>
-                </a:solidFill>
-                <a:latin typeface="Arial"/>
-              </a:rPr>
-              <a:t>Consensus</a:t>
-            </a:r>
-          </a:p>
-        </p:txBody>
-      </p:sp>
-      <p:sp>
-        <p:nvSpPr>
-          <p:cNvPr id="29" name="TextBox 28"/>
-          <p:cNvSpPr txBox="1"/>
-          <p:nvPr/>
-        </p:nvSpPr>
-        <p:spPr>
-          <a:xfrm>
-            <a:off x="466344" y="3621023"/>
-            <a:ext cx="841248" cy="219456"/>
-          </a:xfrm>
-          <a:prstGeom prst="rect">
-            <a:avLst/>
-          </a:prstGeom>
-          <a:noFill/>
-        </p:spPr>
-        <p:txBody>
-          <a:bodyPr wrap="square" lIns="0" rIns="0" tIns="0" bIns="0" anchor="t">
             <a:spAutoFit/>
           </a:bodyPr>
           <a:lstStyle/>
@@ -50023,27 +52678,27 @@
               </a:spcAft>
             </a:pPr>
             <a:r>
-              <a:rPr sz="919" b="1" i="0">
-                <a:solidFill>
-                  <a:srgbClr val="59697A"/>
-                </a:solidFill>
-                <a:latin typeface="Arial"/>
-              </a:rPr>
-              <a:t>FIT</a:t>
-            </a:r>
-          </a:p>
-        </p:txBody>
-      </p:sp>
-      <p:sp>
-        <p:nvSpPr>
-          <p:cNvPr id="30" name="TextBox 29"/>
+              <a:rPr sz="1040" b="1" i="0">
+                <a:solidFill>
+                  <a:srgbClr val="263746"/>
+                </a:solidFill>
+                <a:latin typeface="Arial"/>
+              </a:rPr>
+              <a:t>S = 5% weight</a:t>
+            </a:r>
+          </a:p>
+        </p:txBody>
+      </p:sp>
+      <p:sp>
+        <p:nvSpPr>
+          <p:cNvPr id="95" name="TextBox 94"/>
           <p:cNvSpPr txBox="1"/>
           <p:nvPr/>
         </p:nvSpPr>
         <p:spPr>
           <a:xfrm>
-            <a:off x="1527048" y="3557015"/>
-            <a:ext cx="1847088" cy="365760"/>
+            <a:off x="8988552" y="4654296"/>
+            <a:ext cx="2468880" cy="301752"/>
           </a:xfrm>
           <a:prstGeom prst="rect">
             <a:avLst/>
@@ -50052,244 +52707,6 @@
         </p:spPr>
         <p:txBody>
           <a:bodyPr wrap="square" lIns="0" rIns="0" tIns="0" bIns="0" anchor="ctr">
-            <a:spAutoFit/>
-          </a:bodyPr>
-          <a:lstStyle/>
-          <a:p>
-            <a:pPr algn="ctr">
-              <a:spcAft>
-                <a:spcPts val="0"/>
-              </a:spcAft>
-            </a:pPr>
-            <a:r>
-              <a:rPr sz="1120" b="1" i="0">
-                <a:solidFill>
-                  <a:srgbClr val="263746"/>
-                </a:solidFill>
-                <a:latin typeface="Arial"/>
-              </a:rPr>
-              <a:t>Real</a:t>
-            </a:r>
-          </a:p>
-        </p:txBody>
-      </p:sp>
-      <p:sp>
-        <p:nvSpPr>
-          <p:cNvPr id="31" name="TextBox 30"/>
-          <p:cNvSpPr txBox="1"/>
-          <p:nvPr/>
-        </p:nvSpPr>
-        <p:spPr>
-          <a:xfrm>
-            <a:off x="3557016" y="3557015"/>
-            <a:ext cx="1847088" cy="365760"/>
-          </a:xfrm>
-          <a:prstGeom prst="rect">
-            <a:avLst/>
-          </a:prstGeom>
-          <a:noFill/>
-        </p:spPr>
-        <p:txBody>
-          <a:bodyPr wrap="square" lIns="0" rIns="0" tIns="0" bIns="0" anchor="ctr">
-            <a:spAutoFit/>
-          </a:bodyPr>
-          <a:lstStyle/>
-          <a:p>
-            <a:pPr algn="ctr">
-              <a:spcAft>
-                <a:spcPts val="0"/>
-              </a:spcAft>
-            </a:pPr>
-            <a:r>
-              <a:rPr sz="1120" b="1" i="0">
-                <a:solidFill>
-                  <a:srgbClr val="263746"/>
-                </a:solidFill>
-                <a:latin typeface="Arial"/>
-              </a:rPr>
-              <a:t>Generated</a:t>
-            </a:r>
-          </a:p>
-        </p:txBody>
-      </p:sp>
-      <p:sp>
-        <p:nvSpPr>
-          <p:cNvPr id="32" name="TextBox 31"/>
-          <p:cNvSpPr txBox="1"/>
-          <p:nvPr/>
-        </p:nvSpPr>
-        <p:spPr>
-          <a:xfrm>
-            <a:off x="5586984" y="3557015"/>
-            <a:ext cx="1847088" cy="365760"/>
-          </a:xfrm>
-          <a:prstGeom prst="rect">
-            <a:avLst/>
-          </a:prstGeom>
-          <a:noFill/>
-        </p:spPr>
-        <p:txBody>
-          <a:bodyPr wrap="square" lIns="0" rIns="0" tIns="0" bIns="0" anchor="ctr">
-            <a:spAutoFit/>
-          </a:bodyPr>
-          <a:lstStyle/>
-          <a:p>
-            <a:pPr algn="ctr">
-              <a:spcAft>
-                <a:spcPts val="0"/>
-              </a:spcAft>
-            </a:pPr>
-            <a:r>
-              <a:rPr sz="1120" b="1" i="0">
-                <a:solidFill>
-                  <a:srgbClr val="263746"/>
-                </a:solidFill>
-                <a:latin typeface="Arial"/>
-              </a:rPr>
-              <a:t>Equal weight</a:t>
-            </a:r>
-          </a:p>
-        </p:txBody>
-      </p:sp>
-      <p:sp>
-        <p:nvSpPr>
-          <p:cNvPr id="33" name="TextBox 32"/>
-          <p:cNvSpPr txBox="1"/>
-          <p:nvPr/>
-        </p:nvSpPr>
-        <p:spPr>
-          <a:xfrm>
-            <a:off x="7616952" y="3557015"/>
-            <a:ext cx="1847088" cy="365760"/>
-          </a:xfrm>
-          <a:prstGeom prst="rect">
-            <a:avLst/>
-          </a:prstGeom>
-          <a:noFill/>
-        </p:spPr>
-        <p:txBody>
-          <a:bodyPr wrap="square" lIns="0" rIns="0" tIns="0" bIns="0" anchor="ctr">
-            <a:spAutoFit/>
-          </a:bodyPr>
-          <a:lstStyle/>
-          <a:p>
-            <a:pPr algn="ctr">
-              <a:spcAft>
-                <a:spcPts val="0"/>
-              </a:spcAft>
-            </a:pPr>
-            <a:r>
-              <a:rPr sz="1120" b="1" i="0">
-                <a:solidFill>
-                  <a:srgbClr val="263746"/>
-                </a:solidFill>
-                <a:latin typeface="Arial"/>
-              </a:rPr>
-              <a:t>Real</a:t>
-            </a:r>
-          </a:p>
-        </p:txBody>
-      </p:sp>
-      <p:sp>
-        <p:nvSpPr>
-          <p:cNvPr id="34" name="TextBox 33"/>
-          <p:cNvSpPr txBox="1"/>
-          <p:nvPr/>
-        </p:nvSpPr>
-        <p:spPr>
-          <a:xfrm>
-            <a:off x="9646920" y="3557015"/>
-            <a:ext cx="1847088" cy="365760"/>
-          </a:xfrm>
-          <a:prstGeom prst="rect">
-            <a:avLst/>
-          </a:prstGeom>
-          <a:noFill/>
-        </p:spPr>
-        <p:txBody>
-          <a:bodyPr wrap="square" lIns="0" rIns="0" tIns="0" bIns="0" anchor="ctr">
-            <a:spAutoFit/>
-          </a:bodyPr>
-          <a:lstStyle/>
-          <a:p>
-            <a:pPr algn="ctr">
-              <a:spcAft>
-                <a:spcPts val="0"/>
-              </a:spcAft>
-            </a:pPr>
-            <a:r>
-              <a:rPr sz="1120" b="1" i="0">
-                <a:solidFill>
-                  <a:srgbClr val="263746"/>
-                </a:solidFill>
-                <a:latin typeface="Arial"/>
-              </a:rPr>
-              <a:t>Real + 5% synthetic</a:t>
-            </a:r>
-          </a:p>
-        </p:txBody>
-      </p:sp>
-      <p:sp>
-        <p:nvSpPr>
-          <p:cNvPr id="35" name="Rectangle 34"/>
-          <p:cNvSpPr/>
-          <p:nvPr/>
-        </p:nvSpPr>
-        <p:spPr>
-          <a:xfrm>
-            <a:off x="420624" y="4160520"/>
-            <a:ext cx="11201400" cy="557784"/>
-          </a:xfrm>
-          <a:prstGeom prst="rect">
-            <a:avLst/>
-          </a:prstGeom>
-          <a:solidFill>
-            <a:srgbClr val="F4F6F7"/>
-          </a:solidFill>
-          <a:ln>
-            <a:noFill/>
-          </a:ln>
-        </p:spPr>
-        <p:style>
-          <a:lnRef idx="1">
-            <a:schemeClr val="accent1"/>
-          </a:lnRef>
-          <a:fillRef idx="3">
-            <a:schemeClr val="accent1"/>
-          </a:fillRef>
-          <a:effectRef idx="2">
-            <a:schemeClr val="accent1"/>
-          </a:effectRef>
-          <a:fontRef idx="minor">
-            <a:schemeClr val="lt1"/>
-          </a:fontRef>
-        </p:style>
-        <p:txBody>
-          <a:bodyPr rtlCol="0" anchor="ctr"/>
-          <a:lstStyle/>
-          <a:p>
-            <a:pPr algn="ctr"/>
-          </a:p>
-        </p:txBody>
-      </p:sp>
-      <p:sp>
-        <p:nvSpPr>
-          <p:cNvPr id="36" name="TextBox 35"/>
-          <p:cNvSpPr txBox="1"/>
-          <p:nvPr/>
-        </p:nvSpPr>
-        <p:spPr>
-          <a:xfrm>
-            <a:off x="466344" y="4297680"/>
-            <a:ext cx="841248" cy="219456"/>
-          </a:xfrm>
-          <a:prstGeom prst="rect">
-            <a:avLst/>
-          </a:prstGeom>
-          <a:noFill/>
-        </p:spPr>
-        <p:txBody>
-          <a:bodyPr wrap="square" lIns="0" rIns="0" tIns="0" bIns="0" anchor="t">
             <a:spAutoFit/>
           </a:bodyPr>
           <a:lstStyle/>
@@ -50300,222 +52717,27 @@
               </a:spcAft>
             </a:pPr>
             <a:r>
-              <a:rPr sz="919" b="1" i="0">
-                <a:solidFill>
-                  <a:srgbClr val="59697A"/>
-                </a:solidFill>
-                <a:latin typeface="Arial"/>
-              </a:rPr>
-              <a:t>ROLE</a:t>
-            </a:r>
-          </a:p>
-        </p:txBody>
-      </p:sp>
-      <p:sp>
-        <p:nvSpPr>
-          <p:cNvPr id="37" name="TextBox 36"/>
-          <p:cNvSpPr txBox="1"/>
-          <p:nvPr/>
-        </p:nvSpPr>
-        <p:spPr>
-          <a:xfrm>
-            <a:off x="1527048" y="4233672"/>
-            <a:ext cx="1847088" cy="365760"/>
-          </a:xfrm>
-          <a:prstGeom prst="rect">
-            <a:avLst/>
-          </a:prstGeom>
-          <a:noFill/>
-        </p:spPr>
-        <p:txBody>
-          <a:bodyPr wrap="square" lIns="0" rIns="0" tIns="0" bIns="0" anchor="ctr">
-            <a:spAutoFit/>
-          </a:bodyPr>
-          <a:lstStyle/>
-          <a:p>
-            <a:pPr algn="ctr">
-              <a:spcAft>
-                <a:spcPts val="0"/>
-              </a:spcAft>
-            </a:pPr>
-            <a:r>
-              <a:rPr sz="1120" b="0" i="0">
+              <a:rPr sz="1050" b="0" i="0">
                 <a:solidFill>
                   <a:srgbClr val="263746"/>
                 </a:solidFill>
                 <a:latin typeface="Arial"/>
               </a:rPr>
-              <a:t>Baseline</a:t>
-            </a:r>
-          </a:p>
-        </p:txBody>
-      </p:sp>
-      <p:sp>
-        <p:nvSpPr>
-          <p:cNvPr id="38" name="TextBox 37"/>
-          <p:cNvSpPr txBox="1"/>
-          <p:nvPr/>
-        </p:nvSpPr>
-        <p:spPr>
-          <a:xfrm>
-            <a:off x="3557016" y="4233672"/>
-            <a:ext cx="1847088" cy="365760"/>
-          </a:xfrm>
-          <a:prstGeom prst="rect">
-            <a:avLst/>
-          </a:prstGeom>
-          <a:noFill/>
-        </p:spPr>
-        <p:txBody>
-          <a:bodyPr wrap="square" lIns="0" rIns="0" tIns="0" bIns="0" anchor="ctr">
-            <a:spAutoFit/>
-          </a:bodyPr>
-          <a:lstStyle/>
-          <a:p>
-            <a:pPr algn="ctr">
-              <a:spcAft>
-                <a:spcPts val="0"/>
-              </a:spcAft>
-            </a:pPr>
-            <a:r>
-              <a:rPr sz="1120" b="0" i="0">
-                <a:solidFill>
-                  <a:srgbClr val="263746"/>
-                </a:solidFill>
-                <a:latin typeface="Arial"/>
-              </a:rPr>
-              <a:t>Stress test</a:t>
-            </a:r>
-          </a:p>
-        </p:txBody>
-      </p:sp>
-      <p:sp>
-        <p:nvSpPr>
-          <p:cNvPr id="39" name="TextBox 38"/>
-          <p:cNvSpPr txBox="1"/>
-          <p:nvPr/>
-        </p:nvSpPr>
-        <p:spPr>
-          <a:xfrm>
-            <a:off x="5586984" y="4233672"/>
-            <a:ext cx="1847088" cy="365760"/>
-          </a:xfrm>
-          <a:prstGeom prst="rect">
-            <a:avLst/>
-          </a:prstGeom>
-          <a:noFill/>
-        </p:spPr>
-        <p:txBody>
-          <a:bodyPr wrap="square" lIns="0" rIns="0" tIns="0" bIns="0" anchor="ctr">
-            <a:spAutoFit/>
-          </a:bodyPr>
-          <a:lstStyle/>
-          <a:p>
-            <a:pPr algn="ctr">
-              <a:spcAft>
-                <a:spcPts val="0"/>
-              </a:spcAft>
-            </a:pPr>
-            <a:r>
-              <a:rPr sz="1120" b="0" i="0">
-                <a:solidFill>
-                  <a:srgbClr val="263746"/>
-                </a:solidFill>
-                <a:latin typeface="Arial"/>
-              </a:rPr>
-              <a:t>Augmentation</a:t>
-            </a:r>
-          </a:p>
-        </p:txBody>
-      </p:sp>
-      <p:sp>
-        <p:nvSpPr>
-          <p:cNvPr id="40" name="TextBox 39"/>
-          <p:cNvSpPr txBox="1"/>
-          <p:nvPr/>
-        </p:nvSpPr>
-        <p:spPr>
-          <a:xfrm>
-            <a:off x="7616952" y="4233672"/>
-            <a:ext cx="1847088" cy="365760"/>
-          </a:xfrm>
-          <a:prstGeom prst="rect">
-            <a:avLst/>
-          </a:prstGeom>
-          <a:noFill/>
-        </p:spPr>
-        <p:txBody>
-          <a:bodyPr wrap="square" lIns="0" rIns="0" tIns="0" bIns="0" anchor="ctr">
-            <a:spAutoFit/>
-          </a:bodyPr>
-          <a:lstStyle/>
-          <a:p>
-            <a:pPr algn="ctr">
-              <a:spcAft>
-                <a:spcPts val="0"/>
-              </a:spcAft>
-            </a:pPr>
-            <a:r>
-              <a:rPr sz="1120" b="0" i="0">
-                <a:solidFill>
-                  <a:srgbClr val="263746"/>
-                </a:solidFill>
-                <a:latin typeface="Arial"/>
-              </a:rPr>
-              <a:t>Feature guidance</a:t>
-            </a:r>
-          </a:p>
-        </p:txBody>
-      </p:sp>
-      <p:sp>
-        <p:nvSpPr>
-          <p:cNvPr id="41" name="TextBox 40"/>
-          <p:cNvSpPr txBox="1"/>
-          <p:nvPr/>
-        </p:nvSpPr>
-        <p:spPr>
-          <a:xfrm>
-            <a:off x="9646920" y="4233672"/>
-            <a:ext cx="1847088" cy="365760"/>
-          </a:xfrm>
-          <a:prstGeom prst="rect">
-            <a:avLst/>
-          </a:prstGeom>
-          <a:noFill/>
-        </p:spPr>
-        <p:txBody>
-          <a:bodyPr wrap="square" lIns="0" rIns="0" tIns="0" bIns="0" anchor="ctr">
-            <a:spAutoFit/>
-          </a:bodyPr>
-          <a:lstStyle/>
-          <a:p>
-            <a:pPr algn="ctr">
-              <a:spcAft>
-                <a:spcPts val="0"/>
-              </a:spcAft>
-            </a:pPr>
-            <a:r>
-              <a:rPr sz="1120" b="0" i="0">
-                <a:solidFill>
-                  <a:srgbClr val="263746"/>
-                </a:solidFill>
-                <a:latin typeface="Arial"/>
-              </a:rPr>
-              <a:t>Low-weight training</a:t>
-            </a:r>
-          </a:p>
-        </p:txBody>
-      </p:sp>
-      <p:sp>
-        <p:nvSpPr>
-          <p:cNvPr id="42" name="Rectangle 41"/>
+              <a:t>Guidance + light regularization</a:t>
+            </a:r>
+          </a:p>
+        </p:txBody>
+      </p:sp>
+      <p:sp>
+        <p:nvSpPr>
+          <p:cNvPr id="96" name="Rectangle 95"/>
           <p:cNvSpPr/>
           <p:nvPr/>
         </p:nvSpPr>
         <p:spPr>
           <a:xfrm>
-            <a:off x="420624" y="4937760"/>
-            <a:ext cx="11173968" cy="16459"/>
+            <a:off x="429768" y="5157216"/>
+            <a:ext cx="11137392" cy="16459"/>
           </a:xfrm>
           <a:prstGeom prst="rect">
             <a:avLst/>
@@ -50551,14 +52773,14 @@
       </p:sp>
       <p:sp>
         <p:nvSpPr>
-          <p:cNvPr id="43" name="TextBox 42"/>
+          <p:cNvPr id="97" name="TextBox 96"/>
           <p:cNvSpPr txBox="1"/>
           <p:nvPr/>
         </p:nvSpPr>
         <p:spPr>
           <a:xfrm>
-            <a:off x="530352" y="5138928"/>
-            <a:ext cx="1874519" cy="274320"/>
+            <a:off x="566928" y="5330952"/>
+            <a:ext cx="1243584" cy="246888"/>
           </a:xfrm>
           <a:prstGeom prst="rect">
             <a:avLst/>
@@ -50566,7 +52788,7 @@
           <a:noFill/>
         </p:spPr>
         <p:txBody>
-          <a:bodyPr wrap="square" lIns="18288" rIns="18288" tIns="18288" bIns="18288" anchor="t">
+          <a:bodyPr wrap="square" lIns="0" rIns="0" tIns="0" bIns="0" anchor="t">
             <a:spAutoFit/>
           </a:bodyPr>
           <a:lstStyle/>
@@ -50577,27 +52799,27 @@
               </a:spcAft>
             </a:pPr>
             <a:r>
-              <a:rPr sz="1450" b="1" i="0">
+              <a:rPr sz="1250" b="1" i="0">
                 <a:solidFill>
                   <a:srgbClr val="082B55"/>
                 </a:solidFill>
                 <a:latin typeface="Arial"/>
               </a:rPr>
-              <a:t>Held-out real profiles</a:t>
-            </a:r>
-          </a:p>
-        </p:txBody>
-      </p:sp>
-      <p:sp>
-        <p:nvSpPr>
-          <p:cNvPr id="44" name="Right Arrow 43"/>
+              <a:t>All five arms</a:t>
+            </a:r>
+          </a:p>
+        </p:txBody>
+      </p:sp>
+      <p:sp>
+        <p:nvSpPr>
+          <p:cNvPr id="98" name="Right Arrow 97"/>
           <p:cNvSpPr/>
           <p:nvPr/>
         </p:nvSpPr>
         <p:spPr>
           <a:xfrm>
-            <a:off x="2542032" y="5184648"/>
-            <a:ext cx="365760" cy="219456"/>
+            <a:off x="1947672" y="5367528"/>
+            <a:ext cx="310896" cy="173736"/>
           </a:xfrm>
           <a:prstGeom prst="rightArrow">
             <a:avLst/>
@@ -50633,14 +52855,14 @@
       </p:sp>
       <p:sp>
         <p:nvSpPr>
-          <p:cNvPr id="45" name="TextBox 44"/>
+          <p:cNvPr id="99" name="TextBox 98"/>
           <p:cNvSpPr txBox="1"/>
           <p:nvPr/>
         </p:nvSpPr>
         <p:spPr>
           <a:xfrm>
-            <a:off x="3090672" y="5138928"/>
-            <a:ext cx="1938528" cy="274320"/>
+            <a:off x="2432304" y="5321808"/>
+            <a:ext cx="1828800" cy="274320"/>
           </a:xfrm>
           <a:prstGeom prst="rect">
             <a:avLst/>
@@ -50648,7 +52870,7 @@
           <a:noFill/>
         </p:spPr>
         <p:txBody>
-          <a:bodyPr wrap="square" lIns="18288" rIns="18288" tIns="18288" bIns="18288" anchor="t">
+          <a:bodyPr wrap="square" lIns="0" rIns="0" tIns="0" bIns="0" anchor="t">
             <a:spAutoFit/>
           </a:bodyPr>
           <a:lstStyle/>
@@ -50659,27 +52881,27 @@
               </a:spcAft>
             </a:pPr>
             <a:r>
-              <a:rPr sz="1330" b="1" i="0">
-                <a:solidFill>
-                  <a:srgbClr val="263746"/>
-                </a:solidFill>
-                <a:latin typeface="Arial"/>
-              </a:rPr>
-              <a:t>BA  |  AUROC  |  AP</a:t>
-            </a:r>
-          </a:p>
-        </p:txBody>
-      </p:sp>
-      <p:sp>
-        <p:nvSpPr>
-          <p:cNvPr id="46" name="Right Arrow 45"/>
+              <a:rPr sz="1250" b="1" i="0">
+                <a:solidFill>
+                  <a:srgbClr val="2D6496"/>
+                </a:solidFill>
+                <a:latin typeface="Arial"/>
+              </a:rPr>
+              <a:t>Held-out real profiles</a:t>
+            </a:r>
+          </a:p>
+        </p:txBody>
+      </p:sp>
+      <p:sp>
+        <p:nvSpPr>
+          <p:cNvPr id="100" name="Right Arrow 99"/>
           <p:cNvSpPr/>
           <p:nvPr/>
         </p:nvSpPr>
         <p:spPr>
           <a:xfrm>
-            <a:off x="5193792" y="5184648"/>
-            <a:ext cx="365760" cy="219456"/>
+            <a:off x="4416552" y="5367528"/>
+            <a:ext cx="310896" cy="173736"/>
           </a:xfrm>
           <a:prstGeom prst="rightArrow">
             <a:avLst/>
@@ -50715,14 +52937,14 @@
       </p:sp>
       <p:sp>
         <p:nvSpPr>
-          <p:cNvPr id="47" name="TextBox 46"/>
+          <p:cNvPr id="101" name="TextBox 100"/>
           <p:cNvSpPr txBox="1"/>
           <p:nvPr/>
         </p:nvSpPr>
         <p:spPr>
           <a:xfrm>
-            <a:off x="5742432" y="5111496"/>
-            <a:ext cx="3520440" cy="310896"/>
+            <a:off x="4910328" y="5330952"/>
+            <a:ext cx="1719072" cy="246888"/>
           </a:xfrm>
           <a:prstGeom prst="rect">
             <a:avLst/>
@@ -50730,7 +52952,7 @@
           <a:noFill/>
         </p:spPr>
         <p:txBody>
-          <a:bodyPr wrap="square" lIns="18288" rIns="18288" tIns="18288" bIns="18288" anchor="t">
+          <a:bodyPr wrap="square" lIns="0" rIns="0" tIns="0" bIns="0" anchor="t">
             <a:spAutoFit/>
           </a:bodyPr>
           <a:lstStyle/>
@@ -50741,7 +52963,89 @@
               </a:spcAft>
             </a:pPr>
             <a:r>
-              <a:rPr sz="1400" b="1" i="0">
+              <a:rPr sz="1220" b="1" i="0">
+                <a:solidFill>
+                  <a:srgbClr val="263746"/>
+                </a:solidFill>
+                <a:latin typeface="Arial"/>
+              </a:rPr>
+              <a:t>BA  |  AUROC  |  AP</a:t>
+            </a:r>
+          </a:p>
+        </p:txBody>
+      </p:sp>
+      <p:sp>
+        <p:nvSpPr>
+          <p:cNvPr id="102" name="Right Arrow 101"/>
+          <p:cNvSpPr/>
+          <p:nvPr/>
+        </p:nvSpPr>
+        <p:spPr>
+          <a:xfrm>
+            <a:off x="6775704" y="5367528"/>
+            <a:ext cx="310896" cy="173736"/>
+          </a:xfrm>
+          <a:prstGeom prst="rightArrow">
+            <a:avLst/>
+          </a:prstGeom>
+          <a:solidFill>
+            <a:srgbClr val="8A969E"/>
+          </a:solidFill>
+          <a:ln>
+            <a:noFill/>
+          </a:ln>
+        </p:spPr>
+        <p:style>
+          <a:lnRef idx="1">
+            <a:schemeClr val="accent1"/>
+          </a:lnRef>
+          <a:fillRef idx="3">
+            <a:schemeClr val="accent1"/>
+          </a:fillRef>
+          <a:effectRef idx="2">
+            <a:schemeClr val="accent1"/>
+          </a:effectRef>
+          <a:fontRef idx="minor">
+            <a:schemeClr val="lt1"/>
+          </a:fontRef>
+        </p:style>
+        <p:txBody>
+          <a:bodyPr rtlCol="0" anchor="ctr"/>
+          <a:lstStyle/>
+          <a:p>
+            <a:pPr algn="ctr"/>
+          </a:p>
+        </p:txBody>
+      </p:sp>
+      <p:sp>
+        <p:nvSpPr>
+          <p:cNvPr id="103" name="TextBox 102"/>
+          <p:cNvSpPr txBox="1"/>
+          <p:nvPr/>
+        </p:nvSpPr>
+        <p:spPr>
+          <a:xfrm>
+            <a:off x="7242048" y="5303520"/>
+            <a:ext cx="4023360" cy="310896"/>
+          </a:xfrm>
+          <a:prstGeom prst="rect">
+            <a:avLst/>
+          </a:prstGeom>
+          <a:noFill/>
+        </p:spPr>
+        <p:txBody>
+          <a:bodyPr wrap="square" lIns="0" rIns="0" tIns="0" bIns="0" anchor="t">
+            <a:spAutoFit/>
+          </a:bodyPr>
+          <a:lstStyle/>
+          <a:p>
+            <a:pPr algn="ctr">
+              <a:spcAft>
+                <a:spcPts val="0"/>
+              </a:spcAft>
+            </a:pPr>
+            <a:r>
+              <a:rPr sz="1280" b="1" i="0">
                 <a:solidFill>
                   <a:srgbClr val="178681"/>
                 </a:solidFill>
@@ -50754,14 +53058,14 @@
       </p:sp>
       <p:sp>
         <p:nvSpPr>
-          <p:cNvPr id="48" name="Rectangle 47"/>
+          <p:cNvPr id="104" name="Rectangle 103"/>
           <p:cNvSpPr/>
           <p:nvPr/>
         </p:nvSpPr>
         <p:spPr>
           <a:xfrm>
-            <a:off x="420624" y="5632704"/>
-            <a:ext cx="11173968" cy="566928"/>
+            <a:off x="420624" y="5715000"/>
+            <a:ext cx="11173968" cy="530352"/>
           </a:xfrm>
           <a:prstGeom prst="rect">
             <a:avLst/>
@@ -50799,14 +53103,14 @@
       </p:sp>
       <p:sp>
         <p:nvSpPr>
-          <p:cNvPr id="49" name="TextBox 48"/>
+          <p:cNvPr id="105" name="TextBox 104"/>
           <p:cNvSpPr txBox="1"/>
           <p:nvPr/>
         </p:nvSpPr>
         <p:spPr>
           <a:xfrm>
-            <a:off x="676656" y="5779008"/>
-            <a:ext cx="1325880" cy="246888"/>
+            <a:off x="676656" y="5852160"/>
+            <a:ext cx="1426464" cy="228600"/>
           </a:xfrm>
           <a:prstGeom prst="rect">
             <a:avLst/>
@@ -50825,27 +53129,27 @@
               </a:spcAft>
             </a:pPr>
             <a:r>
-              <a:rPr sz="1450" b="1" i="0">
+              <a:rPr sz="1350" b="1" i="0">
                 <a:solidFill>
                   <a:srgbClr val="FFFFFF"/>
                 </a:solidFill>
                 <a:latin typeface="Arial"/>
               </a:rPr>
-              <a:t>Biology check</a:t>
-            </a:r>
-          </a:p>
-        </p:txBody>
-      </p:sp>
-      <p:sp>
-        <p:nvSpPr>
-          <p:cNvPr id="50" name="TextBox 49"/>
+              <a:t>Association test</a:t>
+            </a:r>
+          </a:p>
+        </p:txBody>
+      </p:sp>
+      <p:sp>
+        <p:nvSpPr>
+          <p:cNvPr id="106" name="TextBox 105"/>
           <p:cNvSpPr txBox="1"/>
           <p:nvPr/>
         </p:nvSpPr>
         <p:spPr>
           <a:xfrm>
-            <a:off x="2176272" y="5760720"/>
-            <a:ext cx="6172200" cy="265176"/>
+            <a:off x="2258568" y="5843016"/>
+            <a:ext cx="5852160" cy="246888"/>
           </a:xfrm>
           <a:prstGeom prst="rect">
             <a:avLst/>
@@ -50864,27 +53168,27 @@
               </a:spcAft>
             </a:pPr>
             <a:r>
-              <a:rPr sz="1360" b="0" i="0">
+              <a:rPr sz="1290" b="0" i="0">
                 <a:solidFill>
                   <a:srgbClr val="DCE7F2"/>
                 </a:solidFill>
                 <a:latin typeface="Arial"/>
               </a:rPr>
-              <a:t>FLT vs GC effects and BH FDR use observed OSDR profiles only.</a:t>
-            </a:r>
-          </a:p>
-        </p:txBody>
-      </p:sp>
-      <p:sp>
-        <p:nvSpPr>
-          <p:cNvPr id="51" name="TextBox 50"/>
+              <a:t>FLT vs GC effects and BH FDR use real OSDR profiles only.</a:t>
+            </a:r>
+          </a:p>
+        </p:txBody>
+      </p:sp>
+      <p:sp>
+        <p:nvSpPr>
+          <p:cNvPr id="107" name="TextBox 106"/>
           <p:cNvSpPr txBox="1"/>
           <p:nvPr/>
         </p:nvSpPr>
         <p:spPr>
           <a:xfrm>
-            <a:off x="8394192" y="5760720"/>
-            <a:ext cx="2871216" cy="265176"/>
+            <a:off x="8403336" y="5843016"/>
+            <a:ext cx="2862072" cy="246888"/>
           </a:xfrm>
           <a:prstGeom prst="rect">
             <a:avLst/>
@@ -50903,7 +53207,7 @@
               </a:spcAft>
             </a:pPr>
             <a:r>
-              <a:rPr sz="1180" b="1" i="0">
+              <a:rPr sz="1150" b="1" i="0">
                 <a:solidFill>
                   <a:srgbClr val="FFD69A"/>
                 </a:solidFill>
@@ -51167,14 +53471,53 @@
       </p:sp>
       <p:sp>
         <p:nvSpPr>
-          <p:cNvPr id="9" name="Rectangle 8"/>
+          <p:cNvPr id="9" name="TextBox 8"/>
+          <p:cNvSpPr txBox="1"/>
+          <p:nvPr/>
+        </p:nvSpPr>
+        <p:spPr>
+          <a:xfrm rot="16200000">
+            <a:off x="-256032" y="3977639"/>
+            <a:ext cx="1417320" cy="256032"/>
+          </a:xfrm>
+          <a:prstGeom prst="rect">
+            <a:avLst/>
+          </a:prstGeom>
+          <a:noFill/>
+        </p:spPr>
+        <p:txBody>
+          <a:bodyPr wrap="square" lIns="0" rIns="0" tIns="0" bIns="0" anchor="t">
+            <a:spAutoFit/>
+          </a:bodyPr>
+          <a:lstStyle/>
+          <a:p>
+            <a:pPr algn="ctr">
+              <a:spcAft>
+                <a:spcPts val="0"/>
+              </a:spcAft>
+            </a:pPr>
+            <a:r>
+              <a:rPr sz="1050" b="1" i="0">
+                <a:solidFill>
+                  <a:srgbClr val="59697A"/>
+                </a:solidFill>
+                <a:latin typeface="Arial"/>
+              </a:rPr>
+              <a:t>Balanced accuracy</a:t>
+            </a:r>
+          </a:p>
+        </p:txBody>
+      </p:sp>
+      <p:sp>
+        <p:nvSpPr>
+          <p:cNvPr id="10" name="Rectangle 9"/>
           <p:cNvSpPr/>
           <p:nvPr/>
         </p:nvSpPr>
         <p:spPr>
           <a:xfrm>
-            <a:off x="640080" y="5486400"/>
-            <a:ext cx="2633472" cy="10972"/>
+            <a:off x="877824" y="5486400"/>
+            <a:ext cx="2432304" cy="10972"/>
           </a:xfrm>
           <a:prstGeom prst="rect">
             <a:avLst/>
@@ -51210,13 +53553,13 @@
       </p:sp>
       <p:sp>
         <p:nvSpPr>
-          <p:cNvPr id="10" name="TextBox 9"/>
+          <p:cNvPr id="11" name="TextBox 10"/>
           <p:cNvSpPr txBox="1"/>
           <p:nvPr/>
         </p:nvSpPr>
         <p:spPr>
           <a:xfrm>
-            <a:off x="393192" y="5394960"/>
+            <a:off x="630936" y="5394960"/>
             <a:ext cx="201168" cy="182880"/>
           </a:xfrm>
           <a:prstGeom prst="rect">
@@ -51249,14 +53592,14 @@
       </p:sp>
       <p:sp>
         <p:nvSpPr>
-          <p:cNvPr id="11" name="Rectangle 10"/>
+          <p:cNvPr id="12" name="Rectangle 11"/>
           <p:cNvSpPr/>
           <p:nvPr/>
         </p:nvSpPr>
         <p:spPr>
           <a:xfrm>
-            <a:off x="640080" y="4114800"/>
-            <a:ext cx="2633472" cy="10972"/>
+            <a:off x="877824" y="4114800"/>
+            <a:ext cx="2432304" cy="10972"/>
           </a:xfrm>
           <a:prstGeom prst="rect">
             <a:avLst/>
@@ -51292,13 +53635,13 @@
       </p:sp>
       <p:sp>
         <p:nvSpPr>
-          <p:cNvPr id="12" name="TextBox 11"/>
+          <p:cNvPr id="13" name="TextBox 12"/>
           <p:cNvSpPr txBox="1"/>
           <p:nvPr/>
         </p:nvSpPr>
         <p:spPr>
           <a:xfrm>
-            <a:off x="393192" y="4023360"/>
+            <a:off x="630936" y="4023360"/>
             <a:ext cx="201168" cy="182880"/>
           </a:xfrm>
           <a:prstGeom prst="rect">
@@ -51331,14 +53674,14 @@
       </p:sp>
       <p:sp>
         <p:nvSpPr>
-          <p:cNvPr id="13" name="Rectangle 12"/>
+          <p:cNvPr id="14" name="Rectangle 13"/>
           <p:cNvSpPr/>
           <p:nvPr/>
         </p:nvSpPr>
         <p:spPr>
           <a:xfrm>
-            <a:off x="640080" y="2743200"/>
-            <a:ext cx="2633472" cy="10972"/>
+            <a:off x="877824" y="2743200"/>
+            <a:ext cx="2432304" cy="10972"/>
           </a:xfrm>
           <a:prstGeom prst="rect">
             <a:avLst/>
@@ -51374,13 +53717,13 @@
       </p:sp>
       <p:sp>
         <p:nvSpPr>
-          <p:cNvPr id="14" name="TextBox 13"/>
+          <p:cNvPr id="15" name="TextBox 14"/>
           <p:cNvSpPr txBox="1"/>
           <p:nvPr/>
         </p:nvSpPr>
         <p:spPr>
           <a:xfrm>
-            <a:off x="393192" y="2651760"/>
+            <a:off x="630936" y="2651760"/>
             <a:ext cx="201168" cy="182880"/>
           </a:xfrm>
           <a:prstGeom prst="rect">
@@ -51413,13 +53756,13 @@
       </p:sp>
       <p:sp>
         <p:nvSpPr>
-          <p:cNvPr id="15" name="Rectangle 14"/>
+          <p:cNvPr id="16" name="Rectangle 15"/>
           <p:cNvSpPr/>
           <p:nvPr/>
         </p:nvSpPr>
         <p:spPr>
           <a:xfrm>
-            <a:off x="713232" y="3418027"/>
+            <a:off x="950976" y="3418027"/>
             <a:ext cx="566928" cy="2068372"/>
           </a:xfrm>
           <a:prstGeom prst="rect">
@@ -51456,13 +53799,13 @@
       </p:sp>
       <p:sp>
         <p:nvSpPr>
-          <p:cNvPr id="16" name="TextBox 15"/>
+          <p:cNvPr id="17" name="TextBox 16"/>
           <p:cNvSpPr txBox="1"/>
           <p:nvPr/>
         </p:nvSpPr>
         <p:spPr>
           <a:xfrm>
-            <a:off x="640080" y="3097987"/>
+            <a:off x="877824" y="3097987"/>
             <a:ext cx="713232" cy="256032"/>
           </a:xfrm>
           <a:prstGeom prst="rect">
@@ -51495,14 +53838,14 @@
       </p:sp>
       <p:sp>
         <p:nvSpPr>
-          <p:cNvPr id="17" name="TextBox 16"/>
+          <p:cNvPr id="18" name="TextBox 17"/>
           <p:cNvSpPr txBox="1"/>
           <p:nvPr/>
         </p:nvSpPr>
         <p:spPr>
           <a:xfrm>
-            <a:off x="530352" y="5559552"/>
-            <a:ext cx="960120" cy="502920"/>
+            <a:off x="859536" y="5559552"/>
+            <a:ext cx="749808" cy="502920"/>
           </a:xfrm>
           <a:prstGeom prst="rect">
             <a:avLst/>
@@ -51521,26 +53864,27 @@
               </a:spcAft>
             </a:pPr>
             <a:r>
-              <a:rPr sz="1050" b="0" i="0">
+              <a:rPr sz="960" b="0" i="0">
                 <a:solidFill>
                   <a:srgbClr val="263746"/>
                 </a:solidFill>
                 <a:latin typeface="Arial"/>
               </a:rPr>
-              <a:t>Real only</a:t>
-            </a:r>
-          </a:p>
-        </p:txBody>
-      </p:sp>
-      <p:sp>
-        <p:nvSpPr>
-          <p:cNvPr id="18" name="Rectangle 17"/>
+              <a:t>Real
+only</a:t>
+            </a:r>
+          </a:p>
+        </p:txBody>
+      </p:sp>
+      <p:sp>
+        <p:nvSpPr>
+          <p:cNvPr id="19" name="Rectangle 18"/>
           <p:cNvSpPr/>
           <p:nvPr/>
         </p:nvSpPr>
         <p:spPr>
           <a:xfrm>
-            <a:off x="1591056" y="3579876"/>
+            <a:off x="1737360" y="3579876"/>
             <a:ext cx="566928" cy="1906524"/>
           </a:xfrm>
           <a:prstGeom prst="rect">
@@ -51577,13 +53921,13 @@
       </p:sp>
       <p:sp>
         <p:nvSpPr>
-          <p:cNvPr id="19" name="TextBox 18"/>
+          <p:cNvPr id="20" name="TextBox 19"/>
           <p:cNvSpPr txBox="1"/>
           <p:nvPr/>
         </p:nvSpPr>
         <p:spPr>
           <a:xfrm>
-            <a:off x="1517904" y="3259836"/>
+            <a:off x="1664207" y="3259836"/>
             <a:ext cx="713232" cy="256032"/>
           </a:xfrm>
           <a:prstGeom prst="rect">
@@ -51616,14 +53960,14 @@
       </p:sp>
       <p:sp>
         <p:nvSpPr>
-          <p:cNvPr id="20" name="TextBox 19"/>
+          <p:cNvPr id="21" name="TextBox 20"/>
           <p:cNvSpPr txBox="1"/>
           <p:nvPr/>
         </p:nvSpPr>
         <p:spPr>
           <a:xfrm>
-            <a:off x="1408176" y="5559552"/>
-            <a:ext cx="960120" cy="502920"/>
+            <a:off x="1645919" y="5559552"/>
+            <a:ext cx="749808" cy="502920"/>
           </a:xfrm>
           <a:prstGeom prst="rect">
             <a:avLst/>
@@ -51642,26 +53986,27 @@
               </a:spcAft>
             </a:pPr>
             <a:r>
-              <a:rPr sz="1050" b="0" i="0">
+              <a:rPr sz="960" b="0" i="0">
                 <a:solidFill>
                   <a:srgbClr val="263746"/>
                 </a:solidFill>
                 <a:latin typeface="Arial"/>
               </a:rPr>
-              <a:t>Generated only</a:t>
-            </a:r>
-          </a:p>
-        </p:txBody>
-      </p:sp>
-      <p:sp>
-        <p:nvSpPr>
-          <p:cNvPr id="21" name="Rectangle 20"/>
+              <a:t>Generated
+only</a:t>
+            </a:r>
+          </a:p>
+        </p:txBody>
+      </p:sp>
+      <p:sp>
+        <p:nvSpPr>
+          <p:cNvPr id="22" name="Rectangle 21"/>
           <p:cNvSpPr/>
           <p:nvPr/>
         </p:nvSpPr>
         <p:spPr>
           <a:xfrm>
-            <a:off x="2468880" y="3464661"/>
+            <a:off x="2523744" y="3464661"/>
             <a:ext cx="566928" cy="2021738"/>
           </a:xfrm>
           <a:prstGeom prst="rect">
@@ -51698,13 +54043,13 @@
       </p:sp>
       <p:sp>
         <p:nvSpPr>
-          <p:cNvPr id="22" name="TextBox 21"/>
+          <p:cNvPr id="23" name="TextBox 22"/>
           <p:cNvSpPr txBox="1"/>
           <p:nvPr/>
         </p:nvSpPr>
         <p:spPr>
           <a:xfrm>
-            <a:off x="2395728" y="3144621"/>
+            <a:off x="2450591" y="3144621"/>
             <a:ext cx="713232" cy="256032"/>
           </a:xfrm>
           <a:prstGeom prst="rect">
@@ -51737,14 +54082,14 @@
       </p:sp>
       <p:sp>
         <p:nvSpPr>
-          <p:cNvPr id="23" name="TextBox 22"/>
+          <p:cNvPr id="24" name="TextBox 23"/>
           <p:cNvSpPr txBox="1"/>
           <p:nvPr/>
         </p:nvSpPr>
         <p:spPr>
           <a:xfrm>
-            <a:off x="2286000" y="5559552"/>
-            <a:ext cx="960120" cy="502920"/>
+            <a:off x="2432303" y="5559552"/>
+            <a:ext cx="749808" cy="502920"/>
           </a:xfrm>
           <a:prstGeom prst="rect">
             <a:avLst/>
@@ -51763,27 +54108,28 @@
               </a:spcAft>
             </a:pPr>
             <a:r>
-              <a:rPr sz="1050" b="0" i="0">
+              <a:rPr sz="960" b="0" i="0">
                 <a:solidFill>
                   <a:srgbClr val="263746"/>
                 </a:solidFill>
                 <a:latin typeface="Arial"/>
               </a:rPr>
-              <a:t>Real + synth.</a:t>
-            </a:r>
-          </a:p>
-        </p:txBody>
-      </p:sp>
-      <p:sp>
-        <p:nvSpPr>
-          <p:cNvPr id="24" name="Rectangle 23"/>
+              <a:t>Real +
+synth.</a:t>
+            </a:r>
+          </a:p>
+        </p:txBody>
+      </p:sp>
+      <p:sp>
+        <p:nvSpPr>
+          <p:cNvPr id="25" name="Rectangle 24"/>
           <p:cNvSpPr/>
           <p:nvPr/>
         </p:nvSpPr>
         <p:spPr>
           <a:xfrm>
-            <a:off x="640080" y="5486400"/>
-            <a:ext cx="2633472" cy="18288"/>
+            <a:off x="877824" y="5486400"/>
+            <a:ext cx="2432304" cy="18288"/>
           </a:xfrm>
           <a:prstGeom prst="rect">
             <a:avLst/>
@@ -51814,45 +54160,6 @@
           <a:lstStyle/>
           <a:p>
             <a:pPr algn="ctr"/>
-          </a:p>
-        </p:txBody>
-      </p:sp>
-      <p:sp>
-        <p:nvSpPr>
-          <p:cNvPr id="25" name="TextBox 24"/>
-          <p:cNvSpPr txBox="1"/>
-          <p:nvPr/>
-        </p:nvSpPr>
-        <p:spPr>
-          <a:xfrm>
-            <a:off x="658368" y="2542032"/>
-            <a:ext cx="2542032" cy="228600"/>
-          </a:xfrm>
-          <a:prstGeom prst="rect">
-            <a:avLst/>
-          </a:prstGeom>
-          <a:noFill/>
-        </p:spPr>
-        <p:txBody>
-          <a:bodyPr wrap="square" lIns="18288" rIns="18288" tIns="18288" bIns="18288" anchor="t">
-            <a:spAutoFit/>
-          </a:bodyPr>
-          <a:lstStyle/>
-          <a:p>
-            <a:pPr algn="l">
-              <a:spcAft>
-                <a:spcPts val="0"/>
-              </a:spcAft>
-            </a:pPr>
-            <a:r>
-              <a:rPr sz="1250" b="0" i="0">
-                <a:solidFill>
-                  <a:srgbClr val="59697A"/>
-                </a:solidFill>
-                <a:latin typeface="Arial"/>
-              </a:rPr>
-              <a:t>Balanced accuracy (0-1)</a:t>
-            </a:r>
           </a:p>
         </p:txBody>
       </p:sp>
@@ -52247,7 +54554,7 @@
                 </a:solidFill>
                 <a:latin typeface="Arial"/>
               </a:rPr>
-              <a:t>Promoted and reinforced describe repeated feature selection; both require a supporting effect in real OSDR data.</a:t>
+              <a:t>Blue marks real-only selection; teal marks synthetic-guided selection. Every displayed association has real OSDR support.</a:t>
             </a:r>
           </a:p>
         </p:txBody>
@@ -52261,7 +54568,7 @@
         <p:spPr>
           <a:xfrm>
             <a:off x="566928" y="1847088"/>
-            <a:ext cx="4443984" cy="310896"/>
+            <a:ext cx="3931920" cy="274320"/>
           </a:xfrm>
           <a:prstGeom prst="rect">
             <a:avLst/>
@@ -52269,24 +54576,24 @@
           <a:noFill/>
         </p:spPr>
         <p:txBody>
-          <a:bodyPr wrap="square" lIns="18288" rIns="18288" tIns="18288" bIns="18288" anchor="t">
+          <a:bodyPr wrap="square" lIns="0" rIns="0" tIns="0" bIns="0" anchor="t">
             <a:spAutoFit/>
           </a:bodyPr>
           <a:lstStyle/>
           <a:p>
-            <a:pPr algn="ctr">
+            <a:pPr algn="l">
               <a:spcAft>
                 <a:spcPts val="0"/>
               </a:spcAft>
             </a:pPr>
             <a:r>
-              <a:rPr sz="1600" b="1" i="0">
-                <a:solidFill>
-                  <a:srgbClr val="59697A"/>
-                </a:solidFill>
-                <a:latin typeface="Arial"/>
-              </a:rPr>
-              <a:t>Repeated stable selection</a:t>
+              <a:rPr sz="1550" b="1" i="0">
+                <a:solidFill>
+                  <a:srgbClr val="082B55"/>
+                </a:solidFill>
+                <a:latin typeface="Arial"/>
+              </a:rPr>
+              <a:t>Stable selection after real-data support</a:t>
             </a:r>
           </a:p>
         </p:txBody>
@@ -52299,17 +54606,17 @@
         </p:nvSpPr>
         <p:spPr>
           <a:xfrm>
-            <a:off x="566928" y="2304288"/>
-            <a:ext cx="2743200" cy="2148840"/>
+            <a:off x="585216" y="2212848"/>
+            <a:ext cx="118872" cy="118872"/>
           </a:xfrm>
           <a:prstGeom prst="ellipse">
             <a:avLst/>
           </a:prstGeom>
-          <a:noFill/>
-          <a:ln w="30480">
-            <a:solidFill>
-              <a:srgbClr val="2D6496"/>
-            </a:solidFill>
+          <a:solidFill>
+            <a:srgbClr val="2D6496"/>
+          </a:solidFill>
+          <a:ln>
+            <a:noFill/>
           </a:ln>
         </p:spPr>
         <p:style>
@@ -52336,57 +54643,14 @@
       </p:sp>
       <p:sp>
         <p:nvSpPr>
-          <p:cNvPr id="9" name="Oval 8"/>
-          <p:cNvSpPr/>
-          <p:nvPr/>
-        </p:nvSpPr>
-        <p:spPr>
-          <a:xfrm>
-            <a:off x="2267712" y="2304288"/>
-            <a:ext cx="2743200" cy="2148840"/>
-          </a:xfrm>
-          <a:prstGeom prst="ellipse">
-            <a:avLst/>
-          </a:prstGeom>
-          <a:noFill/>
-          <a:ln w="30480">
-            <a:solidFill>
-              <a:srgbClr val="178681"/>
-            </a:solidFill>
-          </a:ln>
-        </p:spPr>
-        <p:style>
-          <a:lnRef idx="1">
-            <a:schemeClr val="accent1"/>
-          </a:lnRef>
-          <a:fillRef idx="3">
-            <a:schemeClr val="accent1"/>
-          </a:fillRef>
-          <a:effectRef idx="2">
-            <a:schemeClr val="accent1"/>
-          </a:effectRef>
-          <a:fontRef idx="minor">
-            <a:schemeClr val="lt1"/>
-          </a:fontRef>
-        </p:style>
-        <p:txBody>
-          <a:bodyPr rtlCol="0" anchor="ctr"/>
-          <a:lstStyle/>
-          <a:p>
-            <a:pPr algn="ctr"/>
-          </a:p>
-        </p:txBody>
-      </p:sp>
-      <p:sp>
-        <p:nvSpPr>
-          <p:cNvPr id="10" name="TextBox 9"/>
+          <p:cNvPr id="9" name="TextBox 8"/>
           <p:cNvSpPr txBox="1"/>
           <p:nvPr/>
         </p:nvSpPr>
         <p:spPr>
           <a:xfrm>
-            <a:off x="649224" y="2816352"/>
-            <a:ext cx="1609344" cy="265176"/>
+            <a:off x="786384" y="2157984"/>
+            <a:ext cx="2212848" cy="228600"/>
           </a:xfrm>
           <a:prstGeom prst="rect">
             <a:avLst/>
@@ -52399,354 +54663,35 @@
           </a:bodyPr>
           <a:lstStyle/>
           <a:p>
-            <a:pPr algn="ctr">
+            <a:pPr algn="l">
               <a:spcAft>
                 <a:spcPts val="0"/>
               </a:spcAft>
             </a:pPr>
             <a:r>
-              <a:rPr sz="1600" b="1" i="0">
+              <a:rPr sz="1050" b="1" i="0">
                 <a:solidFill>
                   <a:srgbClr val="2D6496"/>
                 </a:solidFill>
                 <a:latin typeface="Arial"/>
               </a:rPr>
-              <a:t>Real-only</a:t>
-            </a:r>
-          </a:p>
-        </p:txBody>
-      </p:sp>
-      <p:sp>
-        <p:nvSpPr>
-          <p:cNvPr id="11" name="TextBox 10"/>
-          <p:cNvSpPr txBox="1"/>
-          <p:nvPr/>
-        </p:nvSpPr>
-        <p:spPr>
-          <a:xfrm>
-            <a:off x="649224" y="3108960"/>
-            <a:ext cx="1609344" cy="265176"/>
-          </a:xfrm>
-          <a:prstGeom prst="rect">
-            <a:avLst/>
-          </a:prstGeom>
-          <a:noFill/>
-        </p:spPr>
-        <p:txBody>
-          <a:bodyPr wrap="square" lIns="0" rIns="0" tIns="0" bIns="0" anchor="t">
-            <a:spAutoFit/>
-          </a:bodyPr>
-          <a:lstStyle/>
-          <a:p>
-            <a:pPr algn="ctr">
-              <a:spcAft>
-                <a:spcPts val="0"/>
-              </a:spcAft>
-            </a:pPr>
-            <a:r>
-              <a:rPr sz="1600" b="1" i="0">
-                <a:solidFill>
-                  <a:srgbClr val="2D6496"/>
-                </a:solidFill>
-                <a:latin typeface="Arial"/>
-              </a:rPr>
-              <a:t>ranking</a:t>
-            </a:r>
-          </a:p>
-        </p:txBody>
-      </p:sp>
-      <p:sp>
-        <p:nvSpPr>
-          <p:cNvPr id="12" name="TextBox 11"/>
-          <p:cNvSpPr txBox="1"/>
-          <p:nvPr/>
-        </p:nvSpPr>
-        <p:spPr>
-          <a:xfrm>
-            <a:off x="3300984" y="2816352"/>
-            <a:ext cx="1719072" cy="265176"/>
-          </a:xfrm>
-          <a:prstGeom prst="rect">
-            <a:avLst/>
-          </a:prstGeom>
-          <a:noFill/>
-        </p:spPr>
-        <p:txBody>
-          <a:bodyPr wrap="square" lIns="0" rIns="0" tIns="0" bIns="0" anchor="t">
-            <a:spAutoFit/>
-          </a:bodyPr>
-          <a:lstStyle/>
-          <a:p>
-            <a:pPr algn="ctr">
-              <a:spcAft>
-                <a:spcPts val="0"/>
-              </a:spcAft>
-            </a:pPr>
-            <a:r>
-              <a:rPr sz="1350" b="1" i="0">
-                <a:solidFill>
-                  <a:srgbClr val="178681"/>
-                </a:solidFill>
-                <a:latin typeface="Arial"/>
-              </a:rPr>
-              <a:t>Synthetic-guided</a:t>
-            </a:r>
-          </a:p>
-        </p:txBody>
-      </p:sp>
-      <p:sp>
-        <p:nvSpPr>
-          <p:cNvPr id="13" name="TextBox 12"/>
-          <p:cNvSpPr txBox="1"/>
-          <p:nvPr/>
-        </p:nvSpPr>
-        <p:spPr>
-          <a:xfrm>
-            <a:off x="3300984" y="3108960"/>
-            <a:ext cx="1719072" cy="265176"/>
-          </a:xfrm>
-          <a:prstGeom prst="rect">
-            <a:avLst/>
-          </a:prstGeom>
-          <a:noFill/>
-        </p:spPr>
-        <p:txBody>
-          <a:bodyPr wrap="square" lIns="0" rIns="0" tIns="0" bIns="0" anchor="t">
-            <a:spAutoFit/>
-          </a:bodyPr>
-          <a:lstStyle/>
-          <a:p>
-            <a:pPr algn="ctr">
-              <a:spcAft>
-                <a:spcPts val="0"/>
-              </a:spcAft>
-            </a:pPr>
-            <a:r>
-              <a:rPr sz="1600" b="1" i="0">
-                <a:solidFill>
-                  <a:srgbClr val="178681"/>
-                </a:solidFill>
-                <a:latin typeface="Arial"/>
-              </a:rPr>
-              <a:t>ranking</a:t>
-            </a:r>
-          </a:p>
-        </p:txBody>
-      </p:sp>
-      <p:sp>
-        <p:nvSpPr>
-          <p:cNvPr id="14" name="TextBox 13"/>
-          <p:cNvSpPr txBox="1"/>
-          <p:nvPr/>
-        </p:nvSpPr>
-        <p:spPr>
-          <a:xfrm>
-            <a:off x="2304288" y="2999232"/>
-            <a:ext cx="969264" cy="219456"/>
-          </a:xfrm>
-          <a:prstGeom prst="rect">
-            <a:avLst/>
-          </a:prstGeom>
-          <a:noFill/>
-        </p:spPr>
-        <p:txBody>
-          <a:bodyPr wrap="square" lIns="0" rIns="0" tIns="0" bIns="0" anchor="t">
-            <a:spAutoFit/>
-          </a:bodyPr>
-          <a:lstStyle/>
-          <a:p>
-            <a:pPr algn="ctr">
-              <a:spcAft>
-                <a:spcPts val="0"/>
-              </a:spcAft>
-            </a:pPr>
-            <a:r>
-              <a:rPr sz="1200" b="1" i="0">
-                <a:solidFill>
-                  <a:srgbClr val="D37B00"/>
-                </a:solidFill>
-                <a:latin typeface="Arial"/>
-              </a:rPr>
-              <a:t>23</a:t>
-            </a:r>
-          </a:p>
-        </p:txBody>
-      </p:sp>
-      <p:sp>
-        <p:nvSpPr>
-          <p:cNvPr id="15" name="TextBox 14"/>
-          <p:cNvSpPr txBox="1"/>
-          <p:nvPr/>
-        </p:nvSpPr>
-        <p:spPr>
-          <a:xfrm>
-            <a:off x="2304288" y="3236976"/>
-            <a:ext cx="969264" cy="219456"/>
-          </a:xfrm>
-          <a:prstGeom prst="rect">
-            <a:avLst/>
-          </a:prstGeom>
-          <a:noFill/>
-        </p:spPr>
-        <p:txBody>
-          <a:bodyPr wrap="square" lIns="0" rIns="0" tIns="0" bIns="0" anchor="t">
-            <a:spAutoFit/>
-          </a:bodyPr>
-          <a:lstStyle/>
-          <a:p>
-            <a:pPr algn="ctr">
-              <a:spcAft>
-                <a:spcPts val="0"/>
-              </a:spcAft>
-            </a:pPr>
-            <a:r>
-              <a:rPr sz="1200" b="1" i="0">
-                <a:solidFill>
-                  <a:srgbClr val="D37B00"/>
-                </a:solidFill>
-                <a:latin typeface="Arial"/>
-              </a:rPr>
-              <a:t>reinforced</a:t>
-            </a:r>
-          </a:p>
-        </p:txBody>
-      </p:sp>
-      <p:sp>
-        <p:nvSpPr>
-          <p:cNvPr id="16" name="Rectangle 15"/>
+              <a:t>Blue: stable in real-only ranking</a:t>
+            </a:r>
+          </a:p>
+        </p:txBody>
+      </p:sp>
+      <p:sp>
+        <p:nvSpPr>
+          <p:cNvPr id="10" name="Oval 9"/>
           <p:cNvSpPr/>
           <p:nvPr/>
         </p:nvSpPr>
         <p:spPr>
           <a:xfrm>
-            <a:off x="3218688" y="4535424"/>
-            <a:ext cx="1700784" cy="713232"/>
-          </a:xfrm>
-          <a:prstGeom prst="rect">
-            <a:avLst/>
-          </a:prstGeom>
-          <a:solidFill>
-            <a:srgbClr val="E8F3F1"/>
-          </a:solidFill>
-          <a:ln w="10160">
-            <a:solidFill>
-              <a:srgbClr val="178681"/>
-            </a:solidFill>
-          </a:ln>
-        </p:spPr>
-        <p:style>
-          <a:lnRef idx="1">
-            <a:schemeClr val="accent1"/>
-          </a:lnRef>
-          <a:fillRef idx="3">
-            <a:schemeClr val="accent1"/>
-          </a:fillRef>
-          <a:effectRef idx="2">
-            <a:schemeClr val="accent1"/>
-          </a:effectRef>
-          <a:fontRef idx="minor">
-            <a:schemeClr val="lt1"/>
-          </a:fontRef>
-        </p:style>
-        <p:txBody>
-          <a:bodyPr rtlCol="0" anchor="ctr"/>
-          <a:lstStyle/>
-          <a:p>
-            <a:pPr algn="ctr"/>
-          </a:p>
-        </p:txBody>
-      </p:sp>
-      <p:sp>
-        <p:nvSpPr>
-          <p:cNvPr id="17" name="TextBox 16"/>
-          <p:cNvSpPr txBox="1"/>
-          <p:nvPr/>
-        </p:nvSpPr>
-        <p:spPr>
-          <a:xfrm>
-            <a:off x="3346704" y="4626864"/>
-            <a:ext cx="1444752" cy="219456"/>
-          </a:xfrm>
-          <a:prstGeom prst="rect">
-            <a:avLst/>
-          </a:prstGeom>
-          <a:noFill/>
-        </p:spPr>
-        <p:txBody>
-          <a:bodyPr wrap="square" lIns="18288" rIns="18288" tIns="18288" bIns="18288" anchor="t">
-            <a:spAutoFit/>
-          </a:bodyPr>
-          <a:lstStyle/>
-          <a:p>
-            <a:pPr algn="ctr">
-              <a:spcAft>
-                <a:spcPts val="0"/>
-              </a:spcAft>
-            </a:pPr>
-            <a:r>
-              <a:rPr sz="1350" b="1" i="0">
-                <a:solidFill>
-                  <a:srgbClr val="178681"/>
-                </a:solidFill>
-                <a:latin typeface="Arial"/>
-              </a:rPr>
-              <a:t>26 promoted</a:t>
-            </a:r>
-          </a:p>
-        </p:txBody>
-      </p:sp>
-      <p:sp>
-        <p:nvSpPr>
-          <p:cNvPr id="18" name="TextBox 17"/>
-          <p:cNvSpPr txBox="1"/>
-          <p:nvPr/>
-        </p:nvSpPr>
-        <p:spPr>
-          <a:xfrm>
-            <a:off x="3364992" y="4882896"/>
-            <a:ext cx="1408176" cy="292608"/>
-          </a:xfrm>
-          <a:prstGeom prst="rect">
-            <a:avLst/>
-          </a:prstGeom>
-          <a:noFill/>
-        </p:spPr>
-        <p:txBody>
-          <a:bodyPr wrap="square" lIns="18288" rIns="18288" tIns="18288" bIns="18288" anchor="t">
-            <a:spAutoFit/>
-          </a:bodyPr>
-          <a:lstStyle/>
-          <a:p>
-            <a:pPr algn="ctr">
-              <a:spcAft>
-                <a:spcPts val="0"/>
-              </a:spcAft>
-            </a:pPr>
-            <a:r>
-              <a:rPr sz="950" b="0" i="0">
-                <a:solidFill>
-                  <a:srgbClr val="59697A"/>
-                </a:solidFill>
-                <a:latin typeface="Arial"/>
-              </a:rPr>
-              <a:t>selected only with
-synthetic guidance</a:t>
-            </a:r>
-          </a:p>
-        </p:txBody>
-      </p:sp>
-      <p:sp>
-        <p:nvSpPr>
-          <p:cNvPr id="19" name="Right Arrow 18"/>
-          <p:cNvSpPr/>
-          <p:nvPr/>
-        </p:nvSpPr>
-        <p:spPr>
-          <a:xfrm>
-            <a:off x="5285232" y="3017520"/>
-            <a:ext cx="594360" cy="438912"/>
-          </a:xfrm>
-          <a:prstGeom prst="rightArrow">
+            <a:off x="3136392" y="2212848"/>
+            <a:ext cx="118872" cy="118872"/>
+          </a:xfrm>
+          <a:prstGeom prst="ellipse">
             <a:avLst/>
           </a:prstGeom>
           <a:solidFill>
@@ -52780,14 +54725,500 @@
       </p:sp>
       <p:sp>
         <p:nvSpPr>
-          <p:cNvPr id="20" name="Rectangle 19"/>
+          <p:cNvPr id="11" name="TextBox 10"/>
+          <p:cNvSpPr txBox="1"/>
+          <p:nvPr/>
+        </p:nvSpPr>
+        <p:spPr>
+          <a:xfrm>
+            <a:off x="3337560" y="2157984"/>
+            <a:ext cx="2724912" cy="228600"/>
+          </a:xfrm>
+          <a:prstGeom prst="rect">
+            <a:avLst/>
+          </a:prstGeom>
+          <a:noFill/>
+        </p:spPr>
+        <p:txBody>
+          <a:bodyPr wrap="square" lIns="0" rIns="0" tIns="0" bIns="0" anchor="t">
+            <a:spAutoFit/>
+          </a:bodyPr>
+          <a:lstStyle/>
+          <a:p>
+            <a:pPr algn="l">
+              <a:spcAft>
+                <a:spcPts val="0"/>
+              </a:spcAft>
+            </a:pPr>
+            <a:r>
+              <a:rPr sz="1050" b="1" i="0">
+                <a:solidFill>
+                  <a:srgbClr val="178681"/>
+                </a:solidFill>
+                <a:latin typeface="Arial"/>
+              </a:rPr>
+              <a:t>Teal: stable in synthetic-guided ranking</a:t>
+            </a:r>
+          </a:p>
+        </p:txBody>
+      </p:sp>
+      <p:sp>
+        <p:nvSpPr>
+          <p:cNvPr id="12" name="Oval 11"/>
           <p:cNvSpPr/>
           <p:nvPr/>
         </p:nvSpPr>
         <p:spPr>
           <a:xfrm>
-            <a:off x="6089904" y="2020824"/>
-            <a:ext cx="16459" cy="3383280"/>
+            <a:off x="566928" y="2542032"/>
+            <a:ext cx="3529584" cy="2542032"/>
+          </a:xfrm>
+          <a:prstGeom prst="ellipse">
+            <a:avLst/>
+          </a:prstGeom>
+          <a:solidFill>
+            <a:srgbClr val="2D6496">
+              <a:alpha val="18000"/>
+            </a:srgbClr>
+          </a:solidFill>
+          <a:ln w="33020">
+            <a:solidFill>
+              <a:srgbClr val="2D6496"/>
+            </a:solidFill>
+          </a:ln>
+        </p:spPr>
+        <p:style>
+          <a:lnRef idx="1">
+            <a:schemeClr val="accent1"/>
+          </a:lnRef>
+          <a:fillRef idx="3">
+            <a:schemeClr val="accent1"/>
+          </a:fillRef>
+          <a:effectRef idx="2">
+            <a:schemeClr val="accent1"/>
+          </a:effectRef>
+          <a:fontRef idx="minor">
+            <a:schemeClr val="lt1"/>
+          </a:fontRef>
+        </p:style>
+        <p:txBody>
+          <a:bodyPr rtlCol="0" anchor="ctr"/>
+          <a:lstStyle/>
+          <a:p>
+            <a:pPr algn="ctr"/>
+          </a:p>
+        </p:txBody>
+      </p:sp>
+      <p:sp>
+        <p:nvSpPr>
+          <p:cNvPr id="13" name="Oval 12"/>
+          <p:cNvSpPr/>
+          <p:nvPr/>
+        </p:nvSpPr>
+        <p:spPr>
+          <a:xfrm>
+            <a:off x="2743200" y="2542032"/>
+            <a:ext cx="3529584" cy="2542032"/>
+          </a:xfrm>
+          <a:prstGeom prst="ellipse">
+            <a:avLst/>
+          </a:prstGeom>
+          <a:solidFill>
+            <a:srgbClr val="178681">
+              <a:alpha val="20000"/>
+            </a:srgbClr>
+          </a:solidFill>
+          <a:ln w="33020">
+            <a:solidFill>
+              <a:srgbClr val="178681"/>
+            </a:solidFill>
+          </a:ln>
+        </p:spPr>
+        <p:style>
+          <a:lnRef idx="1">
+            <a:schemeClr val="accent1"/>
+          </a:lnRef>
+          <a:fillRef idx="3">
+            <a:schemeClr val="accent1"/>
+          </a:fillRef>
+          <a:effectRef idx="2">
+            <a:schemeClr val="accent1"/>
+          </a:effectRef>
+          <a:fontRef idx="minor">
+            <a:schemeClr val="lt1"/>
+          </a:fontRef>
+        </p:style>
+        <p:txBody>
+          <a:bodyPr rtlCol="0" anchor="ctr"/>
+          <a:lstStyle/>
+          <a:p>
+            <a:pPr algn="ctr"/>
+          </a:p>
+        </p:txBody>
+      </p:sp>
+      <p:sp>
+        <p:nvSpPr>
+          <p:cNvPr id="14" name="TextBox 13"/>
+          <p:cNvSpPr txBox="1"/>
+          <p:nvPr/>
+        </p:nvSpPr>
+        <p:spPr>
+          <a:xfrm>
+            <a:off x="1060704" y="3127248"/>
+            <a:ext cx="1298448" cy="438912"/>
+          </a:xfrm>
+          <a:prstGeom prst="rect">
+            <a:avLst/>
+          </a:prstGeom>
+          <a:noFill/>
+        </p:spPr>
+        <p:txBody>
+          <a:bodyPr wrap="square" lIns="0" rIns="0" tIns="0" bIns="0" anchor="t">
+            <a:spAutoFit/>
+          </a:bodyPr>
+          <a:lstStyle/>
+          <a:p>
+            <a:pPr algn="ctr">
+              <a:spcAft>
+                <a:spcPts val="0"/>
+              </a:spcAft>
+            </a:pPr>
+            <a:r>
+              <a:rPr sz="2900" b="1" i="0">
+                <a:solidFill>
+                  <a:srgbClr val="2D6496"/>
+                </a:solidFill>
+                <a:latin typeface="Arial"/>
+              </a:rPr>
+              <a:t>34</a:t>
+            </a:r>
+          </a:p>
+        </p:txBody>
+      </p:sp>
+      <p:sp>
+        <p:nvSpPr>
+          <p:cNvPr id="15" name="TextBox 14"/>
+          <p:cNvSpPr txBox="1"/>
+          <p:nvPr/>
+        </p:nvSpPr>
+        <p:spPr>
+          <a:xfrm>
+            <a:off x="1024128" y="3593592"/>
+            <a:ext cx="1371600" cy="274320"/>
+          </a:xfrm>
+          <a:prstGeom prst="rect">
+            <a:avLst/>
+          </a:prstGeom>
+          <a:noFill/>
+        </p:spPr>
+        <p:txBody>
+          <a:bodyPr wrap="square" lIns="0" rIns="0" tIns="0" bIns="0" anchor="t">
+            <a:spAutoFit/>
+          </a:bodyPr>
+          <a:lstStyle/>
+          <a:p>
+            <a:pPr algn="ctr">
+              <a:spcAft>
+                <a:spcPts val="0"/>
+              </a:spcAft>
+            </a:pPr>
+            <a:r>
+              <a:rPr sz="1450" b="1" i="0">
+                <a:solidFill>
+                  <a:srgbClr val="082B55"/>
+                </a:solidFill>
+                <a:latin typeface="Arial"/>
+              </a:rPr>
+              <a:t>real-only</a:t>
+            </a:r>
+          </a:p>
+        </p:txBody>
+      </p:sp>
+      <p:sp>
+        <p:nvSpPr>
+          <p:cNvPr id="16" name="TextBox 15"/>
+          <p:cNvSpPr txBox="1"/>
+          <p:nvPr/>
+        </p:nvSpPr>
+        <p:spPr>
+          <a:xfrm>
+            <a:off x="1024128" y="3913632"/>
+            <a:ext cx="1371600" cy="475488"/>
+          </a:xfrm>
+          <a:prstGeom prst="rect">
+            <a:avLst/>
+          </a:prstGeom>
+          <a:noFill/>
+        </p:spPr>
+        <p:txBody>
+          <a:bodyPr wrap="square" lIns="0" rIns="0" tIns="0" bIns="0" anchor="t">
+            <a:spAutoFit/>
+          </a:bodyPr>
+          <a:lstStyle/>
+          <a:p>
+            <a:pPr algn="ctr">
+              <a:spcAft>
+                <a:spcPts val="0"/>
+              </a:spcAft>
+            </a:pPr>
+            <a:r>
+              <a:rPr sz="1030" b="0" i="0">
+                <a:solidFill>
+                  <a:srgbClr val="59697A"/>
+                </a:solidFill>
+                <a:latin typeface="Arial"/>
+              </a:rPr>
+              <a:t>stable only in
+real ranking</a:t>
+            </a:r>
+          </a:p>
+        </p:txBody>
+      </p:sp>
+      <p:sp>
+        <p:nvSpPr>
+          <p:cNvPr id="17" name="TextBox 16"/>
+          <p:cNvSpPr txBox="1"/>
+          <p:nvPr/>
+        </p:nvSpPr>
+        <p:spPr>
+          <a:xfrm>
+            <a:off x="2889504" y="3127248"/>
+            <a:ext cx="1069848" cy="438912"/>
+          </a:xfrm>
+          <a:prstGeom prst="rect">
+            <a:avLst/>
+          </a:prstGeom>
+          <a:noFill/>
+        </p:spPr>
+        <p:txBody>
+          <a:bodyPr wrap="square" lIns="0" rIns="0" tIns="0" bIns="0" anchor="t">
+            <a:spAutoFit/>
+          </a:bodyPr>
+          <a:lstStyle/>
+          <a:p>
+            <a:pPr algn="ctr">
+              <a:spcAft>
+                <a:spcPts val="0"/>
+              </a:spcAft>
+            </a:pPr>
+            <a:r>
+              <a:rPr sz="2900" b="1" i="0">
+                <a:solidFill>
+                  <a:srgbClr val="D37B00"/>
+                </a:solidFill>
+                <a:latin typeface="Arial"/>
+              </a:rPr>
+              <a:t>23</a:t>
+            </a:r>
+          </a:p>
+        </p:txBody>
+      </p:sp>
+      <p:sp>
+        <p:nvSpPr>
+          <p:cNvPr id="18" name="TextBox 17"/>
+          <p:cNvSpPr txBox="1"/>
+          <p:nvPr/>
+        </p:nvSpPr>
+        <p:spPr>
+          <a:xfrm>
+            <a:off x="2834640" y="3593592"/>
+            <a:ext cx="1179576" cy="274320"/>
+          </a:xfrm>
+          <a:prstGeom prst="rect">
+            <a:avLst/>
+          </a:prstGeom>
+          <a:noFill/>
+        </p:spPr>
+        <p:txBody>
+          <a:bodyPr wrap="square" lIns="0" rIns="0" tIns="0" bIns="0" anchor="t">
+            <a:spAutoFit/>
+          </a:bodyPr>
+          <a:lstStyle/>
+          <a:p>
+            <a:pPr algn="ctr">
+              <a:spcAft>
+                <a:spcPts val="0"/>
+              </a:spcAft>
+            </a:pPr>
+            <a:r>
+              <a:rPr sz="1320" b="1" i="0">
+                <a:solidFill>
+                  <a:srgbClr val="082B55"/>
+                </a:solidFill>
+                <a:latin typeface="Arial"/>
+              </a:rPr>
+              <a:t>reinforced</a:t>
+            </a:r>
+          </a:p>
+        </p:txBody>
+      </p:sp>
+      <p:sp>
+        <p:nvSpPr>
+          <p:cNvPr id="19" name="TextBox 18"/>
+          <p:cNvSpPr txBox="1"/>
+          <p:nvPr/>
+        </p:nvSpPr>
+        <p:spPr>
+          <a:xfrm>
+            <a:off x="2807208" y="3913632"/>
+            <a:ext cx="1225296" cy="274320"/>
+          </a:xfrm>
+          <a:prstGeom prst="rect">
+            <a:avLst/>
+          </a:prstGeom>
+          <a:noFill/>
+        </p:spPr>
+        <p:txBody>
+          <a:bodyPr wrap="square" lIns="0" rIns="0" tIns="0" bIns="0" anchor="t">
+            <a:spAutoFit/>
+          </a:bodyPr>
+          <a:lstStyle/>
+          <a:p>
+            <a:pPr algn="ctr">
+              <a:spcAft>
+                <a:spcPts val="0"/>
+              </a:spcAft>
+            </a:pPr>
+            <a:r>
+              <a:rPr sz="1030" b="0" i="0">
+                <a:solidFill>
+                  <a:srgbClr val="59697A"/>
+                </a:solidFill>
+                <a:latin typeface="Arial"/>
+              </a:rPr>
+              <a:t>stable in both</a:t>
+            </a:r>
+          </a:p>
+        </p:txBody>
+      </p:sp>
+      <p:sp>
+        <p:nvSpPr>
+          <p:cNvPr id="20" name="TextBox 19"/>
+          <p:cNvSpPr txBox="1"/>
+          <p:nvPr/>
+        </p:nvSpPr>
+        <p:spPr>
+          <a:xfrm>
+            <a:off x="4471416" y="3127248"/>
+            <a:ext cx="1371600" cy="438912"/>
+          </a:xfrm>
+          <a:prstGeom prst="rect">
+            <a:avLst/>
+          </a:prstGeom>
+          <a:noFill/>
+        </p:spPr>
+        <p:txBody>
+          <a:bodyPr wrap="square" lIns="0" rIns="0" tIns="0" bIns="0" anchor="t">
+            <a:spAutoFit/>
+          </a:bodyPr>
+          <a:lstStyle/>
+          <a:p>
+            <a:pPr algn="ctr">
+              <a:spcAft>
+                <a:spcPts val="0"/>
+              </a:spcAft>
+            </a:pPr>
+            <a:r>
+              <a:rPr sz="2900" b="1" i="0">
+                <a:solidFill>
+                  <a:srgbClr val="178681"/>
+                </a:solidFill>
+                <a:latin typeface="Arial"/>
+              </a:rPr>
+              <a:t>26</a:t>
+            </a:r>
+          </a:p>
+        </p:txBody>
+      </p:sp>
+      <p:sp>
+        <p:nvSpPr>
+          <p:cNvPr id="21" name="TextBox 20"/>
+          <p:cNvSpPr txBox="1"/>
+          <p:nvPr/>
+        </p:nvSpPr>
+        <p:spPr>
+          <a:xfrm>
+            <a:off x="4471416" y="3593592"/>
+            <a:ext cx="1371600" cy="274320"/>
+          </a:xfrm>
+          <a:prstGeom prst="rect">
+            <a:avLst/>
+          </a:prstGeom>
+          <a:noFill/>
+        </p:spPr>
+        <p:txBody>
+          <a:bodyPr wrap="square" lIns="0" rIns="0" tIns="0" bIns="0" anchor="t">
+            <a:spAutoFit/>
+          </a:bodyPr>
+          <a:lstStyle/>
+          <a:p>
+            <a:pPr algn="ctr">
+              <a:spcAft>
+                <a:spcPts val="0"/>
+              </a:spcAft>
+            </a:pPr>
+            <a:r>
+              <a:rPr sz="1450" b="1" i="0">
+                <a:solidFill>
+                  <a:srgbClr val="082B55"/>
+                </a:solidFill>
+                <a:latin typeface="Arial"/>
+              </a:rPr>
+              <a:t>promoted</a:t>
+            </a:r>
+          </a:p>
+        </p:txBody>
+      </p:sp>
+      <p:sp>
+        <p:nvSpPr>
+          <p:cNvPr id="22" name="TextBox 21"/>
+          <p:cNvSpPr txBox="1"/>
+          <p:nvPr/>
+        </p:nvSpPr>
+        <p:spPr>
+          <a:xfrm>
+            <a:off x="4443984" y="3913632"/>
+            <a:ext cx="1426464" cy="475488"/>
+          </a:xfrm>
+          <a:prstGeom prst="rect">
+            <a:avLst/>
+          </a:prstGeom>
+          <a:noFill/>
+        </p:spPr>
+        <p:txBody>
+          <a:bodyPr wrap="square" lIns="0" rIns="0" tIns="0" bIns="0" anchor="t">
+            <a:spAutoFit/>
+          </a:bodyPr>
+          <a:lstStyle/>
+          <a:p>
+            <a:pPr algn="ctr">
+              <a:spcAft>
+                <a:spcPts val="0"/>
+              </a:spcAft>
+            </a:pPr>
+            <a:r>
+              <a:rPr sz="1030" b="0" i="0">
+                <a:solidFill>
+                  <a:srgbClr val="59697A"/>
+                </a:solidFill>
+                <a:latin typeface="Arial"/>
+              </a:rPr>
+              <a:t>stable only with
+synthetic guidance</a:t>
+            </a:r>
+          </a:p>
+        </p:txBody>
+      </p:sp>
+      <p:sp>
+        <p:nvSpPr>
+          <p:cNvPr id="23" name="Rectangle 22"/>
+          <p:cNvSpPr/>
+          <p:nvPr/>
+        </p:nvSpPr>
+        <p:spPr>
+          <a:xfrm>
+            <a:off x="6565392" y="1920240"/>
+            <a:ext cx="16459" cy="3639312"/>
           </a:xfrm>
           <a:prstGeom prst="rect">
             <a:avLst/>
@@ -52823,14 +55254,14 @@
       </p:sp>
       <p:sp>
         <p:nvSpPr>
-          <p:cNvPr id="21" name="TextBox 20"/>
+          <p:cNvPr id="24" name="TextBox 23"/>
           <p:cNvSpPr txBox="1"/>
           <p:nvPr/>
         </p:nvSpPr>
         <p:spPr>
           <a:xfrm>
-            <a:off x="6419088" y="2240280"/>
-            <a:ext cx="4846320" cy="365760"/>
+            <a:off x="6885432" y="2221992"/>
+            <a:ext cx="4498848" cy="365760"/>
           </a:xfrm>
           <a:prstGeom prst="rect">
             <a:avLst/>
@@ -52855,20 +55286,20 @@
                 </a:solidFill>
                 <a:latin typeface="Arial"/>
               </a:rPr>
-              <a:t>Real OSDR association test</a:t>
-            </a:r>
-          </a:p>
-        </p:txBody>
-      </p:sp>
-      <p:sp>
-        <p:nvSpPr>
-          <p:cNvPr id="22" name="Oval 21"/>
+              <a:t>Real OSDR evidence gate</a:t>
+            </a:r>
+          </a:p>
+        </p:txBody>
+      </p:sp>
+      <p:sp>
+        <p:nvSpPr>
+          <p:cNvPr id="25" name="Oval 24"/>
           <p:cNvSpPr/>
           <p:nvPr/>
         </p:nvSpPr>
         <p:spPr>
           <a:xfrm>
-            <a:off x="6601968" y="3017520"/>
+            <a:off x="7068312" y="3017520"/>
             <a:ext cx="91440" cy="91440"/>
           </a:xfrm>
           <a:prstGeom prst="ellipse">
@@ -52905,14 +55336,14 @@
       </p:sp>
       <p:sp>
         <p:nvSpPr>
-          <p:cNvPr id="23" name="TextBox 22"/>
+          <p:cNvPr id="26" name="TextBox 25"/>
           <p:cNvSpPr txBox="1"/>
           <p:nvPr/>
         </p:nvSpPr>
         <p:spPr>
           <a:xfrm>
-            <a:off x="6766559" y="2907792"/>
-            <a:ext cx="4361688" cy="530352"/>
+            <a:off x="7232904" y="2907792"/>
+            <a:ext cx="3886200" cy="557784"/>
           </a:xfrm>
           <a:prstGeom prst="rect">
             <a:avLst/>
@@ -52931,7 +55362,7 @@
               </a:spcAft>
             </a:pPr>
             <a:r>
-              <a:rPr sz="1500" b="0" i="0">
+              <a:rPr sz="1420" b="0" i="0">
                 <a:solidFill>
                   <a:srgbClr val="263746"/>
                 </a:solidFill>
@@ -52944,13 +55375,13 @@
       </p:sp>
       <p:sp>
         <p:nvSpPr>
-          <p:cNvPr id="24" name="Oval 23"/>
+          <p:cNvPr id="27" name="Oval 26"/>
           <p:cNvSpPr/>
           <p:nvPr/>
         </p:nvSpPr>
         <p:spPr>
           <a:xfrm>
-            <a:off x="6601968" y="3547872"/>
+            <a:off x="7068312" y="3575304"/>
             <a:ext cx="91440" cy="91440"/>
           </a:xfrm>
           <a:prstGeom prst="ellipse">
@@ -52987,14 +55418,14 @@
       </p:sp>
       <p:sp>
         <p:nvSpPr>
-          <p:cNvPr id="25" name="TextBox 24"/>
+          <p:cNvPr id="28" name="TextBox 27"/>
           <p:cNvSpPr txBox="1"/>
           <p:nvPr/>
         </p:nvSpPr>
         <p:spPr>
           <a:xfrm>
-            <a:off x="6766559" y="3438144"/>
-            <a:ext cx="4361688" cy="530352"/>
+            <a:off x="7232904" y="3465576"/>
+            <a:ext cx="3886200" cy="557784"/>
           </a:xfrm>
           <a:prstGeom prst="rect">
             <a:avLst/>
@@ -53013,7 +55444,7 @@
               </a:spcAft>
             </a:pPr>
             <a:r>
-              <a:rPr sz="1500" b="0" i="0">
+              <a:rPr sz="1420" b="0" i="0">
                 <a:solidFill>
                   <a:srgbClr val="263746"/>
                 </a:solidFill>
@@ -53026,13 +55457,13 @@
       </p:sp>
       <p:sp>
         <p:nvSpPr>
-          <p:cNvPr id="26" name="Oval 25"/>
+          <p:cNvPr id="29" name="Oval 28"/>
           <p:cNvSpPr/>
           <p:nvPr/>
         </p:nvSpPr>
         <p:spPr>
           <a:xfrm>
-            <a:off x="6601968" y="4078224"/>
+            <a:off x="7068312" y="4133088"/>
             <a:ext cx="91440" cy="91440"/>
           </a:xfrm>
           <a:prstGeom prst="ellipse">
@@ -53069,14 +55500,14 @@
       </p:sp>
       <p:sp>
         <p:nvSpPr>
-          <p:cNvPr id="27" name="TextBox 26"/>
+          <p:cNvPr id="30" name="TextBox 29"/>
           <p:cNvSpPr txBox="1"/>
           <p:nvPr/>
         </p:nvSpPr>
         <p:spPr>
           <a:xfrm>
-            <a:off x="6766559" y="3968496"/>
-            <a:ext cx="4361688" cy="530352"/>
+            <a:off x="7232904" y="4023360"/>
+            <a:ext cx="3886200" cy="557784"/>
           </a:xfrm>
           <a:prstGeom prst="rect">
             <a:avLst/>
@@ -53095,7 +55526,7 @@
               </a:spcAft>
             </a:pPr>
             <a:r>
-              <a:rPr sz="1500" b="0" i="0">
+              <a:rPr sz="1420" b="0" i="0">
                 <a:solidFill>
                   <a:srgbClr val="263746"/>
                 </a:solidFill>
@@ -53108,14 +55539,14 @@
       </p:sp>
       <p:sp>
         <p:nvSpPr>
-          <p:cNvPr id="28" name="Rectangle 27"/>
+          <p:cNvPr id="31" name="Rectangle 30"/>
           <p:cNvSpPr/>
           <p:nvPr/>
         </p:nvSpPr>
         <p:spPr>
           <a:xfrm>
-            <a:off x="6547104" y="4681728"/>
-            <a:ext cx="4572000" cy="475488"/>
+            <a:off x="7022592" y="4700016"/>
+            <a:ext cx="4078224" cy="713232"/>
           </a:xfrm>
           <a:prstGeom prst="rect">
             <a:avLst/>
@@ -53153,14 +55584,14 @@
       </p:sp>
       <p:sp>
         <p:nvSpPr>
-          <p:cNvPr id="29" name="TextBox 28"/>
+          <p:cNvPr id="32" name="TextBox 31"/>
           <p:cNvSpPr txBox="1"/>
           <p:nvPr/>
         </p:nvSpPr>
         <p:spPr>
           <a:xfrm>
-            <a:off x="6711696" y="4764024"/>
-            <a:ext cx="4251960" cy="265176"/>
+            <a:off x="7223760" y="4809744"/>
+            <a:ext cx="3675887" cy="219456"/>
           </a:xfrm>
           <a:prstGeom prst="rect">
             <a:avLst/>
@@ -53168,7 +55599,7 @@
           <a:noFill/>
         </p:spPr>
         <p:txBody>
-          <a:bodyPr wrap="square" lIns="18288" rIns="18288" tIns="18288" bIns="18288" anchor="t">
+          <a:bodyPr wrap="square" lIns="0" rIns="0" tIns="0" bIns="0" anchor="t">
             <a:spAutoFit/>
           </a:bodyPr>
           <a:lstStyle/>
@@ -53179,7 +55610,46 @@
               </a:spcAft>
             </a:pPr>
             <a:r>
-              <a:rPr sz="1600" b="1" i="0">
+              <a:rPr sz="1150" b="1" i="0">
+                <a:solidFill>
+                  <a:srgbClr val="BFD0E1"/>
+                </a:solidFill>
+                <a:latin typeface="Arial"/>
+              </a:rPr>
+              <a:t>23 reinforced + 26 promoted</a:t>
+            </a:r>
+          </a:p>
+        </p:txBody>
+      </p:sp>
+      <p:sp>
+        <p:nvSpPr>
+          <p:cNvPr id="33" name="TextBox 32"/>
+          <p:cNvSpPr txBox="1"/>
+          <p:nvPr/>
+        </p:nvSpPr>
+        <p:spPr>
+          <a:xfrm>
+            <a:off x="7205472" y="5047488"/>
+            <a:ext cx="3712463" cy="256032"/>
+          </a:xfrm>
+          <a:prstGeom prst="rect">
+            <a:avLst/>
+          </a:prstGeom>
+          <a:noFill/>
+        </p:spPr>
+        <p:txBody>
+          <a:bodyPr wrap="square" lIns="0" rIns="0" tIns="0" bIns="0" anchor="t">
+            <a:spAutoFit/>
+          </a:bodyPr>
+          <a:lstStyle/>
+          <a:p>
+            <a:pPr algn="ctr">
+              <a:spcAft>
+                <a:spcPts val="0"/>
+              </a:spcAft>
+            </a:pPr>
+            <a:r>
+              <a:rPr sz="1550" b="1" i="0">
                 <a:solidFill>
                   <a:srgbClr val="FFFFFF"/>
                 </a:solidFill>
@@ -53192,13 +55662,13 @@
       </p:sp>
       <p:sp>
         <p:nvSpPr>
-          <p:cNvPr id="30" name="Rectangle 29"/>
+          <p:cNvPr id="34" name="Rectangle 33"/>
           <p:cNvSpPr/>
           <p:nvPr/>
         </p:nvSpPr>
         <p:spPr>
           <a:xfrm>
-            <a:off x="475488" y="5650992"/>
+            <a:off x="475488" y="5724144"/>
             <a:ext cx="11109960" cy="16459"/>
           </a:xfrm>
           <a:prstGeom prst="rect">
@@ -53235,14 +55705,14 @@
       </p:sp>
       <p:sp>
         <p:nvSpPr>
-          <p:cNvPr id="31" name="TextBox 30"/>
+          <p:cNvPr id="35" name="TextBox 34"/>
           <p:cNvSpPr txBox="1"/>
           <p:nvPr/>
         </p:nvSpPr>
         <p:spPr>
           <a:xfrm>
-            <a:off x="658368" y="5769864"/>
-            <a:ext cx="10744200" cy="274320"/>
+            <a:off x="658368" y="5843016"/>
+            <a:ext cx="10744200" cy="237744"/>
           </a:xfrm>
           <a:prstGeom prst="rect">
             <a:avLst/>
@@ -53261,13 +55731,52 @@
               </a:spcAft>
             </a:pPr>
             <a:r>
-              <a:rPr sz="1350" b="0" i="0">
+              <a:rPr sz="1260" b="0" i="0">
                 <a:solidFill>
                   <a:srgbClr val="59697A"/>
                 </a:solidFill>
                 <a:latin typeface="Arial"/>
               </a:rPr>
-              <a:t>These are 49 tissue-gene associations among 459 BH-FDR rows. A gene can appear in more than one tissue.</a:t>
+              <a:t>The 34 real-only associations remain real-data findings; synthetic guidance did not reinforce them.</a:t>
+            </a:r>
+          </a:p>
+        </p:txBody>
+      </p:sp>
+      <p:sp>
+        <p:nvSpPr>
+          <p:cNvPr id="36" name="TextBox 35"/>
+          <p:cNvSpPr txBox="1"/>
+          <p:nvPr/>
+        </p:nvSpPr>
+        <p:spPr>
+          <a:xfrm>
+            <a:off x="329184" y="6510528"/>
+            <a:ext cx="10972800" cy="173736"/>
+          </a:xfrm>
+          <a:prstGeom prst="rect">
+            <a:avLst/>
+          </a:prstGeom>
+          <a:noFill/>
+        </p:spPr>
+        <p:txBody>
+          <a:bodyPr wrap="square" lIns="18288" rIns="18288" tIns="18288" bIns="18288" anchor="ctr">
+            <a:spAutoFit/>
+          </a:bodyPr>
+          <a:lstStyle/>
+          <a:p>
+            <a:pPr algn="l">
+              <a:spcAft>
+                <a:spcPts val="0"/>
+              </a:spcAft>
+            </a:pPr>
+            <a:r>
+              <a:rPr sz="720" b="0" i="0">
+                <a:solidFill>
+                  <a:srgbClr val="8A969E"/>
+                </a:solidFill>
+                <a:latin typeface="Arial"/>
+              </a:rPr>
+              <a:t>Counts are tissue-gene associations after BH FDR and compatible real-effect direction; genes may recur across tissues.</a:t>
             </a:r>
           </a:p>
         </p:txBody>

--- a/presentation/SLSTP_2026_Generative_Transcriptomics.pptx
+++ b/presentation/SLSTP_2026_Generative_Transcriptomics.pptx
@@ -54942,8 +54942,8 @@
         </p:nvSpPr>
         <p:spPr>
           <a:xfrm>
-            <a:off x="1024128" y="3913632"/>
-            <a:ext cx="1371600" cy="475488"/>
+            <a:off x="941832" y="3941063"/>
+            <a:ext cx="1536192" cy="219456"/>
           </a:xfrm>
           <a:prstGeom prst="rect">
             <a:avLst/>
@@ -54962,14 +54962,13 @@
               </a:spcAft>
             </a:pPr>
             <a:r>
-              <a:rPr sz="1030" b="0" i="0">
-                <a:solidFill>
-                  <a:srgbClr val="59697A"/>
-                </a:solidFill>
-                <a:latin typeface="Arial"/>
-              </a:rPr>
-              <a:t>stable only in
-real ranking</a:t>
+              <a:rPr sz="919" b="1" i="0">
+                <a:solidFill>
+                  <a:srgbClr val="2D6496"/>
+                </a:solidFill>
+                <a:latin typeface="Arial"/>
+              </a:rPr>
+              <a:t>WITHOUT GUIDANCE</a:t>
             </a:r>
           </a:p>
         </p:txBody>
@@ -55060,8 +55059,8 @@
         </p:nvSpPr>
         <p:spPr>
           <a:xfrm>
-            <a:off x="2807208" y="3913632"/>
-            <a:ext cx="1225296" cy="274320"/>
+            <a:off x="2779776" y="3941063"/>
+            <a:ext cx="1280160" cy="219456"/>
           </a:xfrm>
           <a:prstGeom prst="rect">
             <a:avLst/>
@@ -55080,13 +55079,13 @@
               </a:spcAft>
             </a:pPr>
             <a:r>
-              <a:rPr sz="1030" b="0" i="0">
-                <a:solidFill>
-                  <a:srgbClr val="59697A"/>
-                </a:solidFill>
-                <a:latin typeface="Arial"/>
-              </a:rPr>
-              <a:t>stable in both</a:t>
+              <a:rPr sz="919" b="1" i="0">
+                <a:solidFill>
+                  <a:srgbClr val="D37B00"/>
+                </a:solidFill>
+                <a:latin typeface="Arial"/>
+              </a:rPr>
+              <a:t>BOTH RANKINGS</a:t>
             </a:r>
           </a:p>
         </p:txBody>
@@ -55177,8 +55176,8 @@
         </p:nvSpPr>
         <p:spPr>
           <a:xfrm>
-            <a:off x="4443984" y="3913632"/>
-            <a:ext cx="1426464" cy="475488"/>
+            <a:off x="4389120" y="3941063"/>
+            <a:ext cx="1536192" cy="219456"/>
           </a:xfrm>
           <a:prstGeom prst="rect">
             <a:avLst/>
@@ -55197,14 +55196,13 @@
               </a:spcAft>
             </a:pPr>
             <a:r>
-              <a:rPr sz="1030" b="0" i="0">
-                <a:solidFill>
-                  <a:srgbClr val="59697A"/>
-                </a:solidFill>
-                <a:latin typeface="Arial"/>
-              </a:rPr>
-              <a:t>stable only with
-synthetic guidance</a:t>
+              <a:rPr sz="919" b="1" i="0">
+                <a:solidFill>
+                  <a:srgbClr val="178681"/>
+                </a:solidFill>
+                <a:latin typeface="Arial"/>
+              </a:rPr>
+              <a:t>GUIDANCE ONLY</a:t>
             </a:r>
           </a:p>
         </p:txBody>
@@ -55299,7 +55297,7 @@
         </p:nvSpPr>
         <p:spPr>
           <a:xfrm>
-            <a:off x="7068312" y="3017520"/>
+            <a:off x="7123176" y="2999232"/>
             <a:ext cx="91440" cy="91440"/>
           </a:xfrm>
           <a:prstGeom prst="ellipse">
@@ -55342,8 +55340,8 @@
         </p:nvSpPr>
         <p:spPr>
           <a:xfrm>
-            <a:off x="7232904" y="2907792"/>
-            <a:ext cx="3886200" cy="557784"/>
+            <a:off x="7360920" y="2907792"/>
+            <a:ext cx="3794760" cy="347472"/>
           </a:xfrm>
           <a:prstGeom prst="rect">
             <a:avLst/>
@@ -55351,7 +55349,7 @@
           <a:noFill/>
         </p:spPr>
         <p:txBody>
-          <a:bodyPr wrap="square" lIns="18288" rIns="18288" tIns="18288" bIns="18288" anchor="ctr">
+          <a:bodyPr wrap="square" lIns="0" rIns="0" tIns="0" bIns="0" anchor="t">
             <a:spAutoFit/>
           </a:bodyPr>
           <a:lstStyle/>
@@ -55381,7 +55379,7 @@
         </p:nvSpPr>
         <p:spPr>
           <a:xfrm>
-            <a:off x="7068312" y="3575304"/>
+            <a:off x="7123176" y="3584448"/>
             <a:ext cx="91440" cy="91440"/>
           </a:xfrm>
           <a:prstGeom prst="ellipse">
@@ -55424,8 +55422,8 @@
         </p:nvSpPr>
         <p:spPr>
           <a:xfrm>
-            <a:off x="7232904" y="3465576"/>
-            <a:ext cx="3886200" cy="557784"/>
+            <a:off x="7360920" y="3493008"/>
+            <a:ext cx="3794760" cy="530352"/>
           </a:xfrm>
           <a:prstGeom prst="rect">
             <a:avLst/>
@@ -55433,7 +55431,7 @@
           <a:noFill/>
         </p:spPr>
         <p:txBody>
-          <a:bodyPr wrap="square" lIns="18288" rIns="18288" tIns="18288" bIns="18288" anchor="ctr">
+          <a:bodyPr wrap="square" lIns="0" rIns="0" tIns="0" bIns="0" anchor="t">
             <a:spAutoFit/>
           </a:bodyPr>
           <a:lstStyle/>
@@ -55450,7 +55448,8 @@
                 </a:solidFill>
                 <a:latin typeface="Arial"/>
               </a:rPr>
-              <a:t>Combine accession effects with a random-effects model</a:t>
+              <a:t>Combine accession effects with a
+random-effects model</a:t>
             </a:r>
           </a:p>
         </p:txBody>
@@ -55463,7 +55462,7 @@
         </p:nvSpPr>
         <p:spPr>
           <a:xfrm>
-            <a:off x="7068312" y="4133088"/>
+            <a:off x="7123176" y="4325112"/>
             <a:ext cx="91440" cy="91440"/>
           </a:xfrm>
           <a:prstGeom prst="ellipse">
@@ -55506,8 +55505,8 @@
         </p:nvSpPr>
         <p:spPr>
           <a:xfrm>
-            <a:off x="7232904" y="4023360"/>
-            <a:ext cx="3886200" cy="557784"/>
+            <a:off x="7360920" y="4233672"/>
+            <a:ext cx="3794760" cy="347472"/>
           </a:xfrm>
           <a:prstGeom prst="rect">
             <a:avLst/>
@@ -55515,7 +55514,7 @@
           <a:noFill/>
         </p:spPr>
         <p:txBody>
-          <a:bodyPr wrap="square" lIns="18288" rIns="18288" tIns="18288" bIns="18288" anchor="ctr">
+          <a:bodyPr wrap="square" lIns="0" rIns="0" tIns="0" bIns="0" anchor="t">
             <a:spAutoFit/>
           </a:bodyPr>
           <a:lstStyle/>

--- a/presentation/SLSTP_2026_Generative_Transcriptomics.pptx
+++ b/presentation/SLSTP_2026_Generative_Transcriptomics.pptx
@@ -48900,7 +48900,7 @@
                 </a:solidFill>
                 <a:latin typeface="Arial"/>
               </a:rPr>
-              <a:t>Interpretation: tissue structure dominates; FLT and GC are subtler. PCA is descriptive, so quantitative metrics determine validation.</a:t>
+              <a:t>Tissues separate clearly here. Flight and ground-control samples overlap much more, so we test that difference statistically.</a:t>
             </a:r>
           </a:p>
         </p:txBody>
@@ -53762,7 +53762,7 @@
         </p:nvSpPr>
         <p:spPr>
           <a:xfrm>
-            <a:off x="950976" y="3418027"/>
+            <a:off x="905256" y="3418027"/>
             <a:ext cx="566928" cy="2068372"/>
           </a:xfrm>
           <a:prstGeom prst="rect">
@@ -53805,7 +53805,7 @@
         </p:nvSpPr>
         <p:spPr>
           <a:xfrm>
-            <a:off x="877824" y="3097987"/>
+            <a:off x="832104" y="3097987"/>
             <a:ext cx="713232" cy="256032"/>
           </a:xfrm>
           <a:prstGeom prst="rect">
@@ -53844,8 +53844,8 @@
         </p:nvSpPr>
         <p:spPr>
           <a:xfrm>
-            <a:off x="859536" y="5559552"/>
-            <a:ext cx="749808" cy="502920"/>
+            <a:off x="786384" y="5559552"/>
+            <a:ext cx="804672" cy="292608"/>
           </a:xfrm>
           <a:prstGeom prst="rect">
             <a:avLst/>
@@ -53853,7 +53853,7 @@
           <a:noFill/>
         </p:spPr>
         <p:txBody>
-          <a:bodyPr wrap="square" lIns="18288" rIns="18288" tIns="18288" bIns="18288" anchor="t">
+          <a:bodyPr wrap="square" lIns="0" rIns="0" tIns="0" bIns="0" anchor="t">
             <a:spAutoFit/>
           </a:bodyPr>
           <a:lstStyle/>
@@ -53864,14 +53864,13 @@
               </a:spcAft>
             </a:pPr>
             <a:r>
-              <a:rPr sz="960" b="0" i="0">
+              <a:rPr sz="900" b="0" i="0">
                 <a:solidFill>
                   <a:srgbClr val="263746"/>
                 </a:solidFill>
                 <a:latin typeface="Arial"/>
               </a:rPr>
-              <a:t>Real
-only</a:t>
+              <a:t>Real</a:t>
             </a:r>
           </a:p>
         </p:txBody>
@@ -53884,7 +53883,7 @@
         </p:nvSpPr>
         <p:spPr>
           <a:xfrm>
-            <a:off x="1737360" y="3579876"/>
+            <a:off x="1719072" y="3579876"/>
             <a:ext cx="566928" cy="1906524"/>
           </a:xfrm>
           <a:prstGeom prst="rect">
@@ -53927,7 +53926,7 @@
         </p:nvSpPr>
         <p:spPr>
           <a:xfrm>
-            <a:off x="1664207" y="3259836"/>
+            <a:off x="1645919" y="3259836"/>
             <a:ext cx="713232" cy="256032"/>
           </a:xfrm>
           <a:prstGeom prst="rect">
@@ -53966,8 +53965,8 @@
         </p:nvSpPr>
         <p:spPr>
           <a:xfrm>
-            <a:off x="1645919" y="5559552"/>
-            <a:ext cx="749808" cy="502920"/>
+            <a:off x="1600200" y="5559552"/>
+            <a:ext cx="804672" cy="292608"/>
           </a:xfrm>
           <a:prstGeom prst="rect">
             <a:avLst/>
@@ -53975,7 +53974,7 @@
           <a:noFill/>
         </p:spPr>
         <p:txBody>
-          <a:bodyPr wrap="square" lIns="18288" rIns="18288" tIns="18288" bIns="18288" anchor="t">
+          <a:bodyPr wrap="square" lIns="0" rIns="0" tIns="0" bIns="0" anchor="t">
             <a:spAutoFit/>
           </a:bodyPr>
           <a:lstStyle/>
@@ -53986,14 +53985,13 @@
               </a:spcAft>
             </a:pPr>
             <a:r>
-              <a:rPr sz="960" b="0" i="0">
+              <a:rPr sz="900" b="0" i="0">
                 <a:solidFill>
                   <a:srgbClr val="263746"/>
                 </a:solidFill>
                 <a:latin typeface="Arial"/>
               </a:rPr>
-              <a:t>Generated
-only</a:t>
+              <a:t>Generated</a:t>
             </a:r>
           </a:p>
         </p:txBody>
@@ -54006,7 +54004,7 @@
         </p:nvSpPr>
         <p:spPr>
           <a:xfrm>
-            <a:off x="2523744" y="3464661"/>
+            <a:off x="2532888" y="3464661"/>
             <a:ext cx="566928" cy="2021738"/>
           </a:xfrm>
           <a:prstGeom prst="rect">
@@ -54049,7 +54047,7 @@
         </p:nvSpPr>
         <p:spPr>
           <a:xfrm>
-            <a:off x="2450591" y="3144621"/>
+            <a:off x="2459736" y="3144621"/>
             <a:ext cx="713232" cy="256032"/>
           </a:xfrm>
           <a:prstGeom prst="rect">
@@ -54088,8 +54086,8 @@
         </p:nvSpPr>
         <p:spPr>
           <a:xfrm>
-            <a:off x="2432303" y="5559552"/>
-            <a:ext cx="749808" cy="502920"/>
+            <a:off x="2414016" y="5559552"/>
+            <a:ext cx="804672" cy="292608"/>
           </a:xfrm>
           <a:prstGeom prst="rect">
             <a:avLst/>
@@ -54097,7 +54095,7 @@
           <a:noFill/>
         </p:spPr>
         <p:txBody>
-          <a:bodyPr wrap="square" lIns="18288" rIns="18288" tIns="18288" bIns="18288" anchor="t">
+          <a:bodyPr wrap="square" lIns="0" rIns="0" tIns="0" bIns="0" anchor="t">
             <a:spAutoFit/>
           </a:bodyPr>
           <a:lstStyle/>
@@ -54108,14 +54106,13 @@
               </a:spcAft>
             </a:pPr>
             <a:r>
-              <a:rPr sz="960" b="0" i="0">
+              <a:rPr sz="900" b="0" i="0">
                 <a:solidFill>
                   <a:srgbClr val="263746"/>
                 </a:solidFill>
                 <a:latin typeface="Arial"/>
               </a:rPr>
-              <a:t>Real +
-synth.</a:t>
+              <a:t>Real + synth.</a:t>
             </a:r>
           </a:p>
         </p:txBody>

--- a/presentation/SLSTP_2026_Generative_Transcriptomics.pptx
+++ b/presentation/SLSTP_2026_Generative_Transcriptomics.pptx
@@ -50280,8 +50280,8 @@
         </p:nvSpPr>
         <p:spPr>
           <a:xfrm>
-            <a:off x="9290304" y="3355848"/>
-            <a:ext cx="384048" cy="256032"/>
+            <a:off x="9125712" y="3355848"/>
+            <a:ext cx="283464" cy="256032"/>
           </a:xfrm>
           <a:prstGeom prst="rightArrow">
             <a:avLst/>
@@ -50317,14 +50317,59 @@
       </p:sp>
       <p:sp>
         <p:nvSpPr>
-          <p:cNvPr id="72" name="TextBox 71"/>
+          <p:cNvPr id="72" name="Rectangle 71"/>
+          <p:cNvSpPr/>
+          <p:nvPr/>
+        </p:nvSpPr>
+        <p:spPr>
+          <a:xfrm>
+            <a:off x="9592056" y="3017520"/>
+            <a:ext cx="1828800" cy="1042415"/>
+          </a:xfrm>
+          <a:prstGeom prst="rect">
+            <a:avLst/>
+          </a:prstGeom>
+          <a:solidFill>
+            <a:srgbClr val="E9F1F7"/>
+          </a:solidFill>
+          <a:ln w="10160">
+            <a:solidFill>
+              <a:srgbClr val="D4E2EC"/>
+            </a:solidFill>
+          </a:ln>
+        </p:spPr>
+        <p:style>
+          <a:lnRef idx="1">
+            <a:schemeClr val="accent1"/>
+          </a:lnRef>
+          <a:fillRef idx="3">
+            <a:schemeClr val="accent1"/>
+          </a:fillRef>
+          <a:effectRef idx="2">
+            <a:schemeClr val="accent1"/>
+          </a:effectRef>
+          <a:fontRef idx="minor">
+            <a:schemeClr val="lt1"/>
+          </a:fontRef>
+        </p:style>
+        <p:txBody>
+          <a:bodyPr rtlCol="0" anchor="ctr"/>
+          <a:lstStyle/>
+          <a:p>
+            <a:pPr algn="ctr"/>
+          </a:p>
+        </p:txBody>
+      </p:sp>
+      <p:sp>
+        <p:nvSpPr>
+          <p:cNvPr id="73" name="TextBox 72"/>
           <p:cNvSpPr txBox="1"/>
           <p:nvPr/>
         </p:nvSpPr>
         <p:spPr>
           <a:xfrm>
-            <a:off x="9893808" y="3063240"/>
-            <a:ext cx="1060704" cy="246888"/>
+            <a:off x="9765792" y="3172968"/>
+            <a:ext cx="1490472" cy="164592"/>
           </a:xfrm>
           <a:prstGeom prst="rect">
             <a:avLst/>
@@ -50343,27 +50388,27 @@
               </a:spcAft>
             </a:pPr>
             <a:r>
-              <a:rPr sz="1350" b="1" i="0">
-                <a:solidFill>
-                  <a:srgbClr val="082B55"/>
-                </a:solidFill>
-                <a:latin typeface="Arial"/>
-              </a:rPr>
-              <a:t>genes</a:t>
-            </a:r>
-          </a:p>
-        </p:txBody>
-      </p:sp>
-      <p:sp>
-        <p:nvSpPr>
-          <p:cNvPr id="73" name="TextBox 72"/>
+              <a:rPr sz="919" b="1" i="0">
+                <a:solidFill>
+                  <a:srgbClr val="2D6496"/>
+                </a:solidFill>
+                <a:latin typeface="Arial"/>
+              </a:rPr>
+              <a:t>OUTPUT</a:t>
+            </a:r>
+          </a:p>
+        </p:txBody>
+      </p:sp>
+      <p:sp>
+        <p:nvSpPr>
+          <p:cNvPr id="74" name="TextBox 73"/>
           <p:cNvSpPr txBox="1"/>
           <p:nvPr/>
         </p:nvSpPr>
         <p:spPr>
           <a:xfrm>
-            <a:off x="9893808" y="3429000"/>
-            <a:ext cx="1353312" cy="246888"/>
+            <a:off x="9765792" y="3429000"/>
+            <a:ext cx="1490472" cy="493776"/>
           </a:xfrm>
           <a:prstGeom prst="rect">
             <a:avLst/>
@@ -50382,52 +50427,14 @@
               </a:spcAft>
             </a:pPr>
             <a:r>
-              <a:rPr sz="1350" b="1" i="0">
+              <a:rPr sz="1220" b="1" i="0">
                 <a:solidFill>
                   <a:srgbClr val="082B55"/>
                 </a:solidFill>
                 <a:latin typeface="Arial"/>
               </a:rPr>
-              <a:t>+ pathways</a:t>
-            </a:r>
-          </a:p>
-        </p:txBody>
-      </p:sp>
-      <p:sp>
-        <p:nvSpPr>
-          <p:cNvPr id="74" name="TextBox 73"/>
-          <p:cNvSpPr txBox="1"/>
-          <p:nvPr/>
-        </p:nvSpPr>
-        <p:spPr>
-          <a:xfrm>
-            <a:off x="9893808" y="3794760"/>
-            <a:ext cx="1417320" cy="219456"/>
-          </a:xfrm>
-          <a:prstGeom prst="rect">
-            <a:avLst/>
-          </a:prstGeom>
-          <a:noFill/>
-        </p:spPr>
-        <p:txBody>
-          <a:bodyPr wrap="square" lIns="0" rIns="0" tIns="0" bIns="0" anchor="t">
-            <a:spAutoFit/>
-          </a:bodyPr>
-          <a:lstStyle/>
-          <a:p>
-            <a:pPr algn="l">
-              <a:spcAft>
-                <a:spcPts val="0"/>
-              </a:spcAft>
-            </a:pPr>
-            <a:r>
-              <a:rPr sz="1100" b="0" i="0">
-                <a:solidFill>
-                  <a:srgbClr val="59697A"/>
-                </a:solidFill>
-                <a:latin typeface="Arial"/>
-              </a:rPr>
-              <a:t>for each tissue</a:t>
+              <a:t>Tissue-specific
+genes and pathways</a:t>
             </a:r>
           </a:p>
         </p:txBody>

--- a/presentation/SLSTP_2026_Generative_Transcriptomics.pptx
+++ b/presentation/SLSTP_2026_Generative_Transcriptomics.pptx
@@ -42083,7 +42083,7 @@
                 </a:solidFill>
                 <a:latin typeface="Arial"/>
               </a:rPr>
-              <a:t>Synthetic transcriptomics creates model-generated expression profiles</a:t>
+              <a:t>What is synthetic transcriptomics?</a:t>
             </a:r>
           </a:p>
         </p:txBody>
